--- a/assets/templates/GoetheanumVorlageA4.pptx
+++ b/assets/templates/GoetheanumVorlageA4.pptx
@@ -1,6 +1,6 @@
 
 <file path=ppt/presentation.xml><?xml version="1.0" encoding="utf-8"?>
-<p:presentation xmlns:a="http://schemas.openxmlformats.org/drawingml/2006/main" xmlns:r="http://schemas.openxmlformats.org/officeDocument/2006/relationships" xmlns:p="http://schemas.openxmlformats.org/presentationml/2006/main" saveSubsetFonts="0" embedTrueTypeFonts="1" autoCompressPictures="0">
+<p:presentation xmlns:a="http://schemas.openxmlformats.org/drawingml/2006/main" xmlns:r="http://schemas.openxmlformats.org/officeDocument/2006/relationships" xmlns:p="http://schemas.openxmlformats.org/presentationml/2006/main" saveSubsetFonts="1" autoCompressPictures="0">
   <p:sldMasterIdLst>
     <p:sldMasterId id="2147483648" r:id="rId1"/>
   </p:sldMasterIdLst>
@@ -26,24 +26,6 @@
   </p:notesMasterIdLst>
   <p:sldSz cx="10689336" cy="7562088"/>
   <p:notesSz cx="7562088" cy="10689336"/>
-  <p:embeddedFontLst>
-    <p:embeddedFont>
-      <p:font typeface="Goetheanum Schrift Klar"/>
-      <p:regular r:id="rId22"/>
-    </p:embeddedFont>
-    <p:embeddedFont>
-      <p:font typeface="Goetheanum Schrift Laut"/>
-      <p:regular r:id="rId23"/>
-    </p:embeddedFont>
-    <p:embeddedFont>
-      <p:font typeface="Goetheanum Schrift Leise"/>
-      <p:regular r:id="rId24"/>
-    </p:embeddedFont>
-    <p:embeddedFont>
-      <p:font typeface="Goetheanum Icons"/>
-      <p:regular r:id="rId25"/>
-    </p:embeddedFont>
-  </p:embeddedFontLst>
   <p:defaultTextStyle>
     <a:lvl1pPr marL="0" algn="l" defTabSz="914400" rtl="0" eaLnBrk="1" latinLnBrk="0" hangingPunct="1">
       <a:defRPr sz="1800" kern="1200">
@@ -2195,6 +2177,1702 @@
 </p:sldLayout>
 </file>
 
+<file path=ppt/slideLayouts/slideLayout2.xml><?xml version="1.0" encoding="utf-8"?>
+<p:sldLayout xmlns:a="http://schemas.openxmlformats.org/drawingml/2006/main" xmlns:r="http://schemas.openxmlformats.org/officeDocument/2006/relationships" xmlns:p="http://schemas.openxmlformats.org/presentationml/2006/main" preserve="1">
+  <p:cSld name="GOE Titel (blau)">
+    <p:bg>
+      <p:bgPr>
+        <a:solidFill>
+          <a:srgbClr val="005EB8"/>
+        </a:solidFill>
+      </p:bgPr>
+    </p:bg>
+    <p:spTree>
+      <p:nvGrpSpPr>
+        <p:cNvPr id="1" name=""/>
+        <p:cNvGrpSpPr/>
+        <p:nvPr/>
+      </p:nvGrpSpPr>
+      <p:grpSpPr>
+        <a:xfrm>
+          <a:off x="0" y="0"/>
+          <a:ext cx="0" cy="0"/>
+          <a:chOff x="0" y="0"/>
+          <a:chExt cx="0" cy="0"/>
+        </a:xfrm>
+      </p:grpSpPr>
+      <p:pic>
+        <p:nvPicPr>
+          <p:cNvPr id="2" name="Image 0" descr="Logo Goetheanum"/>
+          <p:cNvPicPr>
+            <a:picLocks noChangeAspect="1"/>
+          </p:cNvPicPr>
+          <p:nvPr/>
+        </p:nvPicPr>
+        <p:blipFill>
+          <a:blip r:embed="rId1"/>
+          <a:stretch>
+            <a:fillRect/>
+          </a:stretch>
+        </p:blipFill>
+        <p:spPr>
+          <a:xfrm>
+            <a:off x="548640" y="466344"/>
+            <a:ext cx="1850284" cy="310896"/>
+          </a:xfrm>
+          <a:prstGeom prst="rect">
+            <a:avLst/>
+          </a:prstGeom>
+        </p:spPr>
+      </p:pic>
+      <p:sp>
+        <p:nvSpPr>
+          <p:cNvPr id="3" name="Text 0"/>
+          <p:cNvSpPr/>
+          <p:nvPr>
+            <p:ph idx="101" type="title" hasCustomPrompt="1"/>
+          </p:nvPr>
+        </p:nvSpPr>
+        <p:spPr>
+          <a:xfrm>
+            <a:off x="2002536" y="2487168"/>
+            <a:ext cx="7680960" cy="1280160"/>
+          </a:xfrm>
+          <a:prstGeom prst="rect">
+            <a:avLst/>
+          </a:prstGeom>
+          <a:noFill/>
+          <a:ln/>
+        </p:spPr>
+        <p:txBody>
+          <a:bodyPr wrap="square" rtlCol="0"/>
+          <a:lstStyle>
+            <a:lvl1pPr indent="0" marL="0">
+              <a:buNone/>
+              <a:defRPr lang="en-US" sz="5000" dirty="0">
+                <a:solidFill>
+                  <a:srgbClr val="FFFFFF"/>
+                </a:solidFill>
+                <a:latin typeface="Goetheanum Schrift Klar" pitchFamily="34" charset="0"/>
+                <a:ea typeface="Goetheanum Schrift Klar" pitchFamily="34" charset="-122"/>
+                <a:cs typeface="Goetheanum Schrift Klar" pitchFamily="34" charset="-120"/>
+              </a:defRPr>
+            </a:lvl1pPr>
+          </a:lstStyle>
+          <a:p>
+            <a:pPr indent="0" marL="0">
+              <a:buNone/>
+            </a:pPr>
+            <a:r>
+              <a:rPr lang="en-US" sz="5000" dirty="0">
+                <a:solidFill>
+                  <a:srgbClr val="FFFFFF"/>
+                </a:solidFill>
+                <a:latin typeface="Goetheanum Schrift Klar" pitchFamily="34" charset="0"/>
+                <a:ea typeface="Goetheanum Schrift Klar" pitchFamily="34" charset="-122"/>
+                <a:cs typeface="Goetheanum Schrift Klar" pitchFamily="34" charset="-120"/>
+              </a:rPr>
+              <a:t>Titel der Präsentation</a:t>
+            </a:r>
+            <a:endParaRPr lang="en-US" sz="5000" dirty="0"/>
+          </a:p>
+        </p:txBody>
+      </p:sp>
+      <p:sp>
+        <p:nvSpPr>
+          <p:cNvPr id="4" name="Text 0"/>
+          <p:cNvSpPr/>
+          <p:nvPr>
+            <p:ph idx="102" type="body" hasCustomPrompt="1"/>
+          </p:nvPr>
+        </p:nvSpPr>
+        <p:spPr>
+          <a:xfrm>
+            <a:off x="2002536" y="3712464"/>
+            <a:ext cx="7680960" cy="548640"/>
+          </a:xfrm>
+          <a:prstGeom prst="rect">
+            <a:avLst/>
+          </a:prstGeom>
+          <a:noFill/>
+          <a:ln/>
+        </p:spPr>
+        <p:txBody>
+          <a:bodyPr wrap="square" rtlCol="0"/>
+          <a:lstStyle>
+            <a:lvl1pPr indent="0" marL="0">
+              <a:buNone/>
+              <a:defRPr lang="en-US" sz="2600" dirty="0">
+                <a:solidFill>
+                  <a:srgbClr val="BFD7F0"/>
+                </a:solidFill>
+                <a:latin typeface="Goetheanum Schrift Leise" pitchFamily="34" charset="0"/>
+                <a:ea typeface="Goetheanum Schrift Leise" pitchFamily="34" charset="-122"/>
+                <a:cs typeface="Goetheanum Schrift Leise" pitchFamily="34" charset="-120"/>
+              </a:defRPr>
+            </a:lvl1pPr>
+          </a:lstStyle>
+          <a:p>
+            <a:pPr indent="0" marL="0">
+              <a:buNone/>
+            </a:pPr>
+            <a:r>
+              <a:rPr lang="en-US" sz="2600" dirty="0">
+                <a:solidFill>
+                  <a:srgbClr val="BFD7F0"/>
+                </a:solidFill>
+                <a:latin typeface="Goetheanum Schrift Leise" pitchFamily="34" charset="0"/>
+                <a:ea typeface="Goetheanum Schrift Leise" pitchFamily="34" charset="-122"/>
+                <a:cs typeface="Goetheanum Schrift Leise" pitchFamily="34" charset="-120"/>
+              </a:rPr>
+              <a:t>Untertitel oder Anlass in einem Satz</a:t>
+            </a:r>
+            <a:endParaRPr lang="en-US" sz="2600" dirty="0"/>
+          </a:p>
+        </p:txBody>
+      </p:sp>
+      <p:sp>
+        <p:nvSpPr>
+          <p:cNvPr id="5" name="Text 0"/>
+          <p:cNvSpPr/>
+          <p:nvPr>
+            <p:ph idx="103" type="body" hasCustomPrompt="1"/>
+          </p:nvPr>
+        </p:nvSpPr>
+        <p:spPr>
+          <a:xfrm>
+            <a:off x="548640" y="6675120"/>
+            <a:ext cx="9592056" cy="320040"/>
+          </a:xfrm>
+          <a:prstGeom prst="rect">
+            <a:avLst/>
+          </a:prstGeom>
+          <a:noFill/>
+          <a:ln/>
+        </p:spPr>
+        <p:txBody>
+          <a:bodyPr wrap="square" rtlCol="0"/>
+          <a:lstStyle>
+            <a:lvl1pPr algn="r" indent="0" marL="0">
+              <a:buNone/>
+              <a:defRPr lang="en-US" sz="1300" dirty="0">
+                <a:solidFill>
+                  <a:srgbClr val="9CC3EC"/>
+                </a:solidFill>
+                <a:latin typeface="Goetheanum Schrift Klar" pitchFamily="34" charset="0"/>
+                <a:ea typeface="Goetheanum Schrift Klar" pitchFamily="34" charset="-122"/>
+                <a:cs typeface="Goetheanum Schrift Klar" pitchFamily="34" charset="-120"/>
+              </a:defRPr>
+            </a:lvl1pPr>
+          </a:lstStyle>
+          <a:p>
+            <a:pPr algn="r" indent="0" marL="0">
+              <a:buNone/>
+            </a:pPr>
+            <a:r>
+              <a:rPr lang="en-US" sz="1300" dirty="0">
+                <a:solidFill>
+                  <a:srgbClr val="9CC3EC"/>
+                </a:solidFill>
+                <a:latin typeface="Goetheanum Schrift Klar" pitchFamily="34" charset="0"/>
+                <a:ea typeface="Goetheanum Schrift Klar" pitchFamily="34" charset="-122"/>
+                <a:cs typeface="Goetheanum Schrift Klar" pitchFamily="34" charset="-120"/>
+              </a:rPr>
+              <a:t>Vorname Name · Bereich · 00.00.2026</a:t>
+            </a:r>
+            <a:endParaRPr lang="en-US" sz="1300" dirty="0"/>
+          </a:p>
+        </p:txBody>
+      </p:sp>
+    </p:spTree>
+  </p:cSld>
+  <p:clrMapOvr>
+    <a:masterClrMapping/>
+  </p:clrMapOvr>
+</p:sldLayout>
+</file>
+
+<file path=ppt/slideLayouts/slideLayout3.xml><?xml version="1.0" encoding="utf-8"?>
+<p:sldLayout xmlns:a="http://schemas.openxmlformats.org/drawingml/2006/main" xmlns:r="http://schemas.openxmlformats.org/officeDocument/2006/relationships" xmlns:p="http://schemas.openxmlformats.org/presentationml/2006/main" preserve="1">
+  <p:cSld name="GOE Trenner (blau)">
+    <p:bg>
+      <p:bgPr>
+        <a:solidFill>
+          <a:srgbClr val="005EB8"/>
+        </a:solidFill>
+      </p:bgPr>
+    </p:bg>
+    <p:spTree>
+      <p:nvGrpSpPr>
+        <p:cNvPr id="1" name=""/>
+        <p:cNvGrpSpPr/>
+        <p:nvPr/>
+      </p:nvGrpSpPr>
+      <p:grpSpPr>
+        <a:xfrm>
+          <a:off x="0" y="0"/>
+          <a:ext cx="0" cy="0"/>
+          <a:chOff x="0" y="0"/>
+          <a:chExt cx="0" cy="0"/>
+        </a:xfrm>
+      </p:grpSpPr>
+      <p:pic>
+        <p:nvPicPr>
+          <p:cNvPr id="2" name="Image 0" descr="Logo Goetheanum"/>
+          <p:cNvPicPr>
+            <a:picLocks noChangeAspect="1"/>
+          </p:cNvPicPr>
+          <p:nvPr/>
+        </p:nvPicPr>
+        <p:blipFill>
+          <a:blip r:embed="rId1"/>
+          <a:stretch>
+            <a:fillRect/>
+          </a:stretch>
+        </p:blipFill>
+        <p:spPr>
+          <a:xfrm>
+            <a:off x="548640" y="502920"/>
+            <a:ext cx="1088402" cy="182880"/>
+          </a:xfrm>
+          <a:prstGeom prst="rect">
+            <a:avLst/>
+          </a:prstGeom>
+        </p:spPr>
+      </p:pic>
+      <p:sp>
+        <p:nvSpPr>
+          <p:cNvPr id="3" name="Text 0"/>
+          <p:cNvSpPr/>
+          <p:nvPr/>
+        </p:nvSpPr>
+        <p:spPr>
+          <a:xfrm>
+            <a:off x="4654296" y="6995160"/>
+            <a:ext cx="5047488" cy="274320"/>
+          </a:xfrm>
+          <a:prstGeom prst="rect">
+            <a:avLst/>
+          </a:prstGeom>
+          <a:noFill/>
+          <a:ln/>
+        </p:spPr>
+        <p:txBody>
+          <a:bodyPr wrap="square" lIns="0" tIns="0" rIns="0" bIns="0" rtlCol="0" anchor="ctr"/>
+          <a:lstStyle/>
+          <a:p>
+            <a:pPr algn="r" indent="0" marL="0">
+              <a:buNone/>
+            </a:pPr>
+            <a:r>
+              <a:rPr lang="en-US" sz="900" dirty="0">
+                <a:solidFill>
+                  <a:srgbClr val="9CC3EC"/>
+                </a:solidFill>
+                <a:latin typeface="Goetheanum Schrift Klar" pitchFamily="34" charset="0"/>
+                <a:ea typeface="Goetheanum Schrift Klar" pitchFamily="34" charset="-122"/>
+                <a:cs typeface="Goetheanum Schrift Klar" pitchFamily="34" charset="-120"/>
+              </a:rPr>
+              <a:t>Titel der Präsentation · 00.00.2026 ·</a:t>
+            </a:r>
+            <a:endParaRPr lang="en-US" sz="900" dirty="0"/>
+          </a:p>
+        </p:txBody>
+      </p:sp>
+      <p:sp>
+        <p:nvSpPr>
+          <p:cNvPr id="4" name="Text 1"/>
+          <p:cNvSpPr/>
+          <p:nvPr>
+            <p:ph idx="102" type="body" hasCustomPrompt="1"/>
+          </p:nvPr>
+        </p:nvSpPr>
+        <p:spPr>
+          <a:xfrm>
+            <a:off x="3081528" y="1828800"/>
+            <a:ext cx="2743200" cy="1463040"/>
+          </a:xfrm>
+          <a:prstGeom prst="rect">
+            <a:avLst/>
+          </a:prstGeom>
+          <a:noFill/>
+          <a:ln/>
+        </p:spPr>
+        <p:txBody>
+          <a:bodyPr wrap="square" rtlCol="0"/>
+          <a:lstStyle>
+            <a:lvl1pPr indent="0" marL="0">
+              <a:buNone/>
+              <a:defRPr lang="en-US" sz="5000" dirty="0">
+                <a:solidFill>
+                  <a:srgbClr val="4D90D6"/>
+                </a:solidFill>
+                <a:latin typeface="Goetheanum Schrift Leise" pitchFamily="34" charset="0"/>
+                <a:ea typeface="Goetheanum Schrift Leise" pitchFamily="34" charset="-122"/>
+                <a:cs typeface="Goetheanum Schrift Leise" pitchFamily="34" charset="-120"/>
+              </a:defRPr>
+            </a:lvl1pPr>
+          </a:lstStyle>
+          <a:p>
+            <a:pPr indent="0" marL="0">
+              <a:buNone/>
+            </a:pPr>
+            <a:r>
+              <a:rPr lang="en-US" sz="5000" dirty="0">
+                <a:solidFill>
+                  <a:srgbClr val="4D90D6"/>
+                </a:solidFill>
+                <a:latin typeface="Goetheanum Schrift Leise" pitchFamily="34" charset="0"/>
+                <a:ea typeface="Goetheanum Schrift Leise" pitchFamily="34" charset="-122"/>
+                <a:cs typeface="Goetheanum Schrift Leise" pitchFamily="34" charset="-120"/>
+              </a:rPr>
+              <a:t>01</a:t>
+            </a:r>
+            <a:endParaRPr lang="en-US" sz="5000" dirty="0"/>
+          </a:p>
+        </p:txBody>
+      </p:sp>
+      <p:sp>
+        <p:nvSpPr>
+          <p:cNvPr id="5" name="Text 1"/>
+          <p:cNvSpPr/>
+          <p:nvPr>
+            <p:ph idx="103" type="title" hasCustomPrompt="1"/>
+          </p:nvPr>
+        </p:nvSpPr>
+        <p:spPr>
+          <a:xfrm>
+            <a:off x="3081528" y="3383280"/>
+            <a:ext cx="7059168" cy="640080"/>
+          </a:xfrm>
+          <a:prstGeom prst="rect">
+            <a:avLst/>
+          </a:prstGeom>
+          <a:noFill/>
+          <a:ln/>
+        </p:spPr>
+        <p:txBody>
+          <a:bodyPr wrap="square" rtlCol="0"/>
+          <a:lstStyle>
+            <a:lvl1pPr indent="0" marL="0">
+              <a:buNone/>
+              <a:defRPr lang="en-US" sz="2600" dirty="0">
+                <a:solidFill>
+                  <a:srgbClr val="FFFFFF"/>
+                </a:solidFill>
+                <a:latin typeface="Goetheanum Schrift Deutlich" pitchFamily="34" charset="0"/>
+                <a:ea typeface="Goetheanum Schrift Deutlich" pitchFamily="34" charset="-122"/>
+                <a:cs typeface="Goetheanum Schrift Deutlich" pitchFamily="34" charset="-120"/>
+              </a:defRPr>
+            </a:lvl1pPr>
+          </a:lstStyle>
+          <a:p>
+            <a:pPr indent="0" marL="0">
+              <a:buNone/>
+            </a:pPr>
+            <a:r>
+              <a:rPr lang="en-US" sz="2600" dirty="0">
+                <a:solidFill>
+                  <a:srgbClr val="FFFFFF"/>
+                </a:solidFill>
+                <a:latin typeface="Goetheanum Schrift Deutlich" pitchFamily="34" charset="0"/>
+                <a:ea typeface="Goetheanum Schrift Deutlich" pitchFamily="34" charset="-122"/>
+                <a:cs typeface="Goetheanum Schrift Deutlich" pitchFamily="34" charset="-120"/>
+              </a:rPr>
+              <a:t>Titel des Kapitels</a:t>
+            </a:r>
+            <a:endParaRPr lang="en-US" sz="2600" dirty="0"/>
+          </a:p>
+        </p:txBody>
+      </p:sp>
+      <p:sp>
+        <p:nvSpPr>
+          <p:cNvPr id="6" name="Text 1"/>
+          <p:cNvSpPr/>
+          <p:nvPr>
+            <p:ph idx="104" type="body" hasCustomPrompt="1"/>
+          </p:nvPr>
+        </p:nvSpPr>
+        <p:spPr>
+          <a:xfrm>
+            <a:off x="3081528" y="4114800"/>
+            <a:ext cx="6400800" cy="411480"/>
+          </a:xfrm>
+          <a:prstGeom prst="rect">
+            <a:avLst/>
+          </a:prstGeom>
+          <a:noFill/>
+          <a:ln/>
+        </p:spPr>
+        <p:txBody>
+          <a:bodyPr wrap="square" rtlCol="0"/>
+          <a:lstStyle>
+            <a:lvl1pPr indent="0" marL="0">
+              <a:buNone/>
+              <a:defRPr lang="en-US" sz="1800" dirty="0">
+                <a:solidFill>
+                  <a:srgbClr val="BFD7F0"/>
+                </a:solidFill>
+                <a:latin typeface="Goetheanum Schrift Leise" pitchFamily="34" charset="0"/>
+                <a:ea typeface="Goetheanum Schrift Leise" pitchFamily="34" charset="-122"/>
+                <a:cs typeface="Goetheanum Schrift Leise" pitchFamily="34" charset="-120"/>
+              </a:defRPr>
+            </a:lvl1pPr>
+          </a:lstStyle>
+          <a:p>
+            <a:pPr indent="0" marL="0">
+              <a:buNone/>
+            </a:pPr>
+            <a:r>
+              <a:rPr lang="en-US" sz="1800" dirty="0">
+                <a:solidFill>
+                  <a:srgbClr val="BFD7F0"/>
+                </a:solidFill>
+                <a:latin typeface="Goetheanum Schrift Leise" pitchFamily="34" charset="0"/>
+                <a:ea typeface="Goetheanum Schrift Leise" pitchFamily="34" charset="-122"/>
+                <a:cs typeface="Goetheanum Schrift Leise" pitchFamily="34" charset="-120"/>
+              </a:rPr>
+              <a:t>Ein Satz, der das Kapitel öffnet.</a:t>
+            </a:r>
+            <a:endParaRPr lang="en-US" sz="1800" dirty="0"/>
+          </a:p>
+        </p:txBody>
+      </p:sp>
+      <p:sp>
+        <p:nvSpPr>
+          <p:cNvPr id="25" name="Slide Number Placeholder 0"/>
+          <p:cNvSpPr>
+            <a:spLocks noGrp="1"/>
+          </p:cNvSpPr>
+          <p:nvPr>
+            <p:ph type="sldNum" sz="quarter" idx="4294967295"/>
+          </p:nvPr>
+        </p:nvSpPr>
+        <p:spPr>
+          <a:xfrm>
+            <a:off x="9747504" y="6995160"/>
+            <a:ext cx="393192" cy="274320"/>
+          </a:xfrm>
+          <a:prstGeom prst="rect">
+            <a:avLst/>
+          </a:prstGeom>
+          <a:extLst>
+            <a:ext uri="{C572A759-6A51-4108-AA02-DFA0A04FC94B}">
+              <ma14:wrappingTextBoxFlag xmlns:ma14="http://schemas.microsoft.com/office/mac/drawingml/2011/main" val="0"/>
+            </a:ext>
+          </a:extLst>
+        </p:spPr>
+        <p:txBody>
+          <a:bodyPr anchor="ctr"/>
+          <a:lstStyle>
+            <a:lvl1pPr>
+              <a:defRPr sz="900">
+                <a:solidFill>
+                  <a:srgbClr val="9CC3EC"/>
+                </a:solidFill>
+                <a:latin typeface="Goetheanum Schrift Klar"/>
+                <a:ea typeface="Goetheanum Schrift Klar"/>
+                <a:cs typeface="Goetheanum Schrift Klar"/>
+              </a:defRPr>
+            </a:lvl1pPr>
+          </a:lstStyle>
+          <a:p>
+            <a:pPr algn="l"/>
+            <a:fld id="{F7021451-1387-4CA6-816F-3879F97B5CBC}" type="slidenum">
+              <a:rPr b="0" lang="en-US"/>
+              <a:t>1003</a:t>
+            </a:fld>
+            <a:endParaRPr lang="en-US"/>
+          </a:p>
+        </p:txBody>
+      </p:sp>
+    </p:spTree>
+  </p:cSld>
+  <p:clrMapOvr>
+    <a:masterClrMapping/>
+  </p:clrMapOvr>
+</p:sldLayout>
+</file>
+
+<file path=ppt/slideLayouts/slideLayout4.xml><?xml version="1.0" encoding="utf-8"?>
+<p:sldLayout xmlns:a="http://schemas.openxmlformats.org/drawingml/2006/main" xmlns:r="http://schemas.openxmlformats.org/officeDocument/2006/relationships" xmlns:p="http://schemas.openxmlformats.org/presentationml/2006/main" preserve="1">
+  <p:cSld name="GOE Inhalt">
+    <p:bg>
+      <p:bgPr>
+        <a:solidFill>
+          <a:srgbClr val="FFFFFF"/>
+        </a:solidFill>
+      </p:bgPr>
+    </p:bg>
+    <p:spTree>
+      <p:nvGrpSpPr>
+        <p:cNvPr id="1" name=""/>
+        <p:cNvGrpSpPr/>
+        <p:nvPr/>
+      </p:nvGrpSpPr>
+      <p:grpSpPr>
+        <a:xfrm>
+          <a:off x="0" y="0"/>
+          <a:ext cx="0" cy="0"/>
+          <a:chOff x="0" y="0"/>
+          <a:chExt cx="0" cy="0"/>
+        </a:xfrm>
+      </p:grpSpPr>
+      <p:pic>
+        <p:nvPicPr>
+          <p:cNvPr id="2" name="Image 0" descr="Logo Goetheanum"/>
+          <p:cNvPicPr>
+            <a:picLocks noChangeAspect="1"/>
+          </p:cNvPicPr>
+          <p:nvPr/>
+        </p:nvPicPr>
+        <p:blipFill>
+          <a:blip r:embed="rId1"/>
+          <a:stretch>
+            <a:fillRect/>
+          </a:stretch>
+        </p:blipFill>
+        <p:spPr>
+          <a:xfrm>
+            <a:off x="548640" y="502920"/>
+            <a:ext cx="1088402" cy="182880"/>
+          </a:xfrm>
+          <a:prstGeom prst="rect">
+            <a:avLst/>
+          </a:prstGeom>
+        </p:spPr>
+      </p:pic>
+      <p:sp>
+        <p:nvSpPr>
+          <p:cNvPr id="3" name="Text 0"/>
+          <p:cNvSpPr/>
+          <p:nvPr/>
+        </p:nvSpPr>
+        <p:spPr>
+          <a:xfrm>
+            <a:off x="4654296" y="6995160"/>
+            <a:ext cx="5047488" cy="274320"/>
+          </a:xfrm>
+          <a:prstGeom prst="rect">
+            <a:avLst/>
+          </a:prstGeom>
+          <a:noFill/>
+          <a:ln/>
+        </p:spPr>
+        <p:txBody>
+          <a:bodyPr wrap="square" lIns="0" tIns="0" rIns="0" bIns="0" rtlCol="0" anchor="ctr"/>
+          <a:lstStyle/>
+          <a:p>
+            <a:pPr algn="r" indent="0" marL="0">
+              <a:buNone/>
+            </a:pPr>
+            <a:r>
+              <a:rPr lang="en-US" sz="900" dirty="0">
+                <a:solidFill>
+                  <a:srgbClr val="6B7480"/>
+                </a:solidFill>
+                <a:latin typeface="Goetheanum Schrift Klar" pitchFamily="34" charset="0"/>
+                <a:ea typeface="Goetheanum Schrift Klar" pitchFamily="34" charset="-122"/>
+                <a:cs typeface="Goetheanum Schrift Klar" pitchFamily="34" charset="-120"/>
+              </a:rPr>
+              <a:t>Titel der Präsentation · 00.00.2026 ·</a:t>
+            </a:r>
+            <a:endParaRPr lang="en-US" sz="900" dirty="0"/>
+          </a:p>
+        </p:txBody>
+      </p:sp>
+      <p:sp>
+        <p:nvSpPr>
+          <p:cNvPr id="4" name="Text 1"/>
+          <p:cNvSpPr/>
+          <p:nvPr>
+            <p:ph idx="102" type="body" hasCustomPrompt="1"/>
+          </p:nvPr>
+        </p:nvSpPr>
+        <p:spPr>
+          <a:xfrm>
+            <a:off x="548640" y="1143000"/>
+            <a:ext cx="4572000" cy="274320"/>
+          </a:xfrm>
+          <a:prstGeom prst="rect">
+            <a:avLst/>
+          </a:prstGeom>
+          <a:noFill/>
+          <a:ln/>
+        </p:spPr>
+        <p:txBody>
+          <a:bodyPr wrap="square" rtlCol="0"/>
+          <a:lstStyle>
+            <a:lvl1pPr indent="0" marL="0">
+              <a:buNone/>
+              <a:defRPr lang="en-US" sz="1300" dirty="0">
+                <a:solidFill>
+                  <a:srgbClr val="005EB8"/>
+                </a:solidFill>
+                <a:latin typeface="Goetheanum Schrift Klar" pitchFamily="34" charset="0"/>
+                <a:ea typeface="Goetheanum Schrift Klar" pitchFamily="34" charset="-122"/>
+                <a:cs typeface="Goetheanum Schrift Klar" pitchFamily="34" charset="-120"/>
+              </a:defRPr>
+            </a:lvl1pPr>
+          </a:lstStyle>
+          <a:p>
+            <a:pPr indent="0" marL="0">
+              <a:buNone/>
+            </a:pPr>
+            <a:r>
+              <a:rPr lang="en-US" sz="1300" dirty="0">
+                <a:solidFill>
+                  <a:srgbClr val="005EB8"/>
+                </a:solidFill>
+                <a:latin typeface="Goetheanum Schrift Klar" pitchFamily="34" charset="0"/>
+                <a:ea typeface="Goetheanum Schrift Klar" pitchFamily="34" charset="-122"/>
+                <a:cs typeface="Goetheanum Schrift Klar" pitchFamily="34" charset="-120"/>
+              </a:rPr>
+              <a:t>Kapitel</a:t>
+            </a:r>
+            <a:endParaRPr lang="en-US" sz="1300" dirty="0"/>
+          </a:p>
+        </p:txBody>
+      </p:sp>
+      <p:sp>
+        <p:nvSpPr>
+          <p:cNvPr id="5" name="Text 1"/>
+          <p:cNvSpPr/>
+          <p:nvPr>
+            <p:ph idx="103" type="title" hasCustomPrompt="1"/>
+          </p:nvPr>
+        </p:nvSpPr>
+        <p:spPr>
+          <a:xfrm>
+            <a:off x="548640" y="1463040"/>
+            <a:ext cx="9592056" cy="594360"/>
+          </a:xfrm>
+          <a:prstGeom prst="rect">
+            <a:avLst/>
+          </a:prstGeom>
+          <a:noFill/>
+          <a:ln/>
+        </p:spPr>
+        <p:txBody>
+          <a:bodyPr wrap="square" rtlCol="0"/>
+          <a:lstStyle>
+            <a:lvl1pPr indent="0" marL="0">
+              <a:buNone/>
+              <a:defRPr lang="en-US" sz="2600" dirty="0">
+                <a:solidFill>
+                  <a:srgbClr val="1A1A1A"/>
+                </a:solidFill>
+                <a:latin typeface="Goetheanum Schrift Deutlich" pitchFamily="34" charset="0"/>
+                <a:ea typeface="Goetheanum Schrift Deutlich" pitchFamily="34" charset="-122"/>
+                <a:cs typeface="Goetheanum Schrift Deutlich" pitchFamily="34" charset="-120"/>
+              </a:defRPr>
+            </a:lvl1pPr>
+          </a:lstStyle>
+          <a:p>
+            <a:pPr indent="0" marL="0">
+              <a:buNone/>
+            </a:pPr>
+            <a:r>
+              <a:rPr lang="en-US" sz="2600" dirty="0">
+                <a:solidFill>
+                  <a:srgbClr val="1A1A1A"/>
+                </a:solidFill>
+                <a:latin typeface="Goetheanum Schrift Deutlich" pitchFamily="34" charset="0"/>
+                <a:ea typeface="Goetheanum Schrift Deutlich" pitchFamily="34" charset="-122"/>
+                <a:cs typeface="Goetheanum Schrift Deutlich" pitchFamily="34" charset="-120"/>
+              </a:rPr>
+              <a:t>Folientitel</a:t>
+            </a:r>
+            <a:endParaRPr lang="en-US" sz="2600" dirty="0"/>
+          </a:p>
+        </p:txBody>
+      </p:sp>
+      <p:sp>
+        <p:nvSpPr>
+          <p:cNvPr id="25" name="Slide Number Placeholder 0"/>
+          <p:cNvSpPr>
+            <a:spLocks noGrp="1"/>
+          </p:cNvSpPr>
+          <p:nvPr>
+            <p:ph type="sldNum" sz="quarter" idx="4294967295"/>
+          </p:nvPr>
+        </p:nvSpPr>
+        <p:spPr>
+          <a:xfrm>
+            <a:off x="9747504" y="6995160"/>
+            <a:ext cx="393192" cy="274320"/>
+          </a:xfrm>
+          <a:prstGeom prst="rect">
+            <a:avLst/>
+          </a:prstGeom>
+          <a:extLst>
+            <a:ext uri="{C572A759-6A51-4108-AA02-DFA0A04FC94B}">
+              <ma14:wrappingTextBoxFlag xmlns:ma14="http://schemas.microsoft.com/office/mac/drawingml/2011/main" val="0"/>
+            </a:ext>
+          </a:extLst>
+        </p:spPr>
+        <p:txBody>
+          <a:bodyPr anchor="ctr"/>
+          <a:lstStyle>
+            <a:lvl1pPr>
+              <a:defRPr sz="900">
+                <a:solidFill>
+                  <a:srgbClr val="6B7480"/>
+                </a:solidFill>
+                <a:latin typeface="Goetheanum Schrift Klar"/>
+                <a:ea typeface="Goetheanum Schrift Klar"/>
+                <a:cs typeface="Goetheanum Schrift Klar"/>
+              </a:defRPr>
+            </a:lvl1pPr>
+          </a:lstStyle>
+          <a:p>
+            <a:pPr algn="l"/>
+            <a:fld id="{F7021451-1387-4CA6-816F-3879F97B5CBC}" type="slidenum">
+              <a:rPr b="0" lang="en-US"/>
+              <a:t>1004</a:t>
+            </a:fld>
+            <a:endParaRPr lang="en-US"/>
+          </a:p>
+        </p:txBody>
+      </p:sp>
+    </p:spTree>
+  </p:cSld>
+  <p:clrMapOvr>
+    <a:masterClrMapping/>
+  </p:clrMapOvr>
+</p:sldLayout>
+</file>
+
+<file path=ppt/slideLayouts/slideLayout5.xml><?xml version="1.0" encoding="utf-8"?>
+<p:sldLayout xmlns:a="http://schemas.openxmlformats.org/drawingml/2006/main" xmlns:r="http://schemas.openxmlformats.org/officeDocument/2006/relationships" xmlns:p="http://schemas.openxmlformats.org/presentationml/2006/main" preserve="1">
+  <p:cSld name="GOE Inhalt eingerückt">
+    <p:bg>
+      <p:bgPr>
+        <a:solidFill>
+          <a:srgbClr val="FFFFFF"/>
+        </a:solidFill>
+      </p:bgPr>
+    </p:bg>
+    <p:spTree>
+      <p:nvGrpSpPr>
+        <p:cNvPr id="1" name=""/>
+        <p:cNvGrpSpPr/>
+        <p:nvPr/>
+      </p:nvGrpSpPr>
+      <p:grpSpPr>
+        <a:xfrm>
+          <a:off x="0" y="0"/>
+          <a:ext cx="0" cy="0"/>
+          <a:chOff x="0" y="0"/>
+          <a:chExt cx="0" cy="0"/>
+        </a:xfrm>
+      </p:grpSpPr>
+      <p:pic>
+        <p:nvPicPr>
+          <p:cNvPr id="2" name="Image 0" descr="Logo Goetheanum"/>
+          <p:cNvPicPr>
+            <a:picLocks noChangeAspect="1"/>
+          </p:cNvPicPr>
+          <p:nvPr/>
+        </p:nvPicPr>
+        <p:blipFill>
+          <a:blip r:embed="rId1"/>
+          <a:stretch>
+            <a:fillRect/>
+          </a:stretch>
+        </p:blipFill>
+        <p:spPr>
+          <a:xfrm>
+            <a:off x="548640" y="502920"/>
+            <a:ext cx="1088402" cy="182880"/>
+          </a:xfrm>
+          <a:prstGeom prst="rect">
+            <a:avLst/>
+          </a:prstGeom>
+        </p:spPr>
+      </p:pic>
+      <p:sp>
+        <p:nvSpPr>
+          <p:cNvPr id="3" name="Text 0"/>
+          <p:cNvSpPr/>
+          <p:nvPr/>
+        </p:nvSpPr>
+        <p:spPr>
+          <a:xfrm>
+            <a:off x="4654296" y="6995160"/>
+            <a:ext cx="5047488" cy="274320"/>
+          </a:xfrm>
+          <a:prstGeom prst="rect">
+            <a:avLst/>
+          </a:prstGeom>
+          <a:noFill/>
+          <a:ln/>
+        </p:spPr>
+        <p:txBody>
+          <a:bodyPr wrap="square" lIns="0" tIns="0" rIns="0" bIns="0" rtlCol="0" anchor="ctr"/>
+          <a:lstStyle/>
+          <a:p>
+            <a:pPr algn="r" indent="0" marL="0">
+              <a:buNone/>
+            </a:pPr>
+            <a:r>
+              <a:rPr lang="en-US" sz="900" dirty="0">
+                <a:solidFill>
+                  <a:srgbClr val="6B7480"/>
+                </a:solidFill>
+                <a:latin typeface="Goetheanum Schrift Klar" pitchFamily="34" charset="0"/>
+                <a:ea typeface="Goetheanum Schrift Klar" pitchFamily="34" charset="-122"/>
+                <a:cs typeface="Goetheanum Schrift Klar" pitchFamily="34" charset="-120"/>
+              </a:rPr>
+              <a:t>Titel der Präsentation · 00.00.2026 ·</a:t>
+            </a:r>
+            <a:endParaRPr lang="en-US" sz="900" dirty="0"/>
+          </a:p>
+        </p:txBody>
+      </p:sp>
+      <p:sp>
+        <p:nvSpPr>
+          <p:cNvPr id="4" name="Text 1"/>
+          <p:cNvSpPr/>
+          <p:nvPr>
+            <p:ph idx="102" type="body" hasCustomPrompt="1"/>
+          </p:nvPr>
+        </p:nvSpPr>
+        <p:spPr>
+          <a:xfrm>
+            <a:off x="2560320" y="1143000"/>
+            <a:ext cx="4572000" cy="274320"/>
+          </a:xfrm>
+          <a:prstGeom prst="rect">
+            <a:avLst/>
+          </a:prstGeom>
+          <a:noFill/>
+          <a:ln/>
+        </p:spPr>
+        <p:txBody>
+          <a:bodyPr wrap="square" rtlCol="0"/>
+          <a:lstStyle>
+            <a:lvl1pPr indent="0" marL="0">
+              <a:buNone/>
+              <a:defRPr lang="en-US" sz="1300" dirty="0">
+                <a:solidFill>
+                  <a:srgbClr val="005EB8"/>
+                </a:solidFill>
+                <a:latin typeface="Goetheanum Schrift Klar" pitchFamily="34" charset="0"/>
+                <a:ea typeface="Goetheanum Schrift Klar" pitchFamily="34" charset="-122"/>
+                <a:cs typeface="Goetheanum Schrift Klar" pitchFamily="34" charset="-120"/>
+              </a:defRPr>
+            </a:lvl1pPr>
+          </a:lstStyle>
+          <a:p>
+            <a:pPr indent="0" marL="0">
+              <a:buNone/>
+            </a:pPr>
+            <a:r>
+              <a:rPr lang="en-US" sz="1300" dirty="0">
+                <a:solidFill>
+                  <a:srgbClr val="005EB8"/>
+                </a:solidFill>
+                <a:latin typeface="Goetheanum Schrift Klar" pitchFamily="34" charset="0"/>
+                <a:ea typeface="Goetheanum Schrift Klar" pitchFamily="34" charset="-122"/>
+                <a:cs typeface="Goetheanum Schrift Klar" pitchFamily="34" charset="-120"/>
+              </a:rPr>
+              <a:t>Kapitel</a:t>
+            </a:r>
+            <a:endParaRPr lang="en-US" sz="1300" dirty="0"/>
+          </a:p>
+        </p:txBody>
+      </p:sp>
+      <p:sp>
+        <p:nvSpPr>
+          <p:cNvPr id="5" name="Text 1"/>
+          <p:cNvSpPr/>
+          <p:nvPr>
+            <p:ph idx="103" type="title" hasCustomPrompt="1"/>
+          </p:nvPr>
+        </p:nvSpPr>
+        <p:spPr>
+          <a:xfrm>
+            <a:off x="2560320" y="1463040"/>
+            <a:ext cx="7580376" cy="594360"/>
+          </a:xfrm>
+          <a:prstGeom prst="rect">
+            <a:avLst/>
+          </a:prstGeom>
+          <a:noFill/>
+          <a:ln/>
+        </p:spPr>
+        <p:txBody>
+          <a:bodyPr wrap="square" rtlCol="0"/>
+          <a:lstStyle>
+            <a:lvl1pPr indent="0" marL="0">
+              <a:buNone/>
+              <a:defRPr lang="en-US" sz="2600" dirty="0">
+                <a:solidFill>
+                  <a:srgbClr val="1A1A1A"/>
+                </a:solidFill>
+                <a:latin typeface="Goetheanum Schrift Deutlich" pitchFamily="34" charset="0"/>
+                <a:ea typeface="Goetheanum Schrift Deutlich" pitchFamily="34" charset="-122"/>
+                <a:cs typeface="Goetheanum Schrift Deutlich" pitchFamily="34" charset="-120"/>
+              </a:defRPr>
+            </a:lvl1pPr>
+          </a:lstStyle>
+          <a:p>
+            <a:pPr indent="0" marL="0">
+              <a:buNone/>
+            </a:pPr>
+            <a:r>
+              <a:rPr lang="en-US" sz="2600" dirty="0">
+                <a:solidFill>
+                  <a:srgbClr val="1A1A1A"/>
+                </a:solidFill>
+                <a:latin typeface="Goetheanum Schrift Deutlich" pitchFamily="34" charset="0"/>
+                <a:ea typeface="Goetheanum Schrift Deutlich" pitchFamily="34" charset="-122"/>
+                <a:cs typeface="Goetheanum Schrift Deutlich" pitchFamily="34" charset="-120"/>
+              </a:rPr>
+              <a:t>Folientitel</a:t>
+            </a:r>
+            <a:endParaRPr lang="en-US" sz="2600" dirty="0"/>
+          </a:p>
+        </p:txBody>
+      </p:sp>
+      <p:sp>
+        <p:nvSpPr>
+          <p:cNvPr id="25" name="Slide Number Placeholder 0"/>
+          <p:cNvSpPr>
+            <a:spLocks noGrp="1"/>
+          </p:cNvSpPr>
+          <p:nvPr>
+            <p:ph type="sldNum" sz="quarter" idx="4294967295"/>
+          </p:nvPr>
+        </p:nvSpPr>
+        <p:spPr>
+          <a:xfrm>
+            <a:off x="9747504" y="6995160"/>
+            <a:ext cx="393192" cy="274320"/>
+          </a:xfrm>
+          <a:prstGeom prst="rect">
+            <a:avLst/>
+          </a:prstGeom>
+          <a:extLst>
+            <a:ext uri="{C572A759-6A51-4108-AA02-DFA0A04FC94B}">
+              <ma14:wrappingTextBoxFlag xmlns:ma14="http://schemas.microsoft.com/office/mac/drawingml/2011/main" val="0"/>
+            </a:ext>
+          </a:extLst>
+        </p:spPr>
+        <p:txBody>
+          <a:bodyPr anchor="ctr"/>
+          <a:lstStyle>
+            <a:lvl1pPr>
+              <a:defRPr sz="900">
+                <a:solidFill>
+                  <a:srgbClr val="6B7480"/>
+                </a:solidFill>
+                <a:latin typeface="Goetheanum Schrift Klar"/>
+                <a:ea typeface="Goetheanum Schrift Klar"/>
+                <a:cs typeface="Goetheanum Schrift Klar"/>
+              </a:defRPr>
+            </a:lvl1pPr>
+          </a:lstStyle>
+          <a:p>
+            <a:pPr algn="l"/>
+            <a:fld id="{F7021451-1387-4CA6-816F-3879F97B5CBC}" type="slidenum">
+              <a:rPr b="0" lang="en-US"/>
+              <a:t>1005</a:t>
+            </a:fld>
+            <a:endParaRPr lang="en-US"/>
+          </a:p>
+        </p:txBody>
+      </p:sp>
+    </p:spTree>
+  </p:cSld>
+  <p:clrMapOvr>
+    <a:masterClrMapping/>
+  </p:clrMapOvr>
+</p:sldLayout>
+</file>
+
+<file path=ppt/slideLayouts/slideLayout6.xml><?xml version="1.0" encoding="utf-8"?>
+<p:sldLayout xmlns:a="http://schemas.openxmlformats.org/drawingml/2006/main" xmlns:r="http://schemas.openxmlformats.org/officeDocument/2006/relationships" xmlns:p="http://schemas.openxmlformats.org/presentationml/2006/main" preserve="1">
+  <p:cSld name="GOE Basis">
+    <p:bg>
+      <p:bgPr>
+        <a:solidFill>
+          <a:srgbClr val="FFFFFF"/>
+        </a:solidFill>
+      </p:bgPr>
+    </p:bg>
+    <p:spTree>
+      <p:nvGrpSpPr>
+        <p:cNvPr id="1" name=""/>
+        <p:cNvGrpSpPr/>
+        <p:nvPr/>
+      </p:nvGrpSpPr>
+      <p:grpSpPr>
+        <a:xfrm>
+          <a:off x="0" y="0"/>
+          <a:ext cx="0" cy="0"/>
+          <a:chOff x="0" y="0"/>
+          <a:chExt cx="0" cy="0"/>
+        </a:xfrm>
+      </p:grpSpPr>
+      <p:pic>
+        <p:nvPicPr>
+          <p:cNvPr id="2" name="Image 0" descr="Logo Goetheanum"/>
+          <p:cNvPicPr>
+            <a:picLocks noChangeAspect="1"/>
+          </p:cNvPicPr>
+          <p:nvPr/>
+        </p:nvPicPr>
+        <p:blipFill>
+          <a:blip r:embed="rId1"/>
+          <a:stretch>
+            <a:fillRect/>
+          </a:stretch>
+        </p:blipFill>
+        <p:spPr>
+          <a:xfrm>
+            <a:off x="548640" y="502920"/>
+            <a:ext cx="1088402" cy="182880"/>
+          </a:xfrm>
+          <a:prstGeom prst="rect">
+            <a:avLst/>
+          </a:prstGeom>
+        </p:spPr>
+      </p:pic>
+      <p:sp>
+        <p:nvSpPr>
+          <p:cNvPr id="3" name="Text 0"/>
+          <p:cNvSpPr/>
+          <p:nvPr/>
+        </p:nvSpPr>
+        <p:spPr>
+          <a:xfrm>
+            <a:off x="4654296" y="6995160"/>
+            <a:ext cx="5047488" cy="274320"/>
+          </a:xfrm>
+          <a:prstGeom prst="rect">
+            <a:avLst/>
+          </a:prstGeom>
+          <a:noFill/>
+          <a:ln/>
+        </p:spPr>
+        <p:txBody>
+          <a:bodyPr wrap="square" lIns="0" tIns="0" rIns="0" bIns="0" rtlCol="0" anchor="ctr"/>
+          <a:lstStyle/>
+          <a:p>
+            <a:pPr algn="r" indent="0" marL="0">
+              <a:buNone/>
+            </a:pPr>
+            <a:r>
+              <a:rPr lang="en-US" sz="900" dirty="0">
+                <a:solidFill>
+                  <a:srgbClr val="6B7480"/>
+                </a:solidFill>
+                <a:latin typeface="Goetheanum Schrift Klar" pitchFamily="34" charset="0"/>
+                <a:ea typeface="Goetheanum Schrift Klar" pitchFamily="34" charset="-122"/>
+                <a:cs typeface="Goetheanum Schrift Klar" pitchFamily="34" charset="-120"/>
+              </a:rPr>
+              <a:t>Titel der Präsentation · 00.00.2026 ·</a:t>
+            </a:r>
+            <a:endParaRPr lang="en-US" sz="900" dirty="0"/>
+          </a:p>
+        </p:txBody>
+      </p:sp>
+      <p:sp>
+        <p:nvSpPr>
+          <p:cNvPr id="25" name="Slide Number Placeholder 0"/>
+          <p:cNvSpPr>
+            <a:spLocks noGrp="1"/>
+          </p:cNvSpPr>
+          <p:nvPr>
+            <p:ph type="sldNum" sz="quarter" idx="4294967295"/>
+          </p:nvPr>
+        </p:nvSpPr>
+        <p:spPr>
+          <a:xfrm>
+            <a:off x="9747504" y="6995160"/>
+            <a:ext cx="393192" cy="274320"/>
+          </a:xfrm>
+          <a:prstGeom prst="rect">
+            <a:avLst/>
+          </a:prstGeom>
+          <a:extLst>
+            <a:ext uri="{C572A759-6A51-4108-AA02-DFA0A04FC94B}">
+              <ma14:wrappingTextBoxFlag xmlns:ma14="http://schemas.microsoft.com/office/mac/drawingml/2011/main" val="0"/>
+            </a:ext>
+          </a:extLst>
+        </p:spPr>
+        <p:txBody>
+          <a:bodyPr anchor="ctr"/>
+          <a:lstStyle>
+            <a:lvl1pPr>
+              <a:defRPr sz="900">
+                <a:solidFill>
+                  <a:srgbClr val="6B7480"/>
+                </a:solidFill>
+                <a:latin typeface="Goetheanum Schrift Klar"/>
+                <a:ea typeface="Goetheanum Schrift Klar"/>
+                <a:cs typeface="Goetheanum Schrift Klar"/>
+              </a:defRPr>
+            </a:lvl1pPr>
+          </a:lstStyle>
+          <a:p>
+            <a:pPr algn="l"/>
+            <a:fld id="{F7021451-1387-4CA6-816F-3879F97B5CBC}" type="slidenum">
+              <a:rPr b="0" lang="en-US"/>
+              <a:t>1006</a:t>
+            </a:fld>
+            <a:endParaRPr lang="en-US"/>
+          </a:p>
+        </p:txBody>
+      </p:sp>
+    </p:spTree>
+  </p:cSld>
+  <p:clrMapOvr>
+    <a:masterClrMapping/>
+  </p:clrMapOvr>
+</p:sldLayout>
+</file>
+
+<file path=ppt/slideLayouts/slideLayout7.xml><?xml version="1.0" encoding="utf-8"?>
+<p:sldLayout xmlns:a="http://schemas.openxmlformats.org/drawingml/2006/main" xmlns:r="http://schemas.openxmlformats.org/officeDocument/2006/relationships" xmlns:p="http://schemas.openxmlformats.org/presentationml/2006/main" preserve="1">
+  <p:cSld name="GOE Bild ganzseitig">
+    <p:bg>
+      <p:bgPr>
+        <a:solidFill>
+          <a:srgbClr val="FFFFFF"/>
+        </a:solidFill>
+      </p:bgPr>
+    </p:bg>
+    <p:spTree>
+      <p:nvGrpSpPr>
+        <p:cNvPr id="1" name=""/>
+        <p:cNvGrpSpPr/>
+        <p:nvPr/>
+      </p:nvGrpSpPr>
+      <p:grpSpPr>
+        <a:xfrm>
+          <a:off x="0" y="0"/>
+          <a:ext cx="0" cy="0"/>
+          <a:chOff x="0" y="0"/>
+          <a:chExt cx="0" cy="0"/>
+        </a:xfrm>
+      </p:grpSpPr>
+      <p:sp>
+        <p:nvSpPr>
+          <p:cNvPr id="2" name="Text 0"/>
+          <p:cNvSpPr/>
+          <p:nvPr>
+            <p:ph idx="100" hasCustomPrompt="1"/>
+          </p:nvPr>
+        </p:nvSpPr>
+        <p:spPr>
+          <a:xfrm>
+            <a:off x="0" y="0"/>
+            <a:ext cx="10689336" cy="7562088"/>
+          </a:xfrm>
+          <a:prstGeom prst="rect">
+            <a:avLst/>
+          </a:prstGeom>
+          <a:noFill/>
+          <a:ln/>
+        </p:spPr>
+        <p:txBody>
+          <a:bodyPr wrap="square" rtlCol="0"/>
+          <a:lstStyle>
+            <a:lvl1pPr indent="0" marL="0">
+              <a:buNone/>
+              <a:defRPr lang="en-US" dirty="0"/>
+            </a:lvl1pPr>
+          </a:lstStyle>
+          <a:p>
+            <a:pPr indent="0" marL="0">
+              <a:buNone/>
+            </a:pPr>
+            <a:r>
+              <a:rPr lang="en-US" dirty="0">
+                <a:solidFill>
+                  <a:srgbClr val="000000"/>
+                </a:solidFill>
+              </a:rPr>
+              <a:t>Bild einfügen</a:t>
+            </a:r>
+            <a:endParaRPr lang="en-US" dirty="0"/>
+          </a:p>
+        </p:txBody>
+      </p:sp>
+      <p:sp>
+        <p:nvSpPr>
+          <p:cNvPr id="3" name="Text 0"/>
+          <p:cNvSpPr/>
+          <p:nvPr>
+            <p:ph idx="101" type="body" hasCustomPrompt="1"/>
+          </p:nvPr>
+        </p:nvSpPr>
+        <p:spPr>
+          <a:xfrm>
+            <a:off x="548640" y="6995160"/>
+            <a:ext cx="4572000" cy="274320"/>
+          </a:xfrm>
+          <a:prstGeom prst="rect">
+            <a:avLst/>
+          </a:prstGeom>
+          <a:noFill/>
+          <a:ln/>
+        </p:spPr>
+        <p:txBody>
+          <a:bodyPr wrap="square" rtlCol="0"/>
+          <a:lstStyle>
+            <a:lvl1pPr indent="0" marL="0">
+              <a:buNone/>
+              <a:defRPr lang="en-US" sz="900" dirty="0">
+                <a:solidFill>
+                  <a:srgbClr val="FFFFFF"/>
+                </a:solidFill>
+                <a:latin typeface="Goetheanum Schrift Klar" pitchFamily="34" charset="0"/>
+                <a:ea typeface="Goetheanum Schrift Klar" pitchFamily="34" charset="-122"/>
+                <a:cs typeface="Goetheanum Schrift Klar" pitchFamily="34" charset="-120"/>
+              </a:defRPr>
+            </a:lvl1pPr>
+          </a:lstStyle>
+          <a:p>
+            <a:pPr indent="0" marL="0">
+              <a:buNone/>
+            </a:pPr>
+            <a:r>
+              <a:rPr lang="en-US" sz="900" dirty="0">
+                <a:solidFill>
+                  <a:srgbClr val="FFFFFF"/>
+                </a:solidFill>
+                <a:latin typeface="Goetheanum Schrift Klar" pitchFamily="34" charset="0"/>
+                <a:ea typeface="Goetheanum Schrift Klar" pitchFamily="34" charset="-122"/>
+                <a:cs typeface="Goetheanum Schrift Klar" pitchFamily="34" charset="-120"/>
+              </a:rPr>
+              <a:t>Bildlegende: Ort, Anlass, Fotografie</a:t>
+            </a:r>
+            <a:endParaRPr lang="en-US" sz="900" dirty="0"/>
+          </a:p>
+        </p:txBody>
+      </p:sp>
+      <p:sp>
+        <p:nvSpPr>
+          <p:cNvPr id="4" name="Text 0"/>
+          <p:cNvSpPr/>
+          <p:nvPr/>
+        </p:nvSpPr>
+        <p:spPr>
+          <a:xfrm>
+            <a:off x="4654296" y="6995160"/>
+            <a:ext cx="5047488" cy="274320"/>
+          </a:xfrm>
+          <a:prstGeom prst="rect">
+            <a:avLst/>
+          </a:prstGeom>
+          <a:noFill/>
+          <a:ln/>
+        </p:spPr>
+        <p:txBody>
+          <a:bodyPr wrap="square" lIns="0" tIns="0" rIns="0" bIns="0" rtlCol="0" anchor="ctr"/>
+          <a:lstStyle/>
+          <a:p>
+            <a:pPr algn="r" indent="0" marL="0">
+              <a:buNone/>
+            </a:pPr>
+            <a:r>
+              <a:rPr lang="en-US" sz="900" dirty="0">
+                <a:solidFill>
+                  <a:srgbClr val="FFFFFF"/>
+                </a:solidFill>
+                <a:latin typeface="Goetheanum Schrift Klar" pitchFamily="34" charset="0"/>
+                <a:ea typeface="Goetheanum Schrift Klar" pitchFamily="34" charset="-122"/>
+                <a:cs typeface="Goetheanum Schrift Klar" pitchFamily="34" charset="-120"/>
+              </a:rPr>
+              <a:t>Titel der Präsentation · 00.00.2026 ·</a:t>
+            </a:r>
+            <a:endParaRPr lang="en-US" sz="900" dirty="0"/>
+          </a:p>
+        </p:txBody>
+      </p:sp>
+      <p:sp>
+        <p:nvSpPr>
+          <p:cNvPr id="25" name="Slide Number Placeholder 0"/>
+          <p:cNvSpPr>
+            <a:spLocks noGrp="1"/>
+          </p:cNvSpPr>
+          <p:nvPr>
+            <p:ph type="sldNum" sz="quarter" idx="4294967295"/>
+          </p:nvPr>
+        </p:nvSpPr>
+        <p:spPr>
+          <a:xfrm>
+            <a:off x="9747504" y="6995160"/>
+            <a:ext cx="393192" cy="274320"/>
+          </a:xfrm>
+          <a:prstGeom prst="rect">
+            <a:avLst/>
+          </a:prstGeom>
+          <a:extLst>
+            <a:ext uri="{C572A759-6A51-4108-AA02-DFA0A04FC94B}">
+              <ma14:wrappingTextBoxFlag xmlns:ma14="http://schemas.microsoft.com/office/mac/drawingml/2011/main" val="0"/>
+            </a:ext>
+          </a:extLst>
+        </p:spPr>
+        <p:txBody>
+          <a:bodyPr anchor="ctr"/>
+          <a:lstStyle>
+            <a:lvl1pPr>
+              <a:defRPr sz="900">
+                <a:solidFill>
+                  <a:srgbClr val="FFFFFF"/>
+                </a:solidFill>
+                <a:latin typeface="Goetheanum Schrift Klar"/>
+                <a:ea typeface="Goetheanum Schrift Klar"/>
+                <a:cs typeface="Goetheanum Schrift Klar"/>
+              </a:defRPr>
+            </a:lvl1pPr>
+          </a:lstStyle>
+          <a:p>
+            <a:pPr algn="l"/>
+            <a:fld id="{F7021451-1387-4CA6-816F-3879F97B5CBC}" type="slidenum">
+              <a:rPr b="0" lang="en-US"/>
+              <a:t>1007</a:t>
+            </a:fld>
+            <a:endParaRPr lang="en-US"/>
+          </a:p>
+        </p:txBody>
+      </p:sp>
+    </p:spTree>
+  </p:cSld>
+  <p:clrMapOvr>
+    <a:masterClrMapping/>
+  </p:clrMapOvr>
+</p:sldLayout>
+</file>
+
+<file path=ppt/slideLayouts/slideLayout8.xml><?xml version="1.0" encoding="utf-8"?>
+<p:sldLayout xmlns:a="http://schemas.openxmlformats.org/drawingml/2006/main" xmlns:r="http://schemas.openxmlformats.org/officeDocument/2006/relationships" xmlns:p="http://schemas.openxmlformats.org/presentationml/2006/main" preserve="1">
+  <p:cSld name="GOE Bild und Text">
+    <p:bg>
+      <p:bgPr>
+        <a:solidFill>
+          <a:srgbClr val="FFFFFF"/>
+        </a:solidFill>
+      </p:bgPr>
+    </p:bg>
+    <p:spTree>
+      <p:nvGrpSpPr>
+        <p:cNvPr id="1" name=""/>
+        <p:cNvGrpSpPr/>
+        <p:nvPr/>
+      </p:nvGrpSpPr>
+      <p:grpSpPr>
+        <a:xfrm>
+          <a:off x="0" y="0"/>
+          <a:ext cx="0" cy="0"/>
+          <a:chOff x="0" y="0"/>
+          <a:chExt cx="0" cy="0"/>
+        </a:xfrm>
+      </p:grpSpPr>
+      <p:pic>
+        <p:nvPicPr>
+          <p:cNvPr id="2" name="Image 0" descr="Logo Goetheanum"/>
+          <p:cNvPicPr>
+            <a:picLocks noChangeAspect="1"/>
+          </p:cNvPicPr>
+          <p:nvPr/>
+        </p:nvPicPr>
+        <p:blipFill>
+          <a:blip r:embed="rId1"/>
+          <a:stretch>
+            <a:fillRect/>
+          </a:stretch>
+        </p:blipFill>
+        <p:spPr>
+          <a:xfrm>
+            <a:off x="548640" y="502920"/>
+            <a:ext cx="1088402" cy="182880"/>
+          </a:xfrm>
+          <a:prstGeom prst="rect">
+            <a:avLst/>
+          </a:prstGeom>
+        </p:spPr>
+      </p:pic>
+      <p:sp>
+        <p:nvSpPr>
+          <p:cNvPr id="3" name="Text 0"/>
+          <p:cNvSpPr/>
+          <p:nvPr>
+            <p:ph idx="101" hasCustomPrompt="1"/>
+          </p:nvPr>
+        </p:nvSpPr>
+        <p:spPr>
+          <a:xfrm>
+            <a:off x="5669280" y="0"/>
+            <a:ext cx="5020056" cy="7562088"/>
+          </a:xfrm>
+          <a:prstGeom prst="rect">
+            <a:avLst/>
+          </a:prstGeom>
+          <a:noFill/>
+          <a:ln/>
+        </p:spPr>
+        <p:txBody>
+          <a:bodyPr wrap="square" rtlCol="0"/>
+          <a:lstStyle>
+            <a:lvl1pPr indent="0" marL="0">
+              <a:buNone/>
+              <a:defRPr lang="en-US" dirty="0"/>
+            </a:lvl1pPr>
+          </a:lstStyle>
+          <a:p>
+            <a:pPr indent="0" marL="0">
+              <a:buNone/>
+            </a:pPr>
+            <a:r>
+              <a:rPr lang="en-US" dirty="0">
+                <a:solidFill>
+                  <a:srgbClr val="000000"/>
+                </a:solidFill>
+              </a:rPr>
+              <a:t>Bild einfügen</a:t>
+            </a:r>
+            <a:endParaRPr lang="en-US" dirty="0"/>
+          </a:p>
+        </p:txBody>
+      </p:sp>
+      <p:sp>
+        <p:nvSpPr>
+          <p:cNvPr id="4" name="Text 0"/>
+          <p:cNvSpPr/>
+          <p:nvPr>
+            <p:ph idx="102" type="body" hasCustomPrompt="1"/>
+          </p:nvPr>
+        </p:nvSpPr>
+        <p:spPr>
+          <a:xfrm>
+            <a:off x="548640" y="1143000"/>
+            <a:ext cx="3657600" cy="274320"/>
+          </a:xfrm>
+          <a:prstGeom prst="rect">
+            <a:avLst/>
+          </a:prstGeom>
+          <a:noFill/>
+          <a:ln/>
+        </p:spPr>
+        <p:txBody>
+          <a:bodyPr wrap="square" rtlCol="0"/>
+          <a:lstStyle>
+            <a:lvl1pPr indent="0" marL="0">
+              <a:buNone/>
+              <a:defRPr lang="en-US" sz="1300" dirty="0">
+                <a:solidFill>
+                  <a:srgbClr val="005EB8"/>
+                </a:solidFill>
+                <a:latin typeface="Goetheanum Schrift Klar" pitchFamily="34" charset="0"/>
+                <a:ea typeface="Goetheanum Schrift Klar" pitchFamily="34" charset="-122"/>
+                <a:cs typeface="Goetheanum Schrift Klar" pitchFamily="34" charset="-120"/>
+              </a:defRPr>
+            </a:lvl1pPr>
+          </a:lstStyle>
+          <a:p>
+            <a:pPr indent="0" marL="0">
+              <a:buNone/>
+            </a:pPr>
+            <a:r>
+              <a:rPr lang="en-US" sz="1300" dirty="0">
+                <a:solidFill>
+                  <a:srgbClr val="005EB8"/>
+                </a:solidFill>
+                <a:latin typeface="Goetheanum Schrift Klar" pitchFamily="34" charset="0"/>
+                <a:ea typeface="Goetheanum Schrift Klar" pitchFamily="34" charset="-122"/>
+                <a:cs typeface="Goetheanum Schrift Klar" pitchFamily="34" charset="-120"/>
+              </a:rPr>
+              <a:t>Kapitel</a:t>
+            </a:r>
+            <a:endParaRPr lang="en-US" sz="1300" dirty="0"/>
+          </a:p>
+        </p:txBody>
+      </p:sp>
+      <p:sp>
+        <p:nvSpPr>
+          <p:cNvPr id="5" name="Text 0"/>
+          <p:cNvSpPr/>
+          <p:nvPr>
+            <p:ph idx="103" type="title" hasCustomPrompt="1"/>
+          </p:nvPr>
+        </p:nvSpPr>
+        <p:spPr>
+          <a:xfrm>
+            <a:off x="548640" y="1463040"/>
+            <a:ext cx="4754880" cy="1097280"/>
+          </a:xfrm>
+          <a:prstGeom prst="rect">
+            <a:avLst/>
+          </a:prstGeom>
+          <a:noFill/>
+          <a:ln/>
+        </p:spPr>
+        <p:txBody>
+          <a:bodyPr wrap="square" rtlCol="0"/>
+          <a:lstStyle>
+            <a:lvl1pPr indent="0" marL="0">
+              <a:lnSpc>
+                <a:spcPct val="105000"/>
+              </a:lnSpc>
+              <a:buNone/>
+              <a:defRPr lang="en-US" sz="2600" dirty="0">
+                <a:solidFill>
+                  <a:srgbClr val="1A1A1A"/>
+                </a:solidFill>
+                <a:latin typeface="Goetheanum Schrift Deutlich" pitchFamily="34" charset="0"/>
+                <a:ea typeface="Goetheanum Schrift Deutlich" pitchFamily="34" charset="-122"/>
+                <a:cs typeface="Goetheanum Schrift Deutlich" pitchFamily="34" charset="-120"/>
+              </a:defRPr>
+            </a:lvl1pPr>
+          </a:lstStyle>
+          <a:p>
+            <a:pPr indent="0" marL="0">
+              <a:lnSpc>
+                <a:spcPct val="105000"/>
+              </a:lnSpc>
+              <a:buNone/>
+            </a:pPr>
+            <a:r>
+              <a:rPr lang="en-US" sz="2600" dirty="0">
+                <a:solidFill>
+                  <a:srgbClr val="1A1A1A"/>
+                </a:solidFill>
+                <a:latin typeface="Goetheanum Schrift Deutlich" pitchFamily="34" charset="0"/>
+                <a:ea typeface="Goetheanum Schrift Deutlich" pitchFamily="34" charset="-122"/>
+                <a:cs typeface="Goetheanum Schrift Deutlich" pitchFamily="34" charset="-120"/>
+              </a:rPr>
+              <a:t>Bild und Text</a:t>
+            </a:r>
+            <a:endParaRPr lang="en-US" sz="2600" dirty="0"/>
+          </a:p>
+        </p:txBody>
+      </p:sp>
+      <p:sp>
+        <p:nvSpPr>
+          <p:cNvPr id="6" name="Text 0"/>
+          <p:cNvSpPr/>
+          <p:nvPr>
+            <p:ph idx="104" type="body" hasCustomPrompt="1"/>
+          </p:nvPr>
+        </p:nvSpPr>
+        <p:spPr>
+          <a:xfrm>
+            <a:off x="548640" y="2834640"/>
+            <a:ext cx="4480560" cy="3200400"/>
+          </a:xfrm>
+          <a:prstGeom prst="rect">
+            <a:avLst/>
+          </a:prstGeom>
+          <a:noFill/>
+          <a:ln/>
+        </p:spPr>
+        <p:txBody>
+          <a:bodyPr wrap="square" rtlCol="0"/>
+          <a:lstStyle>
+            <a:lvl1pPr indent="0" marL="0">
+              <a:lnSpc>
+                <a:spcPct val="130000"/>
+              </a:lnSpc>
+              <a:buNone/>
+              <a:defRPr lang="en-US" sz="1300" dirty="0">
+                <a:solidFill>
+                  <a:srgbClr val="1A1A1A"/>
+                </a:solidFill>
+                <a:latin typeface="Goetheanum Schrift Klar" pitchFamily="34" charset="0"/>
+                <a:ea typeface="Goetheanum Schrift Klar" pitchFamily="34" charset="-122"/>
+                <a:cs typeface="Goetheanum Schrift Klar" pitchFamily="34" charset="-120"/>
+              </a:defRPr>
+            </a:lvl1pPr>
+          </a:lstStyle>
+          <a:p>
+            <a:pPr indent="0" marL="0">
+              <a:lnSpc>
+                <a:spcPct val="130000"/>
+              </a:lnSpc>
+              <a:buNone/>
+            </a:pPr>
+            <a:r>
+              <a:rPr lang="en-US" sz="1300" dirty="0">
+                <a:solidFill>
+                  <a:srgbClr val="1A1A1A"/>
+                </a:solidFill>
+                <a:latin typeface="Goetheanum Schrift Klar" pitchFamily="34" charset="0"/>
+                <a:ea typeface="Goetheanum Schrift Klar" pitchFamily="34" charset="-122"/>
+                <a:cs typeface="Goetheanum Schrift Klar" pitchFamily="34" charset="-120"/>
+              </a:rPr>
+              <a:t>Text zur Bildseite</a:t>
+            </a:r>
+            <a:endParaRPr lang="en-US" sz="1300" dirty="0"/>
+          </a:p>
+        </p:txBody>
+      </p:sp>
+      <p:sp>
+        <p:nvSpPr>
+          <p:cNvPr id="7" name="Text 0"/>
+          <p:cNvSpPr/>
+          <p:nvPr>
+            <p:ph idx="105" type="body" hasCustomPrompt="1"/>
+          </p:nvPr>
+        </p:nvSpPr>
+        <p:spPr>
+          <a:xfrm>
+            <a:off x="548640" y="6995160"/>
+            <a:ext cx="4114800" cy="274320"/>
+          </a:xfrm>
+          <a:prstGeom prst="rect">
+            <a:avLst/>
+          </a:prstGeom>
+          <a:noFill/>
+          <a:ln/>
+        </p:spPr>
+        <p:txBody>
+          <a:bodyPr wrap="square" rtlCol="0"/>
+          <a:lstStyle>
+            <a:lvl1pPr indent="0" marL="0">
+              <a:buNone/>
+              <a:defRPr lang="en-US" sz="900" dirty="0">
+                <a:solidFill>
+                  <a:srgbClr val="6B7480"/>
+                </a:solidFill>
+                <a:latin typeface="Goetheanum Schrift Klar" pitchFamily="34" charset="0"/>
+                <a:ea typeface="Goetheanum Schrift Klar" pitchFamily="34" charset="-122"/>
+                <a:cs typeface="Goetheanum Schrift Klar" pitchFamily="34" charset="-120"/>
+              </a:defRPr>
+            </a:lvl1pPr>
+          </a:lstStyle>
+          <a:p>
+            <a:pPr indent="0" marL="0">
+              <a:buNone/>
+            </a:pPr>
+            <a:r>
+              <a:rPr lang="en-US" sz="900" dirty="0">
+                <a:solidFill>
+                  <a:srgbClr val="6B7480"/>
+                </a:solidFill>
+                <a:latin typeface="Goetheanum Schrift Klar" pitchFamily="34" charset="0"/>
+                <a:ea typeface="Goetheanum Schrift Klar" pitchFamily="34" charset="-122"/>
+                <a:cs typeface="Goetheanum Schrift Klar" pitchFamily="34" charset="-120"/>
+              </a:rPr>
+              <a:t>Bildlegende: Ort, Anlass, Fotografie</a:t>
+            </a:r>
+            <a:endParaRPr lang="en-US" sz="900" dirty="0"/>
+          </a:p>
+        </p:txBody>
+      </p:sp>
+    </p:spTree>
+  </p:cSld>
+  <p:clrMapOvr>
+    <a:masterClrMapping/>
+  </p:clrMapOvr>
+</p:sldLayout>
+</file>
+
 <file path=ppt/slideMasters/slideMaster1.xml><?xml version="1.0" encoding="utf-8"?>
 <p:sldMaster xmlns:a="http://schemas.openxmlformats.org/drawingml/2006/main" xmlns:r="http://schemas.openxmlformats.org/officeDocument/2006/relationships" xmlns:p="http://schemas.openxmlformats.org/presentationml/2006/main">
   <p:cSld>
@@ -2212,11 +3890,66 @@
           <a:chExt cx="0" cy="0"/>
         </a:xfrm>
       </p:grpSpPr>
+      <p:sp>
+        <p:nvSpPr>
+          <p:cNvPr id="25" name="Slide Number Placeholder 0"/>
+          <p:cNvSpPr>
+            <a:spLocks noGrp="1"/>
+          </p:cNvSpPr>
+          <p:nvPr>
+            <p:ph type="sldNum" sz="quarter" idx="4294967295"/>
+          </p:nvPr>
+        </p:nvSpPr>
+        <p:spPr>
+          <a:xfrm>
+            <a:off x="9747504" y="6995160"/>
+            <a:ext cx="393192" cy="274320"/>
+          </a:xfrm>
+          <a:prstGeom prst="rect">
+            <a:avLst/>
+          </a:prstGeom>
+          <a:extLst>
+            <a:ext uri="{C572A759-6A51-4108-AA02-DFA0A04FC94B}">
+              <ma14:wrappingTextBoxFlag xmlns:ma14="http://schemas.microsoft.com/office/mac/drawingml/2011/main" val="0"/>
+            </a:ext>
+          </a:extLst>
+        </p:spPr>
+        <p:txBody>
+          <a:bodyPr anchor="ctr"/>
+          <a:lstStyle>
+            <a:lvl1pPr>
+              <a:defRPr sz="900">
+                <a:solidFill>
+                  <a:srgbClr val="9CC3EC"/>
+                </a:solidFill>
+                <a:latin typeface="Goetheanum Schrift Klar"/>
+                <a:ea typeface="Goetheanum Schrift Klar"/>
+                <a:cs typeface="Goetheanum Schrift Klar"/>
+              </a:defRPr>
+            </a:lvl1pPr>
+          </a:lstStyle>
+          <a:p>
+            <a:pPr algn="l"/>
+            <a:fld id="{F7021451-1387-4CA6-816F-3879F97B5CBC}" type="slidenum">
+              <a:rPr b="0" lang="en-US"/>
+              <a:t>null</a:t>
+            </a:fld>
+            <a:endParaRPr lang="en-US"/>
+          </a:p>
+        </p:txBody>
+      </p:sp>
     </p:spTree>
   </p:cSld>
   <p:clrMap bg1="lt1" tx1="dk1" bg2="lt2" tx2="dk2" accent1="accent1" accent2="accent2" accent3="accent3" accent4="accent4" accent5="accent5" accent6="accent6" hlink="hlink" folHlink="folHlink"/>
   <p:sldLayoutIdLst>
     <p:sldLayoutId id="2147483649" r:id="rId1"/>
+    <p:sldLayoutId id="2147483650" r:id="rId2"/>
+    <p:sldLayoutId id="2147483651" r:id="rId3"/>
+    <p:sldLayoutId id="2147483652" r:id="rId4"/>
+    <p:sldLayoutId id="2147483653" r:id="rId5"/>
+    <p:sldLayoutId id="2147483654" r:id="rId6"/>
+    <p:sldLayoutId id="2147483655" r:id="rId7"/>
+    <p:sldLayoutId id="2147483656" r:id="rId8"/>
   </p:sldLayoutIdLst>
   <p:hf sldNum="0" hdr="0" ftr="0" dt="0"/>
   <p:txStyles>
@@ -2475,13 +4208,6 @@
 <file path=ppt/slides/slide1.xml><?xml version="1.0" encoding="utf-8"?>
 <p:sld xmlns:a="http://schemas.openxmlformats.org/drawingml/2006/main" xmlns:r="http://schemas.openxmlformats.org/officeDocument/2006/relationships" xmlns:p="http://schemas.openxmlformats.org/presentationml/2006/main">
   <p:cSld name="Slide 1">
-    <p:bg>
-      <p:bgPr>
-        <a:solidFill>
-          <a:srgbClr val="005EB8"/>
-        </a:solidFill>
-      </p:bgPr>
-    </p:bg>
     <p:spTree>
       <p:nvGrpSpPr>
         <p:cNvPr id="1" name=""/>
@@ -2496,35 +4222,13 @@
           <a:chExt cx="0" cy="0"/>
         </a:xfrm>
       </p:grpSpPr>
-      <p:pic>
-        <p:nvPicPr>
-          <p:cNvPr id="2" name="Image 0" descr="logo-goetheanum-white.png">    </p:cNvPr>
-          <p:cNvPicPr>
-            <a:picLocks noChangeAspect="1"/>
-          </p:cNvPicPr>
-          <p:nvPr/>
-        </p:nvPicPr>
-        <p:blipFill>
-          <a:blip r:embed="rId1"/>
-          <a:stretch>
-            <a:fillRect/>
-          </a:stretch>
-        </p:blipFill>
-        <p:spPr>
-          <a:xfrm>
-            <a:off x="548640" y="466344"/>
-            <a:ext cx="1850284" cy="310896"/>
-          </a:xfrm>
-          <a:prstGeom prst="rect">
-            <a:avLst/>
-          </a:prstGeom>
-        </p:spPr>
-      </p:pic>
-      <p:sp>
-        <p:nvSpPr>
-          <p:cNvPr id="3" name="Text 0"/>
-          <p:cNvSpPr/>
-          <p:nvPr/>
+      <p:sp>
+        <p:nvSpPr>
+          <p:cNvPr id="2" name="Text 0"/>
+          <p:cNvSpPr/>
+          <p:nvPr>
+            <p:ph idx="101" type="title" hasCustomPrompt="1"/>
+          </p:nvPr>
         </p:nvSpPr>
         <p:spPr>
           <a:xfrm>
@@ -2538,7 +4242,7 @@
           <a:ln/>
         </p:spPr>
         <p:txBody>
-          <a:bodyPr wrap="square" lIns="0" tIns="0" rIns="0" bIns="0" rtlCol="0" anchor="ctr"/>
+          <a:bodyPr wrap="square" lIns="0" tIns="0" rIns="0" bIns="0" rtlCol="0"/>
           <a:lstStyle/>
           <a:p>
             <a:pPr indent="0" marL="0">
@@ -2561,9 +4265,11 @@
       </p:sp>
       <p:sp>
         <p:nvSpPr>
-          <p:cNvPr id="4" name="Text 1"/>
-          <p:cNvSpPr/>
-          <p:nvPr/>
+          <p:cNvPr id="3" name="Text 0"/>
+          <p:cNvSpPr/>
+          <p:nvPr>
+            <p:ph idx="102" type="body" hasCustomPrompt="1"/>
+          </p:nvPr>
         </p:nvSpPr>
         <p:spPr>
           <a:xfrm>
@@ -2577,7 +4283,7 @@
           <a:ln/>
         </p:spPr>
         <p:txBody>
-          <a:bodyPr wrap="square" lIns="0" tIns="0" rIns="0" bIns="0" rtlCol="0" anchor="ctr"/>
+          <a:bodyPr wrap="square" lIns="0" tIns="0" rIns="0" bIns="0" rtlCol="0"/>
           <a:lstStyle/>
           <a:p>
             <a:pPr indent="0" marL="0">
@@ -2600,9 +4306,11 @@
       </p:sp>
       <p:sp>
         <p:nvSpPr>
-          <p:cNvPr id="5" name="Text 2"/>
-          <p:cNvSpPr/>
-          <p:nvPr/>
+          <p:cNvPr id="4" name="Text 0"/>
+          <p:cNvSpPr/>
+          <p:nvPr>
+            <p:ph idx="103" type="body" hasCustomPrompt="1"/>
+          </p:nvPr>
         </p:nvSpPr>
         <p:spPr>
           <a:xfrm>
@@ -2616,7 +4324,7 @@
           <a:ln/>
         </p:spPr>
         <p:txBody>
-          <a:bodyPr wrap="square" lIns="0" tIns="0" rIns="0" bIns="0" rtlCol="0" anchor="ctr"/>
+          <a:bodyPr wrap="square" lIns="0" tIns="0" rIns="0" bIns="0" rtlCol="0"/>
           <a:lstStyle/>
           <a:p>
             <a:pPr algn="r" indent="0" marL="0">
@@ -2648,13 +4356,6 @@
 <file path=ppt/slides/slide10.xml><?xml version="1.0" encoding="utf-8"?>
 <p:sld xmlns:a="http://schemas.openxmlformats.org/drawingml/2006/main" xmlns:r="http://schemas.openxmlformats.org/officeDocument/2006/relationships" xmlns:p="http://schemas.openxmlformats.org/presentationml/2006/main">
   <p:cSld name="Slide 10">
-    <p:bg>
-      <p:bgPr>
-        <a:solidFill>
-          <a:srgbClr val="FFFFFF"/>
-        </a:solidFill>
-      </p:bgPr>
-    </p:bg>
     <p:spTree>
       <p:nvGrpSpPr>
         <p:cNvPr id="1" name=""/>
@@ -2669,35 +4370,13 @@
           <a:chExt cx="0" cy="0"/>
         </a:xfrm>
       </p:grpSpPr>
-      <p:pic>
-        <p:nvPicPr>
-          <p:cNvPr id="2" name="Image 0" descr="logo-goetheanum-blue.png">    </p:cNvPr>
-          <p:cNvPicPr>
-            <a:picLocks noChangeAspect="1"/>
-          </p:cNvPicPr>
-          <p:nvPr/>
-        </p:nvPicPr>
-        <p:blipFill>
-          <a:blip r:embed="rId1"/>
-          <a:stretch>
-            <a:fillRect/>
-          </a:stretch>
-        </p:blipFill>
-        <p:spPr>
-          <a:xfrm>
-            <a:off x="548640" y="502920"/>
-            <a:ext cx="1088402" cy="182880"/>
-          </a:xfrm>
-          <a:prstGeom prst="rect">
-            <a:avLst/>
-          </a:prstGeom>
-        </p:spPr>
-      </p:pic>
-      <p:sp>
-        <p:nvSpPr>
-          <p:cNvPr id="3" name="Text 0"/>
-          <p:cNvSpPr/>
-          <p:nvPr/>
+      <p:sp>
+        <p:nvSpPr>
+          <p:cNvPr id="2" name="Text 1"/>
+          <p:cNvSpPr/>
+          <p:nvPr>
+            <p:ph idx="102" type="body" hasCustomPrompt="1"/>
+          </p:nvPr>
         </p:nvSpPr>
         <p:spPr>
           <a:xfrm>
@@ -2711,7 +4390,7 @@
           <a:ln/>
         </p:spPr>
         <p:txBody>
-          <a:bodyPr wrap="square" lIns="0" tIns="0" rIns="0" bIns="0" rtlCol="0" anchor="ctr"/>
+          <a:bodyPr wrap="square" lIns="0" tIns="0" rIns="0" bIns="0" rtlCol="0"/>
           <a:lstStyle/>
           <a:p>
             <a:pPr indent="0" marL="0">
@@ -2734,9 +4413,11 @@
       </p:sp>
       <p:sp>
         <p:nvSpPr>
-          <p:cNvPr id="4" name="Text 1"/>
-          <p:cNvSpPr/>
-          <p:nvPr/>
+          <p:cNvPr id="3" name="Text 1"/>
+          <p:cNvSpPr/>
+          <p:nvPr>
+            <p:ph idx="103" type="title" hasCustomPrompt="1"/>
+          </p:nvPr>
         </p:nvSpPr>
         <p:spPr>
           <a:xfrm>
@@ -2750,7 +4431,7 @@
           <a:ln/>
         </p:spPr>
         <p:txBody>
-          <a:bodyPr wrap="square" lIns="0" tIns="0" rIns="0" bIns="0" rtlCol="0" anchor="ctr"/>
+          <a:bodyPr wrap="square" lIns="0" tIns="0" rIns="0" bIns="0" rtlCol="0"/>
           <a:lstStyle/>
           <a:p>
             <a:pPr indent="0" marL="0">
@@ -2761,9 +4442,9 @@
                 <a:solidFill>
                   <a:srgbClr val="1A1A1A"/>
                 </a:solidFill>
-                <a:latin typeface="Goetheanum Schrift Klar" pitchFamily="34" charset="0"/>
-                <a:ea typeface="Goetheanum Schrift Klar" pitchFamily="34" charset="-122"/>
-                <a:cs typeface="Goetheanum Schrift Klar" pitchFamily="34" charset="-120"/>
+                <a:latin typeface="Goetheanum Schrift Deutlich" pitchFamily="34" charset="0"/>
+                <a:ea typeface="Goetheanum Schrift Deutlich" pitchFamily="34" charset="-122"/>
+                <a:cs typeface="Goetheanum Schrift Deutlich" pitchFamily="34" charset="-120"/>
               </a:rPr>
               <a:t>Das Jahr in vier Kennzahlen</a:t>
             </a:r>
@@ -2773,7 +4454,7 @@
       </p:sp>
       <p:sp>
         <p:nvSpPr>
-          <p:cNvPr id="5" name="Shape 2"/>
+          <p:cNvPr id="4" name="Shape 2"/>
           <p:cNvSpPr/>
           <p:nvPr/>
         </p:nvSpPr>
@@ -2795,7 +4476,7 @@
       </p:sp>
       <p:sp>
         <p:nvSpPr>
-          <p:cNvPr id="6" name="Text 3"/>
+          <p:cNvPr id="5" name="Text 3"/>
           <p:cNvSpPr/>
           <p:nvPr/>
         </p:nvSpPr>
@@ -2826,7 +4507,7 @@
                 <a:ea typeface="Goetheanum Schrift Laut" pitchFamily="34" charset="-122"/>
                 <a:cs typeface="Goetheanum Schrift Laut" pitchFamily="34" charset="-120"/>
               </a:rPr>
-              <a:t>12,4 Mio</a:t>
+              <a:t>12,4 Mio</a:t>
             </a:r>
             <a:endParaRPr lang="en-US" sz="2600" dirty="0"/>
           </a:p>
@@ -2834,7 +4515,7 @@
       </p:sp>
       <p:sp>
         <p:nvSpPr>
-          <p:cNvPr id="7" name="Text 4"/>
+          <p:cNvPr id="6" name="Text 4"/>
           <p:cNvSpPr/>
           <p:nvPr/>
         </p:nvSpPr>
@@ -2873,7 +4554,7 @@
       </p:sp>
       <p:sp>
         <p:nvSpPr>
-          <p:cNvPr id="8" name="Shape 5"/>
+          <p:cNvPr id="7" name="Shape 5"/>
           <p:cNvSpPr/>
           <p:nvPr/>
         </p:nvSpPr>
@@ -2895,7 +4576,7 @@
       </p:sp>
       <p:sp>
         <p:nvSpPr>
-          <p:cNvPr id="9" name="Text 6"/>
+          <p:cNvPr id="8" name="Text 6"/>
           <p:cNvSpPr/>
           <p:nvPr/>
         </p:nvSpPr>
@@ -2926,7 +4607,7 @@
                 <a:ea typeface="Goetheanum Schrift Laut" pitchFamily="34" charset="-122"/>
                 <a:cs typeface="Goetheanum Schrift Laut" pitchFamily="34" charset="-120"/>
               </a:rPr>
-              <a:t>–2,1 %</a:t>
+              <a:t>−2,1 %</a:t>
             </a:r>
             <a:endParaRPr lang="en-US" sz="2600" dirty="0"/>
           </a:p>
@@ -2934,7 +4615,7 @@
       </p:sp>
       <p:sp>
         <p:nvSpPr>
-          <p:cNvPr id="10" name="Text 7"/>
+          <p:cNvPr id="9" name="Text 7"/>
           <p:cNvSpPr/>
           <p:nvPr/>
         </p:nvSpPr>
@@ -2973,7 +4654,7 @@
       </p:sp>
       <p:sp>
         <p:nvSpPr>
-          <p:cNvPr id="11" name="Shape 8"/>
+          <p:cNvPr id="10" name="Shape 8"/>
           <p:cNvSpPr/>
           <p:nvPr/>
         </p:nvSpPr>
@@ -2995,7 +4676,7 @@
       </p:sp>
       <p:sp>
         <p:nvSpPr>
-          <p:cNvPr id="12" name="Text 9"/>
+          <p:cNvPr id="11" name="Text 9"/>
           <p:cNvSpPr/>
           <p:nvPr/>
         </p:nvSpPr>
@@ -3026,7 +4707,7 @@
                 <a:ea typeface="Goetheanum Schrift Laut" pitchFamily="34" charset="-122"/>
                 <a:cs typeface="Goetheanum Schrift Laut" pitchFamily="34" charset="-120"/>
               </a:rPr>
-              <a:t>86 %</a:t>
+              <a:t>86 %</a:t>
             </a:r>
             <a:endParaRPr lang="en-US" sz="2600" dirty="0"/>
           </a:p>
@@ -3034,7 +4715,7 @@
       </p:sp>
       <p:sp>
         <p:nvSpPr>
-          <p:cNvPr id="13" name="Text 10"/>
+          <p:cNvPr id="12" name="Text 10"/>
           <p:cNvSpPr/>
           <p:nvPr/>
         </p:nvSpPr>
@@ -3073,7 +4754,7 @@
       </p:sp>
       <p:sp>
         <p:nvSpPr>
-          <p:cNvPr id="14" name="Shape 11"/>
+          <p:cNvPr id="13" name="Shape 11"/>
           <p:cNvSpPr/>
           <p:nvPr/>
         </p:nvSpPr>
@@ -3095,7 +4776,7 @@
       </p:sp>
       <p:sp>
         <p:nvSpPr>
-          <p:cNvPr id="15" name="Text 12"/>
+          <p:cNvPr id="14" name="Text 12"/>
           <p:cNvSpPr/>
           <p:nvPr/>
         </p:nvSpPr>
@@ -3126,7 +4807,7 @@
                 <a:ea typeface="Goetheanum Schrift Laut" pitchFamily="34" charset="-122"/>
                 <a:cs typeface="Goetheanum Schrift Laut" pitchFamily="34" charset="-120"/>
               </a:rPr>
-              <a:t>3,2 Mio</a:t>
+              <a:t>3,2 Mio</a:t>
             </a:r>
             <a:endParaRPr lang="en-US" sz="2600" dirty="0"/>
           </a:p>
@@ -3134,7 +4815,7 @@
       </p:sp>
       <p:sp>
         <p:nvSpPr>
-          <p:cNvPr id="16" name="Text 13"/>
+          <p:cNvPr id="15" name="Text 13"/>
           <p:cNvSpPr/>
           <p:nvPr/>
         </p:nvSpPr>
@@ -3173,7 +4854,7 @@
       </p:sp>
       <p:sp>
         <p:nvSpPr>
-          <p:cNvPr id="17" name="Text 14"/>
+          <p:cNvPr id="16" name="Text 14"/>
           <p:cNvSpPr/>
           <p:nvPr/>
         </p:nvSpPr>
@@ -3212,40 +4893,49 @@
       </p:sp>
       <p:sp>
         <p:nvSpPr>
-          <p:cNvPr id="18" name="Text 15"/>
-          <p:cNvSpPr/>
-          <p:nvPr/>
-        </p:nvSpPr>
-        <p:spPr>
-          <a:xfrm>
-            <a:off x="4654296" y="6995160"/>
-            <a:ext cx="5486400" cy="274320"/>
-          </a:xfrm>
-          <a:prstGeom prst="rect">
-            <a:avLst/>
-          </a:prstGeom>
-          <a:noFill/>
-          <a:ln/>
-        </p:spPr>
-        <p:txBody>
-          <a:bodyPr wrap="square" lIns="0" tIns="0" rIns="0" bIns="0" rtlCol="0" anchor="ctr"/>
-          <a:lstStyle/>
-          <a:p>
-            <a:pPr algn="r" indent="0" marL="0">
-              <a:buNone/>
-            </a:pPr>
-            <a:r>
-              <a:rPr lang="en-US" sz="900" dirty="0">
+          <p:cNvPr id="25" name="Slide Number Placeholder 0"/>
+          <p:cNvSpPr>
+            <a:spLocks noGrp="1"/>
+          </p:cNvSpPr>
+          <p:nvPr>
+            <p:ph type="sldNum" sz="quarter" idx="4294967295"/>
+          </p:nvPr>
+        </p:nvSpPr>
+        <p:spPr>
+          <a:xfrm>
+            <a:off x="9747504" y="6995160"/>
+            <a:ext cx="393192" cy="274320"/>
+          </a:xfrm>
+          <a:prstGeom prst="rect">
+            <a:avLst/>
+          </a:prstGeom>
+          <a:extLst>
+            <a:ext uri="{C572A759-6A51-4108-AA02-DFA0A04FC94B}">
+              <ma14:wrappingTextBoxFlag xmlns:ma14="http://schemas.microsoft.com/office/mac/drawingml/2011/main" val="0"/>
+            </a:ext>
+          </a:extLst>
+        </p:spPr>
+        <p:txBody>
+          <a:bodyPr anchor="ctr"/>
+          <a:lstStyle>
+            <a:lvl1pPr>
+              <a:defRPr sz="900">
                 <a:solidFill>
                   <a:srgbClr val="6B7480"/>
                 </a:solidFill>
-                <a:latin typeface="Goetheanum Schrift Klar" pitchFamily="34" charset="0"/>
-                <a:ea typeface="Goetheanum Schrift Klar" pitchFamily="34" charset="-122"/>
-                <a:cs typeface="Goetheanum Schrift Klar" pitchFamily="34" charset="-120"/>
-              </a:rPr>
-              <a:t>Titel der Präsentation · 00.00.2026 · 10</a:t>
-            </a:r>
-            <a:endParaRPr lang="en-US" sz="900" dirty="0"/>
+                <a:latin typeface="Goetheanum Schrift Klar"/>
+                <a:ea typeface="Goetheanum Schrift Klar"/>
+                <a:cs typeface="Goetheanum Schrift Klar"/>
+              </a:defRPr>
+            </a:lvl1pPr>
+          </a:lstStyle>
+          <a:p>
+            <a:pPr algn="l"/>
+            <a:fld id="{F7021451-1387-4CA6-816F-3879F97B5CBC}" type="slidenum">
+              <a:rPr b="0" lang="en-US"/>
+              <a:t>10</a:t>
+            </a:fld>
+            <a:endParaRPr lang="en-US"/>
           </a:p>
         </p:txBody>
       </p:sp>
@@ -3260,13 +4950,6 @@
 <file path=ppt/slides/slide11.xml><?xml version="1.0" encoding="utf-8"?>
 <p:sld xmlns:a="http://schemas.openxmlformats.org/drawingml/2006/main" xmlns:r="http://schemas.openxmlformats.org/officeDocument/2006/relationships" xmlns:p="http://schemas.openxmlformats.org/presentationml/2006/main">
   <p:cSld name="Slide 11">
-    <p:bg>
-      <p:bgPr>
-        <a:solidFill>
-          <a:srgbClr val="FFFFFF"/>
-        </a:solidFill>
-      </p:bgPr>
-    </p:bg>
     <p:spTree>
       <p:nvGrpSpPr>
         <p:cNvPr id="1" name=""/>
@@ -3281,35 +4964,13 @@
           <a:chExt cx="0" cy="0"/>
         </a:xfrm>
       </p:grpSpPr>
-      <p:pic>
-        <p:nvPicPr>
-          <p:cNvPr id="2" name="Image 0" descr="logo-goetheanum-blue.png">    </p:cNvPr>
-          <p:cNvPicPr>
-            <a:picLocks noChangeAspect="1"/>
-          </p:cNvPicPr>
-          <p:nvPr/>
-        </p:nvPicPr>
-        <p:blipFill>
-          <a:blip r:embed="rId1"/>
-          <a:stretch>
-            <a:fillRect/>
-          </a:stretch>
-        </p:blipFill>
-        <p:spPr>
-          <a:xfrm>
-            <a:off x="548640" y="502920"/>
-            <a:ext cx="1088402" cy="182880"/>
-          </a:xfrm>
-          <a:prstGeom prst="rect">
-            <a:avLst/>
-          </a:prstGeom>
-        </p:spPr>
-      </p:pic>
-      <p:sp>
-        <p:nvSpPr>
-          <p:cNvPr id="3" name="Text 0"/>
-          <p:cNvSpPr/>
-          <p:nvPr/>
+      <p:sp>
+        <p:nvSpPr>
+          <p:cNvPr id="2" name="Text 1"/>
+          <p:cNvSpPr/>
+          <p:nvPr>
+            <p:ph idx="102" type="body" hasCustomPrompt="1"/>
+          </p:nvPr>
         </p:nvSpPr>
         <p:spPr>
           <a:xfrm>
@@ -3323,7 +4984,7 @@
           <a:ln/>
         </p:spPr>
         <p:txBody>
-          <a:bodyPr wrap="square" lIns="0" tIns="0" rIns="0" bIns="0" rtlCol="0" anchor="ctr"/>
+          <a:bodyPr wrap="square" lIns="0" tIns="0" rIns="0" bIns="0" rtlCol="0"/>
           <a:lstStyle/>
           <a:p>
             <a:pPr indent="0" marL="0">
@@ -3346,9 +5007,11 @@
       </p:sp>
       <p:sp>
         <p:nvSpPr>
-          <p:cNvPr id="4" name="Text 1"/>
-          <p:cNvSpPr/>
-          <p:nvPr/>
+          <p:cNvPr id="3" name="Text 1"/>
+          <p:cNvSpPr/>
+          <p:nvPr>
+            <p:ph idx="103" type="title" hasCustomPrompt="1"/>
+          </p:nvPr>
         </p:nvSpPr>
         <p:spPr>
           <a:xfrm>
@@ -3362,7 +5025,7 @@
           <a:ln/>
         </p:spPr>
         <p:txBody>
-          <a:bodyPr wrap="square" lIns="0" tIns="0" rIns="0" bIns="0" rtlCol="0" anchor="ctr"/>
+          <a:bodyPr wrap="square" lIns="0" tIns="0" rIns="0" bIns="0" rtlCol="0"/>
           <a:lstStyle/>
           <a:p>
             <a:pPr indent="0" marL="0">
@@ -3373,9 +5036,9 @@
                 <a:solidFill>
                   <a:srgbClr val="1A1A1A"/>
                 </a:solidFill>
-                <a:latin typeface="Goetheanum Schrift Klar" pitchFamily="34" charset="0"/>
-                <a:ea typeface="Goetheanum Schrift Klar" pitchFamily="34" charset="-122"/>
-                <a:cs typeface="Goetheanum Schrift Klar" pitchFamily="34" charset="-120"/>
+                <a:latin typeface="Goetheanum Schrift Deutlich" pitchFamily="34" charset="0"/>
+                <a:ea typeface="Goetheanum Schrift Deutlich" pitchFamily="34" charset="-122"/>
+                <a:cs typeface="Goetheanum Schrift Deutlich" pitchFamily="34" charset="-120"/>
               </a:rPr>
               <a:t>Entwicklung über vier Jahre</a:t>
             </a:r>
@@ -3385,7 +5048,7 @@
       </p:sp>
       <p:graphicFrame>
         <p:nvGraphicFramePr>
-          <p:cNvPr id="5" name="Chart 0" descr=""/>
+          <p:cNvPr id="4" name="Chart 0" descr=""/>
           <p:cNvGraphicFramePr/>
           <p:nvPr/>
         </p:nvGraphicFramePr>
@@ -3395,13 +5058,13 @@
         </p:xfrm>
         <a:graphic xmlns:a="http://schemas.openxmlformats.org/drawingml/2006/main">
           <a:graphicData uri="http://schemas.openxmlformats.org/drawingml/2006/chart">
-            <c:chart xmlns:c="http://schemas.openxmlformats.org/drawingml/2006/chart" r:id="rId2"/>
+            <c:chart xmlns:c="http://schemas.openxmlformats.org/drawingml/2006/chart" r:id="rId1"/>
           </a:graphicData>
         </a:graphic>
       </p:graphicFrame>
       <p:sp>
         <p:nvSpPr>
-          <p:cNvPr id="6" name="Text 2"/>
+          <p:cNvPr id="5" name="Text 2"/>
           <p:cNvSpPr/>
           <p:nvPr/>
         </p:nvSpPr>
@@ -3506,7 +5169,7 @@
       </p:sp>
       <p:sp>
         <p:nvSpPr>
-          <p:cNvPr id="7" name="Text 3"/>
+          <p:cNvPr id="6" name="Text 3"/>
           <p:cNvSpPr/>
           <p:nvPr/>
         </p:nvSpPr>
@@ -3545,40 +5208,49 @@
       </p:sp>
       <p:sp>
         <p:nvSpPr>
-          <p:cNvPr id="8" name="Text 4"/>
-          <p:cNvSpPr/>
-          <p:nvPr/>
-        </p:nvSpPr>
-        <p:spPr>
-          <a:xfrm>
-            <a:off x="4654296" y="6995160"/>
-            <a:ext cx="5486400" cy="274320"/>
-          </a:xfrm>
-          <a:prstGeom prst="rect">
-            <a:avLst/>
-          </a:prstGeom>
-          <a:noFill/>
-          <a:ln/>
-        </p:spPr>
-        <p:txBody>
-          <a:bodyPr wrap="square" lIns="0" tIns="0" rIns="0" bIns="0" rtlCol="0" anchor="ctr"/>
-          <a:lstStyle/>
-          <a:p>
-            <a:pPr algn="r" indent="0" marL="0">
-              <a:buNone/>
-            </a:pPr>
-            <a:r>
-              <a:rPr lang="en-US" sz="900" dirty="0">
+          <p:cNvPr id="25" name="Slide Number Placeholder 0"/>
+          <p:cNvSpPr>
+            <a:spLocks noGrp="1"/>
+          </p:cNvSpPr>
+          <p:nvPr>
+            <p:ph type="sldNum" sz="quarter" idx="4294967295"/>
+          </p:nvPr>
+        </p:nvSpPr>
+        <p:spPr>
+          <a:xfrm>
+            <a:off x="9747504" y="6995160"/>
+            <a:ext cx="393192" cy="274320"/>
+          </a:xfrm>
+          <a:prstGeom prst="rect">
+            <a:avLst/>
+          </a:prstGeom>
+          <a:extLst>
+            <a:ext uri="{C572A759-6A51-4108-AA02-DFA0A04FC94B}">
+              <ma14:wrappingTextBoxFlag xmlns:ma14="http://schemas.microsoft.com/office/mac/drawingml/2011/main" val="0"/>
+            </a:ext>
+          </a:extLst>
+        </p:spPr>
+        <p:txBody>
+          <a:bodyPr anchor="ctr"/>
+          <a:lstStyle>
+            <a:lvl1pPr>
+              <a:defRPr sz="900">
                 <a:solidFill>
                   <a:srgbClr val="6B7480"/>
                 </a:solidFill>
-                <a:latin typeface="Goetheanum Schrift Klar" pitchFamily="34" charset="0"/>
-                <a:ea typeface="Goetheanum Schrift Klar" pitchFamily="34" charset="-122"/>
-                <a:cs typeface="Goetheanum Schrift Klar" pitchFamily="34" charset="-120"/>
-              </a:rPr>
-              <a:t>Titel der Präsentation · 00.00.2026 · 11</a:t>
-            </a:r>
-            <a:endParaRPr lang="en-US" sz="900" dirty="0"/>
+                <a:latin typeface="Goetheanum Schrift Klar"/>
+                <a:ea typeface="Goetheanum Schrift Klar"/>
+                <a:cs typeface="Goetheanum Schrift Klar"/>
+              </a:defRPr>
+            </a:lvl1pPr>
+          </a:lstStyle>
+          <a:p>
+            <a:pPr algn="l"/>
+            <a:fld id="{F7021451-1387-4CA6-816F-3879F97B5CBC}" type="slidenum">
+              <a:rPr b="0" lang="en-US"/>
+              <a:t>11</a:t>
+            </a:fld>
+            <a:endParaRPr lang="en-US"/>
           </a:p>
         </p:txBody>
       </p:sp>
@@ -3593,13 +5265,6 @@
 <file path=ppt/slides/slide12.xml><?xml version="1.0" encoding="utf-8"?>
 <p:sld xmlns:a="http://schemas.openxmlformats.org/drawingml/2006/main" xmlns:r="http://schemas.openxmlformats.org/officeDocument/2006/relationships" xmlns:p="http://schemas.openxmlformats.org/presentationml/2006/main">
   <p:cSld name="Slide 12">
-    <p:bg>
-      <p:bgPr>
-        <a:solidFill>
-          <a:srgbClr val="FFFFFF"/>
-        </a:solidFill>
-      </p:bgPr>
-    </p:bg>
     <p:spTree>
       <p:nvGrpSpPr>
         <p:cNvPr id="1" name=""/>
@@ -3614,35 +5279,13 @@
           <a:chExt cx="0" cy="0"/>
         </a:xfrm>
       </p:grpSpPr>
-      <p:pic>
-        <p:nvPicPr>
-          <p:cNvPr id="2" name="Image 0" descr="logo-goetheanum-blue.png">    </p:cNvPr>
-          <p:cNvPicPr>
-            <a:picLocks noChangeAspect="1"/>
-          </p:cNvPicPr>
-          <p:nvPr/>
-        </p:nvPicPr>
-        <p:blipFill>
-          <a:blip r:embed="rId1"/>
-          <a:stretch>
-            <a:fillRect/>
-          </a:stretch>
-        </p:blipFill>
-        <p:spPr>
-          <a:xfrm>
-            <a:off x="548640" y="502920"/>
-            <a:ext cx="1088402" cy="182880"/>
-          </a:xfrm>
-          <a:prstGeom prst="rect">
-            <a:avLst/>
-          </a:prstGeom>
-        </p:spPr>
-      </p:pic>
-      <p:sp>
-        <p:nvSpPr>
-          <p:cNvPr id="3" name="Text 0"/>
-          <p:cNvSpPr/>
-          <p:nvPr/>
+      <p:sp>
+        <p:nvSpPr>
+          <p:cNvPr id="2" name="Text 1"/>
+          <p:cNvSpPr/>
+          <p:nvPr>
+            <p:ph idx="102" type="body" hasCustomPrompt="1"/>
+          </p:nvPr>
         </p:nvSpPr>
         <p:spPr>
           <a:xfrm>
@@ -3656,7 +5299,7 @@
           <a:ln/>
         </p:spPr>
         <p:txBody>
-          <a:bodyPr wrap="square" lIns="0" tIns="0" rIns="0" bIns="0" rtlCol="0" anchor="ctr"/>
+          <a:bodyPr wrap="square" lIns="0" tIns="0" rIns="0" bIns="0" rtlCol="0"/>
           <a:lstStyle/>
           <a:p>
             <a:pPr indent="0" marL="0">
@@ -3679,9 +5322,11 @@
       </p:sp>
       <p:sp>
         <p:nvSpPr>
-          <p:cNvPr id="4" name="Text 1"/>
-          <p:cNvSpPr/>
-          <p:nvPr/>
+          <p:cNvPr id="3" name="Text 1"/>
+          <p:cNvSpPr/>
+          <p:nvPr>
+            <p:ph idx="103" type="title" hasCustomPrompt="1"/>
+          </p:nvPr>
         </p:nvSpPr>
         <p:spPr>
           <a:xfrm>
@@ -3695,7 +5340,7 @@
           <a:ln/>
         </p:spPr>
         <p:txBody>
-          <a:bodyPr wrap="square" lIns="0" tIns="0" rIns="0" bIns="0" rtlCol="0" anchor="ctr"/>
+          <a:bodyPr wrap="square" lIns="0" tIns="0" rIns="0" bIns="0" rtlCol="0"/>
           <a:lstStyle/>
           <a:p>
             <a:pPr indent="0" marL="0">
@@ -3706,9 +5351,9 @@
                 <a:solidFill>
                   <a:srgbClr val="1A1A1A"/>
                 </a:solidFill>
-                <a:latin typeface="Goetheanum Schrift Klar" pitchFamily="34" charset="0"/>
-                <a:ea typeface="Goetheanum Schrift Klar" pitchFamily="34" charset="-122"/>
-                <a:cs typeface="Goetheanum Schrift Klar" pitchFamily="34" charset="-120"/>
+                <a:latin typeface="Goetheanum Schrift Deutlich" pitchFamily="34" charset="0"/>
+                <a:ea typeface="Goetheanum Schrift Deutlich" pitchFamily="34" charset="-122"/>
+                <a:cs typeface="Goetheanum Schrift Deutlich" pitchFamily="34" charset="-120"/>
               </a:rPr>
               <a:t>Ergebnis nach Bereichen</a:t>
             </a:r>
@@ -3981,7 +5626,7 @@
                           <a:ea typeface="Goetheanum Schrift Klar" pitchFamily="34" charset="-122"/>
                           <a:cs typeface="Goetheanum Schrift Klar" pitchFamily="34" charset="-120"/>
                         </a:rPr>
-                        <a:t>4 120</a:t>
+                        <a:t>4120</a:t>
                       </a:r>
                       <a:endParaRPr lang="en-US" sz="1300" dirty="0">
                         <a:latin typeface="Goetheanum Schrift Klar" charset="0"/>
@@ -4022,7 +5667,7 @@
                           <a:ea typeface="Goetheanum Schrift Klar" pitchFamily="34" charset="-122"/>
                           <a:cs typeface="Goetheanum Schrift Klar" pitchFamily="34" charset="-120"/>
                         </a:rPr>
-                        <a:t>4 380</a:t>
+                        <a:t>4380</a:t>
                       </a:r>
                       <a:endParaRPr lang="en-US" sz="1300" dirty="0">
                         <a:latin typeface="Goetheanum Schrift Klar" charset="0"/>
@@ -4150,7 +5795,7 @@
                           <a:ea typeface="Goetheanum Schrift Klar" pitchFamily="34" charset="-122"/>
                           <a:cs typeface="Goetheanum Schrift Klar" pitchFamily="34" charset="-120"/>
                         </a:rPr>
-                        <a:t>2 950</a:t>
+                        <a:t>2950</a:t>
                       </a:r>
                       <a:endParaRPr lang="en-US" sz="1300" dirty="0">
                         <a:latin typeface="Goetheanum Schrift Klar" charset="0"/>
@@ -4194,7 +5839,7 @@
                           <a:ea typeface="Goetheanum Schrift Klar" pitchFamily="34" charset="-122"/>
                           <a:cs typeface="Goetheanum Schrift Klar" pitchFamily="34" charset="-120"/>
                         </a:rPr>
-                        <a:t>2 870</a:t>
+                        <a:t>2870</a:t>
                       </a:r>
                       <a:endParaRPr lang="en-US" sz="1300" dirty="0">
                         <a:latin typeface="Goetheanum Schrift Klar" charset="0"/>
@@ -4238,7 +5883,7 @@
                           <a:ea typeface="Goetheanum Schrift Klar" pitchFamily="34" charset="-122"/>
                           <a:cs typeface="Goetheanum Schrift Klar" pitchFamily="34" charset="-120"/>
                         </a:rPr>
-                        <a:t>–80</a:t>
+                        <a:t>−80</a:t>
                       </a:r>
                       <a:endParaRPr lang="en-US" sz="1300" dirty="0">
                         <a:latin typeface="Goetheanum Schrift Klar" charset="0"/>
@@ -4325,7 +5970,7 @@
                           <a:ea typeface="Goetheanum Schrift Klar" pitchFamily="34" charset="-122"/>
                           <a:cs typeface="Goetheanum Schrift Klar" pitchFamily="34" charset="-120"/>
                         </a:rPr>
-                        <a:t>1 410</a:t>
+                        <a:t>1410</a:t>
                       </a:r>
                       <a:endParaRPr lang="en-US" sz="1300" dirty="0">
                         <a:latin typeface="Goetheanum Schrift Klar" charset="0"/>
@@ -4366,7 +6011,7 @@
                           <a:ea typeface="Goetheanum Schrift Klar" pitchFamily="34" charset="-122"/>
                           <a:cs typeface="Goetheanum Schrift Klar" pitchFamily="34" charset="-120"/>
                         </a:rPr>
-                        <a:t>1 530</a:t>
+                        <a:t>1530</a:t>
                       </a:r>
                       <a:endParaRPr lang="en-US" sz="1300" dirty="0">
                         <a:latin typeface="Goetheanum Schrift Klar" charset="0"/>
@@ -4494,7 +6139,7 @@
                           <a:ea typeface="Goetheanum Schrift Klar" pitchFamily="34" charset="-122"/>
                           <a:cs typeface="Goetheanum Schrift Klar" pitchFamily="34" charset="-120"/>
                         </a:rPr>
-                        <a:t>3 210</a:t>
+                        <a:t>3210</a:t>
                       </a:r>
                       <a:endParaRPr lang="en-US" sz="1300" dirty="0">
                         <a:latin typeface="Goetheanum Schrift Klar" charset="0"/>
@@ -4538,7 +6183,7 @@
                           <a:ea typeface="Goetheanum Schrift Klar" pitchFamily="34" charset="-122"/>
                           <a:cs typeface="Goetheanum Schrift Klar" pitchFamily="34" charset="-120"/>
                         </a:rPr>
-                        <a:t>3 640</a:t>
+                        <a:t>3640</a:t>
                       </a:r>
                       <a:endParaRPr lang="en-US" sz="1300" dirty="0">
                         <a:latin typeface="Goetheanum Schrift Klar" charset="0"/>
@@ -4669,7 +6314,7 @@
                           <a:ea typeface="Goetheanum Schrift Laut" pitchFamily="34" charset="-122"/>
                           <a:cs typeface="Goetheanum Schrift Laut" pitchFamily="34" charset="-120"/>
                         </a:rPr>
-                        <a:t>11 690</a:t>
+                        <a:t>11 690</a:t>
                       </a:r>
                       <a:endParaRPr lang="en-US" sz="1300" dirty="0">
                         <a:latin typeface="Goetheanum Schrift Laut" charset="0"/>
@@ -4710,7 +6355,7 @@
                           <a:ea typeface="Goetheanum Schrift Laut" pitchFamily="34" charset="-122"/>
                           <a:cs typeface="Goetheanum Schrift Laut" pitchFamily="34" charset="-120"/>
                         </a:rPr>
-                        <a:t>12 420</a:t>
+                        <a:t>12 420</a:t>
                       </a:r>
                       <a:endParaRPr lang="en-US" sz="1300" dirty="0">
                         <a:latin typeface="Goetheanum Schrift Laut" charset="0"/>
@@ -4782,7 +6427,7 @@
       </p:graphicFrame>
       <p:sp>
         <p:nvSpPr>
-          <p:cNvPr id="6" name="Text 2"/>
+          <p:cNvPr id="5" name="Text 2"/>
           <p:cNvSpPr/>
           <p:nvPr/>
         </p:nvSpPr>
@@ -4821,40 +6466,49 @@
       </p:sp>
       <p:sp>
         <p:nvSpPr>
-          <p:cNvPr id="7" name="Text 3"/>
-          <p:cNvSpPr/>
-          <p:nvPr/>
-        </p:nvSpPr>
-        <p:spPr>
-          <a:xfrm>
-            <a:off x="4654296" y="6995160"/>
-            <a:ext cx="5486400" cy="274320"/>
-          </a:xfrm>
-          <a:prstGeom prst="rect">
-            <a:avLst/>
-          </a:prstGeom>
-          <a:noFill/>
-          <a:ln/>
-        </p:spPr>
-        <p:txBody>
-          <a:bodyPr wrap="square" lIns="0" tIns="0" rIns="0" bIns="0" rtlCol="0" anchor="ctr"/>
-          <a:lstStyle/>
-          <a:p>
-            <a:pPr algn="r" indent="0" marL="0">
-              <a:buNone/>
-            </a:pPr>
-            <a:r>
-              <a:rPr lang="en-US" sz="900" dirty="0">
+          <p:cNvPr id="25" name="Slide Number Placeholder 0"/>
+          <p:cNvSpPr>
+            <a:spLocks noGrp="1"/>
+          </p:cNvSpPr>
+          <p:nvPr>
+            <p:ph type="sldNum" sz="quarter" idx="4294967295"/>
+          </p:nvPr>
+        </p:nvSpPr>
+        <p:spPr>
+          <a:xfrm>
+            <a:off x="9747504" y="6995160"/>
+            <a:ext cx="393192" cy="274320"/>
+          </a:xfrm>
+          <a:prstGeom prst="rect">
+            <a:avLst/>
+          </a:prstGeom>
+          <a:extLst>
+            <a:ext uri="{C572A759-6A51-4108-AA02-DFA0A04FC94B}">
+              <ma14:wrappingTextBoxFlag xmlns:ma14="http://schemas.microsoft.com/office/mac/drawingml/2011/main" val="0"/>
+            </a:ext>
+          </a:extLst>
+        </p:spPr>
+        <p:txBody>
+          <a:bodyPr anchor="ctr"/>
+          <a:lstStyle>
+            <a:lvl1pPr>
+              <a:defRPr sz="900">
                 <a:solidFill>
                   <a:srgbClr val="6B7480"/>
                 </a:solidFill>
-                <a:latin typeface="Goetheanum Schrift Klar" pitchFamily="34" charset="0"/>
-                <a:ea typeface="Goetheanum Schrift Klar" pitchFamily="34" charset="-122"/>
-                <a:cs typeface="Goetheanum Schrift Klar" pitchFamily="34" charset="-120"/>
-              </a:rPr>
-              <a:t>Titel der Präsentation · 00.00.2026 · 12</a:t>
-            </a:r>
-            <a:endParaRPr lang="en-US" sz="900" dirty="0"/>
+                <a:latin typeface="Goetheanum Schrift Klar"/>
+                <a:ea typeface="Goetheanum Schrift Klar"/>
+                <a:cs typeface="Goetheanum Schrift Klar"/>
+              </a:defRPr>
+            </a:lvl1pPr>
+          </a:lstStyle>
+          <a:p>
+            <a:pPr algn="l"/>
+            <a:fld id="{F7021451-1387-4CA6-816F-3879F97B5CBC}" type="slidenum">
+              <a:rPr b="0" lang="en-US"/>
+              <a:t>12</a:t>
+            </a:fld>
+            <a:endParaRPr lang="en-US"/>
           </a:p>
         </p:txBody>
       </p:sp>
@@ -4869,13 +6523,6 @@
 <file path=ppt/slides/slide13.xml><?xml version="1.0" encoding="utf-8"?>
 <p:sld xmlns:a="http://schemas.openxmlformats.org/drawingml/2006/main" xmlns:r="http://schemas.openxmlformats.org/officeDocument/2006/relationships" xmlns:p="http://schemas.openxmlformats.org/presentationml/2006/main">
   <p:cSld name="Slide 13">
-    <p:bg>
-      <p:bgPr>
-        <a:solidFill>
-          <a:srgbClr val="FFFFFF"/>
-        </a:solidFill>
-      </p:bgPr>
-    </p:bg>
     <p:spTree>
       <p:nvGrpSpPr>
         <p:cNvPr id="1" name=""/>
@@ -4890,39 +6537,17 @@
           <a:chExt cx="0" cy="0"/>
         </a:xfrm>
       </p:grpSpPr>
-      <p:pic>
-        <p:nvPicPr>
-          <p:cNvPr id="2" name="Image 0" descr="logo-goetheanum-blue.png">    </p:cNvPr>
-          <p:cNvPicPr>
-            <a:picLocks noChangeAspect="1"/>
-          </p:cNvPicPr>
-          <p:nvPr/>
-        </p:nvPicPr>
-        <p:blipFill>
-          <a:blip r:embed="rId1"/>
-          <a:stretch>
-            <a:fillRect/>
-          </a:stretch>
-        </p:blipFill>
-        <p:spPr>
-          <a:xfrm>
-            <a:off x="548640" y="502920"/>
-            <a:ext cx="1088402" cy="182880"/>
-          </a:xfrm>
-          <a:prstGeom prst="rect">
-            <a:avLst/>
-          </a:prstGeom>
-        </p:spPr>
-      </p:pic>
-      <p:sp>
-        <p:nvSpPr>
-          <p:cNvPr id="3" name="Text 0"/>
-          <p:cNvSpPr/>
-          <p:nvPr/>
-        </p:nvSpPr>
-        <p:spPr>
-          <a:xfrm>
-            <a:off x="2002536" y="1143000"/>
+      <p:sp>
+        <p:nvSpPr>
+          <p:cNvPr id="2" name="Text 1"/>
+          <p:cNvSpPr/>
+          <p:nvPr>
+            <p:ph idx="102" type="body" hasCustomPrompt="1"/>
+          </p:nvPr>
+        </p:nvSpPr>
+        <p:spPr>
+          <a:xfrm>
+            <a:off x="2560320" y="1143000"/>
             <a:ext cx="4572000" cy="274320"/>
           </a:xfrm>
           <a:prstGeom prst="rect">
@@ -4932,7 +6557,7 @@
           <a:ln/>
         </p:spPr>
         <p:txBody>
-          <a:bodyPr wrap="square" lIns="0" tIns="0" rIns="0" bIns="0" rtlCol="0" anchor="ctr"/>
+          <a:bodyPr wrap="square" lIns="0" tIns="0" rIns="0" bIns="0" rtlCol="0"/>
           <a:lstStyle/>
           <a:p>
             <a:pPr indent="0" marL="0">
@@ -4955,14 +6580,55 @@
       </p:sp>
       <p:sp>
         <p:nvSpPr>
-          <p:cNvPr id="4" name="Text 1"/>
+          <p:cNvPr id="3" name="Text 1"/>
+          <p:cNvSpPr/>
+          <p:nvPr>
+            <p:ph idx="103" type="title" hasCustomPrompt="1"/>
+          </p:nvPr>
+        </p:nvSpPr>
+        <p:spPr>
+          <a:xfrm>
+            <a:off x="2560320" y="1463040"/>
+            <a:ext cx="7580376" cy="594360"/>
+          </a:xfrm>
+          <a:prstGeom prst="rect">
+            <a:avLst/>
+          </a:prstGeom>
+          <a:noFill/>
+          <a:ln/>
+        </p:spPr>
+        <p:txBody>
+          <a:bodyPr wrap="square" lIns="0" tIns="0" rIns="0" bIns="0" rtlCol="0"/>
+          <a:lstStyle/>
+          <a:p>
+            <a:pPr indent="0" marL="0">
+              <a:buNone/>
+            </a:pPr>
+            <a:r>
+              <a:rPr lang="en-US" sz="2600" dirty="0">
+                <a:solidFill>
+                  <a:srgbClr val="1A1A1A"/>
+                </a:solidFill>
+                <a:latin typeface="Goetheanum Schrift Deutlich" pitchFamily="34" charset="0"/>
+                <a:ea typeface="Goetheanum Schrift Deutlich" pitchFamily="34" charset="-122"/>
+                <a:cs typeface="Goetheanum Schrift Deutlich" pitchFamily="34" charset="-120"/>
+              </a:rPr>
+              <a:t>Praktische Hinweise</a:t>
+            </a:r>
+            <a:endParaRPr lang="en-US" sz="2600" dirty="0"/>
+          </a:p>
+        </p:txBody>
+      </p:sp>
+      <p:sp>
+        <p:nvSpPr>
+          <p:cNvPr id="4" name="Text 2"/>
           <p:cNvSpPr/>
           <p:nvPr/>
         </p:nvSpPr>
         <p:spPr>
           <a:xfrm>
-            <a:off x="2002536" y="1463040"/>
-            <a:ext cx="8138160" cy="594360"/>
+            <a:off x="2560320" y="2926080"/>
+            <a:ext cx="777240" cy="731520"/>
           </a:xfrm>
           <a:prstGeom prst="rect">
             <a:avLst/>
@@ -4978,29 +6644,91 @@
               <a:buNone/>
             </a:pPr>
             <a:r>
-              <a:rPr lang="en-US" sz="2600" dirty="0">
+              <a:rPr lang="en-US" sz="3600" dirty="0">
+                <a:solidFill>
+                  <a:srgbClr val="005EB8"/>
+                </a:solidFill>
+                <a:latin typeface="Goetheanum Icons" pitchFamily="34" charset="0"/>
+                <a:ea typeface="Goetheanum Icons" pitchFamily="34" charset="-122"/>
+                <a:cs typeface="Goetheanum Icons" pitchFamily="34" charset="-120"/>
+              </a:rPr>
+              <a:t>g</a:t>
+            </a:r>
+            <a:endParaRPr lang="en-US" sz="3600" dirty="0"/>
+          </a:p>
+        </p:txBody>
+      </p:sp>
+      <p:sp>
+        <p:nvSpPr>
+          <p:cNvPr id="5" name="Text 3"/>
+          <p:cNvSpPr/>
+          <p:nvPr/>
+        </p:nvSpPr>
+        <p:spPr>
+          <a:xfrm>
+            <a:off x="3474720" y="2926080"/>
+            <a:ext cx="3017520" cy="731520"/>
+          </a:xfrm>
+          <a:prstGeom prst="rect">
+            <a:avLst/>
+          </a:prstGeom>
+          <a:noFill/>
+          <a:ln/>
+        </p:spPr>
+        <p:txBody>
+          <a:bodyPr wrap="square" lIns="0" tIns="0" rIns="0" bIns="0" rtlCol="0" anchor="ctr"/>
+          <a:lstStyle/>
+          <a:p>
+            <a:pPr indent="0" marL="0">
+              <a:lnSpc>
+                <a:spcPct val="120000"/>
+              </a:lnSpc>
+              <a:buNone/>
+            </a:pPr>
+            <a:r>
+              <a:rPr lang="en-US" sz="1300" dirty="0">
                 <a:solidFill>
                   <a:srgbClr val="1A1A1A"/>
+                </a:solidFill>
+                <a:latin typeface="Goetheanum Schrift Laut" pitchFamily="34" charset="0"/>
+                <a:ea typeface="Goetheanum Schrift Laut" pitchFamily="34" charset="-122"/>
+                <a:cs typeface="Goetheanum Schrift Laut" pitchFamily="34" charset="-120"/>
+              </a:rPr>
+              <a:t>WLAN</a:t>
+            </a:r>
+            <a:endParaRPr lang="en-US" sz="1300" dirty="0"/>
+          </a:p>
+          <a:p>
+            <a:pPr indent="0" marL="0">
+              <a:lnSpc>
+                <a:spcPct val="120000"/>
+              </a:lnSpc>
+              <a:buNone/>
+            </a:pPr>
+            <a:r>
+              <a:rPr lang="en-US" sz="1300" dirty="0">
+                <a:solidFill>
+                  <a:srgbClr val="6B7480"/>
                 </a:solidFill>
                 <a:latin typeface="Goetheanum Schrift Klar" pitchFamily="34" charset="0"/>
                 <a:ea typeface="Goetheanum Schrift Klar" pitchFamily="34" charset="-122"/>
                 <a:cs typeface="Goetheanum Schrift Klar" pitchFamily="34" charset="-120"/>
               </a:rPr>
-              <a:t>Praktische Hinweise</a:t>
-            </a:r>
-            <a:endParaRPr lang="en-US" sz="2600" dirty="0"/>
-          </a:p>
-        </p:txBody>
-      </p:sp>
-      <p:sp>
-        <p:nvSpPr>
-          <p:cNvPr id="5" name="Text 2"/>
+              <a:t>Gastzugang: Goetheanum, offen</a:t>
+            </a:r>
+            <a:endParaRPr lang="en-US" sz="1300" dirty="0"/>
+          </a:p>
+        </p:txBody>
+      </p:sp>
+      <p:sp>
+        <p:nvSpPr>
+          <p:cNvPr id="6" name="Text 4"/>
           <p:cNvSpPr/>
           <p:nvPr/>
         </p:nvSpPr>
         <p:spPr>
           <a:xfrm>
-            <a:off x="2002536" y="2926080"/>
+            <a:off x="6492240" y="2926080"/>
             <a:ext cx="777240" cy="731520"/>
           </a:xfrm>
           <a:prstGeom prst="rect">
@@ -5025,7 +6753,7 @@
                 <a:ea typeface="Goetheanum Icons" pitchFamily="34" charset="-122"/>
                 <a:cs typeface="Goetheanum Icons" pitchFamily="34" charset="-120"/>
               </a:rPr>
-              <a:t>g</a:t>
+              <a:t>a</a:t>
             </a:r>
             <a:endParaRPr lang="en-US" sz="3600" dirty="0"/>
           </a:p>
@@ -5033,14 +6761,14 @@
       </p:sp>
       <p:sp>
         <p:nvSpPr>
-          <p:cNvPr id="6" name="Text 3"/>
+          <p:cNvPr id="7" name="Text 5"/>
           <p:cNvSpPr/>
           <p:nvPr/>
         </p:nvSpPr>
         <p:spPr>
           <a:xfrm>
-            <a:off x="2916936" y="2926080"/>
-            <a:ext cx="3200400" cy="731520"/>
+            <a:off x="7406640" y="2926080"/>
+            <a:ext cx="3017520" cy="731520"/>
           </a:xfrm>
           <a:prstGeom prst="rect">
             <a:avLst/>
@@ -5067,7 +6795,7 @@
                 <a:ea typeface="Goetheanum Schrift Laut" pitchFamily="34" charset="-122"/>
                 <a:cs typeface="Goetheanum Schrift Laut" pitchFamily="34" charset="-120"/>
               </a:rPr>
-              <a:t>WLAN</a:t>
+              <a:t>Lift</a:t>
             </a:r>
             <a:endParaRPr lang="en-US" sz="1300" dirty="0"/>
           </a:p>
@@ -5087,7 +6815,7 @@
                 <a:ea typeface="Goetheanum Schrift Klar" pitchFamily="34" charset="-122"/>
                 <a:cs typeface="Goetheanum Schrift Klar" pitchFamily="34" charset="-120"/>
               </a:rPr>
-              <a:t>Gastzugang: Goetheanum, offen</a:t>
+              <a:t>Zugang über den Westeingang</a:t>
             </a:r>
             <a:endParaRPr lang="en-US" sz="1300" dirty="0"/>
           </a:p>
@@ -5095,13 +6823,13 @@
       </p:sp>
       <p:sp>
         <p:nvSpPr>
-          <p:cNvPr id="7" name="Text 4"/>
+          <p:cNvPr id="8" name="Text 6"/>
           <p:cNvSpPr/>
           <p:nvPr/>
         </p:nvSpPr>
         <p:spPr>
           <a:xfrm>
-            <a:off x="6163056" y="2926080"/>
+            <a:off x="2560320" y="4480560"/>
             <a:ext cx="777240" cy="731520"/>
           </a:xfrm>
           <a:prstGeom prst="rect">
@@ -5126,7 +6854,7 @@
                 <a:ea typeface="Goetheanum Icons" pitchFamily="34" charset="-122"/>
                 <a:cs typeface="Goetheanum Icons" pitchFamily="34" charset="-120"/>
               </a:rPr>
-              <a:t>a</a:t>
+              <a:t>e</a:t>
             </a:r>
             <a:endParaRPr lang="en-US" sz="3600" dirty="0"/>
           </a:p>
@@ -5134,14 +6862,14 @@
       </p:sp>
       <p:sp>
         <p:nvSpPr>
-          <p:cNvPr id="8" name="Text 5"/>
+          <p:cNvPr id="9" name="Text 7"/>
           <p:cNvSpPr/>
           <p:nvPr/>
         </p:nvSpPr>
         <p:spPr>
           <a:xfrm>
-            <a:off x="7077456" y="2926080"/>
-            <a:ext cx="3200400" cy="731520"/>
+            <a:off x="3474720" y="4480560"/>
+            <a:ext cx="3017520" cy="731520"/>
           </a:xfrm>
           <a:prstGeom prst="rect">
             <a:avLst/>
@@ -5168,7 +6896,7 @@
                 <a:ea typeface="Goetheanum Schrift Laut" pitchFamily="34" charset="-122"/>
                 <a:cs typeface="Goetheanum Schrift Laut" pitchFamily="34" charset="-120"/>
               </a:rPr>
-              <a:t>Lift</a:t>
+              <a:t>Eintritt</a:t>
             </a:r>
             <a:endParaRPr lang="en-US" sz="1300" dirty="0"/>
           </a:p>
@@ -5188,7 +6916,7 @@
                 <a:ea typeface="Goetheanum Schrift Klar" pitchFamily="34" charset="-122"/>
                 <a:cs typeface="Goetheanum Schrift Klar" pitchFamily="34" charset="-120"/>
               </a:rPr>
-              <a:t>Zugang über den Westeingang</a:t>
+              <a:t>Frei, Kollekte am Ausgang</a:t>
             </a:r>
             <a:endParaRPr lang="en-US" sz="1300" dirty="0"/>
           </a:p>
@@ -5196,13 +6924,13 @@
       </p:sp>
       <p:sp>
         <p:nvSpPr>
-          <p:cNvPr id="9" name="Text 6"/>
+          <p:cNvPr id="10" name="Text 8"/>
           <p:cNvSpPr/>
           <p:nvPr/>
         </p:nvSpPr>
         <p:spPr>
           <a:xfrm>
-            <a:off x="2002536" y="4480560"/>
+            <a:off x="6492240" y="4480560"/>
             <a:ext cx="777240" cy="731520"/>
           </a:xfrm>
           <a:prstGeom prst="rect">
@@ -5227,7 +6955,7 @@
                 <a:ea typeface="Goetheanum Icons" pitchFamily="34" charset="-122"/>
                 <a:cs typeface="Goetheanum Icons" pitchFamily="34" charset="-120"/>
               </a:rPr>
-              <a:t>e</a:t>
+              <a:t>z</a:t>
             </a:r>
             <a:endParaRPr lang="en-US" sz="3600" dirty="0"/>
           </a:p>
@@ -5235,14 +6963,14 @@
       </p:sp>
       <p:sp>
         <p:nvSpPr>
-          <p:cNvPr id="10" name="Text 7"/>
+          <p:cNvPr id="11" name="Text 9"/>
           <p:cNvSpPr/>
           <p:nvPr/>
         </p:nvSpPr>
         <p:spPr>
           <a:xfrm>
-            <a:off x="2916936" y="4480560"/>
-            <a:ext cx="3200400" cy="731520"/>
+            <a:off x="7406640" y="4480560"/>
+            <a:ext cx="3017520" cy="731520"/>
           </a:xfrm>
           <a:prstGeom prst="rect">
             <a:avLst/>
@@ -5269,7 +6997,7 @@
                 <a:ea typeface="Goetheanum Schrift Laut" pitchFamily="34" charset="-122"/>
                 <a:cs typeface="Goetheanum Schrift Laut" pitchFamily="34" charset="-120"/>
               </a:rPr>
-              <a:t>Eintritt</a:t>
+              <a:t>Fotografie</a:t>
             </a:r>
             <a:endParaRPr lang="en-US" sz="1300" dirty="0"/>
           </a:p>
@@ -5289,7 +7017,7 @@
                 <a:ea typeface="Goetheanum Schrift Klar" pitchFamily="34" charset="-122"/>
                 <a:cs typeface="Goetheanum Schrift Klar" pitchFamily="34" charset="-120"/>
               </a:rPr>
-              <a:t>Frei, Kollekte am Ausgang</a:t>
+              <a:t>Bitte keine Aufnahmen im Saal</a:t>
             </a:r>
             <a:endParaRPr lang="en-US" sz="1300" dirty="0"/>
           </a:p>
@@ -5297,14 +7025,14 @@
       </p:sp>
       <p:sp>
         <p:nvSpPr>
-          <p:cNvPr id="11" name="Text 8"/>
+          <p:cNvPr id="12" name="Text 10"/>
           <p:cNvSpPr/>
           <p:nvPr/>
         </p:nvSpPr>
         <p:spPr>
           <a:xfrm>
-            <a:off x="6163056" y="4480560"/>
-            <a:ext cx="777240" cy="731520"/>
+            <a:off x="548640" y="6537960"/>
+            <a:ext cx="6400800" cy="274320"/>
           </a:xfrm>
           <a:prstGeom prst="rect">
             <a:avLst/>
@@ -5320,69 +7048,7 @@
               <a:buNone/>
             </a:pPr>
             <a:r>
-              <a:rPr lang="en-US" sz="3600" dirty="0">
-                <a:solidFill>
-                  <a:srgbClr val="005EB8"/>
-                </a:solidFill>
-                <a:latin typeface="Goetheanum Icons" pitchFamily="34" charset="0"/>
-                <a:ea typeface="Goetheanum Icons" pitchFamily="34" charset="-122"/>
-                <a:cs typeface="Goetheanum Icons" pitchFamily="34" charset="-120"/>
-              </a:rPr>
-              <a:t>z</a:t>
-            </a:r>
-            <a:endParaRPr lang="en-US" sz="3600" dirty="0"/>
-          </a:p>
-        </p:txBody>
-      </p:sp>
-      <p:sp>
-        <p:nvSpPr>
-          <p:cNvPr id="12" name="Text 9"/>
-          <p:cNvSpPr/>
-          <p:nvPr/>
-        </p:nvSpPr>
-        <p:spPr>
-          <a:xfrm>
-            <a:off x="7077456" y="4480560"/>
-            <a:ext cx="3200400" cy="731520"/>
-          </a:xfrm>
-          <a:prstGeom prst="rect">
-            <a:avLst/>
-          </a:prstGeom>
-          <a:noFill/>
-          <a:ln/>
-        </p:spPr>
-        <p:txBody>
-          <a:bodyPr wrap="square" lIns="0" tIns="0" rIns="0" bIns="0" rtlCol="0" anchor="ctr"/>
-          <a:lstStyle/>
-          <a:p>
-            <a:pPr indent="0" marL="0">
-              <a:lnSpc>
-                <a:spcPct val="120000"/>
-              </a:lnSpc>
-              <a:buNone/>
-            </a:pPr>
-            <a:r>
-              <a:rPr lang="en-US" sz="1300" dirty="0">
-                <a:solidFill>
-                  <a:srgbClr val="1A1A1A"/>
-                </a:solidFill>
-                <a:latin typeface="Goetheanum Schrift Laut" pitchFamily="34" charset="0"/>
-                <a:ea typeface="Goetheanum Schrift Laut" pitchFamily="34" charset="-122"/>
-                <a:cs typeface="Goetheanum Schrift Laut" pitchFamily="34" charset="-120"/>
-              </a:rPr>
-              <a:t>Fotografie</a:t>
-            </a:r>
-            <a:endParaRPr lang="en-US" sz="1300" dirty="0"/>
-          </a:p>
-          <a:p>
-            <a:pPr indent="0" marL="0">
-              <a:lnSpc>
-                <a:spcPct val="120000"/>
-              </a:lnSpc>
-              <a:buNone/>
-            </a:pPr>
-            <a:r>
-              <a:rPr lang="en-US" sz="1300" dirty="0">
+              <a:rPr lang="en-US" sz="900" dirty="0">
                 <a:solidFill>
                   <a:srgbClr val="6B7480"/>
                 </a:solidFill>
@@ -5390,59 +7056,20 @@
                 <a:ea typeface="Goetheanum Schrift Klar" pitchFamily="34" charset="-122"/>
                 <a:cs typeface="Goetheanum Schrift Klar" pitchFamily="34" charset="-120"/>
               </a:rPr>
-              <a:t>Bitte keine Aufnahmen im Saal</a:t>
-            </a:r>
-            <a:endParaRPr lang="en-US" sz="1300" dirty="0"/>
-          </a:p>
-        </p:txBody>
-      </p:sp>
-      <p:sp>
-        <p:nvSpPr>
-          <p:cNvPr id="13" name="Text 10"/>
-          <p:cNvSpPr/>
-          <p:nvPr/>
-        </p:nvSpPr>
-        <p:spPr>
-          <a:xfrm>
-            <a:off x="548640" y="6537960"/>
-            <a:ext cx="6400800" cy="274320"/>
-          </a:xfrm>
-          <a:prstGeom prst="rect">
-            <a:avLst/>
-          </a:prstGeom>
-          <a:noFill/>
-          <a:ln/>
-        </p:spPr>
-        <p:txBody>
-          <a:bodyPr wrap="square" lIns="0" tIns="0" rIns="0" bIns="0" rtlCol="0" anchor="ctr"/>
-          <a:lstStyle/>
-          <a:p>
-            <a:pPr indent="0" marL="0">
-              <a:buNone/>
-            </a:pPr>
-            <a:r>
-              <a:rPr lang="en-US" sz="900" dirty="0">
-                <a:solidFill>
-                  <a:srgbClr val="6B7480"/>
+              <a:t>Piktogramme: Schrift ‹Goetheanum Icons›, Belegung im </a:t>
+            </a:r>
+            <a:pPr indent="0" marL="0">
+              <a:buNone/>
+            </a:pPr>
+            <a:r>
+              <a:rPr lang="en-US" sz="900" u="sng" dirty="0">
+                <a:solidFill>
+                  <a:srgbClr val="005EB8"/>
                 </a:solidFill>
                 <a:latin typeface="Goetheanum Schrift Klar" pitchFamily="34" charset="0"/>
                 <a:ea typeface="Goetheanum Schrift Klar" pitchFamily="34" charset="-122"/>
                 <a:cs typeface="Goetheanum Schrift Klar" pitchFamily="34" charset="-120"/>
-              </a:rPr>
-              <a:t>Piktogramme: Schrift ‹Goetheanum Icons›, Belegung im </a:t>
-            </a:r>
-            <a:pPr indent="0" marL="0">
-              <a:buNone/>
-            </a:pPr>
-            <a:r>
-              <a:rPr lang="en-US" sz="900" u="sng" dirty="0">
-                <a:solidFill>
-                  <a:srgbClr val="005EB8"/>
-                </a:solidFill>
-                <a:latin typeface="Goetheanum Schrift Klar" pitchFamily="34" charset="0"/>
-                <a:ea typeface="Goetheanum Schrift Klar" pitchFamily="34" charset="-122"/>
-                <a:cs typeface="Goetheanum Schrift Klar" pitchFamily="34" charset="-120"/>
-                <a:hlinkClick r:id="rId2" invalidUrl="" action="" tgtFrame="" tooltip="" history="1" highlightClick="0" endSnd="0">
+                <a:hlinkClick r:id="rId1" invalidUrl="" action="" tgtFrame="" tooltip="" history="1" highlightClick="0" endSnd="0">
                   <a:extLst>
                     <a:ext uri="{A12FA001-AC4F-418D-AE19-62706E023703}">
                       <ahyp:hlinkClr xmlns:ahyp="http://schemas.microsoft.com/office/drawing/2018/hyperlinkcolor" val="tx"/>
@@ -5458,40 +7085,49 @@
       </p:sp>
       <p:sp>
         <p:nvSpPr>
-          <p:cNvPr id="14" name="Text 11"/>
-          <p:cNvSpPr/>
-          <p:nvPr/>
-        </p:nvSpPr>
-        <p:spPr>
-          <a:xfrm>
-            <a:off x="4654296" y="6995160"/>
-            <a:ext cx="5486400" cy="274320"/>
-          </a:xfrm>
-          <a:prstGeom prst="rect">
-            <a:avLst/>
-          </a:prstGeom>
-          <a:noFill/>
-          <a:ln/>
-        </p:spPr>
-        <p:txBody>
-          <a:bodyPr wrap="square" lIns="0" tIns="0" rIns="0" bIns="0" rtlCol="0" anchor="ctr"/>
-          <a:lstStyle/>
-          <a:p>
-            <a:pPr algn="r" indent="0" marL="0">
-              <a:buNone/>
-            </a:pPr>
-            <a:r>
-              <a:rPr lang="en-US" sz="900" dirty="0">
+          <p:cNvPr id="25" name="Slide Number Placeholder 0"/>
+          <p:cNvSpPr>
+            <a:spLocks noGrp="1"/>
+          </p:cNvSpPr>
+          <p:nvPr>
+            <p:ph type="sldNum" sz="quarter" idx="4294967295"/>
+          </p:nvPr>
+        </p:nvSpPr>
+        <p:spPr>
+          <a:xfrm>
+            <a:off x="9747504" y="6995160"/>
+            <a:ext cx="393192" cy="274320"/>
+          </a:xfrm>
+          <a:prstGeom prst="rect">
+            <a:avLst/>
+          </a:prstGeom>
+          <a:extLst>
+            <a:ext uri="{C572A759-6A51-4108-AA02-DFA0A04FC94B}">
+              <ma14:wrappingTextBoxFlag xmlns:ma14="http://schemas.microsoft.com/office/mac/drawingml/2011/main" val="0"/>
+            </a:ext>
+          </a:extLst>
+        </p:spPr>
+        <p:txBody>
+          <a:bodyPr anchor="ctr"/>
+          <a:lstStyle>
+            <a:lvl1pPr>
+              <a:defRPr sz="900">
                 <a:solidFill>
                   <a:srgbClr val="6B7480"/>
                 </a:solidFill>
-                <a:latin typeface="Goetheanum Schrift Klar" pitchFamily="34" charset="0"/>
-                <a:ea typeface="Goetheanum Schrift Klar" pitchFamily="34" charset="-122"/>
-                <a:cs typeface="Goetheanum Schrift Klar" pitchFamily="34" charset="-120"/>
-              </a:rPr>
-              <a:t>Titel der Präsentation · 00.00.2026 · 13</a:t>
-            </a:r>
-            <a:endParaRPr lang="en-US" sz="900" dirty="0"/>
+                <a:latin typeface="Goetheanum Schrift Klar"/>
+                <a:ea typeface="Goetheanum Schrift Klar"/>
+                <a:cs typeface="Goetheanum Schrift Klar"/>
+              </a:defRPr>
+            </a:lvl1pPr>
+          </a:lstStyle>
+          <a:p>
+            <a:pPr algn="l"/>
+            <a:fld id="{F7021451-1387-4CA6-816F-3879F97B5CBC}" type="slidenum">
+              <a:rPr b="0" lang="en-US"/>
+              <a:t>13</a:t>
+            </a:fld>
+            <a:endParaRPr lang="en-US"/>
           </a:p>
         </p:txBody>
       </p:sp>
@@ -5506,13 +7142,6 @@
 <file path=ppt/slides/slide14.xml><?xml version="1.0" encoding="utf-8"?>
 <p:sld xmlns:a="http://schemas.openxmlformats.org/drawingml/2006/main" xmlns:r="http://schemas.openxmlformats.org/officeDocument/2006/relationships" xmlns:p="http://schemas.openxmlformats.org/presentationml/2006/main">
   <p:cSld name="Slide 14">
-    <p:bg>
-      <p:bgPr>
-        <a:solidFill>
-          <a:srgbClr val="FFFFFF"/>
-        </a:solidFill>
-      </p:bgPr>
-    </p:bg>
     <p:spTree>
       <p:nvGrpSpPr>
         <p:cNvPr id="1" name=""/>
@@ -5527,33 +7156,9 @@
           <a:chExt cx="0" cy="0"/>
         </a:xfrm>
       </p:grpSpPr>
-      <p:pic>
-        <p:nvPicPr>
-          <p:cNvPr id="2" name="Image 0" descr="logo-goetheanum-blue.png">    </p:cNvPr>
-          <p:cNvPicPr>
-            <a:picLocks noChangeAspect="1"/>
-          </p:cNvPicPr>
-          <p:nvPr/>
-        </p:nvPicPr>
-        <p:blipFill>
-          <a:blip r:embed="rId1"/>
-          <a:stretch>
-            <a:fillRect/>
-          </a:stretch>
-        </p:blipFill>
-        <p:spPr>
-          <a:xfrm>
-            <a:off x="548640" y="502920"/>
-            <a:ext cx="1088402" cy="182880"/>
-          </a:xfrm>
-          <a:prstGeom prst="rect">
-            <a:avLst/>
-          </a:prstGeom>
-        </p:spPr>
-      </p:pic>
-      <p:sp>
-        <p:nvSpPr>
-          <p:cNvPr id="3" name="Text 0"/>
+      <p:sp>
+        <p:nvSpPr>
+          <p:cNvPr id="2" name="Text 0"/>
           <p:cNvSpPr/>
           <p:nvPr/>
         </p:nvSpPr>
@@ -5635,7 +7240,7 @@
       </p:sp>
       <p:sp>
         <p:nvSpPr>
-          <p:cNvPr id="4" name="Text 1"/>
+          <p:cNvPr id="3" name="Text 1"/>
           <p:cNvSpPr/>
           <p:nvPr/>
         </p:nvSpPr>
@@ -5674,40 +7279,49 @@
       </p:sp>
       <p:sp>
         <p:nvSpPr>
-          <p:cNvPr id="5" name="Text 2"/>
-          <p:cNvSpPr/>
-          <p:nvPr/>
-        </p:nvSpPr>
-        <p:spPr>
-          <a:xfrm>
-            <a:off x="4654296" y="6995160"/>
-            <a:ext cx="5486400" cy="274320"/>
-          </a:xfrm>
-          <a:prstGeom prst="rect">
-            <a:avLst/>
-          </a:prstGeom>
-          <a:noFill/>
-          <a:ln/>
-        </p:spPr>
-        <p:txBody>
-          <a:bodyPr wrap="square" lIns="0" tIns="0" rIns="0" bIns="0" rtlCol="0" anchor="ctr"/>
-          <a:lstStyle/>
-          <a:p>
-            <a:pPr algn="r" indent="0" marL="0">
-              <a:buNone/>
-            </a:pPr>
-            <a:r>
-              <a:rPr lang="en-US" sz="900" dirty="0">
+          <p:cNvPr id="25" name="Slide Number Placeholder 0"/>
+          <p:cNvSpPr>
+            <a:spLocks noGrp="1"/>
+          </p:cNvSpPr>
+          <p:nvPr>
+            <p:ph type="sldNum" sz="quarter" idx="4294967295"/>
+          </p:nvPr>
+        </p:nvSpPr>
+        <p:spPr>
+          <a:xfrm>
+            <a:off x="9747504" y="6995160"/>
+            <a:ext cx="393192" cy="274320"/>
+          </a:xfrm>
+          <a:prstGeom prst="rect">
+            <a:avLst/>
+          </a:prstGeom>
+          <a:extLst>
+            <a:ext uri="{C572A759-6A51-4108-AA02-DFA0A04FC94B}">
+              <ma14:wrappingTextBoxFlag xmlns:ma14="http://schemas.microsoft.com/office/mac/drawingml/2011/main" val="0"/>
+            </a:ext>
+          </a:extLst>
+        </p:spPr>
+        <p:txBody>
+          <a:bodyPr anchor="ctr"/>
+          <a:lstStyle>
+            <a:lvl1pPr>
+              <a:defRPr sz="900">
                 <a:solidFill>
                   <a:srgbClr val="6B7480"/>
                 </a:solidFill>
-                <a:latin typeface="Goetheanum Schrift Klar" pitchFamily="34" charset="0"/>
-                <a:ea typeface="Goetheanum Schrift Klar" pitchFamily="34" charset="-122"/>
-                <a:cs typeface="Goetheanum Schrift Klar" pitchFamily="34" charset="-120"/>
-              </a:rPr>
-              <a:t>Titel der Präsentation · 00.00.2026 · 14</a:t>
-            </a:r>
-            <a:endParaRPr lang="en-US" sz="900" dirty="0"/>
+                <a:latin typeface="Goetheanum Schrift Klar"/>
+                <a:ea typeface="Goetheanum Schrift Klar"/>
+                <a:cs typeface="Goetheanum Schrift Klar"/>
+              </a:defRPr>
+            </a:lvl1pPr>
+          </a:lstStyle>
+          <a:p>
+            <a:pPr algn="l"/>
+            <a:fld id="{F7021451-1387-4CA6-816F-3879F97B5CBC}" type="slidenum">
+              <a:rPr b="0" lang="en-US"/>
+              <a:t>14</a:t>
+            </a:fld>
+            <a:endParaRPr lang="en-US"/>
           </a:p>
         </p:txBody>
       </p:sp>
@@ -5722,13 +7336,6 @@
 <file path=ppt/slides/slide15.xml><?xml version="1.0" encoding="utf-8"?>
 <p:sld xmlns:a="http://schemas.openxmlformats.org/drawingml/2006/main" xmlns:r="http://schemas.openxmlformats.org/officeDocument/2006/relationships" xmlns:p="http://schemas.openxmlformats.org/presentationml/2006/main">
   <p:cSld name="Slide 15">
-    <p:bg>
-      <p:bgPr>
-        <a:solidFill>
-          <a:srgbClr val="005EB8"/>
-        </a:solidFill>
-      </p:bgPr>
-    </p:bg>
     <p:spTree>
       <p:nvGrpSpPr>
         <p:cNvPr id="1" name=""/>
@@ -5743,35 +7350,13 @@
           <a:chExt cx="0" cy="0"/>
         </a:xfrm>
       </p:grpSpPr>
-      <p:pic>
-        <p:nvPicPr>
-          <p:cNvPr id="2" name="Image 0" descr="logo-goetheanum-white.png">    </p:cNvPr>
-          <p:cNvPicPr>
-            <a:picLocks noChangeAspect="1"/>
-          </p:cNvPicPr>
-          <p:nvPr/>
-        </p:nvPicPr>
-        <p:blipFill>
-          <a:blip r:embed="rId1"/>
-          <a:stretch>
-            <a:fillRect/>
-          </a:stretch>
-        </p:blipFill>
-        <p:spPr>
-          <a:xfrm>
-            <a:off x="548640" y="466344"/>
-            <a:ext cx="1850284" cy="310896"/>
-          </a:xfrm>
-          <a:prstGeom prst="rect">
-            <a:avLst/>
-          </a:prstGeom>
-        </p:spPr>
-      </p:pic>
-      <p:sp>
-        <p:nvSpPr>
-          <p:cNvPr id="3" name="Text 0"/>
-          <p:cNvSpPr/>
-          <p:nvPr/>
+      <p:sp>
+        <p:nvSpPr>
+          <p:cNvPr id="2" name="Text 0"/>
+          <p:cNvSpPr/>
+          <p:nvPr>
+            <p:ph idx="101" type="title" hasCustomPrompt="1"/>
+          </p:nvPr>
         </p:nvSpPr>
         <p:spPr>
           <a:xfrm>
@@ -5785,7 +7370,7 @@
           <a:ln/>
         </p:spPr>
         <p:txBody>
-          <a:bodyPr wrap="square" lIns="0" tIns="0" rIns="0" bIns="0" rtlCol="0" anchor="ctr"/>
+          <a:bodyPr wrap="square" lIns="0" tIns="0" rIns="0" bIns="0" rtlCol="0"/>
           <a:lstStyle/>
           <a:p>
             <a:pPr indent="0" marL="0">
@@ -5808,23 +7393,25 @@
       </p:sp>
       <p:sp>
         <p:nvSpPr>
-          <p:cNvPr id="4" name="Text 1"/>
-          <p:cNvSpPr/>
-          <p:nvPr/>
+          <p:cNvPr id="3" name="Text 0"/>
+          <p:cNvSpPr/>
+          <p:nvPr>
+            <p:ph idx="102" type="body" hasCustomPrompt="1"/>
+          </p:nvPr>
         </p:nvSpPr>
         <p:spPr>
           <a:xfrm>
             <a:off x="2002536" y="3712464"/>
-            <a:ext cx="6400800" cy="548640"/>
-          </a:xfrm>
-          <a:prstGeom prst="rect">
-            <a:avLst/>
-          </a:prstGeom>
-          <a:noFill/>
-          <a:ln/>
-        </p:spPr>
-        <p:txBody>
-          <a:bodyPr wrap="square" lIns="0" tIns="0" rIns="0" bIns="0" rtlCol="0" anchor="ctr"/>
+            <a:ext cx="7680960" cy="548640"/>
+          </a:xfrm>
+          <a:prstGeom prst="rect">
+            <a:avLst/>
+          </a:prstGeom>
+          <a:noFill/>
+          <a:ln/>
+        </p:spPr>
+        <p:txBody>
+          <a:bodyPr wrap="square" lIns="0" tIns="0" rIns="0" bIns="0" rtlCol="0"/>
           <a:lstStyle/>
           <a:p>
             <a:pPr indent="0" marL="0">
@@ -5847,9 +7434,11 @@
       </p:sp>
       <p:sp>
         <p:nvSpPr>
-          <p:cNvPr id="5" name="Text 2"/>
-          <p:cNvSpPr/>
-          <p:nvPr/>
+          <p:cNvPr id="4" name="Text 0"/>
+          <p:cNvSpPr/>
+          <p:nvPr>
+            <p:ph idx="103" type="body" hasCustomPrompt="1"/>
+          </p:nvPr>
         </p:nvSpPr>
         <p:spPr>
           <a:xfrm>
@@ -5863,7 +7452,7 @@
           <a:ln/>
         </p:spPr>
         <p:txBody>
-          <a:bodyPr wrap="square" lIns="0" tIns="0" rIns="0" bIns="0" rtlCol="0" anchor="ctr"/>
+          <a:bodyPr wrap="square" lIns="0" tIns="0" rIns="0" bIns="0" rtlCol="0"/>
           <a:lstStyle/>
           <a:p>
             <a:pPr algn="r" indent="0" marL="0">
@@ -5895,13 +7484,6 @@
 <file path=ppt/slides/slide2.xml><?xml version="1.0" encoding="utf-8"?>
 <p:sld xmlns:a="http://schemas.openxmlformats.org/drawingml/2006/main" xmlns:r="http://schemas.openxmlformats.org/officeDocument/2006/relationships" xmlns:p="http://schemas.openxmlformats.org/presentationml/2006/main">
   <p:cSld name="Slide 2">
-    <p:bg>
-      <p:bgPr>
-        <a:solidFill>
-          <a:srgbClr val="FFFFFF"/>
-        </a:solidFill>
-      </p:bgPr>
-    </p:bg>
     <p:spTree>
       <p:nvGrpSpPr>
         <p:cNvPr id="1" name=""/>
@@ -5916,35 +7498,13 @@
           <a:chExt cx="0" cy="0"/>
         </a:xfrm>
       </p:grpSpPr>
-      <p:pic>
-        <p:nvPicPr>
-          <p:cNvPr id="2" name="Image 0" descr="logo-goetheanum-blue.png">    </p:cNvPr>
-          <p:cNvPicPr>
-            <a:picLocks noChangeAspect="1"/>
-          </p:cNvPicPr>
-          <p:nvPr/>
-        </p:nvPicPr>
-        <p:blipFill>
-          <a:blip r:embed="rId1"/>
-          <a:stretch>
-            <a:fillRect/>
-          </a:stretch>
-        </p:blipFill>
-        <p:spPr>
-          <a:xfrm>
-            <a:off x="548640" y="502920"/>
-            <a:ext cx="1088402" cy="182880"/>
-          </a:xfrm>
-          <a:prstGeom prst="rect">
-            <a:avLst/>
-          </a:prstGeom>
-        </p:spPr>
-      </p:pic>
-      <p:sp>
-        <p:nvSpPr>
-          <p:cNvPr id="3" name="Text 0"/>
-          <p:cNvSpPr/>
-          <p:nvPr/>
+      <p:sp>
+        <p:nvSpPr>
+          <p:cNvPr id="2" name="Text 1"/>
+          <p:cNvSpPr/>
+          <p:nvPr>
+            <p:ph idx="102" type="body" hasCustomPrompt="1"/>
+          </p:nvPr>
         </p:nvSpPr>
         <p:spPr>
           <a:xfrm>
@@ -5958,7 +7518,7 @@
           <a:ln/>
         </p:spPr>
         <p:txBody>
-          <a:bodyPr wrap="square" lIns="0" tIns="0" rIns="0" bIns="0" rtlCol="0" anchor="ctr"/>
+          <a:bodyPr wrap="square" lIns="0" tIns="0" rIns="0" bIns="0" rtlCol="0"/>
           <a:lstStyle/>
           <a:p>
             <a:pPr indent="0" marL="0">
@@ -5981,9 +7541,11 @@
       </p:sp>
       <p:sp>
         <p:nvSpPr>
-          <p:cNvPr id="4" name="Text 1"/>
-          <p:cNvSpPr/>
-          <p:nvPr/>
+          <p:cNvPr id="3" name="Text 1"/>
+          <p:cNvSpPr/>
+          <p:nvPr>
+            <p:ph idx="103" type="title" hasCustomPrompt="1"/>
+          </p:nvPr>
         </p:nvSpPr>
         <p:spPr>
           <a:xfrm>
@@ -5997,37 +7559,76 @@
           <a:ln/>
         </p:spPr>
         <p:txBody>
+          <a:bodyPr wrap="square" lIns="0" tIns="0" rIns="0" bIns="0" rtlCol="0"/>
+          <a:lstStyle/>
+          <a:p>
+            <a:pPr indent="0" marL="0">
+              <a:buNone/>
+            </a:pPr>
+            <a:r>
+              <a:rPr lang="en-US" sz="2600" dirty="0">
+                <a:solidFill>
+                  <a:srgbClr val="1A1A1A"/>
+                </a:solidFill>
+                <a:latin typeface="Goetheanum Schrift Deutlich" pitchFamily="34" charset="0"/>
+                <a:ea typeface="Goetheanum Schrift Deutlich" pitchFamily="34" charset="-122"/>
+                <a:cs typeface="Goetheanum Schrift Deutlich" pitchFamily="34" charset="-120"/>
+              </a:rPr>
+              <a:t>Fünf Grössen, fünf Schnitte</a:t>
+            </a:r>
+            <a:endParaRPr lang="en-US" sz="2600" dirty="0"/>
+          </a:p>
+        </p:txBody>
+      </p:sp>
+      <p:sp>
+        <p:nvSpPr>
+          <p:cNvPr id="4" name="Text 2"/>
+          <p:cNvSpPr/>
+          <p:nvPr/>
+        </p:nvSpPr>
+        <p:spPr>
+          <a:xfrm>
+            <a:off x="548640" y="2286000"/>
+            <a:ext cx="1325880" cy="841248"/>
+          </a:xfrm>
+          <a:prstGeom prst="rect">
+            <a:avLst/>
+          </a:prstGeom>
+          <a:noFill/>
+          <a:ln/>
+        </p:spPr>
+        <p:txBody>
           <a:bodyPr wrap="square" lIns="0" tIns="0" rIns="0" bIns="0" rtlCol="0" anchor="ctr"/>
           <a:lstStyle/>
           <a:p>
-            <a:pPr indent="0" marL="0">
-              <a:buNone/>
-            </a:pPr>
-            <a:r>
-              <a:rPr lang="en-US" sz="2600" dirty="0">
-                <a:solidFill>
-                  <a:srgbClr val="1A1A1A"/>
+            <a:pPr algn="r" indent="0" marL="0">
+              <a:buNone/>
+            </a:pPr>
+            <a:r>
+              <a:rPr lang="en-US" sz="900" dirty="0">
+                <a:solidFill>
+                  <a:srgbClr val="005EB8"/>
                 </a:solidFill>
                 <a:latin typeface="Goetheanum Schrift Klar" pitchFamily="34" charset="0"/>
                 <a:ea typeface="Goetheanum Schrift Klar" pitchFamily="34" charset="-122"/>
                 <a:cs typeface="Goetheanum Schrift Klar" pitchFamily="34" charset="-120"/>
               </a:rPr>
-              <a:t>Fünf Grössen, eine Schrift</a:t>
-            </a:r>
-            <a:endParaRPr lang="en-US" sz="2600" dirty="0"/>
-          </a:p>
-        </p:txBody>
-      </p:sp>
-      <p:sp>
-        <p:nvSpPr>
-          <p:cNvPr id="5" name="Text 2"/>
+              <a:t>Plakat 50</a:t>
+            </a:r>
+            <a:endParaRPr lang="en-US" sz="900" dirty="0"/>
+          </a:p>
+        </p:txBody>
+      </p:sp>
+      <p:sp>
+        <p:nvSpPr>
+          <p:cNvPr id="5" name="Text 3"/>
           <p:cNvSpPr/>
           <p:nvPr/>
         </p:nvSpPr>
         <p:spPr>
           <a:xfrm>
-            <a:off x="548640" y="2377440"/>
-            <a:ext cx="1325880" cy="914400"/>
+            <a:off x="2002536" y="2286000"/>
+            <a:ext cx="8138160" cy="841248"/>
           </a:xfrm>
           <a:prstGeom prst="rect">
             <a:avLst/>
@@ -6039,34 +7640,34 @@
           <a:bodyPr wrap="square" lIns="0" tIns="0" rIns="0" bIns="0" rtlCol="0" anchor="ctr"/>
           <a:lstStyle/>
           <a:p>
-            <a:pPr algn="r" indent="0" marL="0">
-              <a:buNone/>
-            </a:pPr>
-            <a:r>
-              <a:rPr lang="en-US" sz="900" dirty="0">
-                <a:solidFill>
-                  <a:srgbClr val="005EB8"/>
+            <a:pPr indent="0" marL="0">
+              <a:buNone/>
+            </a:pPr>
+            <a:r>
+              <a:rPr lang="en-US" sz="5000" dirty="0">
+                <a:solidFill>
+                  <a:srgbClr val="1A1A1A"/>
                 </a:solidFill>
                 <a:latin typeface="Goetheanum Schrift Klar" pitchFamily="34" charset="0"/>
                 <a:ea typeface="Goetheanum Schrift Klar" pitchFamily="34" charset="-122"/>
                 <a:cs typeface="Goetheanum Schrift Klar" pitchFamily="34" charset="-120"/>
               </a:rPr>
-              <a:t>Plakat 50</a:t>
-            </a:r>
-            <a:endParaRPr lang="en-US" sz="900" dirty="0"/>
-          </a:p>
-        </p:txBody>
-      </p:sp>
-      <p:sp>
-        <p:nvSpPr>
-          <p:cNvPr id="6" name="Text 3"/>
+              <a:t>Zuerst das Ganze</a:t>
+            </a:r>
+            <a:endParaRPr lang="en-US" sz="5000" dirty="0"/>
+          </a:p>
+        </p:txBody>
+      </p:sp>
+      <p:sp>
+        <p:nvSpPr>
+          <p:cNvPr id="6" name="Text 4"/>
           <p:cNvSpPr/>
           <p:nvPr/>
         </p:nvSpPr>
         <p:spPr>
           <a:xfrm>
-            <a:off x="2002536" y="2377440"/>
-            <a:ext cx="8138160" cy="914400"/>
+            <a:off x="548640" y="3236976"/>
+            <a:ext cx="1325880" cy="512064"/>
           </a:xfrm>
           <a:prstGeom prst="rect">
             <a:avLst/>
@@ -6078,34 +7679,73 @@
           <a:bodyPr wrap="square" lIns="0" tIns="0" rIns="0" bIns="0" rtlCol="0" anchor="ctr"/>
           <a:lstStyle/>
           <a:p>
-            <a:pPr indent="0" marL="0">
-              <a:buNone/>
-            </a:pPr>
-            <a:r>
-              <a:rPr lang="en-US" sz="5000" dirty="0">
-                <a:solidFill>
-                  <a:srgbClr val="1A1A1A"/>
+            <a:pPr algn="r" indent="0" marL="0">
+              <a:buNone/>
+            </a:pPr>
+            <a:r>
+              <a:rPr lang="en-US" sz="900" dirty="0">
+                <a:solidFill>
+                  <a:srgbClr val="005EB8"/>
                 </a:solidFill>
                 <a:latin typeface="Goetheanum Schrift Klar" pitchFamily="34" charset="0"/>
                 <a:ea typeface="Goetheanum Schrift Klar" pitchFamily="34" charset="-122"/>
                 <a:cs typeface="Goetheanum Schrift Klar" pitchFamily="34" charset="-120"/>
               </a:rPr>
-              <a:t>Zuerst das Ganze</a:t>
-            </a:r>
-            <a:endParaRPr lang="en-US" sz="5000" dirty="0"/>
-          </a:p>
-        </p:txBody>
-      </p:sp>
-      <p:sp>
-        <p:nvSpPr>
-          <p:cNvPr id="7" name="Text 4"/>
+              <a:t>Überschrift 26</a:t>
+            </a:r>
+            <a:endParaRPr lang="en-US" sz="900" dirty="0"/>
+          </a:p>
+        </p:txBody>
+      </p:sp>
+      <p:sp>
+        <p:nvSpPr>
+          <p:cNvPr id="7" name="Text 5"/>
           <p:cNvSpPr/>
           <p:nvPr/>
         </p:nvSpPr>
         <p:spPr>
           <a:xfrm>
-            <a:off x="548640" y="3438144"/>
-            <a:ext cx="1325880" cy="530352"/>
+            <a:off x="2002536" y="3236976"/>
+            <a:ext cx="8138160" cy="512064"/>
+          </a:xfrm>
+          <a:prstGeom prst="rect">
+            <a:avLst/>
+          </a:prstGeom>
+          <a:noFill/>
+          <a:ln/>
+        </p:spPr>
+        <p:txBody>
+          <a:bodyPr wrap="square" lIns="0" tIns="0" rIns="0" bIns="0" rtlCol="0" anchor="ctr"/>
+          <a:lstStyle/>
+          <a:p>
+            <a:pPr indent="0" marL="0">
+              <a:buNone/>
+            </a:pPr>
+            <a:r>
+              <a:rPr lang="en-US" sz="2600" dirty="0">
+                <a:solidFill>
+                  <a:srgbClr val="1A1A1A"/>
+                </a:solidFill>
+                <a:latin typeface="Goetheanum Schrift Deutlich" pitchFamily="34" charset="0"/>
+                <a:ea typeface="Goetheanum Schrift Deutlich" pitchFamily="34" charset="-122"/>
+                <a:cs typeface="Goetheanum Schrift Deutlich" pitchFamily="34" charset="-120"/>
+              </a:rPr>
+              <a:t>Dann der tragende Gedanke</a:t>
+            </a:r>
+            <a:endParaRPr lang="en-US" sz="2600" dirty="0"/>
+          </a:p>
+        </p:txBody>
+      </p:sp>
+      <p:sp>
+        <p:nvSpPr>
+          <p:cNvPr id="8" name="Text 6"/>
+          <p:cNvSpPr/>
+          <p:nvPr/>
+        </p:nvSpPr>
+        <p:spPr>
+          <a:xfrm>
+            <a:off x="548640" y="3858768"/>
+            <a:ext cx="1325880" cy="365760"/>
           </a:xfrm>
           <a:prstGeom prst="rect">
             <a:avLst/>
@@ -6129,7 +7769,7 @@
                 <a:ea typeface="Goetheanum Schrift Klar" pitchFamily="34" charset="-122"/>
                 <a:cs typeface="Goetheanum Schrift Klar" pitchFamily="34" charset="-120"/>
               </a:rPr>
-              <a:t>Überschrift 26</a:t>
+              <a:t>Lead 18</a:t>
             </a:r>
             <a:endParaRPr lang="en-US" sz="900" dirty="0"/>
           </a:p>
@@ -6137,14 +7777,14 @@
       </p:sp>
       <p:sp>
         <p:nvSpPr>
-          <p:cNvPr id="8" name="Text 5"/>
+          <p:cNvPr id="9" name="Text 7"/>
           <p:cNvSpPr/>
           <p:nvPr/>
         </p:nvSpPr>
         <p:spPr>
           <a:xfrm>
-            <a:off x="2002536" y="3438144"/>
-            <a:ext cx="8138160" cy="530352"/>
+            <a:off x="2002536" y="3858768"/>
+            <a:ext cx="8138160" cy="365760"/>
           </a:xfrm>
           <a:prstGeom prst="rect">
             <a:avLst/>
@@ -6160,7 +7800,7 @@
               <a:buNone/>
             </a:pPr>
             <a:r>
-              <a:rPr lang="en-US" sz="2600" dirty="0">
+              <a:rPr lang="en-US" sz="1800" dirty="0">
                 <a:solidFill>
                   <a:srgbClr val="1A1A1A"/>
                 </a:solidFill>
@@ -6168,22 +7808,22 @@
                 <a:ea typeface="Goetheanum Schrift Klar" pitchFamily="34" charset="-122"/>
                 <a:cs typeface="Goetheanum Schrift Klar" pitchFamily="34" charset="-120"/>
               </a:rPr>
-              <a:t>Dann der tragende Gedanke</a:t>
-            </a:r>
-            <a:endParaRPr lang="en-US" sz="2600" dirty="0"/>
-          </a:p>
-        </p:txBody>
-      </p:sp>
-      <p:sp>
-        <p:nvSpPr>
-          <p:cNvPr id="9" name="Text 6"/>
+              <a:t>Ein Vorspann sammelt das Wichtige</a:t>
+            </a:r>
+            <a:endParaRPr lang="en-US" sz="1800" dirty="0"/>
+          </a:p>
+        </p:txBody>
+      </p:sp>
+      <p:sp>
+        <p:nvSpPr>
+          <p:cNvPr id="10" name="Text 8"/>
           <p:cNvSpPr/>
           <p:nvPr/>
         </p:nvSpPr>
         <p:spPr>
           <a:xfrm>
-            <a:off x="548640" y="4114800"/>
-            <a:ext cx="1325880" cy="384048"/>
+            <a:off x="548640" y="4334256"/>
+            <a:ext cx="1325880" cy="274320"/>
           </a:xfrm>
           <a:prstGeom prst="rect">
             <a:avLst/>
@@ -6207,7 +7847,7 @@
                 <a:ea typeface="Goetheanum Schrift Klar" pitchFamily="34" charset="-122"/>
                 <a:cs typeface="Goetheanum Schrift Klar" pitchFamily="34" charset="-120"/>
               </a:rPr>
-              <a:t>Lead 18</a:t>
+              <a:t>Grundtext 13</a:t>
             </a:r>
             <a:endParaRPr lang="en-US" sz="900" dirty="0"/>
           </a:p>
@@ -6215,14 +7855,14 @@
       </p:sp>
       <p:sp>
         <p:nvSpPr>
-          <p:cNvPr id="10" name="Text 7"/>
+          <p:cNvPr id="11" name="Text 9"/>
           <p:cNvSpPr/>
           <p:nvPr/>
         </p:nvSpPr>
         <p:spPr>
           <a:xfrm>
-            <a:off x="2002536" y="4114800"/>
-            <a:ext cx="8138160" cy="384048"/>
+            <a:off x="2002536" y="4334256"/>
+            <a:ext cx="8138160" cy="274320"/>
           </a:xfrm>
           <a:prstGeom prst="rect">
             <a:avLst/>
@@ -6238,7 +7878,7 @@
               <a:buNone/>
             </a:pPr>
             <a:r>
-              <a:rPr lang="en-US" sz="1800" dirty="0">
+              <a:rPr lang="en-US" sz="1300" dirty="0">
                 <a:solidFill>
                   <a:srgbClr val="1A1A1A"/>
                 </a:solidFill>
@@ -6246,22 +7886,22 @@
                 <a:ea typeface="Goetheanum Schrift Klar" pitchFamily="34" charset="-122"/>
                 <a:cs typeface="Goetheanum Schrift Klar" pitchFamily="34" charset="-120"/>
               </a:rPr>
-              <a:t>Ein Vorspann sammelt das Wichtige</a:t>
-            </a:r>
-            <a:endParaRPr lang="en-US" sz="1800" dirty="0"/>
-          </a:p>
-        </p:txBody>
-      </p:sp>
-      <p:sp>
-        <p:nvSpPr>
-          <p:cNvPr id="11" name="Text 8"/>
+              <a:t>Der Grundtext erzählt ruhig und genau.</a:t>
+            </a:r>
+            <a:endParaRPr lang="en-US" sz="1300" dirty="0"/>
+          </a:p>
+        </p:txBody>
+      </p:sp>
+      <p:sp>
+        <p:nvSpPr>
+          <p:cNvPr id="12" name="Text 10"/>
           <p:cNvSpPr/>
           <p:nvPr/>
         </p:nvSpPr>
         <p:spPr>
           <a:xfrm>
-            <a:off x="548640" y="4645152"/>
-            <a:ext cx="1325880" cy="292608"/>
+            <a:off x="548640" y="4718304"/>
+            <a:ext cx="1325880" cy="219456"/>
           </a:xfrm>
           <a:prstGeom prst="rect">
             <a:avLst/>
@@ -6285,7 +7925,7 @@
                 <a:ea typeface="Goetheanum Schrift Klar" pitchFamily="34" charset="-122"/>
                 <a:cs typeface="Goetheanum Schrift Klar" pitchFamily="34" charset="-120"/>
               </a:rPr>
-              <a:t>Grundtext 13</a:t>
+              <a:t>Marginalie 9</a:t>
             </a:r>
             <a:endParaRPr lang="en-US" sz="900" dirty="0"/>
           </a:p>
@@ -6293,14 +7933,14 @@
       </p:sp>
       <p:sp>
         <p:nvSpPr>
-          <p:cNvPr id="12" name="Text 9"/>
+          <p:cNvPr id="13" name="Text 11"/>
           <p:cNvSpPr/>
           <p:nvPr/>
         </p:nvSpPr>
         <p:spPr>
           <a:xfrm>
-            <a:off x="2002536" y="4645152"/>
-            <a:ext cx="8138160" cy="292608"/>
+            <a:off x="2002536" y="4718304"/>
+            <a:ext cx="8138160" cy="219456"/>
           </a:xfrm>
           <a:prstGeom prst="rect">
             <a:avLst/>
@@ -6316,7 +7956,7 @@
               <a:buNone/>
             </a:pPr>
             <a:r>
-              <a:rPr lang="en-US" sz="1300" dirty="0">
+              <a:rPr lang="en-US" sz="900" dirty="0">
                 <a:solidFill>
                   <a:srgbClr val="1A1A1A"/>
                 </a:solidFill>
@@ -6324,21 +7964,21 @@
                 <a:ea typeface="Goetheanum Schrift Klar" pitchFamily="34" charset="-122"/>
                 <a:cs typeface="Goetheanum Schrift Klar" pitchFamily="34" charset="-120"/>
               </a:rPr>
-              <a:t>Der Grundtext erzählt ruhig und genau.</a:t>
-            </a:r>
-            <a:endParaRPr lang="en-US" sz="1300" dirty="0"/>
-          </a:p>
-        </p:txBody>
-      </p:sp>
-      <p:sp>
-        <p:nvSpPr>
-          <p:cNvPr id="13" name="Text 10"/>
+              <a:t>Die Marginalie begleitet am Rand.</a:t>
+            </a:r>
+            <a:endParaRPr lang="en-US" sz="900" dirty="0"/>
+          </a:p>
+        </p:txBody>
+      </p:sp>
+      <p:sp>
+        <p:nvSpPr>
+          <p:cNvPr id="14" name="Text 12"/>
           <p:cNvSpPr/>
           <p:nvPr/>
         </p:nvSpPr>
         <p:spPr>
           <a:xfrm>
-            <a:off x="548640" y="5084064"/>
+            <a:off x="548640" y="5138928"/>
             <a:ext cx="1325880" cy="237744"/>
           </a:xfrm>
           <a:prstGeom prst="rect">
@@ -6363,7 +8003,7 @@
                 <a:ea typeface="Goetheanum Schrift Klar" pitchFamily="34" charset="-122"/>
                 <a:cs typeface="Goetheanum Schrift Klar" pitchFamily="34" charset="-120"/>
               </a:rPr>
-              <a:t>Marginalie 9</a:t>
+              <a:t>Dicke</a:t>
             </a:r>
             <a:endParaRPr lang="en-US" sz="900" dirty="0"/>
           </a:p>
@@ -6371,14 +8011,14 @@
       </p:sp>
       <p:sp>
         <p:nvSpPr>
-          <p:cNvPr id="14" name="Text 11"/>
+          <p:cNvPr id="15" name="Text 13"/>
           <p:cNvSpPr/>
           <p:nvPr/>
         </p:nvSpPr>
         <p:spPr>
           <a:xfrm>
-            <a:off x="2002536" y="5084064"/>
-            <a:ext cx="8138160" cy="237744"/>
+            <a:off x="2002536" y="5138928"/>
+            <a:ext cx="4572000" cy="237744"/>
           </a:xfrm>
           <a:prstGeom prst="rect">
             <a:avLst/>
@@ -6394,7 +8034,85 @@
               <a:buNone/>
             </a:pPr>
             <a:r>
-              <a:rPr lang="en-US" sz="900" dirty="0">
+              <a:rPr lang="en-US" sz="1300" dirty="0">
+                <a:solidFill>
+                  <a:srgbClr val="1A1A1A"/>
+                </a:solidFill>
+                <a:latin typeface="Goetheanum Schrift Leise" pitchFamily="34" charset="0"/>
+                <a:ea typeface="Goetheanum Schrift Leise" pitchFamily="34" charset="-122"/>
+                <a:cs typeface="Goetheanum Schrift Leise" pitchFamily="34" charset="-120"/>
+              </a:rPr>
+              <a:t>Leise dämpft</a:t>
+            </a:r>
+            <a:endParaRPr lang="en-US" sz="1300" dirty="0"/>
+          </a:p>
+        </p:txBody>
+      </p:sp>
+      <p:sp>
+        <p:nvSpPr>
+          <p:cNvPr id="16" name="Text 14"/>
+          <p:cNvSpPr/>
+          <p:nvPr/>
+        </p:nvSpPr>
+        <p:spPr>
+          <a:xfrm>
+            <a:off x="2002536" y="5376672"/>
+            <a:ext cx="4572000" cy="237744"/>
+          </a:xfrm>
+          <a:prstGeom prst="rect">
+            <a:avLst/>
+          </a:prstGeom>
+          <a:noFill/>
+          <a:ln/>
+        </p:spPr>
+        <p:txBody>
+          <a:bodyPr wrap="square" lIns="0" tIns="0" rIns="0" bIns="0" rtlCol="0" anchor="ctr"/>
+          <a:lstStyle/>
+          <a:p>
+            <a:pPr indent="0" marL="0">
+              <a:buNone/>
+            </a:pPr>
+            <a:r>
+              <a:rPr lang="en-US" sz="1300" dirty="0">
+                <a:solidFill>
+                  <a:srgbClr val="1A1A1A"/>
+                </a:solidFill>
+                <a:latin typeface="Goetheanum Schrift Ruhig" pitchFamily="34" charset="0"/>
+                <a:ea typeface="Goetheanum Schrift Ruhig" pitchFamily="34" charset="-122"/>
+                <a:cs typeface="Goetheanum Schrift Ruhig" pitchFamily="34" charset="-120"/>
+              </a:rPr>
+              <a:t>Ruhig begleitet</a:t>
+            </a:r>
+            <a:endParaRPr lang="en-US" sz="1300" dirty="0"/>
+          </a:p>
+        </p:txBody>
+      </p:sp>
+      <p:sp>
+        <p:nvSpPr>
+          <p:cNvPr id="17" name="Text 15"/>
+          <p:cNvSpPr/>
+          <p:nvPr/>
+        </p:nvSpPr>
+        <p:spPr>
+          <a:xfrm>
+            <a:off x="2002536" y="5614416"/>
+            <a:ext cx="4572000" cy="237744"/>
+          </a:xfrm>
+          <a:prstGeom prst="rect">
+            <a:avLst/>
+          </a:prstGeom>
+          <a:noFill/>
+          <a:ln/>
+        </p:spPr>
+        <p:txBody>
+          <a:bodyPr wrap="square" lIns="0" tIns="0" rIns="0" bIns="0" rtlCol="0" anchor="ctr"/>
+          <a:lstStyle/>
+          <a:p>
+            <a:pPr indent="0" marL="0">
+              <a:buNone/>
+            </a:pPr>
+            <a:r>
+              <a:rPr lang="en-US" sz="1300" dirty="0">
                 <a:solidFill>
                   <a:srgbClr val="1A1A1A"/>
                 </a:solidFill>
@@ -6402,22 +8120,22 @@
                 <a:ea typeface="Goetheanum Schrift Klar" pitchFamily="34" charset="-122"/>
                 <a:cs typeface="Goetheanum Schrift Klar" pitchFamily="34" charset="-120"/>
               </a:rPr>
-              <a:t>Die Marginalie begleitet am Rand.</a:t>
-            </a:r>
-            <a:endParaRPr lang="en-US" sz="900" dirty="0"/>
-          </a:p>
-        </p:txBody>
-      </p:sp>
-      <p:sp>
-        <p:nvSpPr>
-          <p:cNvPr id="15" name="Text 12"/>
+              <a:t>Klar erzählt</a:t>
+            </a:r>
+            <a:endParaRPr lang="en-US" sz="1300" dirty="0"/>
+          </a:p>
+        </p:txBody>
+      </p:sp>
+      <p:sp>
+        <p:nvSpPr>
+          <p:cNvPr id="18" name="Text 16"/>
           <p:cNvSpPr/>
           <p:nvPr/>
         </p:nvSpPr>
         <p:spPr>
           <a:xfrm>
-            <a:off x="548640" y="5577840"/>
-            <a:ext cx="1325880" cy="292608"/>
+            <a:off x="2002536" y="5852160"/>
+            <a:ext cx="4572000" cy="237744"/>
           </a:xfrm>
           <a:prstGeom prst="rect">
             <a:avLst/>
@@ -6429,19 +8147,97 @@
           <a:bodyPr wrap="square" lIns="0" tIns="0" rIns="0" bIns="0" rtlCol="0" anchor="ctr"/>
           <a:lstStyle/>
           <a:p>
-            <a:pPr algn="r" indent="0" marL="0">
+            <a:pPr indent="0" marL="0">
+              <a:buNone/>
+            </a:pPr>
+            <a:r>
+              <a:rPr lang="en-US" sz="1300" dirty="0">
+                <a:solidFill>
+                  <a:srgbClr val="1A1A1A"/>
+                </a:solidFill>
+                <a:latin typeface="Goetheanum Schrift Deutlich" pitchFamily="34" charset="0"/>
+                <a:ea typeface="Goetheanum Schrift Deutlich" pitchFamily="34" charset="-122"/>
+                <a:cs typeface="Goetheanum Schrift Deutlich" pitchFamily="34" charset="-120"/>
+              </a:rPr>
+              <a:t>Deutlich führt</a:t>
+            </a:r>
+            <a:endParaRPr lang="en-US" sz="1300" dirty="0"/>
+          </a:p>
+        </p:txBody>
+      </p:sp>
+      <p:sp>
+        <p:nvSpPr>
+          <p:cNvPr id="19" name="Text 17"/>
+          <p:cNvSpPr/>
+          <p:nvPr/>
+        </p:nvSpPr>
+        <p:spPr>
+          <a:xfrm>
+            <a:off x="2002536" y="6089904"/>
+            <a:ext cx="4572000" cy="237744"/>
+          </a:xfrm>
+          <a:prstGeom prst="rect">
+            <a:avLst/>
+          </a:prstGeom>
+          <a:noFill/>
+          <a:ln/>
+        </p:spPr>
+        <p:txBody>
+          <a:bodyPr wrap="square" lIns="0" tIns="0" rIns="0" bIns="0" rtlCol="0" anchor="ctr"/>
+          <a:lstStyle/>
+          <a:p>
+            <a:pPr indent="0" marL="0">
+              <a:buNone/>
+            </a:pPr>
+            <a:r>
+              <a:rPr lang="en-US" sz="1300" dirty="0">
+                <a:solidFill>
+                  <a:srgbClr val="1A1A1A"/>
+                </a:solidFill>
+                <a:latin typeface="Goetheanum Schrift Laut" pitchFamily="34" charset="0"/>
+                <a:ea typeface="Goetheanum Schrift Laut" pitchFamily="34" charset="-122"/>
+                <a:cs typeface="Goetheanum Schrift Laut" pitchFamily="34" charset="-120"/>
+              </a:rPr>
+              <a:t>Laut betont</a:t>
+            </a:r>
+            <a:endParaRPr lang="en-US" sz="1300" dirty="0"/>
+          </a:p>
+        </p:txBody>
+      </p:sp>
+      <p:sp>
+        <p:nvSpPr>
+          <p:cNvPr id="20" name="Text 18"/>
+          <p:cNvSpPr/>
+          <p:nvPr/>
+        </p:nvSpPr>
+        <p:spPr>
+          <a:xfrm>
+            <a:off x="2002536" y="6364224"/>
+            <a:ext cx="6400800" cy="201168"/>
+          </a:xfrm>
+          <a:prstGeom prst="rect">
+            <a:avLst/>
+          </a:prstGeom>
+          <a:noFill/>
+          <a:ln/>
+        </p:spPr>
+        <p:txBody>
+          <a:bodyPr wrap="square" lIns="0" tIns="0" rIns="0" bIns="0" rtlCol="0" anchor="ctr"/>
+          <a:lstStyle/>
+          <a:p>
+            <a:pPr indent="0" marL="0">
               <a:buNone/>
             </a:pPr>
             <a:r>
               <a:rPr lang="en-US" sz="900" dirty="0">
                 <a:solidFill>
-                  <a:srgbClr val="005EB8"/>
+                  <a:srgbClr val="6B7480"/>
                 </a:solidFill>
                 <a:latin typeface="Goetheanum Schrift Klar" pitchFamily="34" charset="0"/>
                 <a:ea typeface="Goetheanum Schrift Klar" pitchFamily="34" charset="-122"/>
                 <a:cs typeface="Goetheanum Schrift Klar" pitchFamily="34" charset="-120"/>
               </a:rPr>
-              <a:t>Dicke</a:t>
+              <a:t>In Klar-Text schaltet Strg+B auf Laut und Strg+I auf Leise.</a:t>
             </a:r>
             <a:endParaRPr lang="en-US" sz="900" dirty="0"/>
           </a:p>
@@ -6449,14 +8245,14 @@
       </p:sp>
       <p:sp>
         <p:nvSpPr>
-          <p:cNvPr id="16" name="Text 13"/>
+          <p:cNvPr id="21" name="Text 19"/>
           <p:cNvSpPr/>
           <p:nvPr/>
         </p:nvSpPr>
         <p:spPr>
           <a:xfrm>
-            <a:off x="2002536" y="5577840"/>
-            <a:ext cx="4572000" cy="292608"/>
+            <a:off x="548640" y="6656832"/>
+            <a:ext cx="1325880" cy="219456"/>
           </a:xfrm>
           <a:prstGeom prst="rect">
             <a:avLst/>
@@ -6468,73 +8264,34 @@
           <a:bodyPr wrap="square" lIns="0" tIns="0" rIns="0" bIns="0" rtlCol="0" anchor="ctr"/>
           <a:lstStyle/>
           <a:p>
-            <a:pPr indent="0" marL="0">
-              <a:buNone/>
-            </a:pPr>
-            <a:r>
-              <a:rPr lang="en-US" sz="1300" dirty="0">
-                <a:solidFill>
-                  <a:srgbClr val="1A1A1A"/>
-                </a:solidFill>
-                <a:latin typeface="Goetheanum Schrift Leise" pitchFamily="34" charset="0"/>
-                <a:ea typeface="Goetheanum Schrift Leise" pitchFamily="34" charset="-122"/>
-                <a:cs typeface="Goetheanum Schrift Leise" pitchFamily="34" charset="-120"/>
-              </a:rPr>
-              <a:t>Leise dämpft</a:t>
-            </a:r>
-            <a:endParaRPr lang="en-US" sz="1300" dirty="0"/>
-          </a:p>
-        </p:txBody>
-      </p:sp>
-      <p:sp>
-        <p:nvSpPr>
-          <p:cNvPr id="17" name="Text 14"/>
-          <p:cNvSpPr/>
-          <p:nvPr/>
-        </p:nvSpPr>
-        <p:spPr>
-          <a:xfrm>
-            <a:off x="2002536" y="5870448"/>
-            <a:ext cx="4572000" cy="292608"/>
-          </a:xfrm>
-          <a:prstGeom prst="rect">
-            <a:avLst/>
-          </a:prstGeom>
-          <a:noFill/>
-          <a:ln/>
-        </p:spPr>
-        <p:txBody>
-          <a:bodyPr wrap="square" lIns="0" tIns="0" rIns="0" bIns="0" rtlCol="0" anchor="ctr"/>
-          <a:lstStyle/>
-          <a:p>
-            <a:pPr indent="0" marL="0">
-              <a:buNone/>
-            </a:pPr>
-            <a:r>
-              <a:rPr lang="en-US" sz="1300" dirty="0">
-                <a:solidFill>
-                  <a:srgbClr val="1A1A1A"/>
+            <a:pPr algn="r" indent="0" marL="0">
+              <a:buNone/>
+            </a:pPr>
+            <a:r>
+              <a:rPr lang="en-US" sz="900" dirty="0">
+                <a:solidFill>
+                  <a:srgbClr val="005EB8"/>
                 </a:solidFill>
                 <a:latin typeface="Goetheanum Schrift Klar" pitchFamily="34" charset="0"/>
                 <a:ea typeface="Goetheanum Schrift Klar" pitchFamily="34" charset="-122"/>
                 <a:cs typeface="Goetheanum Schrift Klar" pitchFamily="34" charset="-120"/>
               </a:rPr>
-              <a:t>Klar erzählt</a:t>
-            </a:r>
-            <a:endParaRPr lang="en-US" sz="1300" dirty="0"/>
-          </a:p>
-        </p:txBody>
-      </p:sp>
-      <p:sp>
-        <p:nvSpPr>
-          <p:cNvPr id="18" name="Text 15"/>
+              <a:t>Regel</a:t>
+            </a:r>
+            <a:endParaRPr lang="en-US" sz="900" dirty="0"/>
+          </a:p>
+        </p:txBody>
+      </p:sp>
+      <p:sp>
+        <p:nvSpPr>
+          <p:cNvPr id="22" name="Text 20"/>
           <p:cNvSpPr/>
           <p:nvPr/>
         </p:nvSpPr>
         <p:spPr>
           <a:xfrm>
-            <a:off x="2002536" y="6163056"/>
-            <a:ext cx="4572000" cy="292608"/>
+            <a:off x="2002536" y="6656832"/>
+            <a:ext cx="7315200" cy="219456"/>
           </a:xfrm>
           <a:prstGeom prst="rect">
             <a:avLst/>
@@ -6550,54 +8307,15 @@
               <a:buNone/>
             </a:pPr>
             <a:r>
-              <a:rPr lang="en-US" sz="1300" dirty="0">
+              <a:rPr lang="en-US" sz="900" dirty="0">
                 <a:solidFill>
                   <a:srgbClr val="1A1A1A"/>
-                </a:solidFill>
-                <a:latin typeface="Goetheanum Schrift Laut" pitchFamily="34" charset="0"/>
-                <a:ea typeface="Goetheanum Schrift Laut" pitchFamily="34" charset="-122"/>
-                <a:cs typeface="Goetheanum Schrift Laut" pitchFamily="34" charset="-120"/>
-              </a:rPr>
-              <a:t>Laut betont</a:t>
-            </a:r>
-            <a:endParaRPr lang="en-US" sz="1300" dirty="0"/>
-          </a:p>
-        </p:txBody>
-      </p:sp>
-      <p:sp>
-        <p:nvSpPr>
-          <p:cNvPr id="19" name="Text 16"/>
-          <p:cNvSpPr/>
-          <p:nvPr/>
-        </p:nvSpPr>
-        <p:spPr>
-          <a:xfrm>
-            <a:off x="548640" y="6711696"/>
-            <a:ext cx="1325880" cy="256032"/>
-          </a:xfrm>
-          <a:prstGeom prst="rect">
-            <a:avLst/>
-          </a:prstGeom>
-          <a:noFill/>
-          <a:ln/>
-        </p:spPr>
-        <p:txBody>
-          <a:bodyPr wrap="square" lIns="0" tIns="0" rIns="0" bIns="0" rtlCol="0" anchor="ctr"/>
-          <a:lstStyle/>
-          <a:p>
-            <a:pPr algn="r" indent="0" marL="0">
-              <a:buNone/>
-            </a:pPr>
-            <a:r>
-              <a:rPr lang="en-US" sz="900" dirty="0">
-                <a:solidFill>
-                  <a:srgbClr val="005EB8"/>
                 </a:solidFill>
                 <a:latin typeface="Goetheanum Schrift Klar" pitchFamily="34" charset="0"/>
                 <a:ea typeface="Goetheanum Schrift Klar" pitchFamily="34" charset="-122"/>
                 <a:cs typeface="Goetheanum Schrift Klar" pitchFamily="34" charset="-120"/>
               </a:rPr>
-              <a:t>Regel</a:t>
+              <a:t>Anführungen stehen in einfachen Guillemets: ‹so›. Überschriften stehen in Deutlich.</a:t>
             </a:r>
             <a:endParaRPr lang="en-US" sz="900" dirty="0"/>
           </a:p>
@@ -6605,14 +8323,14 @@
       </p:sp>
       <p:sp>
         <p:nvSpPr>
-          <p:cNvPr id="20" name="Text 17"/>
+          <p:cNvPr id="23" name="Text 21"/>
           <p:cNvSpPr/>
           <p:nvPr/>
         </p:nvSpPr>
         <p:spPr>
           <a:xfrm>
-            <a:off x="2002536" y="6711696"/>
-            <a:ext cx="6400800" cy="256032"/>
+            <a:off x="548640" y="6995160"/>
+            <a:ext cx="3657600" cy="274320"/>
           </a:xfrm>
           <a:prstGeom prst="rect">
             <a:avLst/>
@@ -6630,65 +8348,26 @@
             <a:r>
               <a:rPr lang="en-US" sz="900" dirty="0">
                 <a:solidFill>
-                  <a:srgbClr val="1A1A1A"/>
+                  <a:srgbClr val="6B7480"/>
                 </a:solidFill>
                 <a:latin typeface="Goetheanum Schrift Klar" pitchFamily="34" charset="0"/>
                 <a:ea typeface="Goetheanum Schrift Klar" pitchFamily="34" charset="-122"/>
                 <a:cs typeface="Goetheanum Schrift Klar" pitchFamily="34" charset="-120"/>
               </a:rPr>
-              <a:t>Anführungen stehen in einfachen Guillemets: ‹so›.</a:t>
-            </a:r>
-            <a:endParaRPr lang="en-US" sz="900" dirty="0"/>
-          </a:p>
-        </p:txBody>
-      </p:sp>
-      <p:sp>
-        <p:nvSpPr>
-          <p:cNvPr id="21" name="Text 18"/>
-          <p:cNvSpPr/>
-          <p:nvPr/>
-        </p:nvSpPr>
-        <p:spPr>
-          <a:xfrm>
-            <a:off x="548640" y="6995160"/>
-            <a:ext cx="3657600" cy="274320"/>
-          </a:xfrm>
-          <a:prstGeom prst="rect">
-            <a:avLst/>
-          </a:prstGeom>
-          <a:noFill/>
-          <a:ln/>
-        </p:spPr>
-        <p:txBody>
-          <a:bodyPr wrap="square" lIns="0" tIns="0" rIns="0" bIns="0" rtlCol="0" anchor="ctr"/>
-          <a:lstStyle/>
-          <a:p>
-            <a:pPr indent="0" marL="0">
-              <a:buNone/>
-            </a:pPr>
-            <a:r>
-              <a:rPr lang="en-US" sz="900" dirty="0">
-                <a:solidFill>
-                  <a:srgbClr val="6B7480"/>
+              <a:t>Schriften installieren: </a:t>
+            </a:r>
+            <a:pPr indent="0" marL="0">
+              <a:buNone/>
+            </a:pPr>
+            <a:r>
+              <a:rPr lang="en-US" sz="900" u="sng" dirty="0">
+                <a:solidFill>
+                  <a:srgbClr val="005EB8"/>
                 </a:solidFill>
                 <a:latin typeface="Goetheanum Schrift Klar" pitchFamily="34" charset="0"/>
                 <a:ea typeface="Goetheanum Schrift Klar" pitchFamily="34" charset="-122"/>
                 <a:cs typeface="Goetheanum Schrift Klar" pitchFamily="34" charset="-120"/>
-              </a:rPr>
-              <a:t>Schriften installieren: </a:t>
-            </a:r>
-            <a:pPr indent="0" marL="0">
-              <a:buNone/>
-            </a:pPr>
-            <a:r>
-              <a:rPr lang="en-US" sz="900" u="sng" dirty="0">
-                <a:solidFill>
-                  <a:srgbClr val="005EB8"/>
-                </a:solidFill>
-                <a:latin typeface="Goetheanum Schrift Klar" pitchFamily="34" charset="0"/>
-                <a:ea typeface="Goetheanum Schrift Klar" pitchFamily="34" charset="-122"/>
-                <a:cs typeface="Goetheanum Schrift Klar" pitchFamily="34" charset="-120"/>
-                <a:hlinkClick r:id="rId2" invalidUrl="" action="" tgtFrame="" tooltip="" history="1" highlightClick="0" endSnd="0">
+                <a:hlinkClick r:id="rId1" invalidUrl="" action="" tgtFrame="" tooltip="" history="1" highlightClick="0" endSnd="0">
                   <a:extLst>
                     <a:ext uri="{A12FA001-AC4F-418D-AE19-62706E023703}">
                       <ahyp:hlinkClr xmlns:ahyp="http://schemas.microsoft.com/office/drawing/2018/hyperlinkcolor" val="tx"/>
@@ -6704,40 +8383,49 @@
       </p:sp>
       <p:sp>
         <p:nvSpPr>
-          <p:cNvPr id="22" name="Text 19"/>
-          <p:cNvSpPr/>
-          <p:nvPr/>
-        </p:nvSpPr>
-        <p:spPr>
-          <a:xfrm>
-            <a:off x="4654296" y="6995160"/>
-            <a:ext cx="5486400" cy="274320"/>
-          </a:xfrm>
-          <a:prstGeom prst="rect">
-            <a:avLst/>
-          </a:prstGeom>
-          <a:noFill/>
-          <a:ln/>
-        </p:spPr>
-        <p:txBody>
-          <a:bodyPr wrap="square" lIns="0" tIns="0" rIns="0" bIns="0" rtlCol="0" anchor="ctr"/>
-          <a:lstStyle/>
-          <a:p>
-            <a:pPr algn="r" indent="0" marL="0">
-              <a:buNone/>
-            </a:pPr>
-            <a:r>
-              <a:rPr lang="en-US" sz="900" dirty="0">
+          <p:cNvPr id="25" name="Slide Number Placeholder 0"/>
+          <p:cNvSpPr>
+            <a:spLocks noGrp="1"/>
+          </p:cNvSpPr>
+          <p:nvPr>
+            <p:ph type="sldNum" sz="quarter" idx="4294967295"/>
+          </p:nvPr>
+        </p:nvSpPr>
+        <p:spPr>
+          <a:xfrm>
+            <a:off x="9747504" y="6995160"/>
+            <a:ext cx="393192" cy="274320"/>
+          </a:xfrm>
+          <a:prstGeom prst="rect">
+            <a:avLst/>
+          </a:prstGeom>
+          <a:extLst>
+            <a:ext uri="{C572A759-6A51-4108-AA02-DFA0A04FC94B}">
+              <ma14:wrappingTextBoxFlag xmlns:ma14="http://schemas.microsoft.com/office/mac/drawingml/2011/main" val="0"/>
+            </a:ext>
+          </a:extLst>
+        </p:spPr>
+        <p:txBody>
+          <a:bodyPr anchor="ctr"/>
+          <a:lstStyle>
+            <a:lvl1pPr>
+              <a:defRPr sz="900">
                 <a:solidFill>
                   <a:srgbClr val="6B7480"/>
                 </a:solidFill>
-                <a:latin typeface="Goetheanum Schrift Klar" pitchFamily="34" charset="0"/>
-                <a:ea typeface="Goetheanum Schrift Klar" pitchFamily="34" charset="-122"/>
-                <a:cs typeface="Goetheanum Schrift Klar" pitchFamily="34" charset="-120"/>
-              </a:rPr>
-              <a:t>Titel der Präsentation · 00.00.2026 · 2</a:t>
-            </a:r>
-            <a:endParaRPr lang="en-US" sz="900" dirty="0"/>
+                <a:latin typeface="Goetheanum Schrift Klar"/>
+                <a:ea typeface="Goetheanum Schrift Klar"/>
+                <a:cs typeface="Goetheanum Schrift Klar"/>
+              </a:defRPr>
+            </a:lvl1pPr>
+          </a:lstStyle>
+          <a:p>
+            <a:pPr algn="l"/>
+            <a:fld id="{F7021451-1387-4CA6-816F-3879F97B5CBC}" type="slidenum">
+              <a:rPr b="0" lang="en-US"/>
+              <a:t>2</a:t>
+            </a:fld>
+            <a:endParaRPr lang="en-US"/>
           </a:p>
         </p:txBody>
       </p:sp>
@@ -6752,13 +8440,6 @@
 <file path=ppt/slides/slide3.xml><?xml version="1.0" encoding="utf-8"?>
 <p:sld xmlns:a="http://schemas.openxmlformats.org/drawingml/2006/main" xmlns:r="http://schemas.openxmlformats.org/officeDocument/2006/relationships" xmlns:p="http://schemas.openxmlformats.org/presentationml/2006/main">
   <p:cSld name="Slide 3">
-    <p:bg>
-      <p:bgPr>
-        <a:solidFill>
-          <a:srgbClr val="FFFFFF"/>
-        </a:solidFill>
-      </p:bgPr>
-    </p:bg>
     <p:spTree>
       <p:nvGrpSpPr>
         <p:cNvPr id="1" name=""/>
@@ -6773,35 +8454,13 @@
           <a:chExt cx="0" cy="0"/>
         </a:xfrm>
       </p:grpSpPr>
-      <p:pic>
-        <p:nvPicPr>
-          <p:cNvPr id="2" name="Image 0" descr="logo-goetheanum-blue.png">    </p:cNvPr>
-          <p:cNvPicPr>
-            <a:picLocks noChangeAspect="1"/>
-          </p:cNvPicPr>
-          <p:nvPr/>
-        </p:nvPicPr>
-        <p:blipFill>
-          <a:blip r:embed="rId1"/>
-          <a:stretch>
-            <a:fillRect/>
-          </a:stretch>
-        </p:blipFill>
-        <p:spPr>
-          <a:xfrm>
-            <a:off x="548640" y="502920"/>
-            <a:ext cx="1088402" cy="182880"/>
-          </a:xfrm>
-          <a:prstGeom prst="rect">
-            <a:avLst/>
-          </a:prstGeom>
-        </p:spPr>
-      </p:pic>
-      <p:sp>
-        <p:nvSpPr>
-          <p:cNvPr id="3" name="Text 0"/>
-          <p:cNvSpPr/>
-          <p:nvPr/>
+      <p:sp>
+        <p:nvSpPr>
+          <p:cNvPr id="2" name="Text 1"/>
+          <p:cNvSpPr/>
+          <p:nvPr>
+            <p:ph idx="102" type="body" hasCustomPrompt="1"/>
+          </p:nvPr>
         </p:nvSpPr>
         <p:spPr>
           <a:xfrm>
@@ -6815,7 +8474,7 @@
           <a:ln/>
         </p:spPr>
         <p:txBody>
-          <a:bodyPr wrap="square" lIns="0" tIns="0" rIns="0" bIns="0" rtlCol="0" anchor="ctr"/>
+          <a:bodyPr wrap="square" lIns="0" tIns="0" rIns="0" bIns="0" rtlCol="0"/>
           <a:lstStyle/>
           <a:p>
             <a:pPr indent="0" marL="0">
@@ -6838,9 +8497,11 @@
       </p:sp>
       <p:sp>
         <p:nvSpPr>
-          <p:cNvPr id="4" name="Text 1"/>
-          <p:cNvSpPr/>
-          <p:nvPr/>
+          <p:cNvPr id="3" name="Text 1"/>
+          <p:cNvSpPr/>
+          <p:nvPr>
+            <p:ph idx="103" type="title" hasCustomPrompt="1"/>
+          </p:nvPr>
         </p:nvSpPr>
         <p:spPr>
           <a:xfrm>
@@ -6854,6 +8515,45 @@
           <a:ln/>
         </p:spPr>
         <p:txBody>
+          <a:bodyPr wrap="square" lIns="0" tIns="0" rIns="0" bIns="0" rtlCol="0"/>
+          <a:lstStyle/>
+          <a:p>
+            <a:pPr indent="0" marL="0">
+              <a:buNone/>
+            </a:pPr>
+            <a:r>
+              <a:rPr lang="en-US" sz="2600" dirty="0">
+                <a:solidFill>
+                  <a:srgbClr val="1A1A1A"/>
+                </a:solidFill>
+                <a:latin typeface="Goetheanum Schrift Deutlich" pitchFamily="34" charset="0"/>
+                <a:ea typeface="Goetheanum Schrift Deutlich" pitchFamily="34" charset="-122"/>
+                <a:cs typeface="Goetheanum Schrift Deutlich" pitchFamily="34" charset="-120"/>
+              </a:rPr>
+              <a:t>Piktogramme aus der Hausschrift</a:t>
+            </a:r>
+            <a:endParaRPr lang="en-US" sz="2600" dirty="0"/>
+          </a:p>
+        </p:txBody>
+      </p:sp>
+      <p:sp>
+        <p:nvSpPr>
+          <p:cNvPr id="4" name="Text 2"/>
+          <p:cNvSpPr/>
+          <p:nvPr/>
+        </p:nvSpPr>
+        <p:spPr>
+          <a:xfrm>
+            <a:off x="548640" y="2331720"/>
+            <a:ext cx="8229600" cy="457200"/>
+          </a:xfrm>
+          <a:prstGeom prst="rect">
+            <a:avLst/>
+          </a:prstGeom>
+          <a:noFill/>
+          <a:ln/>
+        </p:spPr>
+        <p:txBody>
           <a:bodyPr wrap="square" lIns="0" tIns="0" rIns="0" bIns="0" rtlCol="0" anchor="ctr"/>
           <a:lstStyle/>
           <a:p>
@@ -6861,30 +8561,175 @@
               <a:buNone/>
             </a:pPr>
             <a:r>
-              <a:rPr lang="en-US" sz="2600" dirty="0">
+              <a:rPr lang="en-US" sz="1800" dirty="0">
+                <a:solidFill>
+                  <a:srgbClr val="6B7480"/>
+                </a:solidFill>
+                <a:latin typeface="Goetheanum Schrift Leise" pitchFamily="34" charset="0"/>
+                <a:ea typeface="Goetheanum Schrift Leise" pitchFamily="34" charset="-122"/>
+                <a:cs typeface="Goetheanum Schrift Leise" pitchFamily="34" charset="-120"/>
+              </a:rPr>
+              <a:t>Schrift </a:t>
+            </a:r>
+            <a:pPr indent="0" marL="0">
+              <a:buNone/>
+            </a:pPr>
+            <a:r>
+              <a:rPr lang="en-US" sz="1800" dirty="0">
+                <a:solidFill>
+                  <a:srgbClr val="6B7480"/>
+                </a:solidFill>
+                <a:latin typeface="Goetheanum Schrift Laut" pitchFamily="34" charset="0"/>
+                <a:ea typeface="Goetheanum Schrift Laut" pitchFamily="34" charset="-122"/>
+                <a:cs typeface="Goetheanum Schrift Laut" pitchFamily="34" charset="-120"/>
+              </a:rPr>
+              <a:t>‹Goetheanum Icons›</a:t>
+            </a:r>
+            <a:pPr indent="0" marL="0">
+              <a:buNone/>
+            </a:pPr>
+            <a:r>
+              <a:rPr lang="en-US" sz="1800" dirty="0">
+                <a:solidFill>
+                  <a:srgbClr val="6B7480"/>
+                </a:solidFill>
+                <a:latin typeface="Goetheanum Schrift Leise" pitchFamily="34" charset="0"/>
+                <a:ea typeface="Goetheanum Schrift Leise" pitchFamily="34" charset="-122"/>
+                <a:cs typeface="Goetheanum Schrift Leise" pitchFamily="34" charset="-120"/>
+              </a:rPr>
+              <a:t> wählen, Buchstaben tippen.</a:t>
+            </a:r>
+            <a:endParaRPr lang="en-US" sz="1800" dirty="0"/>
+          </a:p>
+        </p:txBody>
+      </p:sp>
+      <p:sp>
+        <p:nvSpPr>
+          <p:cNvPr id="5" name="Text 3"/>
+          <p:cNvSpPr/>
+          <p:nvPr/>
+        </p:nvSpPr>
+        <p:spPr>
+          <a:xfrm>
+            <a:off x="548640" y="3108960"/>
+            <a:ext cx="1051560" cy="640080"/>
+          </a:xfrm>
+          <a:prstGeom prst="rect">
+            <a:avLst/>
+          </a:prstGeom>
+          <a:noFill/>
+          <a:ln/>
+        </p:spPr>
+        <p:txBody>
+          <a:bodyPr wrap="square" lIns="0" tIns="0" rIns="0" bIns="0" rtlCol="0" anchor="ctr"/>
+          <a:lstStyle/>
+          <a:p>
+            <a:pPr algn="ctr" indent="0" marL="0">
+              <a:buNone/>
+            </a:pPr>
+            <a:r>
+              <a:rPr lang="en-US" sz="3200" dirty="0">
                 <a:solidFill>
                   <a:srgbClr val="1A1A1A"/>
+                </a:solidFill>
+                <a:latin typeface="Goetheanum Icons" pitchFamily="34" charset="0"/>
+                <a:ea typeface="Goetheanum Icons" pitchFamily="34" charset="-122"/>
+                <a:cs typeface="Goetheanum Icons" pitchFamily="34" charset="-120"/>
+              </a:rPr>
+              <a:t>g</a:t>
+            </a:r>
+            <a:endParaRPr lang="en-US" sz="3200" dirty="0"/>
+          </a:p>
+        </p:txBody>
+      </p:sp>
+      <p:sp>
+        <p:nvSpPr>
+          <p:cNvPr id="6" name="Text 4"/>
+          <p:cNvSpPr/>
+          <p:nvPr/>
+        </p:nvSpPr>
+        <p:spPr>
+          <a:xfrm>
+            <a:off x="548640" y="3794760"/>
+            <a:ext cx="1051560" cy="228600"/>
+          </a:xfrm>
+          <a:prstGeom prst="rect">
+            <a:avLst/>
+          </a:prstGeom>
+          <a:noFill/>
+          <a:ln/>
+        </p:spPr>
+        <p:txBody>
+          <a:bodyPr wrap="square" lIns="0" tIns="0" rIns="0" bIns="0" rtlCol="0" anchor="ctr"/>
+          <a:lstStyle/>
+          <a:p>
+            <a:pPr algn="ctr" indent="0" marL="0">
+              <a:buNone/>
+            </a:pPr>
+            <a:r>
+              <a:rPr lang="en-US" sz="900" dirty="0">
+                <a:solidFill>
+                  <a:srgbClr val="005EB8"/>
+                </a:solidFill>
+                <a:latin typeface="Goetheanum Schrift Laut" pitchFamily="34" charset="0"/>
+                <a:ea typeface="Goetheanum Schrift Laut" pitchFamily="34" charset="-122"/>
+                <a:cs typeface="Goetheanum Schrift Laut" pitchFamily="34" charset="-120"/>
+              </a:rPr>
+              <a:t>g</a:t>
+            </a:r>
+            <a:endParaRPr lang="en-US" sz="900" dirty="0"/>
+          </a:p>
+        </p:txBody>
+      </p:sp>
+      <p:sp>
+        <p:nvSpPr>
+          <p:cNvPr id="7" name="Text 5"/>
+          <p:cNvSpPr/>
+          <p:nvPr/>
+        </p:nvSpPr>
+        <p:spPr>
+          <a:xfrm>
+            <a:off x="475488" y="4023360"/>
+            <a:ext cx="1197864" cy="228600"/>
+          </a:xfrm>
+          <a:prstGeom prst="rect">
+            <a:avLst/>
+          </a:prstGeom>
+          <a:noFill/>
+          <a:ln/>
+        </p:spPr>
+        <p:txBody>
+          <a:bodyPr wrap="square" lIns="0" tIns="0" rIns="0" bIns="0" rtlCol="0" anchor="ctr"/>
+          <a:lstStyle/>
+          <a:p>
+            <a:pPr algn="ctr" indent="0" marL="0">
+              <a:buNone/>
+            </a:pPr>
+            <a:r>
+              <a:rPr lang="en-US" sz="900" dirty="0">
+                <a:solidFill>
+                  <a:srgbClr val="6B7480"/>
                 </a:solidFill>
                 <a:latin typeface="Goetheanum Schrift Klar" pitchFamily="34" charset="0"/>
                 <a:ea typeface="Goetheanum Schrift Klar" pitchFamily="34" charset="-122"/>
                 <a:cs typeface="Goetheanum Schrift Klar" pitchFamily="34" charset="-120"/>
               </a:rPr>
-              <a:t>Piktogramme aus der Hausschrift</a:t>
-            </a:r>
-            <a:endParaRPr lang="en-US" sz="2600" dirty="0"/>
-          </a:p>
-        </p:txBody>
-      </p:sp>
-      <p:sp>
-        <p:nvSpPr>
-          <p:cNvPr id="5" name="Text 2"/>
+              <a:t>WLAN</a:t>
+            </a:r>
+            <a:endParaRPr lang="en-US" sz="900" dirty="0"/>
+          </a:p>
+        </p:txBody>
+      </p:sp>
+      <p:sp>
+        <p:nvSpPr>
+          <p:cNvPr id="8" name="Text 6"/>
           <p:cNvSpPr/>
           <p:nvPr/>
         </p:nvSpPr>
         <p:spPr>
           <a:xfrm>
-            <a:off x="548640" y="2331720"/>
-            <a:ext cx="8229600" cy="457200"/>
+            <a:off x="1755648" y="3108960"/>
+            <a:ext cx="1051560" cy="640080"/>
           </a:xfrm>
           <a:prstGeom prst="rect">
             <a:avLst/>
@@ -6896,61 +8741,111 @@
           <a:bodyPr wrap="square" lIns="0" tIns="0" rIns="0" bIns="0" rtlCol="0" anchor="ctr"/>
           <a:lstStyle/>
           <a:p>
-            <a:pPr indent="0" marL="0">
-              <a:buNone/>
-            </a:pPr>
-            <a:r>
-              <a:rPr lang="en-US" sz="1800" dirty="0">
-                <a:solidFill>
-                  <a:srgbClr val="6B7480"/>
-                </a:solidFill>
-                <a:latin typeface="Goetheanum Schrift Leise" pitchFamily="34" charset="0"/>
-                <a:ea typeface="Goetheanum Schrift Leise" pitchFamily="34" charset="-122"/>
-                <a:cs typeface="Goetheanum Schrift Leise" pitchFamily="34" charset="-120"/>
-              </a:rPr>
-              <a:t>Schrift </a:t>
-            </a:r>
-            <a:pPr indent="0" marL="0">
-              <a:buNone/>
-            </a:pPr>
-            <a:r>
-              <a:rPr lang="en-US" sz="1800" dirty="0">
-                <a:solidFill>
-                  <a:srgbClr val="6B7480"/>
+            <a:pPr algn="ctr" indent="0" marL="0">
+              <a:buNone/>
+            </a:pPr>
+            <a:r>
+              <a:rPr lang="en-US" sz="3200" dirty="0">
+                <a:solidFill>
+                  <a:srgbClr val="1A1A1A"/>
+                </a:solidFill>
+                <a:latin typeface="Goetheanum Icons" pitchFamily="34" charset="0"/>
+                <a:ea typeface="Goetheanum Icons" pitchFamily="34" charset="-122"/>
+                <a:cs typeface="Goetheanum Icons" pitchFamily="34" charset="-120"/>
+              </a:rPr>
+              <a:t>a</a:t>
+            </a:r>
+            <a:endParaRPr lang="en-US" sz="3200" dirty="0"/>
+          </a:p>
+        </p:txBody>
+      </p:sp>
+      <p:sp>
+        <p:nvSpPr>
+          <p:cNvPr id="9" name="Text 7"/>
+          <p:cNvSpPr/>
+          <p:nvPr/>
+        </p:nvSpPr>
+        <p:spPr>
+          <a:xfrm>
+            <a:off x="1755648" y="3794760"/>
+            <a:ext cx="1051560" cy="228600"/>
+          </a:xfrm>
+          <a:prstGeom prst="rect">
+            <a:avLst/>
+          </a:prstGeom>
+          <a:noFill/>
+          <a:ln/>
+        </p:spPr>
+        <p:txBody>
+          <a:bodyPr wrap="square" lIns="0" tIns="0" rIns="0" bIns="0" rtlCol="0" anchor="ctr"/>
+          <a:lstStyle/>
+          <a:p>
+            <a:pPr algn="ctr" indent="0" marL="0">
+              <a:buNone/>
+            </a:pPr>
+            <a:r>
+              <a:rPr lang="en-US" sz="900" dirty="0">
+                <a:solidFill>
+                  <a:srgbClr val="005EB8"/>
                 </a:solidFill>
                 <a:latin typeface="Goetheanum Schrift Laut" pitchFamily="34" charset="0"/>
                 <a:ea typeface="Goetheanum Schrift Laut" pitchFamily="34" charset="-122"/>
                 <a:cs typeface="Goetheanum Schrift Laut" pitchFamily="34" charset="-120"/>
               </a:rPr>
-              <a:t>‹Goetheanum Icons›</a:t>
-            </a:r>
-            <a:pPr indent="0" marL="0">
-              <a:buNone/>
-            </a:pPr>
-            <a:r>
-              <a:rPr lang="en-US" sz="1800" dirty="0">
+              <a:t>a</a:t>
+            </a:r>
+            <a:endParaRPr lang="en-US" sz="900" dirty="0"/>
+          </a:p>
+        </p:txBody>
+      </p:sp>
+      <p:sp>
+        <p:nvSpPr>
+          <p:cNvPr id="10" name="Text 8"/>
+          <p:cNvSpPr/>
+          <p:nvPr/>
+        </p:nvSpPr>
+        <p:spPr>
+          <a:xfrm>
+            <a:off x="1682496" y="4023360"/>
+            <a:ext cx="1197864" cy="228600"/>
+          </a:xfrm>
+          <a:prstGeom prst="rect">
+            <a:avLst/>
+          </a:prstGeom>
+          <a:noFill/>
+          <a:ln/>
+        </p:spPr>
+        <p:txBody>
+          <a:bodyPr wrap="square" lIns="0" tIns="0" rIns="0" bIns="0" rtlCol="0" anchor="ctr"/>
+          <a:lstStyle/>
+          <a:p>
+            <a:pPr algn="ctr" indent="0" marL="0">
+              <a:buNone/>
+            </a:pPr>
+            <a:r>
+              <a:rPr lang="en-US" sz="900" dirty="0">
                 <a:solidFill>
                   <a:srgbClr val="6B7480"/>
                 </a:solidFill>
-                <a:latin typeface="Goetheanum Schrift Leise" pitchFamily="34" charset="0"/>
-                <a:ea typeface="Goetheanum Schrift Leise" pitchFamily="34" charset="-122"/>
-                <a:cs typeface="Goetheanum Schrift Leise" pitchFamily="34" charset="-120"/>
-              </a:rPr>
-              <a:t> wählen, Buchstaben tippen.</a:t>
-            </a:r>
-            <a:endParaRPr lang="en-US" sz="1800" dirty="0"/>
-          </a:p>
-        </p:txBody>
-      </p:sp>
-      <p:sp>
-        <p:nvSpPr>
-          <p:cNvPr id="6" name="Text 3"/>
+                <a:latin typeface="Goetheanum Schrift Klar" pitchFamily="34" charset="0"/>
+                <a:ea typeface="Goetheanum Schrift Klar" pitchFamily="34" charset="-122"/>
+                <a:cs typeface="Goetheanum Schrift Klar" pitchFamily="34" charset="-120"/>
+              </a:rPr>
+              <a:t>Lift</a:t>
+            </a:r>
+            <a:endParaRPr lang="en-US" sz="900" dirty="0"/>
+          </a:p>
+        </p:txBody>
+      </p:sp>
+      <p:sp>
+        <p:nvSpPr>
+          <p:cNvPr id="11" name="Text 9"/>
           <p:cNvSpPr/>
           <p:nvPr/>
         </p:nvSpPr>
         <p:spPr>
           <a:xfrm>
-            <a:off x="548640" y="3154680"/>
+            <a:off x="2962656" y="3108960"/>
             <a:ext cx="1051560" cy="640080"/>
           </a:xfrm>
           <a:prstGeom prst="rect">
@@ -6975,7 +8870,7 @@
                 <a:ea typeface="Goetheanum Icons" pitchFamily="34" charset="-122"/>
                 <a:cs typeface="Goetheanum Icons" pitchFamily="34" charset="-120"/>
               </a:rPr>
-              <a:t>g</a:t>
+              <a:t>s</a:t>
             </a:r>
             <a:endParaRPr lang="en-US" sz="3200" dirty="0"/>
           </a:p>
@@ -6983,13 +8878,13 @@
       </p:sp>
       <p:sp>
         <p:nvSpPr>
-          <p:cNvPr id="7" name="Text 4"/>
+          <p:cNvPr id="12" name="Text 10"/>
           <p:cNvSpPr/>
           <p:nvPr/>
         </p:nvSpPr>
         <p:spPr>
           <a:xfrm>
-            <a:off x="548640" y="3840480"/>
+            <a:off x="2962656" y="3794760"/>
             <a:ext cx="1051560" cy="228600"/>
           </a:xfrm>
           <a:prstGeom prst="rect">
@@ -7014,7 +8909,7 @@
                 <a:ea typeface="Goetheanum Schrift Laut" pitchFamily="34" charset="-122"/>
                 <a:cs typeface="Goetheanum Schrift Laut" pitchFamily="34" charset="-120"/>
               </a:rPr>
-              <a:t>g</a:t>
+              <a:t>s</a:t>
             </a:r>
             <a:endParaRPr lang="en-US" sz="900" dirty="0"/>
           </a:p>
@@ -7022,13 +8917,13 @@
       </p:sp>
       <p:sp>
         <p:nvSpPr>
-          <p:cNvPr id="8" name="Text 5"/>
+          <p:cNvPr id="13" name="Text 11"/>
           <p:cNvSpPr/>
           <p:nvPr/>
         </p:nvSpPr>
         <p:spPr>
           <a:xfrm>
-            <a:off x="475488" y="4069080"/>
+            <a:off x="2889504" y="4023360"/>
             <a:ext cx="1197864" cy="228600"/>
           </a:xfrm>
           <a:prstGeom prst="rect">
@@ -7053,7 +8948,7 @@
                 <a:ea typeface="Goetheanum Schrift Klar" pitchFamily="34" charset="-122"/>
                 <a:cs typeface="Goetheanum Schrift Klar" pitchFamily="34" charset="-120"/>
               </a:rPr>
-              <a:t>WLAN</a:t>
+              <a:t>Treppe</a:t>
             </a:r>
             <a:endParaRPr lang="en-US" sz="900" dirty="0"/>
           </a:p>
@@ -7061,13 +8956,13 @@
       </p:sp>
       <p:sp>
         <p:nvSpPr>
-          <p:cNvPr id="9" name="Text 6"/>
+          <p:cNvPr id="14" name="Text 12"/>
           <p:cNvSpPr/>
           <p:nvPr/>
         </p:nvSpPr>
         <p:spPr>
           <a:xfrm>
-            <a:off x="1755648" y="3154680"/>
+            <a:off x="4169664" y="3108960"/>
             <a:ext cx="1051560" cy="640080"/>
           </a:xfrm>
           <a:prstGeom prst="rect">
@@ -7092,7 +8987,7 @@
                 <a:ea typeface="Goetheanum Icons" pitchFamily="34" charset="-122"/>
                 <a:cs typeface="Goetheanum Icons" pitchFamily="34" charset="-120"/>
               </a:rPr>
-              <a:t>a</a:t>
+              <a:t>x</a:t>
             </a:r>
             <a:endParaRPr lang="en-US" sz="3200" dirty="0"/>
           </a:p>
@@ -7100,13 +8995,13 @@
       </p:sp>
       <p:sp>
         <p:nvSpPr>
-          <p:cNvPr id="10" name="Text 7"/>
+          <p:cNvPr id="15" name="Text 13"/>
           <p:cNvSpPr/>
           <p:nvPr/>
         </p:nvSpPr>
         <p:spPr>
           <a:xfrm>
-            <a:off x="1755648" y="3840480"/>
+            <a:off x="4169664" y="3794760"/>
             <a:ext cx="1051560" cy="228600"/>
           </a:xfrm>
           <a:prstGeom prst="rect">
@@ -7131,7 +9026,7 @@
                 <a:ea typeface="Goetheanum Schrift Laut" pitchFamily="34" charset="-122"/>
                 <a:cs typeface="Goetheanum Schrift Laut" pitchFamily="34" charset="-120"/>
               </a:rPr>
-              <a:t>a</a:t>
+              <a:t>x</a:t>
             </a:r>
             <a:endParaRPr lang="en-US" sz="900" dirty="0"/>
           </a:p>
@@ -7139,13 +9034,13 @@
       </p:sp>
       <p:sp>
         <p:nvSpPr>
-          <p:cNvPr id="11" name="Text 8"/>
+          <p:cNvPr id="16" name="Text 14"/>
           <p:cNvSpPr/>
           <p:nvPr/>
         </p:nvSpPr>
         <p:spPr>
           <a:xfrm>
-            <a:off x="1682496" y="4069080"/>
+            <a:off x="4096512" y="4023360"/>
             <a:ext cx="1197864" cy="228600"/>
           </a:xfrm>
           <a:prstGeom prst="rect">
@@ -7170,7 +9065,7 @@
                 <a:ea typeface="Goetheanum Schrift Klar" pitchFamily="34" charset="-122"/>
                 <a:cs typeface="Goetheanum Schrift Klar" pitchFamily="34" charset="-120"/>
               </a:rPr>
-              <a:t>Lift</a:t>
+              <a:t>WC Rollstuhl</a:t>
             </a:r>
             <a:endParaRPr lang="en-US" sz="900" dirty="0"/>
           </a:p>
@@ -7178,13 +9073,13 @@
       </p:sp>
       <p:sp>
         <p:nvSpPr>
-          <p:cNvPr id="12" name="Text 9"/>
+          <p:cNvPr id="17" name="Text 15"/>
           <p:cNvSpPr/>
           <p:nvPr/>
         </p:nvSpPr>
         <p:spPr>
           <a:xfrm>
-            <a:off x="2962656" y="3154680"/>
+            <a:off x="5376672" y="3108960"/>
             <a:ext cx="1051560" cy="640080"/>
           </a:xfrm>
           <a:prstGeom prst="rect">
@@ -7209,7 +9104,7 @@
                 <a:ea typeface="Goetheanum Icons" pitchFamily="34" charset="-122"/>
                 <a:cs typeface="Goetheanum Icons" pitchFamily="34" charset="-120"/>
               </a:rPr>
-              <a:t>s</a:t>
+              <a:t>e</a:t>
             </a:r>
             <a:endParaRPr lang="en-US" sz="3200" dirty="0"/>
           </a:p>
@@ -7217,13 +9112,13 @@
       </p:sp>
       <p:sp>
         <p:nvSpPr>
-          <p:cNvPr id="13" name="Text 10"/>
+          <p:cNvPr id="18" name="Text 16"/>
           <p:cNvSpPr/>
           <p:nvPr/>
         </p:nvSpPr>
         <p:spPr>
           <a:xfrm>
-            <a:off x="2962656" y="3840480"/>
+            <a:off x="5376672" y="3794760"/>
             <a:ext cx="1051560" cy="228600"/>
           </a:xfrm>
           <a:prstGeom prst="rect">
@@ -7248,7 +9143,7 @@
                 <a:ea typeface="Goetheanum Schrift Laut" pitchFamily="34" charset="-122"/>
                 <a:cs typeface="Goetheanum Schrift Laut" pitchFamily="34" charset="-120"/>
               </a:rPr>
-              <a:t>s</a:t>
+              <a:t>e</a:t>
             </a:r>
             <a:endParaRPr lang="en-US" sz="900" dirty="0"/>
           </a:p>
@@ -7256,13 +9151,13 @@
       </p:sp>
       <p:sp>
         <p:nvSpPr>
-          <p:cNvPr id="14" name="Text 11"/>
+          <p:cNvPr id="19" name="Text 17"/>
           <p:cNvSpPr/>
           <p:nvPr/>
         </p:nvSpPr>
         <p:spPr>
           <a:xfrm>
-            <a:off x="2889504" y="4069080"/>
+            <a:off x="5303520" y="4023360"/>
             <a:ext cx="1197864" cy="228600"/>
           </a:xfrm>
           <a:prstGeom prst="rect">
@@ -7287,7 +9182,7 @@
                 <a:ea typeface="Goetheanum Schrift Klar" pitchFamily="34" charset="-122"/>
                 <a:cs typeface="Goetheanum Schrift Klar" pitchFamily="34" charset="-120"/>
               </a:rPr>
-              <a:t>Treppe</a:t>
+              <a:t>Eintritt</a:t>
             </a:r>
             <a:endParaRPr lang="en-US" sz="900" dirty="0"/>
           </a:p>
@@ -7295,13 +9190,13 @@
       </p:sp>
       <p:sp>
         <p:nvSpPr>
-          <p:cNvPr id="15" name="Text 12"/>
+          <p:cNvPr id="20" name="Text 18"/>
           <p:cNvSpPr/>
           <p:nvPr/>
         </p:nvSpPr>
         <p:spPr>
           <a:xfrm>
-            <a:off x="4169664" y="3154680"/>
+            <a:off x="6583680" y="3108960"/>
             <a:ext cx="1051560" cy="640080"/>
           </a:xfrm>
           <a:prstGeom prst="rect">
@@ -7326,7 +9221,7 @@
                 <a:ea typeface="Goetheanum Icons" pitchFamily="34" charset="-122"/>
                 <a:cs typeface="Goetheanum Icons" pitchFamily="34" charset="-120"/>
               </a:rPr>
-              <a:t>x</a:t>
+              <a:t>v</a:t>
             </a:r>
             <a:endParaRPr lang="en-US" sz="3200" dirty="0"/>
           </a:p>
@@ -7334,13 +9229,13 @@
       </p:sp>
       <p:sp>
         <p:nvSpPr>
-          <p:cNvPr id="16" name="Text 13"/>
+          <p:cNvPr id="21" name="Text 19"/>
           <p:cNvSpPr/>
           <p:nvPr/>
         </p:nvSpPr>
         <p:spPr>
           <a:xfrm>
-            <a:off x="4169664" y="3840480"/>
+            <a:off x="6583680" y="3794760"/>
             <a:ext cx="1051560" cy="228600"/>
           </a:xfrm>
           <a:prstGeom prst="rect">
@@ -7365,7 +9260,7 @@
                 <a:ea typeface="Goetheanum Schrift Laut" pitchFamily="34" charset="-122"/>
                 <a:cs typeface="Goetheanum Schrift Laut" pitchFamily="34" charset="-120"/>
               </a:rPr>
-              <a:t>x</a:t>
+              <a:t>v</a:t>
             </a:r>
             <a:endParaRPr lang="en-US" sz="900" dirty="0"/>
           </a:p>
@@ -7373,13 +9268,13 @@
       </p:sp>
       <p:sp>
         <p:nvSpPr>
-          <p:cNvPr id="17" name="Text 14"/>
+          <p:cNvPr id="22" name="Text 20"/>
           <p:cNvSpPr/>
           <p:nvPr/>
         </p:nvSpPr>
         <p:spPr>
           <a:xfrm>
-            <a:off x="4096512" y="4069080"/>
+            <a:off x="6510528" y="4023360"/>
             <a:ext cx="1197864" cy="228600"/>
           </a:xfrm>
           <a:prstGeom prst="rect">
@@ -7404,7 +9299,7 @@
                 <a:ea typeface="Goetheanum Schrift Klar" pitchFamily="34" charset="-122"/>
                 <a:cs typeface="Goetheanum Schrift Klar" pitchFamily="34" charset="-120"/>
               </a:rPr>
-              <a:t>Barrierefrei</a:t>
+              <a:t>WC Gruppe</a:t>
             </a:r>
             <a:endParaRPr lang="en-US" sz="900" dirty="0"/>
           </a:p>
@@ -7412,13 +9307,13 @@
       </p:sp>
       <p:sp>
         <p:nvSpPr>
-          <p:cNvPr id="18" name="Text 15"/>
+          <p:cNvPr id="23" name="Text 21"/>
           <p:cNvSpPr/>
           <p:nvPr/>
         </p:nvSpPr>
         <p:spPr>
           <a:xfrm>
-            <a:off x="5376672" y="3154680"/>
+            <a:off x="7790688" y="3108960"/>
             <a:ext cx="1051560" cy="640080"/>
           </a:xfrm>
           <a:prstGeom prst="rect">
@@ -7443,7 +9338,7 @@
                 <a:ea typeface="Goetheanum Icons" pitchFamily="34" charset="-122"/>
                 <a:cs typeface="Goetheanum Icons" pitchFamily="34" charset="-120"/>
               </a:rPr>
-              <a:t>e</a:t>
+              <a:t>k</a:t>
             </a:r>
             <a:endParaRPr lang="en-US" sz="3200" dirty="0"/>
           </a:p>
@@ -7451,13 +9346,13 @@
       </p:sp>
       <p:sp>
         <p:nvSpPr>
-          <p:cNvPr id="19" name="Text 16"/>
+          <p:cNvPr id="24" name="Text 22"/>
           <p:cNvSpPr/>
           <p:nvPr/>
         </p:nvSpPr>
         <p:spPr>
           <a:xfrm>
-            <a:off x="5376672" y="3840480"/>
+            <a:off x="7790688" y="3794760"/>
             <a:ext cx="1051560" cy="228600"/>
           </a:xfrm>
           <a:prstGeom prst="rect">
@@ -7482,7 +9377,7 @@
                 <a:ea typeface="Goetheanum Schrift Laut" pitchFamily="34" charset="-122"/>
                 <a:cs typeface="Goetheanum Schrift Laut" pitchFamily="34" charset="-120"/>
               </a:rPr>
-              <a:t>e</a:t>
+              <a:t>k</a:t>
             </a:r>
             <a:endParaRPr lang="en-US" sz="900" dirty="0"/>
           </a:p>
@@ -7490,13 +9385,13 @@
       </p:sp>
       <p:sp>
         <p:nvSpPr>
-          <p:cNvPr id="20" name="Text 17"/>
+          <p:cNvPr id="25" name="Text 23"/>
           <p:cNvSpPr/>
           <p:nvPr/>
         </p:nvSpPr>
         <p:spPr>
           <a:xfrm>
-            <a:off x="5303520" y="4069080"/>
+            <a:off x="7717536" y="4023360"/>
             <a:ext cx="1197864" cy="228600"/>
           </a:xfrm>
           <a:prstGeom prst="rect">
@@ -7521,7 +9416,7 @@
                 <a:ea typeface="Goetheanum Schrift Klar" pitchFamily="34" charset="-122"/>
                 <a:cs typeface="Goetheanum Schrift Klar" pitchFamily="34" charset="-120"/>
               </a:rPr>
-              <a:t>Eintritt</a:t>
+              <a:t>Restmüll</a:t>
             </a:r>
             <a:endParaRPr lang="en-US" sz="900" dirty="0"/>
           </a:p>
@@ -7529,13 +9424,13 @@
       </p:sp>
       <p:sp>
         <p:nvSpPr>
-          <p:cNvPr id="21" name="Text 18"/>
+          <p:cNvPr id="26" name="Text 24"/>
           <p:cNvSpPr/>
           <p:nvPr/>
         </p:nvSpPr>
         <p:spPr>
           <a:xfrm>
-            <a:off x="6583680" y="3154680"/>
+            <a:off x="8997696" y="3108960"/>
             <a:ext cx="1051560" cy="640080"/>
           </a:xfrm>
           <a:prstGeom prst="rect">
@@ -7560,7 +9455,7 @@
                 <a:ea typeface="Goetheanum Icons" pitchFamily="34" charset="-122"/>
                 <a:cs typeface="Goetheanum Icons" pitchFamily="34" charset="-120"/>
               </a:rPr>
-              <a:t>v</a:t>
+              <a:t>h</a:t>
             </a:r>
             <a:endParaRPr lang="en-US" sz="3200" dirty="0"/>
           </a:p>
@@ -7568,13 +9463,13 @@
       </p:sp>
       <p:sp>
         <p:nvSpPr>
-          <p:cNvPr id="22" name="Text 19"/>
+          <p:cNvPr id="27" name="Text 25"/>
           <p:cNvSpPr/>
           <p:nvPr/>
         </p:nvSpPr>
         <p:spPr>
           <a:xfrm>
-            <a:off x="6583680" y="3840480"/>
+            <a:off x="8997696" y="3794760"/>
             <a:ext cx="1051560" cy="228600"/>
           </a:xfrm>
           <a:prstGeom prst="rect">
@@ -7599,7 +9494,7 @@
                 <a:ea typeface="Goetheanum Schrift Laut" pitchFamily="34" charset="-122"/>
                 <a:cs typeface="Goetheanum Schrift Laut" pitchFamily="34" charset="-120"/>
               </a:rPr>
-              <a:t>v</a:t>
+              <a:t>h</a:t>
             </a:r>
             <a:endParaRPr lang="en-US" sz="900" dirty="0"/>
           </a:p>
@@ -7607,13 +9502,13 @@
       </p:sp>
       <p:sp>
         <p:nvSpPr>
-          <p:cNvPr id="23" name="Text 20"/>
+          <p:cNvPr id="28" name="Text 26"/>
           <p:cNvSpPr/>
           <p:nvPr/>
         </p:nvSpPr>
         <p:spPr>
           <a:xfrm>
-            <a:off x="6510528" y="4069080"/>
+            <a:off x="8924544" y="4023360"/>
             <a:ext cx="1197864" cy="228600"/>
           </a:xfrm>
           <a:prstGeom prst="rect">
@@ -7638,7 +9533,7 @@
                 <a:ea typeface="Goetheanum Schrift Klar" pitchFamily="34" charset="-122"/>
                 <a:cs typeface="Goetheanum Schrift Klar" pitchFamily="34" charset="-120"/>
               </a:rPr>
-              <a:t>WC</a:t>
+              <a:t>Bioabfall</a:t>
             </a:r>
             <a:endParaRPr lang="en-US" sz="900" dirty="0"/>
           </a:p>
@@ -7646,13 +9541,13 @@
       </p:sp>
       <p:sp>
         <p:nvSpPr>
-          <p:cNvPr id="24" name="Text 21"/>
+          <p:cNvPr id="29" name="Text 27"/>
           <p:cNvSpPr/>
           <p:nvPr/>
         </p:nvSpPr>
         <p:spPr>
           <a:xfrm>
-            <a:off x="7790688" y="3154680"/>
+            <a:off x="548640" y="4663440"/>
             <a:ext cx="1051560" cy="640080"/>
           </a:xfrm>
           <a:prstGeom prst="rect">
@@ -7677,7 +9572,7 @@
                 <a:ea typeface="Goetheanum Icons" pitchFamily="34" charset="-122"/>
                 <a:cs typeface="Goetheanum Icons" pitchFamily="34" charset="-120"/>
               </a:rPr>
-              <a:t>k</a:t>
+              <a:t>w</a:t>
             </a:r>
             <a:endParaRPr lang="en-US" sz="3200" dirty="0"/>
           </a:p>
@@ -7685,13 +9580,13 @@
       </p:sp>
       <p:sp>
         <p:nvSpPr>
-          <p:cNvPr id="25" name="Text 22"/>
+          <p:cNvPr id="30" name="Text 28"/>
           <p:cNvSpPr/>
           <p:nvPr/>
         </p:nvSpPr>
         <p:spPr>
           <a:xfrm>
-            <a:off x="7790688" y="3840480"/>
+            <a:off x="548640" y="5349240"/>
             <a:ext cx="1051560" cy="228600"/>
           </a:xfrm>
           <a:prstGeom prst="rect">
@@ -7716,7 +9611,7 @@
                 <a:ea typeface="Goetheanum Schrift Laut" pitchFamily="34" charset="-122"/>
                 <a:cs typeface="Goetheanum Schrift Laut" pitchFamily="34" charset="-120"/>
               </a:rPr>
-              <a:t>k</a:t>
+              <a:t>w</a:t>
             </a:r>
             <a:endParaRPr lang="en-US" sz="900" dirty="0"/>
           </a:p>
@@ -7724,13 +9619,13 @@
       </p:sp>
       <p:sp>
         <p:nvSpPr>
-          <p:cNvPr id="26" name="Text 23"/>
+          <p:cNvPr id="31" name="Text 29"/>
           <p:cNvSpPr/>
           <p:nvPr/>
         </p:nvSpPr>
         <p:spPr>
           <a:xfrm>
-            <a:off x="7717536" y="4069080"/>
+            <a:off x="475488" y="5577840"/>
             <a:ext cx="1197864" cy="228600"/>
           </a:xfrm>
           <a:prstGeom prst="rect">
@@ -7755,7 +9650,7 @@
                 <a:ea typeface="Goetheanum Schrift Klar" pitchFamily="34" charset="-122"/>
                 <a:cs typeface="Goetheanum Schrift Klar" pitchFamily="34" charset="-120"/>
               </a:rPr>
-              <a:t>Abfall</a:t>
+              <a:t>Nur mit Augen</a:t>
             </a:r>
             <a:endParaRPr lang="en-US" sz="900" dirty="0"/>
           </a:p>
@@ -7763,13 +9658,13 @@
       </p:sp>
       <p:sp>
         <p:nvSpPr>
-          <p:cNvPr id="27" name="Text 24"/>
+          <p:cNvPr id="32" name="Text 30"/>
           <p:cNvSpPr/>
           <p:nvPr/>
         </p:nvSpPr>
         <p:spPr>
           <a:xfrm>
-            <a:off x="8997696" y="3154680"/>
+            <a:off x="1755648" y="4663440"/>
             <a:ext cx="1051560" cy="640080"/>
           </a:xfrm>
           <a:prstGeom prst="rect">
@@ -7794,7 +9689,7 @@
                 <a:ea typeface="Goetheanum Icons" pitchFamily="34" charset="-122"/>
                 <a:cs typeface="Goetheanum Icons" pitchFamily="34" charset="-120"/>
               </a:rPr>
-              <a:t>h</a:t>
+              <a:t>q</a:t>
             </a:r>
             <a:endParaRPr lang="en-US" sz="3200" dirty="0"/>
           </a:p>
@@ -7802,13 +9697,13 @@
       </p:sp>
       <p:sp>
         <p:nvSpPr>
-          <p:cNvPr id="28" name="Text 25"/>
+          <p:cNvPr id="33" name="Text 31"/>
           <p:cNvSpPr/>
           <p:nvPr/>
         </p:nvSpPr>
         <p:spPr>
           <a:xfrm>
-            <a:off x="8997696" y="3840480"/>
+            <a:off x="1755648" y="5349240"/>
             <a:ext cx="1051560" cy="228600"/>
           </a:xfrm>
           <a:prstGeom prst="rect">
@@ -7833,7 +9728,7 @@
                 <a:ea typeface="Goetheanum Schrift Laut" pitchFamily="34" charset="-122"/>
                 <a:cs typeface="Goetheanum Schrift Laut" pitchFamily="34" charset="-120"/>
               </a:rPr>
-              <a:t>h</a:t>
+              <a:t>q</a:t>
             </a:r>
             <a:endParaRPr lang="en-US" sz="900" dirty="0"/>
           </a:p>
@@ -7841,13 +9736,13 @@
       </p:sp>
       <p:sp>
         <p:nvSpPr>
-          <p:cNvPr id="29" name="Text 26"/>
+          <p:cNvPr id="34" name="Text 32"/>
           <p:cNvSpPr/>
           <p:nvPr/>
         </p:nvSpPr>
         <p:spPr>
           <a:xfrm>
-            <a:off x="8924544" y="4069080"/>
+            <a:off x="1682496" y="5577840"/>
             <a:ext cx="1197864" cy="228600"/>
           </a:xfrm>
           <a:prstGeom prst="rect">
@@ -7872,7 +9767,7 @@
                 <a:ea typeface="Goetheanum Schrift Klar" pitchFamily="34" charset="-122"/>
                 <a:cs typeface="Goetheanum Schrift Klar" pitchFamily="34" charset="-120"/>
               </a:rPr>
-              <a:t>Bio</a:t>
+              <a:t>Bitte anfassen</a:t>
             </a:r>
             <a:endParaRPr lang="en-US" sz="900" dirty="0"/>
           </a:p>
@@ -7880,13 +9775,13 @@
       </p:sp>
       <p:sp>
         <p:nvSpPr>
-          <p:cNvPr id="30" name="Text 27"/>
+          <p:cNvPr id="35" name="Text 33"/>
           <p:cNvSpPr/>
           <p:nvPr/>
         </p:nvSpPr>
         <p:spPr>
           <a:xfrm>
-            <a:off x="548640" y="4754880"/>
+            <a:off x="2962656" y="4663440"/>
             <a:ext cx="1051560" cy="640080"/>
           </a:xfrm>
           <a:prstGeom prst="rect">
@@ -7911,7 +9806,7 @@
                 <a:ea typeface="Goetheanum Icons" pitchFamily="34" charset="-122"/>
                 <a:cs typeface="Goetheanum Icons" pitchFamily="34" charset="-120"/>
               </a:rPr>
-              <a:t>w</a:t>
+              <a:t>y</a:t>
             </a:r>
             <a:endParaRPr lang="en-US" sz="3200" dirty="0"/>
           </a:p>
@@ -7919,13 +9814,13 @@
       </p:sp>
       <p:sp>
         <p:nvSpPr>
-          <p:cNvPr id="31" name="Text 28"/>
+          <p:cNvPr id="36" name="Text 34"/>
           <p:cNvSpPr/>
           <p:nvPr/>
         </p:nvSpPr>
         <p:spPr>
           <a:xfrm>
-            <a:off x="548640" y="5440680"/>
+            <a:off x="2962656" y="5349240"/>
             <a:ext cx="1051560" cy="228600"/>
           </a:xfrm>
           <a:prstGeom prst="rect">
@@ -7950,7 +9845,7 @@
                 <a:ea typeface="Goetheanum Schrift Laut" pitchFamily="34" charset="-122"/>
                 <a:cs typeface="Goetheanum Schrift Laut" pitchFamily="34" charset="-120"/>
               </a:rPr>
-              <a:t>w</a:t>
+              <a:t>y</a:t>
             </a:r>
             <a:endParaRPr lang="en-US" sz="900" dirty="0"/>
           </a:p>
@@ -7958,13 +9853,13 @@
       </p:sp>
       <p:sp>
         <p:nvSpPr>
-          <p:cNvPr id="32" name="Text 29"/>
+          <p:cNvPr id="37" name="Text 35"/>
           <p:cNvSpPr/>
           <p:nvPr/>
         </p:nvSpPr>
         <p:spPr>
           <a:xfrm>
-            <a:off x="475488" y="5669280"/>
+            <a:off x="2889504" y="5577840"/>
             <a:ext cx="1197864" cy="228600"/>
           </a:xfrm>
           <a:prstGeom prst="rect">
@@ -7989,7 +9884,7 @@
                 <a:ea typeface="Goetheanum Schrift Klar" pitchFamily="34" charset="-122"/>
                 <a:cs typeface="Goetheanum Schrift Klar" pitchFamily="34" charset="-120"/>
               </a:rPr>
-              <a:t>Auge</a:t>
+              <a:t>WC Damen</a:t>
             </a:r>
             <a:endParaRPr lang="en-US" sz="900" dirty="0"/>
           </a:p>
@@ -7997,13 +9892,13 @@
       </p:sp>
       <p:sp>
         <p:nvSpPr>
-          <p:cNvPr id="33" name="Text 30"/>
+          <p:cNvPr id="38" name="Text 36"/>
           <p:cNvSpPr/>
           <p:nvPr/>
         </p:nvSpPr>
         <p:spPr>
           <a:xfrm>
-            <a:off x="1755648" y="4754880"/>
+            <a:off x="4169664" y="4663440"/>
             <a:ext cx="1051560" cy="640080"/>
           </a:xfrm>
           <a:prstGeom prst="rect">
@@ -8028,7 +9923,7 @@
                 <a:ea typeface="Goetheanum Icons" pitchFamily="34" charset="-122"/>
                 <a:cs typeface="Goetheanum Icons" pitchFamily="34" charset="-120"/>
               </a:rPr>
-              <a:t>q</a:t>
+              <a:t>r</a:t>
             </a:r>
             <a:endParaRPr lang="en-US" sz="3200" dirty="0"/>
           </a:p>
@@ -8036,13 +9931,13 @@
       </p:sp>
       <p:sp>
         <p:nvSpPr>
-          <p:cNvPr id="34" name="Text 31"/>
+          <p:cNvPr id="39" name="Text 37"/>
           <p:cNvSpPr/>
           <p:nvPr/>
         </p:nvSpPr>
         <p:spPr>
           <a:xfrm>
-            <a:off x="1755648" y="5440680"/>
+            <a:off x="4169664" y="5349240"/>
             <a:ext cx="1051560" cy="228600"/>
           </a:xfrm>
           <a:prstGeom prst="rect">
@@ -8067,7 +9962,7 @@
                 <a:ea typeface="Goetheanum Schrift Laut" pitchFamily="34" charset="-122"/>
                 <a:cs typeface="Goetheanum Schrift Laut" pitchFamily="34" charset="-120"/>
               </a:rPr>
-              <a:t>q</a:t>
+              <a:t>r</a:t>
             </a:r>
             <a:endParaRPr lang="en-US" sz="900" dirty="0"/>
           </a:p>
@@ -8075,13 +9970,13 @@
       </p:sp>
       <p:sp>
         <p:nvSpPr>
-          <p:cNvPr id="35" name="Text 32"/>
+          <p:cNvPr id="40" name="Text 38"/>
           <p:cNvSpPr/>
           <p:nvPr/>
         </p:nvSpPr>
         <p:spPr>
           <a:xfrm>
-            <a:off x="1682496" y="5669280"/>
+            <a:off x="4096512" y="5577840"/>
             <a:ext cx="1197864" cy="228600"/>
           </a:xfrm>
           <a:prstGeom prst="rect">
@@ -8106,7 +10001,7 @@
                 <a:ea typeface="Goetheanum Schrift Klar" pitchFamily="34" charset="-122"/>
                 <a:cs typeface="Goetheanum Schrift Klar" pitchFamily="34" charset="-120"/>
               </a:rPr>
-              <a:t>Hand</a:t>
+              <a:t>Hunde anleinen</a:t>
             </a:r>
             <a:endParaRPr lang="en-US" sz="900" dirty="0"/>
           </a:p>
@@ -8114,13 +10009,13 @@
       </p:sp>
       <p:sp>
         <p:nvSpPr>
-          <p:cNvPr id="36" name="Text 33"/>
+          <p:cNvPr id="41" name="Text 39"/>
           <p:cNvSpPr/>
           <p:nvPr/>
         </p:nvSpPr>
         <p:spPr>
           <a:xfrm>
-            <a:off x="2962656" y="4754880"/>
+            <a:off x="5376672" y="4663440"/>
             <a:ext cx="1051560" cy="640080"/>
           </a:xfrm>
           <a:prstGeom prst="rect">
@@ -8145,7 +10040,7 @@
                 <a:ea typeface="Goetheanum Icons" pitchFamily="34" charset="-122"/>
                 <a:cs typeface="Goetheanum Icons" pitchFamily="34" charset="-120"/>
               </a:rPr>
-              <a:t>y</a:t>
+              <a:t>z</a:t>
             </a:r>
             <a:endParaRPr lang="en-US" sz="3200" dirty="0"/>
           </a:p>
@@ -8153,13 +10048,13 @@
       </p:sp>
       <p:sp>
         <p:nvSpPr>
-          <p:cNvPr id="37" name="Text 34"/>
+          <p:cNvPr id="42" name="Text 40"/>
           <p:cNvSpPr/>
           <p:nvPr/>
         </p:nvSpPr>
         <p:spPr>
           <a:xfrm>
-            <a:off x="2962656" y="5440680"/>
+            <a:off x="5376672" y="5349240"/>
             <a:ext cx="1051560" cy="228600"/>
           </a:xfrm>
           <a:prstGeom prst="rect">
@@ -8184,7 +10079,7 @@
                 <a:ea typeface="Goetheanum Schrift Laut" pitchFamily="34" charset="-122"/>
                 <a:cs typeface="Goetheanum Schrift Laut" pitchFamily="34" charset="-120"/>
               </a:rPr>
-              <a:t>y</a:t>
+              <a:t>z</a:t>
             </a:r>
             <a:endParaRPr lang="en-US" sz="900" dirty="0"/>
           </a:p>
@@ -8192,13 +10087,13 @@
       </p:sp>
       <p:sp>
         <p:nvSpPr>
-          <p:cNvPr id="38" name="Text 35"/>
+          <p:cNvPr id="43" name="Text 41"/>
           <p:cNvSpPr/>
           <p:nvPr/>
         </p:nvSpPr>
         <p:spPr>
           <a:xfrm>
-            <a:off x="2889504" y="5669280"/>
+            <a:off x="5303520" y="5577840"/>
             <a:ext cx="1197864" cy="228600"/>
           </a:xfrm>
           <a:prstGeom prst="rect">
@@ -8223,7 +10118,7 @@
                 <a:ea typeface="Goetheanum Schrift Klar" pitchFamily="34" charset="-122"/>
                 <a:cs typeface="Goetheanum Schrift Klar" pitchFamily="34" charset="-120"/>
               </a:rPr>
-              <a:t>Person</a:t>
+              <a:t>Keine Fotos</a:t>
             </a:r>
             <a:endParaRPr lang="en-US" sz="900" dirty="0"/>
           </a:p>
@@ -8231,13 +10126,13 @@
       </p:sp>
       <p:sp>
         <p:nvSpPr>
-          <p:cNvPr id="39" name="Text 36"/>
+          <p:cNvPr id="44" name="Text 42"/>
           <p:cNvSpPr/>
           <p:nvPr/>
         </p:nvSpPr>
         <p:spPr>
           <a:xfrm>
-            <a:off x="4169664" y="4754880"/>
+            <a:off x="6583680" y="4663440"/>
             <a:ext cx="1051560" cy="640080"/>
           </a:xfrm>
           <a:prstGeom prst="rect">
@@ -8262,7 +10157,7 @@
                 <a:ea typeface="Goetheanum Icons" pitchFamily="34" charset="-122"/>
                 <a:cs typeface="Goetheanum Icons" pitchFamily="34" charset="-120"/>
               </a:rPr>
-              <a:t>r</a:t>
+              <a:t>t</a:t>
             </a:r>
             <a:endParaRPr lang="en-US" sz="3200" dirty="0"/>
           </a:p>
@@ -8270,13 +10165,13 @@
       </p:sp>
       <p:sp>
         <p:nvSpPr>
-          <p:cNvPr id="40" name="Text 37"/>
+          <p:cNvPr id="45" name="Text 43"/>
           <p:cNvSpPr/>
           <p:nvPr/>
         </p:nvSpPr>
         <p:spPr>
           <a:xfrm>
-            <a:off x="4169664" y="5440680"/>
+            <a:off x="6583680" y="5349240"/>
             <a:ext cx="1051560" cy="228600"/>
           </a:xfrm>
           <a:prstGeom prst="rect">
@@ -8301,7 +10196,7 @@
                 <a:ea typeface="Goetheanum Schrift Laut" pitchFamily="34" charset="-122"/>
                 <a:cs typeface="Goetheanum Schrift Laut" pitchFamily="34" charset="-120"/>
               </a:rPr>
-              <a:t>r</a:t>
+              <a:t>t</a:t>
             </a:r>
             <a:endParaRPr lang="en-US" sz="900" dirty="0"/>
           </a:p>
@@ -8309,13 +10204,13 @@
       </p:sp>
       <p:sp>
         <p:nvSpPr>
-          <p:cNvPr id="41" name="Text 38"/>
+          <p:cNvPr id="46" name="Text 44"/>
           <p:cNvSpPr/>
           <p:nvPr/>
         </p:nvSpPr>
         <p:spPr>
           <a:xfrm>
-            <a:off x="4096512" y="5669280"/>
+            <a:off x="6510528" y="5577840"/>
             <a:ext cx="1197864" cy="228600"/>
           </a:xfrm>
           <a:prstGeom prst="rect">
@@ -8340,7 +10235,7 @@
                 <a:ea typeface="Goetheanum Schrift Klar" pitchFamily="34" charset="-122"/>
                 <a:cs typeface="Goetheanum Schrift Klar" pitchFamily="34" charset="-120"/>
               </a:rPr>
-              <a:t>Hunde anleinen</a:t>
+              <a:t>Keine Hunde</a:t>
             </a:r>
             <a:endParaRPr lang="en-US" sz="900" dirty="0"/>
           </a:p>
@@ -8348,13 +10243,13 @@
       </p:sp>
       <p:sp>
         <p:nvSpPr>
-          <p:cNvPr id="42" name="Text 39"/>
+          <p:cNvPr id="47" name="Text 45"/>
           <p:cNvSpPr/>
           <p:nvPr/>
         </p:nvSpPr>
         <p:spPr>
           <a:xfrm>
-            <a:off x="5376672" y="4754880"/>
+            <a:off x="7790688" y="4663440"/>
             <a:ext cx="1051560" cy="640080"/>
           </a:xfrm>
           <a:prstGeom prst="rect">
@@ -8379,7 +10274,7 @@
                 <a:ea typeface="Goetheanum Icons" pitchFamily="34" charset="-122"/>
                 <a:cs typeface="Goetheanum Icons" pitchFamily="34" charset="-120"/>
               </a:rPr>
-              <a:t>z</a:t>
+              <a:t>u</a:t>
             </a:r>
             <a:endParaRPr lang="en-US" sz="3200" dirty="0"/>
           </a:p>
@@ -8387,13 +10282,13 @@
       </p:sp>
       <p:sp>
         <p:nvSpPr>
-          <p:cNvPr id="43" name="Text 40"/>
+          <p:cNvPr id="48" name="Text 46"/>
           <p:cNvSpPr/>
           <p:nvPr/>
         </p:nvSpPr>
         <p:spPr>
           <a:xfrm>
-            <a:off x="5376672" y="5440680"/>
+            <a:off x="7790688" y="5349240"/>
             <a:ext cx="1051560" cy="228600"/>
           </a:xfrm>
           <a:prstGeom prst="rect">
@@ -8418,7 +10313,7 @@
                 <a:ea typeface="Goetheanum Schrift Laut" pitchFamily="34" charset="-122"/>
                 <a:cs typeface="Goetheanum Schrift Laut" pitchFamily="34" charset="-120"/>
               </a:rPr>
-              <a:t>z</a:t>
+              <a:t>u</a:t>
             </a:r>
             <a:endParaRPr lang="en-US" sz="900" dirty="0"/>
           </a:p>
@@ -8426,13 +10321,13 @@
       </p:sp>
       <p:sp>
         <p:nvSpPr>
-          <p:cNvPr id="44" name="Text 41"/>
+          <p:cNvPr id="49" name="Text 47"/>
           <p:cNvSpPr/>
           <p:nvPr/>
         </p:nvSpPr>
         <p:spPr>
           <a:xfrm>
-            <a:off x="5303520" y="5669280"/>
+            <a:off x="7717536" y="5577840"/>
             <a:ext cx="1197864" cy="228600"/>
           </a:xfrm>
           <a:prstGeom prst="rect">
@@ -8457,7 +10352,7 @@
                 <a:ea typeface="Goetheanum Schrift Klar" pitchFamily="34" charset="-122"/>
                 <a:cs typeface="Goetheanum Schrift Klar" pitchFamily="34" charset="-120"/>
               </a:rPr>
-              <a:t>Keine Fotos</a:t>
+              <a:t>Draussen essen</a:t>
             </a:r>
             <a:endParaRPr lang="en-US" sz="900" dirty="0"/>
           </a:p>
@@ -8465,13 +10360,13 @@
       </p:sp>
       <p:sp>
         <p:nvSpPr>
-          <p:cNvPr id="45" name="Text 42"/>
+          <p:cNvPr id="50" name="Text 48"/>
           <p:cNvSpPr/>
           <p:nvPr/>
         </p:nvSpPr>
         <p:spPr>
           <a:xfrm>
-            <a:off x="6583680" y="4754880"/>
+            <a:off x="8997696" y="4663440"/>
             <a:ext cx="1051560" cy="640080"/>
           </a:xfrm>
           <a:prstGeom prst="rect">
@@ -8496,7 +10391,7 @@
                 <a:ea typeface="Goetheanum Icons" pitchFamily="34" charset="-122"/>
                 <a:cs typeface="Goetheanum Icons" pitchFamily="34" charset="-120"/>
               </a:rPr>
-              <a:t>t</a:t>
+              <a:t>j</a:t>
             </a:r>
             <a:endParaRPr lang="en-US" sz="3200" dirty="0"/>
           </a:p>
@@ -8504,13 +10399,13 @@
       </p:sp>
       <p:sp>
         <p:nvSpPr>
-          <p:cNvPr id="46" name="Text 43"/>
+          <p:cNvPr id="51" name="Text 49"/>
           <p:cNvSpPr/>
           <p:nvPr/>
         </p:nvSpPr>
         <p:spPr>
           <a:xfrm>
-            <a:off x="6583680" y="5440680"/>
+            <a:off x="8997696" y="5349240"/>
             <a:ext cx="1051560" cy="228600"/>
           </a:xfrm>
           <a:prstGeom prst="rect">
@@ -8535,7 +10430,7 @@
                 <a:ea typeface="Goetheanum Schrift Laut" pitchFamily="34" charset="-122"/>
                 <a:cs typeface="Goetheanum Schrift Laut" pitchFamily="34" charset="-120"/>
               </a:rPr>
-              <a:t>t</a:t>
+              <a:t>j</a:t>
             </a:r>
             <a:endParaRPr lang="en-US" sz="900" dirty="0"/>
           </a:p>
@@ -8543,13 +10438,13 @@
       </p:sp>
       <p:sp>
         <p:nvSpPr>
-          <p:cNvPr id="47" name="Text 44"/>
+          <p:cNvPr id="52" name="Text 50"/>
           <p:cNvSpPr/>
           <p:nvPr/>
         </p:nvSpPr>
         <p:spPr>
           <a:xfrm>
-            <a:off x="6510528" y="5669280"/>
+            <a:off x="8924544" y="5577840"/>
             <a:ext cx="1197864" cy="228600"/>
           </a:xfrm>
           <a:prstGeom prst="rect">
@@ -8574,7 +10469,7 @@
                 <a:ea typeface="Goetheanum Schrift Klar" pitchFamily="34" charset="-122"/>
                 <a:cs typeface="Goetheanum Schrift Klar" pitchFamily="34" charset="-120"/>
               </a:rPr>
-              <a:t>Keine Hunde</a:t>
+              <a:t>Papier</a:t>
             </a:r>
             <a:endParaRPr lang="en-US" sz="900" dirty="0"/>
           </a:p>
@@ -8582,14 +10477,14 @@
       </p:sp>
       <p:sp>
         <p:nvSpPr>
-          <p:cNvPr id="48" name="Text 45"/>
+          <p:cNvPr id="53" name="Text 51"/>
           <p:cNvSpPr/>
           <p:nvPr/>
         </p:nvSpPr>
         <p:spPr>
           <a:xfrm>
-            <a:off x="7790688" y="4754880"/>
-            <a:ext cx="1051560" cy="640080"/>
+            <a:off x="548640" y="6263640"/>
+            <a:ext cx="8686800" cy="256032"/>
           </a:xfrm>
           <a:prstGeom prst="rect">
             <a:avLst/>
@@ -8601,85 +10496,7 @@
           <a:bodyPr wrap="square" lIns="0" tIns="0" rIns="0" bIns="0" rtlCol="0" anchor="ctr"/>
           <a:lstStyle/>
           <a:p>
-            <a:pPr algn="ctr" indent="0" marL="0">
-              <a:buNone/>
-            </a:pPr>
-            <a:r>
-              <a:rPr lang="en-US" sz="3200" dirty="0">
-                <a:solidFill>
-                  <a:srgbClr val="1A1A1A"/>
-                </a:solidFill>
-                <a:latin typeface="Goetheanum Icons" pitchFamily="34" charset="0"/>
-                <a:ea typeface="Goetheanum Icons" pitchFamily="34" charset="-122"/>
-                <a:cs typeface="Goetheanum Icons" pitchFamily="34" charset="-120"/>
-              </a:rPr>
-              <a:t>u</a:t>
-            </a:r>
-            <a:endParaRPr lang="en-US" sz="3200" dirty="0"/>
-          </a:p>
-        </p:txBody>
-      </p:sp>
-      <p:sp>
-        <p:nvSpPr>
-          <p:cNvPr id="49" name="Text 46"/>
-          <p:cNvSpPr/>
-          <p:nvPr/>
-        </p:nvSpPr>
-        <p:spPr>
-          <a:xfrm>
-            <a:off x="7790688" y="5440680"/>
-            <a:ext cx="1051560" cy="228600"/>
-          </a:xfrm>
-          <a:prstGeom prst="rect">
-            <a:avLst/>
-          </a:prstGeom>
-          <a:noFill/>
-          <a:ln/>
-        </p:spPr>
-        <p:txBody>
-          <a:bodyPr wrap="square" lIns="0" tIns="0" rIns="0" bIns="0" rtlCol="0" anchor="ctr"/>
-          <a:lstStyle/>
-          <a:p>
-            <a:pPr algn="ctr" indent="0" marL="0">
-              <a:buNone/>
-            </a:pPr>
-            <a:r>
-              <a:rPr lang="en-US" sz="900" dirty="0">
-                <a:solidFill>
-                  <a:srgbClr val="005EB8"/>
-                </a:solidFill>
-                <a:latin typeface="Goetheanum Schrift Laut" pitchFamily="34" charset="0"/>
-                <a:ea typeface="Goetheanum Schrift Laut" pitchFamily="34" charset="-122"/>
-                <a:cs typeface="Goetheanum Schrift Laut" pitchFamily="34" charset="-120"/>
-              </a:rPr>
-              <a:t>u</a:t>
-            </a:r>
-            <a:endParaRPr lang="en-US" sz="900" dirty="0"/>
-          </a:p>
-        </p:txBody>
-      </p:sp>
-      <p:sp>
-        <p:nvSpPr>
-          <p:cNvPr id="50" name="Text 47"/>
-          <p:cNvSpPr/>
-          <p:nvPr/>
-        </p:nvSpPr>
-        <p:spPr>
-          <a:xfrm>
-            <a:off x="7717536" y="5669280"/>
-            <a:ext cx="1197864" cy="228600"/>
-          </a:xfrm>
-          <a:prstGeom prst="rect">
-            <a:avLst/>
-          </a:prstGeom>
-          <a:noFill/>
-          <a:ln/>
-        </p:spPr>
-        <p:txBody>
-          <a:bodyPr wrap="square" lIns="0" tIns="0" rIns="0" bIns="0" rtlCol="0" anchor="ctr"/>
-          <a:lstStyle/>
-          <a:p>
-            <a:pPr algn="ctr" indent="0" marL="0">
+            <a:pPr indent="0" marL="0">
               <a:buNone/>
             </a:pPr>
             <a:r>
@@ -8691,7 +10508,7 @@
                 <a:ea typeface="Goetheanum Schrift Klar" pitchFamily="34" charset="-122"/>
                 <a:cs typeface="Goetheanum Schrift Klar" pitchFamily="34" charset="-120"/>
               </a:rPr>
-              <a:t>Nicht essen</a:t>
+              <a:t>Grossbuchstaben setzen dasselbe Zeichen mit Beschriftung. Pfeile und Kompass: Schrift ‹Goetheanum Pfeile›.</a:t>
             </a:r>
             <a:endParaRPr lang="en-US" sz="900" dirty="0"/>
           </a:p>
@@ -8699,14 +10516,14 @@
       </p:sp>
       <p:sp>
         <p:nvSpPr>
-          <p:cNvPr id="51" name="Text 48"/>
+          <p:cNvPr id="54" name="Text 52"/>
           <p:cNvSpPr/>
           <p:nvPr/>
         </p:nvSpPr>
         <p:spPr>
           <a:xfrm>
-            <a:off x="8997696" y="4754880"/>
-            <a:ext cx="1051560" cy="640080"/>
+            <a:off x="548640" y="6537960"/>
+            <a:ext cx="8229600" cy="274320"/>
           </a:xfrm>
           <a:prstGeom prst="rect">
             <a:avLst/>
@@ -8718,89 +10535,11 @@
           <a:bodyPr wrap="square" lIns="0" tIns="0" rIns="0" bIns="0" rtlCol="0" anchor="ctr"/>
           <a:lstStyle/>
           <a:p>
-            <a:pPr algn="ctr" indent="0" marL="0">
-              <a:buNone/>
-            </a:pPr>
-            <a:r>
-              <a:rPr lang="en-US" sz="3200" dirty="0">
-                <a:solidFill>
-                  <a:srgbClr val="1A1A1A"/>
-                </a:solidFill>
-                <a:latin typeface="Goetheanum Icons" pitchFamily="34" charset="0"/>
-                <a:ea typeface="Goetheanum Icons" pitchFamily="34" charset="-122"/>
-                <a:cs typeface="Goetheanum Icons" pitchFamily="34" charset="-120"/>
-              </a:rPr>
-              <a:t>j</a:t>
-            </a:r>
-            <a:endParaRPr lang="en-US" sz="3200" dirty="0"/>
-          </a:p>
-        </p:txBody>
-      </p:sp>
-      <p:sp>
-        <p:nvSpPr>
-          <p:cNvPr id="52" name="Text 49"/>
-          <p:cNvSpPr/>
-          <p:nvPr/>
-        </p:nvSpPr>
-        <p:spPr>
-          <a:xfrm>
-            <a:off x="8997696" y="5440680"/>
-            <a:ext cx="1051560" cy="228600"/>
-          </a:xfrm>
-          <a:prstGeom prst="rect">
-            <a:avLst/>
-          </a:prstGeom>
-          <a:noFill/>
-          <a:ln/>
-        </p:spPr>
-        <p:txBody>
-          <a:bodyPr wrap="square" lIns="0" tIns="0" rIns="0" bIns="0" rtlCol="0" anchor="ctr"/>
-          <a:lstStyle/>
-          <a:p>
-            <a:pPr algn="ctr" indent="0" marL="0">
-              <a:buNone/>
-            </a:pPr>
-            <a:r>
-              <a:rPr lang="en-US" sz="900" dirty="0">
-                <a:solidFill>
-                  <a:srgbClr val="005EB8"/>
-                </a:solidFill>
-                <a:latin typeface="Goetheanum Schrift Laut" pitchFamily="34" charset="0"/>
-                <a:ea typeface="Goetheanum Schrift Laut" pitchFamily="34" charset="-122"/>
-                <a:cs typeface="Goetheanum Schrift Laut" pitchFamily="34" charset="-120"/>
-              </a:rPr>
-              <a:t>j</a:t>
-            </a:r>
-            <a:endParaRPr lang="en-US" sz="900" dirty="0"/>
-          </a:p>
-        </p:txBody>
-      </p:sp>
-      <p:sp>
-        <p:nvSpPr>
-          <p:cNvPr id="53" name="Text 50"/>
-          <p:cNvSpPr/>
-          <p:nvPr/>
-        </p:nvSpPr>
-        <p:spPr>
-          <a:xfrm>
-            <a:off x="8924544" y="5669280"/>
-            <a:ext cx="1197864" cy="228600"/>
-          </a:xfrm>
-          <a:prstGeom prst="rect">
-            <a:avLst/>
-          </a:prstGeom>
-          <a:noFill/>
-          <a:ln/>
-        </p:spPr>
-        <p:txBody>
-          <a:bodyPr wrap="square" lIns="0" tIns="0" rIns="0" bIns="0" rtlCol="0" anchor="ctr"/>
-          <a:lstStyle/>
-          <a:p>
-            <a:pPr algn="ctr" indent="0" marL="0">
-              <a:buNone/>
-            </a:pPr>
-            <a:r>
-              <a:rPr lang="en-US" sz="900" dirty="0">
+            <a:pPr indent="0" marL="0">
+              <a:buNone/>
+            </a:pPr>
+            <a:r>
+              <a:rPr lang="en-US" sz="1300" dirty="0">
                 <a:solidFill>
                   <a:srgbClr val="6B7480"/>
                 </a:solidFill>
@@ -8808,59 +10547,20 @@
                 <a:ea typeface="Goetheanum Schrift Klar" pitchFamily="34" charset="-122"/>
                 <a:cs typeface="Goetheanum Schrift Klar" pitchFamily="34" charset="-120"/>
               </a:rPr>
-              <a:t>Papier</a:t>
-            </a:r>
-            <a:endParaRPr lang="en-US" sz="900" dirty="0"/>
-          </a:p>
-        </p:txBody>
-      </p:sp>
-      <p:sp>
-        <p:nvSpPr>
-          <p:cNvPr id="54" name="Text 51"/>
-          <p:cNvSpPr/>
-          <p:nvPr/>
-        </p:nvSpPr>
-        <p:spPr>
-          <a:xfrm>
-            <a:off x="548640" y="6537960"/>
-            <a:ext cx="8229600" cy="274320"/>
-          </a:xfrm>
-          <a:prstGeom prst="rect">
-            <a:avLst/>
-          </a:prstGeom>
-          <a:noFill/>
-          <a:ln/>
-        </p:spPr>
-        <p:txBody>
-          <a:bodyPr wrap="square" lIns="0" tIns="0" rIns="0" bIns="0" rtlCol="0" anchor="ctr"/>
-          <a:lstStyle/>
-          <a:p>
-            <a:pPr indent="0" marL="0">
-              <a:buNone/>
-            </a:pPr>
-            <a:r>
-              <a:rPr lang="en-US" sz="1300" dirty="0">
-                <a:solidFill>
-                  <a:srgbClr val="6B7480"/>
+              <a:t>Alle Zeichen, Belegung und Installation: </a:t>
+            </a:r>
+            <a:pPr indent="0" marL="0">
+              <a:buNone/>
+            </a:pPr>
+            <a:r>
+              <a:rPr lang="en-US" sz="1300" u="sng" dirty="0">
+                <a:solidFill>
+                  <a:srgbClr val="005EB8"/>
                 </a:solidFill>
                 <a:latin typeface="Goetheanum Schrift Klar" pitchFamily="34" charset="0"/>
                 <a:ea typeface="Goetheanum Schrift Klar" pitchFamily="34" charset="-122"/>
                 <a:cs typeface="Goetheanum Schrift Klar" pitchFamily="34" charset="-120"/>
-              </a:rPr>
-              <a:t>Alle Zeichen, Belegung und Installation: </a:t>
-            </a:r>
-            <a:pPr indent="0" marL="0">
-              <a:buNone/>
-            </a:pPr>
-            <a:r>
-              <a:rPr lang="en-US" sz="1300" u="sng" dirty="0">
-                <a:solidFill>
-                  <a:srgbClr val="005EB8"/>
-                </a:solidFill>
-                <a:latin typeface="Goetheanum Schrift Klar" pitchFamily="34" charset="0"/>
-                <a:ea typeface="Goetheanum Schrift Klar" pitchFamily="34" charset="-122"/>
-                <a:cs typeface="Goetheanum Schrift Klar" pitchFamily="34" charset="-120"/>
-                <a:hlinkClick r:id="rId2" invalidUrl="" action="" tgtFrame="" tooltip="" history="1" highlightClick="0" endSnd="0">
+                <a:hlinkClick r:id="rId1" invalidUrl="" action="" tgtFrame="" tooltip="" history="1" highlightClick="0" endSnd="0">
                   <a:extLst>
                     <a:ext uri="{A12FA001-AC4F-418D-AE19-62706E023703}">
                       <ahyp:hlinkClr xmlns:ahyp="http://schemas.microsoft.com/office/drawing/2018/hyperlinkcolor" val="tx"/>
@@ -8876,40 +10576,49 @@
       </p:sp>
       <p:sp>
         <p:nvSpPr>
-          <p:cNvPr id="55" name="Text 52"/>
-          <p:cNvSpPr/>
-          <p:nvPr/>
-        </p:nvSpPr>
-        <p:spPr>
-          <a:xfrm>
-            <a:off x="4654296" y="6995160"/>
-            <a:ext cx="5486400" cy="274320"/>
-          </a:xfrm>
-          <a:prstGeom prst="rect">
-            <a:avLst/>
-          </a:prstGeom>
-          <a:noFill/>
-          <a:ln/>
-        </p:spPr>
-        <p:txBody>
-          <a:bodyPr wrap="square" lIns="0" tIns="0" rIns="0" bIns="0" rtlCol="0" anchor="ctr"/>
-          <a:lstStyle/>
-          <a:p>
-            <a:pPr algn="r" indent="0" marL="0">
-              <a:buNone/>
-            </a:pPr>
-            <a:r>
-              <a:rPr lang="en-US" sz="900" dirty="0">
+          <p:cNvPr id="25" name="Slide Number Placeholder 0"/>
+          <p:cNvSpPr>
+            <a:spLocks noGrp="1"/>
+          </p:cNvSpPr>
+          <p:nvPr>
+            <p:ph type="sldNum" sz="quarter" idx="4294967295"/>
+          </p:nvPr>
+        </p:nvSpPr>
+        <p:spPr>
+          <a:xfrm>
+            <a:off x="9747504" y="6995160"/>
+            <a:ext cx="393192" cy="274320"/>
+          </a:xfrm>
+          <a:prstGeom prst="rect">
+            <a:avLst/>
+          </a:prstGeom>
+          <a:extLst>
+            <a:ext uri="{C572A759-6A51-4108-AA02-DFA0A04FC94B}">
+              <ma14:wrappingTextBoxFlag xmlns:ma14="http://schemas.microsoft.com/office/mac/drawingml/2011/main" val="0"/>
+            </a:ext>
+          </a:extLst>
+        </p:spPr>
+        <p:txBody>
+          <a:bodyPr anchor="ctr"/>
+          <a:lstStyle>
+            <a:lvl1pPr>
+              <a:defRPr sz="900">
                 <a:solidFill>
                   <a:srgbClr val="6B7480"/>
                 </a:solidFill>
-                <a:latin typeface="Goetheanum Schrift Klar" pitchFamily="34" charset="0"/>
-                <a:ea typeface="Goetheanum Schrift Klar" pitchFamily="34" charset="-122"/>
-                <a:cs typeface="Goetheanum Schrift Klar" pitchFamily="34" charset="-120"/>
-              </a:rPr>
-              <a:t>Titel der Präsentation · 00.00.2026 · 3</a:t>
-            </a:r>
-            <a:endParaRPr lang="en-US" sz="900" dirty="0"/>
+                <a:latin typeface="Goetheanum Schrift Klar"/>
+                <a:ea typeface="Goetheanum Schrift Klar"/>
+                <a:cs typeface="Goetheanum Schrift Klar"/>
+              </a:defRPr>
+            </a:lvl1pPr>
+          </a:lstStyle>
+          <a:p>
+            <a:pPr algn="l"/>
+            <a:fld id="{F7021451-1387-4CA6-816F-3879F97B5CBC}" type="slidenum">
+              <a:rPr b="0" lang="en-US"/>
+              <a:t>3</a:t>
+            </a:fld>
+            <a:endParaRPr lang="en-US"/>
           </a:p>
         </p:txBody>
       </p:sp>
@@ -8924,13 +10633,6 @@
 <file path=ppt/slides/slide4.xml><?xml version="1.0" encoding="utf-8"?>
 <p:sld xmlns:a="http://schemas.openxmlformats.org/drawingml/2006/main" xmlns:r="http://schemas.openxmlformats.org/officeDocument/2006/relationships" xmlns:p="http://schemas.openxmlformats.org/presentationml/2006/main">
   <p:cSld name="Slide 4">
-    <p:bg>
-      <p:bgPr>
-        <a:solidFill>
-          <a:srgbClr val="FFFFFF"/>
-        </a:solidFill>
-      </p:bgPr>
-    </p:bg>
     <p:spTree>
       <p:nvGrpSpPr>
         <p:cNvPr id="1" name=""/>
@@ -8945,35 +10647,13 @@
           <a:chExt cx="0" cy="0"/>
         </a:xfrm>
       </p:grpSpPr>
-      <p:pic>
-        <p:nvPicPr>
-          <p:cNvPr id="2" name="Image 0" descr="logo-goetheanum-blue.png">    </p:cNvPr>
-          <p:cNvPicPr>
-            <a:picLocks noChangeAspect="1"/>
-          </p:cNvPicPr>
-          <p:nvPr/>
-        </p:nvPicPr>
-        <p:blipFill>
-          <a:blip r:embed="rId1"/>
-          <a:stretch>
-            <a:fillRect/>
-          </a:stretch>
-        </p:blipFill>
-        <p:spPr>
-          <a:xfrm>
-            <a:off x="548640" y="502920"/>
-            <a:ext cx="1088402" cy="182880"/>
-          </a:xfrm>
-          <a:prstGeom prst="rect">
-            <a:avLst/>
-          </a:prstGeom>
-        </p:spPr>
-      </p:pic>
-      <p:sp>
-        <p:nvSpPr>
-          <p:cNvPr id="3" name="Text 0"/>
-          <p:cNvSpPr/>
-          <p:nvPr/>
+      <p:sp>
+        <p:nvSpPr>
+          <p:cNvPr id="2" name="Text 1"/>
+          <p:cNvSpPr/>
+          <p:nvPr>
+            <p:ph idx="102" type="body" hasCustomPrompt="1"/>
+          </p:nvPr>
         </p:nvSpPr>
         <p:spPr>
           <a:xfrm>
@@ -8987,7 +10667,7 @@
           <a:ln/>
         </p:spPr>
         <p:txBody>
-          <a:bodyPr wrap="square" lIns="0" tIns="0" rIns="0" bIns="0" rtlCol="0" anchor="ctr"/>
+          <a:bodyPr wrap="square" lIns="0" tIns="0" rIns="0" bIns="0" rtlCol="0"/>
           <a:lstStyle/>
           <a:p>
             <a:pPr indent="0" marL="0">
@@ -9010,9 +10690,11 @@
       </p:sp>
       <p:sp>
         <p:nvSpPr>
-          <p:cNvPr id="4" name="Text 1"/>
-          <p:cNvSpPr/>
-          <p:nvPr/>
+          <p:cNvPr id="3" name="Text 1"/>
+          <p:cNvSpPr/>
+          <p:nvPr>
+            <p:ph idx="103" type="title" hasCustomPrompt="1"/>
+          </p:nvPr>
         </p:nvSpPr>
         <p:spPr>
           <a:xfrm>
@@ -9026,7 +10708,7 @@
           <a:ln/>
         </p:spPr>
         <p:txBody>
-          <a:bodyPr wrap="square" lIns="0" tIns="0" rIns="0" bIns="0" rtlCol="0" anchor="ctr"/>
+          <a:bodyPr wrap="square" lIns="0" tIns="0" rIns="0" bIns="0" rtlCol="0"/>
           <a:lstStyle/>
           <a:p>
             <a:pPr indent="0" marL="0">
@@ -9037,9 +10719,9 @@
                 <a:solidFill>
                   <a:srgbClr val="1A1A1A"/>
                 </a:solidFill>
-                <a:latin typeface="Goetheanum Schrift Klar" pitchFamily="34" charset="0"/>
-                <a:ea typeface="Goetheanum Schrift Klar" pitchFamily="34" charset="-122"/>
-                <a:cs typeface="Goetheanum Schrift Klar" pitchFamily="34" charset="-120"/>
+                <a:latin typeface="Goetheanum Schrift Deutlich" pitchFamily="34" charset="0"/>
+                <a:ea typeface="Goetheanum Schrift Deutlich" pitchFamily="34" charset="-122"/>
+                <a:cs typeface="Goetheanum Schrift Deutlich" pitchFamily="34" charset="-120"/>
               </a:rPr>
               <a:t>Worüber wir sprechen</a:t>
             </a:r>
@@ -9049,7 +10731,7 @@
       </p:sp>
       <p:sp>
         <p:nvSpPr>
-          <p:cNvPr id="5" name="Text 2"/>
+          <p:cNvPr id="4" name="Text 2"/>
           <p:cNvSpPr/>
           <p:nvPr/>
         </p:nvSpPr>
@@ -9088,7 +10770,7 @@
       </p:sp>
       <p:sp>
         <p:nvSpPr>
-          <p:cNvPr id="6" name="Text 3"/>
+          <p:cNvPr id="5" name="Text 3"/>
           <p:cNvSpPr/>
           <p:nvPr/>
         </p:nvSpPr>
@@ -9150,7 +10832,7 @@
       </p:sp>
       <p:sp>
         <p:nvSpPr>
-          <p:cNvPr id="7" name="Text 4"/>
+          <p:cNvPr id="6" name="Text 4"/>
           <p:cNvSpPr/>
           <p:nvPr/>
         </p:nvSpPr>
@@ -9189,7 +10871,7 @@
       </p:sp>
       <p:sp>
         <p:nvSpPr>
-          <p:cNvPr id="8" name="Text 5"/>
+          <p:cNvPr id="7" name="Text 5"/>
           <p:cNvSpPr/>
           <p:nvPr/>
         </p:nvSpPr>
@@ -9251,7 +10933,7 @@
       </p:sp>
       <p:sp>
         <p:nvSpPr>
-          <p:cNvPr id="9" name="Text 6"/>
+          <p:cNvPr id="8" name="Text 6"/>
           <p:cNvSpPr/>
           <p:nvPr/>
         </p:nvSpPr>
@@ -9290,7 +10972,7 @@
       </p:sp>
       <p:sp>
         <p:nvSpPr>
-          <p:cNvPr id="10" name="Text 7"/>
+          <p:cNvPr id="9" name="Text 7"/>
           <p:cNvSpPr/>
           <p:nvPr/>
         </p:nvSpPr>
@@ -9352,7 +11034,7 @@
       </p:sp>
       <p:sp>
         <p:nvSpPr>
-          <p:cNvPr id="11" name="Text 8"/>
+          <p:cNvPr id="10" name="Text 8"/>
           <p:cNvSpPr/>
           <p:nvPr/>
         </p:nvSpPr>
@@ -9391,7 +11073,7 @@
       </p:sp>
       <p:sp>
         <p:nvSpPr>
-          <p:cNvPr id="12" name="Text 9"/>
+          <p:cNvPr id="11" name="Text 9"/>
           <p:cNvSpPr/>
           <p:nvPr/>
         </p:nvSpPr>
@@ -9453,40 +11135,49 @@
       </p:sp>
       <p:sp>
         <p:nvSpPr>
-          <p:cNvPr id="13" name="Text 10"/>
-          <p:cNvSpPr/>
-          <p:nvPr/>
-        </p:nvSpPr>
-        <p:spPr>
-          <a:xfrm>
-            <a:off x="4654296" y="6995160"/>
-            <a:ext cx="5486400" cy="274320"/>
-          </a:xfrm>
-          <a:prstGeom prst="rect">
-            <a:avLst/>
-          </a:prstGeom>
-          <a:noFill/>
-          <a:ln/>
-        </p:spPr>
-        <p:txBody>
-          <a:bodyPr wrap="square" lIns="0" tIns="0" rIns="0" bIns="0" rtlCol="0" anchor="ctr"/>
-          <a:lstStyle/>
-          <a:p>
-            <a:pPr algn="r" indent="0" marL="0">
-              <a:buNone/>
-            </a:pPr>
-            <a:r>
-              <a:rPr lang="en-US" sz="900" dirty="0">
+          <p:cNvPr id="25" name="Slide Number Placeholder 0"/>
+          <p:cNvSpPr>
+            <a:spLocks noGrp="1"/>
+          </p:cNvSpPr>
+          <p:nvPr>
+            <p:ph type="sldNum" sz="quarter" idx="4294967295"/>
+          </p:nvPr>
+        </p:nvSpPr>
+        <p:spPr>
+          <a:xfrm>
+            <a:off x="9747504" y="6995160"/>
+            <a:ext cx="393192" cy="274320"/>
+          </a:xfrm>
+          <a:prstGeom prst="rect">
+            <a:avLst/>
+          </a:prstGeom>
+          <a:extLst>
+            <a:ext uri="{C572A759-6A51-4108-AA02-DFA0A04FC94B}">
+              <ma14:wrappingTextBoxFlag xmlns:ma14="http://schemas.microsoft.com/office/mac/drawingml/2011/main" val="0"/>
+            </a:ext>
+          </a:extLst>
+        </p:spPr>
+        <p:txBody>
+          <a:bodyPr anchor="ctr"/>
+          <a:lstStyle>
+            <a:lvl1pPr>
+              <a:defRPr sz="900">
                 <a:solidFill>
                   <a:srgbClr val="6B7480"/>
                 </a:solidFill>
-                <a:latin typeface="Goetheanum Schrift Klar" pitchFamily="34" charset="0"/>
-                <a:ea typeface="Goetheanum Schrift Klar" pitchFamily="34" charset="-122"/>
-                <a:cs typeface="Goetheanum Schrift Klar" pitchFamily="34" charset="-120"/>
-              </a:rPr>
-              <a:t>Titel der Präsentation · 00.00.2026 · 4</a:t>
-            </a:r>
-            <a:endParaRPr lang="en-US" sz="900" dirty="0"/>
+                <a:latin typeface="Goetheanum Schrift Klar"/>
+                <a:ea typeface="Goetheanum Schrift Klar"/>
+                <a:cs typeface="Goetheanum Schrift Klar"/>
+              </a:defRPr>
+            </a:lvl1pPr>
+          </a:lstStyle>
+          <a:p>
+            <a:pPr algn="l"/>
+            <a:fld id="{F7021451-1387-4CA6-816F-3879F97B5CBC}" type="slidenum">
+              <a:rPr b="0" lang="en-US"/>
+              <a:t>4</a:t>
+            </a:fld>
+            <a:endParaRPr lang="en-US"/>
           </a:p>
         </p:txBody>
       </p:sp>
@@ -9501,13 +11192,6 @@
 <file path=ppt/slides/slide5.xml><?xml version="1.0" encoding="utf-8"?>
 <p:sld xmlns:a="http://schemas.openxmlformats.org/drawingml/2006/main" xmlns:r="http://schemas.openxmlformats.org/officeDocument/2006/relationships" xmlns:p="http://schemas.openxmlformats.org/presentationml/2006/main">
   <p:cSld name="Slide 5">
-    <p:bg>
-      <p:bgPr>
-        <a:solidFill>
-          <a:srgbClr val="005EB8"/>
-        </a:solidFill>
-      </p:bgPr>
-    </p:bg>
     <p:spTree>
       <p:nvGrpSpPr>
         <p:cNvPr id="1" name=""/>
@@ -9522,35 +11206,13 @@
           <a:chExt cx="0" cy="0"/>
         </a:xfrm>
       </p:grpSpPr>
-      <p:pic>
-        <p:nvPicPr>
-          <p:cNvPr id="2" name="Image 0" descr="logo-goetheanum-white.png">    </p:cNvPr>
-          <p:cNvPicPr>
-            <a:picLocks noChangeAspect="1"/>
-          </p:cNvPicPr>
-          <p:nvPr/>
-        </p:nvPicPr>
-        <p:blipFill>
-          <a:blip r:embed="rId1"/>
-          <a:stretch>
-            <a:fillRect/>
-          </a:stretch>
-        </p:blipFill>
-        <p:spPr>
-          <a:xfrm>
-            <a:off x="548640" y="502920"/>
-            <a:ext cx="1088402" cy="182880"/>
-          </a:xfrm>
-          <a:prstGeom prst="rect">
-            <a:avLst/>
-          </a:prstGeom>
-        </p:spPr>
-      </p:pic>
-      <p:sp>
-        <p:nvSpPr>
-          <p:cNvPr id="3" name="Text 0"/>
-          <p:cNvSpPr/>
-          <p:nvPr/>
+      <p:sp>
+        <p:nvSpPr>
+          <p:cNvPr id="2" name="Text 1"/>
+          <p:cNvSpPr/>
+          <p:nvPr>
+            <p:ph idx="102" type="body" hasCustomPrompt="1"/>
+          </p:nvPr>
         </p:nvSpPr>
         <p:spPr>
           <a:xfrm>
@@ -9564,7 +11226,7 @@
           <a:ln/>
         </p:spPr>
         <p:txBody>
-          <a:bodyPr wrap="square" lIns="0" tIns="0" rIns="0" bIns="0" rtlCol="0" anchor="ctr"/>
+          <a:bodyPr wrap="square" lIns="0" tIns="0" rIns="0" bIns="0" rtlCol="0"/>
           <a:lstStyle/>
           <a:p>
             <a:pPr indent="0" marL="0">
@@ -9587,9 +11249,11 @@
       </p:sp>
       <p:sp>
         <p:nvSpPr>
-          <p:cNvPr id="4" name="Text 1"/>
-          <p:cNvSpPr/>
-          <p:nvPr/>
+          <p:cNvPr id="3" name="Text 1"/>
+          <p:cNvSpPr/>
+          <p:nvPr>
+            <p:ph idx="103" type="title" hasCustomPrompt="1"/>
+          </p:nvPr>
         </p:nvSpPr>
         <p:spPr>
           <a:xfrm>
@@ -9603,7 +11267,7 @@
           <a:ln/>
         </p:spPr>
         <p:txBody>
-          <a:bodyPr wrap="square" lIns="0" tIns="0" rIns="0" bIns="0" rtlCol="0" anchor="ctr"/>
+          <a:bodyPr wrap="square" lIns="0" tIns="0" rIns="0" bIns="0" rtlCol="0"/>
           <a:lstStyle/>
           <a:p>
             <a:pPr indent="0" marL="0">
@@ -9614,9 +11278,9 @@
                 <a:solidFill>
                   <a:srgbClr val="FFFFFF"/>
                 </a:solidFill>
-                <a:latin typeface="Goetheanum Schrift Klar" pitchFamily="34" charset="0"/>
-                <a:ea typeface="Goetheanum Schrift Klar" pitchFamily="34" charset="-122"/>
-                <a:cs typeface="Goetheanum Schrift Klar" pitchFamily="34" charset="-120"/>
+                <a:latin typeface="Goetheanum Schrift Deutlich" pitchFamily="34" charset="0"/>
+                <a:ea typeface="Goetheanum Schrift Deutlich" pitchFamily="34" charset="-122"/>
+                <a:cs typeface="Goetheanum Schrift Deutlich" pitchFamily="34" charset="-120"/>
               </a:rPr>
               <a:t>Titel des Kapitels</a:t>
             </a:r>
@@ -9626,9 +11290,11 @@
       </p:sp>
       <p:sp>
         <p:nvSpPr>
-          <p:cNvPr id="5" name="Text 2"/>
-          <p:cNvSpPr/>
-          <p:nvPr/>
+          <p:cNvPr id="4" name="Text 1"/>
+          <p:cNvSpPr/>
+          <p:nvPr>
+            <p:ph idx="104" type="body" hasCustomPrompt="1"/>
+          </p:nvPr>
         </p:nvSpPr>
         <p:spPr>
           <a:xfrm>
@@ -9642,7 +11308,7 @@
           <a:ln/>
         </p:spPr>
         <p:txBody>
-          <a:bodyPr wrap="square" lIns="0" tIns="0" rIns="0" bIns="0" rtlCol="0" anchor="ctr"/>
+          <a:bodyPr wrap="square" lIns="0" tIns="0" rIns="0" bIns="0" rtlCol="0"/>
           <a:lstStyle/>
           <a:p>
             <a:pPr indent="0" marL="0">
@@ -9665,40 +11331,49 @@
       </p:sp>
       <p:sp>
         <p:nvSpPr>
-          <p:cNvPr id="6" name="Text 3"/>
-          <p:cNvSpPr/>
-          <p:nvPr/>
-        </p:nvSpPr>
-        <p:spPr>
-          <a:xfrm>
-            <a:off x="4654296" y="6995160"/>
-            <a:ext cx="5486400" cy="274320"/>
-          </a:xfrm>
-          <a:prstGeom prst="rect">
-            <a:avLst/>
-          </a:prstGeom>
-          <a:noFill/>
-          <a:ln/>
-        </p:spPr>
-        <p:txBody>
-          <a:bodyPr wrap="square" lIns="0" tIns="0" rIns="0" bIns="0" rtlCol="0" anchor="ctr"/>
-          <a:lstStyle/>
-          <a:p>
-            <a:pPr algn="r" indent="0" marL="0">
-              <a:buNone/>
-            </a:pPr>
-            <a:r>
-              <a:rPr lang="en-US" sz="900" dirty="0">
+          <p:cNvPr id="25" name="Slide Number Placeholder 0"/>
+          <p:cNvSpPr>
+            <a:spLocks noGrp="1"/>
+          </p:cNvSpPr>
+          <p:nvPr>
+            <p:ph type="sldNum" sz="quarter" idx="4294967295"/>
+          </p:nvPr>
+        </p:nvSpPr>
+        <p:spPr>
+          <a:xfrm>
+            <a:off x="9747504" y="6995160"/>
+            <a:ext cx="393192" cy="274320"/>
+          </a:xfrm>
+          <a:prstGeom prst="rect">
+            <a:avLst/>
+          </a:prstGeom>
+          <a:extLst>
+            <a:ext uri="{C572A759-6A51-4108-AA02-DFA0A04FC94B}">
+              <ma14:wrappingTextBoxFlag xmlns:ma14="http://schemas.microsoft.com/office/mac/drawingml/2011/main" val="0"/>
+            </a:ext>
+          </a:extLst>
+        </p:spPr>
+        <p:txBody>
+          <a:bodyPr anchor="ctr"/>
+          <a:lstStyle>
+            <a:lvl1pPr>
+              <a:defRPr sz="900">
                 <a:solidFill>
                   <a:srgbClr val="9CC3EC"/>
                 </a:solidFill>
-                <a:latin typeface="Goetheanum Schrift Klar" pitchFamily="34" charset="0"/>
-                <a:ea typeface="Goetheanum Schrift Klar" pitchFamily="34" charset="-122"/>
-                <a:cs typeface="Goetheanum Schrift Klar" pitchFamily="34" charset="-120"/>
-              </a:rPr>
-              <a:t>Titel der Präsentation · 00.00.2026 · 5</a:t>
-            </a:r>
-            <a:endParaRPr lang="en-US" sz="900" dirty="0"/>
+                <a:latin typeface="Goetheanum Schrift Klar"/>
+                <a:ea typeface="Goetheanum Schrift Klar"/>
+                <a:cs typeface="Goetheanum Schrift Klar"/>
+              </a:defRPr>
+            </a:lvl1pPr>
+          </a:lstStyle>
+          <a:p>
+            <a:pPr algn="l"/>
+            <a:fld id="{F7021451-1387-4CA6-816F-3879F97B5CBC}" type="slidenum">
+              <a:rPr b="0" lang="en-US"/>
+              <a:t>5</a:t>
+            </a:fld>
+            <a:endParaRPr lang="en-US"/>
           </a:p>
         </p:txBody>
       </p:sp>
@@ -9713,13 +11388,6 @@
 <file path=ppt/slides/slide6.xml><?xml version="1.0" encoding="utf-8"?>
 <p:sld xmlns:a="http://schemas.openxmlformats.org/drawingml/2006/main" xmlns:r="http://schemas.openxmlformats.org/officeDocument/2006/relationships" xmlns:p="http://schemas.openxmlformats.org/presentationml/2006/main">
   <p:cSld name="Slide 6">
-    <p:bg>
-      <p:bgPr>
-        <a:solidFill>
-          <a:srgbClr val="FFFFFF"/>
-        </a:solidFill>
-      </p:bgPr>
-    </p:bg>
     <p:spTree>
       <p:nvGrpSpPr>
         <p:cNvPr id="1" name=""/>
@@ -9734,35 +11402,13 @@
           <a:chExt cx="0" cy="0"/>
         </a:xfrm>
       </p:grpSpPr>
-      <p:pic>
-        <p:nvPicPr>
-          <p:cNvPr id="2" name="Image 0" descr="logo-goetheanum-blue.png">    </p:cNvPr>
-          <p:cNvPicPr>
-            <a:picLocks noChangeAspect="1"/>
-          </p:cNvPicPr>
-          <p:nvPr/>
-        </p:nvPicPr>
-        <p:blipFill>
-          <a:blip r:embed="rId1"/>
-          <a:stretch>
-            <a:fillRect/>
-          </a:stretch>
-        </p:blipFill>
-        <p:spPr>
-          <a:xfrm>
-            <a:off x="548640" y="502920"/>
-            <a:ext cx="1088402" cy="182880"/>
-          </a:xfrm>
-          <a:prstGeom prst="rect">
-            <a:avLst/>
-          </a:prstGeom>
-        </p:spPr>
-      </p:pic>
-      <p:sp>
-        <p:nvSpPr>
-          <p:cNvPr id="3" name="Text 0"/>
-          <p:cNvSpPr/>
-          <p:nvPr/>
+      <p:sp>
+        <p:nvSpPr>
+          <p:cNvPr id="2" name="Text 1"/>
+          <p:cNvSpPr/>
+          <p:nvPr>
+            <p:ph idx="102" type="body" hasCustomPrompt="1"/>
+          </p:nvPr>
         </p:nvSpPr>
         <p:spPr>
           <a:xfrm>
@@ -9776,7 +11422,7 @@
           <a:ln/>
         </p:spPr>
         <p:txBody>
-          <a:bodyPr wrap="square" lIns="0" tIns="0" rIns="0" bIns="0" rtlCol="0" anchor="ctr"/>
+          <a:bodyPr wrap="square" lIns="0" tIns="0" rIns="0" bIns="0" rtlCol="0"/>
           <a:lstStyle/>
           <a:p>
             <a:pPr indent="0" marL="0">
@@ -9799,9 +11445,11 @@
       </p:sp>
       <p:sp>
         <p:nvSpPr>
-          <p:cNvPr id="4" name="Text 1"/>
-          <p:cNvSpPr/>
-          <p:nvPr/>
+          <p:cNvPr id="3" name="Text 1"/>
+          <p:cNvSpPr/>
+          <p:nvPr>
+            <p:ph idx="103" type="title" hasCustomPrompt="1"/>
+          </p:nvPr>
         </p:nvSpPr>
         <p:spPr>
           <a:xfrm>
@@ -9815,7 +11463,7 @@
           <a:ln/>
         </p:spPr>
         <p:txBody>
-          <a:bodyPr wrap="square" lIns="0" tIns="0" rIns="0" bIns="0" rtlCol="0" anchor="ctr"/>
+          <a:bodyPr wrap="square" lIns="0" tIns="0" rIns="0" bIns="0" rtlCol="0"/>
           <a:lstStyle/>
           <a:p>
             <a:pPr indent="0" marL="0">
@@ -9826,11 +11474,11 @@
                 <a:solidFill>
                   <a:srgbClr val="1A1A1A"/>
                 </a:solidFill>
-                <a:latin typeface="Goetheanum Schrift Klar" pitchFamily="34" charset="0"/>
-                <a:ea typeface="Goetheanum Schrift Klar" pitchFamily="34" charset="-122"/>
-                <a:cs typeface="Goetheanum Schrift Klar" pitchFamily="34" charset="-120"/>
-              </a:rPr>
-              <a:t>Folientitel in Klar 26</a:t>
+                <a:latin typeface="Goetheanum Schrift Deutlich" pitchFamily="34" charset="0"/>
+                <a:ea typeface="Goetheanum Schrift Deutlich" pitchFamily="34" charset="-122"/>
+                <a:cs typeface="Goetheanum Schrift Deutlich" pitchFamily="34" charset="-120"/>
+              </a:rPr>
+              <a:t>Folientitel in Deutlich 26</a:t>
             </a:r>
             <a:endParaRPr lang="en-US" sz="2600" dirty="0"/>
           </a:p>
@@ -9838,7 +11486,7 @@
       </p:sp>
       <p:sp>
         <p:nvSpPr>
-          <p:cNvPr id="5" name="Text 2"/>
+          <p:cNvPr id="4" name="Text 2"/>
           <p:cNvSpPr/>
           <p:nvPr/>
         </p:nvSpPr>
@@ -9900,7 +11548,7 @@
       </p:sp>
       <p:sp>
         <p:nvSpPr>
-          <p:cNvPr id="6" name="Text 3"/>
+          <p:cNvPr id="5" name="Text 3"/>
           <p:cNvSpPr/>
           <p:nvPr/>
         </p:nvSpPr>
@@ -10060,7 +11708,7 @@
       </p:sp>
       <p:sp>
         <p:nvSpPr>
-          <p:cNvPr id="7" name="Shape 4"/>
+          <p:cNvPr id="6" name="Shape 4"/>
           <p:cNvSpPr/>
           <p:nvPr/>
         </p:nvSpPr>
@@ -10082,7 +11730,7 @@
       </p:sp>
       <p:sp>
         <p:nvSpPr>
-          <p:cNvPr id="8" name="Text 5"/>
+          <p:cNvPr id="7" name="Text 5"/>
           <p:cNvSpPr/>
           <p:nvPr/>
         </p:nvSpPr>
@@ -10187,40 +11835,49 @@
       </p:sp>
       <p:sp>
         <p:nvSpPr>
-          <p:cNvPr id="9" name="Text 6"/>
-          <p:cNvSpPr/>
-          <p:nvPr/>
-        </p:nvSpPr>
-        <p:spPr>
-          <a:xfrm>
-            <a:off x="4654296" y="6995160"/>
-            <a:ext cx="5486400" cy="274320"/>
-          </a:xfrm>
-          <a:prstGeom prst="rect">
-            <a:avLst/>
-          </a:prstGeom>
-          <a:noFill/>
-          <a:ln/>
-        </p:spPr>
-        <p:txBody>
-          <a:bodyPr wrap="square" lIns="0" tIns="0" rIns="0" bIns="0" rtlCol="0" anchor="ctr"/>
-          <a:lstStyle/>
-          <a:p>
-            <a:pPr algn="r" indent="0" marL="0">
-              <a:buNone/>
-            </a:pPr>
-            <a:r>
-              <a:rPr lang="en-US" sz="900" dirty="0">
+          <p:cNvPr id="25" name="Slide Number Placeholder 0"/>
+          <p:cNvSpPr>
+            <a:spLocks noGrp="1"/>
+          </p:cNvSpPr>
+          <p:nvPr>
+            <p:ph type="sldNum" sz="quarter" idx="4294967295"/>
+          </p:nvPr>
+        </p:nvSpPr>
+        <p:spPr>
+          <a:xfrm>
+            <a:off x="9747504" y="6995160"/>
+            <a:ext cx="393192" cy="274320"/>
+          </a:xfrm>
+          <a:prstGeom prst="rect">
+            <a:avLst/>
+          </a:prstGeom>
+          <a:extLst>
+            <a:ext uri="{C572A759-6A51-4108-AA02-DFA0A04FC94B}">
+              <ma14:wrappingTextBoxFlag xmlns:ma14="http://schemas.microsoft.com/office/mac/drawingml/2011/main" val="0"/>
+            </a:ext>
+          </a:extLst>
+        </p:spPr>
+        <p:txBody>
+          <a:bodyPr anchor="ctr"/>
+          <a:lstStyle>
+            <a:lvl1pPr>
+              <a:defRPr sz="900">
                 <a:solidFill>
                   <a:srgbClr val="6B7480"/>
                 </a:solidFill>
-                <a:latin typeface="Goetheanum Schrift Klar" pitchFamily="34" charset="0"/>
-                <a:ea typeface="Goetheanum Schrift Klar" pitchFamily="34" charset="-122"/>
-                <a:cs typeface="Goetheanum Schrift Klar" pitchFamily="34" charset="-120"/>
-              </a:rPr>
-              <a:t>Titel der Präsentation · 00.00.2026 · 6</a:t>
-            </a:r>
-            <a:endParaRPr lang="en-US" sz="900" dirty="0"/>
+                <a:latin typeface="Goetheanum Schrift Klar"/>
+                <a:ea typeface="Goetheanum Schrift Klar"/>
+                <a:cs typeface="Goetheanum Schrift Klar"/>
+              </a:defRPr>
+            </a:lvl1pPr>
+          </a:lstStyle>
+          <a:p>
+            <a:pPr algn="l"/>
+            <a:fld id="{F7021451-1387-4CA6-816F-3879F97B5CBC}" type="slidenum">
+              <a:rPr b="0" lang="en-US"/>
+              <a:t>6</a:t>
+            </a:fld>
+            <a:endParaRPr lang="en-US"/>
           </a:p>
         </p:txBody>
       </p:sp>
@@ -10235,13 +11892,6 @@
 <file path=ppt/slides/slide7.xml><?xml version="1.0" encoding="utf-8"?>
 <p:sld xmlns:a="http://schemas.openxmlformats.org/drawingml/2006/main" xmlns:r="http://schemas.openxmlformats.org/officeDocument/2006/relationships" xmlns:p="http://schemas.openxmlformats.org/presentationml/2006/main">
   <p:cSld name="Slide 7">
-    <p:bg>
-      <p:bgPr>
-        <a:solidFill>
-          <a:srgbClr val="FFFFFF"/>
-        </a:solidFill>
-      </p:bgPr>
-    </p:bg>
     <p:spTree>
       <p:nvGrpSpPr>
         <p:cNvPr id="1" name=""/>
@@ -10256,35 +11906,13 @@
           <a:chExt cx="0" cy="0"/>
         </a:xfrm>
       </p:grpSpPr>
-      <p:pic>
-        <p:nvPicPr>
-          <p:cNvPr id="2" name="Image 0" descr="logo-goetheanum-blue.png">    </p:cNvPr>
-          <p:cNvPicPr>
-            <a:picLocks noChangeAspect="1"/>
-          </p:cNvPicPr>
-          <p:nvPr/>
-        </p:nvPicPr>
-        <p:blipFill>
-          <a:blip r:embed="rId1"/>
-          <a:stretch>
-            <a:fillRect/>
-          </a:stretch>
-        </p:blipFill>
-        <p:spPr>
-          <a:xfrm>
-            <a:off x="548640" y="502920"/>
-            <a:ext cx="1088402" cy="182880"/>
-          </a:xfrm>
-          <a:prstGeom prst="rect">
-            <a:avLst/>
-          </a:prstGeom>
-        </p:spPr>
-      </p:pic>
-      <p:sp>
-        <p:nvSpPr>
-          <p:cNvPr id="3" name="Text 0"/>
-          <p:cNvSpPr/>
-          <p:nvPr/>
+      <p:sp>
+        <p:nvSpPr>
+          <p:cNvPr id="2" name="Text 1"/>
+          <p:cNvSpPr/>
+          <p:nvPr>
+            <p:ph idx="102" type="body" hasCustomPrompt="1"/>
+          </p:nvPr>
         </p:nvSpPr>
         <p:spPr>
           <a:xfrm>
@@ -10298,7 +11926,7 @@
           <a:ln/>
         </p:spPr>
         <p:txBody>
-          <a:bodyPr wrap="square" lIns="0" tIns="0" rIns="0" bIns="0" rtlCol="0" anchor="ctr"/>
+          <a:bodyPr wrap="square" lIns="0" tIns="0" rIns="0" bIns="0" rtlCol="0"/>
           <a:lstStyle/>
           <a:p>
             <a:pPr indent="0" marL="0">
@@ -10321,9 +11949,11 @@
       </p:sp>
       <p:sp>
         <p:nvSpPr>
-          <p:cNvPr id="4" name="Text 1"/>
-          <p:cNvSpPr/>
-          <p:nvPr/>
+          <p:cNvPr id="3" name="Text 1"/>
+          <p:cNvSpPr/>
+          <p:nvPr>
+            <p:ph idx="103" type="title" hasCustomPrompt="1"/>
+          </p:nvPr>
         </p:nvSpPr>
         <p:spPr>
           <a:xfrm>
@@ -10337,6 +11967,45 @@
           <a:ln/>
         </p:spPr>
         <p:txBody>
+          <a:bodyPr wrap="square" lIns="0" tIns="0" rIns="0" bIns="0" rtlCol="0"/>
+          <a:lstStyle/>
+          <a:p>
+            <a:pPr indent="0" marL="0">
+              <a:buNone/>
+            </a:pPr>
+            <a:r>
+              <a:rPr lang="en-US" sz="2600" dirty="0">
+                <a:solidFill>
+                  <a:srgbClr val="1A1A1A"/>
+                </a:solidFill>
+                <a:latin typeface="Goetheanum Schrift Deutlich" pitchFamily="34" charset="0"/>
+                <a:ea typeface="Goetheanum Schrift Deutlich" pitchFamily="34" charset="-122"/>
+                <a:cs typeface="Goetheanum Schrift Deutlich" pitchFamily="34" charset="-120"/>
+              </a:rPr>
+              <a:t>Zwei Spalten, ein Gedanke</a:t>
+            </a:r>
+            <a:endParaRPr lang="en-US" sz="2600" dirty="0"/>
+          </a:p>
+        </p:txBody>
+      </p:sp>
+      <p:sp>
+        <p:nvSpPr>
+          <p:cNvPr id="4" name="Text 2"/>
+          <p:cNvSpPr/>
+          <p:nvPr/>
+        </p:nvSpPr>
+        <p:spPr>
+          <a:xfrm>
+            <a:off x="548640" y="2560320"/>
+            <a:ext cx="4206240" cy="320040"/>
+          </a:xfrm>
+          <a:prstGeom prst="rect">
+            <a:avLst/>
+          </a:prstGeom>
+          <a:noFill/>
+          <a:ln/>
+        </p:spPr>
+        <p:txBody>
           <a:bodyPr wrap="square" lIns="0" tIns="0" rIns="0" bIns="0" rtlCol="0" anchor="ctr"/>
           <a:lstStyle/>
           <a:p>
@@ -10344,7 +12013,49 @@
               <a:buNone/>
             </a:pPr>
             <a:r>
-              <a:rPr lang="en-US" sz="2600" dirty="0">
+              <a:rPr lang="en-US" sz="1300" dirty="0">
+                <a:solidFill>
+                  <a:srgbClr val="005EB8"/>
+                </a:solidFill>
+                <a:latin typeface="Goetheanum Schrift Laut" pitchFamily="34" charset="0"/>
+                <a:ea typeface="Goetheanum Schrift Laut" pitchFamily="34" charset="-122"/>
+                <a:cs typeface="Goetheanum Schrift Laut" pitchFamily="34" charset="-120"/>
+              </a:rPr>
+              <a:t>Heute</a:t>
+            </a:r>
+            <a:endParaRPr lang="en-US" sz="1300" dirty="0"/>
+          </a:p>
+        </p:txBody>
+      </p:sp>
+      <p:sp>
+        <p:nvSpPr>
+          <p:cNvPr id="5" name="Text 3"/>
+          <p:cNvSpPr/>
+          <p:nvPr/>
+        </p:nvSpPr>
+        <p:spPr>
+          <a:xfrm>
+            <a:off x="548640" y="2971800"/>
+            <a:ext cx="4206240" cy="1371600"/>
+          </a:xfrm>
+          <a:prstGeom prst="rect">
+            <a:avLst/>
+          </a:prstGeom>
+          <a:noFill/>
+          <a:ln/>
+        </p:spPr>
+        <p:txBody>
+          <a:bodyPr wrap="square" lIns="0" tIns="0" rIns="0" bIns="0" rtlCol="0" anchor="ctr"/>
+          <a:lstStyle/>
+          <a:p>
+            <a:pPr indent="0" marL="0">
+              <a:lnSpc>
+                <a:spcPct val="130000"/>
+              </a:lnSpc>
+              <a:buNone/>
+            </a:pPr>
+            <a:r>
+              <a:rPr lang="en-US" sz="1300" dirty="0">
                 <a:solidFill>
                   <a:srgbClr val="1A1A1A"/>
                 </a:solidFill>
@@ -10352,21 +12063,61 @@
                 <a:ea typeface="Goetheanum Schrift Klar" pitchFamily="34" charset="-122"/>
                 <a:cs typeface="Goetheanum Schrift Klar" pitchFamily="34" charset="-120"/>
               </a:rPr>
-              <a:t>Zwei Spalten, ein Gedanke</a:t>
-            </a:r>
-            <a:endParaRPr lang="en-US" sz="2600" dirty="0"/>
-          </a:p>
-        </p:txBody>
-      </p:sp>
-      <p:sp>
-        <p:nvSpPr>
-          <p:cNvPr id="5" name="Text 2"/>
+              <a:t>Beschreibung des Ist-Zustands.</a:t>
+            </a:r>
+            <a:endParaRPr lang="en-US" sz="1300" dirty="0"/>
+          </a:p>
+          <a:p>
+            <a:pPr indent="0" marL="0">
+              <a:lnSpc>
+                <a:spcPct val="130000"/>
+              </a:lnSpc>
+              <a:buNone/>
+            </a:pPr>
+            <a:r>
+              <a:rPr lang="en-US" sz="1300" dirty="0">
+                <a:solidFill>
+                  <a:srgbClr val="1A1A1A"/>
+                </a:solidFill>
+                <a:latin typeface="Goetheanum Schrift Klar" pitchFamily="34" charset="0"/>
+                <a:ea typeface="Goetheanum Schrift Klar" pitchFamily="34" charset="-122"/>
+                <a:cs typeface="Goetheanum Schrift Klar" pitchFamily="34" charset="-120"/>
+              </a:rPr>
+              <a:t>Beide Spalten beginnen oben</a:t>
+            </a:r>
+            <a:endParaRPr lang="en-US" sz="1300" dirty="0"/>
+          </a:p>
+          <a:p>
+            <a:pPr indent="0" marL="0">
+              <a:lnSpc>
+                <a:spcPct val="130000"/>
+              </a:lnSpc>
+              <a:buNone/>
+            </a:pPr>
+            <a:r>
+              <a:rPr lang="en-US" sz="1300" dirty="0">
+                <a:solidFill>
+                  <a:srgbClr val="1A1A1A"/>
+                </a:solidFill>
+                <a:latin typeface="Goetheanum Schrift Klar" pitchFamily="34" charset="0"/>
+                <a:ea typeface="Goetheanum Schrift Klar" pitchFamily="34" charset="-122"/>
+                <a:cs typeface="Goetheanum Schrift Klar" pitchFamily="34" charset="-120"/>
+              </a:rPr>
+              <a:t>auf derselben Höhe.</a:t>
+            </a:r>
+            <a:endParaRPr lang="en-US" sz="1300" dirty="0"/>
+          </a:p>
+        </p:txBody>
+      </p:sp>
+      <p:sp>
+        <p:nvSpPr>
+          <p:cNvPr id="6" name="Text 4"/>
           <p:cNvSpPr/>
           <p:nvPr/>
         </p:nvSpPr>
         <p:spPr>
           <a:xfrm>
-            <a:off x="548640" y="2560320"/>
+            <a:off x="5577840" y="2560320"/>
             <a:ext cx="4206240" cy="320040"/>
           </a:xfrm>
           <a:prstGeom prst="rect">
@@ -10391,7 +12142,7 @@
                 <a:ea typeface="Goetheanum Schrift Laut" pitchFamily="34" charset="-122"/>
                 <a:cs typeface="Goetheanum Schrift Laut" pitchFamily="34" charset="-120"/>
               </a:rPr>
-              <a:t>Heute</a:t>
+              <a:t>Morgen</a:t>
             </a:r>
             <a:endParaRPr lang="en-US" sz="1300" dirty="0"/>
           </a:p>
@@ -10399,13 +12150,13 @@
       </p:sp>
       <p:sp>
         <p:nvSpPr>
-          <p:cNvPr id="6" name="Text 3"/>
+          <p:cNvPr id="7" name="Text 5"/>
           <p:cNvSpPr/>
           <p:nvPr/>
         </p:nvSpPr>
         <p:spPr>
           <a:xfrm>
-            <a:off x="548640" y="2971800"/>
+            <a:off x="5577840" y="2971800"/>
             <a:ext cx="4206240" cy="1371600"/>
           </a:xfrm>
           <a:prstGeom prst="rect">
@@ -10433,7 +12184,7 @@
                 <a:ea typeface="Goetheanum Schrift Klar" pitchFamily="34" charset="-122"/>
                 <a:cs typeface="Goetheanum Schrift Klar" pitchFamily="34" charset="-120"/>
               </a:rPr>
-              <a:t>Beschreibung des Ist-Zustands.</a:t>
+              <a:t>Beschreibung des Ziel-Zustands.</a:t>
             </a:r>
             <a:endParaRPr lang="en-US" sz="1300" dirty="0"/>
           </a:p>
@@ -10453,7 +12204,7 @@
                 <a:ea typeface="Goetheanum Schrift Klar" pitchFamily="34" charset="-122"/>
                 <a:cs typeface="Goetheanum Schrift Klar" pitchFamily="34" charset="-120"/>
               </a:rPr>
-              <a:t>Beide Spalten beginnen oben</a:t>
+              <a:t>Zwischentitel in Laut 13,</a:t>
             </a:r>
             <a:endParaRPr lang="en-US" sz="1300" dirty="0"/>
           </a:p>
@@ -10473,7 +12224,7 @@
                 <a:ea typeface="Goetheanum Schrift Klar" pitchFamily="34" charset="-122"/>
                 <a:cs typeface="Goetheanum Schrift Klar" pitchFamily="34" charset="-120"/>
               </a:rPr>
-              <a:t>auf derselben Höhe.</a:t>
+              <a:t>der Text in Klar 13.</a:t>
             </a:r>
             <a:endParaRPr lang="en-US" sz="1300" dirty="0"/>
           </a:p>
@@ -10481,128 +12232,7 @@
       </p:sp>
       <p:sp>
         <p:nvSpPr>
-          <p:cNvPr id="7" name="Text 4"/>
-          <p:cNvSpPr/>
-          <p:nvPr/>
-        </p:nvSpPr>
-        <p:spPr>
-          <a:xfrm>
-            <a:off x="5577840" y="2560320"/>
-            <a:ext cx="4206240" cy="320040"/>
-          </a:xfrm>
-          <a:prstGeom prst="rect">
-            <a:avLst/>
-          </a:prstGeom>
-          <a:noFill/>
-          <a:ln/>
-        </p:spPr>
-        <p:txBody>
-          <a:bodyPr wrap="square" lIns="0" tIns="0" rIns="0" bIns="0" rtlCol="0" anchor="ctr"/>
-          <a:lstStyle/>
-          <a:p>
-            <a:pPr indent="0" marL="0">
-              <a:buNone/>
-            </a:pPr>
-            <a:r>
-              <a:rPr lang="en-US" sz="1300" dirty="0">
-                <a:solidFill>
-                  <a:srgbClr val="005EB8"/>
-                </a:solidFill>
-                <a:latin typeface="Goetheanum Schrift Laut" pitchFamily="34" charset="0"/>
-                <a:ea typeface="Goetheanum Schrift Laut" pitchFamily="34" charset="-122"/>
-                <a:cs typeface="Goetheanum Schrift Laut" pitchFamily="34" charset="-120"/>
-              </a:rPr>
-              <a:t>Morgen</a:t>
-            </a:r>
-            <a:endParaRPr lang="en-US" sz="1300" dirty="0"/>
-          </a:p>
-        </p:txBody>
-      </p:sp>
-      <p:sp>
-        <p:nvSpPr>
-          <p:cNvPr id="8" name="Text 5"/>
-          <p:cNvSpPr/>
-          <p:nvPr/>
-        </p:nvSpPr>
-        <p:spPr>
-          <a:xfrm>
-            <a:off x="5577840" y="2971800"/>
-            <a:ext cx="4206240" cy="1371600"/>
-          </a:xfrm>
-          <a:prstGeom prst="rect">
-            <a:avLst/>
-          </a:prstGeom>
-          <a:noFill/>
-          <a:ln/>
-        </p:spPr>
-        <p:txBody>
-          <a:bodyPr wrap="square" lIns="0" tIns="0" rIns="0" bIns="0" rtlCol="0" anchor="ctr"/>
-          <a:lstStyle/>
-          <a:p>
-            <a:pPr indent="0" marL="0">
-              <a:lnSpc>
-                <a:spcPct val="130000"/>
-              </a:lnSpc>
-              <a:buNone/>
-            </a:pPr>
-            <a:r>
-              <a:rPr lang="en-US" sz="1300" dirty="0">
-                <a:solidFill>
-                  <a:srgbClr val="1A1A1A"/>
-                </a:solidFill>
-                <a:latin typeface="Goetheanum Schrift Klar" pitchFamily="34" charset="0"/>
-                <a:ea typeface="Goetheanum Schrift Klar" pitchFamily="34" charset="-122"/>
-                <a:cs typeface="Goetheanum Schrift Klar" pitchFamily="34" charset="-120"/>
-              </a:rPr>
-              <a:t>Beschreibung des Ziel-Zustands.</a:t>
-            </a:r>
-            <a:endParaRPr lang="en-US" sz="1300" dirty="0"/>
-          </a:p>
-          <a:p>
-            <a:pPr indent="0" marL="0">
-              <a:lnSpc>
-                <a:spcPct val="130000"/>
-              </a:lnSpc>
-              <a:buNone/>
-            </a:pPr>
-            <a:r>
-              <a:rPr lang="en-US" sz="1300" dirty="0">
-                <a:solidFill>
-                  <a:srgbClr val="1A1A1A"/>
-                </a:solidFill>
-                <a:latin typeface="Goetheanum Schrift Klar" pitchFamily="34" charset="0"/>
-                <a:ea typeface="Goetheanum Schrift Klar" pitchFamily="34" charset="-122"/>
-                <a:cs typeface="Goetheanum Schrift Klar" pitchFamily="34" charset="-120"/>
-              </a:rPr>
-              <a:t>Zwischentitel in Laut 13,</a:t>
-            </a:r>
-            <a:endParaRPr lang="en-US" sz="1300" dirty="0"/>
-          </a:p>
-          <a:p>
-            <a:pPr indent="0" marL="0">
-              <a:lnSpc>
-                <a:spcPct val="130000"/>
-              </a:lnSpc>
-              <a:buNone/>
-            </a:pPr>
-            <a:r>
-              <a:rPr lang="en-US" sz="1300" dirty="0">
-                <a:solidFill>
-                  <a:srgbClr val="1A1A1A"/>
-                </a:solidFill>
-                <a:latin typeface="Goetheanum Schrift Klar" pitchFamily="34" charset="0"/>
-                <a:ea typeface="Goetheanum Schrift Klar" pitchFamily="34" charset="-122"/>
-                <a:cs typeface="Goetheanum Schrift Klar" pitchFamily="34" charset="-120"/>
-              </a:rPr>
-              <a:t>der Text in Klar 13.</a:t>
-            </a:r>
-            <a:endParaRPr lang="en-US" sz="1300" dirty="0"/>
-          </a:p>
-        </p:txBody>
-      </p:sp>
-      <p:sp>
-        <p:nvSpPr>
-          <p:cNvPr id="9" name="Text 6"/>
+          <p:cNvPr id="8" name="Text 6"/>
           <p:cNvSpPr/>
           <p:nvPr/>
         </p:nvSpPr>
@@ -10641,40 +12271,49 @@
       </p:sp>
       <p:sp>
         <p:nvSpPr>
-          <p:cNvPr id="10" name="Text 7"/>
-          <p:cNvSpPr/>
-          <p:nvPr/>
-        </p:nvSpPr>
-        <p:spPr>
-          <a:xfrm>
-            <a:off x="4654296" y="6995160"/>
-            <a:ext cx="5486400" cy="274320"/>
-          </a:xfrm>
-          <a:prstGeom prst="rect">
-            <a:avLst/>
-          </a:prstGeom>
-          <a:noFill/>
-          <a:ln/>
-        </p:spPr>
-        <p:txBody>
-          <a:bodyPr wrap="square" lIns="0" tIns="0" rIns="0" bIns="0" rtlCol="0" anchor="ctr"/>
-          <a:lstStyle/>
-          <a:p>
-            <a:pPr algn="r" indent="0" marL="0">
-              <a:buNone/>
-            </a:pPr>
-            <a:r>
-              <a:rPr lang="en-US" sz="900" dirty="0">
+          <p:cNvPr id="25" name="Slide Number Placeholder 0"/>
+          <p:cNvSpPr>
+            <a:spLocks noGrp="1"/>
+          </p:cNvSpPr>
+          <p:nvPr>
+            <p:ph type="sldNum" sz="quarter" idx="4294967295"/>
+          </p:nvPr>
+        </p:nvSpPr>
+        <p:spPr>
+          <a:xfrm>
+            <a:off x="9747504" y="6995160"/>
+            <a:ext cx="393192" cy="274320"/>
+          </a:xfrm>
+          <a:prstGeom prst="rect">
+            <a:avLst/>
+          </a:prstGeom>
+          <a:extLst>
+            <a:ext uri="{C572A759-6A51-4108-AA02-DFA0A04FC94B}">
+              <ma14:wrappingTextBoxFlag xmlns:ma14="http://schemas.microsoft.com/office/mac/drawingml/2011/main" val="0"/>
+            </a:ext>
+          </a:extLst>
+        </p:spPr>
+        <p:txBody>
+          <a:bodyPr anchor="ctr"/>
+          <a:lstStyle>
+            <a:lvl1pPr>
+              <a:defRPr sz="900">
                 <a:solidFill>
                   <a:srgbClr val="6B7480"/>
                 </a:solidFill>
-                <a:latin typeface="Goetheanum Schrift Klar" pitchFamily="34" charset="0"/>
-                <a:ea typeface="Goetheanum Schrift Klar" pitchFamily="34" charset="-122"/>
-                <a:cs typeface="Goetheanum Schrift Klar" pitchFamily="34" charset="-120"/>
-              </a:rPr>
-              <a:t>Titel der Präsentation · 00.00.2026 · 7</a:t>
-            </a:r>
-            <a:endParaRPr lang="en-US" sz="900" dirty="0"/>
+                <a:latin typeface="Goetheanum Schrift Klar"/>
+                <a:ea typeface="Goetheanum Schrift Klar"/>
+                <a:cs typeface="Goetheanum Schrift Klar"/>
+              </a:defRPr>
+            </a:lvl1pPr>
+          </a:lstStyle>
+          <a:p>
+            <a:pPr algn="l"/>
+            <a:fld id="{F7021451-1387-4CA6-816F-3879F97B5CBC}" type="slidenum">
+              <a:rPr b="0" lang="en-US"/>
+              <a:t>7</a:t>
+            </a:fld>
+            <a:endParaRPr lang="en-US"/>
           </a:p>
         </p:txBody>
       </p:sp>
@@ -10705,11 +12344,13 @@
       </p:grpSpPr>
       <p:pic>
         <p:nvPicPr>
-          <p:cNvPr id="2" name="Image 0" descr="foto-bau-voll.jpg">    </p:cNvPr>
+          <p:cNvPr id="2" name="Image 0" descr="Das Goetheanum in Dornach: die Westfassade mit dem grossen Fenster, gesehen durch blühenden Lavendel"/>
           <p:cNvPicPr>
             <a:picLocks noChangeAspect="1"/>
           </p:cNvPicPr>
-          <p:nvPr/>
+          <p:nvPr>
+            <p:ph idx="100" hasCustomPrompt="1"/>
+          </p:nvPr>
         </p:nvPicPr>
         <p:blipFill>
           <a:blip r:embed="rId1"/>
@@ -10731,7 +12372,9 @@
         <p:nvSpPr>
           <p:cNvPr id="3" name="Text 0"/>
           <p:cNvSpPr/>
-          <p:nvPr/>
+          <p:nvPr>
+            <p:ph idx="101" type="body" hasCustomPrompt="1"/>
+          </p:nvPr>
         </p:nvSpPr>
         <p:spPr>
           <a:xfrm>
@@ -10760,7 +12403,7 @@
                 <a:ea typeface="Goetheanum Schrift Klar" pitchFamily="34" charset="-122"/>
                 <a:cs typeface="Goetheanum Schrift Klar" pitchFamily="34" charset="-120"/>
               </a:rPr>
-              <a:t>Bildlegende: Ort, Anlass, Fotografie</a:t>
+              <a:t>Goetheanum, Westfassade · Foto: Goetheanum</a:t>
             </a:r>
             <a:endParaRPr lang="en-US" sz="900" dirty="0"/>
           </a:p>
@@ -10768,40 +12411,49 @@
       </p:sp>
       <p:sp>
         <p:nvSpPr>
-          <p:cNvPr id="4" name="Text 1"/>
-          <p:cNvSpPr/>
-          <p:nvPr/>
-        </p:nvSpPr>
-        <p:spPr>
-          <a:xfrm>
-            <a:off x="4654296" y="6995160"/>
-            <a:ext cx="5486400" cy="274320"/>
-          </a:xfrm>
-          <a:prstGeom prst="rect">
-            <a:avLst/>
-          </a:prstGeom>
-          <a:noFill/>
-          <a:ln/>
-        </p:spPr>
-        <p:txBody>
-          <a:bodyPr wrap="square" lIns="0" tIns="0" rIns="0" bIns="0" rtlCol="0" anchor="ctr"/>
-          <a:lstStyle/>
-          <a:p>
-            <a:pPr algn="r" indent="0" marL="0">
-              <a:buNone/>
-            </a:pPr>
-            <a:r>
-              <a:rPr lang="en-US" sz="900" dirty="0">
+          <p:cNvPr id="25" name="Slide Number Placeholder 0"/>
+          <p:cNvSpPr>
+            <a:spLocks noGrp="1"/>
+          </p:cNvSpPr>
+          <p:nvPr>
+            <p:ph type="sldNum" sz="quarter" idx="4294967295"/>
+          </p:nvPr>
+        </p:nvSpPr>
+        <p:spPr>
+          <a:xfrm>
+            <a:off x="9747504" y="6995160"/>
+            <a:ext cx="393192" cy="274320"/>
+          </a:xfrm>
+          <a:prstGeom prst="rect">
+            <a:avLst/>
+          </a:prstGeom>
+          <a:extLst>
+            <a:ext uri="{C572A759-6A51-4108-AA02-DFA0A04FC94B}">
+              <ma14:wrappingTextBoxFlag xmlns:ma14="http://schemas.microsoft.com/office/mac/drawingml/2011/main" val="0"/>
+            </a:ext>
+          </a:extLst>
+        </p:spPr>
+        <p:txBody>
+          <a:bodyPr anchor="ctr"/>
+          <a:lstStyle>
+            <a:lvl1pPr>
+              <a:defRPr sz="900">
                 <a:solidFill>
                   <a:srgbClr val="FFFFFF"/>
                 </a:solidFill>
-                <a:latin typeface="Goetheanum Schrift Klar" pitchFamily="34" charset="0"/>
-                <a:ea typeface="Goetheanum Schrift Klar" pitchFamily="34" charset="-122"/>
-                <a:cs typeface="Goetheanum Schrift Klar" pitchFamily="34" charset="-120"/>
-              </a:rPr>
-              <a:t>Titel der Präsentation · 00.00.2026 · 8</a:t>
-            </a:r>
-            <a:endParaRPr lang="en-US" sz="900" dirty="0"/>
+                <a:latin typeface="Goetheanum Schrift Klar"/>
+                <a:ea typeface="Goetheanum Schrift Klar"/>
+                <a:cs typeface="Goetheanum Schrift Klar"/>
+              </a:defRPr>
+            </a:lvl1pPr>
+          </a:lstStyle>
+          <a:p>
+            <a:pPr algn="l"/>
+            <a:fld id="{F7021451-1387-4CA6-816F-3879F97B5CBC}" type="slidenum">
+              <a:rPr b="0" lang="en-US"/>
+              <a:t>8</a:t>
+            </a:fld>
+            <a:endParaRPr lang="en-US"/>
           </a:p>
         </p:txBody>
       </p:sp>
@@ -10816,13 +12468,6 @@
 <file path=ppt/slides/slide9.xml><?xml version="1.0" encoding="utf-8"?>
 <p:sld xmlns:a="http://schemas.openxmlformats.org/drawingml/2006/main" xmlns:r="http://schemas.openxmlformats.org/officeDocument/2006/relationships" xmlns:p="http://schemas.openxmlformats.org/presentationml/2006/main">
   <p:cSld name="Slide 9">
-    <p:bg>
-      <p:bgPr>
-        <a:solidFill>
-          <a:srgbClr val="FFFFFF"/>
-        </a:solidFill>
-      </p:bgPr>
-    </p:bg>
     <p:spTree>
       <p:nvGrpSpPr>
         <p:cNvPr id="1" name=""/>
@@ -10839,11 +12484,13 @@
       </p:grpSpPr>
       <p:pic>
         <p:nvPicPr>
-          <p:cNvPr id="2" name="Image 0" descr="logo-goetheanum-blue.png">    </p:cNvPr>
+          <p:cNvPr id="2" name="Image 0" descr="Eurythmie-Aufführung: eine Gruppe in fliessenden Gewändern bewegt sich in blauem Bühnenlicht"/>
           <p:cNvPicPr>
             <a:picLocks noChangeAspect="1"/>
           </p:cNvPicPr>
-          <p:nvPr/>
+          <p:nvPr>
+            <p:ph idx="101" hasCustomPrompt="1"/>
+          </p:nvPr>
         </p:nvPicPr>
         <p:blipFill>
           <a:blip r:embed="rId1"/>
@@ -10853,30 +12500,6 @@
         </p:blipFill>
         <p:spPr>
           <a:xfrm>
-            <a:off x="548640" y="502920"/>
-            <a:ext cx="1088402" cy="182880"/>
-          </a:xfrm>
-          <a:prstGeom prst="rect">
-            <a:avLst/>
-          </a:prstGeom>
-        </p:spPr>
-      </p:pic>
-      <p:pic>
-        <p:nvPicPr>
-          <p:cNvPr id="3" name="Image 1" descr="foto-buehne-halb.jpg">    </p:cNvPr>
-          <p:cNvPicPr>
-            <a:picLocks noChangeAspect="1"/>
-          </p:cNvPicPr>
-          <p:nvPr/>
-        </p:nvPicPr>
-        <p:blipFill>
-          <a:blip r:embed="rId2"/>
-          <a:stretch>
-            <a:fillRect/>
-          </a:stretch>
-        </p:blipFill>
-        <p:spPr>
-          <a:xfrm>
             <a:off x="5669280" y="0"/>
             <a:ext cx="5020056" cy="7562088"/>
           </a:xfrm>
@@ -10887,9 +12510,11 @@
       </p:pic>
       <p:sp>
         <p:nvSpPr>
-          <p:cNvPr id="4" name="Text 0"/>
-          <p:cNvSpPr/>
-          <p:nvPr/>
+          <p:cNvPr id="3" name="Text 0"/>
+          <p:cNvSpPr/>
+          <p:nvPr>
+            <p:ph idx="102" type="body" hasCustomPrompt="1"/>
+          </p:nvPr>
         </p:nvSpPr>
         <p:spPr>
           <a:xfrm>
@@ -10903,7 +12528,7 @@
           <a:ln/>
         </p:spPr>
         <p:txBody>
-          <a:bodyPr wrap="square" lIns="0" tIns="0" rIns="0" bIns="0" rtlCol="0" anchor="ctr"/>
+          <a:bodyPr wrap="square" lIns="0" tIns="0" rIns="0" bIns="0" rtlCol="0"/>
           <a:lstStyle/>
           <a:p>
             <a:pPr indent="0" marL="0">
@@ -10926,9 +12551,11 @@
       </p:sp>
       <p:sp>
         <p:nvSpPr>
-          <p:cNvPr id="5" name="Text 1"/>
-          <p:cNvSpPr/>
-          <p:nvPr/>
+          <p:cNvPr id="4" name="Text 0"/>
+          <p:cNvSpPr/>
+          <p:nvPr>
+            <p:ph idx="103" type="title" hasCustomPrompt="1"/>
+          </p:nvPr>
         </p:nvSpPr>
         <p:spPr>
           <a:xfrm>
@@ -10942,7 +12569,7 @@
           <a:ln/>
         </p:spPr>
         <p:txBody>
-          <a:bodyPr wrap="square" lIns="0" tIns="0" rIns="0" bIns="0" rtlCol="0" anchor="ctr"/>
+          <a:bodyPr wrap="square" lIns="0" tIns="0" rIns="0" bIns="0" rtlCol="0"/>
           <a:lstStyle/>
           <a:p>
             <a:pPr indent="0" marL="0">
@@ -10956,23 +12583,87 @@
                 <a:solidFill>
                   <a:srgbClr val="1A1A1A"/>
                 </a:solidFill>
+                <a:latin typeface="Goetheanum Schrift Deutlich" pitchFamily="34" charset="0"/>
+                <a:ea typeface="Goetheanum Schrift Deutlich" pitchFamily="34" charset="-122"/>
+                <a:cs typeface="Goetheanum Schrift Deutlich" pitchFamily="34" charset="-120"/>
+              </a:rPr>
+              <a:t>Bild und Text,</a:t>
+            </a:r>
+            <a:endParaRPr lang="en-US" sz="2600" dirty="0"/>
+          </a:p>
+          <a:p>
+            <a:pPr indent="0" marL="0">
+              <a:lnSpc>
+                <a:spcPct val="105000"/>
+              </a:lnSpc>
+              <a:buNone/>
+            </a:pPr>
+            <a:r>
+              <a:rPr lang="en-US" sz="2600" dirty="0">
+                <a:solidFill>
+                  <a:srgbClr val="1A1A1A"/>
+                </a:solidFill>
+                <a:latin typeface="Goetheanum Schrift Deutlich" pitchFamily="34" charset="0"/>
+                <a:ea typeface="Goetheanum Schrift Deutlich" pitchFamily="34" charset="-122"/>
+                <a:cs typeface="Goetheanum Schrift Deutlich" pitchFamily="34" charset="-120"/>
+              </a:rPr>
+              <a:t>halb und halb</a:t>
+            </a:r>
+            <a:endParaRPr lang="en-US" sz="2600" dirty="0"/>
+          </a:p>
+        </p:txBody>
+      </p:sp>
+      <p:sp>
+        <p:nvSpPr>
+          <p:cNvPr id="5" name="Text 0"/>
+          <p:cNvSpPr/>
+          <p:nvPr>
+            <p:ph idx="104" type="body" hasCustomPrompt="1"/>
+          </p:nvPr>
+        </p:nvSpPr>
+        <p:spPr>
+          <a:xfrm>
+            <a:off x="548640" y="2834640"/>
+            <a:ext cx="4480560" cy="3200400"/>
+          </a:xfrm>
+          <a:prstGeom prst="rect">
+            <a:avLst/>
+          </a:prstGeom>
+          <a:noFill/>
+          <a:ln/>
+        </p:spPr>
+        <p:txBody>
+          <a:bodyPr wrap="square" lIns="0" tIns="0" rIns="0" bIns="0" rtlCol="0" anchor="t"/>
+          <a:lstStyle/>
+          <a:p>
+            <a:pPr indent="0" marL="0">
+              <a:lnSpc>
+                <a:spcPct val="130000"/>
+              </a:lnSpc>
+              <a:buNone/>
+            </a:pPr>
+            <a:r>
+              <a:rPr lang="en-US" sz="1300" dirty="0">
+                <a:solidFill>
+                  <a:srgbClr val="1A1A1A"/>
+                </a:solidFill>
                 <a:latin typeface="Goetheanum Schrift Klar" pitchFamily="34" charset="0"/>
                 <a:ea typeface="Goetheanum Schrift Klar" pitchFamily="34" charset="-122"/>
                 <a:cs typeface="Goetheanum Schrift Klar" pitchFamily="34" charset="-120"/>
               </a:rPr>
-              <a:t>Bild und Text,</a:t>
-            </a:r>
-            <a:endParaRPr lang="en-US" sz="2600" dirty="0"/>
+              <a:t>Das Bild läuft randlos bis zur Kante.</a:t>
+            </a:r>
+            <a:endParaRPr lang="en-US" sz="1300" dirty="0"/>
           </a:p>
           <a:p>
             <a:pPr indent="0" marL="0">
               <a:lnSpc>
-                <a:spcPct val="105000"/>
+                <a:spcPct val="130000"/>
               </a:lnSpc>
               <a:buNone/>
             </a:pPr>
             <a:r>
-              <a:rPr lang="en-US" sz="2600" dirty="0">
+              <a:rPr lang="en-US" sz="1300" dirty="0">
                 <a:solidFill>
                   <a:srgbClr val="1A1A1A"/>
                 </a:solidFill>
@@ -10980,32 +12671,10 @@
                 <a:ea typeface="Goetheanum Schrift Klar" pitchFamily="34" charset="-122"/>
                 <a:cs typeface="Goetheanum Schrift Klar" pitchFamily="34" charset="-120"/>
               </a:rPr>
-              <a:t>halb und halb</a:t>
-            </a:r>
-            <a:endParaRPr lang="en-US" sz="2600" dirty="0"/>
-          </a:p>
-        </p:txBody>
-      </p:sp>
-      <p:sp>
-        <p:nvSpPr>
-          <p:cNvPr id="6" name="Text 2"/>
-          <p:cNvSpPr/>
-          <p:nvPr/>
-        </p:nvSpPr>
-        <p:spPr>
-          <a:xfrm>
-            <a:off x="548640" y="2834640"/>
-            <a:ext cx="4480560" cy="1188720"/>
-          </a:xfrm>
-          <a:prstGeom prst="rect">
-            <a:avLst/>
-          </a:prstGeom>
-          <a:noFill/>
-          <a:ln/>
-        </p:spPr>
-        <p:txBody>
-          <a:bodyPr wrap="square" lIns="0" tIns="0" rIns="0" bIns="0" rtlCol="0" anchor="ctr"/>
-          <a:lstStyle/>
+              <a:t>Der Text behält seine Spaltenbreite</a:t>
+            </a:r>
+            <a:endParaRPr lang="en-US" sz="1300" dirty="0"/>
+          </a:p>
           <a:p>
             <a:pPr indent="0" marL="0">
               <a:lnSpc>
@@ -11022,86 +12691,48 @@
                 <a:ea typeface="Goetheanum Schrift Klar" pitchFamily="34" charset="-122"/>
                 <a:cs typeface="Goetheanum Schrift Klar" pitchFamily="34" charset="-120"/>
               </a:rPr>
-              <a:t>Das Bild läuft randlos bis zur Kante.</a:t>
+              <a:t>und seine Ruhe.</a:t>
             </a:r>
             <a:endParaRPr lang="en-US" sz="1300" dirty="0"/>
           </a:p>
-          <a:p>
-            <a:pPr indent="0" marL="0">
-              <a:lnSpc>
-                <a:spcPct val="130000"/>
-              </a:lnSpc>
-              <a:buNone/>
-            </a:pPr>
-            <a:r>
-              <a:rPr lang="en-US" sz="1300" dirty="0">
-                <a:solidFill>
-                  <a:srgbClr val="1A1A1A"/>
+        </p:txBody>
+      </p:sp>
+      <p:sp>
+        <p:nvSpPr>
+          <p:cNvPr id="6" name="Text 0"/>
+          <p:cNvSpPr/>
+          <p:nvPr>
+            <p:ph idx="105" type="body" hasCustomPrompt="1"/>
+          </p:nvPr>
+        </p:nvSpPr>
+        <p:spPr>
+          <a:xfrm>
+            <a:off x="548640" y="6995160"/>
+            <a:ext cx="4114800" cy="274320"/>
+          </a:xfrm>
+          <a:prstGeom prst="rect">
+            <a:avLst/>
+          </a:prstGeom>
+          <a:noFill/>
+          <a:ln/>
+        </p:spPr>
+        <p:txBody>
+          <a:bodyPr wrap="square" lIns="0" tIns="0" rIns="0" bIns="0" rtlCol="0" anchor="ctr"/>
+          <a:lstStyle/>
+          <a:p>
+            <a:pPr indent="0" marL="0">
+              <a:buNone/>
+            </a:pPr>
+            <a:r>
+              <a:rPr lang="en-US" sz="900" dirty="0">
+                <a:solidFill>
+                  <a:srgbClr val="6B7480"/>
                 </a:solidFill>
                 <a:latin typeface="Goetheanum Schrift Klar" pitchFamily="34" charset="0"/>
                 <a:ea typeface="Goetheanum Schrift Klar" pitchFamily="34" charset="-122"/>
                 <a:cs typeface="Goetheanum Schrift Klar" pitchFamily="34" charset="-120"/>
               </a:rPr>
-              <a:t>Der Text behält seine Spaltenbreite</a:t>
-            </a:r>
-            <a:endParaRPr lang="en-US" sz="1300" dirty="0"/>
-          </a:p>
-          <a:p>
-            <a:pPr indent="0" marL="0">
-              <a:lnSpc>
-                <a:spcPct val="130000"/>
-              </a:lnSpc>
-              <a:buNone/>
-            </a:pPr>
-            <a:r>
-              <a:rPr lang="en-US" sz="1300" dirty="0">
-                <a:solidFill>
-                  <a:srgbClr val="1A1A1A"/>
-                </a:solidFill>
-                <a:latin typeface="Goetheanum Schrift Klar" pitchFamily="34" charset="0"/>
-                <a:ea typeface="Goetheanum Schrift Klar" pitchFamily="34" charset="-122"/>
-                <a:cs typeface="Goetheanum Schrift Klar" pitchFamily="34" charset="-120"/>
-              </a:rPr>
-              <a:t>und seine Ruhe.</a:t>
-            </a:r>
-            <a:endParaRPr lang="en-US" sz="1300" dirty="0"/>
-          </a:p>
-        </p:txBody>
-      </p:sp>
-      <p:sp>
-        <p:nvSpPr>
-          <p:cNvPr id="7" name="Text 3"/>
-          <p:cNvSpPr/>
-          <p:nvPr/>
-        </p:nvSpPr>
-        <p:spPr>
-          <a:xfrm>
-            <a:off x="548640" y="6995160"/>
-            <a:ext cx="4114800" cy="274320"/>
-          </a:xfrm>
-          <a:prstGeom prst="rect">
-            <a:avLst/>
-          </a:prstGeom>
-          <a:noFill/>
-          <a:ln/>
-        </p:spPr>
-        <p:txBody>
-          <a:bodyPr wrap="square" lIns="0" tIns="0" rIns="0" bIns="0" rtlCol="0" anchor="ctr"/>
-          <a:lstStyle/>
-          <a:p>
-            <a:pPr indent="0" marL="0">
-              <a:buNone/>
-            </a:pPr>
-            <a:r>
-              <a:rPr lang="en-US" sz="900" dirty="0">
-                <a:solidFill>
-                  <a:srgbClr val="6B7480"/>
-                </a:solidFill>
-                <a:latin typeface="Goetheanum Schrift Klar" pitchFamily="34" charset="0"/>
-                <a:ea typeface="Goetheanum Schrift Klar" pitchFamily="34" charset="-122"/>
-                <a:cs typeface="Goetheanum Schrift Klar" pitchFamily="34" charset="-120"/>
-              </a:rPr>
-              <a:t>Bildlegende: Ort, Anlass, Fotografie</a:t>
+              <a:t>Eurythmie-Abschlusstreffen 2025 · Foto: Xue Li</a:t>
             </a:r>
             <a:endParaRPr lang="en-US" sz="900" dirty="0"/>
           </a:p>
@@ -11126,39 +12757,39 @@
         <a:sysClr val="window" lastClr="FFFFFF"/>
       </a:lt1>
       <a:dk2>
-        <a:srgbClr val="44546A"/>
+        <a:srgbClr val="23272B"/>
       </a:dk2>
       <a:lt2>
-        <a:srgbClr val="E7E6E6"/>
+        <a:srgbClr val="EEF4FB"/>
       </a:lt2>
       <a:accent1>
-        <a:srgbClr val="4472C4"/>
+        <a:srgbClr val="005EB8"/>
       </a:accent1>
       <a:accent2>
-        <a:srgbClr val="ED7D31"/>
+        <a:srgbClr val="EBB565"/>
       </a:accent2>
       <a:accent3>
-        <a:srgbClr val="A5A5A5"/>
+        <a:srgbClr val="94702E"/>
       </a:accent3>
       <a:accent4>
-        <a:srgbClr val="FFC000"/>
+        <a:srgbClr val="9CC3EC"/>
       </a:accent4>
       <a:accent5>
-        <a:srgbClr val="5B9BD5"/>
+        <a:srgbClr val="BFD7F0"/>
       </a:accent5>
       <a:accent6>
-        <a:srgbClr val="70AD47"/>
+        <a:srgbClr val="6B7177"/>
       </a:accent6>
       <a:hlink>
-        <a:srgbClr val="0563C1"/>
+        <a:srgbClr val="005EB8"/>
       </a:hlink>
       <a:folHlink>
-        <a:srgbClr val="954F72"/>
+        <a:srgbClr val="94702E"/>
       </a:folHlink>
     </a:clrScheme>
     <a:fontScheme name="Office">
       <a:majorFont>
-        <a:latin typeface="Goetheanum Schrift Klar"/>
+        <a:latin typeface="Goetheanum Schrift Deutlich"/>
         <a:ea typeface=""/>
         <a:cs typeface=""/>
         <a:font script="Jpan" typeface="游ゴシック Light"/>

--- a/assets/templates/GoetheanumVorlageA4.pptx
+++ b/assets/templates/GoetheanumVorlageA4.pptx
@@ -4503,9 +4503,9 @@
                 <a:solidFill>
                   <a:srgbClr val="005EB8"/>
                 </a:solidFill>
-                <a:latin typeface="Goetheanum Schrift Laut" pitchFamily="34" charset="0"/>
-                <a:ea typeface="Goetheanum Schrift Laut" pitchFamily="34" charset="-122"/>
-                <a:cs typeface="Goetheanum Schrift Laut" pitchFamily="34" charset="-120"/>
+                <a:latin typeface="Goetheanum Schrift Deutlich" pitchFamily="34" charset="0"/>
+                <a:ea typeface="Goetheanum Schrift Deutlich" pitchFamily="34" charset="-122"/>
+                <a:cs typeface="Goetheanum Schrift Deutlich" pitchFamily="34" charset="-120"/>
               </a:rPr>
               <a:t>12,4 Mio</a:t>
             </a:r>
@@ -4603,9 +4603,9 @@
                 <a:solidFill>
                   <a:srgbClr val="1A1A1A"/>
                 </a:solidFill>
-                <a:latin typeface="Goetheanum Schrift Laut" pitchFamily="34" charset="0"/>
-                <a:ea typeface="Goetheanum Schrift Laut" pitchFamily="34" charset="-122"/>
-                <a:cs typeface="Goetheanum Schrift Laut" pitchFamily="34" charset="-120"/>
+                <a:latin typeface="Goetheanum Schrift Deutlich" pitchFamily="34" charset="0"/>
+                <a:ea typeface="Goetheanum Schrift Deutlich" pitchFamily="34" charset="-122"/>
+                <a:cs typeface="Goetheanum Schrift Deutlich" pitchFamily="34" charset="-120"/>
               </a:rPr>
               <a:t>−2,1 %</a:t>
             </a:r>
@@ -4703,9 +4703,9 @@
                 <a:solidFill>
                   <a:srgbClr val="005EB8"/>
                 </a:solidFill>
-                <a:latin typeface="Goetheanum Schrift Laut" pitchFamily="34" charset="0"/>
-                <a:ea typeface="Goetheanum Schrift Laut" pitchFamily="34" charset="-122"/>
-                <a:cs typeface="Goetheanum Schrift Laut" pitchFamily="34" charset="-120"/>
+                <a:latin typeface="Goetheanum Schrift Deutlich" pitchFamily="34" charset="0"/>
+                <a:ea typeface="Goetheanum Schrift Deutlich" pitchFamily="34" charset="-122"/>
+                <a:cs typeface="Goetheanum Schrift Deutlich" pitchFamily="34" charset="-120"/>
               </a:rPr>
               <a:t>86 %</a:t>
             </a:r>
@@ -4803,9 +4803,9 @@
                 <a:solidFill>
                   <a:srgbClr val="EBB565"/>
                 </a:solidFill>
-                <a:latin typeface="Goetheanum Schrift Laut" pitchFamily="34" charset="0"/>
-                <a:ea typeface="Goetheanum Schrift Laut" pitchFamily="34" charset="-122"/>
-                <a:cs typeface="Goetheanum Schrift Laut" pitchFamily="34" charset="-120"/>
+                <a:latin typeface="Goetheanum Schrift Deutlich" pitchFamily="34" charset="0"/>
+                <a:ea typeface="Goetheanum Schrift Deutlich" pitchFamily="34" charset="-122"/>
+                <a:cs typeface="Goetheanum Schrift Deutlich" pitchFamily="34" charset="-120"/>
               </a:rPr>
               <a:t>3,2 Mio</a:t>
             </a:r>
@@ -5097,9 +5097,9 @@
                 <a:solidFill>
                   <a:srgbClr val="005EB8"/>
                 </a:solidFill>
-                <a:latin typeface="Goetheanum Schrift Laut" pitchFamily="34" charset="0"/>
-                <a:ea typeface="Goetheanum Schrift Laut" pitchFamily="34" charset="-122"/>
-                <a:cs typeface="Goetheanum Schrift Laut" pitchFamily="34" charset="-120"/>
+                <a:latin typeface="Goetheanum Schrift Deutlich" pitchFamily="34" charset="0"/>
+                <a:ea typeface="Goetheanum Schrift Deutlich" pitchFamily="34" charset="-122"/>
+                <a:cs typeface="Goetheanum Schrift Deutlich" pitchFamily="34" charset="-120"/>
               </a:rPr>
               <a:t>Lesart</a:t>
             </a:r>
@@ -5403,16 +5403,16 @@
                           <a:solidFill>
                             <a:srgbClr val="FFFFFF"/>
                           </a:solidFill>
-                          <a:latin typeface="Goetheanum Schrift Laut" pitchFamily="34" charset="0"/>
-                          <a:ea typeface="Goetheanum Schrift Laut" pitchFamily="34" charset="-122"/>
-                          <a:cs typeface="Goetheanum Schrift Laut" pitchFamily="34" charset="-120"/>
+                          <a:latin typeface="Goetheanum Schrift Deutlich" pitchFamily="34" charset="0"/>
+                          <a:ea typeface="Goetheanum Schrift Deutlich" pitchFamily="34" charset="-122"/>
+                          <a:cs typeface="Goetheanum Schrift Deutlich" pitchFamily="34" charset="-120"/>
                         </a:rPr>
                         <a:t>Bereich</a:t>
                       </a:r>
                       <a:endParaRPr lang="en-US" sz="1300" dirty="0">
-                        <a:latin typeface="Goetheanum Schrift Laut" charset="0"/>
-                        <a:ea typeface="Goetheanum Schrift Laut" charset="0"/>
-                        <a:cs typeface="Goetheanum Schrift Laut" charset="0"/>
+                        <a:latin typeface="Goetheanum Schrift Deutlich" charset="0"/>
+                        <a:ea typeface="Goetheanum Schrift Deutlich" charset="0"/>
+                        <a:cs typeface="Goetheanum Schrift Deutlich" charset="0"/>
                       </a:endParaRPr>
                     </a:p>
                   </a:txBody>
@@ -5447,16 +5447,16 @@
                           <a:solidFill>
                             <a:srgbClr val="FFFFFF"/>
                           </a:solidFill>
-                          <a:latin typeface="Goetheanum Schrift Laut" pitchFamily="34" charset="0"/>
-                          <a:ea typeface="Goetheanum Schrift Laut" pitchFamily="34" charset="-122"/>
-                          <a:cs typeface="Goetheanum Schrift Laut" pitchFamily="34" charset="-120"/>
+                          <a:latin typeface="Goetheanum Schrift Deutlich" pitchFamily="34" charset="0"/>
+                          <a:ea typeface="Goetheanum Schrift Deutlich" pitchFamily="34" charset="-122"/>
+                          <a:cs typeface="Goetheanum Schrift Deutlich" pitchFamily="34" charset="-120"/>
                         </a:rPr>
                         <a:t>2025</a:t>
                       </a:r>
                       <a:endParaRPr lang="en-US" sz="1300" dirty="0">
-                        <a:latin typeface="Goetheanum Schrift Laut" charset="0"/>
-                        <a:ea typeface="Goetheanum Schrift Laut" charset="0"/>
-                        <a:cs typeface="Goetheanum Schrift Laut" charset="0"/>
+                        <a:latin typeface="Goetheanum Schrift Deutlich" charset="0"/>
+                        <a:ea typeface="Goetheanum Schrift Deutlich" charset="0"/>
+                        <a:cs typeface="Goetheanum Schrift Deutlich" charset="0"/>
                       </a:endParaRPr>
                     </a:p>
                   </a:txBody>
@@ -5491,16 +5491,16 @@
                           <a:solidFill>
                             <a:srgbClr val="FFFFFF"/>
                           </a:solidFill>
-                          <a:latin typeface="Goetheanum Schrift Laut" pitchFamily="34" charset="0"/>
-                          <a:ea typeface="Goetheanum Schrift Laut" pitchFamily="34" charset="-122"/>
-                          <a:cs typeface="Goetheanum Schrift Laut" pitchFamily="34" charset="-120"/>
+                          <a:latin typeface="Goetheanum Schrift Deutlich" pitchFamily="34" charset="0"/>
+                          <a:ea typeface="Goetheanum Schrift Deutlich" pitchFamily="34" charset="-122"/>
+                          <a:cs typeface="Goetheanum Schrift Deutlich" pitchFamily="34" charset="-120"/>
                         </a:rPr>
                         <a:t>2026</a:t>
                       </a:r>
                       <a:endParaRPr lang="en-US" sz="1300" dirty="0">
-                        <a:latin typeface="Goetheanum Schrift Laut" charset="0"/>
-                        <a:ea typeface="Goetheanum Schrift Laut" charset="0"/>
-                        <a:cs typeface="Goetheanum Schrift Laut" charset="0"/>
+                        <a:latin typeface="Goetheanum Schrift Deutlich" charset="0"/>
+                        <a:ea typeface="Goetheanum Schrift Deutlich" charset="0"/>
+                        <a:cs typeface="Goetheanum Schrift Deutlich" charset="0"/>
                       </a:endParaRPr>
                     </a:p>
                   </a:txBody>
@@ -5535,16 +5535,16 @@
                           <a:solidFill>
                             <a:srgbClr val="FFFFFF"/>
                           </a:solidFill>
-                          <a:latin typeface="Goetheanum Schrift Laut" pitchFamily="34" charset="0"/>
-                          <a:ea typeface="Goetheanum Schrift Laut" pitchFamily="34" charset="-122"/>
-                          <a:cs typeface="Goetheanum Schrift Laut" pitchFamily="34" charset="-120"/>
+                          <a:latin typeface="Goetheanum Schrift Deutlich" pitchFamily="34" charset="0"/>
+                          <a:ea typeface="Goetheanum Schrift Deutlich" pitchFamily="34" charset="-122"/>
+                          <a:cs typeface="Goetheanum Schrift Deutlich" pitchFamily="34" charset="-120"/>
                         </a:rPr>
                         <a:t>Δ</a:t>
                       </a:r>
                       <a:endParaRPr lang="en-US" sz="1300" dirty="0">
-                        <a:latin typeface="Goetheanum Schrift Laut" charset="0"/>
-                        <a:ea typeface="Goetheanum Schrift Laut" charset="0"/>
-                        <a:cs typeface="Goetheanum Schrift Laut" charset="0"/>
+                        <a:latin typeface="Goetheanum Schrift Deutlich" charset="0"/>
+                        <a:ea typeface="Goetheanum Schrift Deutlich" charset="0"/>
+                        <a:cs typeface="Goetheanum Schrift Deutlich" charset="0"/>
                       </a:endParaRPr>
                     </a:p>
                   </a:txBody>
@@ -6269,16 +6269,16 @@
                           <a:solidFill>
                             <a:srgbClr val="1A1A1A"/>
                           </a:solidFill>
-                          <a:latin typeface="Goetheanum Schrift Laut" pitchFamily="34" charset="0"/>
-                          <a:ea typeface="Goetheanum Schrift Laut" pitchFamily="34" charset="-122"/>
-                          <a:cs typeface="Goetheanum Schrift Laut" pitchFamily="34" charset="-120"/>
+                          <a:latin typeface="Goetheanum Schrift Deutlich" pitchFamily="34" charset="0"/>
+                          <a:ea typeface="Goetheanum Schrift Deutlich" pitchFamily="34" charset="-122"/>
+                          <a:cs typeface="Goetheanum Schrift Deutlich" pitchFamily="34" charset="-120"/>
                         </a:rPr>
                         <a:t>Total</a:t>
                       </a:r>
                       <a:endParaRPr lang="en-US" sz="1300" dirty="0">
-                        <a:latin typeface="Goetheanum Schrift Laut" charset="0"/>
-                        <a:ea typeface="Goetheanum Schrift Laut" charset="0"/>
-                        <a:cs typeface="Goetheanum Schrift Laut" charset="0"/>
+                        <a:latin typeface="Goetheanum Schrift Deutlich" charset="0"/>
+                        <a:ea typeface="Goetheanum Schrift Deutlich" charset="0"/>
+                        <a:cs typeface="Goetheanum Schrift Deutlich" charset="0"/>
                       </a:endParaRPr>
                     </a:p>
                   </a:txBody>
@@ -6310,16 +6310,16 @@
                           <a:solidFill>
                             <a:srgbClr val="1A1A1A"/>
                           </a:solidFill>
-                          <a:latin typeface="Goetheanum Schrift Laut" pitchFamily="34" charset="0"/>
-                          <a:ea typeface="Goetheanum Schrift Laut" pitchFamily="34" charset="-122"/>
-                          <a:cs typeface="Goetheanum Schrift Laut" pitchFamily="34" charset="-120"/>
+                          <a:latin typeface="Goetheanum Schrift Deutlich" pitchFamily="34" charset="0"/>
+                          <a:ea typeface="Goetheanum Schrift Deutlich" pitchFamily="34" charset="-122"/>
+                          <a:cs typeface="Goetheanum Schrift Deutlich" pitchFamily="34" charset="-120"/>
                         </a:rPr>
                         <a:t>11 690</a:t>
                       </a:r>
                       <a:endParaRPr lang="en-US" sz="1300" dirty="0">
-                        <a:latin typeface="Goetheanum Schrift Laut" charset="0"/>
-                        <a:ea typeface="Goetheanum Schrift Laut" charset="0"/>
-                        <a:cs typeface="Goetheanum Schrift Laut" charset="0"/>
+                        <a:latin typeface="Goetheanum Schrift Deutlich" charset="0"/>
+                        <a:ea typeface="Goetheanum Schrift Deutlich" charset="0"/>
+                        <a:cs typeface="Goetheanum Schrift Deutlich" charset="0"/>
                       </a:endParaRPr>
                     </a:p>
                   </a:txBody>
@@ -6351,16 +6351,16 @@
                           <a:solidFill>
                             <a:srgbClr val="1A1A1A"/>
                           </a:solidFill>
-                          <a:latin typeface="Goetheanum Schrift Laut" pitchFamily="34" charset="0"/>
-                          <a:ea typeface="Goetheanum Schrift Laut" pitchFamily="34" charset="-122"/>
-                          <a:cs typeface="Goetheanum Schrift Laut" pitchFamily="34" charset="-120"/>
+                          <a:latin typeface="Goetheanum Schrift Deutlich" pitchFamily="34" charset="0"/>
+                          <a:ea typeface="Goetheanum Schrift Deutlich" pitchFamily="34" charset="-122"/>
+                          <a:cs typeface="Goetheanum Schrift Deutlich" pitchFamily="34" charset="-120"/>
                         </a:rPr>
                         <a:t>12 420</a:t>
                       </a:r>
                       <a:endParaRPr lang="en-US" sz="1300" dirty="0">
-                        <a:latin typeface="Goetheanum Schrift Laut" charset="0"/>
-                        <a:ea typeface="Goetheanum Schrift Laut" charset="0"/>
-                        <a:cs typeface="Goetheanum Schrift Laut" charset="0"/>
+                        <a:latin typeface="Goetheanum Schrift Deutlich" charset="0"/>
+                        <a:ea typeface="Goetheanum Schrift Deutlich" charset="0"/>
+                        <a:cs typeface="Goetheanum Schrift Deutlich" charset="0"/>
                       </a:endParaRPr>
                     </a:p>
                   </a:txBody>
@@ -6392,16 +6392,16 @@
                           <a:solidFill>
                             <a:srgbClr val="005EB8"/>
                           </a:solidFill>
-                          <a:latin typeface="Goetheanum Schrift Laut" pitchFamily="34" charset="0"/>
-                          <a:ea typeface="Goetheanum Schrift Laut" pitchFamily="34" charset="-122"/>
-                          <a:cs typeface="Goetheanum Schrift Laut" pitchFamily="34" charset="-120"/>
+                          <a:latin typeface="Goetheanum Schrift Deutlich" pitchFamily="34" charset="0"/>
+                          <a:ea typeface="Goetheanum Schrift Deutlich" pitchFamily="34" charset="-122"/>
+                          <a:cs typeface="Goetheanum Schrift Deutlich" pitchFamily="34" charset="-120"/>
                         </a:rPr>
                         <a:t>+730</a:t>
                       </a:r>
                       <a:endParaRPr lang="en-US" sz="1300" dirty="0">
-                        <a:latin typeface="Goetheanum Schrift Laut" charset="0"/>
-                        <a:ea typeface="Goetheanum Schrift Laut" charset="0"/>
-                        <a:cs typeface="Goetheanum Schrift Laut" charset="0"/>
+                        <a:latin typeface="Goetheanum Schrift Deutlich" charset="0"/>
+                        <a:ea typeface="Goetheanum Schrift Deutlich" charset="0"/>
+                        <a:cs typeface="Goetheanum Schrift Deutlich" charset="0"/>
                       </a:endParaRPr>
                     </a:p>
                   </a:txBody>
@@ -6690,9 +6690,9 @@
                 <a:solidFill>
                   <a:srgbClr val="1A1A1A"/>
                 </a:solidFill>
-                <a:latin typeface="Goetheanum Schrift Laut" pitchFamily="34" charset="0"/>
-                <a:ea typeface="Goetheanum Schrift Laut" pitchFamily="34" charset="-122"/>
-                <a:cs typeface="Goetheanum Schrift Laut" pitchFamily="34" charset="-120"/>
+                <a:latin typeface="Goetheanum Schrift Deutlich" pitchFamily="34" charset="0"/>
+                <a:ea typeface="Goetheanum Schrift Deutlich" pitchFamily="34" charset="-122"/>
+                <a:cs typeface="Goetheanum Schrift Deutlich" pitchFamily="34" charset="-120"/>
               </a:rPr>
               <a:t>WLAN</a:t>
             </a:r>
@@ -6791,9 +6791,9 @@
                 <a:solidFill>
                   <a:srgbClr val="1A1A1A"/>
                 </a:solidFill>
-                <a:latin typeface="Goetheanum Schrift Laut" pitchFamily="34" charset="0"/>
-                <a:ea typeface="Goetheanum Schrift Laut" pitchFamily="34" charset="-122"/>
-                <a:cs typeface="Goetheanum Schrift Laut" pitchFamily="34" charset="-120"/>
+                <a:latin typeface="Goetheanum Schrift Deutlich" pitchFamily="34" charset="0"/>
+                <a:ea typeface="Goetheanum Schrift Deutlich" pitchFamily="34" charset="-122"/>
+                <a:cs typeface="Goetheanum Schrift Deutlich" pitchFamily="34" charset="-120"/>
               </a:rPr>
               <a:t>Lift</a:t>
             </a:r>
@@ -6892,9 +6892,9 @@
                 <a:solidFill>
                   <a:srgbClr val="1A1A1A"/>
                 </a:solidFill>
-                <a:latin typeface="Goetheanum Schrift Laut" pitchFamily="34" charset="0"/>
-                <a:ea typeface="Goetheanum Schrift Laut" pitchFamily="34" charset="-122"/>
-                <a:cs typeface="Goetheanum Schrift Laut" pitchFamily="34" charset="-120"/>
+                <a:latin typeface="Goetheanum Schrift Deutlich" pitchFamily="34" charset="0"/>
+                <a:ea typeface="Goetheanum Schrift Deutlich" pitchFamily="34" charset="-122"/>
+                <a:cs typeface="Goetheanum Schrift Deutlich" pitchFamily="34" charset="-120"/>
               </a:rPr>
               <a:t>Eintritt</a:t>
             </a:r>
@@ -6993,9 +6993,9 @@
                 <a:solidFill>
                   <a:srgbClr val="1A1A1A"/>
                 </a:solidFill>
-                <a:latin typeface="Goetheanum Schrift Laut" pitchFamily="34" charset="0"/>
-                <a:ea typeface="Goetheanum Schrift Laut" pitchFamily="34" charset="-122"/>
-                <a:cs typeface="Goetheanum Schrift Laut" pitchFamily="34" charset="-120"/>
+                <a:latin typeface="Goetheanum Schrift Deutlich" pitchFamily="34" charset="0"/>
+                <a:ea typeface="Goetheanum Schrift Deutlich" pitchFamily="34" charset="-122"/>
+                <a:cs typeface="Goetheanum Schrift Deutlich" pitchFamily="34" charset="-120"/>
               </a:rPr>
               <a:t>Fotografie</a:t>
             </a:r>
@@ -7062,7 +7062,7 @@
               <a:buNone/>
             </a:pPr>
             <a:r>
-              <a:rPr lang="en-US" sz="900" u="sng" dirty="0">
+              <a:rPr lang="en-US" sz="900" dirty="0">
                 <a:solidFill>
                   <a:srgbClr val="005EB8"/>
                 </a:solidFill>
@@ -8198,61 +8198,33 @@
                 <a:ea typeface="Goetheanum Schrift Laut" pitchFamily="34" charset="-122"/>
                 <a:cs typeface="Goetheanum Schrift Laut" pitchFamily="34" charset="-120"/>
               </a:rPr>
-              <a:t>Laut betont</a:t>
-            </a:r>
-            <a:endParaRPr lang="en-US" sz="1300" dirty="0"/>
-          </a:p>
-        </p:txBody>
-      </p:sp>
-      <p:sp>
-        <p:nvSpPr>
-          <p:cNvPr id="20" name="Text 18"/>
-          <p:cNvSpPr/>
-          <p:nvPr/>
-        </p:nvSpPr>
-        <p:spPr>
-          <a:xfrm>
-            <a:off x="2002536" y="6364224"/>
-            <a:ext cx="6400800" cy="201168"/>
-          </a:xfrm>
-          <a:prstGeom prst="rect">
-            <a:avLst/>
-          </a:prstGeom>
-          <a:noFill/>
-          <a:ln/>
-        </p:spPr>
-        <p:txBody>
-          <a:bodyPr wrap="square" lIns="0" tIns="0" rIns="0" bIns="0" rtlCol="0" anchor="ctr"/>
-          <a:lstStyle/>
-          <a:p>
-            <a:pPr indent="0" marL="0">
-              <a:buNone/>
-            </a:pPr>
-            <a:r>
-              <a:rPr lang="en-US" sz="900" dirty="0">
-                <a:solidFill>
-                  <a:srgbClr val="6B7480"/>
+              <a:t>Laut</a:t>
+            </a:r>
+            <a:r>
+              <a:rPr lang="en-US" sz="1300" dirty="0">
+                <a:solidFill>
+                  <a:srgbClr val="1A1A1A"/>
                 </a:solidFill>
                 <a:latin typeface="Goetheanum Schrift Klar" pitchFamily="34" charset="0"/>
                 <a:ea typeface="Goetheanum Schrift Klar" pitchFamily="34" charset="-122"/>
                 <a:cs typeface="Goetheanum Schrift Klar" pitchFamily="34" charset="-120"/>
               </a:rPr>
-              <a:t>In Klar-Text schaltet Strg+B auf Laut und Strg+I auf Leise.</a:t>
-            </a:r>
-            <a:endParaRPr lang="en-US" sz="900" dirty="0"/>
-          </a:p>
-        </p:txBody>
-      </p:sp>
-      <p:sp>
-        <p:nvSpPr>
-          <p:cNvPr id="21" name="Text 19"/>
+              <a:t> betont</a:t>
+            </a:r>
+            <a:endParaRPr lang="en-US" sz="1300" dirty="0"/>
+          </a:p>
+        </p:txBody>
+      </p:sp>
+      <p:sp>
+        <p:nvSpPr>
+          <p:cNvPr id="20" name="Text 18"/>
           <p:cNvSpPr/>
           <p:nvPr/>
         </p:nvSpPr>
         <p:spPr>
           <a:xfrm>
-            <a:off x="548640" y="6656832"/>
-            <a:ext cx="1325880" cy="219456"/>
+            <a:off x="2002536" y="6364224"/>
+            <a:ext cx="6400800" cy="201168"/>
           </a:xfrm>
           <a:prstGeom prst="rect">
             <a:avLst/>
@@ -8264,19 +8236,19 @@
           <a:bodyPr wrap="square" lIns="0" tIns="0" rIns="0" bIns="0" rtlCol="0" anchor="ctr"/>
           <a:lstStyle/>
           <a:p>
-            <a:pPr algn="r" indent="0" marL="0">
+            <a:pPr indent="0" marL="0">
               <a:buNone/>
             </a:pPr>
             <a:r>
               <a:rPr lang="en-US" sz="900" dirty="0">
                 <a:solidFill>
-                  <a:srgbClr val="005EB8"/>
+                  <a:srgbClr val="6B7480"/>
                 </a:solidFill>
                 <a:latin typeface="Goetheanum Schrift Klar" pitchFamily="34" charset="0"/>
                 <a:ea typeface="Goetheanum Schrift Klar" pitchFamily="34" charset="-122"/>
                 <a:cs typeface="Goetheanum Schrift Klar" pitchFamily="34" charset="-120"/>
               </a:rPr>
-              <a:t>Regel</a:t>
+              <a:t>In Klar-Text schaltet Strg+B auf Laut und Strg+I auf Leise.</a:t>
             </a:r>
             <a:endParaRPr lang="en-US" sz="900" dirty="0"/>
           </a:p>
@@ -8284,14 +8256,14 @@
       </p:sp>
       <p:sp>
         <p:nvSpPr>
-          <p:cNvPr id="22" name="Text 20"/>
+          <p:cNvPr id="21" name="Text 19"/>
           <p:cNvSpPr/>
           <p:nvPr/>
         </p:nvSpPr>
         <p:spPr>
           <a:xfrm>
-            <a:off x="2002536" y="6656832"/>
-            <a:ext cx="7315200" cy="219456"/>
+            <a:off x="548640" y="6656832"/>
+            <a:ext cx="1325880" cy="219456"/>
           </a:xfrm>
           <a:prstGeom prst="rect">
             <a:avLst/>
@@ -8303,19 +8275,19 @@
           <a:bodyPr wrap="square" lIns="0" tIns="0" rIns="0" bIns="0" rtlCol="0" anchor="ctr"/>
           <a:lstStyle/>
           <a:p>
-            <a:pPr indent="0" marL="0">
+            <a:pPr algn="r" indent="0" marL="0">
               <a:buNone/>
             </a:pPr>
             <a:r>
               <a:rPr lang="en-US" sz="900" dirty="0">
                 <a:solidFill>
-                  <a:srgbClr val="1A1A1A"/>
+                  <a:srgbClr val="005EB8"/>
                 </a:solidFill>
                 <a:latin typeface="Goetheanum Schrift Klar" pitchFamily="34" charset="0"/>
                 <a:ea typeface="Goetheanum Schrift Klar" pitchFamily="34" charset="-122"/>
                 <a:cs typeface="Goetheanum Schrift Klar" pitchFamily="34" charset="-120"/>
               </a:rPr>
-              <a:t>Anführungen stehen in einfachen Guillemets: ‹so›. Überschriften stehen in Deutlich.</a:t>
+              <a:t>Regel</a:t>
             </a:r>
             <a:endParaRPr lang="en-US" sz="900" dirty="0"/>
           </a:p>
@@ -8323,14 +8295,14 @@
       </p:sp>
       <p:sp>
         <p:nvSpPr>
-          <p:cNvPr id="23" name="Text 21"/>
+          <p:cNvPr id="22" name="Text 20"/>
           <p:cNvSpPr/>
           <p:nvPr/>
         </p:nvSpPr>
         <p:spPr>
           <a:xfrm>
-            <a:off x="548640" y="6995160"/>
-            <a:ext cx="3657600" cy="274320"/>
+            <a:off x="2002536" y="6656832"/>
+            <a:ext cx="7315200" cy="219456"/>
           </a:xfrm>
           <a:prstGeom prst="rect">
             <a:avLst/>
@@ -8348,19 +8320,58 @@
             <a:r>
               <a:rPr lang="en-US" sz="900" dirty="0">
                 <a:solidFill>
-                  <a:srgbClr val="6B7480"/>
+                  <a:srgbClr val="1A1A1A"/>
                 </a:solidFill>
                 <a:latin typeface="Goetheanum Schrift Klar" pitchFamily="34" charset="0"/>
                 <a:ea typeface="Goetheanum Schrift Klar" pitchFamily="34" charset="-122"/>
                 <a:cs typeface="Goetheanum Schrift Klar" pitchFamily="34" charset="-120"/>
               </a:rPr>
+              <a:t>Anführungen stehen in einfachen Guillemets: ‹so›. Überschriften stehen in Deutlich.</a:t>
+            </a:r>
+            <a:endParaRPr lang="en-US" sz="900" dirty="0"/>
+          </a:p>
+        </p:txBody>
+      </p:sp>
+      <p:sp>
+        <p:nvSpPr>
+          <p:cNvPr id="23" name="Text 21"/>
+          <p:cNvSpPr/>
+          <p:nvPr/>
+        </p:nvSpPr>
+        <p:spPr>
+          <a:xfrm>
+            <a:off x="548640" y="6995160"/>
+            <a:ext cx="3657600" cy="274320"/>
+          </a:xfrm>
+          <a:prstGeom prst="rect">
+            <a:avLst/>
+          </a:prstGeom>
+          <a:noFill/>
+          <a:ln/>
+        </p:spPr>
+        <p:txBody>
+          <a:bodyPr wrap="square" lIns="0" tIns="0" rIns="0" bIns="0" rtlCol="0" anchor="ctr"/>
+          <a:lstStyle/>
+          <a:p>
+            <a:pPr indent="0" marL="0">
+              <a:buNone/>
+            </a:pPr>
+            <a:r>
+              <a:rPr lang="en-US" sz="900" dirty="0">
+                <a:solidFill>
+                  <a:srgbClr val="6B7480"/>
+                </a:solidFill>
+                <a:latin typeface="Goetheanum Schrift Klar" pitchFamily="34" charset="0"/>
+                <a:ea typeface="Goetheanum Schrift Klar" pitchFamily="34" charset="-122"/>
+                <a:cs typeface="Goetheanum Schrift Klar" pitchFamily="34" charset="-120"/>
+              </a:rPr>
               <a:t>Schriften installieren: </a:t>
             </a:r>
             <a:pPr indent="0" marL="0">
               <a:buNone/>
             </a:pPr>
             <a:r>
-              <a:rPr lang="en-US" sz="900" u="sng" dirty="0">
+              <a:rPr lang="en-US" sz="900" dirty="0">
                 <a:solidFill>
                   <a:srgbClr val="005EB8"/>
                 </a:solidFill>
@@ -8671,9 +8682,9 @@
                 <a:solidFill>
                   <a:srgbClr val="005EB8"/>
                 </a:solidFill>
-                <a:latin typeface="Goetheanum Schrift Laut" pitchFamily="34" charset="0"/>
-                <a:ea typeface="Goetheanum Schrift Laut" pitchFamily="34" charset="-122"/>
-                <a:cs typeface="Goetheanum Schrift Laut" pitchFamily="34" charset="-120"/>
+                <a:latin typeface="Goetheanum Schrift Deutlich" pitchFamily="34" charset="0"/>
+                <a:ea typeface="Goetheanum Schrift Deutlich" pitchFamily="34" charset="-122"/>
+                <a:cs typeface="Goetheanum Schrift Deutlich" pitchFamily="34" charset="-120"/>
               </a:rPr>
               <a:t>g</a:t>
             </a:r>
@@ -8788,9 +8799,9 @@
                 <a:solidFill>
                   <a:srgbClr val="005EB8"/>
                 </a:solidFill>
-                <a:latin typeface="Goetheanum Schrift Laut" pitchFamily="34" charset="0"/>
-                <a:ea typeface="Goetheanum Schrift Laut" pitchFamily="34" charset="-122"/>
-                <a:cs typeface="Goetheanum Schrift Laut" pitchFamily="34" charset="-120"/>
+                <a:latin typeface="Goetheanum Schrift Deutlich" pitchFamily="34" charset="0"/>
+                <a:ea typeface="Goetheanum Schrift Deutlich" pitchFamily="34" charset="-122"/>
+                <a:cs typeface="Goetheanum Schrift Deutlich" pitchFamily="34" charset="-120"/>
               </a:rPr>
               <a:t>a</a:t>
             </a:r>
@@ -8905,9 +8916,9 @@
                 <a:solidFill>
                   <a:srgbClr val="005EB8"/>
                 </a:solidFill>
-                <a:latin typeface="Goetheanum Schrift Laut" pitchFamily="34" charset="0"/>
-                <a:ea typeface="Goetheanum Schrift Laut" pitchFamily="34" charset="-122"/>
-                <a:cs typeface="Goetheanum Schrift Laut" pitchFamily="34" charset="-120"/>
+                <a:latin typeface="Goetheanum Schrift Deutlich" pitchFamily="34" charset="0"/>
+                <a:ea typeface="Goetheanum Schrift Deutlich" pitchFamily="34" charset="-122"/>
+                <a:cs typeface="Goetheanum Schrift Deutlich" pitchFamily="34" charset="-120"/>
               </a:rPr>
               <a:t>s</a:t>
             </a:r>
@@ -9022,9 +9033,9 @@
                 <a:solidFill>
                   <a:srgbClr val="005EB8"/>
                 </a:solidFill>
-                <a:latin typeface="Goetheanum Schrift Laut" pitchFamily="34" charset="0"/>
-                <a:ea typeface="Goetheanum Schrift Laut" pitchFamily="34" charset="-122"/>
-                <a:cs typeface="Goetheanum Schrift Laut" pitchFamily="34" charset="-120"/>
+                <a:latin typeface="Goetheanum Schrift Deutlich" pitchFamily="34" charset="0"/>
+                <a:ea typeface="Goetheanum Schrift Deutlich" pitchFamily="34" charset="-122"/>
+                <a:cs typeface="Goetheanum Schrift Deutlich" pitchFamily="34" charset="-120"/>
               </a:rPr>
               <a:t>x</a:t>
             </a:r>
@@ -9139,9 +9150,9 @@
                 <a:solidFill>
                   <a:srgbClr val="005EB8"/>
                 </a:solidFill>
-                <a:latin typeface="Goetheanum Schrift Laut" pitchFamily="34" charset="0"/>
-                <a:ea typeface="Goetheanum Schrift Laut" pitchFamily="34" charset="-122"/>
-                <a:cs typeface="Goetheanum Schrift Laut" pitchFamily="34" charset="-120"/>
+                <a:latin typeface="Goetheanum Schrift Deutlich" pitchFamily="34" charset="0"/>
+                <a:ea typeface="Goetheanum Schrift Deutlich" pitchFamily="34" charset="-122"/>
+                <a:cs typeface="Goetheanum Schrift Deutlich" pitchFamily="34" charset="-120"/>
               </a:rPr>
               <a:t>e</a:t>
             </a:r>
@@ -9256,9 +9267,9 @@
                 <a:solidFill>
                   <a:srgbClr val="005EB8"/>
                 </a:solidFill>
-                <a:latin typeface="Goetheanum Schrift Laut" pitchFamily="34" charset="0"/>
-                <a:ea typeface="Goetheanum Schrift Laut" pitchFamily="34" charset="-122"/>
-                <a:cs typeface="Goetheanum Schrift Laut" pitchFamily="34" charset="-120"/>
+                <a:latin typeface="Goetheanum Schrift Deutlich" pitchFamily="34" charset="0"/>
+                <a:ea typeface="Goetheanum Schrift Deutlich" pitchFamily="34" charset="-122"/>
+                <a:cs typeface="Goetheanum Schrift Deutlich" pitchFamily="34" charset="-120"/>
               </a:rPr>
               <a:t>v</a:t>
             </a:r>
@@ -9373,9 +9384,9 @@
                 <a:solidFill>
                   <a:srgbClr val="005EB8"/>
                 </a:solidFill>
-                <a:latin typeface="Goetheanum Schrift Laut" pitchFamily="34" charset="0"/>
-                <a:ea typeface="Goetheanum Schrift Laut" pitchFamily="34" charset="-122"/>
-                <a:cs typeface="Goetheanum Schrift Laut" pitchFamily="34" charset="-120"/>
+                <a:latin typeface="Goetheanum Schrift Deutlich" pitchFamily="34" charset="0"/>
+                <a:ea typeface="Goetheanum Schrift Deutlich" pitchFamily="34" charset="-122"/>
+                <a:cs typeface="Goetheanum Schrift Deutlich" pitchFamily="34" charset="-120"/>
               </a:rPr>
               <a:t>k</a:t>
             </a:r>
@@ -9490,9 +9501,9 @@
                 <a:solidFill>
                   <a:srgbClr val="005EB8"/>
                 </a:solidFill>
-                <a:latin typeface="Goetheanum Schrift Laut" pitchFamily="34" charset="0"/>
-                <a:ea typeface="Goetheanum Schrift Laut" pitchFamily="34" charset="-122"/>
-                <a:cs typeface="Goetheanum Schrift Laut" pitchFamily="34" charset="-120"/>
+                <a:latin typeface="Goetheanum Schrift Deutlich" pitchFamily="34" charset="0"/>
+                <a:ea typeface="Goetheanum Schrift Deutlich" pitchFamily="34" charset="-122"/>
+                <a:cs typeface="Goetheanum Schrift Deutlich" pitchFamily="34" charset="-120"/>
               </a:rPr>
               <a:t>h</a:t>
             </a:r>
@@ -9607,9 +9618,9 @@
                 <a:solidFill>
                   <a:srgbClr val="005EB8"/>
                 </a:solidFill>
-                <a:latin typeface="Goetheanum Schrift Laut" pitchFamily="34" charset="0"/>
-                <a:ea typeface="Goetheanum Schrift Laut" pitchFamily="34" charset="-122"/>
-                <a:cs typeface="Goetheanum Schrift Laut" pitchFamily="34" charset="-120"/>
+                <a:latin typeface="Goetheanum Schrift Deutlich" pitchFamily="34" charset="0"/>
+                <a:ea typeface="Goetheanum Schrift Deutlich" pitchFamily="34" charset="-122"/>
+                <a:cs typeface="Goetheanum Schrift Deutlich" pitchFamily="34" charset="-120"/>
               </a:rPr>
               <a:t>w</a:t>
             </a:r>
@@ -9724,9 +9735,9 @@
                 <a:solidFill>
                   <a:srgbClr val="005EB8"/>
                 </a:solidFill>
-                <a:latin typeface="Goetheanum Schrift Laut" pitchFamily="34" charset="0"/>
-                <a:ea typeface="Goetheanum Schrift Laut" pitchFamily="34" charset="-122"/>
-                <a:cs typeface="Goetheanum Schrift Laut" pitchFamily="34" charset="-120"/>
+                <a:latin typeface="Goetheanum Schrift Deutlich" pitchFamily="34" charset="0"/>
+                <a:ea typeface="Goetheanum Schrift Deutlich" pitchFamily="34" charset="-122"/>
+                <a:cs typeface="Goetheanum Schrift Deutlich" pitchFamily="34" charset="-120"/>
               </a:rPr>
               <a:t>q</a:t>
             </a:r>
@@ -9841,9 +9852,9 @@
                 <a:solidFill>
                   <a:srgbClr val="005EB8"/>
                 </a:solidFill>
-                <a:latin typeface="Goetheanum Schrift Laut" pitchFamily="34" charset="0"/>
-                <a:ea typeface="Goetheanum Schrift Laut" pitchFamily="34" charset="-122"/>
-                <a:cs typeface="Goetheanum Schrift Laut" pitchFamily="34" charset="-120"/>
+                <a:latin typeface="Goetheanum Schrift Deutlich" pitchFamily="34" charset="0"/>
+                <a:ea typeface="Goetheanum Schrift Deutlich" pitchFamily="34" charset="-122"/>
+                <a:cs typeface="Goetheanum Schrift Deutlich" pitchFamily="34" charset="-120"/>
               </a:rPr>
               <a:t>y</a:t>
             </a:r>
@@ -9958,9 +9969,9 @@
                 <a:solidFill>
                   <a:srgbClr val="005EB8"/>
                 </a:solidFill>
-                <a:latin typeface="Goetheanum Schrift Laut" pitchFamily="34" charset="0"/>
-                <a:ea typeface="Goetheanum Schrift Laut" pitchFamily="34" charset="-122"/>
-                <a:cs typeface="Goetheanum Schrift Laut" pitchFamily="34" charset="-120"/>
+                <a:latin typeface="Goetheanum Schrift Deutlich" pitchFamily="34" charset="0"/>
+                <a:ea typeface="Goetheanum Schrift Deutlich" pitchFamily="34" charset="-122"/>
+                <a:cs typeface="Goetheanum Schrift Deutlich" pitchFamily="34" charset="-120"/>
               </a:rPr>
               <a:t>r</a:t>
             </a:r>
@@ -10075,9 +10086,9 @@
                 <a:solidFill>
                   <a:srgbClr val="005EB8"/>
                 </a:solidFill>
-                <a:latin typeface="Goetheanum Schrift Laut" pitchFamily="34" charset="0"/>
-                <a:ea typeface="Goetheanum Schrift Laut" pitchFamily="34" charset="-122"/>
-                <a:cs typeface="Goetheanum Schrift Laut" pitchFamily="34" charset="-120"/>
+                <a:latin typeface="Goetheanum Schrift Deutlich" pitchFamily="34" charset="0"/>
+                <a:ea typeface="Goetheanum Schrift Deutlich" pitchFamily="34" charset="-122"/>
+                <a:cs typeface="Goetheanum Schrift Deutlich" pitchFamily="34" charset="-120"/>
               </a:rPr>
               <a:t>z</a:t>
             </a:r>
@@ -10192,9 +10203,9 @@
                 <a:solidFill>
                   <a:srgbClr val="005EB8"/>
                 </a:solidFill>
-                <a:latin typeface="Goetheanum Schrift Laut" pitchFamily="34" charset="0"/>
-                <a:ea typeface="Goetheanum Schrift Laut" pitchFamily="34" charset="-122"/>
-                <a:cs typeface="Goetheanum Schrift Laut" pitchFamily="34" charset="-120"/>
+                <a:latin typeface="Goetheanum Schrift Deutlich" pitchFamily="34" charset="0"/>
+                <a:ea typeface="Goetheanum Schrift Deutlich" pitchFamily="34" charset="-122"/>
+                <a:cs typeface="Goetheanum Schrift Deutlich" pitchFamily="34" charset="-120"/>
               </a:rPr>
               <a:t>t</a:t>
             </a:r>
@@ -10309,9 +10320,9 @@
                 <a:solidFill>
                   <a:srgbClr val="005EB8"/>
                 </a:solidFill>
-                <a:latin typeface="Goetheanum Schrift Laut" pitchFamily="34" charset="0"/>
-                <a:ea typeface="Goetheanum Schrift Laut" pitchFamily="34" charset="-122"/>
-                <a:cs typeface="Goetheanum Schrift Laut" pitchFamily="34" charset="-120"/>
+                <a:latin typeface="Goetheanum Schrift Deutlich" pitchFamily="34" charset="0"/>
+                <a:ea typeface="Goetheanum Schrift Deutlich" pitchFamily="34" charset="-122"/>
+                <a:cs typeface="Goetheanum Schrift Deutlich" pitchFamily="34" charset="-120"/>
               </a:rPr>
               <a:t>u</a:t>
             </a:r>
@@ -10426,9 +10437,9 @@
                 <a:solidFill>
                   <a:srgbClr val="005EB8"/>
                 </a:solidFill>
-                <a:latin typeface="Goetheanum Schrift Laut" pitchFamily="34" charset="0"/>
-                <a:ea typeface="Goetheanum Schrift Laut" pitchFamily="34" charset="-122"/>
-                <a:cs typeface="Goetheanum Schrift Laut" pitchFamily="34" charset="-120"/>
+                <a:latin typeface="Goetheanum Schrift Deutlich" pitchFamily="34" charset="0"/>
+                <a:ea typeface="Goetheanum Schrift Deutlich" pitchFamily="34" charset="-122"/>
+                <a:cs typeface="Goetheanum Schrift Deutlich" pitchFamily="34" charset="-120"/>
               </a:rPr>
               <a:t>j</a:t>
             </a:r>
@@ -10553,7 +10564,7 @@
               <a:buNone/>
             </a:pPr>
             <a:r>
-              <a:rPr lang="en-US" sz="1300" u="sng" dirty="0">
+              <a:rPr lang="en-US" sz="1300" dirty="0">
                 <a:solidFill>
                   <a:srgbClr val="005EB8"/>
                 </a:solidFill>
@@ -10800,9 +10811,9 @@
                 <a:solidFill>
                   <a:srgbClr val="1A1A1A"/>
                 </a:solidFill>
-                <a:latin typeface="Goetheanum Schrift Laut" pitchFamily="34" charset="0"/>
-                <a:ea typeface="Goetheanum Schrift Laut" pitchFamily="34" charset="-122"/>
-                <a:cs typeface="Goetheanum Schrift Laut" pitchFamily="34" charset="-120"/>
+                <a:latin typeface="Goetheanum Schrift Deutlich" pitchFamily="34" charset="0"/>
+                <a:ea typeface="Goetheanum Schrift Deutlich" pitchFamily="34" charset="-122"/>
+                <a:cs typeface="Goetheanum Schrift Deutlich" pitchFamily="34" charset="-120"/>
               </a:rPr>
               <a:t>Rückblick</a:t>
             </a:r>
@@ -10901,9 +10912,9 @@
                 <a:solidFill>
                   <a:srgbClr val="1A1A1A"/>
                 </a:solidFill>
-                <a:latin typeface="Goetheanum Schrift Laut" pitchFamily="34" charset="0"/>
-                <a:ea typeface="Goetheanum Schrift Laut" pitchFamily="34" charset="-122"/>
-                <a:cs typeface="Goetheanum Schrift Laut" pitchFamily="34" charset="-120"/>
+                <a:latin typeface="Goetheanum Schrift Deutlich" pitchFamily="34" charset="0"/>
+                <a:ea typeface="Goetheanum Schrift Deutlich" pitchFamily="34" charset="-122"/>
+                <a:cs typeface="Goetheanum Schrift Deutlich" pitchFamily="34" charset="-120"/>
               </a:rPr>
               <a:t>Zahlen</a:t>
             </a:r>
@@ -11002,9 +11013,9 @@
                 <a:solidFill>
                   <a:srgbClr val="1A1A1A"/>
                 </a:solidFill>
-                <a:latin typeface="Goetheanum Schrift Laut" pitchFamily="34" charset="0"/>
-                <a:ea typeface="Goetheanum Schrift Laut" pitchFamily="34" charset="-122"/>
-                <a:cs typeface="Goetheanum Schrift Laut" pitchFamily="34" charset="-120"/>
+                <a:latin typeface="Goetheanum Schrift Deutlich" pitchFamily="34" charset="0"/>
+                <a:ea typeface="Goetheanum Schrift Deutlich" pitchFamily="34" charset="-122"/>
+                <a:cs typeface="Goetheanum Schrift Deutlich" pitchFamily="34" charset="-120"/>
               </a:rPr>
               <a:t>Einordnung</a:t>
             </a:r>
@@ -11103,9 +11114,9 @@
                 <a:solidFill>
                   <a:srgbClr val="1A1A1A"/>
                 </a:solidFill>
-                <a:latin typeface="Goetheanum Schrift Laut" pitchFamily="34" charset="0"/>
-                <a:ea typeface="Goetheanum Schrift Laut" pitchFamily="34" charset="-122"/>
-                <a:cs typeface="Goetheanum Schrift Laut" pitchFamily="34" charset="-120"/>
+                <a:latin typeface="Goetheanum Schrift Deutlich" pitchFamily="34" charset="0"/>
+                <a:ea typeface="Goetheanum Schrift Deutlich" pitchFamily="34" charset="-122"/>
+                <a:cs typeface="Goetheanum Schrift Deutlich" pitchFamily="34" charset="-120"/>
               </a:rPr>
               <a:t>Ausblick</a:t>
             </a:r>
@@ -11763,9 +11774,9 @@
                 <a:solidFill>
                   <a:srgbClr val="005EB8"/>
                 </a:solidFill>
-                <a:latin typeface="Goetheanum Schrift Laut" pitchFamily="34" charset="0"/>
-                <a:ea typeface="Goetheanum Schrift Laut" pitchFamily="34" charset="-122"/>
-                <a:cs typeface="Goetheanum Schrift Laut" pitchFamily="34" charset="-120"/>
+                <a:latin typeface="Goetheanum Schrift Deutlich" pitchFamily="34" charset="0"/>
+                <a:ea typeface="Goetheanum Schrift Deutlich" pitchFamily="34" charset="-122"/>
+                <a:cs typeface="Goetheanum Schrift Deutlich" pitchFamily="34" charset="-120"/>
               </a:rPr>
               <a:t>Merkkasten</a:t>
             </a:r>
@@ -12017,9 +12028,9 @@
                 <a:solidFill>
                   <a:srgbClr val="005EB8"/>
                 </a:solidFill>
-                <a:latin typeface="Goetheanum Schrift Laut" pitchFamily="34" charset="0"/>
-                <a:ea typeface="Goetheanum Schrift Laut" pitchFamily="34" charset="-122"/>
-                <a:cs typeface="Goetheanum Schrift Laut" pitchFamily="34" charset="-120"/>
+                <a:latin typeface="Goetheanum Schrift Deutlich" pitchFamily="34" charset="0"/>
+                <a:ea typeface="Goetheanum Schrift Deutlich" pitchFamily="34" charset="-122"/>
+                <a:cs typeface="Goetheanum Schrift Deutlich" pitchFamily="34" charset="-120"/>
               </a:rPr>
               <a:t>Heute</a:t>
             </a:r>
@@ -12138,9 +12149,9 @@
                 <a:solidFill>
                   <a:srgbClr val="005EB8"/>
                 </a:solidFill>
-                <a:latin typeface="Goetheanum Schrift Laut" pitchFamily="34" charset="0"/>
-                <a:ea typeface="Goetheanum Schrift Laut" pitchFamily="34" charset="-122"/>
-                <a:cs typeface="Goetheanum Schrift Laut" pitchFamily="34" charset="-120"/>
+                <a:latin typeface="Goetheanum Schrift Deutlich" pitchFamily="34" charset="0"/>
+                <a:ea typeface="Goetheanum Schrift Deutlich" pitchFamily="34" charset="-122"/>
+                <a:cs typeface="Goetheanum Schrift Deutlich" pitchFamily="34" charset="-120"/>
               </a:rPr>
               <a:t>Morgen</a:t>
             </a:r>

--- a/assets/templates/GoetheanumVorlageA4.pptx
+++ b/assets/templates/GoetheanumVorlageA4.pptx
@@ -4253,9 +4253,9 @@
                 <a:solidFill>
                   <a:srgbClr val="FFFFFF"/>
                 </a:solidFill>
-                <a:latin typeface="Goetheanum Schrift Klar" pitchFamily="34" charset="0"/>
-                <a:ea typeface="Goetheanum Schrift Klar" pitchFamily="34" charset="-122"/>
-                <a:cs typeface="Goetheanum Schrift Klar" pitchFamily="34" charset="-120"/>
+                <a:latin typeface="Goetheanum Schrift Deutlich" pitchFamily="34" charset="0"/>
+                <a:ea typeface="Goetheanum Schrift Deutlich" pitchFamily="34" charset="-122"/>
+                <a:cs typeface="Goetheanum Schrift Deutlich" pitchFamily="34" charset="-120"/>
               </a:rPr>
               <a:t>Titel der Präsentation</a:t>
             </a:r>
@@ -7381,9 +7381,9 @@
                 <a:solidFill>
                   <a:srgbClr val="FFFFFF"/>
                 </a:solidFill>
-                <a:latin typeface="Goetheanum Schrift Klar" pitchFamily="34" charset="0"/>
-                <a:ea typeface="Goetheanum Schrift Klar" pitchFamily="34" charset="-122"/>
-                <a:cs typeface="Goetheanum Schrift Klar" pitchFamily="34" charset="-120"/>
+                <a:latin typeface="Goetheanum Schrift Deutlich" pitchFamily="34" charset="0"/>
+                <a:ea typeface="Goetheanum Schrift Deutlich" pitchFamily="34" charset="-122"/>
+                <a:cs typeface="Goetheanum Schrift Deutlich" pitchFamily="34" charset="-120"/>
               </a:rPr>
               <a:t>Vielen Dank.</a:t>
             </a:r>
@@ -7648,11 +7648,22 @@
                 <a:solidFill>
                   <a:srgbClr val="1A1A1A"/>
                 </a:solidFill>
-                <a:latin typeface="Goetheanum Schrift Klar" pitchFamily="34" charset="0"/>
-                <a:ea typeface="Goetheanum Schrift Klar" pitchFamily="34" charset="-122"/>
-                <a:cs typeface="Goetheanum Schrift Klar" pitchFamily="34" charset="-120"/>
-              </a:rPr>
-              <a:t>Zuerst das Ganze</a:t>
+                <a:latin typeface="Goetheanum Schrift Leise" pitchFamily="34" charset="0"/>
+                <a:ea typeface="Goetheanum Schrift Leise" pitchFamily="34" charset="-122"/>
+                <a:cs typeface="Goetheanum Schrift Leise" pitchFamily="34" charset="-120"/>
+              </a:rPr>
+              <a:t>Zuerst das </a:t>
+            </a:r>
+            <a:r>
+              <a:rPr lang="en-US" sz="5000" dirty="0">
+                <a:solidFill>
+                  <a:srgbClr val="1A1A1A"/>
+                </a:solidFill>
+                <a:latin typeface="Goetheanum Schrift Deutlich" pitchFamily="34" charset="0"/>
+                <a:ea typeface="Goetheanum Schrift Deutlich" pitchFamily="34" charset="-122"/>
+                <a:cs typeface="Goetheanum Schrift Deutlich" pitchFamily="34" charset="-120"/>
+              </a:rPr>
+              <a:t>Ganze</a:t>
             </a:r>
             <a:endParaRPr lang="en-US" sz="5000" dirty="0"/>
           </a:p>
@@ -10765,15 +10776,15 @@
               <a:buNone/>
             </a:pPr>
             <a:r>
-              <a:rPr lang="en-US" sz="2600" dirty="0">
-                <a:solidFill>
-                  <a:srgbClr val="005EB8"/>
+              <a:rPr lang="en-US" sz="1800" dirty="0">
+                <a:solidFill>
+                  <a:srgbClr val="6B7480"/>
                 </a:solidFill>
                 <a:latin typeface="Goetheanum Schrift Leise" pitchFamily="34" charset="0"/>
                 <a:ea typeface="Goetheanum Schrift Leise" pitchFamily="34" charset="-122"/>
                 <a:cs typeface="Goetheanum Schrift Leise" pitchFamily="34" charset="-120"/>
               </a:rPr>
-              <a:t>01</a:t>
+              <a:t>1</a:t>
             </a:r>
             <a:endParaRPr lang="en-US" sz="2600" dirty="0"/>
           </a:p>
@@ -10866,15 +10877,15 @@
               <a:buNone/>
             </a:pPr>
             <a:r>
-              <a:rPr lang="en-US" sz="2600" dirty="0">
-                <a:solidFill>
-                  <a:srgbClr val="005EB8"/>
+              <a:rPr lang="en-US" sz="1800" dirty="0">
+                <a:solidFill>
+                  <a:srgbClr val="6B7480"/>
                 </a:solidFill>
                 <a:latin typeface="Goetheanum Schrift Leise" pitchFamily="34" charset="0"/>
                 <a:ea typeface="Goetheanum Schrift Leise" pitchFamily="34" charset="-122"/>
                 <a:cs typeface="Goetheanum Schrift Leise" pitchFamily="34" charset="-120"/>
               </a:rPr>
-              <a:t>02</a:t>
+              <a:t>2</a:t>
             </a:r>
             <a:endParaRPr lang="en-US" sz="2600" dirty="0"/>
           </a:p>
@@ -10967,15 +10978,15 @@
               <a:buNone/>
             </a:pPr>
             <a:r>
-              <a:rPr lang="en-US" sz="2600" dirty="0">
-                <a:solidFill>
-                  <a:srgbClr val="005EB8"/>
+              <a:rPr lang="en-US" sz="1800" dirty="0">
+                <a:solidFill>
+                  <a:srgbClr val="6B7480"/>
                 </a:solidFill>
                 <a:latin typeface="Goetheanum Schrift Leise" pitchFamily="34" charset="0"/>
                 <a:ea typeface="Goetheanum Schrift Leise" pitchFamily="34" charset="-122"/>
                 <a:cs typeface="Goetheanum Schrift Leise" pitchFamily="34" charset="-120"/>
               </a:rPr>
-              <a:t>03</a:t>
+              <a:t>3</a:t>
             </a:r>
             <a:endParaRPr lang="en-US" sz="2600" dirty="0"/>
           </a:p>
@@ -11068,15 +11079,15 @@
               <a:buNone/>
             </a:pPr>
             <a:r>
-              <a:rPr lang="en-US" sz="2600" dirty="0">
-                <a:solidFill>
-                  <a:srgbClr val="005EB8"/>
+              <a:rPr lang="en-US" sz="1800" dirty="0">
+                <a:solidFill>
+                  <a:srgbClr val="6B7480"/>
                 </a:solidFill>
                 <a:latin typeface="Goetheanum Schrift Leise" pitchFamily="34" charset="0"/>
                 <a:ea typeface="Goetheanum Schrift Leise" pitchFamily="34" charset="-122"/>
                 <a:cs typeface="Goetheanum Schrift Leise" pitchFamily="34" charset="-120"/>
               </a:rPr>
-              <a:t>04</a:t>
+              <a:t>4</a:t>
             </a:r>
             <a:endParaRPr lang="en-US" sz="2600" dirty="0"/>
           </a:p>
@@ -11252,7 +11263,7 @@
                 <a:ea typeface="Goetheanum Schrift Leise" pitchFamily="34" charset="-122"/>
                 <a:cs typeface="Goetheanum Schrift Leise" pitchFamily="34" charset="-120"/>
               </a:rPr>
-              <a:t>01</a:t>
+              <a:t>1</a:t>
             </a:r>
             <a:endParaRPr lang="en-US" sz="5000" dirty="0"/>
           </a:p>
@@ -11448,7 +11459,7 @@
                 <a:ea typeface="Goetheanum Schrift Klar" pitchFamily="34" charset="-122"/>
                 <a:cs typeface="Goetheanum Schrift Klar" pitchFamily="34" charset="-120"/>
               </a:rPr>
-              <a:t>Kapitel 01</a:t>
+              <a:t>Kapitel 1</a:t>
             </a:r>
             <a:endParaRPr lang="en-US" sz="1300" dirty="0"/>
           </a:p>
@@ -11952,7 +11963,7 @@
                 <a:ea typeface="Goetheanum Schrift Klar" pitchFamily="34" charset="-122"/>
                 <a:cs typeface="Goetheanum Schrift Klar" pitchFamily="34" charset="-120"/>
               </a:rPr>
-              <a:t>Kapitel 01</a:t>
+              <a:t>Kapitel 1</a:t>
             </a:r>
             <a:endParaRPr lang="en-US" sz="1300" dirty="0"/>
           </a:p>

--- a/assets/templates/GoetheanumVorlageA4.pptx
+++ b/assets/templates/GoetheanumVorlageA4.pptx
@@ -10737,7 +10737,7 @@
               <a:buNone/>
             </a:pPr>
             <a:r>
-              <a:rPr lang="en-US" sz="2600" dirty="0">
+              <a:rPr lang="en-US" sz="1800" dirty="0">
                 <a:solidFill>
                   <a:srgbClr val="1A1A1A"/>
                 </a:solidFill>
@@ -10818,7 +10818,7 @@
               <a:buNone/>
             </a:pPr>
             <a:r>
-              <a:rPr lang="en-US" sz="1300" dirty="0">
+              <a:rPr lang="en-US" sz="2600" dirty="0">
                 <a:solidFill>
                   <a:srgbClr val="1A1A1A"/>
                 </a:solidFill>
@@ -10838,7 +10838,7 @@
               <a:buNone/>
             </a:pPr>
             <a:r>
-              <a:rPr lang="en-US" sz="1300" dirty="0">
+              <a:rPr lang="en-US" sz="1500" dirty="0">
                 <a:solidFill>
                   <a:srgbClr val="6B7480"/>
                 </a:solidFill>
@@ -10919,7 +10919,7 @@
               <a:buNone/>
             </a:pPr>
             <a:r>
-              <a:rPr lang="en-US" sz="1300" dirty="0">
+              <a:rPr lang="en-US" sz="2600" dirty="0">
                 <a:solidFill>
                   <a:srgbClr val="1A1A1A"/>
                 </a:solidFill>
@@ -10939,7 +10939,7 @@
               <a:buNone/>
             </a:pPr>
             <a:r>
-              <a:rPr lang="en-US" sz="1300" dirty="0">
+              <a:rPr lang="en-US" sz="1500" dirty="0">
                 <a:solidFill>
                   <a:srgbClr val="6B7480"/>
                 </a:solidFill>
@@ -11020,7 +11020,7 @@
               <a:buNone/>
             </a:pPr>
             <a:r>
-              <a:rPr lang="en-US" sz="1300" dirty="0">
+              <a:rPr lang="en-US" sz="2600" dirty="0">
                 <a:solidFill>
                   <a:srgbClr val="1A1A1A"/>
                 </a:solidFill>
@@ -11040,7 +11040,7 @@
               <a:buNone/>
             </a:pPr>
             <a:r>
-              <a:rPr lang="en-US" sz="1300" dirty="0">
+              <a:rPr lang="en-US" sz="1500" dirty="0">
                 <a:solidFill>
                   <a:srgbClr val="6B7480"/>
                 </a:solidFill>
@@ -11121,7 +11121,7 @@
               <a:buNone/>
             </a:pPr>
             <a:r>
-              <a:rPr lang="en-US" sz="1300" dirty="0">
+              <a:rPr lang="en-US" sz="2600" dirty="0">
                 <a:solidFill>
                   <a:srgbClr val="1A1A1A"/>
                 </a:solidFill>
@@ -11141,7 +11141,7 @@
               <a:buNone/>
             </a:pPr>
             <a:r>
-              <a:rPr lang="en-US" sz="1300" dirty="0">
+              <a:rPr lang="en-US" sz="1500" dirty="0">
                 <a:solidFill>
                   <a:srgbClr val="6B7480"/>
                 </a:solidFill>

--- a/assets/templates/GoetheanumVorlageA4.pptx
+++ b/assets/templates/GoetheanumVorlageA4.pptx
@@ -3954,7 +3954,7 @@
   <p:hf sldNum="0" hdr="0" ftr="0" dt="0"/>
   <p:txStyles>
     <p:titleStyle>
-      <a:lvl1pPr algn="ctr" defTabSz="914400" rtl="0" eaLnBrk="1" latinLnBrk="0" hangingPunct="1">
+      <a:lvl1pPr algn="l" defTabSz="914400" rtl="0" eaLnBrk="1" latinLnBrk="0" hangingPunct="1">
         <a:spcBef>
           <a:spcPct val="0"/>
         </a:spcBef>

--- a/assets/templates/GoetheanumVorlageA4.pptx
+++ b/assets/templates/GoetheanumVorlageA4.pptx
@@ -8601,9 +8601,9 @@
                 <a:solidFill>
                   <a:srgbClr val="6B7480"/>
                 </a:solidFill>
-                <a:latin typeface="Goetheanum Schrift Laut" pitchFamily="34" charset="0"/>
-                <a:ea typeface="Goetheanum Schrift Laut" pitchFamily="34" charset="-122"/>
-                <a:cs typeface="Goetheanum Schrift Laut" pitchFamily="34" charset="-120"/>
+                <a:latin typeface="Goetheanum Schrift Leise" pitchFamily="34" charset="0"/>
+                <a:ea typeface="Goetheanum Schrift Leise" pitchFamily="34" charset="-122"/>
+                <a:cs typeface="Goetheanum Schrift Leise" pitchFamily="34" charset="-120"/>
               </a:rPr>
               <a:t>‹Goetheanum Icons›</a:t>
             </a:r>

--- a/assets/templates/GoetheanumVorlageA4.pptx
+++ b/assets/templates/GoetheanumVorlageA4.pptx
@@ -1,6 +1,6 @@
 
 <file path=ppt/presentation.xml><?xml version="1.0" encoding="utf-8"?>
-<p:presentation xmlns:a="http://schemas.openxmlformats.org/drawingml/2006/main" xmlns:r="http://schemas.openxmlformats.org/officeDocument/2006/relationships" xmlns:p="http://schemas.openxmlformats.org/presentationml/2006/main" saveSubsetFonts="0" embedTrueTypeFonts="1" autoCompressPictures="0">
+<p:presentation xmlns:a="http://schemas.openxmlformats.org/drawingml/2006/main" xmlns:r="http://schemas.openxmlformats.org/officeDocument/2006/relationships" xmlns:p="http://schemas.openxmlformats.org/presentationml/2006/main" saveSubsetFonts="1" autoCompressPictures="0">
   <p:sldMasterIdLst>
     <p:sldMasterId id="2147483648" r:id="rId1"/>
   </p:sldMasterIdLst>
@@ -26,24 +26,6 @@
   </p:notesMasterIdLst>
   <p:sldSz cx="10689336" cy="7562088"/>
   <p:notesSz cx="7562088" cy="10689336"/>
-  <p:embeddedFontLst>
-    <p:embeddedFont>
-      <p:font typeface="Goetheanum Schrift Klar"/>
-      <p:regular r:id="rId22"/>
-    </p:embeddedFont>
-    <p:embeddedFont>
-      <p:font typeface="Goetheanum Schrift Laut"/>
-      <p:regular r:id="rId23"/>
-    </p:embeddedFont>
-    <p:embeddedFont>
-      <p:font typeface="Goetheanum Schrift Leise"/>
-      <p:regular r:id="rId24"/>
-    </p:embeddedFont>
-    <p:embeddedFont>
-      <p:font typeface="Goetheanum Icons"/>
-      <p:regular r:id="rId25"/>
-    </p:embeddedFont>
-  </p:embeddedFontLst>
   <p:defaultTextStyle>
     <a:lvl1pPr marL="0" algn="l" defTabSz="914400" rtl="0" eaLnBrk="1" latinLnBrk="0" hangingPunct="1">
       <a:defRPr sz="1800" kern="1200">
@@ -2195,6 +2177,1702 @@
 </p:sldLayout>
 </file>
 
+<file path=ppt/slideLayouts/slideLayout2.xml><?xml version="1.0" encoding="utf-8"?>
+<p:sldLayout xmlns:a="http://schemas.openxmlformats.org/drawingml/2006/main" xmlns:r="http://schemas.openxmlformats.org/officeDocument/2006/relationships" xmlns:p="http://schemas.openxmlformats.org/presentationml/2006/main" preserve="1">
+  <p:cSld name="GOE Titel (blau)">
+    <p:bg>
+      <p:bgPr>
+        <a:solidFill>
+          <a:srgbClr val="005EB8"/>
+        </a:solidFill>
+      </p:bgPr>
+    </p:bg>
+    <p:spTree>
+      <p:nvGrpSpPr>
+        <p:cNvPr id="1" name=""/>
+        <p:cNvGrpSpPr/>
+        <p:nvPr/>
+      </p:nvGrpSpPr>
+      <p:grpSpPr>
+        <a:xfrm>
+          <a:off x="0" y="0"/>
+          <a:ext cx="0" cy="0"/>
+          <a:chOff x="0" y="0"/>
+          <a:chExt cx="0" cy="0"/>
+        </a:xfrm>
+      </p:grpSpPr>
+      <p:pic>
+        <p:nvPicPr>
+          <p:cNvPr id="2" name="Image 0" descr="Logo Goetheanum"/>
+          <p:cNvPicPr>
+            <a:picLocks noChangeAspect="1"/>
+          </p:cNvPicPr>
+          <p:nvPr/>
+        </p:nvPicPr>
+        <p:blipFill>
+          <a:blip r:embed="rId1"/>
+          <a:stretch>
+            <a:fillRect/>
+          </a:stretch>
+        </p:blipFill>
+        <p:spPr>
+          <a:xfrm>
+            <a:off x="548640" y="466344"/>
+            <a:ext cx="1850284" cy="310896"/>
+          </a:xfrm>
+          <a:prstGeom prst="rect">
+            <a:avLst/>
+          </a:prstGeom>
+        </p:spPr>
+      </p:pic>
+      <p:sp>
+        <p:nvSpPr>
+          <p:cNvPr id="3" name="Text 0"/>
+          <p:cNvSpPr/>
+          <p:nvPr>
+            <p:ph idx="101" type="title" hasCustomPrompt="1"/>
+          </p:nvPr>
+        </p:nvSpPr>
+        <p:spPr>
+          <a:xfrm>
+            <a:off x="2002536" y="2487168"/>
+            <a:ext cx="7680960" cy="1280160"/>
+          </a:xfrm>
+          <a:prstGeom prst="rect">
+            <a:avLst/>
+          </a:prstGeom>
+          <a:noFill/>
+          <a:ln/>
+        </p:spPr>
+        <p:txBody>
+          <a:bodyPr wrap="square" rtlCol="0"/>
+          <a:lstStyle>
+            <a:lvl1pPr indent="0" marL="0">
+              <a:buNone/>
+              <a:defRPr lang="en-US" sz="5000" dirty="0">
+                <a:solidFill>
+                  <a:srgbClr val="FFFFFF"/>
+                </a:solidFill>
+                <a:latin typeface="Goetheanum Schrift Klar" pitchFamily="34" charset="0"/>
+                <a:ea typeface="Goetheanum Schrift Klar" pitchFamily="34" charset="-122"/>
+                <a:cs typeface="Goetheanum Schrift Klar" pitchFamily="34" charset="-120"/>
+              </a:defRPr>
+            </a:lvl1pPr>
+          </a:lstStyle>
+          <a:p>
+            <a:pPr indent="0" marL="0">
+              <a:buNone/>
+            </a:pPr>
+            <a:r>
+              <a:rPr lang="en-US" sz="5000" dirty="0">
+                <a:solidFill>
+                  <a:srgbClr val="FFFFFF"/>
+                </a:solidFill>
+                <a:latin typeface="Goetheanum Schrift Klar" pitchFamily="34" charset="0"/>
+                <a:ea typeface="Goetheanum Schrift Klar" pitchFamily="34" charset="-122"/>
+                <a:cs typeface="Goetheanum Schrift Klar" pitchFamily="34" charset="-120"/>
+              </a:rPr>
+              <a:t>Titel der Präsentation</a:t>
+            </a:r>
+            <a:endParaRPr lang="en-US" sz="5000" dirty="0"/>
+          </a:p>
+        </p:txBody>
+      </p:sp>
+      <p:sp>
+        <p:nvSpPr>
+          <p:cNvPr id="4" name="Text 0"/>
+          <p:cNvSpPr/>
+          <p:nvPr>
+            <p:ph idx="102" type="body" hasCustomPrompt="1"/>
+          </p:nvPr>
+        </p:nvSpPr>
+        <p:spPr>
+          <a:xfrm>
+            <a:off x="2002536" y="3712464"/>
+            <a:ext cx="7680960" cy="548640"/>
+          </a:xfrm>
+          <a:prstGeom prst="rect">
+            <a:avLst/>
+          </a:prstGeom>
+          <a:noFill/>
+          <a:ln/>
+        </p:spPr>
+        <p:txBody>
+          <a:bodyPr wrap="square" rtlCol="0"/>
+          <a:lstStyle>
+            <a:lvl1pPr indent="0" marL="0">
+              <a:buNone/>
+              <a:defRPr lang="en-US" sz="2600" dirty="0">
+                <a:solidFill>
+                  <a:srgbClr val="BFD7F0"/>
+                </a:solidFill>
+                <a:latin typeface="Goetheanum Schrift Leise" pitchFamily="34" charset="0"/>
+                <a:ea typeface="Goetheanum Schrift Leise" pitchFamily="34" charset="-122"/>
+                <a:cs typeface="Goetheanum Schrift Leise" pitchFamily="34" charset="-120"/>
+              </a:defRPr>
+            </a:lvl1pPr>
+          </a:lstStyle>
+          <a:p>
+            <a:pPr indent="0" marL="0">
+              <a:buNone/>
+            </a:pPr>
+            <a:r>
+              <a:rPr lang="en-US" sz="2600" dirty="0">
+                <a:solidFill>
+                  <a:srgbClr val="BFD7F0"/>
+                </a:solidFill>
+                <a:latin typeface="Goetheanum Schrift Leise" pitchFamily="34" charset="0"/>
+                <a:ea typeface="Goetheanum Schrift Leise" pitchFamily="34" charset="-122"/>
+                <a:cs typeface="Goetheanum Schrift Leise" pitchFamily="34" charset="-120"/>
+              </a:rPr>
+              <a:t>Untertitel oder Anlass in einem Satz</a:t>
+            </a:r>
+            <a:endParaRPr lang="en-US" sz="2600" dirty="0"/>
+          </a:p>
+        </p:txBody>
+      </p:sp>
+      <p:sp>
+        <p:nvSpPr>
+          <p:cNvPr id="5" name="Text 0"/>
+          <p:cNvSpPr/>
+          <p:nvPr>
+            <p:ph idx="103" type="body" hasCustomPrompt="1"/>
+          </p:nvPr>
+        </p:nvSpPr>
+        <p:spPr>
+          <a:xfrm>
+            <a:off x="548640" y="6675120"/>
+            <a:ext cx="9592056" cy="320040"/>
+          </a:xfrm>
+          <a:prstGeom prst="rect">
+            <a:avLst/>
+          </a:prstGeom>
+          <a:noFill/>
+          <a:ln/>
+        </p:spPr>
+        <p:txBody>
+          <a:bodyPr wrap="square" rtlCol="0"/>
+          <a:lstStyle>
+            <a:lvl1pPr algn="r" indent="0" marL="0">
+              <a:buNone/>
+              <a:defRPr lang="en-US" sz="1300" dirty="0">
+                <a:solidFill>
+                  <a:srgbClr val="9CC3EC"/>
+                </a:solidFill>
+                <a:latin typeface="Goetheanum Schrift Klar" pitchFamily="34" charset="0"/>
+                <a:ea typeface="Goetheanum Schrift Klar" pitchFamily="34" charset="-122"/>
+                <a:cs typeface="Goetheanum Schrift Klar" pitchFamily="34" charset="-120"/>
+              </a:defRPr>
+            </a:lvl1pPr>
+          </a:lstStyle>
+          <a:p>
+            <a:pPr algn="r" indent="0" marL="0">
+              <a:buNone/>
+            </a:pPr>
+            <a:r>
+              <a:rPr lang="en-US" sz="1300" dirty="0">
+                <a:solidFill>
+                  <a:srgbClr val="9CC3EC"/>
+                </a:solidFill>
+                <a:latin typeface="Goetheanum Schrift Klar" pitchFamily="34" charset="0"/>
+                <a:ea typeface="Goetheanum Schrift Klar" pitchFamily="34" charset="-122"/>
+                <a:cs typeface="Goetheanum Schrift Klar" pitchFamily="34" charset="-120"/>
+              </a:rPr>
+              <a:t>Vorname Name · Bereich · 00.00.2026</a:t>
+            </a:r>
+            <a:endParaRPr lang="en-US" sz="1300" dirty="0"/>
+          </a:p>
+        </p:txBody>
+      </p:sp>
+    </p:spTree>
+  </p:cSld>
+  <p:clrMapOvr>
+    <a:masterClrMapping/>
+  </p:clrMapOvr>
+</p:sldLayout>
+</file>
+
+<file path=ppt/slideLayouts/slideLayout3.xml><?xml version="1.0" encoding="utf-8"?>
+<p:sldLayout xmlns:a="http://schemas.openxmlformats.org/drawingml/2006/main" xmlns:r="http://schemas.openxmlformats.org/officeDocument/2006/relationships" xmlns:p="http://schemas.openxmlformats.org/presentationml/2006/main" preserve="1">
+  <p:cSld name="GOE Trenner (blau)">
+    <p:bg>
+      <p:bgPr>
+        <a:solidFill>
+          <a:srgbClr val="005EB8"/>
+        </a:solidFill>
+      </p:bgPr>
+    </p:bg>
+    <p:spTree>
+      <p:nvGrpSpPr>
+        <p:cNvPr id="1" name=""/>
+        <p:cNvGrpSpPr/>
+        <p:nvPr/>
+      </p:nvGrpSpPr>
+      <p:grpSpPr>
+        <a:xfrm>
+          <a:off x="0" y="0"/>
+          <a:ext cx="0" cy="0"/>
+          <a:chOff x="0" y="0"/>
+          <a:chExt cx="0" cy="0"/>
+        </a:xfrm>
+      </p:grpSpPr>
+      <p:pic>
+        <p:nvPicPr>
+          <p:cNvPr id="2" name="Image 0" descr="Logo Goetheanum"/>
+          <p:cNvPicPr>
+            <a:picLocks noChangeAspect="1"/>
+          </p:cNvPicPr>
+          <p:nvPr/>
+        </p:nvPicPr>
+        <p:blipFill>
+          <a:blip r:embed="rId1"/>
+          <a:stretch>
+            <a:fillRect/>
+          </a:stretch>
+        </p:blipFill>
+        <p:spPr>
+          <a:xfrm>
+            <a:off x="548640" y="502920"/>
+            <a:ext cx="1088402" cy="182880"/>
+          </a:xfrm>
+          <a:prstGeom prst="rect">
+            <a:avLst/>
+          </a:prstGeom>
+        </p:spPr>
+      </p:pic>
+      <p:sp>
+        <p:nvSpPr>
+          <p:cNvPr id="3" name="Text 0"/>
+          <p:cNvSpPr/>
+          <p:nvPr/>
+        </p:nvSpPr>
+        <p:spPr>
+          <a:xfrm>
+            <a:off x="4654296" y="6995160"/>
+            <a:ext cx="5047488" cy="274320"/>
+          </a:xfrm>
+          <a:prstGeom prst="rect">
+            <a:avLst/>
+          </a:prstGeom>
+          <a:noFill/>
+          <a:ln/>
+        </p:spPr>
+        <p:txBody>
+          <a:bodyPr wrap="square" lIns="0" tIns="0" rIns="0" bIns="0" rtlCol="0" anchor="ctr"/>
+          <a:lstStyle/>
+          <a:p>
+            <a:pPr algn="r" indent="0" marL="0">
+              <a:buNone/>
+            </a:pPr>
+            <a:r>
+              <a:rPr lang="en-US" sz="900" dirty="0">
+                <a:solidFill>
+                  <a:srgbClr val="9CC3EC"/>
+                </a:solidFill>
+                <a:latin typeface="Goetheanum Schrift Klar" pitchFamily="34" charset="0"/>
+                <a:ea typeface="Goetheanum Schrift Klar" pitchFamily="34" charset="-122"/>
+                <a:cs typeface="Goetheanum Schrift Klar" pitchFamily="34" charset="-120"/>
+              </a:rPr>
+              <a:t>Titel der Präsentation · 00.00.2026 ·</a:t>
+            </a:r>
+            <a:endParaRPr lang="en-US" sz="900" dirty="0"/>
+          </a:p>
+        </p:txBody>
+      </p:sp>
+      <p:sp>
+        <p:nvSpPr>
+          <p:cNvPr id="4" name="Text 1"/>
+          <p:cNvSpPr/>
+          <p:nvPr>
+            <p:ph idx="102" type="body" hasCustomPrompt="1"/>
+          </p:nvPr>
+        </p:nvSpPr>
+        <p:spPr>
+          <a:xfrm>
+            <a:off x="3081528" y="1828800"/>
+            <a:ext cx="2743200" cy="1463040"/>
+          </a:xfrm>
+          <a:prstGeom prst="rect">
+            <a:avLst/>
+          </a:prstGeom>
+          <a:noFill/>
+          <a:ln/>
+        </p:spPr>
+        <p:txBody>
+          <a:bodyPr wrap="square" rtlCol="0"/>
+          <a:lstStyle>
+            <a:lvl1pPr indent="0" marL="0">
+              <a:buNone/>
+              <a:defRPr lang="en-US" sz="5000" dirty="0">
+                <a:solidFill>
+                  <a:srgbClr val="4D90D6"/>
+                </a:solidFill>
+                <a:latin typeface="Goetheanum Schrift Leise" pitchFamily="34" charset="0"/>
+                <a:ea typeface="Goetheanum Schrift Leise" pitchFamily="34" charset="-122"/>
+                <a:cs typeface="Goetheanum Schrift Leise" pitchFamily="34" charset="-120"/>
+              </a:defRPr>
+            </a:lvl1pPr>
+          </a:lstStyle>
+          <a:p>
+            <a:pPr indent="0" marL="0">
+              <a:buNone/>
+            </a:pPr>
+            <a:r>
+              <a:rPr lang="en-US" sz="5000" dirty="0">
+                <a:solidFill>
+                  <a:srgbClr val="4D90D6"/>
+                </a:solidFill>
+                <a:latin typeface="Goetheanum Schrift Leise" pitchFamily="34" charset="0"/>
+                <a:ea typeface="Goetheanum Schrift Leise" pitchFamily="34" charset="-122"/>
+                <a:cs typeface="Goetheanum Schrift Leise" pitchFamily="34" charset="-120"/>
+              </a:rPr>
+              <a:t>01</a:t>
+            </a:r>
+            <a:endParaRPr lang="en-US" sz="5000" dirty="0"/>
+          </a:p>
+        </p:txBody>
+      </p:sp>
+      <p:sp>
+        <p:nvSpPr>
+          <p:cNvPr id="5" name="Text 1"/>
+          <p:cNvSpPr/>
+          <p:nvPr>
+            <p:ph idx="103" type="title" hasCustomPrompt="1"/>
+          </p:nvPr>
+        </p:nvSpPr>
+        <p:spPr>
+          <a:xfrm>
+            <a:off x="3081528" y="3383280"/>
+            <a:ext cx="7059168" cy="640080"/>
+          </a:xfrm>
+          <a:prstGeom prst="rect">
+            <a:avLst/>
+          </a:prstGeom>
+          <a:noFill/>
+          <a:ln/>
+        </p:spPr>
+        <p:txBody>
+          <a:bodyPr wrap="square" rtlCol="0"/>
+          <a:lstStyle>
+            <a:lvl1pPr indent="0" marL="0">
+              <a:buNone/>
+              <a:defRPr lang="en-US" sz="2600" dirty="0">
+                <a:solidFill>
+                  <a:srgbClr val="FFFFFF"/>
+                </a:solidFill>
+                <a:latin typeface="Goetheanum Schrift Deutlich" pitchFamily="34" charset="0"/>
+                <a:ea typeface="Goetheanum Schrift Deutlich" pitchFamily="34" charset="-122"/>
+                <a:cs typeface="Goetheanum Schrift Deutlich" pitchFamily="34" charset="-120"/>
+              </a:defRPr>
+            </a:lvl1pPr>
+          </a:lstStyle>
+          <a:p>
+            <a:pPr indent="0" marL="0">
+              <a:buNone/>
+            </a:pPr>
+            <a:r>
+              <a:rPr lang="en-US" sz="2600" dirty="0">
+                <a:solidFill>
+                  <a:srgbClr val="FFFFFF"/>
+                </a:solidFill>
+                <a:latin typeface="Goetheanum Schrift Deutlich" pitchFamily="34" charset="0"/>
+                <a:ea typeface="Goetheanum Schrift Deutlich" pitchFamily="34" charset="-122"/>
+                <a:cs typeface="Goetheanum Schrift Deutlich" pitchFamily="34" charset="-120"/>
+              </a:rPr>
+              <a:t>Titel des Kapitels</a:t>
+            </a:r>
+            <a:endParaRPr lang="en-US" sz="2600" dirty="0"/>
+          </a:p>
+        </p:txBody>
+      </p:sp>
+      <p:sp>
+        <p:nvSpPr>
+          <p:cNvPr id="6" name="Text 1"/>
+          <p:cNvSpPr/>
+          <p:nvPr>
+            <p:ph idx="104" type="body" hasCustomPrompt="1"/>
+          </p:nvPr>
+        </p:nvSpPr>
+        <p:spPr>
+          <a:xfrm>
+            <a:off x="3081528" y="4114800"/>
+            <a:ext cx="6400800" cy="411480"/>
+          </a:xfrm>
+          <a:prstGeom prst="rect">
+            <a:avLst/>
+          </a:prstGeom>
+          <a:noFill/>
+          <a:ln/>
+        </p:spPr>
+        <p:txBody>
+          <a:bodyPr wrap="square" rtlCol="0"/>
+          <a:lstStyle>
+            <a:lvl1pPr indent="0" marL="0">
+              <a:buNone/>
+              <a:defRPr lang="en-US" sz="1800" dirty="0">
+                <a:solidFill>
+                  <a:srgbClr val="BFD7F0"/>
+                </a:solidFill>
+                <a:latin typeface="Goetheanum Schrift Leise" pitchFamily="34" charset="0"/>
+                <a:ea typeface="Goetheanum Schrift Leise" pitchFamily="34" charset="-122"/>
+                <a:cs typeface="Goetheanum Schrift Leise" pitchFamily="34" charset="-120"/>
+              </a:defRPr>
+            </a:lvl1pPr>
+          </a:lstStyle>
+          <a:p>
+            <a:pPr indent="0" marL="0">
+              <a:buNone/>
+            </a:pPr>
+            <a:r>
+              <a:rPr lang="en-US" sz="1800" dirty="0">
+                <a:solidFill>
+                  <a:srgbClr val="BFD7F0"/>
+                </a:solidFill>
+                <a:latin typeface="Goetheanum Schrift Leise" pitchFamily="34" charset="0"/>
+                <a:ea typeface="Goetheanum Schrift Leise" pitchFamily="34" charset="-122"/>
+                <a:cs typeface="Goetheanum Schrift Leise" pitchFamily="34" charset="-120"/>
+              </a:rPr>
+              <a:t>Ein Satz, der das Kapitel öffnet.</a:t>
+            </a:r>
+            <a:endParaRPr lang="en-US" sz="1800" dirty="0"/>
+          </a:p>
+        </p:txBody>
+      </p:sp>
+      <p:sp>
+        <p:nvSpPr>
+          <p:cNvPr id="25" name="Slide Number Placeholder 0"/>
+          <p:cNvSpPr>
+            <a:spLocks noGrp="1"/>
+          </p:cNvSpPr>
+          <p:nvPr>
+            <p:ph type="sldNum" sz="quarter" idx="4294967295"/>
+          </p:nvPr>
+        </p:nvSpPr>
+        <p:spPr>
+          <a:xfrm>
+            <a:off x="9747504" y="6995160"/>
+            <a:ext cx="393192" cy="274320"/>
+          </a:xfrm>
+          <a:prstGeom prst="rect">
+            <a:avLst/>
+          </a:prstGeom>
+          <a:extLst>
+            <a:ext uri="{C572A759-6A51-4108-AA02-DFA0A04FC94B}">
+              <ma14:wrappingTextBoxFlag xmlns:ma14="http://schemas.microsoft.com/office/mac/drawingml/2011/main" val="0"/>
+            </a:ext>
+          </a:extLst>
+        </p:spPr>
+        <p:txBody>
+          <a:bodyPr anchor="ctr"/>
+          <a:lstStyle>
+            <a:lvl1pPr>
+              <a:defRPr sz="900">
+                <a:solidFill>
+                  <a:srgbClr val="9CC3EC"/>
+                </a:solidFill>
+                <a:latin typeface="Goetheanum Schrift Klar"/>
+                <a:ea typeface="Goetheanum Schrift Klar"/>
+                <a:cs typeface="Goetheanum Schrift Klar"/>
+              </a:defRPr>
+            </a:lvl1pPr>
+          </a:lstStyle>
+          <a:p>
+            <a:pPr algn="l"/>
+            <a:fld id="{F7021451-1387-4CA6-816F-3879F97B5CBC}" type="slidenum">
+              <a:rPr b="0" lang="en-US"/>
+              <a:t>1003</a:t>
+            </a:fld>
+            <a:endParaRPr lang="en-US"/>
+          </a:p>
+        </p:txBody>
+      </p:sp>
+    </p:spTree>
+  </p:cSld>
+  <p:clrMapOvr>
+    <a:masterClrMapping/>
+  </p:clrMapOvr>
+</p:sldLayout>
+</file>
+
+<file path=ppt/slideLayouts/slideLayout4.xml><?xml version="1.0" encoding="utf-8"?>
+<p:sldLayout xmlns:a="http://schemas.openxmlformats.org/drawingml/2006/main" xmlns:r="http://schemas.openxmlformats.org/officeDocument/2006/relationships" xmlns:p="http://schemas.openxmlformats.org/presentationml/2006/main" preserve="1">
+  <p:cSld name="GOE Inhalt">
+    <p:bg>
+      <p:bgPr>
+        <a:solidFill>
+          <a:srgbClr val="FFFFFF"/>
+        </a:solidFill>
+      </p:bgPr>
+    </p:bg>
+    <p:spTree>
+      <p:nvGrpSpPr>
+        <p:cNvPr id="1" name=""/>
+        <p:cNvGrpSpPr/>
+        <p:nvPr/>
+      </p:nvGrpSpPr>
+      <p:grpSpPr>
+        <a:xfrm>
+          <a:off x="0" y="0"/>
+          <a:ext cx="0" cy="0"/>
+          <a:chOff x="0" y="0"/>
+          <a:chExt cx="0" cy="0"/>
+        </a:xfrm>
+      </p:grpSpPr>
+      <p:pic>
+        <p:nvPicPr>
+          <p:cNvPr id="2" name="Image 0" descr="Logo Goetheanum"/>
+          <p:cNvPicPr>
+            <a:picLocks noChangeAspect="1"/>
+          </p:cNvPicPr>
+          <p:nvPr/>
+        </p:nvPicPr>
+        <p:blipFill>
+          <a:blip r:embed="rId1"/>
+          <a:stretch>
+            <a:fillRect/>
+          </a:stretch>
+        </p:blipFill>
+        <p:spPr>
+          <a:xfrm>
+            <a:off x="548640" y="502920"/>
+            <a:ext cx="1088402" cy="182880"/>
+          </a:xfrm>
+          <a:prstGeom prst="rect">
+            <a:avLst/>
+          </a:prstGeom>
+        </p:spPr>
+      </p:pic>
+      <p:sp>
+        <p:nvSpPr>
+          <p:cNvPr id="3" name="Text 0"/>
+          <p:cNvSpPr/>
+          <p:nvPr/>
+        </p:nvSpPr>
+        <p:spPr>
+          <a:xfrm>
+            <a:off x="4654296" y="6995160"/>
+            <a:ext cx="5047488" cy="274320"/>
+          </a:xfrm>
+          <a:prstGeom prst="rect">
+            <a:avLst/>
+          </a:prstGeom>
+          <a:noFill/>
+          <a:ln/>
+        </p:spPr>
+        <p:txBody>
+          <a:bodyPr wrap="square" lIns="0" tIns="0" rIns="0" bIns="0" rtlCol="0" anchor="ctr"/>
+          <a:lstStyle/>
+          <a:p>
+            <a:pPr algn="r" indent="0" marL="0">
+              <a:buNone/>
+            </a:pPr>
+            <a:r>
+              <a:rPr lang="en-US" sz="900" dirty="0">
+                <a:solidFill>
+                  <a:srgbClr val="6B7480"/>
+                </a:solidFill>
+                <a:latin typeface="Goetheanum Schrift Klar" pitchFamily="34" charset="0"/>
+                <a:ea typeface="Goetheanum Schrift Klar" pitchFamily="34" charset="-122"/>
+                <a:cs typeface="Goetheanum Schrift Klar" pitchFamily="34" charset="-120"/>
+              </a:rPr>
+              <a:t>Titel der Präsentation · 00.00.2026 ·</a:t>
+            </a:r>
+            <a:endParaRPr lang="en-US" sz="900" dirty="0"/>
+          </a:p>
+        </p:txBody>
+      </p:sp>
+      <p:sp>
+        <p:nvSpPr>
+          <p:cNvPr id="4" name="Text 1"/>
+          <p:cNvSpPr/>
+          <p:nvPr>
+            <p:ph idx="102" type="body" hasCustomPrompt="1"/>
+          </p:nvPr>
+        </p:nvSpPr>
+        <p:spPr>
+          <a:xfrm>
+            <a:off x="548640" y="1143000"/>
+            <a:ext cx="4572000" cy="274320"/>
+          </a:xfrm>
+          <a:prstGeom prst="rect">
+            <a:avLst/>
+          </a:prstGeom>
+          <a:noFill/>
+          <a:ln/>
+        </p:spPr>
+        <p:txBody>
+          <a:bodyPr wrap="square" rtlCol="0"/>
+          <a:lstStyle>
+            <a:lvl1pPr indent="0" marL="0">
+              <a:buNone/>
+              <a:defRPr lang="en-US" sz="1300" dirty="0">
+                <a:solidFill>
+                  <a:srgbClr val="005EB8"/>
+                </a:solidFill>
+                <a:latin typeface="Goetheanum Schrift Klar" pitchFamily="34" charset="0"/>
+                <a:ea typeface="Goetheanum Schrift Klar" pitchFamily="34" charset="-122"/>
+                <a:cs typeface="Goetheanum Schrift Klar" pitchFamily="34" charset="-120"/>
+              </a:defRPr>
+            </a:lvl1pPr>
+          </a:lstStyle>
+          <a:p>
+            <a:pPr indent="0" marL="0">
+              <a:buNone/>
+            </a:pPr>
+            <a:r>
+              <a:rPr lang="en-US" sz="1300" dirty="0">
+                <a:solidFill>
+                  <a:srgbClr val="005EB8"/>
+                </a:solidFill>
+                <a:latin typeface="Goetheanum Schrift Klar" pitchFamily="34" charset="0"/>
+                <a:ea typeface="Goetheanum Schrift Klar" pitchFamily="34" charset="-122"/>
+                <a:cs typeface="Goetheanum Schrift Klar" pitchFamily="34" charset="-120"/>
+              </a:rPr>
+              <a:t>Kapitel</a:t>
+            </a:r>
+            <a:endParaRPr lang="en-US" sz="1300" dirty="0"/>
+          </a:p>
+        </p:txBody>
+      </p:sp>
+      <p:sp>
+        <p:nvSpPr>
+          <p:cNvPr id="5" name="Text 1"/>
+          <p:cNvSpPr/>
+          <p:nvPr>
+            <p:ph idx="103" type="title" hasCustomPrompt="1"/>
+          </p:nvPr>
+        </p:nvSpPr>
+        <p:spPr>
+          <a:xfrm>
+            <a:off x="548640" y="1463040"/>
+            <a:ext cx="9592056" cy="594360"/>
+          </a:xfrm>
+          <a:prstGeom prst="rect">
+            <a:avLst/>
+          </a:prstGeom>
+          <a:noFill/>
+          <a:ln/>
+        </p:spPr>
+        <p:txBody>
+          <a:bodyPr wrap="square" rtlCol="0"/>
+          <a:lstStyle>
+            <a:lvl1pPr indent="0" marL="0">
+              <a:buNone/>
+              <a:defRPr lang="en-US" sz="2600" dirty="0">
+                <a:solidFill>
+                  <a:srgbClr val="1A1A1A"/>
+                </a:solidFill>
+                <a:latin typeface="Goetheanum Schrift Deutlich" pitchFamily="34" charset="0"/>
+                <a:ea typeface="Goetheanum Schrift Deutlich" pitchFamily="34" charset="-122"/>
+                <a:cs typeface="Goetheanum Schrift Deutlich" pitchFamily="34" charset="-120"/>
+              </a:defRPr>
+            </a:lvl1pPr>
+          </a:lstStyle>
+          <a:p>
+            <a:pPr indent="0" marL="0">
+              <a:buNone/>
+            </a:pPr>
+            <a:r>
+              <a:rPr lang="en-US" sz="2600" dirty="0">
+                <a:solidFill>
+                  <a:srgbClr val="1A1A1A"/>
+                </a:solidFill>
+                <a:latin typeface="Goetheanum Schrift Deutlich" pitchFamily="34" charset="0"/>
+                <a:ea typeface="Goetheanum Schrift Deutlich" pitchFamily="34" charset="-122"/>
+                <a:cs typeface="Goetheanum Schrift Deutlich" pitchFamily="34" charset="-120"/>
+              </a:rPr>
+              <a:t>Folientitel</a:t>
+            </a:r>
+            <a:endParaRPr lang="en-US" sz="2600" dirty="0"/>
+          </a:p>
+        </p:txBody>
+      </p:sp>
+      <p:sp>
+        <p:nvSpPr>
+          <p:cNvPr id="25" name="Slide Number Placeholder 0"/>
+          <p:cNvSpPr>
+            <a:spLocks noGrp="1"/>
+          </p:cNvSpPr>
+          <p:nvPr>
+            <p:ph type="sldNum" sz="quarter" idx="4294967295"/>
+          </p:nvPr>
+        </p:nvSpPr>
+        <p:spPr>
+          <a:xfrm>
+            <a:off x="9747504" y="6995160"/>
+            <a:ext cx="393192" cy="274320"/>
+          </a:xfrm>
+          <a:prstGeom prst="rect">
+            <a:avLst/>
+          </a:prstGeom>
+          <a:extLst>
+            <a:ext uri="{C572A759-6A51-4108-AA02-DFA0A04FC94B}">
+              <ma14:wrappingTextBoxFlag xmlns:ma14="http://schemas.microsoft.com/office/mac/drawingml/2011/main" val="0"/>
+            </a:ext>
+          </a:extLst>
+        </p:spPr>
+        <p:txBody>
+          <a:bodyPr anchor="ctr"/>
+          <a:lstStyle>
+            <a:lvl1pPr>
+              <a:defRPr sz="900">
+                <a:solidFill>
+                  <a:srgbClr val="6B7480"/>
+                </a:solidFill>
+                <a:latin typeface="Goetheanum Schrift Klar"/>
+                <a:ea typeface="Goetheanum Schrift Klar"/>
+                <a:cs typeface="Goetheanum Schrift Klar"/>
+              </a:defRPr>
+            </a:lvl1pPr>
+          </a:lstStyle>
+          <a:p>
+            <a:pPr algn="l"/>
+            <a:fld id="{F7021451-1387-4CA6-816F-3879F97B5CBC}" type="slidenum">
+              <a:rPr b="0" lang="en-US"/>
+              <a:t>1004</a:t>
+            </a:fld>
+            <a:endParaRPr lang="en-US"/>
+          </a:p>
+        </p:txBody>
+      </p:sp>
+    </p:spTree>
+  </p:cSld>
+  <p:clrMapOvr>
+    <a:masterClrMapping/>
+  </p:clrMapOvr>
+</p:sldLayout>
+</file>
+
+<file path=ppt/slideLayouts/slideLayout5.xml><?xml version="1.0" encoding="utf-8"?>
+<p:sldLayout xmlns:a="http://schemas.openxmlformats.org/drawingml/2006/main" xmlns:r="http://schemas.openxmlformats.org/officeDocument/2006/relationships" xmlns:p="http://schemas.openxmlformats.org/presentationml/2006/main" preserve="1">
+  <p:cSld name="GOE Inhalt eingerückt">
+    <p:bg>
+      <p:bgPr>
+        <a:solidFill>
+          <a:srgbClr val="FFFFFF"/>
+        </a:solidFill>
+      </p:bgPr>
+    </p:bg>
+    <p:spTree>
+      <p:nvGrpSpPr>
+        <p:cNvPr id="1" name=""/>
+        <p:cNvGrpSpPr/>
+        <p:nvPr/>
+      </p:nvGrpSpPr>
+      <p:grpSpPr>
+        <a:xfrm>
+          <a:off x="0" y="0"/>
+          <a:ext cx="0" cy="0"/>
+          <a:chOff x="0" y="0"/>
+          <a:chExt cx="0" cy="0"/>
+        </a:xfrm>
+      </p:grpSpPr>
+      <p:pic>
+        <p:nvPicPr>
+          <p:cNvPr id="2" name="Image 0" descr="Logo Goetheanum"/>
+          <p:cNvPicPr>
+            <a:picLocks noChangeAspect="1"/>
+          </p:cNvPicPr>
+          <p:nvPr/>
+        </p:nvPicPr>
+        <p:blipFill>
+          <a:blip r:embed="rId1"/>
+          <a:stretch>
+            <a:fillRect/>
+          </a:stretch>
+        </p:blipFill>
+        <p:spPr>
+          <a:xfrm>
+            <a:off x="548640" y="502920"/>
+            <a:ext cx="1088402" cy="182880"/>
+          </a:xfrm>
+          <a:prstGeom prst="rect">
+            <a:avLst/>
+          </a:prstGeom>
+        </p:spPr>
+      </p:pic>
+      <p:sp>
+        <p:nvSpPr>
+          <p:cNvPr id="3" name="Text 0"/>
+          <p:cNvSpPr/>
+          <p:nvPr/>
+        </p:nvSpPr>
+        <p:spPr>
+          <a:xfrm>
+            <a:off x="4654296" y="6995160"/>
+            <a:ext cx="5047488" cy="274320"/>
+          </a:xfrm>
+          <a:prstGeom prst="rect">
+            <a:avLst/>
+          </a:prstGeom>
+          <a:noFill/>
+          <a:ln/>
+        </p:spPr>
+        <p:txBody>
+          <a:bodyPr wrap="square" lIns="0" tIns="0" rIns="0" bIns="0" rtlCol="0" anchor="ctr"/>
+          <a:lstStyle/>
+          <a:p>
+            <a:pPr algn="r" indent="0" marL="0">
+              <a:buNone/>
+            </a:pPr>
+            <a:r>
+              <a:rPr lang="en-US" sz="900" dirty="0">
+                <a:solidFill>
+                  <a:srgbClr val="6B7480"/>
+                </a:solidFill>
+                <a:latin typeface="Goetheanum Schrift Klar" pitchFamily="34" charset="0"/>
+                <a:ea typeface="Goetheanum Schrift Klar" pitchFamily="34" charset="-122"/>
+                <a:cs typeface="Goetheanum Schrift Klar" pitchFamily="34" charset="-120"/>
+              </a:rPr>
+              <a:t>Titel der Präsentation · 00.00.2026 ·</a:t>
+            </a:r>
+            <a:endParaRPr lang="en-US" sz="900" dirty="0"/>
+          </a:p>
+        </p:txBody>
+      </p:sp>
+      <p:sp>
+        <p:nvSpPr>
+          <p:cNvPr id="4" name="Text 1"/>
+          <p:cNvSpPr/>
+          <p:nvPr>
+            <p:ph idx="102" type="body" hasCustomPrompt="1"/>
+          </p:nvPr>
+        </p:nvSpPr>
+        <p:spPr>
+          <a:xfrm>
+            <a:off x="2560320" y="1143000"/>
+            <a:ext cx="4572000" cy="274320"/>
+          </a:xfrm>
+          <a:prstGeom prst="rect">
+            <a:avLst/>
+          </a:prstGeom>
+          <a:noFill/>
+          <a:ln/>
+        </p:spPr>
+        <p:txBody>
+          <a:bodyPr wrap="square" rtlCol="0"/>
+          <a:lstStyle>
+            <a:lvl1pPr indent="0" marL="0">
+              <a:buNone/>
+              <a:defRPr lang="en-US" sz="1300" dirty="0">
+                <a:solidFill>
+                  <a:srgbClr val="005EB8"/>
+                </a:solidFill>
+                <a:latin typeface="Goetheanum Schrift Klar" pitchFamily="34" charset="0"/>
+                <a:ea typeface="Goetheanum Schrift Klar" pitchFamily="34" charset="-122"/>
+                <a:cs typeface="Goetheanum Schrift Klar" pitchFamily="34" charset="-120"/>
+              </a:defRPr>
+            </a:lvl1pPr>
+          </a:lstStyle>
+          <a:p>
+            <a:pPr indent="0" marL="0">
+              <a:buNone/>
+            </a:pPr>
+            <a:r>
+              <a:rPr lang="en-US" sz="1300" dirty="0">
+                <a:solidFill>
+                  <a:srgbClr val="005EB8"/>
+                </a:solidFill>
+                <a:latin typeface="Goetheanum Schrift Klar" pitchFamily="34" charset="0"/>
+                <a:ea typeface="Goetheanum Schrift Klar" pitchFamily="34" charset="-122"/>
+                <a:cs typeface="Goetheanum Schrift Klar" pitchFamily="34" charset="-120"/>
+              </a:rPr>
+              <a:t>Kapitel</a:t>
+            </a:r>
+            <a:endParaRPr lang="en-US" sz="1300" dirty="0"/>
+          </a:p>
+        </p:txBody>
+      </p:sp>
+      <p:sp>
+        <p:nvSpPr>
+          <p:cNvPr id="5" name="Text 1"/>
+          <p:cNvSpPr/>
+          <p:nvPr>
+            <p:ph idx="103" type="title" hasCustomPrompt="1"/>
+          </p:nvPr>
+        </p:nvSpPr>
+        <p:spPr>
+          <a:xfrm>
+            <a:off x="2560320" y="1463040"/>
+            <a:ext cx="7580376" cy="594360"/>
+          </a:xfrm>
+          <a:prstGeom prst="rect">
+            <a:avLst/>
+          </a:prstGeom>
+          <a:noFill/>
+          <a:ln/>
+        </p:spPr>
+        <p:txBody>
+          <a:bodyPr wrap="square" rtlCol="0"/>
+          <a:lstStyle>
+            <a:lvl1pPr indent="0" marL="0">
+              <a:buNone/>
+              <a:defRPr lang="en-US" sz="2600" dirty="0">
+                <a:solidFill>
+                  <a:srgbClr val="1A1A1A"/>
+                </a:solidFill>
+                <a:latin typeface="Goetheanum Schrift Deutlich" pitchFamily="34" charset="0"/>
+                <a:ea typeface="Goetheanum Schrift Deutlich" pitchFamily="34" charset="-122"/>
+                <a:cs typeface="Goetheanum Schrift Deutlich" pitchFamily="34" charset="-120"/>
+              </a:defRPr>
+            </a:lvl1pPr>
+          </a:lstStyle>
+          <a:p>
+            <a:pPr indent="0" marL="0">
+              <a:buNone/>
+            </a:pPr>
+            <a:r>
+              <a:rPr lang="en-US" sz="2600" dirty="0">
+                <a:solidFill>
+                  <a:srgbClr val="1A1A1A"/>
+                </a:solidFill>
+                <a:latin typeface="Goetheanum Schrift Deutlich" pitchFamily="34" charset="0"/>
+                <a:ea typeface="Goetheanum Schrift Deutlich" pitchFamily="34" charset="-122"/>
+                <a:cs typeface="Goetheanum Schrift Deutlich" pitchFamily="34" charset="-120"/>
+              </a:rPr>
+              <a:t>Folientitel</a:t>
+            </a:r>
+            <a:endParaRPr lang="en-US" sz="2600" dirty="0"/>
+          </a:p>
+        </p:txBody>
+      </p:sp>
+      <p:sp>
+        <p:nvSpPr>
+          <p:cNvPr id="25" name="Slide Number Placeholder 0"/>
+          <p:cNvSpPr>
+            <a:spLocks noGrp="1"/>
+          </p:cNvSpPr>
+          <p:nvPr>
+            <p:ph type="sldNum" sz="quarter" idx="4294967295"/>
+          </p:nvPr>
+        </p:nvSpPr>
+        <p:spPr>
+          <a:xfrm>
+            <a:off x="9747504" y="6995160"/>
+            <a:ext cx="393192" cy="274320"/>
+          </a:xfrm>
+          <a:prstGeom prst="rect">
+            <a:avLst/>
+          </a:prstGeom>
+          <a:extLst>
+            <a:ext uri="{C572A759-6A51-4108-AA02-DFA0A04FC94B}">
+              <ma14:wrappingTextBoxFlag xmlns:ma14="http://schemas.microsoft.com/office/mac/drawingml/2011/main" val="0"/>
+            </a:ext>
+          </a:extLst>
+        </p:spPr>
+        <p:txBody>
+          <a:bodyPr anchor="ctr"/>
+          <a:lstStyle>
+            <a:lvl1pPr>
+              <a:defRPr sz="900">
+                <a:solidFill>
+                  <a:srgbClr val="6B7480"/>
+                </a:solidFill>
+                <a:latin typeface="Goetheanum Schrift Klar"/>
+                <a:ea typeface="Goetheanum Schrift Klar"/>
+                <a:cs typeface="Goetheanum Schrift Klar"/>
+              </a:defRPr>
+            </a:lvl1pPr>
+          </a:lstStyle>
+          <a:p>
+            <a:pPr algn="l"/>
+            <a:fld id="{F7021451-1387-4CA6-816F-3879F97B5CBC}" type="slidenum">
+              <a:rPr b="0" lang="en-US"/>
+              <a:t>1005</a:t>
+            </a:fld>
+            <a:endParaRPr lang="en-US"/>
+          </a:p>
+        </p:txBody>
+      </p:sp>
+    </p:spTree>
+  </p:cSld>
+  <p:clrMapOvr>
+    <a:masterClrMapping/>
+  </p:clrMapOvr>
+</p:sldLayout>
+</file>
+
+<file path=ppt/slideLayouts/slideLayout6.xml><?xml version="1.0" encoding="utf-8"?>
+<p:sldLayout xmlns:a="http://schemas.openxmlformats.org/drawingml/2006/main" xmlns:r="http://schemas.openxmlformats.org/officeDocument/2006/relationships" xmlns:p="http://schemas.openxmlformats.org/presentationml/2006/main" preserve="1">
+  <p:cSld name="GOE Basis">
+    <p:bg>
+      <p:bgPr>
+        <a:solidFill>
+          <a:srgbClr val="FFFFFF"/>
+        </a:solidFill>
+      </p:bgPr>
+    </p:bg>
+    <p:spTree>
+      <p:nvGrpSpPr>
+        <p:cNvPr id="1" name=""/>
+        <p:cNvGrpSpPr/>
+        <p:nvPr/>
+      </p:nvGrpSpPr>
+      <p:grpSpPr>
+        <a:xfrm>
+          <a:off x="0" y="0"/>
+          <a:ext cx="0" cy="0"/>
+          <a:chOff x="0" y="0"/>
+          <a:chExt cx="0" cy="0"/>
+        </a:xfrm>
+      </p:grpSpPr>
+      <p:pic>
+        <p:nvPicPr>
+          <p:cNvPr id="2" name="Image 0" descr="Logo Goetheanum"/>
+          <p:cNvPicPr>
+            <a:picLocks noChangeAspect="1"/>
+          </p:cNvPicPr>
+          <p:nvPr/>
+        </p:nvPicPr>
+        <p:blipFill>
+          <a:blip r:embed="rId1"/>
+          <a:stretch>
+            <a:fillRect/>
+          </a:stretch>
+        </p:blipFill>
+        <p:spPr>
+          <a:xfrm>
+            <a:off x="548640" y="502920"/>
+            <a:ext cx="1088402" cy="182880"/>
+          </a:xfrm>
+          <a:prstGeom prst="rect">
+            <a:avLst/>
+          </a:prstGeom>
+        </p:spPr>
+      </p:pic>
+      <p:sp>
+        <p:nvSpPr>
+          <p:cNvPr id="3" name="Text 0"/>
+          <p:cNvSpPr/>
+          <p:nvPr/>
+        </p:nvSpPr>
+        <p:spPr>
+          <a:xfrm>
+            <a:off x="4654296" y="6995160"/>
+            <a:ext cx="5047488" cy="274320"/>
+          </a:xfrm>
+          <a:prstGeom prst="rect">
+            <a:avLst/>
+          </a:prstGeom>
+          <a:noFill/>
+          <a:ln/>
+        </p:spPr>
+        <p:txBody>
+          <a:bodyPr wrap="square" lIns="0" tIns="0" rIns="0" bIns="0" rtlCol="0" anchor="ctr"/>
+          <a:lstStyle/>
+          <a:p>
+            <a:pPr algn="r" indent="0" marL="0">
+              <a:buNone/>
+            </a:pPr>
+            <a:r>
+              <a:rPr lang="en-US" sz="900" dirty="0">
+                <a:solidFill>
+                  <a:srgbClr val="6B7480"/>
+                </a:solidFill>
+                <a:latin typeface="Goetheanum Schrift Klar" pitchFamily="34" charset="0"/>
+                <a:ea typeface="Goetheanum Schrift Klar" pitchFamily="34" charset="-122"/>
+                <a:cs typeface="Goetheanum Schrift Klar" pitchFamily="34" charset="-120"/>
+              </a:rPr>
+              <a:t>Titel der Präsentation · 00.00.2026 ·</a:t>
+            </a:r>
+            <a:endParaRPr lang="en-US" sz="900" dirty="0"/>
+          </a:p>
+        </p:txBody>
+      </p:sp>
+      <p:sp>
+        <p:nvSpPr>
+          <p:cNvPr id="25" name="Slide Number Placeholder 0"/>
+          <p:cNvSpPr>
+            <a:spLocks noGrp="1"/>
+          </p:cNvSpPr>
+          <p:nvPr>
+            <p:ph type="sldNum" sz="quarter" idx="4294967295"/>
+          </p:nvPr>
+        </p:nvSpPr>
+        <p:spPr>
+          <a:xfrm>
+            <a:off x="9747504" y="6995160"/>
+            <a:ext cx="393192" cy="274320"/>
+          </a:xfrm>
+          <a:prstGeom prst="rect">
+            <a:avLst/>
+          </a:prstGeom>
+          <a:extLst>
+            <a:ext uri="{C572A759-6A51-4108-AA02-DFA0A04FC94B}">
+              <ma14:wrappingTextBoxFlag xmlns:ma14="http://schemas.microsoft.com/office/mac/drawingml/2011/main" val="0"/>
+            </a:ext>
+          </a:extLst>
+        </p:spPr>
+        <p:txBody>
+          <a:bodyPr anchor="ctr"/>
+          <a:lstStyle>
+            <a:lvl1pPr>
+              <a:defRPr sz="900">
+                <a:solidFill>
+                  <a:srgbClr val="6B7480"/>
+                </a:solidFill>
+                <a:latin typeface="Goetheanum Schrift Klar"/>
+                <a:ea typeface="Goetheanum Schrift Klar"/>
+                <a:cs typeface="Goetheanum Schrift Klar"/>
+              </a:defRPr>
+            </a:lvl1pPr>
+          </a:lstStyle>
+          <a:p>
+            <a:pPr algn="l"/>
+            <a:fld id="{F7021451-1387-4CA6-816F-3879F97B5CBC}" type="slidenum">
+              <a:rPr b="0" lang="en-US"/>
+              <a:t>1006</a:t>
+            </a:fld>
+            <a:endParaRPr lang="en-US"/>
+          </a:p>
+        </p:txBody>
+      </p:sp>
+    </p:spTree>
+  </p:cSld>
+  <p:clrMapOvr>
+    <a:masterClrMapping/>
+  </p:clrMapOvr>
+</p:sldLayout>
+</file>
+
+<file path=ppt/slideLayouts/slideLayout7.xml><?xml version="1.0" encoding="utf-8"?>
+<p:sldLayout xmlns:a="http://schemas.openxmlformats.org/drawingml/2006/main" xmlns:r="http://schemas.openxmlformats.org/officeDocument/2006/relationships" xmlns:p="http://schemas.openxmlformats.org/presentationml/2006/main" preserve="1">
+  <p:cSld name="GOE Bild ganzseitig">
+    <p:bg>
+      <p:bgPr>
+        <a:solidFill>
+          <a:srgbClr val="FFFFFF"/>
+        </a:solidFill>
+      </p:bgPr>
+    </p:bg>
+    <p:spTree>
+      <p:nvGrpSpPr>
+        <p:cNvPr id="1" name=""/>
+        <p:cNvGrpSpPr/>
+        <p:nvPr/>
+      </p:nvGrpSpPr>
+      <p:grpSpPr>
+        <a:xfrm>
+          <a:off x="0" y="0"/>
+          <a:ext cx="0" cy="0"/>
+          <a:chOff x="0" y="0"/>
+          <a:chExt cx="0" cy="0"/>
+        </a:xfrm>
+      </p:grpSpPr>
+      <p:sp>
+        <p:nvSpPr>
+          <p:cNvPr id="2" name="Text 0"/>
+          <p:cNvSpPr/>
+          <p:nvPr>
+            <p:ph idx="100" hasCustomPrompt="1"/>
+          </p:nvPr>
+        </p:nvSpPr>
+        <p:spPr>
+          <a:xfrm>
+            <a:off x="0" y="0"/>
+            <a:ext cx="10689336" cy="7562088"/>
+          </a:xfrm>
+          <a:prstGeom prst="rect">
+            <a:avLst/>
+          </a:prstGeom>
+          <a:noFill/>
+          <a:ln/>
+        </p:spPr>
+        <p:txBody>
+          <a:bodyPr wrap="square" rtlCol="0"/>
+          <a:lstStyle>
+            <a:lvl1pPr indent="0" marL="0">
+              <a:buNone/>
+              <a:defRPr lang="en-US" dirty="0"/>
+            </a:lvl1pPr>
+          </a:lstStyle>
+          <a:p>
+            <a:pPr indent="0" marL="0">
+              <a:buNone/>
+            </a:pPr>
+            <a:r>
+              <a:rPr lang="en-US" dirty="0">
+                <a:solidFill>
+                  <a:srgbClr val="000000"/>
+                </a:solidFill>
+              </a:rPr>
+              <a:t>Bild einfügen</a:t>
+            </a:r>
+            <a:endParaRPr lang="en-US" dirty="0"/>
+          </a:p>
+        </p:txBody>
+      </p:sp>
+      <p:sp>
+        <p:nvSpPr>
+          <p:cNvPr id="3" name="Text 0"/>
+          <p:cNvSpPr/>
+          <p:nvPr>
+            <p:ph idx="101" type="body" hasCustomPrompt="1"/>
+          </p:nvPr>
+        </p:nvSpPr>
+        <p:spPr>
+          <a:xfrm>
+            <a:off x="548640" y="6995160"/>
+            <a:ext cx="4572000" cy="274320"/>
+          </a:xfrm>
+          <a:prstGeom prst="rect">
+            <a:avLst/>
+          </a:prstGeom>
+          <a:noFill/>
+          <a:ln/>
+        </p:spPr>
+        <p:txBody>
+          <a:bodyPr wrap="square" rtlCol="0"/>
+          <a:lstStyle>
+            <a:lvl1pPr indent="0" marL="0">
+              <a:buNone/>
+              <a:defRPr lang="en-US" sz="900" dirty="0">
+                <a:solidFill>
+                  <a:srgbClr val="FFFFFF"/>
+                </a:solidFill>
+                <a:latin typeface="Goetheanum Schrift Klar" pitchFamily="34" charset="0"/>
+                <a:ea typeface="Goetheanum Schrift Klar" pitchFamily="34" charset="-122"/>
+                <a:cs typeface="Goetheanum Schrift Klar" pitchFamily="34" charset="-120"/>
+              </a:defRPr>
+            </a:lvl1pPr>
+          </a:lstStyle>
+          <a:p>
+            <a:pPr indent="0" marL="0">
+              <a:buNone/>
+            </a:pPr>
+            <a:r>
+              <a:rPr lang="en-US" sz="900" dirty="0">
+                <a:solidFill>
+                  <a:srgbClr val="FFFFFF"/>
+                </a:solidFill>
+                <a:latin typeface="Goetheanum Schrift Klar" pitchFamily="34" charset="0"/>
+                <a:ea typeface="Goetheanum Schrift Klar" pitchFamily="34" charset="-122"/>
+                <a:cs typeface="Goetheanum Schrift Klar" pitchFamily="34" charset="-120"/>
+              </a:rPr>
+              <a:t>Bildlegende: Ort, Anlass, Fotografie</a:t>
+            </a:r>
+            <a:endParaRPr lang="en-US" sz="900" dirty="0"/>
+          </a:p>
+        </p:txBody>
+      </p:sp>
+      <p:sp>
+        <p:nvSpPr>
+          <p:cNvPr id="4" name="Text 0"/>
+          <p:cNvSpPr/>
+          <p:nvPr/>
+        </p:nvSpPr>
+        <p:spPr>
+          <a:xfrm>
+            <a:off x="4654296" y="6995160"/>
+            <a:ext cx="5047488" cy="274320"/>
+          </a:xfrm>
+          <a:prstGeom prst="rect">
+            <a:avLst/>
+          </a:prstGeom>
+          <a:noFill/>
+          <a:ln/>
+        </p:spPr>
+        <p:txBody>
+          <a:bodyPr wrap="square" lIns="0" tIns="0" rIns="0" bIns="0" rtlCol="0" anchor="ctr"/>
+          <a:lstStyle/>
+          <a:p>
+            <a:pPr algn="r" indent="0" marL="0">
+              <a:buNone/>
+            </a:pPr>
+            <a:r>
+              <a:rPr lang="en-US" sz="900" dirty="0">
+                <a:solidFill>
+                  <a:srgbClr val="FFFFFF"/>
+                </a:solidFill>
+                <a:latin typeface="Goetheanum Schrift Klar" pitchFamily="34" charset="0"/>
+                <a:ea typeface="Goetheanum Schrift Klar" pitchFamily="34" charset="-122"/>
+                <a:cs typeface="Goetheanum Schrift Klar" pitchFamily="34" charset="-120"/>
+              </a:rPr>
+              <a:t>Titel der Präsentation · 00.00.2026 ·</a:t>
+            </a:r>
+            <a:endParaRPr lang="en-US" sz="900" dirty="0"/>
+          </a:p>
+        </p:txBody>
+      </p:sp>
+      <p:sp>
+        <p:nvSpPr>
+          <p:cNvPr id="25" name="Slide Number Placeholder 0"/>
+          <p:cNvSpPr>
+            <a:spLocks noGrp="1"/>
+          </p:cNvSpPr>
+          <p:nvPr>
+            <p:ph type="sldNum" sz="quarter" idx="4294967295"/>
+          </p:nvPr>
+        </p:nvSpPr>
+        <p:spPr>
+          <a:xfrm>
+            <a:off x="9747504" y="6995160"/>
+            <a:ext cx="393192" cy="274320"/>
+          </a:xfrm>
+          <a:prstGeom prst="rect">
+            <a:avLst/>
+          </a:prstGeom>
+          <a:extLst>
+            <a:ext uri="{C572A759-6A51-4108-AA02-DFA0A04FC94B}">
+              <ma14:wrappingTextBoxFlag xmlns:ma14="http://schemas.microsoft.com/office/mac/drawingml/2011/main" val="0"/>
+            </a:ext>
+          </a:extLst>
+        </p:spPr>
+        <p:txBody>
+          <a:bodyPr anchor="ctr"/>
+          <a:lstStyle>
+            <a:lvl1pPr>
+              <a:defRPr sz="900">
+                <a:solidFill>
+                  <a:srgbClr val="FFFFFF"/>
+                </a:solidFill>
+                <a:latin typeface="Goetheanum Schrift Klar"/>
+                <a:ea typeface="Goetheanum Schrift Klar"/>
+                <a:cs typeface="Goetheanum Schrift Klar"/>
+              </a:defRPr>
+            </a:lvl1pPr>
+          </a:lstStyle>
+          <a:p>
+            <a:pPr algn="l"/>
+            <a:fld id="{F7021451-1387-4CA6-816F-3879F97B5CBC}" type="slidenum">
+              <a:rPr b="0" lang="en-US"/>
+              <a:t>1007</a:t>
+            </a:fld>
+            <a:endParaRPr lang="en-US"/>
+          </a:p>
+        </p:txBody>
+      </p:sp>
+    </p:spTree>
+  </p:cSld>
+  <p:clrMapOvr>
+    <a:masterClrMapping/>
+  </p:clrMapOvr>
+</p:sldLayout>
+</file>
+
+<file path=ppt/slideLayouts/slideLayout8.xml><?xml version="1.0" encoding="utf-8"?>
+<p:sldLayout xmlns:a="http://schemas.openxmlformats.org/drawingml/2006/main" xmlns:r="http://schemas.openxmlformats.org/officeDocument/2006/relationships" xmlns:p="http://schemas.openxmlformats.org/presentationml/2006/main" preserve="1">
+  <p:cSld name="GOE Bild und Text">
+    <p:bg>
+      <p:bgPr>
+        <a:solidFill>
+          <a:srgbClr val="FFFFFF"/>
+        </a:solidFill>
+      </p:bgPr>
+    </p:bg>
+    <p:spTree>
+      <p:nvGrpSpPr>
+        <p:cNvPr id="1" name=""/>
+        <p:cNvGrpSpPr/>
+        <p:nvPr/>
+      </p:nvGrpSpPr>
+      <p:grpSpPr>
+        <a:xfrm>
+          <a:off x="0" y="0"/>
+          <a:ext cx="0" cy="0"/>
+          <a:chOff x="0" y="0"/>
+          <a:chExt cx="0" cy="0"/>
+        </a:xfrm>
+      </p:grpSpPr>
+      <p:pic>
+        <p:nvPicPr>
+          <p:cNvPr id="2" name="Image 0" descr="Logo Goetheanum"/>
+          <p:cNvPicPr>
+            <a:picLocks noChangeAspect="1"/>
+          </p:cNvPicPr>
+          <p:nvPr/>
+        </p:nvPicPr>
+        <p:blipFill>
+          <a:blip r:embed="rId1"/>
+          <a:stretch>
+            <a:fillRect/>
+          </a:stretch>
+        </p:blipFill>
+        <p:spPr>
+          <a:xfrm>
+            <a:off x="548640" y="502920"/>
+            <a:ext cx="1088402" cy="182880"/>
+          </a:xfrm>
+          <a:prstGeom prst="rect">
+            <a:avLst/>
+          </a:prstGeom>
+        </p:spPr>
+      </p:pic>
+      <p:sp>
+        <p:nvSpPr>
+          <p:cNvPr id="3" name="Text 0"/>
+          <p:cNvSpPr/>
+          <p:nvPr>
+            <p:ph idx="101" hasCustomPrompt="1"/>
+          </p:nvPr>
+        </p:nvSpPr>
+        <p:spPr>
+          <a:xfrm>
+            <a:off x="5669280" y="0"/>
+            <a:ext cx="5020056" cy="7562088"/>
+          </a:xfrm>
+          <a:prstGeom prst="rect">
+            <a:avLst/>
+          </a:prstGeom>
+          <a:noFill/>
+          <a:ln/>
+        </p:spPr>
+        <p:txBody>
+          <a:bodyPr wrap="square" rtlCol="0"/>
+          <a:lstStyle>
+            <a:lvl1pPr indent="0" marL="0">
+              <a:buNone/>
+              <a:defRPr lang="en-US" dirty="0"/>
+            </a:lvl1pPr>
+          </a:lstStyle>
+          <a:p>
+            <a:pPr indent="0" marL="0">
+              <a:buNone/>
+            </a:pPr>
+            <a:r>
+              <a:rPr lang="en-US" dirty="0">
+                <a:solidFill>
+                  <a:srgbClr val="000000"/>
+                </a:solidFill>
+              </a:rPr>
+              <a:t>Bild einfügen</a:t>
+            </a:r>
+            <a:endParaRPr lang="en-US" dirty="0"/>
+          </a:p>
+        </p:txBody>
+      </p:sp>
+      <p:sp>
+        <p:nvSpPr>
+          <p:cNvPr id="4" name="Text 0"/>
+          <p:cNvSpPr/>
+          <p:nvPr>
+            <p:ph idx="102" type="body" hasCustomPrompt="1"/>
+          </p:nvPr>
+        </p:nvSpPr>
+        <p:spPr>
+          <a:xfrm>
+            <a:off x="548640" y="1143000"/>
+            <a:ext cx="3657600" cy="274320"/>
+          </a:xfrm>
+          <a:prstGeom prst="rect">
+            <a:avLst/>
+          </a:prstGeom>
+          <a:noFill/>
+          <a:ln/>
+        </p:spPr>
+        <p:txBody>
+          <a:bodyPr wrap="square" rtlCol="0"/>
+          <a:lstStyle>
+            <a:lvl1pPr indent="0" marL="0">
+              <a:buNone/>
+              <a:defRPr lang="en-US" sz="1300" dirty="0">
+                <a:solidFill>
+                  <a:srgbClr val="005EB8"/>
+                </a:solidFill>
+                <a:latin typeface="Goetheanum Schrift Klar" pitchFamily="34" charset="0"/>
+                <a:ea typeface="Goetheanum Schrift Klar" pitchFamily="34" charset="-122"/>
+                <a:cs typeface="Goetheanum Schrift Klar" pitchFamily="34" charset="-120"/>
+              </a:defRPr>
+            </a:lvl1pPr>
+          </a:lstStyle>
+          <a:p>
+            <a:pPr indent="0" marL="0">
+              <a:buNone/>
+            </a:pPr>
+            <a:r>
+              <a:rPr lang="en-US" sz="1300" dirty="0">
+                <a:solidFill>
+                  <a:srgbClr val="005EB8"/>
+                </a:solidFill>
+                <a:latin typeface="Goetheanum Schrift Klar" pitchFamily="34" charset="0"/>
+                <a:ea typeface="Goetheanum Schrift Klar" pitchFamily="34" charset="-122"/>
+                <a:cs typeface="Goetheanum Schrift Klar" pitchFamily="34" charset="-120"/>
+              </a:rPr>
+              <a:t>Kapitel</a:t>
+            </a:r>
+            <a:endParaRPr lang="en-US" sz="1300" dirty="0"/>
+          </a:p>
+        </p:txBody>
+      </p:sp>
+      <p:sp>
+        <p:nvSpPr>
+          <p:cNvPr id="5" name="Text 0"/>
+          <p:cNvSpPr/>
+          <p:nvPr>
+            <p:ph idx="103" type="title" hasCustomPrompt="1"/>
+          </p:nvPr>
+        </p:nvSpPr>
+        <p:spPr>
+          <a:xfrm>
+            <a:off x="548640" y="1463040"/>
+            <a:ext cx="4754880" cy="1097280"/>
+          </a:xfrm>
+          <a:prstGeom prst="rect">
+            <a:avLst/>
+          </a:prstGeom>
+          <a:noFill/>
+          <a:ln/>
+        </p:spPr>
+        <p:txBody>
+          <a:bodyPr wrap="square" rtlCol="0"/>
+          <a:lstStyle>
+            <a:lvl1pPr indent="0" marL="0">
+              <a:lnSpc>
+                <a:spcPct val="105000"/>
+              </a:lnSpc>
+              <a:buNone/>
+              <a:defRPr lang="en-US" sz="2600" dirty="0">
+                <a:solidFill>
+                  <a:srgbClr val="1A1A1A"/>
+                </a:solidFill>
+                <a:latin typeface="Goetheanum Schrift Deutlich" pitchFamily="34" charset="0"/>
+                <a:ea typeface="Goetheanum Schrift Deutlich" pitchFamily="34" charset="-122"/>
+                <a:cs typeface="Goetheanum Schrift Deutlich" pitchFamily="34" charset="-120"/>
+              </a:defRPr>
+            </a:lvl1pPr>
+          </a:lstStyle>
+          <a:p>
+            <a:pPr indent="0" marL="0">
+              <a:lnSpc>
+                <a:spcPct val="105000"/>
+              </a:lnSpc>
+              <a:buNone/>
+            </a:pPr>
+            <a:r>
+              <a:rPr lang="en-US" sz="2600" dirty="0">
+                <a:solidFill>
+                  <a:srgbClr val="1A1A1A"/>
+                </a:solidFill>
+                <a:latin typeface="Goetheanum Schrift Deutlich" pitchFamily="34" charset="0"/>
+                <a:ea typeface="Goetheanum Schrift Deutlich" pitchFamily="34" charset="-122"/>
+                <a:cs typeface="Goetheanum Schrift Deutlich" pitchFamily="34" charset="-120"/>
+              </a:rPr>
+              <a:t>Bild und Text</a:t>
+            </a:r>
+            <a:endParaRPr lang="en-US" sz="2600" dirty="0"/>
+          </a:p>
+        </p:txBody>
+      </p:sp>
+      <p:sp>
+        <p:nvSpPr>
+          <p:cNvPr id="6" name="Text 0"/>
+          <p:cNvSpPr/>
+          <p:nvPr>
+            <p:ph idx="104" type="body" hasCustomPrompt="1"/>
+          </p:nvPr>
+        </p:nvSpPr>
+        <p:spPr>
+          <a:xfrm>
+            <a:off x="548640" y="2834640"/>
+            <a:ext cx="4480560" cy="3200400"/>
+          </a:xfrm>
+          <a:prstGeom prst="rect">
+            <a:avLst/>
+          </a:prstGeom>
+          <a:noFill/>
+          <a:ln/>
+        </p:spPr>
+        <p:txBody>
+          <a:bodyPr wrap="square" rtlCol="0"/>
+          <a:lstStyle>
+            <a:lvl1pPr indent="0" marL="0">
+              <a:lnSpc>
+                <a:spcPct val="130000"/>
+              </a:lnSpc>
+              <a:buNone/>
+              <a:defRPr lang="en-US" sz="1300" dirty="0">
+                <a:solidFill>
+                  <a:srgbClr val="1A1A1A"/>
+                </a:solidFill>
+                <a:latin typeface="Goetheanum Schrift Klar" pitchFamily="34" charset="0"/>
+                <a:ea typeface="Goetheanum Schrift Klar" pitchFamily="34" charset="-122"/>
+                <a:cs typeface="Goetheanum Schrift Klar" pitchFamily="34" charset="-120"/>
+              </a:defRPr>
+            </a:lvl1pPr>
+          </a:lstStyle>
+          <a:p>
+            <a:pPr indent="0" marL="0">
+              <a:lnSpc>
+                <a:spcPct val="130000"/>
+              </a:lnSpc>
+              <a:buNone/>
+            </a:pPr>
+            <a:r>
+              <a:rPr lang="en-US" sz="1300" dirty="0">
+                <a:solidFill>
+                  <a:srgbClr val="1A1A1A"/>
+                </a:solidFill>
+                <a:latin typeface="Goetheanum Schrift Klar" pitchFamily="34" charset="0"/>
+                <a:ea typeface="Goetheanum Schrift Klar" pitchFamily="34" charset="-122"/>
+                <a:cs typeface="Goetheanum Schrift Klar" pitchFamily="34" charset="-120"/>
+              </a:rPr>
+              <a:t>Text zur Bildseite</a:t>
+            </a:r>
+            <a:endParaRPr lang="en-US" sz="1300" dirty="0"/>
+          </a:p>
+        </p:txBody>
+      </p:sp>
+      <p:sp>
+        <p:nvSpPr>
+          <p:cNvPr id="7" name="Text 0"/>
+          <p:cNvSpPr/>
+          <p:nvPr>
+            <p:ph idx="105" type="body" hasCustomPrompt="1"/>
+          </p:nvPr>
+        </p:nvSpPr>
+        <p:spPr>
+          <a:xfrm>
+            <a:off x="548640" y="6995160"/>
+            <a:ext cx="4114800" cy="274320"/>
+          </a:xfrm>
+          <a:prstGeom prst="rect">
+            <a:avLst/>
+          </a:prstGeom>
+          <a:noFill/>
+          <a:ln/>
+        </p:spPr>
+        <p:txBody>
+          <a:bodyPr wrap="square" rtlCol="0"/>
+          <a:lstStyle>
+            <a:lvl1pPr indent="0" marL="0">
+              <a:buNone/>
+              <a:defRPr lang="en-US" sz="900" dirty="0">
+                <a:solidFill>
+                  <a:srgbClr val="6B7480"/>
+                </a:solidFill>
+                <a:latin typeface="Goetheanum Schrift Klar" pitchFamily="34" charset="0"/>
+                <a:ea typeface="Goetheanum Schrift Klar" pitchFamily="34" charset="-122"/>
+                <a:cs typeface="Goetheanum Schrift Klar" pitchFamily="34" charset="-120"/>
+              </a:defRPr>
+            </a:lvl1pPr>
+          </a:lstStyle>
+          <a:p>
+            <a:pPr indent="0" marL="0">
+              <a:buNone/>
+            </a:pPr>
+            <a:r>
+              <a:rPr lang="en-US" sz="900" dirty="0">
+                <a:solidFill>
+                  <a:srgbClr val="6B7480"/>
+                </a:solidFill>
+                <a:latin typeface="Goetheanum Schrift Klar" pitchFamily="34" charset="0"/>
+                <a:ea typeface="Goetheanum Schrift Klar" pitchFamily="34" charset="-122"/>
+                <a:cs typeface="Goetheanum Schrift Klar" pitchFamily="34" charset="-120"/>
+              </a:rPr>
+              <a:t>Bildlegende: Ort, Anlass, Fotografie</a:t>
+            </a:r>
+            <a:endParaRPr lang="en-US" sz="900" dirty="0"/>
+          </a:p>
+        </p:txBody>
+      </p:sp>
+    </p:spTree>
+  </p:cSld>
+  <p:clrMapOvr>
+    <a:masterClrMapping/>
+  </p:clrMapOvr>
+</p:sldLayout>
+</file>
+
 <file path=ppt/slideMasters/slideMaster1.xml><?xml version="1.0" encoding="utf-8"?>
 <p:sldMaster xmlns:a="http://schemas.openxmlformats.org/drawingml/2006/main" xmlns:r="http://schemas.openxmlformats.org/officeDocument/2006/relationships" xmlns:p="http://schemas.openxmlformats.org/presentationml/2006/main">
   <p:cSld>
@@ -2212,16 +3890,71 @@
           <a:chExt cx="0" cy="0"/>
         </a:xfrm>
       </p:grpSpPr>
+      <p:sp>
+        <p:nvSpPr>
+          <p:cNvPr id="25" name="Slide Number Placeholder 0"/>
+          <p:cNvSpPr>
+            <a:spLocks noGrp="1"/>
+          </p:cNvSpPr>
+          <p:nvPr>
+            <p:ph type="sldNum" sz="quarter" idx="4294967295"/>
+          </p:nvPr>
+        </p:nvSpPr>
+        <p:spPr>
+          <a:xfrm>
+            <a:off x="9747504" y="6995160"/>
+            <a:ext cx="393192" cy="274320"/>
+          </a:xfrm>
+          <a:prstGeom prst="rect">
+            <a:avLst/>
+          </a:prstGeom>
+          <a:extLst>
+            <a:ext uri="{C572A759-6A51-4108-AA02-DFA0A04FC94B}">
+              <ma14:wrappingTextBoxFlag xmlns:ma14="http://schemas.microsoft.com/office/mac/drawingml/2011/main" val="0"/>
+            </a:ext>
+          </a:extLst>
+        </p:spPr>
+        <p:txBody>
+          <a:bodyPr anchor="ctr"/>
+          <a:lstStyle>
+            <a:lvl1pPr>
+              <a:defRPr sz="900">
+                <a:solidFill>
+                  <a:srgbClr val="9CC3EC"/>
+                </a:solidFill>
+                <a:latin typeface="Goetheanum Schrift Klar"/>
+                <a:ea typeface="Goetheanum Schrift Klar"/>
+                <a:cs typeface="Goetheanum Schrift Klar"/>
+              </a:defRPr>
+            </a:lvl1pPr>
+          </a:lstStyle>
+          <a:p>
+            <a:pPr algn="l"/>
+            <a:fld id="{F7021451-1387-4CA6-816F-3879F97B5CBC}" type="slidenum">
+              <a:rPr b="0" lang="en-US"/>
+              <a:t>null</a:t>
+            </a:fld>
+            <a:endParaRPr lang="en-US"/>
+          </a:p>
+        </p:txBody>
+      </p:sp>
     </p:spTree>
   </p:cSld>
   <p:clrMap bg1="lt1" tx1="dk1" bg2="lt2" tx2="dk2" accent1="accent1" accent2="accent2" accent3="accent3" accent4="accent4" accent5="accent5" accent6="accent6" hlink="hlink" folHlink="folHlink"/>
   <p:sldLayoutIdLst>
     <p:sldLayoutId id="2147483649" r:id="rId1"/>
+    <p:sldLayoutId id="2147483650" r:id="rId2"/>
+    <p:sldLayoutId id="2147483651" r:id="rId3"/>
+    <p:sldLayoutId id="2147483652" r:id="rId4"/>
+    <p:sldLayoutId id="2147483653" r:id="rId5"/>
+    <p:sldLayoutId id="2147483654" r:id="rId6"/>
+    <p:sldLayoutId id="2147483655" r:id="rId7"/>
+    <p:sldLayoutId id="2147483656" r:id="rId8"/>
   </p:sldLayoutIdLst>
   <p:hf sldNum="0" hdr="0" ftr="0" dt="0"/>
   <p:txStyles>
     <p:titleStyle>
-      <a:lvl1pPr algn="ctr" defTabSz="914400" rtl="0" eaLnBrk="1" latinLnBrk="0" hangingPunct="1">
+      <a:lvl1pPr algn="l" defTabSz="914400" rtl="0" eaLnBrk="1" latinLnBrk="0" hangingPunct="1">
         <a:spcBef>
           <a:spcPct val="0"/>
         </a:spcBef>
@@ -2475,13 +4208,6 @@
 <file path=ppt/slides/slide1.xml><?xml version="1.0" encoding="utf-8"?>
 <p:sld xmlns:a="http://schemas.openxmlformats.org/drawingml/2006/main" xmlns:r="http://schemas.openxmlformats.org/officeDocument/2006/relationships" xmlns:p="http://schemas.openxmlformats.org/presentationml/2006/main">
   <p:cSld name="Slide 1">
-    <p:bg>
-      <p:bgPr>
-        <a:solidFill>
-          <a:srgbClr val="005EB8"/>
-        </a:solidFill>
-      </p:bgPr>
-    </p:bg>
     <p:spTree>
       <p:nvGrpSpPr>
         <p:cNvPr id="1" name=""/>
@@ -2496,35 +4222,13 @@
           <a:chExt cx="0" cy="0"/>
         </a:xfrm>
       </p:grpSpPr>
-      <p:pic>
-        <p:nvPicPr>
-          <p:cNvPr id="2" name="Image 0" descr="logo-goetheanum-white.png">    </p:cNvPr>
-          <p:cNvPicPr>
-            <a:picLocks noChangeAspect="1"/>
-          </p:cNvPicPr>
-          <p:nvPr/>
-        </p:nvPicPr>
-        <p:blipFill>
-          <a:blip r:embed="rId1"/>
-          <a:stretch>
-            <a:fillRect/>
-          </a:stretch>
-        </p:blipFill>
-        <p:spPr>
-          <a:xfrm>
-            <a:off x="548640" y="466344"/>
-            <a:ext cx="1850284" cy="310896"/>
-          </a:xfrm>
-          <a:prstGeom prst="rect">
-            <a:avLst/>
-          </a:prstGeom>
-        </p:spPr>
-      </p:pic>
-      <p:sp>
-        <p:nvSpPr>
-          <p:cNvPr id="3" name="Text 0"/>
-          <p:cNvSpPr/>
-          <p:nvPr/>
+      <p:sp>
+        <p:nvSpPr>
+          <p:cNvPr id="2" name="Text 0"/>
+          <p:cNvSpPr/>
+          <p:nvPr>
+            <p:ph idx="101" type="title" hasCustomPrompt="1"/>
+          </p:nvPr>
         </p:nvSpPr>
         <p:spPr>
           <a:xfrm>
@@ -2538,7 +4242,7 @@
           <a:ln/>
         </p:spPr>
         <p:txBody>
-          <a:bodyPr wrap="square" lIns="0" tIns="0" rIns="0" bIns="0" rtlCol="0" anchor="ctr"/>
+          <a:bodyPr wrap="square" lIns="0" tIns="0" rIns="0" bIns="0" rtlCol="0"/>
           <a:lstStyle/>
           <a:p>
             <a:pPr indent="0" marL="0">
@@ -2549,9 +4253,9 @@
                 <a:solidFill>
                   <a:srgbClr val="FFFFFF"/>
                 </a:solidFill>
-                <a:latin typeface="Goetheanum Schrift Klar" pitchFamily="34" charset="0"/>
-                <a:ea typeface="Goetheanum Schrift Klar" pitchFamily="34" charset="-122"/>
-                <a:cs typeface="Goetheanum Schrift Klar" pitchFamily="34" charset="-120"/>
+                <a:latin typeface="Goetheanum Schrift Deutlich" pitchFamily="34" charset="0"/>
+                <a:ea typeface="Goetheanum Schrift Deutlich" pitchFamily="34" charset="-122"/>
+                <a:cs typeface="Goetheanum Schrift Deutlich" pitchFamily="34" charset="-120"/>
               </a:rPr>
               <a:t>Titel der Präsentation</a:t>
             </a:r>
@@ -2561,9 +4265,11 @@
       </p:sp>
       <p:sp>
         <p:nvSpPr>
-          <p:cNvPr id="4" name="Text 1"/>
-          <p:cNvSpPr/>
-          <p:nvPr/>
+          <p:cNvPr id="3" name="Text 0"/>
+          <p:cNvSpPr/>
+          <p:nvPr>
+            <p:ph idx="102" type="body" hasCustomPrompt="1"/>
+          </p:nvPr>
         </p:nvSpPr>
         <p:spPr>
           <a:xfrm>
@@ -2577,7 +4283,7 @@
           <a:ln/>
         </p:spPr>
         <p:txBody>
-          <a:bodyPr wrap="square" lIns="0" tIns="0" rIns="0" bIns="0" rtlCol="0" anchor="ctr"/>
+          <a:bodyPr wrap="square" lIns="0" tIns="0" rIns="0" bIns="0" rtlCol="0"/>
           <a:lstStyle/>
           <a:p>
             <a:pPr indent="0" marL="0">
@@ -2600,9 +4306,11 @@
       </p:sp>
       <p:sp>
         <p:nvSpPr>
-          <p:cNvPr id="5" name="Text 2"/>
-          <p:cNvSpPr/>
-          <p:nvPr/>
+          <p:cNvPr id="4" name="Text 0"/>
+          <p:cNvSpPr/>
+          <p:nvPr>
+            <p:ph idx="103" type="body" hasCustomPrompt="1"/>
+          </p:nvPr>
         </p:nvSpPr>
         <p:spPr>
           <a:xfrm>
@@ -2616,7 +4324,7 @@
           <a:ln/>
         </p:spPr>
         <p:txBody>
-          <a:bodyPr wrap="square" lIns="0" tIns="0" rIns="0" bIns="0" rtlCol="0" anchor="ctr"/>
+          <a:bodyPr wrap="square" lIns="0" tIns="0" rIns="0" bIns="0" rtlCol="0"/>
           <a:lstStyle/>
           <a:p>
             <a:pPr algn="r" indent="0" marL="0">
@@ -2648,13 +4356,6 @@
 <file path=ppt/slides/slide10.xml><?xml version="1.0" encoding="utf-8"?>
 <p:sld xmlns:a="http://schemas.openxmlformats.org/drawingml/2006/main" xmlns:r="http://schemas.openxmlformats.org/officeDocument/2006/relationships" xmlns:p="http://schemas.openxmlformats.org/presentationml/2006/main">
   <p:cSld name="Slide 10">
-    <p:bg>
-      <p:bgPr>
-        <a:solidFill>
-          <a:srgbClr val="FFFFFF"/>
-        </a:solidFill>
-      </p:bgPr>
-    </p:bg>
     <p:spTree>
       <p:nvGrpSpPr>
         <p:cNvPr id="1" name=""/>
@@ -2669,35 +4370,13 @@
           <a:chExt cx="0" cy="0"/>
         </a:xfrm>
       </p:grpSpPr>
-      <p:pic>
-        <p:nvPicPr>
-          <p:cNvPr id="2" name="Image 0" descr="logo-goetheanum-blue.png">    </p:cNvPr>
-          <p:cNvPicPr>
-            <a:picLocks noChangeAspect="1"/>
-          </p:cNvPicPr>
-          <p:nvPr/>
-        </p:nvPicPr>
-        <p:blipFill>
-          <a:blip r:embed="rId1"/>
-          <a:stretch>
-            <a:fillRect/>
-          </a:stretch>
-        </p:blipFill>
-        <p:spPr>
-          <a:xfrm>
-            <a:off x="548640" y="502920"/>
-            <a:ext cx="1088402" cy="182880"/>
-          </a:xfrm>
-          <a:prstGeom prst="rect">
-            <a:avLst/>
-          </a:prstGeom>
-        </p:spPr>
-      </p:pic>
-      <p:sp>
-        <p:nvSpPr>
-          <p:cNvPr id="3" name="Text 0"/>
-          <p:cNvSpPr/>
-          <p:nvPr/>
+      <p:sp>
+        <p:nvSpPr>
+          <p:cNvPr id="2" name="Text 1"/>
+          <p:cNvSpPr/>
+          <p:nvPr>
+            <p:ph idx="102" type="body" hasCustomPrompt="1"/>
+          </p:nvPr>
         </p:nvSpPr>
         <p:spPr>
           <a:xfrm>
@@ -2711,7 +4390,7 @@
           <a:ln/>
         </p:spPr>
         <p:txBody>
-          <a:bodyPr wrap="square" lIns="0" tIns="0" rIns="0" bIns="0" rtlCol="0" anchor="ctr"/>
+          <a:bodyPr wrap="square" lIns="0" tIns="0" rIns="0" bIns="0" rtlCol="0"/>
           <a:lstStyle/>
           <a:p>
             <a:pPr indent="0" marL="0">
@@ -2734,9 +4413,11 @@
       </p:sp>
       <p:sp>
         <p:nvSpPr>
-          <p:cNvPr id="4" name="Text 1"/>
-          <p:cNvSpPr/>
-          <p:nvPr/>
+          <p:cNvPr id="3" name="Text 1"/>
+          <p:cNvSpPr/>
+          <p:nvPr>
+            <p:ph idx="103" type="title" hasCustomPrompt="1"/>
+          </p:nvPr>
         </p:nvSpPr>
         <p:spPr>
           <a:xfrm>
@@ -2750,7 +4431,7 @@
           <a:ln/>
         </p:spPr>
         <p:txBody>
-          <a:bodyPr wrap="square" lIns="0" tIns="0" rIns="0" bIns="0" rtlCol="0" anchor="ctr"/>
+          <a:bodyPr wrap="square" lIns="0" tIns="0" rIns="0" bIns="0" rtlCol="0"/>
           <a:lstStyle/>
           <a:p>
             <a:pPr indent="0" marL="0">
@@ -2761,9 +4442,9 @@
                 <a:solidFill>
                   <a:srgbClr val="1A1A1A"/>
                 </a:solidFill>
-                <a:latin typeface="Goetheanum Schrift Klar" pitchFamily="34" charset="0"/>
-                <a:ea typeface="Goetheanum Schrift Klar" pitchFamily="34" charset="-122"/>
-                <a:cs typeface="Goetheanum Schrift Klar" pitchFamily="34" charset="-120"/>
+                <a:latin typeface="Goetheanum Schrift Deutlich" pitchFamily="34" charset="0"/>
+                <a:ea typeface="Goetheanum Schrift Deutlich" pitchFamily="34" charset="-122"/>
+                <a:cs typeface="Goetheanum Schrift Deutlich" pitchFamily="34" charset="-120"/>
               </a:rPr>
               <a:t>Das Jahr in vier Kennzahlen</a:t>
             </a:r>
@@ -2773,7 +4454,7 @@
       </p:sp>
       <p:sp>
         <p:nvSpPr>
-          <p:cNvPr id="5" name="Shape 2"/>
+          <p:cNvPr id="4" name="Shape 2"/>
           <p:cNvSpPr/>
           <p:nvPr/>
         </p:nvSpPr>
@@ -2795,7 +4476,7 @@
       </p:sp>
       <p:sp>
         <p:nvSpPr>
-          <p:cNvPr id="6" name="Text 3"/>
+          <p:cNvPr id="5" name="Text 3"/>
           <p:cNvSpPr/>
           <p:nvPr/>
         </p:nvSpPr>
@@ -2822,11 +4503,11 @@
                 <a:solidFill>
                   <a:srgbClr val="005EB8"/>
                 </a:solidFill>
-                <a:latin typeface="Goetheanum Schrift Laut" pitchFamily="34" charset="0"/>
-                <a:ea typeface="Goetheanum Schrift Laut" pitchFamily="34" charset="-122"/>
-                <a:cs typeface="Goetheanum Schrift Laut" pitchFamily="34" charset="-120"/>
-              </a:rPr>
-              <a:t>12,4 Mio</a:t>
+                <a:latin typeface="Goetheanum Schrift Deutlich" pitchFamily="34" charset="0"/>
+                <a:ea typeface="Goetheanum Schrift Deutlich" pitchFamily="34" charset="-122"/>
+                <a:cs typeface="Goetheanum Schrift Deutlich" pitchFamily="34" charset="-120"/>
+              </a:rPr>
+              <a:t>12,4 Mio</a:t>
             </a:r>
             <a:endParaRPr lang="en-US" sz="2600" dirty="0"/>
           </a:p>
@@ -2834,7 +4515,7 @@
       </p:sp>
       <p:sp>
         <p:nvSpPr>
-          <p:cNvPr id="7" name="Text 4"/>
+          <p:cNvPr id="6" name="Text 4"/>
           <p:cNvSpPr/>
           <p:nvPr/>
         </p:nvSpPr>
@@ -2873,7 +4554,7 @@
       </p:sp>
       <p:sp>
         <p:nvSpPr>
-          <p:cNvPr id="8" name="Shape 5"/>
+          <p:cNvPr id="7" name="Shape 5"/>
           <p:cNvSpPr/>
           <p:nvPr/>
         </p:nvSpPr>
@@ -2895,7 +4576,7 @@
       </p:sp>
       <p:sp>
         <p:nvSpPr>
-          <p:cNvPr id="9" name="Text 6"/>
+          <p:cNvPr id="8" name="Text 6"/>
           <p:cNvSpPr/>
           <p:nvPr/>
         </p:nvSpPr>
@@ -2922,11 +4603,11 @@
                 <a:solidFill>
                   <a:srgbClr val="1A1A1A"/>
                 </a:solidFill>
-                <a:latin typeface="Goetheanum Schrift Laut" pitchFamily="34" charset="0"/>
-                <a:ea typeface="Goetheanum Schrift Laut" pitchFamily="34" charset="-122"/>
-                <a:cs typeface="Goetheanum Schrift Laut" pitchFamily="34" charset="-120"/>
-              </a:rPr>
-              <a:t>–2,1 %</a:t>
+                <a:latin typeface="Goetheanum Schrift Deutlich" pitchFamily="34" charset="0"/>
+                <a:ea typeface="Goetheanum Schrift Deutlich" pitchFamily="34" charset="-122"/>
+                <a:cs typeface="Goetheanum Schrift Deutlich" pitchFamily="34" charset="-120"/>
+              </a:rPr>
+              <a:t>−2,1 %</a:t>
             </a:r>
             <a:endParaRPr lang="en-US" sz="2600" dirty="0"/>
           </a:p>
@@ -2934,7 +4615,7 @@
       </p:sp>
       <p:sp>
         <p:nvSpPr>
-          <p:cNvPr id="10" name="Text 7"/>
+          <p:cNvPr id="9" name="Text 7"/>
           <p:cNvSpPr/>
           <p:nvPr/>
         </p:nvSpPr>
@@ -2973,7 +4654,7 @@
       </p:sp>
       <p:sp>
         <p:nvSpPr>
-          <p:cNvPr id="11" name="Shape 8"/>
+          <p:cNvPr id="10" name="Shape 8"/>
           <p:cNvSpPr/>
           <p:nvPr/>
         </p:nvSpPr>
@@ -2995,7 +4676,7 @@
       </p:sp>
       <p:sp>
         <p:nvSpPr>
-          <p:cNvPr id="12" name="Text 9"/>
+          <p:cNvPr id="11" name="Text 9"/>
           <p:cNvSpPr/>
           <p:nvPr/>
         </p:nvSpPr>
@@ -3022,11 +4703,11 @@
                 <a:solidFill>
                   <a:srgbClr val="005EB8"/>
                 </a:solidFill>
-                <a:latin typeface="Goetheanum Schrift Laut" pitchFamily="34" charset="0"/>
-                <a:ea typeface="Goetheanum Schrift Laut" pitchFamily="34" charset="-122"/>
-                <a:cs typeface="Goetheanum Schrift Laut" pitchFamily="34" charset="-120"/>
-              </a:rPr>
-              <a:t>86 %</a:t>
+                <a:latin typeface="Goetheanum Schrift Deutlich" pitchFamily="34" charset="0"/>
+                <a:ea typeface="Goetheanum Schrift Deutlich" pitchFamily="34" charset="-122"/>
+                <a:cs typeface="Goetheanum Schrift Deutlich" pitchFamily="34" charset="-120"/>
+              </a:rPr>
+              <a:t>86 %</a:t>
             </a:r>
             <a:endParaRPr lang="en-US" sz="2600" dirty="0"/>
           </a:p>
@@ -3034,7 +4715,7 @@
       </p:sp>
       <p:sp>
         <p:nvSpPr>
-          <p:cNvPr id="13" name="Text 10"/>
+          <p:cNvPr id="12" name="Text 10"/>
           <p:cNvSpPr/>
           <p:nvPr/>
         </p:nvSpPr>
@@ -3073,7 +4754,7 @@
       </p:sp>
       <p:sp>
         <p:nvSpPr>
-          <p:cNvPr id="14" name="Shape 11"/>
+          <p:cNvPr id="13" name="Shape 11"/>
           <p:cNvSpPr/>
           <p:nvPr/>
         </p:nvSpPr>
@@ -3095,7 +4776,7 @@
       </p:sp>
       <p:sp>
         <p:nvSpPr>
-          <p:cNvPr id="15" name="Text 12"/>
+          <p:cNvPr id="14" name="Text 12"/>
           <p:cNvSpPr/>
           <p:nvPr/>
         </p:nvSpPr>
@@ -3122,11 +4803,11 @@
                 <a:solidFill>
                   <a:srgbClr val="EBB565"/>
                 </a:solidFill>
-                <a:latin typeface="Goetheanum Schrift Laut" pitchFamily="34" charset="0"/>
-                <a:ea typeface="Goetheanum Schrift Laut" pitchFamily="34" charset="-122"/>
-                <a:cs typeface="Goetheanum Schrift Laut" pitchFamily="34" charset="-120"/>
-              </a:rPr>
-              <a:t>3,2 Mio</a:t>
+                <a:latin typeface="Goetheanum Schrift Deutlich" pitchFamily="34" charset="0"/>
+                <a:ea typeface="Goetheanum Schrift Deutlich" pitchFamily="34" charset="-122"/>
+                <a:cs typeface="Goetheanum Schrift Deutlich" pitchFamily="34" charset="-120"/>
+              </a:rPr>
+              <a:t>3,2 Mio</a:t>
             </a:r>
             <a:endParaRPr lang="en-US" sz="2600" dirty="0"/>
           </a:p>
@@ -3134,7 +4815,7 @@
       </p:sp>
       <p:sp>
         <p:nvSpPr>
-          <p:cNvPr id="16" name="Text 13"/>
+          <p:cNvPr id="15" name="Text 13"/>
           <p:cNvSpPr/>
           <p:nvPr/>
         </p:nvSpPr>
@@ -3173,7 +4854,7 @@
       </p:sp>
       <p:sp>
         <p:nvSpPr>
-          <p:cNvPr id="17" name="Text 14"/>
+          <p:cNvPr id="16" name="Text 14"/>
           <p:cNvSpPr/>
           <p:nvPr/>
         </p:nvSpPr>
@@ -3212,40 +4893,49 @@
       </p:sp>
       <p:sp>
         <p:nvSpPr>
-          <p:cNvPr id="18" name="Text 15"/>
-          <p:cNvSpPr/>
-          <p:nvPr/>
-        </p:nvSpPr>
-        <p:spPr>
-          <a:xfrm>
-            <a:off x="4654296" y="6995160"/>
-            <a:ext cx="5486400" cy="274320"/>
-          </a:xfrm>
-          <a:prstGeom prst="rect">
-            <a:avLst/>
-          </a:prstGeom>
-          <a:noFill/>
-          <a:ln/>
-        </p:spPr>
-        <p:txBody>
-          <a:bodyPr wrap="square" lIns="0" tIns="0" rIns="0" bIns="0" rtlCol="0" anchor="ctr"/>
-          <a:lstStyle/>
-          <a:p>
-            <a:pPr algn="r" indent="0" marL="0">
-              <a:buNone/>
-            </a:pPr>
-            <a:r>
-              <a:rPr lang="en-US" sz="900" dirty="0">
+          <p:cNvPr id="25" name="Slide Number Placeholder 0"/>
+          <p:cNvSpPr>
+            <a:spLocks noGrp="1"/>
+          </p:cNvSpPr>
+          <p:nvPr>
+            <p:ph type="sldNum" sz="quarter" idx="4294967295"/>
+          </p:nvPr>
+        </p:nvSpPr>
+        <p:spPr>
+          <a:xfrm>
+            <a:off x="9747504" y="6995160"/>
+            <a:ext cx="393192" cy="274320"/>
+          </a:xfrm>
+          <a:prstGeom prst="rect">
+            <a:avLst/>
+          </a:prstGeom>
+          <a:extLst>
+            <a:ext uri="{C572A759-6A51-4108-AA02-DFA0A04FC94B}">
+              <ma14:wrappingTextBoxFlag xmlns:ma14="http://schemas.microsoft.com/office/mac/drawingml/2011/main" val="0"/>
+            </a:ext>
+          </a:extLst>
+        </p:spPr>
+        <p:txBody>
+          <a:bodyPr anchor="ctr"/>
+          <a:lstStyle>
+            <a:lvl1pPr>
+              <a:defRPr sz="900">
                 <a:solidFill>
                   <a:srgbClr val="6B7480"/>
                 </a:solidFill>
-                <a:latin typeface="Goetheanum Schrift Klar" pitchFamily="34" charset="0"/>
-                <a:ea typeface="Goetheanum Schrift Klar" pitchFamily="34" charset="-122"/>
-                <a:cs typeface="Goetheanum Schrift Klar" pitchFamily="34" charset="-120"/>
-              </a:rPr>
-              <a:t>Titel der Präsentation · 00.00.2026 · 10</a:t>
-            </a:r>
-            <a:endParaRPr lang="en-US" sz="900" dirty="0"/>
+                <a:latin typeface="Goetheanum Schrift Klar"/>
+                <a:ea typeface="Goetheanum Schrift Klar"/>
+                <a:cs typeface="Goetheanum Schrift Klar"/>
+              </a:defRPr>
+            </a:lvl1pPr>
+          </a:lstStyle>
+          <a:p>
+            <a:pPr algn="l"/>
+            <a:fld id="{F7021451-1387-4CA6-816F-3879F97B5CBC}" type="slidenum">
+              <a:rPr b="0" lang="en-US"/>
+              <a:t>10</a:t>
+            </a:fld>
+            <a:endParaRPr lang="en-US"/>
           </a:p>
         </p:txBody>
       </p:sp>
@@ -3260,13 +4950,6 @@
 <file path=ppt/slides/slide11.xml><?xml version="1.0" encoding="utf-8"?>
 <p:sld xmlns:a="http://schemas.openxmlformats.org/drawingml/2006/main" xmlns:r="http://schemas.openxmlformats.org/officeDocument/2006/relationships" xmlns:p="http://schemas.openxmlformats.org/presentationml/2006/main">
   <p:cSld name="Slide 11">
-    <p:bg>
-      <p:bgPr>
-        <a:solidFill>
-          <a:srgbClr val="FFFFFF"/>
-        </a:solidFill>
-      </p:bgPr>
-    </p:bg>
     <p:spTree>
       <p:nvGrpSpPr>
         <p:cNvPr id="1" name=""/>
@@ -3281,35 +4964,13 @@
           <a:chExt cx="0" cy="0"/>
         </a:xfrm>
       </p:grpSpPr>
-      <p:pic>
-        <p:nvPicPr>
-          <p:cNvPr id="2" name="Image 0" descr="logo-goetheanum-blue.png">    </p:cNvPr>
-          <p:cNvPicPr>
-            <a:picLocks noChangeAspect="1"/>
-          </p:cNvPicPr>
-          <p:nvPr/>
-        </p:nvPicPr>
-        <p:blipFill>
-          <a:blip r:embed="rId1"/>
-          <a:stretch>
-            <a:fillRect/>
-          </a:stretch>
-        </p:blipFill>
-        <p:spPr>
-          <a:xfrm>
-            <a:off x="548640" y="502920"/>
-            <a:ext cx="1088402" cy="182880"/>
-          </a:xfrm>
-          <a:prstGeom prst="rect">
-            <a:avLst/>
-          </a:prstGeom>
-        </p:spPr>
-      </p:pic>
-      <p:sp>
-        <p:nvSpPr>
-          <p:cNvPr id="3" name="Text 0"/>
-          <p:cNvSpPr/>
-          <p:nvPr/>
+      <p:sp>
+        <p:nvSpPr>
+          <p:cNvPr id="2" name="Text 1"/>
+          <p:cNvSpPr/>
+          <p:nvPr>
+            <p:ph idx="102" type="body" hasCustomPrompt="1"/>
+          </p:nvPr>
         </p:nvSpPr>
         <p:spPr>
           <a:xfrm>
@@ -3323,7 +4984,7 @@
           <a:ln/>
         </p:spPr>
         <p:txBody>
-          <a:bodyPr wrap="square" lIns="0" tIns="0" rIns="0" bIns="0" rtlCol="0" anchor="ctr"/>
+          <a:bodyPr wrap="square" lIns="0" tIns="0" rIns="0" bIns="0" rtlCol="0"/>
           <a:lstStyle/>
           <a:p>
             <a:pPr indent="0" marL="0">
@@ -3346,9 +5007,11 @@
       </p:sp>
       <p:sp>
         <p:nvSpPr>
-          <p:cNvPr id="4" name="Text 1"/>
-          <p:cNvSpPr/>
-          <p:nvPr/>
+          <p:cNvPr id="3" name="Text 1"/>
+          <p:cNvSpPr/>
+          <p:nvPr>
+            <p:ph idx="103" type="title" hasCustomPrompt="1"/>
+          </p:nvPr>
         </p:nvSpPr>
         <p:spPr>
           <a:xfrm>
@@ -3362,7 +5025,7 @@
           <a:ln/>
         </p:spPr>
         <p:txBody>
-          <a:bodyPr wrap="square" lIns="0" tIns="0" rIns="0" bIns="0" rtlCol="0" anchor="ctr"/>
+          <a:bodyPr wrap="square" lIns="0" tIns="0" rIns="0" bIns="0" rtlCol="0"/>
           <a:lstStyle/>
           <a:p>
             <a:pPr indent="0" marL="0">
@@ -3373,9 +5036,9 @@
                 <a:solidFill>
                   <a:srgbClr val="1A1A1A"/>
                 </a:solidFill>
-                <a:latin typeface="Goetheanum Schrift Klar" pitchFamily="34" charset="0"/>
-                <a:ea typeface="Goetheanum Schrift Klar" pitchFamily="34" charset="-122"/>
-                <a:cs typeface="Goetheanum Schrift Klar" pitchFamily="34" charset="-120"/>
+                <a:latin typeface="Goetheanum Schrift Deutlich" pitchFamily="34" charset="0"/>
+                <a:ea typeface="Goetheanum Schrift Deutlich" pitchFamily="34" charset="-122"/>
+                <a:cs typeface="Goetheanum Schrift Deutlich" pitchFamily="34" charset="-120"/>
               </a:rPr>
               <a:t>Entwicklung über vier Jahre</a:t>
             </a:r>
@@ -3385,7 +5048,7 @@
       </p:sp>
       <p:graphicFrame>
         <p:nvGraphicFramePr>
-          <p:cNvPr id="5" name="Chart 0" descr=""/>
+          <p:cNvPr id="4" name="Chart 0" descr=""/>
           <p:cNvGraphicFramePr/>
           <p:nvPr/>
         </p:nvGraphicFramePr>
@@ -3395,13 +5058,13 @@
         </p:xfrm>
         <a:graphic xmlns:a="http://schemas.openxmlformats.org/drawingml/2006/main">
           <a:graphicData uri="http://schemas.openxmlformats.org/drawingml/2006/chart">
-            <c:chart xmlns:c="http://schemas.openxmlformats.org/drawingml/2006/chart" r:id="rId2"/>
+            <c:chart xmlns:c="http://schemas.openxmlformats.org/drawingml/2006/chart" r:id="rId1"/>
           </a:graphicData>
         </a:graphic>
       </p:graphicFrame>
       <p:sp>
         <p:nvSpPr>
-          <p:cNvPr id="6" name="Text 2"/>
+          <p:cNvPr id="5" name="Text 2"/>
           <p:cNvSpPr/>
           <p:nvPr/>
         </p:nvSpPr>
@@ -3434,9 +5097,9 @@
                 <a:solidFill>
                   <a:srgbClr val="005EB8"/>
                 </a:solidFill>
-                <a:latin typeface="Goetheanum Schrift Laut" pitchFamily="34" charset="0"/>
-                <a:ea typeface="Goetheanum Schrift Laut" pitchFamily="34" charset="-122"/>
-                <a:cs typeface="Goetheanum Schrift Laut" pitchFamily="34" charset="-120"/>
+                <a:latin typeface="Goetheanum Schrift Deutlich" pitchFamily="34" charset="0"/>
+                <a:ea typeface="Goetheanum Schrift Deutlich" pitchFamily="34" charset="-122"/>
+                <a:cs typeface="Goetheanum Schrift Deutlich" pitchFamily="34" charset="-120"/>
               </a:rPr>
               <a:t>Lesart</a:t>
             </a:r>
@@ -3506,7 +5169,7 @@
       </p:sp>
       <p:sp>
         <p:nvSpPr>
-          <p:cNvPr id="7" name="Text 3"/>
+          <p:cNvPr id="6" name="Text 3"/>
           <p:cNvSpPr/>
           <p:nvPr/>
         </p:nvSpPr>
@@ -3545,40 +5208,49 @@
       </p:sp>
       <p:sp>
         <p:nvSpPr>
-          <p:cNvPr id="8" name="Text 4"/>
-          <p:cNvSpPr/>
-          <p:nvPr/>
-        </p:nvSpPr>
-        <p:spPr>
-          <a:xfrm>
-            <a:off x="4654296" y="6995160"/>
-            <a:ext cx="5486400" cy="274320"/>
-          </a:xfrm>
-          <a:prstGeom prst="rect">
-            <a:avLst/>
-          </a:prstGeom>
-          <a:noFill/>
-          <a:ln/>
-        </p:spPr>
-        <p:txBody>
-          <a:bodyPr wrap="square" lIns="0" tIns="0" rIns="0" bIns="0" rtlCol="0" anchor="ctr"/>
-          <a:lstStyle/>
-          <a:p>
-            <a:pPr algn="r" indent="0" marL="0">
-              <a:buNone/>
-            </a:pPr>
-            <a:r>
-              <a:rPr lang="en-US" sz="900" dirty="0">
+          <p:cNvPr id="25" name="Slide Number Placeholder 0"/>
+          <p:cNvSpPr>
+            <a:spLocks noGrp="1"/>
+          </p:cNvSpPr>
+          <p:nvPr>
+            <p:ph type="sldNum" sz="quarter" idx="4294967295"/>
+          </p:nvPr>
+        </p:nvSpPr>
+        <p:spPr>
+          <a:xfrm>
+            <a:off x="9747504" y="6995160"/>
+            <a:ext cx="393192" cy="274320"/>
+          </a:xfrm>
+          <a:prstGeom prst="rect">
+            <a:avLst/>
+          </a:prstGeom>
+          <a:extLst>
+            <a:ext uri="{C572A759-6A51-4108-AA02-DFA0A04FC94B}">
+              <ma14:wrappingTextBoxFlag xmlns:ma14="http://schemas.microsoft.com/office/mac/drawingml/2011/main" val="0"/>
+            </a:ext>
+          </a:extLst>
+        </p:spPr>
+        <p:txBody>
+          <a:bodyPr anchor="ctr"/>
+          <a:lstStyle>
+            <a:lvl1pPr>
+              <a:defRPr sz="900">
                 <a:solidFill>
                   <a:srgbClr val="6B7480"/>
                 </a:solidFill>
-                <a:latin typeface="Goetheanum Schrift Klar" pitchFamily="34" charset="0"/>
-                <a:ea typeface="Goetheanum Schrift Klar" pitchFamily="34" charset="-122"/>
-                <a:cs typeface="Goetheanum Schrift Klar" pitchFamily="34" charset="-120"/>
-              </a:rPr>
-              <a:t>Titel der Präsentation · 00.00.2026 · 11</a:t>
-            </a:r>
-            <a:endParaRPr lang="en-US" sz="900" dirty="0"/>
+                <a:latin typeface="Goetheanum Schrift Klar"/>
+                <a:ea typeface="Goetheanum Schrift Klar"/>
+                <a:cs typeface="Goetheanum Schrift Klar"/>
+              </a:defRPr>
+            </a:lvl1pPr>
+          </a:lstStyle>
+          <a:p>
+            <a:pPr algn="l"/>
+            <a:fld id="{F7021451-1387-4CA6-816F-3879F97B5CBC}" type="slidenum">
+              <a:rPr b="0" lang="en-US"/>
+              <a:t>11</a:t>
+            </a:fld>
+            <a:endParaRPr lang="en-US"/>
           </a:p>
         </p:txBody>
       </p:sp>
@@ -3593,13 +5265,6 @@
 <file path=ppt/slides/slide12.xml><?xml version="1.0" encoding="utf-8"?>
 <p:sld xmlns:a="http://schemas.openxmlformats.org/drawingml/2006/main" xmlns:r="http://schemas.openxmlformats.org/officeDocument/2006/relationships" xmlns:p="http://schemas.openxmlformats.org/presentationml/2006/main">
   <p:cSld name="Slide 12">
-    <p:bg>
-      <p:bgPr>
-        <a:solidFill>
-          <a:srgbClr val="FFFFFF"/>
-        </a:solidFill>
-      </p:bgPr>
-    </p:bg>
     <p:spTree>
       <p:nvGrpSpPr>
         <p:cNvPr id="1" name=""/>
@@ -3614,35 +5279,13 @@
           <a:chExt cx="0" cy="0"/>
         </a:xfrm>
       </p:grpSpPr>
-      <p:pic>
-        <p:nvPicPr>
-          <p:cNvPr id="2" name="Image 0" descr="logo-goetheanum-blue.png">    </p:cNvPr>
-          <p:cNvPicPr>
-            <a:picLocks noChangeAspect="1"/>
-          </p:cNvPicPr>
-          <p:nvPr/>
-        </p:nvPicPr>
-        <p:blipFill>
-          <a:blip r:embed="rId1"/>
-          <a:stretch>
-            <a:fillRect/>
-          </a:stretch>
-        </p:blipFill>
-        <p:spPr>
-          <a:xfrm>
-            <a:off x="548640" y="502920"/>
-            <a:ext cx="1088402" cy="182880"/>
-          </a:xfrm>
-          <a:prstGeom prst="rect">
-            <a:avLst/>
-          </a:prstGeom>
-        </p:spPr>
-      </p:pic>
-      <p:sp>
-        <p:nvSpPr>
-          <p:cNvPr id="3" name="Text 0"/>
-          <p:cNvSpPr/>
-          <p:nvPr/>
+      <p:sp>
+        <p:nvSpPr>
+          <p:cNvPr id="2" name="Text 1"/>
+          <p:cNvSpPr/>
+          <p:nvPr>
+            <p:ph idx="102" type="body" hasCustomPrompt="1"/>
+          </p:nvPr>
         </p:nvSpPr>
         <p:spPr>
           <a:xfrm>
@@ -3656,7 +5299,7 @@
           <a:ln/>
         </p:spPr>
         <p:txBody>
-          <a:bodyPr wrap="square" lIns="0" tIns="0" rIns="0" bIns="0" rtlCol="0" anchor="ctr"/>
+          <a:bodyPr wrap="square" lIns="0" tIns="0" rIns="0" bIns="0" rtlCol="0"/>
           <a:lstStyle/>
           <a:p>
             <a:pPr indent="0" marL="0">
@@ -3679,9 +5322,11 @@
       </p:sp>
       <p:sp>
         <p:nvSpPr>
-          <p:cNvPr id="4" name="Text 1"/>
-          <p:cNvSpPr/>
-          <p:nvPr/>
+          <p:cNvPr id="3" name="Text 1"/>
+          <p:cNvSpPr/>
+          <p:nvPr>
+            <p:ph idx="103" type="title" hasCustomPrompt="1"/>
+          </p:nvPr>
         </p:nvSpPr>
         <p:spPr>
           <a:xfrm>
@@ -3695,7 +5340,7 @@
           <a:ln/>
         </p:spPr>
         <p:txBody>
-          <a:bodyPr wrap="square" lIns="0" tIns="0" rIns="0" bIns="0" rtlCol="0" anchor="ctr"/>
+          <a:bodyPr wrap="square" lIns="0" tIns="0" rIns="0" bIns="0" rtlCol="0"/>
           <a:lstStyle/>
           <a:p>
             <a:pPr indent="0" marL="0">
@@ -3706,9 +5351,9 @@
                 <a:solidFill>
                   <a:srgbClr val="1A1A1A"/>
                 </a:solidFill>
-                <a:latin typeface="Goetheanum Schrift Klar" pitchFamily="34" charset="0"/>
-                <a:ea typeface="Goetheanum Schrift Klar" pitchFamily="34" charset="-122"/>
-                <a:cs typeface="Goetheanum Schrift Klar" pitchFamily="34" charset="-120"/>
+                <a:latin typeface="Goetheanum Schrift Deutlich" pitchFamily="34" charset="0"/>
+                <a:ea typeface="Goetheanum Schrift Deutlich" pitchFamily="34" charset="-122"/>
+                <a:cs typeface="Goetheanum Schrift Deutlich" pitchFamily="34" charset="-120"/>
               </a:rPr>
               <a:t>Ergebnis nach Bereichen</a:t>
             </a:r>
@@ -3758,16 +5403,16 @@
                           <a:solidFill>
                             <a:srgbClr val="FFFFFF"/>
                           </a:solidFill>
-                          <a:latin typeface="Goetheanum Schrift Laut" pitchFamily="34" charset="0"/>
-                          <a:ea typeface="Goetheanum Schrift Laut" pitchFamily="34" charset="-122"/>
-                          <a:cs typeface="Goetheanum Schrift Laut" pitchFamily="34" charset="-120"/>
+                          <a:latin typeface="Goetheanum Schrift Deutlich" pitchFamily="34" charset="0"/>
+                          <a:ea typeface="Goetheanum Schrift Deutlich" pitchFamily="34" charset="-122"/>
+                          <a:cs typeface="Goetheanum Schrift Deutlich" pitchFamily="34" charset="-120"/>
                         </a:rPr>
                         <a:t>Bereich</a:t>
                       </a:r>
                       <a:endParaRPr lang="en-US" sz="1300" dirty="0">
-                        <a:latin typeface="Goetheanum Schrift Laut" charset="0"/>
-                        <a:ea typeface="Goetheanum Schrift Laut" charset="0"/>
-                        <a:cs typeface="Goetheanum Schrift Laut" charset="0"/>
+                        <a:latin typeface="Goetheanum Schrift Deutlich" charset="0"/>
+                        <a:ea typeface="Goetheanum Schrift Deutlich" charset="0"/>
+                        <a:cs typeface="Goetheanum Schrift Deutlich" charset="0"/>
                       </a:endParaRPr>
                     </a:p>
                   </a:txBody>
@@ -3802,16 +5447,16 @@
                           <a:solidFill>
                             <a:srgbClr val="FFFFFF"/>
                           </a:solidFill>
-                          <a:latin typeface="Goetheanum Schrift Laut" pitchFamily="34" charset="0"/>
-                          <a:ea typeface="Goetheanum Schrift Laut" pitchFamily="34" charset="-122"/>
-                          <a:cs typeface="Goetheanum Schrift Laut" pitchFamily="34" charset="-120"/>
+                          <a:latin typeface="Goetheanum Schrift Deutlich" pitchFamily="34" charset="0"/>
+                          <a:ea typeface="Goetheanum Schrift Deutlich" pitchFamily="34" charset="-122"/>
+                          <a:cs typeface="Goetheanum Schrift Deutlich" pitchFamily="34" charset="-120"/>
                         </a:rPr>
                         <a:t>2025</a:t>
                       </a:r>
                       <a:endParaRPr lang="en-US" sz="1300" dirty="0">
-                        <a:latin typeface="Goetheanum Schrift Laut" charset="0"/>
-                        <a:ea typeface="Goetheanum Schrift Laut" charset="0"/>
-                        <a:cs typeface="Goetheanum Schrift Laut" charset="0"/>
+                        <a:latin typeface="Goetheanum Schrift Deutlich" charset="0"/>
+                        <a:ea typeface="Goetheanum Schrift Deutlich" charset="0"/>
+                        <a:cs typeface="Goetheanum Schrift Deutlich" charset="0"/>
                       </a:endParaRPr>
                     </a:p>
                   </a:txBody>
@@ -3846,16 +5491,16 @@
                           <a:solidFill>
                             <a:srgbClr val="FFFFFF"/>
                           </a:solidFill>
-                          <a:latin typeface="Goetheanum Schrift Laut" pitchFamily="34" charset="0"/>
-                          <a:ea typeface="Goetheanum Schrift Laut" pitchFamily="34" charset="-122"/>
-                          <a:cs typeface="Goetheanum Schrift Laut" pitchFamily="34" charset="-120"/>
+                          <a:latin typeface="Goetheanum Schrift Deutlich" pitchFamily="34" charset="0"/>
+                          <a:ea typeface="Goetheanum Schrift Deutlich" pitchFamily="34" charset="-122"/>
+                          <a:cs typeface="Goetheanum Schrift Deutlich" pitchFamily="34" charset="-120"/>
                         </a:rPr>
                         <a:t>2026</a:t>
                       </a:r>
                       <a:endParaRPr lang="en-US" sz="1300" dirty="0">
-                        <a:latin typeface="Goetheanum Schrift Laut" charset="0"/>
-                        <a:ea typeface="Goetheanum Schrift Laut" charset="0"/>
-                        <a:cs typeface="Goetheanum Schrift Laut" charset="0"/>
+                        <a:latin typeface="Goetheanum Schrift Deutlich" charset="0"/>
+                        <a:ea typeface="Goetheanum Schrift Deutlich" charset="0"/>
+                        <a:cs typeface="Goetheanum Schrift Deutlich" charset="0"/>
                       </a:endParaRPr>
                     </a:p>
                   </a:txBody>
@@ -3890,16 +5535,16 @@
                           <a:solidFill>
                             <a:srgbClr val="FFFFFF"/>
                           </a:solidFill>
-                          <a:latin typeface="Goetheanum Schrift Laut" pitchFamily="34" charset="0"/>
-                          <a:ea typeface="Goetheanum Schrift Laut" pitchFamily="34" charset="-122"/>
-                          <a:cs typeface="Goetheanum Schrift Laut" pitchFamily="34" charset="-120"/>
+                          <a:latin typeface="Goetheanum Schrift Deutlich" pitchFamily="34" charset="0"/>
+                          <a:ea typeface="Goetheanum Schrift Deutlich" pitchFamily="34" charset="-122"/>
+                          <a:cs typeface="Goetheanum Schrift Deutlich" pitchFamily="34" charset="-120"/>
                         </a:rPr>
                         <a:t>Δ</a:t>
                       </a:r>
                       <a:endParaRPr lang="en-US" sz="1300" dirty="0">
-                        <a:latin typeface="Goetheanum Schrift Laut" charset="0"/>
-                        <a:ea typeface="Goetheanum Schrift Laut" charset="0"/>
-                        <a:cs typeface="Goetheanum Schrift Laut" charset="0"/>
+                        <a:latin typeface="Goetheanum Schrift Deutlich" charset="0"/>
+                        <a:ea typeface="Goetheanum Schrift Deutlich" charset="0"/>
+                        <a:cs typeface="Goetheanum Schrift Deutlich" charset="0"/>
                       </a:endParaRPr>
                     </a:p>
                   </a:txBody>
@@ -3981,7 +5626,7 @@
                           <a:ea typeface="Goetheanum Schrift Klar" pitchFamily="34" charset="-122"/>
                           <a:cs typeface="Goetheanum Schrift Klar" pitchFamily="34" charset="-120"/>
                         </a:rPr>
-                        <a:t>4 120</a:t>
+                        <a:t>4120</a:t>
                       </a:r>
                       <a:endParaRPr lang="en-US" sz="1300" dirty="0">
                         <a:latin typeface="Goetheanum Schrift Klar" charset="0"/>
@@ -4022,7 +5667,7 @@
                           <a:ea typeface="Goetheanum Schrift Klar" pitchFamily="34" charset="-122"/>
                           <a:cs typeface="Goetheanum Schrift Klar" pitchFamily="34" charset="-120"/>
                         </a:rPr>
-                        <a:t>4 380</a:t>
+                        <a:t>4380</a:t>
                       </a:r>
                       <a:endParaRPr lang="en-US" sz="1300" dirty="0">
                         <a:latin typeface="Goetheanum Schrift Klar" charset="0"/>
@@ -4150,7 +5795,7 @@
                           <a:ea typeface="Goetheanum Schrift Klar" pitchFamily="34" charset="-122"/>
                           <a:cs typeface="Goetheanum Schrift Klar" pitchFamily="34" charset="-120"/>
                         </a:rPr>
-                        <a:t>2 950</a:t>
+                        <a:t>2950</a:t>
                       </a:r>
                       <a:endParaRPr lang="en-US" sz="1300" dirty="0">
                         <a:latin typeface="Goetheanum Schrift Klar" charset="0"/>
@@ -4194,7 +5839,7 @@
                           <a:ea typeface="Goetheanum Schrift Klar" pitchFamily="34" charset="-122"/>
                           <a:cs typeface="Goetheanum Schrift Klar" pitchFamily="34" charset="-120"/>
                         </a:rPr>
-                        <a:t>2 870</a:t>
+                        <a:t>2870</a:t>
                       </a:r>
                       <a:endParaRPr lang="en-US" sz="1300" dirty="0">
                         <a:latin typeface="Goetheanum Schrift Klar" charset="0"/>
@@ -4238,7 +5883,7 @@
                           <a:ea typeface="Goetheanum Schrift Klar" pitchFamily="34" charset="-122"/>
                           <a:cs typeface="Goetheanum Schrift Klar" pitchFamily="34" charset="-120"/>
                         </a:rPr>
-                        <a:t>–80</a:t>
+                        <a:t>−80</a:t>
                       </a:r>
                       <a:endParaRPr lang="en-US" sz="1300" dirty="0">
                         <a:latin typeface="Goetheanum Schrift Klar" charset="0"/>
@@ -4325,7 +5970,7 @@
                           <a:ea typeface="Goetheanum Schrift Klar" pitchFamily="34" charset="-122"/>
                           <a:cs typeface="Goetheanum Schrift Klar" pitchFamily="34" charset="-120"/>
                         </a:rPr>
-                        <a:t>1 410</a:t>
+                        <a:t>1410</a:t>
                       </a:r>
                       <a:endParaRPr lang="en-US" sz="1300" dirty="0">
                         <a:latin typeface="Goetheanum Schrift Klar" charset="0"/>
@@ -4366,7 +6011,7 @@
                           <a:ea typeface="Goetheanum Schrift Klar" pitchFamily="34" charset="-122"/>
                           <a:cs typeface="Goetheanum Schrift Klar" pitchFamily="34" charset="-120"/>
                         </a:rPr>
-                        <a:t>1 530</a:t>
+                        <a:t>1530</a:t>
                       </a:r>
                       <a:endParaRPr lang="en-US" sz="1300" dirty="0">
                         <a:latin typeface="Goetheanum Schrift Klar" charset="0"/>
@@ -4494,7 +6139,7 @@
                           <a:ea typeface="Goetheanum Schrift Klar" pitchFamily="34" charset="-122"/>
                           <a:cs typeface="Goetheanum Schrift Klar" pitchFamily="34" charset="-120"/>
                         </a:rPr>
-                        <a:t>3 210</a:t>
+                        <a:t>3210</a:t>
                       </a:r>
                       <a:endParaRPr lang="en-US" sz="1300" dirty="0">
                         <a:latin typeface="Goetheanum Schrift Klar" charset="0"/>
@@ -4538,7 +6183,7 @@
                           <a:ea typeface="Goetheanum Schrift Klar" pitchFamily="34" charset="-122"/>
                           <a:cs typeface="Goetheanum Schrift Klar" pitchFamily="34" charset="-120"/>
                         </a:rPr>
-                        <a:t>3 640</a:t>
+                        <a:t>3640</a:t>
                       </a:r>
                       <a:endParaRPr lang="en-US" sz="1300" dirty="0">
                         <a:latin typeface="Goetheanum Schrift Klar" charset="0"/>
@@ -4624,16 +6269,16 @@
                           <a:solidFill>
                             <a:srgbClr val="1A1A1A"/>
                           </a:solidFill>
-                          <a:latin typeface="Goetheanum Schrift Laut" pitchFamily="34" charset="0"/>
-                          <a:ea typeface="Goetheanum Schrift Laut" pitchFamily="34" charset="-122"/>
-                          <a:cs typeface="Goetheanum Schrift Laut" pitchFamily="34" charset="-120"/>
+                          <a:latin typeface="Goetheanum Schrift Deutlich" pitchFamily="34" charset="0"/>
+                          <a:ea typeface="Goetheanum Schrift Deutlich" pitchFamily="34" charset="-122"/>
+                          <a:cs typeface="Goetheanum Schrift Deutlich" pitchFamily="34" charset="-120"/>
                         </a:rPr>
                         <a:t>Total</a:t>
                       </a:r>
                       <a:endParaRPr lang="en-US" sz="1300" dirty="0">
-                        <a:latin typeface="Goetheanum Schrift Laut" charset="0"/>
-                        <a:ea typeface="Goetheanum Schrift Laut" charset="0"/>
-                        <a:cs typeface="Goetheanum Schrift Laut" charset="0"/>
+                        <a:latin typeface="Goetheanum Schrift Deutlich" charset="0"/>
+                        <a:ea typeface="Goetheanum Schrift Deutlich" charset="0"/>
+                        <a:cs typeface="Goetheanum Schrift Deutlich" charset="0"/>
                       </a:endParaRPr>
                     </a:p>
                   </a:txBody>
@@ -4665,16 +6310,16 @@
                           <a:solidFill>
                             <a:srgbClr val="1A1A1A"/>
                           </a:solidFill>
-                          <a:latin typeface="Goetheanum Schrift Laut" pitchFamily="34" charset="0"/>
-                          <a:ea typeface="Goetheanum Schrift Laut" pitchFamily="34" charset="-122"/>
-                          <a:cs typeface="Goetheanum Schrift Laut" pitchFamily="34" charset="-120"/>
+                          <a:latin typeface="Goetheanum Schrift Deutlich" pitchFamily="34" charset="0"/>
+                          <a:ea typeface="Goetheanum Schrift Deutlich" pitchFamily="34" charset="-122"/>
+                          <a:cs typeface="Goetheanum Schrift Deutlich" pitchFamily="34" charset="-120"/>
                         </a:rPr>
-                        <a:t>11 690</a:t>
+                        <a:t>11 690</a:t>
                       </a:r>
                       <a:endParaRPr lang="en-US" sz="1300" dirty="0">
-                        <a:latin typeface="Goetheanum Schrift Laut" charset="0"/>
-                        <a:ea typeface="Goetheanum Schrift Laut" charset="0"/>
-                        <a:cs typeface="Goetheanum Schrift Laut" charset="0"/>
+                        <a:latin typeface="Goetheanum Schrift Deutlich" charset="0"/>
+                        <a:ea typeface="Goetheanum Schrift Deutlich" charset="0"/>
+                        <a:cs typeface="Goetheanum Schrift Deutlich" charset="0"/>
                       </a:endParaRPr>
                     </a:p>
                   </a:txBody>
@@ -4706,16 +6351,16 @@
                           <a:solidFill>
                             <a:srgbClr val="1A1A1A"/>
                           </a:solidFill>
-                          <a:latin typeface="Goetheanum Schrift Laut" pitchFamily="34" charset="0"/>
-                          <a:ea typeface="Goetheanum Schrift Laut" pitchFamily="34" charset="-122"/>
-                          <a:cs typeface="Goetheanum Schrift Laut" pitchFamily="34" charset="-120"/>
+                          <a:latin typeface="Goetheanum Schrift Deutlich" pitchFamily="34" charset="0"/>
+                          <a:ea typeface="Goetheanum Schrift Deutlich" pitchFamily="34" charset="-122"/>
+                          <a:cs typeface="Goetheanum Schrift Deutlich" pitchFamily="34" charset="-120"/>
                         </a:rPr>
-                        <a:t>12 420</a:t>
+                        <a:t>12 420</a:t>
                       </a:r>
                       <a:endParaRPr lang="en-US" sz="1300" dirty="0">
-                        <a:latin typeface="Goetheanum Schrift Laut" charset="0"/>
-                        <a:ea typeface="Goetheanum Schrift Laut" charset="0"/>
-                        <a:cs typeface="Goetheanum Schrift Laut" charset="0"/>
+                        <a:latin typeface="Goetheanum Schrift Deutlich" charset="0"/>
+                        <a:ea typeface="Goetheanum Schrift Deutlich" charset="0"/>
+                        <a:cs typeface="Goetheanum Schrift Deutlich" charset="0"/>
                       </a:endParaRPr>
                     </a:p>
                   </a:txBody>
@@ -4747,16 +6392,16 @@
                           <a:solidFill>
                             <a:srgbClr val="005EB8"/>
                           </a:solidFill>
-                          <a:latin typeface="Goetheanum Schrift Laut" pitchFamily="34" charset="0"/>
-                          <a:ea typeface="Goetheanum Schrift Laut" pitchFamily="34" charset="-122"/>
-                          <a:cs typeface="Goetheanum Schrift Laut" pitchFamily="34" charset="-120"/>
+                          <a:latin typeface="Goetheanum Schrift Deutlich" pitchFamily="34" charset="0"/>
+                          <a:ea typeface="Goetheanum Schrift Deutlich" pitchFamily="34" charset="-122"/>
+                          <a:cs typeface="Goetheanum Schrift Deutlich" pitchFamily="34" charset="-120"/>
                         </a:rPr>
                         <a:t>+730</a:t>
                       </a:r>
                       <a:endParaRPr lang="en-US" sz="1300" dirty="0">
-                        <a:latin typeface="Goetheanum Schrift Laut" charset="0"/>
-                        <a:ea typeface="Goetheanum Schrift Laut" charset="0"/>
-                        <a:cs typeface="Goetheanum Schrift Laut" charset="0"/>
+                        <a:latin typeface="Goetheanum Schrift Deutlich" charset="0"/>
+                        <a:ea typeface="Goetheanum Schrift Deutlich" charset="0"/>
+                        <a:cs typeface="Goetheanum Schrift Deutlich" charset="0"/>
                       </a:endParaRPr>
                     </a:p>
                   </a:txBody>
@@ -4782,7 +6427,7 @@
       </p:graphicFrame>
       <p:sp>
         <p:nvSpPr>
-          <p:cNvPr id="6" name="Text 2"/>
+          <p:cNvPr id="5" name="Text 2"/>
           <p:cNvSpPr/>
           <p:nvPr/>
         </p:nvSpPr>
@@ -4821,40 +6466,49 @@
       </p:sp>
       <p:sp>
         <p:nvSpPr>
-          <p:cNvPr id="7" name="Text 3"/>
-          <p:cNvSpPr/>
-          <p:nvPr/>
-        </p:nvSpPr>
-        <p:spPr>
-          <a:xfrm>
-            <a:off x="4654296" y="6995160"/>
-            <a:ext cx="5486400" cy="274320"/>
-          </a:xfrm>
-          <a:prstGeom prst="rect">
-            <a:avLst/>
-          </a:prstGeom>
-          <a:noFill/>
-          <a:ln/>
-        </p:spPr>
-        <p:txBody>
-          <a:bodyPr wrap="square" lIns="0" tIns="0" rIns="0" bIns="0" rtlCol="0" anchor="ctr"/>
-          <a:lstStyle/>
-          <a:p>
-            <a:pPr algn="r" indent="0" marL="0">
-              <a:buNone/>
-            </a:pPr>
-            <a:r>
-              <a:rPr lang="en-US" sz="900" dirty="0">
+          <p:cNvPr id="25" name="Slide Number Placeholder 0"/>
+          <p:cNvSpPr>
+            <a:spLocks noGrp="1"/>
+          </p:cNvSpPr>
+          <p:nvPr>
+            <p:ph type="sldNum" sz="quarter" idx="4294967295"/>
+          </p:nvPr>
+        </p:nvSpPr>
+        <p:spPr>
+          <a:xfrm>
+            <a:off x="9747504" y="6995160"/>
+            <a:ext cx="393192" cy="274320"/>
+          </a:xfrm>
+          <a:prstGeom prst="rect">
+            <a:avLst/>
+          </a:prstGeom>
+          <a:extLst>
+            <a:ext uri="{C572A759-6A51-4108-AA02-DFA0A04FC94B}">
+              <ma14:wrappingTextBoxFlag xmlns:ma14="http://schemas.microsoft.com/office/mac/drawingml/2011/main" val="0"/>
+            </a:ext>
+          </a:extLst>
+        </p:spPr>
+        <p:txBody>
+          <a:bodyPr anchor="ctr"/>
+          <a:lstStyle>
+            <a:lvl1pPr>
+              <a:defRPr sz="900">
                 <a:solidFill>
                   <a:srgbClr val="6B7480"/>
                 </a:solidFill>
-                <a:latin typeface="Goetheanum Schrift Klar" pitchFamily="34" charset="0"/>
-                <a:ea typeface="Goetheanum Schrift Klar" pitchFamily="34" charset="-122"/>
-                <a:cs typeface="Goetheanum Schrift Klar" pitchFamily="34" charset="-120"/>
-              </a:rPr>
-              <a:t>Titel der Präsentation · 00.00.2026 · 12</a:t>
-            </a:r>
-            <a:endParaRPr lang="en-US" sz="900" dirty="0"/>
+                <a:latin typeface="Goetheanum Schrift Klar"/>
+                <a:ea typeface="Goetheanum Schrift Klar"/>
+                <a:cs typeface="Goetheanum Schrift Klar"/>
+              </a:defRPr>
+            </a:lvl1pPr>
+          </a:lstStyle>
+          <a:p>
+            <a:pPr algn="l"/>
+            <a:fld id="{F7021451-1387-4CA6-816F-3879F97B5CBC}" type="slidenum">
+              <a:rPr b="0" lang="en-US"/>
+              <a:t>12</a:t>
+            </a:fld>
+            <a:endParaRPr lang="en-US"/>
           </a:p>
         </p:txBody>
       </p:sp>
@@ -4869,13 +6523,6 @@
 <file path=ppt/slides/slide13.xml><?xml version="1.0" encoding="utf-8"?>
 <p:sld xmlns:a="http://schemas.openxmlformats.org/drawingml/2006/main" xmlns:r="http://schemas.openxmlformats.org/officeDocument/2006/relationships" xmlns:p="http://schemas.openxmlformats.org/presentationml/2006/main">
   <p:cSld name="Slide 13">
-    <p:bg>
-      <p:bgPr>
-        <a:solidFill>
-          <a:srgbClr val="FFFFFF"/>
-        </a:solidFill>
-      </p:bgPr>
-    </p:bg>
     <p:spTree>
       <p:nvGrpSpPr>
         <p:cNvPr id="1" name=""/>
@@ -4890,39 +6537,17 @@
           <a:chExt cx="0" cy="0"/>
         </a:xfrm>
       </p:grpSpPr>
-      <p:pic>
-        <p:nvPicPr>
-          <p:cNvPr id="2" name="Image 0" descr="logo-goetheanum-blue.png">    </p:cNvPr>
-          <p:cNvPicPr>
-            <a:picLocks noChangeAspect="1"/>
-          </p:cNvPicPr>
-          <p:nvPr/>
-        </p:nvPicPr>
-        <p:blipFill>
-          <a:blip r:embed="rId1"/>
-          <a:stretch>
-            <a:fillRect/>
-          </a:stretch>
-        </p:blipFill>
-        <p:spPr>
-          <a:xfrm>
-            <a:off x="548640" y="502920"/>
-            <a:ext cx="1088402" cy="182880"/>
-          </a:xfrm>
-          <a:prstGeom prst="rect">
-            <a:avLst/>
-          </a:prstGeom>
-        </p:spPr>
-      </p:pic>
-      <p:sp>
-        <p:nvSpPr>
-          <p:cNvPr id="3" name="Text 0"/>
-          <p:cNvSpPr/>
-          <p:nvPr/>
-        </p:nvSpPr>
-        <p:spPr>
-          <a:xfrm>
-            <a:off x="2002536" y="1143000"/>
+      <p:sp>
+        <p:nvSpPr>
+          <p:cNvPr id="2" name="Text 1"/>
+          <p:cNvSpPr/>
+          <p:nvPr>
+            <p:ph idx="102" type="body" hasCustomPrompt="1"/>
+          </p:nvPr>
+        </p:nvSpPr>
+        <p:spPr>
+          <a:xfrm>
+            <a:off x="2560320" y="1143000"/>
             <a:ext cx="4572000" cy="274320"/>
           </a:xfrm>
           <a:prstGeom prst="rect">
@@ -4932,7 +6557,7 @@
           <a:ln/>
         </p:spPr>
         <p:txBody>
-          <a:bodyPr wrap="square" lIns="0" tIns="0" rIns="0" bIns="0" rtlCol="0" anchor="ctr"/>
+          <a:bodyPr wrap="square" lIns="0" tIns="0" rIns="0" bIns="0" rtlCol="0"/>
           <a:lstStyle/>
           <a:p>
             <a:pPr indent="0" marL="0">
@@ -4955,14 +6580,55 @@
       </p:sp>
       <p:sp>
         <p:nvSpPr>
-          <p:cNvPr id="4" name="Text 1"/>
+          <p:cNvPr id="3" name="Text 1"/>
+          <p:cNvSpPr/>
+          <p:nvPr>
+            <p:ph idx="103" type="title" hasCustomPrompt="1"/>
+          </p:nvPr>
+        </p:nvSpPr>
+        <p:spPr>
+          <a:xfrm>
+            <a:off x="2560320" y="1463040"/>
+            <a:ext cx="7580376" cy="594360"/>
+          </a:xfrm>
+          <a:prstGeom prst="rect">
+            <a:avLst/>
+          </a:prstGeom>
+          <a:noFill/>
+          <a:ln/>
+        </p:spPr>
+        <p:txBody>
+          <a:bodyPr wrap="square" lIns="0" tIns="0" rIns="0" bIns="0" rtlCol="0"/>
+          <a:lstStyle/>
+          <a:p>
+            <a:pPr indent="0" marL="0">
+              <a:buNone/>
+            </a:pPr>
+            <a:r>
+              <a:rPr lang="en-US" sz="2600" dirty="0">
+                <a:solidFill>
+                  <a:srgbClr val="1A1A1A"/>
+                </a:solidFill>
+                <a:latin typeface="Goetheanum Schrift Deutlich" pitchFamily="34" charset="0"/>
+                <a:ea typeface="Goetheanum Schrift Deutlich" pitchFamily="34" charset="-122"/>
+                <a:cs typeface="Goetheanum Schrift Deutlich" pitchFamily="34" charset="-120"/>
+              </a:rPr>
+              <a:t>Praktische Hinweise</a:t>
+            </a:r>
+            <a:endParaRPr lang="en-US" sz="2600" dirty="0"/>
+          </a:p>
+        </p:txBody>
+      </p:sp>
+      <p:sp>
+        <p:nvSpPr>
+          <p:cNvPr id="4" name="Text 2"/>
           <p:cNvSpPr/>
           <p:nvPr/>
         </p:nvSpPr>
         <p:spPr>
           <a:xfrm>
-            <a:off x="2002536" y="1463040"/>
-            <a:ext cx="8138160" cy="594360"/>
+            <a:off x="2560320" y="2926080"/>
+            <a:ext cx="777240" cy="731520"/>
           </a:xfrm>
           <a:prstGeom prst="rect">
             <a:avLst/>
@@ -4978,29 +6644,91 @@
               <a:buNone/>
             </a:pPr>
             <a:r>
-              <a:rPr lang="en-US" sz="2600" dirty="0">
+              <a:rPr lang="en-US" sz="3600" dirty="0">
+                <a:solidFill>
+                  <a:srgbClr val="005EB8"/>
+                </a:solidFill>
+                <a:latin typeface="Goetheanum Icons" pitchFamily="34" charset="0"/>
+                <a:ea typeface="Goetheanum Icons" pitchFamily="34" charset="-122"/>
+                <a:cs typeface="Goetheanum Icons" pitchFamily="34" charset="-120"/>
+              </a:rPr>
+              <a:t>g</a:t>
+            </a:r>
+            <a:endParaRPr lang="en-US" sz="3600" dirty="0"/>
+          </a:p>
+        </p:txBody>
+      </p:sp>
+      <p:sp>
+        <p:nvSpPr>
+          <p:cNvPr id="5" name="Text 3"/>
+          <p:cNvSpPr/>
+          <p:nvPr/>
+        </p:nvSpPr>
+        <p:spPr>
+          <a:xfrm>
+            <a:off x="3474720" y="2926080"/>
+            <a:ext cx="3017520" cy="731520"/>
+          </a:xfrm>
+          <a:prstGeom prst="rect">
+            <a:avLst/>
+          </a:prstGeom>
+          <a:noFill/>
+          <a:ln/>
+        </p:spPr>
+        <p:txBody>
+          <a:bodyPr wrap="square" lIns="0" tIns="0" rIns="0" bIns="0" rtlCol="0" anchor="ctr"/>
+          <a:lstStyle/>
+          <a:p>
+            <a:pPr indent="0" marL="0">
+              <a:lnSpc>
+                <a:spcPct val="120000"/>
+              </a:lnSpc>
+              <a:buNone/>
+            </a:pPr>
+            <a:r>
+              <a:rPr lang="en-US" sz="1300" dirty="0">
                 <a:solidFill>
                   <a:srgbClr val="1A1A1A"/>
+                </a:solidFill>
+                <a:latin typeface="Goetheanum Schrift Deutlich" pitchFamily="34" charset="0"/>
+                <a:ea typeface="Goetheanum Schrift Deutlich" pitchFamily="34" charset="-122"/>
+                <a:cs typeface="Goetheanum Schrift Deutlich" pitchFamily="34" charset="-120"/>
+              </a:rPr>
+              <a:t>WLAN</a:t>
+            </a:r>
+            <a:endParaRPr lang="en-US" sz="1300" dirty="0"/>
+          </a:p>
+          <a:p>
+            <a:pPr indent="0" marL="0">
+              <a:lnSpc>
+                <a:spcPct val="120000"/>
+              </a:lnSpc>
+              <a:buNone/>
+            </a:pPr>
+            <a:r>
+              <a:rPr lang="en-US" sz="1300" dirty="0">
+                <a:solidFill>
+                  <a:srgbClr val="6B7480"/>
                 </a:solidFill>
                 <a:latin typeface="Goetheanum Schrift Klar" pitchFamily="34" charset="0"/>
                 <a:ea typeface="Goetheanum Schrift Klar" pitchFamily="34" charset="-122"/>
                 <a:cs typeface="Goetheanum Schrift Klar" pitchFamily="34" charset="-120"/>
               </a:rPr>
-              <a:t>Praktische Hinweise</a:t>
-            </a:r>
-            <a:endParaRPr lang="en-US" sz="2600" dirty="0"/>
-          </a:p>
-        </p:txBody>
-      </p:sp>
-      <p:sp>
-        <p:nvSpPr>
-          <p:cNvPr id="5" name="Text 2"/>
+              <a:t>Gastzugang: Goetheanum, offen</a:t>
+            </a:r>
+            <a:endParaRPr lang="en-US" sz="1300" dirty="0"/>
+          </a:p>
+        </p:txBody>
+      </p:sp>
+      <p:sp>
+        <p:nvSpPr>
+          <p:cNvPr id="6" name="Text 4"/>
           <p:cNvSpPr/>
           <p:nvPr/>
         </p:nvSpPr>
         <p:spPr>
           <a:xfrm>
-            <a:off x="2002536" y="2926080"/>
+            <a:off x="6492240" y="2926080"/>
             <a:ext cx="777240" cy="731520"/>
           </a:xfrm>
           <a:prstGeom prst="rect">
@@ -5025,7 +6753,7 @@
                 <a:ea typeface="Goetheanum Icons" pitchFamily="34" charset="-122"/>
                 <a:cs typeface="Goetheanum Icons" pitchFamily="34" charset="-120"/>
               </a:rPr>
-              <a:t>g</a:t>
+              <a:t>a</a:t>
             </a:r>
             <a:endParaRPr lang="en-US" sz="3600" dirty="0"/>
           </a:p>
@@ -5033,14 +6761,14 @@
       </p:sp>
       <p:sp>
         <p:nvSpPr>
-          <p:cNvPr id="6" name="Text 3"/>
+          <p:cNvPr id="7" name="Text 5"/>
           <p:cNvSpPr/>
           <p:nvPr/>
         </p:nvSpPr>
         <p:spPr>
           <a:xfrm>
-            <a:off x="2916936" y="2926080"/>
-            <a:ext cx="3200400" cy="731520"/>
+            <a:off x="7406640" y="2926080"/>
+            <a:ext cx="3017520" cy="731520"/>
           </a:xfrm>
           <a:prstGeom prst="rect">
             <a:avLst/>
@@ -5063,11 +6791,11 @@
                 <a:solidFill>
                   <a:srgbClr val="1A1A1A"/>
                 </a:solidFill>
-                <a:latin typeface="Goetheanum Schrift Laut" pitchFamily="34" charset="0"/>
-                <a:ea typeface="Goetheanum Schrift Laut" pitchFamily="34" charset="-122"/>
-                <a:cs typeface="Goetheanum Schrift Laut" pitchFamily="34" charset="-120"/>
-              </a:rPr>
-              <a:t>WLAN</a:t>
+                <a:latin typeface="Goetheanum Schrift Deutlich" pitchFamily="34" charset="0"/>
+                <a:ea typeface="Goetheanum Schrift Deutlich" pitchFamily="34" charset="-122"/>
+                <a:cs typeface="Goetheanum Schrift Deutlich" pitchFamily="34" charset="-120"/>
+              </a:rPr>
+              <a:t>Lift</a:t>
             </a:r>
             <a:endParaRPr lang="en-US" sz="1300" dirty="0"/>
           </a:p>
@@ -5087,7 +6815,7 @@
                 <a:ea typeface="Goetheanum Schrift Klar" pitchFamily="34" charset="-122"/>
                 <a:cs typeface="Goetheanum Schrift Klar" pitchFamily="34" charset="-120"/>
               </a:rPr>
-              <a:t>Gastzugang: Goetheanum, offen</a:t>
+              <a:t>Zugang über den Westeingang</a:t>
             </a:r>
             <a:endParaRPr lang="en-US" sz="1300" dirty="0"/>
           </a:p>
@@ -5095,13 +6823,13 @@
       </p:sp>
       <p:sp>
         <p:nvSpPr>
-          <p:cNvPr id="7" name="Text 4"/>
+          <p:cNvPr id="8" name="Text 6"/>
           <p:cNvSpPr/>
           <p:nvPr/>
         </p:nvSpPr>
         <p:spPr>
           <a:xfrm>
-            <a:off x="6163056" y="2926080"/>
+            <a:off x="2560320" y="4480560"/>
             <a:ext cx="777240" cy="731520"/>
           </a:xfrm>
           <a:prstGeom prst="rect">
@@ -5126,7 +6854,7 @@
                 <a:ea typeface="Goetheanum Icons" pitchFamily="34" charset="-122"/>
                 <a:cs typeface="Goetheanum Icons" pitchFamily="34" charset="-120"/>
               </a:rPr>
-              <a:t>a</a:t>
+              <a:t>e</a:t>
             </a:r>
             <a:endParaRPr lang="en-US" sz="3600" dirty="0"/>
           </a:p>
@@ -5134,14 +6862,14 @@
       </p:sp>
       <p:sp>
         <p:nvSpPr>
-          <p:cNvPr id="8" name="Text 5"/>
+          <p:cNvPr id="9" name="Text 7"/>
           <p:cNvSpPr/>
           <p:nvPr/>
         </p:nvSpPr>
         <p:spPr>
           <a:xfrm>
-            <a:off x="7077456" y="2926080"/>
-            <a:ext cx="3200400" cy="731520"/>
+            <a:off x="3474720" y="4480560"/>
+            <a:ext cx="3017520" cy="731520"/>
           </a:xfrm>
           <a:prstGeom prst="rect">
             <a:avLst/>
@@ -5164,11 +6892,11 @@
                 <a:solidFill>
                   <a:srgbClr val="1A1A1A"/>
                 </a:solidFill>
-                <a:latin typeface="Goetheanum Schrift Laut" pitchFamily="34" charset="0"/>
-                <a:ea typeface="Goetheanum Schrift Laut" pitchFamily="34" charset="-122"/>
-                <a:cs typeface="Goetheanum Schrift Laut" pitchFamily="34" charset="-120"/>
-              </a:rPr>
-              <a:t>Lift</a:t>
+                <a:latin typeface="Goetheanum Schrift Deutlich" pitchFamily="34" charset="0"/>
+                <a:ea typeface="Goetheanum Schrift Deutlich" pitchFamily="34" charset="-122"/>
+                <a:cs typeface="Goetheanum Schrift Deutlich" pitchFamily="34" charset="-120"/>
+              </a:rPr>
+              <a:t>Eintritt</a:t>
             </a:r>
             <a:endParaRPr lang="en-US" sz="1300" dirty="0"/>
           </a:p>
@@ -5188,7 +6916,7 @@
                 <a:ea typeface="Goetheanum Schrift Klar" pitchFamily="34" charset="-122"/>
                 <a:cs typeface="Goetheanum Schrift Klar" pitchFamily="34" charset="-120"/>
               </a:rPr>
-              <a:t>Zugang über den Westeingang</a:t>
+              <a:t>Frei, Kollekte am Ausgang</a:t>
             </a:r>
             <a:endParaRPr lang="en-US" sz="1300" dirty="0"/>
           </a:p>
@@ -5196,13 +6924,13 @@
       </p:sp>
       <p:sp>
         <p:nvSpPr>
-          <p:cNvPr id="9" name="Text 6"/>
+          <p:cNvPr id="10" name="Text 8"/>
           <p:cNvSpPr/>
           <p:nvPr/>
         </p:nvSpPr>
         <p:spPr>
           <a:xfrm>
-            <a:off x="2002536" y="4480560"/>
+            <a:off x="6492240" y="4480560"/>
             <a:ext cx="777240" cy="731520"/>
           </a:xfrm>
           <a:prstGeom prst="rect">
@@ -5227,7 +6955,7 @@
                 <a:ea typeface="Goetheanum Icons" pitchFamily="34" charset="-122"/>
                 <a:cs typeface="Goetheanum Icons" pitchFamily="34" charset="-120"/>
               </a:rPr>
-              <a:t>e</a:t>
+              <a:t>z</a:t>
             </a:r>
             <a:endParaRPr lang="en-US" sz="3600" dirty="0"/>
           </a:p>
@@ -5235,14 +6963,14 @@
       </p:sp>
       <p:sp>
         <p:nvSpPr>
-          <p:cNvPr id="10" name="Text 7"/>
+          <p:cNvPr id="11" name="Text 9"/>
           <p:cNvSpPr/>
           <p:nvPr/>
         </p:nvSpPr>
         <p:spPr>
           <a:xfrm>
-            <a:off x="2916936" y="4480560"/>
-            <a:ext cx="3200400" cy="731520"/>
+            <a:off x="7406640" y="4480560"/>
+            <a:ext cx="3017520" cy="731520"/>
           </a:xfrm>
           <a:prstGeom prst="rect">
             <a:avLst/>
@@ -5265,11 +6993,11 @@
                 <a:solidFill>
                   <a:srgbClr val="1A1A1A"/>
                 </a:solidFill>
-                <a:latin typeface="Goetheanum Schrift Laut" pitchFamily="34" charset="0"/>
-                <a:ea typeface="Goetheanum Schrift Laut" pitchFamily="34" charset="-122"/>
-                <a:cs typeface="Goetheanum Schrift Laut" pitchFamily="34" charset="-120"/>
-              </a:rPr>
-              <a:t>Eintritt</a:t>
+                <a:latin typeface="Goetheanum Schrift Deutlich" pitchFamily="34" charset="0"/>
+                <a:ea typeface="Goetheanum Schrift Deutlich" pitchFamily="34" charset="-122"/>
+                <a:cs typeface="Goetheanum Schrift Deutlich" pitchFamily="34" charset="-120"/>
+              </a:rPr>
+              <a:t>Fotografie</a:t>
             </a:r>
             <a:endParaRPr lang="en-US" sz="1300" dirty="0"/>
           </a:p>
@@ -5289,7 +7017,7 @@
                 <a:ea typeface="Goetheanum Schrift Klar" pitchFamily="34" charset="-122"/>
                 <a:cs typeface="Goetheanum Schrift Klar" pitchFamily="34" charset="-120"/>
               </a:rPr>
-              <a:t>Frei, Kollekte am Ausgang</a:t>
+              <a:t>Bitte keine Aufnahmen im Saal</a:t>
             </a:r>
             <a:endParaRPr lang="en-US" sz="1300" dirty="0"/>
           </a:p>
@@ -5297,14 +7025,14 @@
       </p:sp>
       <p:sp>
         <p:nvSpPr>
-          <p:cNvPr id="11" name="Text 8"/>
+          <p:cNvPr id="12" name="Text 10"/>
           <p:cNvSpPr/>
           <p:nvPr/>
         </p:nvSpPr>
         <p:spPr>
           <a:xfrm>
-            <a:off x="6163056" y="4480560"/>
-            <a:ext cx="777240" cy="731520"/>
+            <a:off x="548640" y="6537960"/>
+            <a:ext cx="6400800" cy="274320"/>
           </a:xfrm>
           <a:prstGeom prst="rect">
             <a:avLst/>
@@ -5320,69 +7048,7 @@
               <a:buNone/>
             </a:pPr>
             <a:r>
-              <a:rPr lang="en-US" sz="3600" dirty="0">
-                <a:solidFill>
-                  <a:srgbClr val="005EB8"/>
-                </a:solidFill>
-                <a:latin typeface="Goetheanum Icons" pitchFamily="34" charset="0"/>
-                <a:ea typeface="Goetheanum Icons" pitchFamily="34" charset="-122"/>
-                <a:cs typeface="Goetheanum Icons" pitchFamily="34" charset="-120"/>
-              </a:rPr>
-              <a:t>z</a:t>
-            </a:r>
-            <a:endParaRPr lang="en-US" sz="3600" dirty="0"/>
-          </a:p>
-        </p:txBody>
-      </p:sp>
-      <p:sp>
-        <p:nvSpPr>
-          <p:cNvPr id="12" name="Text 9"/>
-          <p:cNvSpPr/>
-          <p:nvPr/>
-        </p:nvSpPr>
-        <p:spPr>
-          <a:xfrm>
-            <a:off x="7077456" y="4480560"/>
-            <a:ext cx="3200400" cy="731520"/>
-          </a:xfrm>
-          <a:prstGeom prst="rect">
-            <a:avLst/>
-          </a:prstGeom>
-          <a:noFill/>
-          <a:ln/>
-        </p:spPr>
-        <p:txBody>
-          <a:bodyPr wrap="square" lIns="0" tIns="0" rIns="0" bIns="0" rtlCol="0" anchor="ctr"/>
-          <a:lstStyle/>
-          <a:p>
-            <a:pPr indent="0" marL="0">
-              <a:lnSpc>
-                <a:spcPct val="120000"/>
-              </a:lnSpc>
-              <a:buNone/>
-            </a:pPr>
-            <a:r>
-              <a:rPr lang="en-US" sz="1300" dirty="0">
-                <a:solidFill>
-                  <a:srgbClr val="1A1A1A"/>
-                </a:solidFill>
-                <a:latin typeface="Goetheanum Schrift Laut" pitchFamily="34" charset="0"/>
-                <a:ea typeface="Goetheanum Schrift Laut" pitchFamily="34" charset="-122"/>
-                <a:cs typeface="Goetheanum Schrift Laut" pitchFamily="34" charset="-120"/>
-              </a:rPr>
-              <a:t>Fotografie</a:t>
-            </a:r>
-            <a:endParaRPr lang="en-US" sz="1300" dirty="0"/>
-          </a:p>
-          <a:p>
-            <a:pPr indent="0" marL="0">
-              <a:lnSpc>
-                <a:spcPct val="120000"/>
-              </a:lnSpc>
-              <a:buNone/>
-            </a:pPr>
-            <a:r>
-              <a:rPr lang="en-US" sz="1300" dirty="0">
+              <a:rPr lang="en-US" sz="900" dirty="0">
                 <a:solidFill>
                   <a:srgbClr val="6B7480"/>
                 </a:solidFill>
@@ -5390,59 +7056,20 @@
                 <a:ea typeface="Goetheanum Schrift Klar" pitchFamily="34" charset="-122"/>
                 <a:cs typeface="Goetheanum Schrift Klar" pitchFamily="34" charset="-120"/>
               </a:rPr>
-              <a:t>Bitte keine Aufnahmen im Saal</a:t>
-            </a:r>
-            <a:endParaRPr lang="en-US" sz="1300" dirty="0"/>
-          </a:p>
-        </p:txBody>
-      </p:sp>
-      <p:sp>
-        <p:nvSpPr>
-          <p:cNvPr id="13" name="Text 10"/>
-          <p:cNvSpPr/>
-          <p:nvPr/>
-        </p:nvSpPr>
-        <p:spPr>
-          <a:xfrm>
-            <a:off x="548640" y="6537960"/>
-            <a:ext cx="6400800" cy="274320"/>
-          </a:xfrm>
-          <a:prstGeom prst="rect">
-            <a:avLst/>
-          </a:prstGeom>
-          <a:noFill/>
-          <a:ln/>
-        </p:spPr>
-        <p:txBody>
-          <a:bodyPr wrap="square" lIns="0" tIns="0" rIns="0" bIns="0" rtlCol="0" anchor="ctr"/>
-          <a:lstStyle/>
-          <a:p>
+              <a:t>Piktogramme: Schrift ‹Goetheanum Icons›, Belegung im </a:t>
+            </a:r>
             <a:pPr indent="0" marL="0">
               <a:buNone/>
             </a:pPr>
             <a:r>
               <a:rPr lang="en-US" sz="900" dirty="0">
                 <a:solidFill>
-                  <a:srgbClr val="6B7480"/>
+                  <a:srgbClr val="005EB8"/>
                 </a:solidFill>
                 <a:latin typeface="Goetheanum Schrift Klar" pitchFamily="34" charset="0"/>
                 <a:ea typeface="Goetheanum Schrift Klar" pitchFamily="34" charset="-122"/>
                 <a:cs typeface="Goetheanum Schrift Klar" pitchFamily="34" charset="-120"/>
-              </a:rPr>
-              <a:t>Piktogramme: Schrift ‹Goetheanum Icons›, Belegung im </a:t>
-            </a:r>
-            <a:pPr indent="0" marL="0">
-              <a:buNone/>
-            </a:pPr>
-            <a:r>
-              <a:rPr lang="en-US" sz="900" u="sng" dirty="0">
-                <a:solidFill>
-                  <a:srgbClr val="005EB8"/>
-                </a:solidFill>
-                <a:latin typeface="Goetheanum Schrift Klar" pitchFamily="34" charset="0"/>
-                <a:ea typeface="Goetheanum Schrift Klar" pitchFamily="34" charset="-122"/>
-                <a:cs typeface="Goetheanum Schrift Klar" pitchFamily="34" charset="-120"/>
-                <a:hlinkClick r:id="rId2" invalidUrl="" action="" tgtFrame="" tooltip="" history="1" highlightClick="0" endSnd="0">
+                <a:hlinkClick r:id="rId1" invalidUrl="" action="" tgtFrame="" tooltip="" history="1" highlightClick="0" endSnd="0">
                   <a:extLst>
                     <a:ext uri="{A12FA001-AC4F-418D-AE19-62706E023703}">
                       <ahyp:hlinkClr xmlns:ahyp="http://schemas.microsoft.com/office/drawing/2018/hyperlinkcolor" val="tx"/>
@@ -5458,40 +7085,49 @@
       </p:sp>
       <p:sp>
         <p:nvSpPr>
-          <p:cNvPr id="14" name="Text 11"/>
-          <p:cNvSpPr/>
-          <p:nvPr/>
-        </p:nvSpPr>
-        <p:spPr>
-          <a:xfrm>
-            <a:off x="4654296" y="6995160"/>
-            <a:ext cx="5486400" cy="274320"/>
-          </a:xfrm>
-          <a:prstGeom prst="rect">
-            <a:avLst/>
-          </a:prstGeom>
-          <a:noFill/>
-          <a:ln/>
-        </p:spPr>
-        <p:txBody>
-          <a:bodyPr wrap="square" lIns="0" tIns="0" rIns="0" bIns="0" rtlCol="0" anchor="ctr"/>
-          <a:lstStyle/>
-          <a:p>
-            <a:pPr algn="r" indent="0" marL="0">
-              <a:buNone/>
-            </a:pPr>
-            <a:r>
-              <a:rPr lang="en-US" sz="900" dirty="0">
+          <p:cNvPr id="25" name="Slide Number Placeholder 0"/>
+          <p:cNvSpPr>
+            <a:spLocks noGrp="1"/>
+          </p:cNvSpPr>
+          <p:nvPr>
+            <p:ph type="sldNum" sz="quarter" idx="4294967295"/>
+          </p:nvPr>
+        </p:nvSpPr>
+        <p:spPr>
+          <a:xfrm>
+            <a:off x="9747504" y="6995160"/>
+            <a:ext cx="393192" cy="274320"/>
+          </a:xfrm>
+          <a:prstGeom prst="rect">
+            <a:avLst/>
+          </a:prstGeom>
+          <a:extLst>
+            <a:ext uri="{C572A759-6A51-4108-AA02-DFA0A04FC94B}">
+              <ma14:wrappingTextBoxFlag xmlns:ma14="http://schemas.microsoft.com/office/mac/drawingml/2011/main" val="0"/>
+            </a:ext>
+          </a:extLst>
+        </p:spPr>
+        <p:txBody>
+          <a:bodyPr anchor="ctr"/>
+          <a:lstStyle>
+            <a:lvl1pPr>
+              <a:defRPr sz="900">
                 <a:solidFill>
                   <a:srgbClr val="6B7480"/>
                 </a:solidFill>
-                <a:latin typeface="Goetheanum Schrift Klar" pitchFamily="34" charset="0"/>
-                <a:ea typeface="Goetheanum Schrift Klar" pitchFamily="34" charset="-122"/>
-                <a:cs typeface="Goetheanum Schrift Klar" pitchFamily="34" charset="-120"/>
-              </a:rPr>
-              <a:t>Titel der Präsentation · 00.00.2026 · 13</a:t>
-            </a:r>
-            <a:endParaRPr lang="en-US" sz="900" dirty="0"/>
+                <a:latin typeface="Goetheanum Schrift Klar"/>
+                <a:ea typeface="Goetheanum Schrift Klar"/>
+                <a:cs typeface="Goetheanum Schrift Klar"/>
+              </a:defRPr>
+            </a:lvl1pPr>
+          </a:lstStyle>
+          <a:p>
+            <a:pPr algn="l"/>
+            <a:fld id="{F7021451-1387-4CA6-816F-3879F97B5CBC}" type="slidenum">
+              <a:rPr b="0" lang="en-US"/>
+              <a:t>13</a:t>
+            </a:fld>
+            <a:endParaRPr lang="en-US"/>
           </a:p>
         </p:txBody>
       </p:sp>
@@ -5506,13 +7142,6 @@
 <file path=ppt/slides/slide14.xml><?xml version="1.0" encoding="utf-8"?>
 <p:sld xmlns:a="http://schemas.openxmlformats.org/drawingml/2006/main" xmlns:r="http://schemas.openxmlformats.org/officeDocument/2006/relationships" xmlns:p="http://schemas.openxmlformats.org/presentationml/2006/main">
   <p:cSld name="Slide 14">
-    <p:bg>
-      <p:bgPr>
-        <a:solidFill>
-          <a:srgbClr val="FFFFFF"/>
-        </a:solidFill>
-      </p:bgPr>
-    </p:bg>
     <p:spTree>
       <p:nvGrpSpPr>
         <p:cNvPr id="1" name=""/>
@@ -5527,33 +7156,9 @@
           <a:chExt cx="0" cy="0"/>
         </a:xfrm>
       </p:grpSpPr>
-      <p:pic>
-        <p:nvPicPr>
-          <p:cNvPr id="2" name="Image 0" descr="logo-goetheanum-blue.png">    </p:cNvPr>
-          <p:cNvPicPr>
-            <a:picLocks noChangeAspect="1"/>
-          </p:cNvPicPr>
-          <p:nvPr/>
-        </p:nvPicPr>
-        <p:blipFill>
-          <a:blip r:embed="rId1"/>
-          <a:stretch>
-            <a:fillRect/>
-          </a:stretch>
-        </p:blipFill>
-        <p:spPr>
-          <a:xfrm>
-            <a:off x="548640" y="502920"/>
-            <a:ext cx="1088402" cy="182880"/>
-          </a:xfrm>
-          <a:prstGeom prst="rect">
-            <a:avLst/>
-          </a:prstGeom>
-        </p:spPr>
-      </p:pic>
-      <p:sp>
-        <p:nvSpPr>
-          <p:cNvPr id="3" name="Text 0"/>
+      <p:sp>
+        <p:nvSpPr>
+          <p:cNvPr id="2" name="Text 0"/>
           <p:cNvSpPr/>
           <p:nvPr/>
         </p:nvSpPr>
@@ -5635,7 +7240,7 @@
       </p:sp>
       <p:sp>
         <p:nvSpPr>
-          <p:cNvPr id="4" name="Text 1"/>
+          <p:cNvPr id="3" name="Text 1"/>
           <p:cNvSpPr/>
           <p:nvPr/>
         </p:nvSpPr>
@@ -5674,40 +7279,49 @@
       </p:sp>
       <p:sp>
         <p:nvSpPr>
-          <p:cNvPr id="5" name="Text 2"/>
-          <p:cNvSpPr/>
-          <p:nvPr/>
-        </p:nvSpPr>
-        <p:spPr>
-          <a:xfrm>
-            <a:off x="4654296" y="6995160"/>
-            <a:ext cx="5486400" cy="274320"/>
-          </a:xfrm>
-          <a:prstGeom prst="rect">
-            <a:avLst/>
-          </a:prstGeom>
-          <a:noFill/>
-          <a:ln/>
-        </p:spPr>
-        <p:txBody>
-          <a:bodyPr wrap="square" lIns="0" tIns="0" rIns="0" bIns="0" rtlCol="0" anchor="ctr"/>
-          <a:lstStyle/>
-          <a:p>
-            <a:pPr algn="r" indent="0" marL="0">
-              <a:buNone/>
-            </a:pPr>
-            <a:r>
-              <a:rPr lang="en-US" sz="900" dirty="0">
+          <p:cNvPr id="25" name="Slide Number Placeholder 0"/>
+          <p:cNvSpPr>
+            <a:spLocks noGrp="1"/>
+          </p:cNvSpPr>
+          <p:nvPr>
+            <p:ph type="sldNum" sz="quarter" idx="4294967295"/>
+          </p:nvPr>
+        </p:nvSpPr>
+        <p:spPr>
+          <a:xfrm>
+            <a:off x="9747504" y="6995160"/>
+            <a:ext cx="393192" cy="274320"/>
+          </a:xfrm>
+          <a:prstGeom prst="rect">
+            <a:avLst/>
+          </a:prstGeom>
+          <a:extLst>
+            <a:ext uri="{C572A759-6A51-4108-AA02-DFA0A04FC94B}">
+              <ma14:wrappingTextBoxFlag xmlns:ma14="http://schemas.microsoft.com/office/mac/drawingml/2011/main" val="0"/>
+            </a:ext>
+          </a:extLst>
+        </p:spPr>
+        <p:txBody>
+          <a:bodyPr anchor="ctr"/>
+          <a:lstStyle>
+            <a:lvl1pPr>
+              <a:defRPr sz="900">
                 <a:solidFill>
                   <a:srgbClr val="6B7480"/>
                 </a:solidFill>
-                <a:latin typeface="Goetheanum Schrift Klar" pitchFamily="34" charset="0"/>
-                <a:ea typeface="Goetheanum Schrift Klar" pitchFamily="34" charset="-122"/>
-                <a:cs typeface="Goetheanum Schrift Klar" pitchFamily="34" charset="-120"/>
-              </a:rPr>
-              <a:t>Titel der Präsentation · 00.00.2026 · 14</a:t>
-            </a:r>
-            <a:endParaRPr lang="en-US" sz="900" dirty="0"/>
+                <a:latin typeface="Goetheanum Schrift Klar"/>
+                <a:ea typeface="Goetheanum Schrift Klar"/>
+                <a:cs typeface="Goetheanum Schrift Klar"/>
+              </a:defRPr>
+            </a:lvl1pPr>
+          </a:lstStyle>
+          <a:p>
+            <a:pPr algn="l"/>
+            <a:fld id="{F7021451-1387-4CA6-816F-3879F97B5CBC}" type="slidenum">
+              <a:rPr b="0" lang="en-US"/>
+              <a:t>14</a:t>
+            </a:fld>
+            <a:endParaRPr lang="en-US"/>
           </a:p>
         </p:txBody>
       </p:sp>
@@ -5722,13 +7336,6 @@
 <file path=ppt/slides/slide15.xml><?xml version="1.0" encoding="utf-8"?>
 <p:sld xmlns:a="http://schemas.openxmlformats.org/drawingml/2006/main" xmlns:r="http://schemas.openxmlformats.org/officeDocument/2006/relationships" xmlns:p="http://schemas.openxmlformats.org/presentationml/2006/main">
   <p:cSld name="Slide 15">
-    <p:bg>
-      <p:bgPr>
-        <a:solidFill>
-          <a:srgbClr val="005EB8"/>
-        </a:solidFill>
-      </p:bgPr>
-    </p:bg>
     <p:spTree>
       <p:nvGrpSpPr>
         <p:cNvPr id="1" name=""/>
@@ -5743,35 +7350,13 @@
           <a:chExt cx="0" cy="0"/>
         </a:xfrm>
       </p:grpSpPr>
-      <p:pic>
-        <p:nvPicPr>
-          <p:cNvPr id="2" name="Image 0" descr="logo-goetheanum-white.png">    </p:cNvPr>
-          <p:cNvPicPr>
-            <a:picLocks noChangeAspect="1"/>
-          </p:cNvPicPr>
-          <p:nvPr/>
-        </p:nvPicPr>
-        <p:blipFill>
-          <a:blip r:embed="rId1"/>
-          <a:stretch>
-            <a:fillRect/>
-          </a:stretch>
-        </p:blipFill>
-        <p:spPr>
-          <a:xfrm>
-            <a:off x="548640" y="466344"/>
-            <a:ext cx="1850284" cy="310896"/>
-          </a:xfrm>
-          <a:prstGeom prst="rect">
-            <a:avLst/>
-          </a:prstGeom>
-        </p:spPr>
-      </p:pic>
-      <p:sp>
-        <p:nvSpPr>
-          <p:cNvPr id="3" name="Text 0"/>
-          <p:cNvSpPr/>
-          <p:nvPr/>
+      <p:sp>
+        <p:nvSpPr>
+          <p:cNvPr id="2" name="Text 0"/>
+          <p:cNvSpPr/>
+          <p:nvPr>
+            <p:ph idx="101" type="title" hasCustomPrompt="1"/>
+          </p:nvPr>
         </p:nvSpPr>
         <p:spPr>
           <a:xfrm>
@@ -5785,7 +7370,7 @@
           <a:ln/>
         </p:spPr>
         <p:txBody>
-          <a:bodyPr wrap="square" lIns="0" tIns="0" rIns="0" bIns="0" rtlCol="0" anchor="ctr"/>
+          <a:bodyPr wrap="square" lIns="0" tIns="0" rIns="0" bIns="0" rtlCol="0"/>
           <a:lstStyle/>
           <a:p>
             <a:pPr indent="0" marL="0">
@@ -5796,9 +7381,9 @@
                 <a:solidFill>
                   <a:srgbClr val="FFFFFF"/>
                 </a:solidFill>
-                <a:latin typeface="Goetheanum Schrift Klar" pitchFamily="34" charset="0"/>
-                <a:ea typeface="Goetheanum Schrift Klar" pitchFamily="34" charset="-122"/>
-                <a:cs typeface="Goetheanum Schrift Klar" pitchFamily="34" charset="-120"/>
+                <a:latin typeface="Goetheanum Schrift Deutlich" pitchFamily="34" charset="0"/>
+                <a:ea typeface="Goetheanum Schrift Deutlich" pitchFamily="34" charset="-122"/>
+                <a:cs typeface="Goetheanum Schrift Deutlich" pitchFamily="34" charset="-120"/>
               </a:rPr>
               <a:t>Vielen Dank.</a:t>
             </a:r>
@@ -5808,23 +7393,25 @@
       </p:sp>
       <p:sp>
         <p:nvSpPr>
-          <p:cNvPr id="4" name="Text 1"/>
-          <p:cNvSpPr/>
-          <p:nvPr/>
+          <p:cNvPr id="3" name="Text 0"/>
+          <p:cNvSpPr/>
+          <p:nvPr>
+            <p:ph idx="102" type="body" hasCustomPrompt="1"/>
+          </p:nvPr>
         </p:nvSpPr>
         <p:spPr>
           <a:xfrm>
             <a:off x="2002536" y="3712464"/>
-            <a:ext cx="6400800" cy="548640"/>
-          </a:xfrm>
-          <a:prstGeom prst="rect">
-            <a:avLst/>
-          </a:prstGeom>
-          <a:noFill/>
-          <a:ln/>
-        </p:spPr>
-        <p:txBody>
-          <a:bodyPr wrap="square" lIns="0" tIns="0" rIns="0" bIns="0" rtlCol="0" anchor="ctr"/>
+            <a:ext cx="7680960" cy="548640"/>
+          </a:xfrm>
+          <a:prstGeom prst="rect">
+            <a:avLst/>
+          </a:prstGeom>
+          <a:noFill/>
+          <a:ln/>
+        </p:spPr>
+        <p:txBody>
+          <a:bodyPr wrap="square" lIns="0" tIns="0" rIns="0" bIns="0" rtlCol="0"/>
           <a:lstStyle/>
           <a:p>
             <a:pPr indent="0" marL="0">
@@ -5847,9 +7434,11 @@
       </p:sp>
       <p:sp>
         <p:nvSpPr>
-          <p:cNvPr id="5" name="Text 2"/>
-          <p:cNvSpPr/>
-          <p:nvPr/>
+          <p:cNvPr id="4" name="Text 0"/>
+          <p:cNvSpPr/>
+          <p:nvPr>
+            <p:ph idx="103" type="body" hasCustomPrompt="1"/>
+          </p:nvPr>
         </p:nvSpPr>
         <p:spPr>
           <a:xfrm>
@@ -5863,7 +7452,7 @@
           <a:ln/>
         </p:spPr>
         <p:txBody>
-          <a:bodyPr wrap="square" lIns="0" tIns="0" rIns="0" bIns="0" rtlCol="0" anchor="ctr"/>
+          <a:bodyPr wrap="square" lIns="0" tIns="0" rIns="0" bIns="0" rtlCol="0"/>
           <a:lstStyle/>
           <a:p>
             <a:pPr algn="r" indent="0" marL="0">
@@ -5895,13 +7484,6 @@
 <file path=ppt/slides/slide2.xml><?xml version="1.0" encoding="utf-8"?>
 <p:sld xmlns:a="http://schemas.openxmlformats.org/drawingml/2006/main" xmlns:r="http://schemas.openxmlformats.org/officeDocument/2006/relationships" xmlns:p="http://schemas.openxmlformats.org/presentationml/2006/main">
   <p:cSld name="Slide 2">
-    <p:bg>
-      <p:bgPr>
-        <a:solidFill>
-          <a:srgbClr val="FFFFFF"/>
-        </a:solidFill>
-      </p:bgPr>
-    </p:bg>
     <p:spTree>
       <p:nvGrpSpPr>
         <p:cNvPr id="1" name=""/>
@@ -5916,35 +7498,13 @@
           <a:chExt cx="0" cy="0"/>
         </a:xfrm>
       </p:grpSpPr>
-      <p:pic>
-        <p:nvPicPr>
-          <p:cNvPr id="2" name="Image 0" descr="logo-goetheanum-blue.png">    </p:cNvPr>
-          <p:cNvPicPr>
-            <a:picLocks noChangeAspect="1"/>
-          </p:cNvPicPr>
-          <p:nvPr/>
-        </p:nvPicPr>
-        <p:blipFill>
-          <a:blip r:embed="rId1"/>
-          <a:stretch>
-            <a:fillRect/>
-          </a:stretch>
-        </p:blipFill>
-        <p:spPr>
-          <a:xfrm>
-            <a:off x="548640" y="502920"/>
-            <a:ext cx="1088402" cy="182880"/>
-          </a:xfrm>
-          <a:prstGeom prst="rect">
-            <a:avLst/>
-          </a:prstGeom>
-        </p:spPr>
-      </p:pic>
-      <p:sp>
-        <p:nvSpPr>
-          <p:cNvPr id="3" name="Text 0"/>
-          <p:cNvSpPr/>
-          <p:nvPr/>
+      <p:sp>
+        <p:nvSpPr>
+          <p:cNvPr id="2" name="Text 1"/>
+          <p:cNvSpPr/>
+          <p:nvPr>
+            <p:ph idx="102" type="body" hasCustomPrompt="1"/>
+          </p:nvPr>
         </p:nvSpPr>
         <p:spPr>
           <a:xfrm>
@@ -5958,7 +7518,7 @@
           <a:ln/>
         </p:spPr>
         <p:txBody>
-          <a:bodyPr wrap="square" lIns="0" tIns="0" rIns="0" bIns="0" rtlCol="0" anchor="ctr"/>
+          <a:bodyPr wrap="square" lIns="0" tIns="0" rIns="0" bIns="0" rtlCol="0"/>
           <a:lstStyle/>
           <a:p>
             <a:pPr indent="0" marL="0">
@@ -5981,9 +7541,11 @@
       </p:sp>
       <p:sp>
         <p:nvSpPr>
-          <p:cNvPr id="4" name="Text 1"/>
-          <p:cNvSpPr/>
-          <p:nvPr/>
+          <p:cNvPr id="3" name="Text 1"/>
+          <p:cNvSpPr/>
+          <p:nvPr>
+            <p:ph idx="103" type="title" hasCustomPrompt="1"/>
+          </p:nvPr>
         </p:nvSpPr>
         <p:spPr>
           <a:xfrm>
@@ -5997,37 +7559,126 @@
           <a:ln/>
         </p:spPr>
         <p:txBody>
+          <a:bodyPr wrap="square" lIns="0" tIns="0" rIns="0" bIns="0" rtlCol="0"/>
+          <a:lstStyle/>
+          <a:p>
+            <a:pPr indent="0" marL="0">
+              <a:buNone/>
+            </a:pPr>
+            <a:r>
+              <a:rPr lang="en-US" sz="2600" dirty="0">
+                <a:solidFill>
+                  <a:srgbClr val="1A1A1A"/>
+                </a:solidFill>
+                <a:latin typeface="Goetheanum Schrift Deutlich" pitchFamily="34" charset="0"/>
+                <a:ea typeface="Goetheanum Schrift Deutlich" pitchFamily="34" charset="-122"/>
+                <a:cs typeface="Goetheanum Schrift Deutlich" pitchFamily="34" charset="-120"/>
+              </a:rPr>
+              <a:t>Fünf Grössen, fünf Schnitte</a:t>
+            </a:r>
+            <a:endParaRPr lang="en-US" sz="2600" dirty="0"/>
+          </a:p>
+        </p:txBody>
+      </p:sp>
+      <p:sp>
+        <p:nvSpPr>
+          <p:cNvPr id="4" name="Text 2"/>
+          <p:cNvSpPr/>
+          <p:nvPr/>
+        </p:nvSpPr>
+        <p:spPr>
+          <a:xfrm>
+            <a:off x="548640" y="2286000"/>
+            <a:ext cx="1325880" cy="841248"/>
+          </a:xfrm>
+          <a:prstGeom prst="rect">
+            <a:avLst/>
+          </a:prstGeom>
+          <a:noFill/>
+          <a:ln/>
+        </p:spPr>
+        <p:txBody>
           <a:bodyPr wrap="square" lIns="0" tIns="0" rIns="0" bIns="0" rtlCol="0" anchor="ctr"/>
           <a:lstStyle/>
           <a:p>
-            <a:pPr indent="0" marL="0">
-              <a:buNone/>
-            </a:pPr>
-            <a:r>
-              <a:rPr lang="en-US" sz="2600" dirty="0">
-                <a:solidFill>
-                  <a:srgbClr val="1A1A1A"/>
+            <a:pPr algn="r" indent="0" marL="0">
+              <a:buNone/>
+            </a:pPr>
+            <a:r>
+              <a:rPr lang="en-US" sz="900" dirty="0">
+                <a:solidFill>
+                  <a:srgbClr val="005EB8"/>
                 </a:solidFill>
                 <a:latin typeface="Goetheanum Schrift Klar" pitchFamily="34" charset="0"/>
                 <a:ea typeface="Goetheanum Schrift Klar" pitchFamily="34" charset="-122"/>
                 <a:cs typeface="Goetheanum Schrift Klar" pitchFamily="34" charset="-120"/>
               </a:rPr>
-              <a:t>Fünf Grössen, eine Schrift</a:t>
-            </a:r>
-            <a:endParaRPr lang="en-US" sz="2600" dirty="0"/>
-          </a:p>
-        </p:txBody>
-      </p:sp>
-      <p:sp>
-        <p:nvSpPr>
-          <p:cNvPr id="5" name="Text 2"/>
+              <a:t>Plakat 50</a:t>
+            </a:r>
+            <a:endParaRPr lang="en-US" sz="900" dirty="0"/>
+          </a:p>
+        </p:txBody>
+      </p:sp>
+      <p:sp>
+        <p:nvSpPr>
+          <p:cNvPr id="5" name="Text 3"/>
           <p:cNvSpPr/>
           <p:nvPr/>
         </p:nvSpPr>
         <p:spPr>
           <a:xfrm>
-            <a:off x="548640" y="2377440"/>
-            <a:ext cx="1325880" cy="914400"/>
+            <a:off x="2002536" y="2286000"/>
+            <a:ext cx="8138160" cy="841248"/>
+          </a:xfrm>
+          <a:prstGeom prst="rect">
+            <a:avLst/>
+          </a:prstGeom>
+          <a:noFill/>
+          <a:ln/>
+        </p:spPr>
+        <p:txBody>
+          <a:bodyPr wrap="square" lIns="0" tIns="0" rIns="0" bIns="0" rtlCol="0" anchor="ctr"/>
+          <a:lstStyle/>
+          <a:p>
+            <a:pPr indent="0" marL="0">
+              <a:buNone/>
+            </a:pPr>
+            <a:r>
+              <a:rPr lang="en-US" sz="5000" dirty="0">
+                <a:solidFill>
+                  <a:srgbClr val="1A1A1A"/>
+                </a:solidFill>
+                <a:latin typeface="Goetheanum Schrift Leise" pitchFamily="34" charset="0"/>
+                <a:ea typeface="Goetheanum Schrift Leise" pitchFamily="34" charset="-122"/>
+                <a:cs typeface="Goetheanum Schrift Leise" pitchFamily="34" charset="-120"/>
+              </a:rPr>
+              <a:t>Zuerst das </a:t>
+            </a:r>
+            <a:r>
+              <a:rPr lang="en-US" sz="5000" dirty="0">
+                <a:solidFill>
+                  <a:srgbClr val="1A1A1A"/>
+                </a:solidFill>
+                <a:latin typeface="Goetheanum Schrift Deutlich" pitchFamily="34" charset="0"/>
+                <a:ea typeface="Goetheanum Schrift Deutlich" pitchFamily="34" charset="-122"/>
+                <a:cs typeface="Goetheanum Schrift Deutlich" pitchFamily="34" charset="-120"/>
+              </a:rPr>
+              <a:t>Ganze</a:t>
+            </a:r>
+            <a:endParaRPr lang="en-US" sz="5000" dirty="0"/>
+          </a:p>
+        </p:txBody>
+      </p:sp>
+      <p:sp>
+        <p:nvSpPr>
+          <p:cNvPr id="6" name="Text 4"/>
+          <p:cNvSpPr/>
+          <p:nvPr/>
+        </p:nvSpPr>
+        <p:spPr>
+          <a:xfrm>
+            <a:off x="548640" y="3236976"/>
+            <a:ext cx="1325880" cy="512064"/>
           </a:xfrm>
           <a:prstGeom prst="rect">
             <a:avLst/>
@@ -6051,7 +7702,7 @@
                 <a:ea typeface="Goetheanum Schrift Klar" pitchFamily="34" charset="-122"/>
                 <a:cs typeface="Goetheanum Schrift Klar" pitchFamily="34" charset="-120"/>
               </a:rPr>
-              <a:t>Plakat 50</a:t>
+              <a:t>Überschrift 26</a:t>
             </a:r>
             <a:endParaRPr lang="en-US" sz="900" dirty="0"/>
           </a:p>
@@ -6059,14 +7710,14 @@
       </p:sp>
       <p:sp>
         <p:nvSpPr>
-          <p:cNvPr id="6" name="Text 3"/>
+          <p:cNvPr id="7" name="Text 5"/>
           <p:cNvSpPr/>
           <p:nvPr/>
         </p:nvSpPr>
         <p:spPr>
           <a:xfrm>
-            <a:off x="2002536" y="2377440"/>
-            <a:ext cx="8138160" cy="914400"/>
+            <a:off x="2002536" y="3236976"/>
+            <a:ext cx="8138160" cy="512064"/>
           </a:xfrm>
           <a:prstGeom prst="rect">
             <a:avLst/>
@@ -6082,30 +7733,69 @@
               <a:buNone/>
             </a:pPr>
             <a:r>
-              <a:rPr lang="en-US" sz="5000" dirty="0">
+              <a:rPr lang="en-US" sz="2600" dirty="0">
                 <a:solidFill>
                   <a:srgbClr val="1A1A1A"/>
+                </a:solidFill>
+                <a:latin typeface="Goetheanum Schrift Deutlich" pitchFamily="34" charset="0"/>
+                <a:ea typeface="Goetheanum Schrift Deutlich" pitchFamily="34" charset="-122"/>
+                <a:cs typeface="Goetheanum Schrift Deutlich" pitchFamily="34" charset="-120"/>
+              </a:rPr>
+              <a:t>Dann der tragende Gedanke</a:t>
+            </a:r>
+            <a:endParaRPr lang="en-US" sz="2600" dirty="0"/>
+          </a:p>
+        </p:txBody>
+      </p:sp>
+      <p:sp>
+        <p:nvSpPr>
+          <p:cNvPr id="8" name="Text 6"/>
+          <p:cNvSpPr/>
+          <p:nvPr/>
+        </p:nvSpPr>
+        <p:spPr>
+          <a:xfrm>
+            <a:off x="548640" y="3858768"/>
+            <a:ext cx="1325880" cy="365760"/>
+          </a:xfrm>
+          <a:prstGeom prst="rect">
+            <a:avLst/>
+          </a:prstGeom>
+          <a:noFill/>
+          <a:ln/>
+        </p:spPr>
+        <p:txBody>
+          <a:bodyPr wrap="square" lIns="0" tIns="0" rIns="0" bIns="0" rtlCol="0" anchor="ctr"/>
+          <a:lstStyle/>
+          <a:p>
+            <a:pPr algn="r" indent="0" marL="0">
+              <a:buNone/>
+            </a:pPr>
+            <a:r>
+              <a:rPr lang="en-US" sz="900" dirty="0">
+                <a:solidFill>
+                  <a:srgbClr val="005EB8"/>
                 </a:solidFill>
                 <a:latin typeface="Goetheanum Schrift Klar" pitchFamily="34" charset="0"/>
                 <a:ea typeface="Goetheanum Schrift Klar" pitchFamily="34" charset="-122"/>
                 <a:cs typeface="Goetheanum Schrift Klar" pitchFamily="34" charset="-120"/>
               </a:rPr>
-              <a:t>Zuerst das Ganze</a:t>
-            </a:r>
-            <a:endParaRPr lang="en-US" sz="5000" dirty="0"/>
-          </a:p>
-        </p:txBody>
-      </p:sp>
-      <p:sp>
-        <p:nvSpPr>
-          <p:cNvPr id="7" name="Text 4"/>
+              <a:t>Lead 18</a:t>
+            </a:r>
+            <a:endParaRPr lang="en-US" sz="900" dirty="0"/>
+          </a:p>
+        </p:txBody>
+      </p:sp>
+      <p:sp>
+        <p:nvSpPr>
+          <p:cNvPr id="9" name="Text 7"/>
           <p:cNvSpPr/>
           <p:nvPr/>
         </p:nvSpPr>
         <p:spPr>
           <a:xfrm>
-            <a:off x="548640" y="3438144"/>
-            <a:ext cx="1325880" cy="530352"/>
+            <a:off x="2002536" y="3858768"/>
+            <a:ext cx="8138160" cy="365760"/>
           </a:xfrm>
           <a:prstGeom prst="rect">
             <a:avLst/>
@@ -6117,34 +7807,34 @@
           <a:bodyPr wrap="square" lIns="0" tIns="0" rIns="0" bIns="0" rtlCol="0" anchor="ctr"/>
           <a:lstStyle/>
           <a:p>
-            <a:pPr algn="r" indent="0" marL="0">
-              <a:buNone/>
-            </a:pPr>
-            <a:r>
-              <a:rPr lang="en-US" sz="900" dirty="0">
-                <a:solidFill>
-                  <a:srgbClr val="005EB8"/>
+            <a:pPr indent="0" marL="0">
+              <a:buNone/>
+            </a:pPr>
+            <a:r>
+              <a:rPr lang="en-US" sz="1800" dirty="0">
+                <a:solidFill>
+                  <a:srgbClr val="1A1A1A"/>
                 </a:solidFill>
                 <a:latin typeface="Goetheanum Schrift Klar" pitchFamily="34" charset="0"/>
                 <a:ea typeface="Goetheanum Schrift Klar" pitchFamily="34" charset="-122"/>
                 <a:cs typeface="Goetheanum Schrift Klar" pitchFamily="34" charset="-120"/>
               </a:rPr>
-              <a:t>Überschrift 26</a:t>
-            </a:r>
-            <a:endParaRPr lang="en-US" sz="900" dirty="0"/>
-          </a:p>
-        </p:txBody>
-      </p:sp>
-      <p:sp>
-        <p:nvSpPr>
-          <p:cNvPr id="8" name="Text 5"/>
+              <a:t>Ein Vorspann sammelt das Wichtige</a:t>
+            </a:r>
+            <a:endParaRPr lang="en-US" sz="1800" dirty="0"/>
+          </a:p>
+        </p:txBody>
+      </p:sp>
+      <p:sp>
+        <p:nvSpPr>
+          <p:cNvPr id="10" name="Text 8"/>
           <p:cNvSpPr/>
           <p:nvPr/>
         </p:nvSpPr>
         <p:spPr>
           <a:xfrm>
-            <a:off x="2002536" y="3438144"/>
-            <a:ext cx="8138160" cy="530352"/>
+            <a:off x="548640" y="4334256"/>
+            <a:ext cx="1325880" cy="274320"/>
           </a:xfrm>
           <a:prstGeom prst="rect">
             <a:avLst/>
@@ -6156,34 +7846,34 @@
           <a:bodyPr wrap="square" lIns="0" tIns="0" rIns="0" bIns="0" rtlCol="0" anchor="ctr"/>
           <a:lstStyle/>
           <a:p>
-            <a:pPr indent="0" marL="0">
-              <a:buNone/>
-            </a:pPr>
-            <a:r>
-              <a:rPr lang="en-US" sz="2600" dirty="0">
-                <a:solidFill>
-                  <a:srgbClr val="1A1A1A"/>
+            <a:pPr algn="r" indent="0" marL="0">
+              <a:buNone/>
+            </a:pPr>
+            <a:r>
+              <a:rPr lang="en-US" sz="900" dirty="0">
+                <a:solidFill>
+                  <a:srgbClr val="005EB8"/>
                 </a:solidFill>
                 <a:latin typeface="Goetheanum Schrift Klar" pitchFamily="34" charset="0"/>
                 <a:ea typeface="Goetheanum Schrift Klar" pitchFamily="34" charset="-122"/>
                 <a:cs typeface="Goetheanum Schrift Klar" pitchFamily="34" charset="-120"/>
               </a:rPr>
-              <a:t>Dann der tragende Gedanke</a:t>
-            </a:r>
-            <a:endParaRPr lang="en-US" sz="2600" dirty="0"/>
-          </a:p>
-        </p:txBody>
-      </p:sp>
-      <p:sp>
-        <p:nvSpPr>
-          <p:cNvPr id="9" name="Text 6"/>
+              <a:t>Grundtext 13</a:t>
+            </a:r>
+            <a:endParaRPr lang="en-US" sz="900" dirty="0"/>
+          </a:p>
+        </p:txBody>
+      </p:sp>
+      <p:sp>
+        <p:nvSpPr>
+          <p:cNvPr id="11" name="Text 9"/>
           <p:cNvSpPr/>
           <p:nvPr/>
         </p:nvSpPr>
         <p:spPr>
           <a:xfrm>
-            <a:off x="548640" y="4114800"/>
-            <a:ext cx="1325880" cy="384048"/>
+            <a:off x="2002536" y="4334256"/>
+            <a:ext cx="8138160" cy="274320"/>
           </a:xfrm>
           <a:prstGeom prst="rect">
             <a:avLst/>
@@ -6195,34 +7885,34 @@
           <a:bodyPr wrap="square" lIns="0" tIns="0" rIns="0" bIns="0" rtlCol="0" anchor="ctr"/>
           <a:lstStyle/>
           <a:p>
-            <a:pPr algn="r" indent="0" marL="0">
-              <a:buNone/>
-            </a:pPr>
-            <a:r>
-              <a:rPr lang="en-US" sz="900" dirty="0">
-                <a:solidFill>
-                  <a:srgbClr val="005EB8"/>
+            <a:pPr indent="0" marL="0">
+              <a:buNone/>
+            </a:pPr>
+            <a:r>
+              <a:rPr lang="en-US" sz="1300" dirty="0">
+                <a:solidFill>
+                  <a:srgbClr val="1A1A1A"/>
                 </a:solidFill>
                 <a:latin typeface="Goetheanum Schrift Klar" pitchFamily="34" charset="0"/>
                 <a:ea typeface="Goetheanum Schrift Klar" pitchFamily="34" charset="-122"/>
                 <a:cs typeface="Goetheanum Schrift Klar" pitchFamily="34" charset="-120"/>
               </a:rPr>
-              <a:t>Lead 18</a:t>
-            </a:r>
-            <a:endParaRPr lang="en-US" sz="900" dirty="0"/>
-          </a:p>
-        </p:txBody>
-      </p:sp>
-      <p:sp>
-        <p:nvSpPr>
-          <p:cNvPr id="10" name="Text 7"/>
+              <a:t>Der Grundtext erzählt ruhig und genau.</a:t>
+            </a:r>
+            <a:endParaRPr lang="en-US" sz="1300" dirty="0"/>
+          </a:p>
+        </p:txBody>
+      </p:sp>
+      <p:sp>
+        <p:nvSpPr>
+          <p:cNvPr id="12" name="Text 10"/>
           <p:cNvSpPr/>
           <p:nvPr/>
         </p:nvSpPr>
         <p:spPr>
           <a:xfrm>
-            <a:off x="2002536" y="4114800"/>
-            <a:ext cx="8138160" cy="384048"/>
+            <a:off x="548640" y="4718304"/>
+            <a:ext cx="1325880" cy="219456"/>
           </a:xfrm>
           <a:prstGeom prst="rect">
             <a:avLst/>
@@ -6234,34 +7924,34 @@
           <a:bodyPr wrap="square" lIns="0" tIns="0" rIns="0" bIns="0" rtlCol="0" anchor="ctr"/>
           <a:lstStyle/>
           <a:p>
-            <a:pPr indent="0" marL="0">
-              <a:buNone/>
-            </a:pPr>
-            <a:r>
-              <a:rPr lang="en-US" sz="1800" dirty="0">
-                <a:solidFill>
-                  <a:srgbClr val="1A1A1A"/>
+            <a:pPr algn="r" indent="0" marL="0">
+              <a:buNone/>
+            </a:pPr>
+            <a:r>
+              <a:rPr lang="en-US" sz="900" dirty="0">
+                <a:solidFill>
+                  <a:srgbClr val="005EB8"/>
                 </a:solidFill>
                 <a:latin typeface="Goetheanum Schrift Klar" pitchFamily="34" charset="0"/>
                 <a:ea typeface="Goetheanum Schrift Klar" pitchFamily="34" charset="-122"/>
                 <a:cs typeface="Goetheanum Schrift Klar" pitchFamily="34" charset="-120"/>
               </a:rPr>
-              <a:t>Ein Vorspann sammelt das Wichtige</a:t>
-            </a:r>
-            <a:endParaRPr lang="en-US" sz="1800" dirty="0"/>
-          </a:p>
-        </p:txBody>
-      </p:sp>
-      <p:sp>
-        <p:nvSpPr>
-          <p:cNvPr id="11" name="Text 8"/>
+              <a:t>Marginalie 9</a:t>
+            </a:r>
+            <a:endParaRPr lang="en-US" sz="900" dirty="0"/>
+          </a:p>
+        </p:txBody>
+      </p:sp>
+      <p:sp>
+        <p:nvSpPr>
+          <p:cNvPr id="13" name="Text 11"/>
           <p:cNvSpPr/>
           <p:nvPr/>
         </p:nvSpPr>
         <p:spPr>
           <a:xfrm>
-            <a:off x="548640" y="4645152"/>
-            <a:ext cx="1325880" cy="292608"/>
+            <a:off x="2002536" y="4718304"/>
+            <a:ext cx="8138160" cy="219456"/>
           </a:xfrm>
           <a:prstGeom prst="rect">
             <a:avLst/>
@@ -6273,19 +7963,19 @@
           <a:bodyPr wrap="square" lIns="0" tIns="0" rIns="0" bIns="0" rtlCol="0" anchor="ctr"/>
           <a:lstStyle/>
           <a:p>
-            <a:pPr algn="r" indent="0" marL="0">
+            <a:pPr indent="0" marL="0">
               <a:buNone/>
             </a:pPr>
             <a:r>
               <a:rPr lang="en-US" sz="900" dirty="0">
                 <a:solidFill>
-                  <a:srgbClr val="005EB8"/>
+                  <a:srgbClr val="1A1A1A"/>
                 </a:solidFill>
                 <a:latin typeface="Goetheanum Schrift Klar" pitchFamily="34" charset="0"/>
                 <a:ea typeface="Goetheanum Schrift Klar" pitchFamily="34" charset="-122"/>
                 <a:cs typeface="Goetheanum Schrift Klar" pitchFamily="34" charset="-120"/>
               </a:rPr>
-              <a:t>Grundtext 13</a:t>
+              <a:t>Die Marginalie begleitet am Rand.</a:t>
             </a:r>
             <a:endParaRPr lang="en-US" sz="900" dirty="0"/>
           </a:p>
@@ -6293,14 +7983,14 @@
       </p:sp>
       <p:sp>
         <p:nvSpPr>
-          <p:cNvPr id="12" name="Text 9"/>
+          <p:cNvPr id="14" name="Text 12"/>
           <p:cNvSpPr/>
           <p:nvPr/>
         </p:nvSpPr>
         <p:spPr>
           <a:xfrm>
-            <a:off x="2002536" y="4645152"/>
-            <a:ext cx="8138160" cy="292608"/>
+            <a:off x="548640" y="5138928"/>
+            <a:ext cx="1325880" cy="237744"/>
           </a:xfrm>
           <a:prstGeom prst="rect">
             <a:avLst/>
@@ -6312,19 +8002,58 @@
           <a:bodyPr wrap="square" lIns="0" tIns="0" rIns="0" bIns="0" rtlCol="0" anchor="ctr"/>
           <a:lstStyle/>
           <a:p>
-            <a:pPr indent="0" marL="0">
-              <a:buNone/>
-            </a:pPr>
-            <a:r>
-              <a:rPr lang="en-US" sz="1300" dirty="0">
-                <a:solidFill>
-                  <a:srgbClr val="1A1A1A"/>
+            <a:pPr algn="r" indent="0" marL="0">
+              <a:buNone/>
+            </a:pPr>
+            <a:r>
+              <a:rPr lang="en-US" sz="900" dirty="0">
+                <a:solidFill>
+                  <a:srgbClr val="005EB8"/>
                 </a:solidFill>
                 <a:latin typeface="Goetheanum Schrift Klar" pitchFamily="34" charset="0"/>
                 <a:ea typeface="Goetheanum Schrift Klar" pitchFamily="34" charset="-122"/>
                 <a:cs typeface="Goetheanum Schrift Klar" pitchFamily="34" charset="-120"/>
               </a:rPr>
-              <a:t>Der Grundtext erzählt ruhig und genau.</a:t>
+              <a:t>Dicke</a:t>
+            </a:r>
+            <a:endParaRPr lang="en-US" sz="900" dirty="0"/>
+          </a:p>
+        </p:txBody>
+      </p:sp>
+      <p:sp>
+        <p:nvSpPr>
+          <p:cNvPr id="15" name="Text 13"/>
+          <p:cNvSpPr/>
+          <p:nvPr/>
+        </p:nvSpPr>
+        <p:spPr>
+          <a:xfrm>
+            <a:off x="2002536" y="5138928"/>
+            <a:ext cx="4572000" cy="237744"/>
+          </a:xfrm>
+          <a:prstGeom prst="rect">
+            <a:avLst/>
+          </a:prstGeom>
+          <a:noFill/>
+          <a:ln/>
+        </p:spPr>
+        <p:txBody>
+          <a:bodyPr wrap="square" lIns="0" tIns="0" rIns="0" bIns="0" rtlCol="0" anchor="ctr"/>
+          <a:lstStyle/>
+          <a:p>
+            <a:pPr indent="0" marL="0">
+              <a:buNone/>
+            </a:pPr>
+            <a:r>
+              <a:rPr lang="en-US" sz="1300" dirty="0">
+                <a:solidFill>
+                  <a:srgbClr val="1A1A1A"/>
+                </a:solidFill>
+                <a:latin typeface="Goetheanum Schrift Leise" pitchFamily="34" charset="0"/>
+                <a:ea typeface="Goetheanum Schrift Leise" pitchFamily="34" charset="-122"/>
+                <a:cs typeface="Goetheanum Schrift Leise" pitchFamily="34" charset="-120"/>
+              </a:rPr>
+              <a:t>Leise dämpft</a:t>
             </a:r>
             <a:endParaRPr lang="en-US" sz="1300" dirty="0"/>
           </a:p>
@@ -6332,14 +8061,14 @@
       </p:sp>
       <p:sp>
         <p:nvSpPr>
-          <p:cNvPr id="13" name="Text 10"/>
+          <p:cNvPr id="16" name="Text 14"/>
           <p:cNvSpPr/>
           <p:nvPr/>
         </p:nvSpPr>
         <p:spPr>
           <a:xfrm>
-            <a:off x="548640" y="5084064"/>
-            <a:ext cx="1325880" cy="237744"/>
+            <a:off x="2002536" y="5376672"/>
+            <a:ext cx="4572000" cy="237744"/>
           </a:xfrm>
           <a:prstGeom prst="rect">
             <a:avLst/>
@@ -6351,34 +8080,73 @@
           <a:bodyPr wrap="square" lIns="0" tIns="0" rIns="0" bIns="0" rtlCol="0" anchor="ctr"/>
           <a:lstStyle/>
           <a:p>
-            <a:pPr algn="r" indent="0" marL="0">
-              <a:buNone/>
-            </a:pPr>
-            <a:r>
-              <a:rPr lang="en-US" sz="900" dirty="0">
-                <a:solidFill>
-                  <a:srgbClr val="005EB8"/>
+            <a:pPr indent="0" marL="0">
+              <a:buNone/>
+            </a:pPr>
+            <a:r>
+              <a:rPr lang="en-US" sz="1300" dirty="0">
+                <a:solidFill>
+                  <a:srgbClr val="1A1A1A"/>
+                </a:solidFill>
+                <a:latin typeface="Goetheanum Schrift Ruhig" pitchFamily="34" charset="0"/>
+                <a:ea typeface="Goetheanum Schrift Ruhig" pitchFamily="34" charset="-122"/>
+                <a:cs typeface="Goetheanum Schrift Ruhig" pitchFamily="34" charset="-120"/>
+              </a:rPr>
+              <a:t>Ruhig begleitet</a:t>
+            </a:r>
+            <a:endParaRPr lang="en-US" sz="1300" dirty="0"/>
+          </a:p>
+        </p:txBody>
+      </p:sp>
+      <p:sp>
+        <p:nvSpPr>
+          <p:cNvPr id="17" name="Text 15"/>
+          <p:cNvSpPr/>
+          <p:nvPr/>
+        </p:nvSpPr>
+        <p:spPr>
+          <a:xfrm>
+            <a:off x="2002536" y="5614416"/>
+            <a:ext cx="4572000" cy="237744"/>
+          </a:xfrm>
+          <a:prstGeom prst="rect">
+            <a:avLst/>
+          </a:prstGeom>
+          <a:noFill/>
+          <a:ln/>
+        </p:spPr>
+        <p:txBody>
+          <a:bodyPr wrap="square" lIns="0" tIns="0" rIns="0" bIns="0" rtlCol="0" anchor="ctr"/>
+          <a:lstStyle/>
+          <a:p>
+            <a:pPr indent="0" marL="0">
+              <a:buNone/>
+            </a:pPr>
+            <a:r>
+              <a:rPr lang="en-US" sz="1300" dirty="0">
+                <a:solidFill>
+                  <a:srgbClr val="1A1A1A"/>
                 </a:solidFill>
                 <a:latin typeface="Goetheanum Schrift Klar" pitchFamily="34" charset="0"/>
                 <a:ea typeface="Goetheanum Schrift Klar" pitchFamily="34" charset="-122"/>
                 <a:cs typeface="Goetheanum Schrift Klar" pitchFamily="34" charset="-120"/>
               </a:rPr>
-              <a:t>Marginalie 9</a:t>
-            </a:r>
-            <a:endParaRPr lang="en-US" sz="900" dirty="0"/>
-          </a:p>
-        </p:txBody>
-      </p:sp>
-      <p:sp>
-        <p:nvSpPr>
-          <p:cNvPr id="14" name="Text 11"/>
+              <a:t>Klar erzählt</a:t>
+            </a:r>
+            <a:endParaRPr lang="en-US" sz="1300" dirty="0"/>
+          </a:p>
+        </p:txBody>
+      </p:sp>
+      <p:sp>
+        <p:nvSpPr>
+          <p:cNvPr id="18" name="Text 16"/>
           <p:cNvSpPr/>
           <p:nvPr/>
         </p:nvSpPr>
         <p:spPr>
           <a:xfrm>
-            <a:off x="2002536" y="5084064"/>
-            <a:ext cx="8138160" cy="237744"/>
+            <a:off x="2002536" y="5852160"/>
+            <a:ext cx="4572000" cy="237744"/>
           </a:xfrm>
           <a:prstGeom prst="rect">
             <a:avLst/>
@@ -6394,7 +8162,57 @@
               <a:buNone/>
             </a:pPr>
             <a:r>
-              <a:rPr lang="en-US" sz="900" dirty="0">
+              <a:rPr lang="en-US" sz="1300" dirty="0">
+                <a:solidFill>
+                  <a:srgbClr val="1A1A1A"/>
+                </a:solidFill>
+                <a:latin typeface="Goetheanum Schrift Deutlich" pitchFamily="34" charset="0"/>
+                <a:ea typeface="Goetheanum Schrift Deutlich" pitchFamily="34" charset="-122"/>
+                <a:cs typeface="Goetheanum Schrift Deutlich" pitchFamily="34" charset="-120"/>
+              </a:rPr>
+              <a:t>Deutlich führt</a:t>
+            </a:r>
+            <a:endParaRPr lang="en-US" sz="1300" dirty="0"/>
+          </a:p>
+        </p:txBody>
+      </p:sp>
+      <p:sp>
+        <p:nvSpPr>
+          <p:cNvPr id="19" name="Text 17"/>
+          <p:cNvSpPr/>
+          <p:nvPr/>
+        </p:nvSpPr>
+        <p:spPr>
+          <a:xfrm>
+            <a:off x="2002536" y="6089904"/>
+            <a:ext cx="4572000" cy="237744"/>
+          </a:xfrm>
+          <a:prstGeom prst="rect">
+            <a:avLst/>
+          </a:prstGeom>
+          <a:noFill/>
+          <a:ln/>
+        </p:spPr>
+        <p:txBody>
+          <a:bodyPr wrap="square" lIns="0" tIns="0" rIns="0" bIns="0" rtlCol="0" anchor="ctr"/>
+          <a:lstStyle/>
+          <a:p>
+            <a:pPr indent="0" marL="0">
+              <a:buNone/>
+            </a:pPr>
+            <a:r>
+              <a:rPr lang="en-US" sz="1300" dirty="0">
+                <a:solidFill>
+                  <a:srgbClr val="1A1A1A"/>
+                </a:solidFill>
+                <a:latin typeface="Goetheanum Schrift Laut" pitchFamily="34" charset="0"/>
+                <a:ea typeface="Goetheanum Schrift Laut" pitchFamily="34" charset="-122"/>
+                <a:cs typeface="Goetheanum Schrift Laut" pitchFamily="34" charset="-120"/>
+              </a:rPr>
+              <a:t>Laut</a:t>
+            </a:r>
+            <a:r>
+              <a:rPr lang="en-US" sz="1300" dirty="0">
                 <a:solidFill>
                   <a:srgbClr val="1A1A1A"/>
                 </a:solidFill>
@@ -6402,22 +8220,22 @@
                 <a:ea typeface="Goetheanum Schrift Klar" pitchFamily="34" charset="-122"/>
                 <a:cs typeface="Goetheanum Schrift Klar" pitchFamily="34" charset="-120"/>
               </a:rPr>
-              <a:t>Die Marginalie begleitet am Rand.</a:t>
-            </a:r>
-            <a:endParaRPr lang="en-US" sz="900" dirty="0"/>
-          </a:p>
-        </p:txBody>
-      </p:sp>
-      <p:sp>
-        <p:nvSpPr>
-          <p:cNvPr id="15" name="Text 12"/>
+              <a:t> betont</a:t>
+            </a:r>
+            <a:endParaRPr lang="en-US" sz="1300" dirty="0"/>
+          </a:p>
+        </p:txBody>
+      </p:sp>
+      <p:sp>
+        <p:nvSpPr>
+          <p:cNvPr id="20" name="Text 18"/>
           <p:cNvSpPr/>
           <p:nvPr/>
         </p:nvSpPr>
         <p:spPr>
           <a:xfrm>
-            <a:off x="548640" y="5577840"/>
-            <a:ext cx="1325880" cy="292608"/>
+            <a:off x="2002536" y="6364224"/>
+            <a:ext cx="6400800" cy="201168"/>
           </a:xfrm>
           <a:prstGeom prst="rect">
             <a:avLst/>
@@ -6429,19 +8247,19 @@
           <a:bodyPr wrap="square" lIns="0" tIns="0" rIns="0" bIns="0" rtlCol="0" anchor="ctr"/>
           <a:lstStyle/>
           <a:p>
-            <a:pPr algn="r" indent="0" marL="0">
+            <a:pPr indent="0" marL="0">
               <a:buNone/>
             </a:pPr>
             <a:r>
               <a:rPr lang="en-US" sz="900" dirty="0">
                 <a:solidFill>
-                  <a:srgbClr val="005EB8"/>
+                  <a:srgbClr val="6B7480"/>
                 </a:solidFill>
                 <a:latin typeface="Goetheanum Schrift Klar" pitchFamily="34" charset="0"/>
                 <a:ea typeface="Goetheanum Schrift Klar" pitchFamily="34" charset="-122"/>
                 <a:cs typeface="Goetheanum Schrift Klar" pitchFamily="34" charset="-120"/>
               </a:rPr>
-              <a:t>Dicke</a:t>
+              <a:t>In Klar-Text schaltet Strg+B auf Laut und Strg+I auf Leise.</a:t>
             </a:r>
             <a:endParaRPr lang="en-US" sz="900" dirty="0"/>
           </a:p>
@@ -6449,14 +8267,14 @@
       </p:sp>
       <p:sp>
         <p:nvSpPr>
-          <p:cNvPr id="16" name="Text 13"/>
+          <p:cNvPr id="21" name="Text 19"/>
           <p:cNvSpPr/>
           <p:nvPr/>
         </p:nvSpPr>
         <p:spPr>
           <a:xfrm>
-            <a:off x="2002536" y="5577840"/>
-            <a:ext cx="4572000" cy="292608"/>
+            <a:off x="548640" y="6656832"/>
+            <a:ext cx="1325880" cy="219456"/>
           </a:xfrm>
           <a:prstGeom prst="rect">
             <a:avLst/>
@@ -6468,73 +8286,34 @@
           <a:bodyPr wrap="square" lIns="0" tIns="0" rIns="0" bIns="0" rtlCol="0" anchor="ctr"/>
           <a:lstStyle/>
           <a:p>
-            <a:pPr indent="0" marL="0">
-              <a:buNone/>
-            </a:pPr>
-            <a:r>
-              <a:rPr lang="en-US" sz="1300" dirty="0">
-                <a:solidFill>
-                  <a:srgbClr val="1A1A1A"/>
-                </a:solidFill>
-                <a:latin typeface="Goetheanum Schrift Leise" pitchFamily="34" charset="0"/>
-                <a:ea typeface="Goetheanum Schrift Leise" pitchFamily="34" charset="-122"/>
-                <a:cs typeface="Goetheanum Schrift Leise" pitchFamily="34" charset="-120"/>
-              </a:rPr>
-              <a:t>Leise dämpft</a:t>
-            </a:r>
-            <a:endParaRPr lang="en-US" sz="1300" dirty="0"/>
-          </a:p>
-        </p:txBody>
-      </p:sp>
-      <p:sp>
-        <p:nvSpPr>
-          <p:cNvPr id="17" name="Text 14"/>
-          <p:cNvSpPr/>
-          <p:nvPr/>
-        </p:nvSpPr>
-        <p:spPr>
-          <a:xfrm>
-            <a:off x="2002536" y="5870448"/>
-            <a:ext cx="4572000" cy="292608"/>
-          </a:xfrm>
-          <a:prstGeom prst="rect">
-            <a:avLst/>
-          </a:prstGeom>
-          <a:noFill/>
-          <a:ln/>
-        </p:spPr>
-        <p:txBody>
-          <a:bodyPr wrap="square" lIns="0" tIns="0" rIns="0" bIns="0" rtlCol="0" anchor="ctr"/>
-          <a:lstStyle/>
-          <a:p>
-            <a:pPr indent="0" marL="0">
-              <a:buNone/>
-            </a:pPr>
-            <a:r>
-              <a:rPr lang="en-US" sz="1300" dirty="0">
-                <a:solidFill>
-                  <a:srgbClr val="1A1A1A"/>
+            <a:pPr algn="r" indent="0" marL="0">
+              <a:buNone/>
+            </a:pPr>
+            <a:r>
+              <a:rPr lang="en-US" sz="900" dirty="0">
+                <a:solidFill>
+                  <a:srgbClr val="005EB8"/>
                 </a:solidFill>
                 <a:latin typeface="Goetheanum Schrift Klar" pitchFamily="34" charset="0"/>
                 <a:ea typeface="Goetheanum Schrift Klar" pitchFamily="34" charset="-122"/>
                 <a:cs typeface="Goetheanum Schrift Klar" pitchFamily="34" charset="-120"/>
               </a:rPr>
-              <a:t>Klar erzählt</a:t>
-            </a:r>
-            <a:endParaRPr lang="en-US" sz="1300" dirty="0"/>
-          </a:p>
-        </p:txBody>
-      </p:sp>
-      <p:sp>
-        <p:nvSpPr>
-          <p:cNvPr id="18" name="Text 15"/>
+              <a:t>Regel</a:t>
+            </a:r>
+            <a:endParaRPr lang="en-US" sz="900" dirty="0"/>
+          </a:p>
+        </p:txBody>
+      </p:sp>
+      <p:sp>
+        <p:nvSpPr>
+          <p:cNvPr id="22" name="Text 20"/>
           <p:cNvSpPr/>
           <p:nvPr/>
         </p:nvSpPr>
         <p:spPr>
           <a:xfrm>
-            <a:off x="2002536" y="6163056"/>
-            <a:ext cx="4572000" cy="292608"/>
+            <a:off x="2002536" y="6656832"/>
+            <a:ext cx="7315200" cy="219456"/>
           </a:xfrm>
           <a:prstGeom prst="rect">
             <a:avLst/>
@@ -6550,54 +8329,15 @@
               <a:buNone/>
             </a:pPr>
             <a:r>
-              <a:rPr lang="en-US" sz="1300" dirty="0">
+              <a:rPr lang="en-US" sz="900" dirty="0">
                 <a:solidFill>
                   <a:srgbClr val="1A1A1A"/>
-                </a:solidFill>
-                <a:latin typeface="Goetheanum Schrift Laut" pitchFamily="34" charset="0"/>
-                <a:ea typeface="Goetheanum Schrift Laut" pitchFamily="34" charset="-122"/>
-                <a:cs typeface="Goetheanum Schrift Laut" pitchFamily="34" charset="-120"/>
-              </a:rPr>
-              <a:t>Laut betont</a:t>
-            </a:r>
-            <a:endParaRPr lang="en-US" sz="1300" dirty="0"/>
-          </a:p>
-        </p:txBody>
-      </p:sp>
-      <p:sp>
-        <p:nvSpPr>
-          <p:cNvPr id="19" name="Text 16"/>
-          <p:cNvSpPr/>
-          <p:nvPr/>
-        </p:nvSpPr>
-        <p:spPr>
-          <a:xfrm>
-            <a:off x="548640" y="6711696"/>
-            <a:ext cx="1325880" cy="256032"/>
-          </a:xfrm>
-          <a:prstGeom prst="rect">
-            <a:avLst/>
-          </a:prstGeom>
-          <a:noFill/>
-          <a:ln/>
-        </p:spPr>
-        <p:txBody>
-          <a:bodyPr wrap="square" lIns="0" tIns="0" rIns="0" bIns="0" rtlCol="0" anchor="ctr"/>
-          <a:lstStyle/>
-          <a:p>
-            <a:pPr algn="r" indent="0" marL="0">
-              <a:buNone/>
-            </a:pPr>
-            <a:r>
-              <a:rPr lang="en-US" sz="900" dirty="0">
-                <a:solidFill>
-                  <a:srgbClr val="005EB8"/>
                 </a:solidFill>
                 <a:latin typeface="Goetheanum Schrift Klar" pitchFamily="34" charset="0"/>
                 <a:ea typeface="Goetheanum Schrift Klar" pitchFamily="34" charset="-122"/>
                 <a:cs typeface="Goetheanum Schrift Klar" pitchFamily="34" charset="-120"/>
               </a:rPr>
-              <a:t>Regel</a:t>
+              <a:t>Anführungen stehen in einfachen Guillemets: ‹so›. Überschriften stehen in Deutlich.</a:t>
             </a:r>
             <a:endParaRPr lang="en-US" sz="900" dirty="0"/>
           </a:p>
@@ -6605,14 +8345,14 @@
       </p:sp>
       <p:sp>
         <p:nvSpPr>
-          <p:cNvPr id="20" name="Text 17"/>
+          <p:cNvPr id="23" name="Text 21"/>
           <p:cNvSpPr/>
           <p:nvPr/>
         </p:nvSpPr>
         <p:spPr>
           <a:xfrm>
-            <a:off x="2002536" y="6711696"/>
-            <a:ext cx="6400800" cy="256032"/>
+            <a:off x="548640" y="6995160"/>
+            <a:ext cx="3657600" cy="274320"/>
           </a:xfrm>
           <a:prstGeom prst="rect">
             <a:avLst/>
@@ -6630,65 +8370,26 @@
             <a:r>
               <a:rPr lang="en-US" sz="900" dirty="0">
                 <a:solidFill>
-                  <a:srgbClr val="1A1A1A"/>
+                  <a:srgbClr val="6B7480"/>
                 </a:solidFill>
                 <a:latin typeface="Goetheanum Schrift Klar" pitchFamily="34" charset="0"/>
                 <a:ea typeface="Goetheanum Schrift Klar" pitchFamily="34" charset="-122"/>
                 <a:cs typeface="Goetheanum Schrift Klar" pitchFamily="34" charset="-120"/>
               </a:rPr>
-              <a:t>Anführungen stehen in einfachen Guillemets: ‹so›.</a:t>
-            </a:r>
-            <a:endParaRPr lang="en-US" sz="900" dirty="0"/>
-          </a:p>
-        </p:txBody>
-      </p:sp>
-      <p:sp>
-        <p:nvSpPr>
-          <p:cNvPr id="21" name="Text 18"/>
-          <p:cNvSpPr/>
-          <p:nvPr/>
-        </p:nvSpPr>
-        <p:spPr>
-          <a:xfrm>
-            <a:off x="548640" y="6995160"/>
-            <a:ext cx="3657600" cy="274320"/>
-          </a:xfrm>
-          <a:prstGeom prst="rect">
-            <a:avLst/>
-          </a:prstGeom>
-          <a:noFill/>
-          <a:ln/>
-        </p:spPr>
-        <p:txBody>
-          <a:bodyPr wrap="square" lIns="0" tIns="0" rIns="0" bIns="0" rtlCol="0" anchor="ctr"/>
-          <a:lstStyle/>
-          <a:p>
+              <a:t>Schriften installieren: </a:t>
+            </a:r>
             <a:pPr indent="0" marL="0">
               <a:buNone/>
             </a:pPr>
             <a:r>
               <a:rPr lang="en-US" sz="900" dirty="0">
                 <a:solidFill>
-                  <a:srgbClr val="6B7480"/>
+                  <a:srgbClr val="005EB8"/>
                 </a:solidFill>
                 <a:latin typeface="Goetheanum Schrift Klar" pitchFamily="34" charset="0"/>
                 <a:ea typeface="Goetheanum Schrift Klar" pitchFamily="34" charset="-122"/>
                 <a:cs typeface="Goetheanum Schrift Klar" pitchFamily="34" charset="-120"/>
-              </a:rPr>
-              <a:t>Schriften installieren: </a:t>
-            </a:r>
-            <a:pPr indent="0" marL="0">
-              <a:buNone/>
-            </a:pPr>
-            <a:r>
-              <a:rPr lang="en-US" sz="900" u="sng" dirty="0">
-                <a:solidFill>
-                  <a:srgbClr val="005EB8"/>
-                </a:solidFill>
-                <a:latin typeface="Goetheanum Schrift Klar" pitchFamily="34" charset="0"/>
-                <a:ea typeface="Goetheanum Schrift Klar" pitchFamily="34" charset="-122"/>
-                <a:cs typeface="Goetheanum Schrift Klar" pitchFamily="34" charset="-120"/>
-                <a:hlinkClick r:id="rId2" invalidUrl="" action="" tgtFrame="" tooltip="" history="1" highlightClick="0" endSnd="0">
+                <a:hlinkClick r:id="rId1" invalidUrl="" action="" tgtFrame="" tooltip="" history="1" highlightClick="0" endSnd="0">
                   <a:extLst>
                     <a:ext uri="{A12FA001-AC4F-418D-AE19-62706E023703}">
                       <ahyp:hlinkClr xmlns:ahyp="http://schemas.microsoft.com/office/drawing/2018/hyperlinkcolor" val="tx"/>
@@ -6704,40 +8405,49 @@
       </p:sp>
       <p:sp>
         <p:nvSpPr>
-          <p:cNvPr id="22" name="Text 19"/>
-          <p:cNvSpPr/>
-          <p:nvPr/>
-        </p:nvSpPr>
-        <p:spPr>
-          <a:xfrm>
-            <a:off x="4654296" y="6995160"/>
-            <a:ext cx="5486400" cy="274320"/>
-          </a:xfrm>
-          <a:prstGeom prst="rect">
-            <a:avLst/>
-          </a:prstGeom>
-          <a:noFill/>
-          <a:ln/>
-        </p:spPr>
-        <p:txBody>
-          <a:bodyPr wrap="square" lIns="0" tIns="0" rIns="0" bIns="0" rtlCol="0" anchor="ctr"/>
-          <a:lstStyle/>
-          <a:p>
-            <a:pPr algn="r" indent="0" marL="0">
-              <a:buNone/>
-            </a:pPr>
-            <a:r>
-              <a:rPr lang="en-US" sz="900" dirty="0">
+          <p:cNvPr id="25" name="Slide Number Placeholder 0"/>
+          <p:cNvSpPr>
+            <a:spLocks noGrp="1"/>
+          </p:cNvSpPr>
+          <p:nvPr>
+            <p:ph type="sldNum" sz="quarter" idx="4294967295"/>
+          </p:nvPr>
+        </p:nvSpPr>
+        <p:spPr>
+          <a:xfrm>
+            <a:off x="9747504" y="6995160"/>
+            <a:ext cx="393192" cy="274320"/>
+          </a:xfrm>
+          <a:prstGeom prst="rect">
+            <a:avLst/>
+          </a:prstGeom>
+          <a:extLst>
+            <a:ext uri="{C572A759-6A51-4108-AA02-DFA0A04FC94B}">
+              <ma14:wrappingTextBoxFlag xmlns:ma14="http://schemas.microsoft.com/office/mac/drawingml/2011/main" val="0"/>
+            </a:ext>
+          </a:extLst>
+        </p:spPr>
+        <p:txBody>
+          <a:bodyPr anchor="ctr"/>
+          <a:lstStyle>
+            <a:lvl1pPr>
+              <a:defRPr sz="900">
                 <a:solidFill>
                   <a:srgbClr val="6B7480"/>
                 </a:solidFill>
-                <a:latin typeface="Goetheanum Schrift Klar" pitchFamily="34" charset="0"/>
-                <a:ea typeface="Goetheanum Schrift Klar" pitchFamily="34" charset="-122"/>
-                <a:cs typeface="Goetheanum Schrift Klar" pitchFamily="34" charset="-120"/>
-              </a:rPr>
-              <a:t>Titel der Präsentation · 00.00.2026 · 2</a:t>
-            </a:r>
-            <a:endParaRPr lang="en-US" sz="900" dirty="0"/>
+                <a:latin typeface="Goetheanum Schrift Klar"/>
+                <a:ea typeface="Goetheanum Schrift Klar"/>
+                <a:cs typeface="Goetheanum Schrift Klar"/>
+              </a:defRPr>
+            </a:lvl1pPr>
+          </a:lstStyle>
+          <a:p>
+            <a:pPr algn="l"/>
+            <a:fld id="{F7021451-1387-4CA6-816F-3879F97B5CBC}" type="slidenum">
+              <a:rPr b="0" lang="en-US"/>
+              <a:t>2</a:t>
+            </a:fld>
+            <a:endParaRPr lang="en-US"/>
           </a:p>
         </p:txBody>
       </p:sp>
@@ -6752,13 +8462,6 @@
 <file path=ppt/slides/slide3.xml><?xml version="1.0" encoding="utf-8"?>
 <p:sld xmlns:a="http://schemas.openxmlformats.org/drawingml/2006/main" xmlns:r="http://schemas.openxmlformats.org/officeDocument/2006/relationships" xmlns:p="http://schemas.openxmlformats.org/presentationml/2006/main">
   <p:cSld name="Slide 3">
-    <p:bg>
-      <p:bgPr>
-        <a:solidFill>
-          <a:srgbClr val="FFFFFF"/>
-        </a:solidFill>
-      </p:bgPr>
-    </p:bg>
     <p:spTree>
       <p:nvGrpSpPr>
         <p:cNvPr id="1" name=""/>
@@ -6773,35 +8476,13 @@
           <a:chExt cx="0" cy="0"/>
         </a:xfrm>
       </p:grpSpPr>
-      <p:pic>
-        <p:nvPicPr>
-          <p:cNvPr id="2" name="Image 0" descr="logo-goetheanum-blue.png">    </p:cNvPr>
-          <p:cNvPicPr>
-            <a:picLocks noChangeAspect="1"/>
-          </p:cNvPicPr>
-          <p:nvPr/>
-        </p:nvPicPr>
-        <p:blipFill>
-          <a:blip r:embed="rId1"/>
-          <a:stretch>
-            <a:fillRect/>
-          </a:stretch>
-        </p:blipFill>
-        <p:spPr>
-          <a:xfrm>
-            <a:off x="548640" y="502920"/>
-            <a:ext cx="1088402" cy="182880"/>
-          </a:xfrm>
-          <a:prstGeom prst="rect">
-            <a:avLst/>
-          </a:prstGeom>
-        </p:spPr>
-      </p:pic>
-      <p:sp>
-        <p:nvSpPr>
-          <p:cNvPr id="3" name="Text 0"/>
-          <p:cNvSpPr/>
-          <p:nvPr/>
+      <p:sp>
+        <p:nvSpPr>
+          <p:cNvPr id="2" name="Text 1"/>
+          <p:cNvSpPr/>
+          <p:nvPr>
+            <p:ph idx="102" type="body" hasCustomPrompt="1"/>
+          </p:nvPr>
         </p:nvSpPr>
         <p:spPr>
           <a:xfrm>
@@ -6815,7 +8496,7 @@
           <a:ln/>
         </p:spPr>
         <p:txBody>
-          <a:bodyPr wrap="square" lIns="0" tIns="0" rIns="0" bIns="0" rtlCol="0" anchor="ctr"/>
+          <a:bodyPr wrap="square" lIns="0" tIns="0" rIns="0" bIns="0" rtlCol="0"/>
           <a:lstStyle/>
           <a:p>
             <a:pPr indent="0" marL="0">
@@ -6838,9 +8519,11 @@
       </p:sp>
       <p:sp>
         <p:nvSpPr>
-          <p:cNvPr id="4" name="Text 1"/>
-          <p:cNvSpPr/>
-          <p:nvPr/>
+          <p:cNvPr id="3" name="Text 1"/>
+          <p:cNvSpPr/>
+          <p:nvPr>
+            <p:ph idx="103" type="title" hasCustomPrompt="1"/>
+          </p:nvPr>
         </p:nvSpPr>
         <p:spPr>
           <a:xfrm>
@@ -6854,6 +8537,45 @@
           <a:ln/>
         </p:spPr>
         <p:txBody>
+          <a:bodyPr wrap="square" lIns="0" tIns="0" rIns="0" bIns="0" rtlCol="0"/>
+          <a:lstStyle/>
+          <a:p>
+            <a:pPr indent="0" marL="0">
+              <a:buNone/>
+            </a:pPr>
+            <a:r>
+              <a:rPr lang="en-US" sz="2600" dirty="0">
+                <a:solidFill>
+                  <a:srgbClr val="1A1A1A"/>
+                </a:solidFill>
+                <a:latin typeface="Goetheanum Schrift Deutlich" pitchFamily="34" charset="0"/>
+                <a:ea typeface="Goetheanum Schrift Deutlich" pitchFamily="34" charset="-122"/>
+                <a:cs typeface="Goetheanum Schrift Deutlich" pitchFamily="34" charset="-120"/>
+              </a:rPr>
+              <a:t>Piktogramme aus der Hausschrift</a:t>
+            </a:r>
+            <a:endParaRPr lang="en-US" sz="2600" dirty="0"/>
+          </a:p>
+        </p:txBody>
+      </p:sp>
+      <p:sp>
+        <p:nvSpPr>
+          <p:cNvPr id="4" name="Text 2"/>
+          <p:cNvSpPr/>
+          <p:nvPr/>
+        </p:nvSpPr>
+        <p:spPr>
+          <a:xfrm>
+            <a:off x="548640" y="2331720"/>
+            <a:ext cx="8229600" cy="457200"/>
+          </a:xfrm>
+          <a:prstGeom prst="rect">
+            <a:avLst/>
+          </a:prstGeom>
+          <a:noFill/>
+          <a:ln/>
+        </p:spPr>
+        <p:txBody>
           <a:bodyPr wrap="square" lIns="0" tIns="0" rIns="0" bIns="0" rtlCol="0" anchor="ctr"/>
           <a:lstStyle/>
           <a:p>
@@ -6861,96 +8583,174 @@
               <a:buNone/>
             </a:pPr>
             <a:r>
-              <a:rPr lang="en-US" sz="2600" dirty="0">
+              <a:rPr lang="en-US" sz="1800" dirty="0">
+                <a:solidFill>
+                  <a:srgbClr val="6B7480"/>
+                </a:solidFill>
+                <a:latin typeface="Goetheanum Schrift Leise" pitchFamily="34" charset="0"/>
+                <a:ea typeface="Goetheanum Schrift Leise" pitchFamily="34" charset="-122"/>
+                <a:cs typeface="Goetheanum Schrift Leise" pitchFamily="34" charset="-120"/>
+              </a:rPr>
+              <a:t>Schrift </a:t>
+            </a:r>
+            <a:pPr indent="0" marL="0">
+              <a:buNone/>
+            </a:pPr>
+            <a:r>
+              <a:rPr lang="en-US" sz="1800" dirty="0">
+                <a:solidFill>
+                  <a:srgbClr val="6B7480"/>
+                </a:solidFill>
+                <a:latin typeface="Goetheanum Schrift Leise" pitchFamily="34" charset="0"/>
+                <a:ea typeface="Goetheanum Schrift Leise" pitchFamily="34" charset="-122"/>
+                <a:cs typeface="Goetheanum Schrift Leise" pitchFamily="34" charset="-120"/>
+              </a:rPr>
+              <a:t>‹Goetheanum Icons›</a:t>
+            </a:r>
+            <a:pPr indent="0" marL="0">
+              <a:buNone/>
+            </a:pPr>
+            <a:r>
+              <a:rPr lang="en-US" sz="1800" dirty="0">
+                <a:solidFill>
+                  <a:srgbClr val="6B7480"/>
+                </a:solidFill>
+                <a:latin typeface="Goetheanum Schrift Leise" pitchFamily="34" charset="0"/>
+                <a:ea typeface="Goetheanum Schrift Leise" pitchFamily="34" charset="-122"/>
+                <a:cs typeface="Goetheanum Schrift Leise" pitchFamily="34" charset="-120"/>
+              </a:rPr>
+              <a:t> wählen, Buchstaben tippen.</a:t>
+            </a:r>
+            <a:endParaRPr lang="en-US" sz="1800" dirty="0"/>
+          </a:p>
+        </p:txBody>
+      </p:sp>
+      <p:sp>
+        <p:nvSpPr>
+          <p:cNvPr id="5" name="Text 3"/>
+          <p:cNvSpPr/>
+          <p:nvPr/>
+        </p:nvSpPr>
+        <p:spPr>
+          <a:xfrm>
+            <a:off x="548640" y="3108960"/>
+            <a:ext cx="1051560" cy="640080"/>
+          </a:xfrm>
+          <a:prstGeom prst="rect">
+            <a:avLst/>
+          </a:prstGeom>
+          <a:noFill/>
+          <a:ln/>
+        </p:spPr>
+        <p:txBody>
+          <a:bodyPr wrap="square" lIns="0" tIns="0" rIns="0" bIns="0" rtlCol="0" anchor="ctr"/>
+          <a:lstStyle/>
+          <a:p>
+            <a:pPr algn="ctr" indent="0" marL="0">
+              <a:buNone/>
+            </a:pPr>
+            <a:r>
+              <a:rPr lang="en-US" sz="3200" dirty="0">
                 <a:solidFill>
                   <a:srgbClr val="1A1A1A"/>
+                </a:solidFill>
+                <a:latin typeface="Goetheanum Icons" pitchFamily="34" charset="0"/>
+                <a:ea typeface="Goetheanum Icons" pitchFamily="34" charset="-122"/>
+                <a:cs typeface="Goetheanum Icons" pitchFamily="34" charset="-120"/>
+              </a:rPr>
+              <a:t>g</a:t>
+            </a:r>
+            <a:endParaRPr lang="en-US" sz="3200" dirty="0"/>
+          </a:p>
+        </p:txBody>
+      </p:sp>
+      <p:sp>
+        <p:nvSpPr>
+          <p:cNvPr id="6" name="Text 4"/>
+          <p:cNvSpPr/>
+          <p:nvPr/>
+        </p:nvSpPr>
+        <p:spPr>
+          <a:xfrm>
+            <a:off x="548640" y="3794760"/>
+            <a:ext cx="1051560" cy="228600"/>
+          </a:xfrm>
+          <a:prstGeom prst="rect">
+            <a:avLst/>
+          </a:prstGeom>
+          <a:noFill/>
+          <a:ln/>
+        </p:spPr>
+        <p:txBody>
+          <a:bodyPr wrap="square" lIns="0" tIns="0" rIns="0" bIns="0" rtlCol="0" anchor="ctr"/>
+          <a:lstStyle/>
+          <a:p>
+            <a:pPr algn="ctr" indent="0" marL="0">
+              <a:buNone/>
+            </a:pPr>
+            <a:r>
+              <a:rPr lang="en-US" sz="900" dirty="0">
+                <a:solidFill>
+                  <a:srgbClr val="005EB8"/>
+                </a:solidFill>
+                <a:latin typeface="Goetheanum Schrift Deutlich" pitchFamily="34" charset="0"/>
+                <a:ea typeface="Goetheanum Schrift Deutlich" pitchFamily="34" charset="-122"/>
+                <a:cs typeface="Goetheanum Schrift Deutlich" pitchFamily="34" charset="-120"/>
+              </a:rPr>
+              <a:t>g</a:t>
+            </a:r>
+            <a:endParaRPr lang="en-US" sz="900" dirty="0"/>
+          </a:p>
+        </p:txBody>
+      </p:sp>
+      <p:sp>
+        <p:nvSpPr>
+          <p:cNvPr id="7" name="Text 5"/>
+          <p:cNvSpPr/>
+          <p:nvPr/>
+        </p:nvSpPr>
+        <p:spPr>
+          <a:xfrm>
+            <a:off x="475488" y="4023360"/>
+            <a:ext cx="1197864" cy="228600"/>
+          </a:xfrm>
+          <a:prstGeom prst="rect">
+            <a:avLst/>
+          </a:prstGeom>
+          <a:noFill/>
+          <a:ln/>
+        </p:spPr>
+        <p:txBody>
+          <a:bodyPr wrap="square" lIns="0" tIns="0" rIns="0" bIns="0" rtlCol="0" anchor="ctr"/>
+          <a:lstStyle/>
+          <a:p>
+            <a:pPr algn="ctr" indent="0" marL="0">
+              <a:buNone/>
+            </a:pPr>
+            <a:r>
+              <a:rPr lang="en-US" sz="900" dirty="0">
+                <a:solidFill>
+                  <a:srgbClr val="6B7480"/>
                 </a:solidFill>
                 <a:latin typeface="Goetheanum Schrift Klar" pitchFamily="34" charset="0"/>
                 <a:ea typeface="Goetheanum Schrift Klar" pitchFamily="34" charset="-122"/>
                 <a:cs typeface="Goetheanum Schrift Klar" pitchFamily="34" charset="-120"/>
               </a:rPr>
-              <a:t>Piktogramme aus der Hausschrift</a:t>
-            </a:r>
-            <a:endParaRPr lang="en-US" sz="2600" dirty="0"/>
-          </a:p>
-        </p:txBody>
-      </p:sp>
-      <p:sp>
-        <p:nvSpPr>
-          <p:cNvPr id="5" name="Text 2"/>
+              <a:t>WLAN</a:t>
+            </a:r>
+            <a:endParaRPr lang="en-US" sz="900" dirty="0"/>
+          </a:p>
+        </p:txBody>
+      </p:sp>
+      <p:sp>
+        <p:nvSpPr>
+          <p:cNvPr id="8" name="Text 6"/>
           <p:cNvSpPr/>
           <p:nvPr/>
         </p:nvSpPr>
         <p:spPr>
           <a:xfrm>
-            <a:off x="548640" y="2331720"/>
-            <a:ext cx="8229600" cy="457200"/>
-          </a:xfrm>
-          <a:prstGeom prst="rect">
-            <a:avLst/>
-          </a:prstGeom>
-          <a:noFill/>
-          <a:ln/>
-        </p:spPr>
-        <p:txBody>
-          <a:bodyPr wrap="square" lIns="0" tIns="0" rIns="0" bIns="0" rtlCol="0" anchor="ctr"/>
-          <a:lstStyle/>
-          <a:p>
-            <a:pPr indent="0" marL="0">
-              <a:buNone/>
-            </a:pPr>
-            <a:r>
-              <a:rPr lang="en-US" sz="1800" dirty="0">
-                <a:solidFill>
-                  <a:srgbClr val="6B7480"/>
-                </a:solidFill>
-                <a:latin typeface="Goetheanum Schrift Leise" pitchFamily="34" charset="0"/>
-                <a:ea typeface="Goetheanum Schrift Leise" pitchFamily="34" charset="-122"/>
-                <a:cs typeface="Goetheanum Schrift Leise" pitchFamily="34" charset="-120"/>
-              </a:rPr>
-              <a:t>Schrift </a:t>
-            </a:r>
-            <a:pPr indent="0" marL="0">
-              <a:buNone/>
-            </a:pPr>
-            <a:r>
-              <a:rPr lang="en-US" sz="1800" dirty="0">
-                <a:solidFill>
-                  <a:srgbClr val="6B7480"/>
-                </a:solidFill>
-                <a:latin typeface="Goetheanum Schrift Laut" pitchFamily="34" charset="0"/>
-                <a:ea typeface="Goetheanum Schrift Laut" pitchFamily="34" charset="-122"/>
-                <a:cs typeface="Goetheanum Schrift Laut" pitchFamily="34" charset="-120"/>
-              </a:rPr>
-              <a:t>‹Goetheanum Icons›</a:t>
-            </a:r>
-            <a:pPr indent="0" marL="0">
-              <a:buNone/>
-            </a:pPr>
-            <a:r>
-              <a:rPr lang="en-US" sz="1800" dirty="0">
-                <a:solidFill>
-                  <a:srgbClr val="6B7480"/>
-                </a:solidFill>
-                <a:latin typeface="Goetheanum Schrift Leise" pitchFamily="34" charset="0"/>
-                <a:ea typeface="Goetheanum Schrift Leise" pitchFamily="34" charset="-122"/>
-                <a:cs typeface="Goetheanum Schrift Leise" pitchFamily="34" charset="-120"/>
-              </a:rPr>
-              <a:t> wählen, Buchstaben tippen.</a:t>
-            </a:r>
-            <a:endParaRPr lang="en-US" sz="1800" dirty="0"/>
-          </a:p>
-        </p:txBody>
-      </p:sp>
-      <p:sp>
-        <p:nvSpPr>
-          <p:cNvPr id="6" name="Text 3"/>
-          <p:cNvSpPr/>
-          <p:nvPr/>
-        </p:nvSpPr>
-        <p:spPr>
-          <a:xfrm>
-            <a:off x="548640" y="3154680"/>
+            <a:off x="1755648" y="3108960"/>
             <a:ext cx="1051560" cy="640080"/>
           </a:xfrm>
           <a:prstGeom prst="rect">
@@ -6975,7 +8775,7 @@
                 <a:ea typeface="Goetheanum Icons" pitchFamily="34" charset="-122"/>
                 <a:cs typeface="Goetheanum Icons" pitchFamily="34" charset="-120"/>
               </a:rPr>
-              <a:t>g</a:t>
+              <a:t>a</a:t>
             </a:r>
             <a:endParaRPr lang="en-US" sz="3200" dirty="0"/>
           </a:p>
@@ -6983,13 +8783,13 @@
       </p:sp>
       <p:sp>
         <p:nvSpPr>
-          <p:cNvPr id="7" name="Text 4"/>
+          <p:cNvPr id="9" name="Text 7"/>
           <p:cNvSpPr/>
           <p:nvPr/>
         </p:nvSpPr>
         <p:spPr>
           <a:xfrm>
-            <a:off x="548640" y="3840480"/>
+            <a:off x="1755648" y="3794760"/>
             <a:ext cx="1051560" cy="228600"/>
           </a:xfrm>
           <a:prstGeom prst="rect">
@@ -7010,11 +8810,11 @@
                 <a:solidFill>
                   <a:srgbClr val="005EB8"/>
                 </a:solidFill>
-                <a:latin typeface="Goetheanum Schrift Laut" pitchFamily="34" charset="0"/>
-                <a:ea typeface="Goetheanum Schrift Laut" pitchFamily="34" charset="-122"/>
-                <a:cs typeface="Goetheanum Schrift Laut" pitchFamily="34" charset="-120"/>
-              </a:rPr>
-              <a:t>g</a:t>
+                <a:latin typeface="Goetheanum Schrift Deutlich" pitchFamily="34" charset="0"/>
+                <a:ea typeface="Goetheanum Schrift Deutlich" pitchFamily="34" charset="-122"/>
+                <a:cs typeface="Goetheanum Schrift Deutlich" pitchFamily="34" charset="-120"/>
+              </a:rPr>
+              <a:t>a</a:t>
             </a:r>
             <a:endParaRPr lang="en-US" sz="900" dirty="0"/>
           </a:p>
@@ -7022,13 +8822,13 @@
       </p:sp>
       <p:sp>
         <p:nvSpPr>
-          <p:cNvPr id="8" name="Text 5"/>
+          <p:cNvPr id="10" name="Text 8"/>
           <p:cNvSpPr/>
           <p:nvPr/>
         </p:nvSpPr>
         <p:spPr>
           <a:xfrm>
-            <a:off x="475488" y="4069080"/>
+            <a:off x="1682496" y="4023360"/>
             <a:ext cx="1197864" cy="228600"/>
           </a:xfrm>
           <a:prstGeom prst="rect">
@@ -7053,7 +8853,7 @@
                 <a:ea typeface="Goetheanum Schrift Klar" pitchFamily="34" charset="-122"/>
                 <a:cs typeface="Goetheanum Schrift Klar" pitchFamily="34" charset="-120"/>
               </a:rPr>
-              <a:t>WLAN</a:t>
+              <a:t>Lift</a:t>
             </a:r>
             <a:endParaRPr lang="en-US" sz="900" dirty="0"/>
           </a:p>
@@ -7061,13 +8861,13 @@
       </p:sp>
       <p:sp>
         <p:nvSpPr>
-          <p:cNvPr id="9" name="Text 6"/>
+          <p:cNvPr id="11" name="Text 9"/>
           <p:cNvSpPr/>
           <p:nvPr/>
         </p:nvSpPr>
         <p:spPr>
           <a:xfrm>
-            <a:off x="1755648" y="3154680"/>
+            <a:off x="2962656" y="3108960"/>
             <a:ext cx="1051560" cy="640080"/>
           </a:xfrm>
           <a:prstGeom prst="rect">
@@ -7092,7 +8892,7 @@
                 <a:ea typeface="Goetheanum Icons" pitchFamily="34" charset="-122"/>
                 <a:cs typeface="Goetheanum Icons" pitchFamily="34" charset="-120"/>
               </a:rPr>
-              <a:t>a</a:t>
+              <a:t>s</a:t>
             </a:r>
             <a:endParaRPr lang="en-US" sz="3200" dirty="0"/>
           </a:p>
@@ -7100,13 +8900,13 @@
       </p:sp>
       <p:sp>
         <p:nvSpPr>
-          <p:cNvPr id="10" name="Text 7"/>
+          <p:cNvPr id="12" name="Text 10"/>
           <p:cNvSpPr/>
           <p:nvPr/>
         </p:nvSpPr>
         <p:spPr>
           <a:xfrm>
-            <a:off x="1755648" y="3840480"/>
+            <a:off x="2962656" y="3794760"/>
             <a:ext cx="1051560" cy="228600"/>
           </a:xfrm>
           <a:prstGeom prst="rect">
@@ -7127,11 +8927,11 @@
                 <a:solidFill>
                   <a:srgbClr val="005EB8"/>
                 </a:solidFill>
-                <a:latin typeface="Goetheanum Schrift Laut" pitchFamily="34" charset="0"/>
-                <a:ea typeface="Goetheanum Schrift Laut" pitchFamily="34" charset="-122"/>
-                <a:cs typeface="Goetheanum Schrift Laut" pitchFamily="34" charset="-120"/>
-              </a:rPr>
-              <a:t>a</a:t>
+                <a:latin typeface="Goetheanum Schrift Deutlich" pitchFamily="34" charset="0"/>
+                <a:ea typeface="Goetheanum Schrift Deutlich" pitchFamily="34" charset="-122"/>
+                <a:cs typeface="Goetheanum Schrift Deutlich" pitchFamily="34" charset="-120"/>
+              </a:rPr>
+              <a:t>s</a:t>
             </a:r>
             <a:endParaRPr lang="en-US" sz="900" dirty="0"/>
           </a:p>
@@ -7139,13 +8939,13 @@
       </p:sp>
       <p:sp>
         <p:nvSpPr>
-          <p:cNvPr id="11" name="Text 8"/>
+          <p:cNvPr id="13" name="Text 11"/>
           <p:cNvSpPr/>
           <p:nvPr/>
         </p:nvSpPr>
         <p:spPr>
           <a:xfrm>
-            <a:off x="1682496" y="4069080"/>
+            <a:off x="2889504" y="4023360"/>
             <a:ext cx="1197864" cy="228600"/>
           </a:xfrm>
           <a:prstGeom prst="rect">
@@ -7170,7 +8970,7 @@
                 <a:ea typeface="Goetheanum Schrift Klar" pitchFamily="34" charset="-122"/>
                 <a:cs typeface="Goetheanum Schrift Klar" pitchFamily="34" charset="-120"/>
               </a:rPr>
-              <a:t>Lift</a:t>
+              <a:t>Treppe</a:t>
             </a:r>
             <a:endParaRPr lang="en-US" sz="900" dirty="0"/>
           </a:p>
@@ -7178,13 +8978,13 @@
       </p:sp>
       <p:sp>
         <p:nvSpPr>
-          <p:cNvPr id="12" name="Text 9"/>
+          <p:cNvPr id="14" name="Text 12"/>
           <p:cNvSpPr/>
           <p:nvPr/>
         </p:nvSpPr>
         <p:spPr>
           <a:xfrm>
-            <a:off x="2962656" y="3154680"/>
+            <a:off x="4169664" y="3108960"/>
             <a:ext cx="1051560" cy="640080"/>
           </a:xfrm>
           <a:prstGeom prst="rect">
@@ -7209,7 +9009,7 @@
                 <a:ea typeface="Goetheanum Icons" pitchFamily="34" charset="-122"/>
                 <a:cs typeface="Goetheanum Icons" pitchFamily="34" charset="-120"/>
               </a:rPr>
-              <a:t>s</a:t>
+              <a:t>x</a:t>
             </a:r>
             <a:endParaRPr lang="en-US" sz="3200" dirty="0"/>
           </a:p>
@@ -7217,13 +9017,13 @@
       </p:sp>
       <p:sp>
         <p:nvSpPr>
-          <p:cNvPr id="13" name="Text 10"/>
+          <p:cNvPr id="15" name="Text 13"/>
           <p:cNvSpPr/>
           <p:nvPr/>
         </p:nvSpPr>
         <p:spPr>
           <a:xfrm>
-            <a:off x="2962656" y="3840480"/>
+            <a:off x="4169664" y="3794760"/>
             <a:ext cx="1051560" cy="228600"/>
           </a:xfrm>
           <a:prstGeom prst="rect">
@@ -7244,11 +9044,11 @@
                 <a:solidFill>
                   <a:srgbClr val="005EB8"/>
                 </a:solidFill>
-                <a:latin typeface="Goetheanum Schrift Laut" pitchFamily="34" charset="0"/>
-                <a:ea typeface="Goetheanum Schrift Laut" pitchFamily="34" charset="-122"/>
-                <a:cs typeface="Goetheanum Schrift Laut" pitchFamily="34" charset="-120"/>
-              </a:rPr>
-              <a:t>s</a:t>
+                <a:latin typeface="Goetheanum Schrift Deutlich" pitchFamily="34" charset="0"/>
+                <a:ea typeface="Goetheanum Schrift Deutlich" pitchFamily="34" charset="-122"/>
+                <a:cs typeface="Goetheanum Schrift Deutlich" pitchFamily="34" charset="-120"/>
+              </a:rPr>
+              <a:t>x</a:t>
             </a:r>
             <a:endParaRPr lang="en-US" sz="900" dirty="0"/>
           </a:p>
@@ -7256,13 +9056,13 @@
       </p:sp>
       <p:sp>
         <p:nvSpPr>
-          <p:cNvPr id="14" name="Text 11"/>
+          <p:cNvPr id="16" name="Text 14"/>
           <p:cNvSpPr/>
           <p:nvPr/>
         </p:nvSpPr>
         <p:spPr>
           <a:xfrm>
-            <a:off x="2889504" y="4069080"/>
+            <a:off x="4096512" y="4023360"/>
             <a:ext cx="1197864" cy="228600"/>
           </a:xfrm>
           <a:prstGeom prst="rect">
@@ -7287,7 +9087,7 @@
                 <a:ea typeface="Goetheanum Schrift Klar" pitchFamily="34" charset="-122"/>
                 <a:cs typeface="Goetheanum Schrift Klar" pitchFamily="34" charset="-120"/>
               </a:rPr>
-              <a:t>Treppe</a:t>
+              <a:t>WC Rollstuhl</a:t>
             </a:r>
             <a:endParaRPr lang="en-US" sz="900" dirty="0"/>
           </a:p>
@@ -7295,13 +9095,13 @@
       </p:sp>
       <p:sp>
         <p:nvSpPr>
-          <p:cNvPr id="15" name="Text 12"/>
+          <p:cNvPr id="17" name="Text 15"/>
           <p:cNvSpPr/>
           <p:nvPr/>
         </p:nvSpPr>
         <p:spPr>
           <a:xfrm>
-            <a:off x="4169664" y="3154680"/>
+            <a:off x="5376672" y="3108960"/>
             <a:ext cx="1051560" cy="640080"/>
           </a:xfrm>
           <a:prstGeom prst="rect">
@@ -7326,7 +9126,7 @@
                 <a:ea typeface="Goetheanum Icons" pitchFamily="34" charset="-122"/>
                 <a:cs typeface="Goetheanum Icons" pitchFamily="34" charset="-120"/>
               </a:rPr>
-              <a:t>x</a:t>
+              <a:t>e</a:t>
             </a:r>
             <a:endParaRPr lang="en-US" sz="3200" dirty="0"/>
           </a:p>
@@ -7334,13 +9134,13 @@
       </p:sp>
       <p:sp>
         <p:nvSpPr>
-          <p:cNvPr id="16" name="Text 13"/>
+          <p:cNvPr id="18" name="Text 16"/>
           <p:cNvSpPr/>
           <p:nvPr/>
         </p:nvSpPr>
         <p:spPr>
           <a:xfrm>
-            <a:off x="4169664" y="3840480"/>
+            <a:off x="5376672" y="3794760"/>
             <a:ext cx="1051560" cy="228600"/>
           </a:xfrm>
           <a:prstGeom prst="rect">
@@ -7361,11 +9161,11 @@
                 <a:solidFill>
                   <a:srgbClr val="005EB8"/>
                 </a:solidFill>
-                <a:latin typeface="Goetheanum Schrift Laut" pitchFamily="34" charset="0"/>
-                <a:ea typeface="Goetheanum Schrift Laut" pitchFamily="34" charset="-122"/>
-                <a:cs typeface="Goetheanum Schrift Laut" pitchFamily="34" charset="-120"/>
-              </a:rPr>
-              <a:t>x</a:t>
+                <a:latin typeface="Goetheanum Schrift Deutlich" pitchFamily="34" charset="0"/>
+                <a:ea typeface="Goetheanum Schrift Deutlich" pitchFamily="34" charset="-122"/>
+                <a:cs typeface="Goetheanum Schrift Deutlich" pitchFamily="34" charset="-120"/>
+              </a:rPr>
+              <a:t>e</a:t>
             </a:r>
             <a:endParaRPr lang="en-US" sz="900" dirty="0"/>
           </a:p>
@@ -7373,13 +9173,13 @@
       </p:sp>
       <p:sp>
         <p:nvSpPr>
-          <p:cNvPr id="17" name="Text 14"/>
+          <p:cNvPr id="19" name="Text 17"/>
           <p:cNvSpPr/>
           <p:nvPr/>
         </p:nvSpPr>
         <p:spPr>
           <a:xfrm>
-            <a:off x="4096512" y="4069080"/>
+            <a:off x="5303520" y="4023360"/>
             <a:ext cx="1197864" cy="228600"/>
           </a:xfrm>
           <a:prstGeom prst="rect">
@@ -7404,7 +9204,7 @@
                 <a:ea typeface="Goetheanum Schrift Klar" pitchFamily="34" charset="-122"/>
                 <a:cs typeface="Goetheanum Schrift Klar" pitchFamily="34" charset="-120"/>
               </a:rPr>
-              <a:t>Barrierefrei</a:t>
+              <a:t>Eintritt</a:t>
             </a:r>
             <a:endParaRPr lang="en-US" sz="900" dirty="0"/>
           </a:p>
@@ -7412,13 +9212,13 @@
       </p:sp>
       <p:sp>
         <p:nvSpPr>
-          <p:cNvPr id="18" name="Text 15"/>
+          <p:cNvPr id="20" name="Text 18"/>
           <p:cNvSpPr/>
           <p:nvPr/>
         </p:nvSpPr>
         <p:spPr>
           <a:xfrm>
-            <a:off x="5376672" y="3154680"/>
+            <a:off x="6583680" y="3108960"/>
             <a:ext cx="1051560" cy="640080"/>
           </a:xfrm>
           <a:prstGeom prst="rect">
@@ -7443,7 +9243,7 @@
                 <a:ea typeface="Goetheanum Icons" pitchFamily="34" charset="-122"/>
                 <a:cs typeface="Goetheanum Icons" pitchFamily="34" charset="-120"/>
               </a:rPr>
-              <a:t>e</a:t>
+              <a:t>v</a:t>
             </a:r>
             <a:endParaRPr lang="en-US" sz="3200" dirty="0"/>
           </a:p>
@@ -7451,13 +9251,13 @@
       </p:sp>
       <p:sp>
         <p:nvSpPr>
-          <p:cNvPr id="19" name="Text 16"/>
+          <p:cNvPr id="21" name="Text 19"/>
           <p:cNvSpPr/>
           <p:nvPr/>
         </p:nvSpPr>
         <p:spPr>
           <a:xfrm>
-            <a:off x="5376672" y="3840480"/>
+            <a:off x="6583680" y="3794760"/>
             <a:ext cx="1051560" cy="228600"/>
           </a:xfrm>
           <a:prstGeom prst="rect">
@@ -7478,11 +9278,11 @@
                 <a:solidFill>
                   <a:srgbClr val="005EB8"/>
                 </a:solidFill>
-                <a:latin typeface="Goetheanum Schrift Laut" pitchFamily="34" charset="0"/>
-                <a:ea typeface="Goetheanum Schrift Laut" pitchFamily="34" charset="-122"/>
-                <a:cs typeface="Goetheanum Schrift Laut" pitchFamily="34" charset="-120"/>
-              </a:rPr>
-              <a:t>e</a:t>
+                <a:latin typeface="Goetheanum Schrift Deutlich" pitchFamily="34" charset="0"/>
+                <a:ea typeface="Goetheanum Schrift Deutlich" pitchFamily="34" charset="-122"/>
+                <a:cs typeface="Goetheanum Schrift Deutlich" pitchFamily="34" charset="-120"/>
+              </a:rPr>
+              <a:t>v</a:t>
             </a:r>
             <a:endParaRPr lang="en-US" sz="900" dirty="0"/>
           </a:p>
@@ -7490,13 +9290,13 @@
       </p:sp>
       <p:sp>
         <p:nvSpPr>
-          <p:cNvPr id="20" name="Text 17"/>
+          <p:cNvPr id="22" name="Text 20"/>
           <p:cNvSpPr/>
           <p:nvPr/>
         </p:nvSpPr>
         <p:spPr>
           <a:xfrm>
-            <a:off x="5303520" y="4069080"/>
+            <a:off x="6510528" y="4023360"/>
             <a:ext cx="1197864" cy="228600"/>
           </a:xfrm>
           <a:prstGeom prst="rect">
@@ -7521,7 +9321,7 @@
                 <a:ea typeface="Goetheanum Schrift Klar" pitchFamily="34" charset="-122"/>
                 <a:cs typeface="Goetheanum Schrift Klar" pitchFamily="34" charset="-120"/>
               </a:rPr>
-              <a:t>Eintritt</a:t>
+              <a:t>WC Gruppe</a:t>
             </a:r>
             <a:endParaRPr lang="en-US" sz="900" dirty="0"/>
           </a:p>
@@ -7529,13 +9329,13 @@
       </p:sp>
       <p:sp>
         <p:nvSpPr>
-          <p:cNvPr id="21" name="Text 18"/>
+          <p:cNvPr id="23" name="Text 21"/>
           <p:cNvSpPr/>
           <p:nvPr/>
         </p:nvSpPr>
         <p:spPr>
           <a:xfrm>
-            <a:off x="6583680" y="3154680"/>
+            <a:off x="7790688" y="3108960"/>
             <a:ext cx="1051560" cy="640080"/>
           </a:xfrm>
           <a:prstGeom prst="rect">
@@ -7560,7 +9360,7 @@
                 <a:ea typeface="Goetheanum Icons" pitchFamily="34" charset="-122"/>
                 <a:cs typeface="Goetheanum Icons" pitchFamily="34" charset="-120"/>
               </a:rPr>
-              <a:t>v</a:t>
+              <a:t>k</a:t>
             </a:r>
             <a:endParaRPr lang="en-US" sz="3200" dirty="0"/>
           </a:p>
@@ -7568,13 +9368,13 @@
       </p:sp>
       <p:sp>
         <p:nvSpPr>
-          <p:cNvPr id="22" name="Text 19"/>
+          <p:cNvPr id="24" name="Text 22"/>
           <p:cNvSpPr/>
           <p:nvPr/>
         </p:nvSpPr>
         <p:spPr>
           <a:xfrm>
-            <a:off x="6583680" y="3840480"/>
+            <a:off x="7790688" y="3794760"/>
             <a:ext cx="1051560" cy="228600"/>
           </a:xfrm>
           <a:prstGeom prst="rect">
@@ -7595,11 +9395,11 @@
                 <a:solidFill>
                   <a:srgbClr val="005EB8"/>
                 </a:solidFill>
-                <a:latin typeface="Goetheanum Schrift Laut" pitchFamily="34" charset="0"/>
-                <a:ea typeface="Goetheanum Schrift Laut" pitchFamily="34" charset="-122"/>
-                <a:cs typeface="Goetheanum Schrift Laut" pitchFamily="34" charset="-120"/>
-              </a:rPr>
-              <a:t>v</a:t>
+                <a:latin typeface="Goetheanum Schrift Deutlich" pitchFamily="34" charset="0"/>
+                <a:ea typeface="Goetheanum Schrift Deutlich" pitchFamily="34" charset="-122"/>
+                <a:cs typeface="Goetheanum Schrift Deutlich" pitchFamily="34" charset="-120"/>
+              </a:rPr>
+              <a:t>k</a:t>
             </a:r>
             <a:endParaRPr lang="en-US" sz="900" dirty="0"/>
           </a:p>
@@ -7607,13 +9407,13 @@
       </p:sp>
       <p:sp>
         <p:nvSpPr>
-          <p:cNvPr id="23" name="Text 20"/>
+          <p:cNvPr id="25" name="Text 23"/>
           <p:cNvSpPr/>
           <p:nvPr/>
         </p:nvSpPr>
         <p:spPr>
           <a:xfrm>
-            <a:off x="6510528" y="4069080"/>
+            <a:off x="7717536" y="4023360"/>
             <a:ext cx="1197864" cy="228600"/>
           </a:xfrm>
           <a:prstGeom prst="rect">
@@ -7638,7 +9438,7 @@
                 <a:ea typeface="Goetheanum Schrift Klar" pitchFamily="34" charset="-122"/>
                 <a:cs typeface="Goetheanum Schrift Klar" pitchFamily="34" charset="-120"/>
               </a:rPr>
-              <a:t>WC</a:t>
+              <a:t>Restmüll</a:t>
             </a:r>
             <a:endParaRPr lang="en-US" sz="900" dirty="0"/>
           </a:p>
@@ -7646,13 +9446,13 @@
       </p:sp>
       <p:sp>
         <p:nvSpPr>
-          <p:cNvPr id="24" name="Text 21"/>
+          <p:cNvPr id="26" name="Text 24"/>
           <p:cNvSpPr/>
           <p:nvPr/>
         </p:nvSpPr>
         <p:spPr>
           <a:xfrm>
-            <a:off x="7790688" y="3154680"/>
+            <a:off x="8997696" y="3108960"/>
             <a:ext cx="1051560" cy="640080"/>
           </a:xfrm>
           <a:prstGeom prst="rect">
@@ -7677,7 +9477,7 @@
                 <a:ea typeface="Goetheanum Icons" pitchFamily="34" charset="-122"/>
                 <a:cs typeface="Goetheanum Icons" pitchFamily="34" charset="-120"/>
               </a:rPr>
-              <a:t>k</a:t>
+              <a:t>h</a:t>
             </a:r>
             <a:endParaRPr lang="en-US" sz="3200" dirty="0"/>
           </a:p>
@@ -7685,13 +9485,13 @@
       </p:sp>
       <p:sp>
         <p:nvSpPr>
-          <p:cNvPr id="25" name="Text 22"/>
+          <p:cNvPr id="27" name="Text 25"/>
           <p:cNvSpPr/>
           <p:nvPr/>
         </p:nvSpPr>
         <p:spPr>
           <a:xfrm>
-            <a:off x="7790688" y="3840480"/>
+            <a:off x="8997696" y="3794760"/>
             <a:ext cx="1051560" cy="228600"/>
           </a:xfrm>
           <a:prstGeom prst="rect">
@@ -7712,11 +9512,11 @@
                 <a:solidFill>
                   <a:srgbClr val="005EB8"/>
                 </a:solidFill>
-                <a:latin typeface="Goetheanum Schrift Laut" pitchFamily="34" charset="0"/>
-                <a:ea typeface="Goetheanum Schrift Laut" pitchFamily="34" charset="-122"/>
-                <a:cs typeface="Goetheanum Schrift Laut" pitchFamily="34" charset="-120"/>
-              </a:rPr>
-              <a:t>k</a:t>
+                <a:latin typeface="Goetheanum Schrift Deutlich" pitchFamily="34" charset="0"/>
+                <a:ea typeface="Goetheanum Schrift Deutlich" pitchFamily="34" charset="-122"/>
+                <a:cs typeface="Goetheanum Schrift Deutlich" pitchFamily="34" charset="-120"/>
+              </a:rPr>
+              <a:t>h</a:t>
             </a:r>
             <a:endParaRPr lang="en-US" sz="900" dirty="0"/>
           </a:p>
@@ -7724,13 +9524,13 @@
       </p:sp>
       <p:sp>
         <p:nvSpPr>
-          <p:cNvPr id="26" name="Text 23"/>
+          <p:cNvPr id="28" name="Text 26"/>
           <p:cNvSpPr/>
           <p:nvPr/>
         </p:nvSpPr>
         <p:spPr>
           <a:xfrm>
-            <a:off x="7717536" y="4069080"/>
+            <a:off x="8924544" y="4023360"/>
             <a:ext cx="1197864" cy="228600"/>
           </a:xfrm>
           <a:prstGeom prst="rect">
@@ -7755,7 +9555,7 @@
                 <a:ea typeface="Goetheanum Schrift Klar" pitchFamily="34" charset="-122"/>
                 <a:cs typeface="Goetheanum Schrift Klar" pitchFamily="34" charset="-120"/>
               </a:rPr>
-              <a:t>Abfall</a:t>
+              <a:t>Bioabfall</a:t>
             </a:r>
             <a:endParaRPr lang="en-US" sz="900" dirty="0"/>
           </a:p>
@@ -7763,13 +9563,13 @@
       </p:sp>
       <p:sp>
         <p:nvSpPr>
-          <p:cNvPr id="27" name="Text 24"/>
+          <p:cNvPr id="29" name="Text 27"/>
           <p:cNvSpPr/>
           <p:nvPr/>
         </p:nvSpPr>
         <p:spPr>
           <a:xfrm>
-            <a:off x="8997696" y="3154680"/>
+            <a:off x="548640" y="4663440"/>
             <a:ext cx="1051560" cy="640080"/>
           </a:xfrm>
           <a:prstGeom prst="rect">
@@ -7794,7 +9594,7 @@
                 <a:ea typeface="Goetheanum Icons" pitchFamily="34" charset="-122"/>
                 <a:cs typeface="Goetheanum Icons" pitchFamily="34" charset="-120"/>
               </a:rPr>
-              <a:t>h</a:t>
+              <a:t>w</a:t>
             </a:r>
             <a:endParaRPr lang="en-US" sz="3200" dirty="0"/>
           </a:p>
@@ -7802,13 +9602,13 @@
       </p:sp>
       <p:sp>
         <p:nvSpPr>
-          <p:cNvPr id="28" name="Text 25"/>
+          <p:cNvPr id="30" name="Text 28"/>
           <p:cNvSpPr/>
           <p:nvPr/>
         </p:nvSpPr>
         <p:spPr>
           <a:xfrm>
-            <a:off x="8997696" y="3840480"/>
+            <a:off x="548640" y="5349240"/>
             <a:ext cx="1051560" cy="228600"/>
           </a:xfrm>
           <a:prstGeom prst="rect">
@@ -7829,11 +9629,11 @@
                 <a:solidFill>
                   <a:srgbClr val="005EB8"/>
                 </a:solidFill>
-                <a:latin typeface="Goetheanum Schrift Laut" pitchFamily="34" charset="0"/>
-                <a:ea typeface="Goetheanum Schrift Laut" pitchFamily="34" charset="-122"/>
-                <a:cs typeface="Goetheanum Schrift Laut" pitchFamily="34" charset="-120"/>
-              </a:rPr>
-              <a:t>h</a:t>
+                <a:latin typeface="Goetheanum Schrift Deutlich" pitchFamily="34" charset="0"/>
+                <a:ea typeface="Goetheanum Schrift Deutlich" pitchFamily="34" charset="-122"/>
+                <a:cs typeface="Goetheanum Schrift Deutlich" pitchFamily="34" charset="-120"/>
+              </a:rPr>
+              <a:t>w</a:t>
             </a:r>
             <a:endParaRPr lang="en-US" sz="900" dirty="0"/>
           </a:p>
@@ -7841,13 +9641,13 @@
       </p:sp>
       <p:sp>
         <p:nvSpPr>
-          <p:cNvPr id="29" name="Text 26"/>
+          <p:cNvPr id="31" name="Text 29"/>
           <p:cNvSpPr/>
           <p:nvPr/>
         </p:nvSpPr>
         <p:spPr>
           <a:xfrm>
-            <a:off x="8924544" y="4069080"/>
+            <a:off x="475488" y="5577840"/>
             <a:ext cx="1197864" cy="228600"/>
           </a:xfrm>
           <a:prstGeom prst="rect">
@@ -7872,7 +9672,7 @@
                 <a:ea typeface="Goetheanum Schrift Klar" pitchFamily="34" charset="-122"/>
                 <a:cs typeface="Goetheanum Schrift Klar" pitchFamily="34" charset="-120"/>
               </a:rPr>
-              <a:t>Bio</a:t>
+              <a:t>Nur mit Augen</a:t>
             </a:r>
             <a:endParaRPr lang="en-US" sz="900" dirty="0"/>
           </a:p>
@@ -7880,13 +9680,13 @@
       </p:sp>
       <p:sp>
         <p:nvSpPr>
-          <p:cNvPr id="30" name="Text 27"/>
+          <p:cNvPr id="32" name="Text 30"/>
           <p:cNvSpPr/>
           <p:nvPr/>
         </p:nvSpPr>
         <p:spPr>
           <a:xfrm>
-            <a:off x="548640" y="4754880"/>
+            <a:off x="1755648" y="4663440"/>
             <a:ext cx="1051560" cy="640080"/>
           </a:xfrm>
           <a:prstGeom prst="rect">
@@ -7911,7 +9711,7 @@
                 <a:ea typeface="Goetheanum Icons" pitchFamily="34" charset="-122"/>
                 <a:cs typeface="Goetheanum Icons" pitchFamily="34" charset="-120"/>
               </a:rPr>
-              <a:t>w</a:t>
+              <a:t>q</a:t>
             </a:r>
             <a:endParaRPr lang="en-US" sz="3200" dirty="0"/>
           </a:p>
@@ -7919,13 +9719,13 @@
       </p:sp>
       <p:sp>
         <p:nvSpPr>
-          <p:cNvPr id="31" name="Text 28"/>
+          <p:cNvPr id="33" name="Text 31"/>
           <p:cNvSpPr/>
           <p:nvPr/>
         </p:nvSpPr>
         <p:spPr>
           <a:xfrm>
-            <a:off x="548640" y="5440680"/>
+            <a:off x="1755648" y="5349240"/>
             <a:ext cx="1051560" cy="228600"/>
           </a:xfrm>
           <a:prstGeom prst="rect">
@@ -7946,11 +9746,11 @@
                 <a:solidFill>
                   <a:srgbClr val="005EB8"/>
                 </a:solidFill>
-                <a:latin typeface="Goetheanum Schrift Laut" pitchFamily="34" charset="0"/>
-                <a:ea typeface="Goetheanum Schrift Laut" pitchFamily="34" charset="-122"/>
-                <a:cs typeface="Goetheanum Schrift Laut" pitchFamily="34" charset="-120"/>
-              </a:rPr>
-              <a:t>w</a:t>
+                <a:latin typeface="Goetheanum Schrift Deutlich" pitchFamily="34" charset="0"/>
+                <a:ea typeface="Goetheanum Schrift Deutlich" pitchFamily="34" charset="-122"/>
+                <a:cs typeface="Goetheanum Schrift Deutlich" pitchFamily="34" charset="-120"/>
+              </a:rPr>
+              <a:t>q</a:t>
             </a:r>
             <a:endParaRPr lang="en-US" sz="900" dirty="0"/>
           </a:p>
@@ -7958,13 +9758,13 @@
       </p:sp>
       <p:sp>
         <p:nvSpPr>
-          <p:cNvPr id="32" name="Text 29"/>
+          <p:cNvPr id="34" name="Text 32"/>
           <p:cNvSpPr/>
           <p:nvPr/>
         </p:nvSpPr>
         <p:spPr>
           <a:xfrm>
-            <a:off x="475488" y="5669280"/>
+            <a:off x="1682496" y="5577840"/>
             <a:ext cx="1197864" cy="228600"/>
           </a:xfrm>
           <a:prstGeom prst="rect">
@@ -7989,7 +9789,7 @@
                 <a:ea typeface="Goetheanum Schrift Klar" pitchFamily="34" charset="-122"/>
                 <a:cs typeface="Goetheanum Schrift Klar" pitchFamily="34" charset="-120"/>
               </a:rPr>
-              <a:t>Auge</a:t>
+              <a:t>Bitte anfassen</a:t>
             </a:r>
             <a:endParaRPr lang="en-US" sz="900" dirty="0"/>
           </a:p>
@@ -7997,13 +9797,13 @@
       </p:sp>
       <p:sp>
         <p:nvSpPr>
-          <p:cNvPr id="33" name="Text 30"/>
+          <p:cNvPr id="35" name="Text 33"/>
           <p:cNvSpPr/>
           <p:nvPr/>
         </p:nvSpPr>
         <p:spPr>
           <a:xfrm>
-            <a:off x="1755648" y="4754880"/>
+            <a:off x="2962656" y="4663440"/>
             <a:ext cx="1051560" cy="640080"/>
           </a:xfrm>
           <a:prstGeom prst="rect">
@@ -8028,7 +9828,7 @@
                 <a:ea typeface="Goetheanum Icons" pitchFamily="34" charset="-122"/>
                 <a:cs typeface="Goetheanum Icons" pitchFamily="34" charset="-120"/>
               </a:rPr>
-              <a:t>q</a:t>
+              <a:t>y</a:t>
             </a:r>
             <a:endParaRPr lang="en-US" sz="3200" dirty="0"/>
           </a:p>
@@ -8036,13 +9836,13 @@
       </p:sp>
       <p:sp>
         <p:nvSpPr>
-          <p:cNvPr id="34" name="Text 31"/>
+          <p:cNvPr id="36" name="Text 34"/>
           <p:cNvSpPr/>
           <p:nvPr/>
         </p:nvSpPr>
         <p:spPr>
           <a:xfrm>
-            <a:off x="1755648" y="5440680"/>
+            <a:off x="2962656" y="5349240"/>
             <a:ext cx="1051560" cy="228600"/>
           </a:xfrm>
           <a:prstGeom prst="rect">
@@ -8063,11 +9863,11 @@
                 <a:solidFill>
                   <a:srgbClr val="005EB8"/>
                 </a:solidFill>
-                <a:latin typeface="Goetheanum Schrift Laut" pitchFamily="34" charset="0"/>
-                <a:ea typeface="Goetheanum Schrift Laut" pitchFamily="34" charset="-122"/>
-                <a:cs typeface="Goetheanum Schrift Laut" pitchFamily="34" charset="-120"/>
-              </a:rPr>
-              <a:t>q</a:t>
+                <a:latin typeface="Goetheanum Schrift Deutlich" pitchFamily="34" charset="0"/>
+                <a:ea typeface="Goetheanum Schrift Deutlich" pitchFamily="34" charset="-122"/>
+                <a:cs typeface="Goetheanum Schrift Deutlich" pitchFamily="34" charset="-120"/>
+              </a:rPr>
+              <a:t>y</a:t>
             </a:r>
             <a:endParaRPr lang="en-US" sz="900" dirty="0"/>
           </a:p>
@@ -8075,13 +9875,13 @@
       </p:sp>
       <p:sp>
         <p:nvSpPr>
-          <p:cNvPr id="35" name="Text 32"/>
+          <p:cNvPr id="37" name="Text 35"/>
           <p:cNvSpPr/>
           <p:nvPr/>
         </p:nvSpPr>
         <p:spPr>
           <a:xfrm>
-            <a:off x="1682496" y="5669280"/>
+            <a:off x="2889504" y="5577840"/>
             <a:ext cx="1197864" cy="228600"/>
           </a:xfrm>
           <a:prstGeom prst="rect">
@@ -8106,7 +9906,7 @@
                 <a:ea typeface="Goetheanum Schrift Klar" pitchFamily="34" charset="-122"/>
                 <a:cs typeface="Goetheanum Schrift Klar" pitchFamily="34" charset="-120"/>
               </a:rPr>
-              <a:t>Hand</a:t>
+              <a:t>WC Damen</a:t>
             </a:r>
             <a:endParaRPr lang="en-US" sz="900" dirty="0"/>
           </a:p>
@@ -8114,13 +9914,13 @@
       </p:sp>
       <p:sp>
         <p:nvSpPr>
-          <p:cNvPr id="36" name="Text 33"/>
+          <p:cNvPr id="38" name="Text 36"/>
           <p:cNvSpPr/>
           <p:nvPr/>
         </p:nvSpPr>
         <p:spPr>
           <a:xfrm>
-            <a:off x="2962656" y="4754880"/>
+            <a:off x="4169664" y="4663440"/>
             <a:ext cx="1051560" cy="640080"/>
           </a:xfrm>
           <a:prstGeom prst="rect">
@@ -8145,7 +9945,7 @@
                 <a:ea typeface="Goetheanum Icons" pitchFamily="34" charset="-122"/>
                 <a:cs typeface="Goetheanum Icons" pitchFamily="34" charset="-120"/>
               </a:rPr>
-              <a:t>y</a:t>
+              <a:t>r</a:t>
             </a:r>
             <a:endParaRPr lang="en-US" sz="3200" dirty="0"/>
           </a:p>
@@ -8153,13 +9953,13 @@
       </p:sp>
       <p:sp>
         <p:nvSpPr>
-          <p:cNvPr id="37" name="Text 34"/>
+          <p:cNvPr id="39" name="Text 37"/>
           <p:cNvSpPr/>
           <p:nvPr/>
         </p:nvSpPr>
         <p:spPr>
           <a:xfrm>
-            <a:off x="2962656" y="5440680"/>
+            <a:off x="4169664" y="5349240"/>
             <a:ext cx="1051560" cy="228600"/>
           </a:xfrm>
           <a:prstGeom prst="rect">
@@ -8180,11 +9980,11 @@
                 <a:solidFill>
                   <a:srgbClr val="005EB8"/>
                 </a:solidFill>
-                <a:latin typeface="Goetheanum Schrift Laut" pitchFamily="34" charset="0"/>
-                <a:ea typeface="Goetheanum Schrift Laut" pitchFamily="34" charset="-122"/>
-                <a:cs typeface="Goetheanum Schrift Laut" pitchFamily="34" charset="-120"/>
-              </a:rPr>
-              <a:t>y</a:t>
+                <a:latin typeface="Goetheanum Schrift Deutlich" pitchFamily="34" charset="0"/>
+                <a:ea typeface="Goetheanum Schrift Deutlich" pitchFamily="34" charset="-122"/>
+                <a:cs typeface="Goetheanum Schrift Deutlich" pitchFamily="34" charset="-120"/>
+              </a:rPr>
+              <a:t>r</a:t>
             </a:r>
             <a:endParaRPr lang="en-US" sz="900" dirty="0"/>
           </a:p>
@@ -8192,13 +9992,13 @@
       </p:sp>
       <p:sp>
         <p:nvSpPr>
-          <p:cNvPr id="38" name="Text 35"/>
+          <p:cNvPr id="40" name="Text 38"/>
           <p:cNvSpPr/>
           <p:nvPr/>
         </p:nvSpPr>
         <p:spPr>
           <a:xfrm>
-            <a:off x="2889504" y="5669280"/>
+            <a:off x="4096512" y="5577840"/>
             <a:ext cx="1197864" cy="228600"/>
           </a:xfrm>
           <a:prstGeom prst="rect">
@@ -8223,7 +10023,7 @@
                 <a:ea typeface="Goetheanum Schrift Klar" pitchFamily="34" charset="-122"/>
                 <a:cs typeface="Goetheanum Schrift Klar" pitchFamily="34" charset="-120"/>
               </a:rPr>
-              <a:t>Person</a:t>
+              <a:t>Hunde anleinen</a:t>
             </a:r>
             <a:endParaRPr lang="en-US" sz="900" dirty="0"/>
           </a:p>
@@ -8231,13 +10031,13 @@
       </p:sp>
       <p:sp>
         <p:nvSpPr>
-          <p:cNvPr id="39" name="Text 36"/>
+          <p:cNvPr id="41" name="Text 39"/>
           <p:cNvSpPr/>
           <p:nvPr/>
         </p:nvSpPr>
         <p:spPr>
           <a:xfrm>
-            <a:off x="4169664" y="4754880"/>
+            <a:off x="5376672" y="4663440"/>
             <a:ext cx="1051560" cy="640080"/>
           </a:xfrm>
           <a:prstGeom prst="rect">
@@ -8262,7 +10062,7 @@
                 <a:ea typeface="Goetheanum Icons" pitchFamily="34" charset="-122"/>
                 <a:cs typeface="Goetheanum Icons" pitchFamily="34" charset="-120"/>
               </a:rPr>
-              <a:t>r</a:t>
+              <a:t>z</a:t>
             </a:r>
             <a:endParaRPr lang="en-US" sz="3200" dirty="0"/>
           </a:p>
@@ -8270,13 +10070,13 @@
       </p:sp>
       <p:sp>
         <p:nvSpPr>
-          <p:cNvPr id="40" name="Text 37"/>
+          <p:cNvPr id="42" name="Text 40"/>
           <p:cNvSpPr/>
           <p:nvPr/>
         </p:nvSpPr>
         <p:spPr>
           <a:xfrm>
-            <a:off x="4169664" y="5440680"/>
+            <a:off x="5376672" y="5349240"/>
             <a:ext cx="1051560" cy="228600"/>
           </a:xfrm>
           <a:prstGeom prst="rect">
@@ -8297,11 +10097,11 @@
                 <a:solidFill>
                   <a:srgbClr val="005EB8"/>
                 </a:solidFill>
-                <a:latin typeface="Goetheanum Schrift Laut" pitchFamily="34" charset="0"/>
-                <a:ea typeface="Goetheanum Schrift Laut" pitchFamily="34" charset="-122"/>
-                <a:cs typeface="Goetheanum Schrift Laut" pitchFamily="34" charset="-120"/>
-              </a:rPr>
-              <a:t>r</a:t>
+                <a:latin typeface="Goetheanum Schrift Deutlich" pitchFamily="34" charset="0"/>
+                <a:ea typeface="Goetheanum Schrift Deutlich" pitchFamily="34" charset="-122"/>
+                <a:cs typeface="Goetheanum Schrift Deutlich" pitchFamily="34" charset="-120"/>
+              </a:rPr>
+              <a:t>z</a:t>
             </a:r>
             <a:endParaRPr lang="en-US" sz="900" dirty="0"/>
           </a:p>
@@ -8309,13 +10109,13 @@
       </p:sp>
       <p:sp>
         <p:nvSpPr>
-          <p:cNvPr id="41" name="Text 38"/>
+          <p:cNvPr id="43" name="Text 41"/>
           <p:cNvSpPr/>
           <p:nvPr/>
         </p:nvSpPr>
         <p:spPr>
           <a:xfrm>
-            <a:off x="4096512" y="5669280"/>
+            <a:off x="5303520" y="5577840"/>
             <a:ext cx="1197864" cy="228600"/>
           </a:xfrm>
           <a:prstGeom prst="rect">
@@ -8340,7 +10140,7 @@
                 <a:ea typeface="Goetheanum Schrift Klar" pitchFamily="34" charset="-122"/>
                 <a:cs typeface="Goetheanum Schrift Klar" pitchFamily="34" charset="-120"/>
               </a:rPr>
-              <a:t>Hunde anleinen</a:t>
+              <a:t>Keine Fotos</a:t>
             </a:r>
             <a:endParaRPr lang="en-US" sz="900" dirty="0"/>
           </a:p>
@@ -8348,13 +10148,13 @@
       </p:sp>
       <p:sp>
         <p:nvSpPr>
-          <p:cNvPr id="42" name="Text 39"/>
+          <p:cNvPr id="44" name="Text 42"/>
           <p:cNvSpPr/>
           <p:nvPr/>
         </p:nvSpPr>
         <p:spPr>
           <a:xfrm>
-            <a:off x="5376672" y="4754880"/>
+            <a:off x="6583680" y="4663440"/>
             <a:ext cx="1051560" cy="640080"/>
           </a:xfrm>
           <a:prstGeom prst="rect">
@@ -8379,7 +10179,7 @@
                 <a:ea typeface="Goetheanum Icons" pitchFamily="34" charset="-122"/>
                 <a:cs typeface="Goetheanum Icons" pitchFamily="34" charset="-120"/>
               </a:rPr>
-              <a:t>z</a:t>
+              <a:t>t</a:t>
             </a:r>
             <a:endParaRPr lang="en-US" sz="3200" dirty="0"/>
           </a:p>
@@ -8387,13 +10187,13 @@
       </p:sp>
       <p:sp>
         <p:nvSpPr>
-          <p:cNvPr id="43" name="Text 40"/>
+          <p:cNvPr id="45" name="Text 43"/>
           <p:cNvSpPr/>
           <p:nvPr/>
         </p:nvSpPr>
         <p:spPr>
           <a:xfrm>
-            <a:off x="5376672" y="5440680"/>
+            <a:off x="6583680" y="5349240"/>
             <a:ext cx="1051560" cy="228600"/>
           </a:xfrm>
           <a:prstGeom prst="rect">
@@ -8414,11 +10214,11 @@
                 <a:solidFill>
                   <a:srgbClr val="005EB8"/>
                 </a:solidFill>
-                <a:latin typeface="Goetheanum Schrift Laut" pitchFamily="34" charset="0"/>
-                <a:ea typeface="Goetheanum Schrift Laut" pitchFamily="34" charset="-122"/>
-                <a:cs typeface="Goetheanum Schrift Laut" pitchFamily="34" charset="-120"/>
-              </a:rPr>
-              <a:t>z</a:t>
+                <a:latin typeface="Goetheanum Schrift Deutlich" pitchFamily="34" charset="0"/>
+                <a:ea typeface="Goetheanum Schrift Deutlich" pitchFamily="34" charset="-122"/>
+                <a:cs typeface="Goetheanum Schrift Deutlich" pitchFamily="34" charset="-120"/>
+              </a:rPr>
+              <a:t>t</a:t>
             </a:r>
             <a:endParaRPr lang="en-US" sz="900" dirty="0"/>
           </a:p>
@@ -8426,13 +10226,13 @@
       </p:sp>
       <p:sp>
         <p:nvSpPr>
-          <p:cNvPr id="44" name="Text 41"/>
+          <p:cNvPr id="46" name="Text 44"/>
           <p:cNvSpPr/>
           <p:nvPr/>
         </p:nvSpPr>
         <p:spPr>
           <a:xfrm>
-            <a:off x="5303520" y="5669280"/>
+            <a:off x="6510528" y="5577840"/>
             <a:ext cx="1197864" cy="228600"/>
           </a:xfrm>
           <a:prstGeom prst="rect">
@@ -8457,7 +10257,7 @@
                 <a:ea typeface="Goetheanum Schrift Klar" pitchFamily="34" charset="-122"/>
                 <a:cs typeface="Goetheanum Schrift Klar" pitchFamily="34" charset="-120"/>
               </a:rPr>
-              <a:t>Keine Fotos</a:t>
+              <a:t>Keine Hunde</a:t>
             </a:r>
             <a:endParaRPr lang="en-US" sz="900" dirty="0"/>
           </a:p>
@@ -8465,13 +10265,13 @@
       </p:sp>
       <p:sp>
         <p:nvSpPr>
-          <p:cNvPr id="45" name="Text 42"/>
+          <p:cNvPr id="47" name="Text 45"/>
           <p:cNvSpPr/>
           <p:nvPr/>
         </p:nvSpPr>
         <p:spPr>
           <a:xfrm>
-            <a:off x="6583680" y="4754880"/>
+            <a:off x="7790688" y="4663440"/>
             <a:ext cx="1051560" cy="640080"/>
           </a:xfrm>
           <a:prstGeom prst="rect">
@@ -8496,7 +10296,7 @@
                 <a:ea typeface="Goetheanum Icons" pitchFamily="34" charset="-122"/>
                 <a:cs typeface="Goetheanum Icons" pitchFamily="34" charset="-120"/>
               </a:rPr>
-              <a:t>t</a:t>
+              <a:t>u</a:t>
             </a:r>
             <a:endParaRPr lang="en-US" sz="3200" dirty="0"/>
           </a:p>
@@ -8504,13 +10304,13 @@
       </p:sp>
       <p:sp>
         <p:nvSpPr>
-          <p:cNvPr id="46" name="Text 43"/>
+          <p:cNvPr id="48" name="Text 46"/>
           <p:cNvSpPr/>
           <p:nvPr/>
         </p:nvSpPr>
         <p:spPr>
           <a:xfrm>
-            <a:off x="6583680" y="5440680"/>
+            <a:off x="7790688" y="5349240"/>
             <a:ext cx="1051560" cy="228600"/>
           </a:xfrm>
           <a:prstGeom prst="rect">
@@ -8531,11 +10331,11 @@
                 <a:solidFill>
                   <a:srgbClr val="005EB8"/>
                 </a:solidFill>
-                <a:latin typeface="Goetheanum Schrift Laut" pitchFamily="34" charset="0"/>
-                <a:ea typeface="Goetheanum Schrift Laut" pitchFamily="34" charset="-122"/>
-                <a:cs typeface="Goetheanum Schrift Laut" pitchFamily="34" charset="-120"/>
-              </a:rPr>
-              <a:t>t</a:t>
+                <a:latin typeface="Goetheanum Schrift Deutlich" pitchFamily="34" charset="0"/>
+                <a:ea typeface="Goetheanum Schrift Deutlich" pitchFamily="34" charset="-122"/>
+                <a:cs typeface="Goetheanum Schrift Deutlich" pitchFamily="34" charset="-120"/>
+              </a:rPr>
+              <a:t>u</a:t>
             </a:r>
             <a:endParaRPr lang="en-US" sz="900" dirty="0"/>
           </a:p>
@@ -8543,13 +10343,13 @@
       </p:sp>
       <p:sp>
         <p:nvSpPr>
-          <p:cNvPr id="47" name="Text 44"/>
+          <p:cNvPr id="49" name="Text 47"/>
           <p:cNvSpPr/>
           <p:nvPr/>
         </p:nvSpPr>
         <p:spPr>
           <a:xfrm>
-            <a:off x="6510528" y="5669280"/>
+            <a:off x="7717536" y="5577840"/>
             <a:ext cx="1197864" cy="228600"/>
           </a:xfrm>
           <a:prstGeom prst="rect">
@@ -8574,7 +10374,7 @@
                 <a:ea typeface="Goetheanum Schrift Klar" pitchFamily="34" charset="-122"/>
                 <a:cs typeface="Goetheanum Schrift Klar" pitchFamily="34" charset="-120"/>
               </a:rPr>
-              <a:t>Keine Hunde</a:t>
+              <a:t>Draussen essen</a:t>
             </a:r>
             <a:endParaRPr lang="en-US" sz="900" dirty="0"/>
           </a:p>
@@ -8582,13 +10382,13 @@
       </p:sp>
       <p:sp>
         <p:nvSpPr>
-          <p:cNvPr id="48" name="Text 45"/>
+          <p:cNvPr id="50" name="Text 48"/>
           <p:cNvSpPr/>
           <p:nvPr/>
         </p:nvSpPr>
         <p:spPr>
           <a:xfrm>
-            <a:off x="7790688" y="4754880"/>
+            <a:off x="8997696" y="4663440"/>
             <a:ext cx="1051560" cy="640080"/>
           </a:xfrm>
           <a:prstGeom prst="rect">
@@ -8613,7 +10413,7 @@
                 <a:ea typeface="Goetheanum Icons" pitchFamily="34" charset="-122"/>
                 <a:cs typeface="Goetheanum Icons" pitchFamily="34" charset="-120"/>
               </a:rPr>
-              <a:t>u</a:t>
+              <a:t>j</a:t>
             </a:r>
             <a:endParaRPr lang="en-US" sz="3200" dirty="0"/>
           </a:p>
@@ -8621,13 +10421,13 @@
       </p:sp>
       <p:sp>
         <p:nvSpPr>
-          <p:cNvPr id="49" name="Text 46"/>
+          <p:cNvPr id="51" name="Text 49"/>
           <p:cNvSpPr/>
           <p:nvPr/>
         </p:nvSpPr>
         <p:spPr>
           <a:xfrm>
-            <a:off x="7790688" y="5440680"/>
+            <a:off x="8997696" y="5349240"/>
             <a:ext cx="1051560" cy="228600"/>
           </a:xfrm>
           <a:prstGeom prst="rect">
@@ -8648,11 +10448,11 @@
                 <a:solidFill>
                   <a:srgbClr val="005EB8"/>
                 </a:solidFill>
-                <a:latin typeface="Goetheanum Schrift Laut" pitchFamily="34" charset="0"/>
-                <a:ea typeface="Goetheanum Schrift Laut" pitchFamily="34" charset="-122"/>
-                <a:cs typeface="Goetheanum Schrift Laut" pitchFamily="34" charset="-120"/>
-              </a:rPr>
-              <a:t>u</a:t>
+                <a:latin typeface="Goetheanum Schrift Deutlich" pitchFamily="34" charset="0"/>
+                <a:ea typeface="Goetheanum Schrift Deutlich" pitchFamily="34" charset="-122"/>
+                <a:cs typeface="Goetheanum Schrift Deutlich" pitchFamily="34" charset="-120"/>
+              </a:rPr>
+              <a:t>j</a:t>
             </a:r>
             <a:endParaRPr lang="en-US" sz="900" dirty="0"/>
           </a:p>
@@ -8660,13 +10460,13 @@
       </p:sp>
       <p:sp>
         <p:nvSpPr>
-          <p:cNvPr id="50" name="Text 47"/>
+          <p:cNvPr id="52" name="Text 50"/>
           <p:cNvSpPr/>
           <p:nvPr/>
         </p:nvSpPr>
         <p:spPr>
           <a:xfrm>
-            <a:off x="7717536" y="5669280"/>
+            <a:off x="8924544" y="5577840"/>
             <a:ext cx="1197864" cy="228600"/>
           </a:xfrm>
           <a:prstGeom prst="rect">
@@ -8691,7 +10491,7 @@
                 <a:ea typeface="Goetheanum Schrift Klar" pitchFamily="34" charset="-122"/>
                 <a:cs typeface="Goetheanum Schrift Klar" pitchFamily="34" charset="-120"/>
               </a:rPr>
-              <a:t>Nicht essen</a:t>
+              <a:t>Papier</a:t>
             </a:r>
             <a:endParaRPr lang="en-US" sz="900" dirty="0"/>
           </a:p>
@@ -8699,14 +10499,14 @@
       </p:sp>
       <p:sp>
         <p:nvSpPr>
-          <p:cNvPr id="51" name="Text 48"/>
+          <p:cNvPr id="53" name="Text 51"/>
           <p:cNvSpPr/>
           <p:nvPr/>
         </p:nvSpPr>
         <p:spPr>
           <a:xfrm>
-            <a:off x="8997696" y="4754880"/>
-            <a:ext cx="1051560" cy="640080"/>
+            <a:off x="548640" y="6263640"/>
+            <a:ext cx="8686800" cy="256032"/>
           </a:xfrm>
           <a:prstGeom prst="rect">
             <a:avLst/>
@@ -8718,85 +10518,7 @@
           <a:bodyPr wrap="square" lIns="0" tIns="0" rIns="0" bIns="0" rtlCol="0" anchor="ctr"/>
           <a:lstStyle/>
           <a:p>
-            <a:pPr algn="ctr" indent="0" marL="0">
-              <a:buNone/>
-            </a:pPr>
-            <a:r>
-              <a:rPr lang="en-US" sz="3200" dirty="0">
-                <a:solidFill>
-                  <a:srgbClr val="1A1A1A"/>
-                </a:solidFill>
-                <a:latin typeface="Goetheanum Icons" pitchFamily="34" charset="0"/>
-                <a:ea typeface="Goetheanum Icons" pitchFamily="34" charset="-122"/>
-                <a:cs typeface="Goetheanum Icons" pitchFamily="34" charset="-120"/>
-              </a:rPr>
-              <a:t>j</a:t>
-            </a:r>
-            <a:endParaRPr lang="en-US" sz="3200" dirty="0"/>
-          </a:p>
-        </p:txBody>
-      </p:sp>
-      <p:sp>
-        <p:nvSpPr>
-          <p:cNvPr id="52" name="Text 49"/>
-          <p:cNvSpPr/>
-          <p:nvPr/>
-        </p:nvSpPr>
-        <p:spPr>
-          <a:xfrm>
-            <a:off x="8997696" y="5440680"/>
-            <a:ext cx="1051560" cy="228600"/>
-          </a:xfrm>
-          <a:prstGeom prst="rect">
-            <a:avLst/>
-          </a:prstGeom>
-          <a:noFill/>
-          <a:ln/>
-        </p:spPr>
-        <p:txBody>
-          <a:bodyPr wrap="square" lIns="0" tIns="0" rIns="0" bIns="0" rtlCol="0" anchor="ctr"/>
-          <a:lstStyle/>
-          <a:p>
-            <a:pPr algn="ctr" indent="0" marL="0">
-              <a:buNone/>
-            </a:pPr>
-            <a:r>
-              <a:rPr lang="en-US" sz="900" dirty="0">
-                <a:solidFill>
-                  <a:srgbClr val="005EB8"/>
-                </a:solidFill>
-                <a:latin typeface="Goetheanum Schrift Laut" pitchFamily="34" charset="0"/>
-                <a:ea typeface="Goetheanum Schrift Laut" pitchFamily="34" charset="-122"/>
-                <a:cs typeface="Goetheanum Schrift Laut" pitchFamily="34" charset="-120"/>
-              </a:rPr>
-              <a:t>j</a:t>
-            </a:r>
-            <a:endParaRPr lang="en-US" sz="900" dirty="0"/>
-          </a:p>
-        </p:txBody>
-      </p:sp>
-      <p:sp>
-        <p:nvSpPr>
-          <p:cNvPr id="53" name="Text 50"/>
-          <p:cNvSpPr/>
-          <p:nvPr/>
-        </p:nvSpPr>
-        <p:spPr>
-          <a:xfrm>
-            <a:off x="8924544" y="5669280"/>
-            <a:ext cx="1197864" cy="228600"/>
-          </a:xfrm>
-          <a:prstGeom prst="rect">
-            <a:avLst/>
-          </a:prstGeom>
-          <a:noFill/>
-          <a:ln/>
-        </p:spPr>
-        <p:txBody>
-          <a:bodyPr wrap="square" lIns="0" tIns="0" rIns="0" bIns="0" rtlCol="0" anchor="ctr"/>
-          <a:lstStyle/>
-          <a:p>
-            <a:pPr algn="ctr" indent="0" marL="0">
+            <a:pPr indent="0" marL="0">
               <a:buNone/>
             </a:pPr>
             <a:r>
@@ -8808,7 +10530,7 @@
                 <a:ea typeface="Goetheanum Schrift Klar" pitchFamily="34" charset="-122"/>
                 <a:cs typeface="Goetheanum Schrift Klar" pitchFamily="34" charset="-120"/>
               </a:rPr>
-              <a:t>Papier</a:t>
+              <a:t>Grossbuchstaben setzen dasselbe Zeichen mit Beschriftung. Pfeile und Kompass: Schrift ‹Goetheanum Pfeile›.</a:t>
             </a:r>
             <a:endParaRPr lang="en-US" sz="900" dirty="0"/>
           </a:p>
@@ -8816,7 +10538,7 @@
       </p:sp>
       <p:sp>
         <p:nvSpPr>
-          <p:cNvPr id="54" name="Text 51"/>
+          <p:cNvPr id="54" name="Text 52"/>
           <p:cNvSpPr/>
           <p:nvPr/>
         </p:nvSpPr>
@@ -8853,14 +10575,14 @@
               <a:buNone/>
             </a:pPr>
             <a:r>
-              <a:rPr lang="en-US" sz="1300" u="sng" dirty="0">
+              <a:rPr lang="en-US" sz="1300" dirty="0">
                 <a:solidFill>
                   <a:srgbClr val="005EB8"/>
                 </a:solidFill>
                 <a:latin typeface="Goetheanum Schrift Klar" pitchFamily="34" charset="0"/>
                 <a:ea typeface="Goetheanum Schrift Klar" pitchFamily="34" charset="-122"/>
                 <a:cs typeface="Goetheanum Schrift Klar" pitchFamily="34" charset="-120"/>
-                <a:hlinkClick r:id="rId2" invalidUrl="" action="" tgtFrame="" tooltip="" history="1" highlightClick="0" endSnd="0">
+                <a:hlinkClick r:id="rId1" invalidUrl="" action="" tgtFrame="" tooltip="" history="1" highlightClick="0" endSnd="0">
                   <a:extLst>
                     <a:ext uri="{A12FA001-AC4F-418D-AE19-62706E023703}">
                       <ahyp:hlinkClr xmlns:ahyp="http://schemas.microsoft.com/office/drawing/2018/hyperlinkcolor" val="tx"/>
@@ -8876,40 +10598,49 @@
       </p:sp>
       <p:sp>
         <p:nvSpPr>
-          <p:cNvPr id="55" name="Text 52"/>
-          <p:cNvSpPr/>
-          <p:nvPr/>
-        </p:nvSpPr>
-        <p:spPr>
-          <a:xfrm>
-            <a:off x="4654296" y="6995160"/>
-            <a:ext cx="5486400" cy="274320"/>
-          </a:xfrm>
-          <a:prstGeom prst="rect">
-            <a:avLst/>
-          </a:prstGeom>
-          <a:noFill/>
-          <a:ln/>
-        </p:spPr>
-        <p:txBody>
-          <a:bodyPr wrap="square" lIns="0" tIns="0" rIns="0" bIns="0" rtlCol="0" anchor="ctr"/>
-          <a:lstStyle/>
-          <a:p>
-            <a:pPr algn="r" indent="0" marL="0">
-              <a:buNone/>
-            </a:pPr>
-            <a:r>
-              <a:rPr lang="en-US" sz="900" dirty="0">
+          <p:cNvPr id="25" name="Slide Number Placeholder 0"/>
+          <p:cNvSpPr>
+            <a:spLocks noGrp="1"/>
+          </p:cNvSpPr>
+          <p:nvPr>
+            <p:ph type="sldNum" sz="quarter" idx="4294967295"/>
+          </p:nvPr>
+        </p:nvSpPr>
+        <p:spPr>
+          <a:xfrm>
+            <a:off x="9747504" y="6995160"/>
+            <a:ext cx="393192" cy="274320"/>
+          </a:xfrm>
+          <a:prstGeom prst="rect">
+            <a:avLst/>
+          </a:prstGeom>
+          <a:extLst>
+            <a:ext uri="{C572A759-6A51-4108-AA02-DFA0A04FC94B}">
+              <ma14:wrappingTextBoxFlag xmlns:ma14="http://schemas.microsoft.com/office/mac/drawingml/2011/main" val="0"/>
+            </a:ext>
+          </a:extLst>
+        </p:spPr>
+        <p:txBody>
+          <a:bodyPr anchor="ctr"/>
+          <a:lstStyle>
+            <a:lvl1pPr>
+              <a:defRPr sz="900">
                 <a:solidFill>
                   <a:srgbClr val="6B7480"/>
                 </a:solidFill>
-                <a:latin typeface="Goetheanum Schrift Klar" pitchFamily="34" charset="0"/>
-                <a:ea typeface="Goetheanum Schrift Klar" pitchFamily="34" charset="-122"/>
-                <a:cs typeface="Goetheanum Schrift Klar" pitchFamily="34" charset="-120"/>
-              </a:rPr>
-              <a:t>Titel der Präsentation · 00.00.2026 · 3</a:t>
-            </a:r>
-            <a:endParaRPr lang="en-US" sz="900" dirty="0"/>
+                <a:latin typeface="Goetheanum Schrift Klar"/>
+                <a:ea typeface="Goetheanum Schrift Klar"/>
+                <a:cs typeface="Goetheanum Schrift Klar"/>
+              </a:defRPr>
+            </a:lvl1pPr>
+          </a:lstStyle>
+          <a:p>
+            <a:pPr algn="l"/>
+            <a:fld id="{F7021451-1387-4CA6-816F-3879F97B5CBC}" type="slidenum">
+              <a:rPr b="0" lang="en-US"/>
+              <a:t>3</a:t>
+            </a:fld>
+            <a:endParaRPr lang="en-US"/>
           </a:p>
         </p:txBody>
       </p:sp>
@@ -8924,13 +10655,6 @@
 <file path=ppt/slides/slide4.xml><?xml version="1.0" encoding="utf-8"?>
 <p:sld xmlns:a="http://schemas.openxmlformats.org/drawingml/2006/main" xmlns:r="http://schemas.openxmlformats.org/officeDocument/2006/relationships" xmlns:p="http://schemas.openxmlformats.org/presentationml/2006/main">
   <p:cSld name="Slide 4">
-    <p:bg>
-      <p:bgPr>
-        <a:solidFill>
-          <a:srgbClr val="FFFFFF"/>
-        </a:solidFill>
-      </p:bgPr>
-    </p:bg>
     <p:spTree>
       <p:nvGrpSpPr>
         <p:cNvPr id="1" name=""/>
@@ -8945,35 +10669,13 @@
           <a:chExt cx="0" cy="0"/>
         </a:xfrm>
       </p:grpSpPr>
-      <p:pic>
-        <p:nvPicPr>
-          <p:cNvPr id="2" name="Image 0" descr="logo-goetheanum-blue.png">    </p:cNvPr>
-          <p:cNvPicPr>
-            <a:picLocks noChangeAspect="1"/>
-          </p:cNvPicPr>
-          <p:nvPr/>
-        </p:nvPicPr>
-        <p:blipFill>
-          <a:blip r:embed="rId1"/>
-          <a:stretch>
-            <a:fillRect/>
-          </a:stretch>
-        </p:blipFill>
-        <p:spPr>
-          <a:xfrm>
-            <a:off x="548640" y="502920"/>
-            <a:ext cx="1088402" cy="182880"/>
-          </a:xfrm>
-          <a:prstGeom prst="rect">
-            <a:avLst/>
-          </a:prstGeom>
-        </p:spPr>
-      </p:pic>
-      <p:sp>
-        <p:nvSpPr>
-          <p:cNvPr id="3" name="Text 0"/>
-          <p:cNvSpPr/>
-          <p:nvPr/>
+      <p:sp>
+        <p:nvSpPr>
+          <p:cNvPr id="2" name="Text 1"/>
+          <p:cNvSpPr/>
+          <p:nvPr>
+            <p:ph idx="102" type="body" hasCustomPrompt="1"/>
+          </p:nvPr>
         </p:nvSpPr>
         <p:spPr>
           <a:xfrm>
@@ -8987,7 +10689,7 @@
           <a:ln/>
         </p:spPr>
         <p:txBody>
-          <a:bodyPr wrap="square" lIns="0" tIns="0" rIns="0" bIns="0" rtlCol="0" anchor="ctr"/>
+          <a:bodyPr wrap="square" lIns="0" tIns="0" rIns="0" bIns="0" rtlCol="0"/>
           <a:lstStyle/>
           <a:p>
             <a:pPr indent="0" marL="0">
@@ -9010,9 +10712,11 @@
       </p:sp>
       <p:sp>
         <p:nvSpPr>
-          <p:cNvPr id="4" name="Text 1"/>
-          <p:cNvSpPr/>
-          <p:nvPr/>
+          <p:cNvPr id="3" name="Text 1"/>
+          <p:cNvSpPr/>
+          <p:nvPr>
+            <p:ph idx="103" type="title" hasCustomPrompt="1"/>
+          </p:nvPr>
         </p:nvSpPr>
         <p:spPr>
           <a:xfrm>
@@ -9026,20 +10730,20 @@
           <a:ln/>
         </p:spPr>
         <p:txBody>
-          <a:bodyPr wrap="square" lIns="0" tIns="0" rIns="0" bIns="0" rtlCol="0" anchor="ctr"/>
-          <a:lstStyle/>
-          <a:p>
-            <a:pPr indent="0" marL="0">
-              <a:buNone/>
-            </a:pPr>
-            <a:r>
-              <a:rPr lang="en-US" sz="2600" dirty="0">
+          <a:bodyPr wrap="square" lIns="0" tIns="0" rIns="0" bIns="0" rtlCol="0"/>
+          <a:lstStyle/>
+          <a:p>
+            <a:pPr indent="0" marL="0">
+              <a:buNone/>
+            </a:pPr>
+            <a:r>
+              <a:rPr lang="en-US" sz="1800" dirty="0">
                 <a:solidFill>
                   <a:srgbClr val="1A1A1A"/>
                 </a:solidFill>
-                <a:latin typeface="Goetheanum Schrift Klar" pitchFamily="34" charset="0"/>
-                <a:ea typeface="Goetheanum Schrift Klar" pitchFamily="34" charset="-122"/>
-                <a:cs typeface="Goetheanum Schrift Klar" pitchFamily="34" charset="-120"/>
+                <a:latin typeface="Goetheanum Schrift Deutlich" pitchFamily="34" charset="0"/>
+                <a:ea typeface="Goetheanum Schrift Deutlich" pitchFamily="34" charset="-122"/>
+                <a:cs typeface="Goetheanum Schrift Deutlich" pitchFamily="34" charset="-120"/>
               </a:rPr>
               <a:t>Worüber wir sprechen</a:t>
             </a:r>
@@ -9049,7 +10753,7 @@
       </p:sp>
       <p:sp>
         <p:nvSpPr>
-          <p:cNvPr id="5" name="Text 2"/>
+          <p:cNvPr id="4" name="Text 2"/>
           <p:cNvSpPr/>
           <p:nvPr/>
         </p:nvSpPr>
@@ -9072,15 +10776,15 @@
               <a:buNone/>
             </a:pPr>
             <a:r>
-              <a:rPr lang="en-US" sz="2600" dirty="0">
-                <a:solidFill>
-                  <a:srgbClr val="005EB8"/>
+              <a:rPr lang="en-US" sz="1800" dirty="0">
+                <a:solidFill>
+                  <a:srgbClr val="6B7480"/>
                 </a:solidFill>
                 <a:latin typeface="Goetheanum Schrift Leise" pitchFamily="34" charset="0"/>
                 <a:ea typeface="Goetheanum Schrift Leise" pitchFamily="34" charset="-122"/>
                 <a:cs typeface="Goetheanum Schrift Leise" pitchFamily="34" charset="-120"/>
               </a:rPr>
-              <a:t>01</a:t>
+              <a:t>1</a:t>
             </a:r>
             <a:endParaRPr lang="en-US" sz="2600" dirty="0"/>
           </a:p>
@@ -9088,7 +10792,7 @@
       </p:sp>
       <p:sp>
         <p:nvSpPr>
-          <p:cNvPr id="6" name="Text 3"/>
+          <p:cNvPr id="5" name="Text 3"/>
           <p:cNvSpPr/>
           <p:nvPr/>
         </p:nvSpPr>
@@ -9114,13 +10818,13 @@
               <a:buNone/>
             </a:pPr>
             <a:r>
-              <a:rPr lang="en-US" sz="1300" dirty="0">
+              <a:rPr lang="en-US" sz="2600" dirty="0">
                 <a:solidFill>
                   <a:srgbClr val="1A1A1A"/>
                 </a:solidFill>
-                <a:latin typeface="Goetheanum Schrift Laut" pitchFamily="34" charset="0"/>
-                <a:ea typeface="Goetheanum Schrift Laut" pitchFamily="34" charset="-122"/>
-                <a:cs typeface="Goetheanum Schrift Laut" pitchFamily="34" charset="-120"/>
+                <a:latin typeface="Goetheanum Schrift Deutlich" pitchFamily="34" charset="0"/>
+                <a:ea typeface="Goetheanum Schrift Deutlich" pitchFamily="34" charset="-122"/>
+                <a:cs typeface="Goetheanum Schrift Deutlich" pitchFamily="34" charset="-120"/>
               </a:rPr>
               <a:t>Rückblick</a:t>
             </a:r>
@@ -9134,7 +10838,7 @@
               <a:buNone/>
             </a:pPr>
             <a:r>
-              <a:rPr lang="en-US" sz="1300" dirty="0">
+              <a:rPr lang="en-US" sz="1500" dirty="0">
                 <a:solidFill>
                   <a:srgbClr val="6B7480"/>
                 </a:solidFill>
@@ -9150,7 +10854,7 @@
       </p:sp>
       <p:sp>
         <p:nvSpPr>
-          <p:cNvPr id="7" name="Text 4"/>
+          <p:cNvPr id="6" name="Text 4"/>
           <p:cNvSpPr/>
           <p:nvPr/>
         </p:nvSpPr>
@@ -9173,15 +10877,15 @@
               <a:buNone/>
             </a:pPr>
             <a:r>
-              <a:rPr lang="en-US" sz="2600" dirty="0">
-                <a:solidFill>
-                  <a:srgbClr val="005EB8"/>
+              <a:rPr lang="en-US" sz="1800" dirty="0">
+                <a:solidFill>
+                  <a:srgbClr val="6B7480"/>
                 </a:solidFill>
                 <a:latin typeface="Goetheanum Schrift Leise" pitchFamily="34" charset="0"/>
                 <a:ea typeface="Goetheanum Schrift Leise" pitchFamily="34" charset="-122"/>
                 <a:cs typeface="Goetheanum Schrift Leise" pitchFamily="34" charset="-120"/>
               </a:rPr>
-              <a:t>02</a:t>
+              <a:t>2</a:t>
             </a:r>
             <a:endParaRPr lang="en-US" sz="2600" dirty="0"/>
           </a:p>
@@ -9189,7 +10893,7 @@
       </p:sp>
       <p:sp>
         <p:nvSpPr>
-          <p:cNvPr id="8" name="Text 5"/>
+          <p:cNvPr id="7" name="Text 5"/>
           <p:cNvSpPr/>
           <p:nvPr/>
         </p:nvSpPr>
@@ -9215,13 +10919,13 @@
               <a:buNone/>
             </a:pPr>
             <a:r>
-              <a:rPr lang="en-US" sz="1300" dirty="0">
+              <a:rPr lang="en-US" sz="2600" dirty="0">
                 <a:solidFill>
                   <a:srgbClr val="1A1A1A"/>
                 </a:solidFill>
-                <a:latin typeface="Goetheanum Schrift Laut" pitchFamily="34" charset="0"/>
-                <a:ea typeface="Goetheanum Schrift Laut" pitchFamily="34" charset="-122"/>
-                <a:cs typeface="Goetheanum Schrift Laut" pitchFamily="34" charset="-120"/>
+                <a:latin typeface="Goetheanum Schrift Deutlich" pitchFamily="34" charset="0"/>
+                <a:ea typeface="Goetheanum Schrift Deutlich" pitchFamily="34" charset="-122"/>
+                <a:cs typeface="Goetheanum Schrift Deutlich" pitchFamily="34" charset="-120"/>
               </a:rPr>
               <a:t>Zahlen</a:t>
             </a:r>
@@ -9235,7 +10939,7 @@
               <a:buNone/>
             </a:pPr>
             <a:r>
-              <a:rPr lang="en-US" sz="1300" dirty="0">
+              <a:rPr lang="en-US" sz="1500" dirty="0">
                 <a:solidFill>
                   <a:srgbClr val="6B7480"/>
                 </a:solidFill>
@@ -9251,7 +10955,7 @@
       </p:sp>
       <p:sp>
         <p:nvSpPr>
-          <p:cNvPr id="9" name="Text 6"/>
+          <p:cNvPr id="8" name="Text 6"/>
           <p:cNvSpPr/>
           <p:nvPr/>
         </p:nvSpPr>
@@ -9274,15 +10978,15 @@
               <a:buNone/>
             </a:pPr>
             <a:r>
-              <a:rPr lang="en-US" sz="2600" dirty="0">
-                <a:solidFill>
-                  <a:srgbClr val="005EB8"/>
+              <a:rPr lang="en-US" sz="1800" dirty="0">
+                <a:solidFill>
+                  <a:srgbClr val="6B7480"/>
                 </a:solidFill>
                 <a:latin typeface="Goetheanum Schrift Leise" pitchFamily="34" charset="0"/>
                 <a:ea typeface="Goetheanum Schrift Leise" pitchFamily="34" charset="-122"/>
                 <a:cs typeface="Goetheanum Schrift Leise" pitchFamily="34" charset="-120"/>
               </a:rPr>
-              <a:t>03</a:t>
+              <a:t>3</a:t>
             </a:r>
             <a:endParaRPr lang="en-US" sz="2600" dirty="0"/>
           </a:p>
@@ -9290,7 +10994,7 @@
       </p:sp>
       <p:sp>
         <p:nvSpPr>
-          <p:cNvPr id="10" name="Text 7"/>
+          <p:cNvPr id="9" name="Text 7"/>
           <p:cNvSpPr/>
           <p:nvPr/>
         </p:nvSpPr>
@@ -9316,13 +11020,13 @@
               <a:buNone/>
             </a:pPr>
             <a:r>
-              <a:rPr lang="en-US" sz="1300" dirty="0">
+              <a:rPr lang="en-US" sz="2600" dirty="0">
                 <a:solidFill>
                   <a:srgbClr val="1A1A1A"/>
                 </a:solidFill>
-                <a:latin typeface="Goetheanum Schrift Laut" pitchFamily="34" charset="0"/>
-                <a:ea typeface="Goetheanum Schrift Laut" pitchFamily="34" charset="-122"/>
-                <a:cs typeface="Goetheanum Schrift Laut" pitchFamily="34" charset="-120"/>
+                <a:latin typeface="Goetheanum Schrift Deutlich" pitchFamily="34" charset="0"/>
+                <a:ea typeface="Goetheanum Schrift Deutlich" pitchFamily="34" charset="-122"/>
+                <a:cs typeface="Goetheanum Schrift Deutlich" pitchFamily="34" charset="-120"/>
               </a:rPr>
               <a:t>Einordnung</a:t>
             </a:r>
@@ -9336,7 +11040,7 @@
               <a:buNone/>
             </a:pPr>
             <a:r>
-              <a:rPr lang="en-US" sz="1300" dirty="0">
+              <a:rPr lang="en-US" sz="1500" dirty="0">
                 <a:solidFill>
                   <a:srgbClr val="6B7480"/>
                 </a:solidFill>
@@ -9352,7 +11056,7 @@
       </p:sp>
       <p:sp>
         <p:nvSpPr>
-          <p:cNvPr id="11" name="Text 8"/>
+          <p:cNvPr id="10" name="Text 8"/>
           <p:cNvSpPr/>
           <p:nvPr/>
         </p:nvSpPr>
@@ -9375,15 +11079,15 @@
               <a:buNone/>
             </a:pPr>
             <a:r>
-              <a:rPr lang="en-US" sz="2600" dirty="0">
-                <a:solidFill>
-                  <a:srgbClr val="005EB8"/>
+              <a:rPr lang="en-US" sz="1800" dirty="0">
+                <a:solidFill>
+                  <a:srgbClr val="6B7480"/>
                 </a:solidFill>
                 <a:latin typeface="Goetheanum Schrift Leise" pitchFamily="34" charset="0"/>
                 <a:ea typeface="Goetheanum Schrift Leise" pitchFamily="34" charset="-122"/>
                 <a:cs typeface="Goetheanum Schrift Leise" pitchFamily="34" charset="-120"/>
               </a:rPr>
-              <a:t>04</a:t>
+              <a:t>4</a:t>
             </a:r>
             <a:endParaRPr lang="en-US" sz="2600" dirty="0"/>
           </a:p>
@@ -9391,7 +11095,7 @@
       </p:sp>
       <p:sp>
         <p:nvSpPr>
-          <p:cNvPr id="12" name="Text 9"/>
+          <p:cNvPr id="11" name="Text 9"/>
           <p:cNvSpPr/>
           <p:nvPr/>
         </p:nvSpPr>
@@ -9417,13 +11121,13 @@
               <a:buNone/>
             </a:pPr>
             <a:r>
-              <a:rPr lang="en-US" sz="1300" dirty="0">
+              <a:rPr lang="en-US" sz="2600" dirty="0">
                 <a:solidFill>
                   <a:srgbClr val="1A1A1A"/>
                 </a:solidFill>
-                <a:latin typeface="Goetheanum Schrift Laut" pitchFamily="34" charset="0"/>
-                <a:ea typeface="Goetheanum Schrift Laut" pitchFamily="34" charset="-122"/>
-                <a:cs typeface="Goetheanum Schrift Laut" pitchFamily="34" charset="-120"/>
+                <a:latin typeface="Goetheanum Schrift Deutlich" pitchFamily="34" charset="0"/>
+                <a:ea typeface="Goetheanum Schrift Deutlich" pitchFamily="34" charset="-122"/>
+                <a:cs typeface="Goetheanum Schrift Deutlich" pitchFamily="34" charset="-120"/>
               </a:rPr>
               <a:t>Ausblick</a:t>
             </a:r>
@@ -9437,7 +11141,7 @@
               <a:buNone/>
             </a:pPr>
             <a:r>
-              <a:rPr lang="en-US" sz="1300" dirty="0">
+              <a:rPr lang="en-US" sz="1500" dirty="0">
                 <a:solidFill>
                   <a:srgbClr val="6B7480"/>
                 </a:solidFill>
@@ -9453,40 +11157,49 @@
       </p:sp>
       <p:sp>
         <p:nvSpPr>
-          <p:cNvPr id="13" name="Text 10"/>
-          <p:cNvSpPr/>
-          <p:nvPr/>
-        </p:nvSpPr>
-        <p:spPr>
-          <a:xfrm>
-            <a:off x="4654296" y="6995160"/>
-            <a:ext cx="5486400" cy="274320"/>
-          </a:xfrm>
-          <a:prstGeom prst="rect">
-            <a:avLst/>
-          </a:prstGeom>
-          <a:noFill/>
-          <a:ln/>
-        </p:spPr>
-        <p:txBody>
-          <a:bodyPr wrap="square" lIns="0" tIns="0" rIns="0" bIns="0" rtlCol="0" anchor="ctr"/>
-          <a:lstStyle/>
-          <a:p>
-            <a:pPr algn="r" indent="0" marL="0">
-              <a:buNone/>
-            </a:pPr>
-            <a:r>
-              <a:rPr lang="en-US" sz="900" dirty="0">
+          <p:cNvPr id="25" name="Slide Number Placeholder 0"/>
+          <p:cNvSpPr>
+            <a:spLocks noGrp="1"/>
+          </p:cNvSpPr>
+          <p:nvPr>
+            <p:ph type="sldNum" sz="quarter" idx="4294967295"/>
+          </p:nvPr>
+        </p:nvSpPr>
+        <p:spPr>
+          <a:xfrm>
+            <a:off x="9747504" y="6995160"/>
+            <a:ext cx="393192" cy="274320"/>
+          </a:xfrm>
+          <a:prstGeom prst="rect">
+            <a:avLst/>
+          </a:prstGeom>
+          <a:extLst>
+            <a:ext uri="{C572A759-6A51-4108-AA02-DFA0A04FC94B}">
+              <ma14:wrappingTextBoxFlag xmlns:ma14="http://schemas.microsoft.com/office/mac/drawingml/2011/main" val="0"/>
+            </a:ext>
+          </a:extLst>
+        </p:spPr>
+        <p:txBody>
+          <a:bodyPr anchor="ctr"/>
+          <a:lstStyle>
+            <a:lvl1pPr>
+              <a:defRPr sz="900">
                 <a:solidFill>
                   <a:srgbClr val="6B7480"/>
                 </a:solidFill>
-                <a:latin typeface="Goetheanum Schrift Klar" pitchFamily="34" charset="0"/>
-                <a:ea typeface="Goetheanum Schrift Klar" pitchFamily="34" charset="-122"/>
-                <a:cs typeface="Goetheanum Schrift Klar" pitchFamily="34" charset="-120"/>
-              </a:rPr>
-              <a:t>Titel der Präsentation · 00.00.2026 · 4</a:t>
-            </a:r>
-            <a:endParaRPr lang="en-US" sz="900" dirty="0"/>
+                <a:latin typeface="Goetheanum Schrift Klar"/>
+                <a:ea typeface="Goetheanum Schrift Klar"/>
+                <a:cs typeface="Goetheanum Schrift Klar"/>
+              </a:defRPr>
+            </a:lvl1pPr>
+          </a:lstStyle>
+          <a:p>
+            <a:pPr algn="l"/>
+            <a:fld id="{F7021451-1387-4CA6-816F-3879F97B5CBC}" type="slidenum">
+              <a:rPr b="0" lang="en-US"/>
+              <a:t>4</a:t>
+            </a:fld>
+            <a:endParaRPr lang="en-US"/>
           </a:p>
         </p:txBody>
       </p:sp>
@@ -9501,13 +11214,6 @@
 <file path=ppt/slides/slide5.xml><?xml version="1.0" encoding="utf-8"?>
 <p:sld xmlns:a="http://schemas.openxmlformats.org/drawingml/2006/main" xmlns:r="http://schemas.openxmlformats.org/officeDocument/2006/relationships" xmlns:p="http://schemas.openxmlformats.org/presentationml/2006/main">
   <p:cSld name="Slide 5">
-    <p:bg>
-      <p:bgPr>
-        <a:solidFill>
-          <a:srgbClr val="005EB8"/>
-        </a:solidFill>
-      </p:bgPr>
-    </p:bg>
     <p:spTree>
       <p:nvGrpSpPr>
         <p:cNvPr id="1" name=""/>
@@ -9522,35 +11228,13 @@
           <a:chExt cx="0" cy="0"/>
         </a:xfrm>
       </p:grpSpPr>
-      <p:pic>
-        <p:nvPicPr>
-          <p:cNvPr id="2" name="Image 0" descr="logo-goetheanum-white.png">    </p:cNvPr>
-          <p:cNvPicPr>
-            <a:picLocks noChangeAspect="1"/>
-          </p:cNvPicPr>
-          <p:nvPr/>
-        </p:nvPicPr>
-        <p:blipFill>
-          <a:blip r:embed="rId1"/>
-          <a:stretch>
-            <a:fillRect/>
-          </a:stretch>
-        </p:blipFill>
-        <p:spPr>
-          <a:xfrm>
-            <a:off x="548640" y="502920"/>
-            <a:ext cx="1088402" cy="182880"/>
-          </a:xfrm>
-          <a:prstGeom prst="rect">
-            <a:avLst/>
-          </a:prstGeom>
-        </p:spPr>
-      </p:pic>
-      <p:sp>
-        <p:nvSpPr>
-          <p:cNvPr id="3" name="Text 0"/>
-          <p:cNvSpPr/>
-          <p:nvPr/>
+      <p:sp>
+        <p:nvSpPr>
+          <p:cNvPr id="2" name="Text 1"/>
+          <p:cNvSpPr/>
+          <p:nvPr>
+            <p:ph idx="102" type="body" hasCustomPrompt="1"/>
+          </p:nvPr>
         </p:nvSpPr>
         <p:spPr>
           <a:xfrm>
@@ -9564,7 +11248,7 @@
           <a:ln/>
         </p:spPr>
         <p:txBody>
-          <a:bodyPr wrap="square" lIns="0" tIns="0" rIns="0" bIns="0" rtlCol="0" anchor="ctr"/>
+          <a:bodyPr wrap="square" lIns="0" tIns="0" rIns="0" bIns="0" rtlCol="0"/>
           <a:lstStyle/>
           <a:p>
             <a:pPr indent="0" marL="0">
@@ -9579,7 +11263,7 @@
                 <a:ea typeface="Goetheanum Schrift Leise" pitchFamily="34" charset="-122"/>
                 <a:cs typeface="Goetheanum Schrift Leise" pitchFamily="34" charset="-120"/>
               </a:rPr>
-              <a:t>01</a:t>
+              <a:t>1</a:t>
             </a:r>
             <a:endParaRPr lang="en-US" sz="5000" dirty="0"/>
           </a:p>
@@ -9587,9 +11271,11 @@
       </p:sp>
       <p:sp>
         <p:nvSpPr>
-          <p:cNvPr id="4" name="Text 1"/>
-          <p:cNvSpPr/>
-          <p:nvPr/>
+          <p:cNvPr id="3" name="Text 1"/>
+          <p:cNvSpPr/>
+          <p:nvPr>
+            <p:ph idx="103" type="title" hasCustomPrompt="1"/>
+          </p:nvPr>
         </p:nvSpPr>
         <p:spPr>
           <a:xfrm>
@@ -9603,7 +11289,7 @@
           <a:ln/>
         </p:spPr>
         <p:txBody>
-          <a:bodyPr wrap="square" lIns="0" tIns="0" rIns="0" bIns="0" rtlCol="0" anchor="ctr"/>
+          <a:bodyPr wrap="square" lIns="0" tIns="0" rIns="0" bIns="0" rtlCol="0"/>
           <a:lstStyle/>
           <a:p>
             <a:pPr indent="0" marL="0">
@@ -9614,9 +11300,9 @@
                 <a:solidFill>
                   <a:srgbClr val="FFFFFF"/>
                 </a:solidFill>
-                <a:latin typeface="Goetheanum Schrift Klar" pitchFamily="34" charset="0"/>
-                <a:ea typeface="Goetheanum Schrift Klar" pitchFamily="34" charset="-122"/>
-                <a:cs typeface="Goetheanum Schrift Klar" pitchFamily="34" charset="-120"/>
+                <a:latin typeface="Goetheanum Schrift Deutlich" pitchFamily="34" charset="0"/>
+                <a:ea typeface="Goetheanum Schrift Deutlich" pitchFamily="34" charset="-122"/>
+                <a:cs typeface="Goetheanum Schrift Deutlich" pitchFamily="34" charset="-120"/>
               </a:rPr>
               <a:t>Titel des Kapitels</a:t>
             </a:r>
@@ -9626,9 +11312,11 @@
       </p:sp>
       <p:sp>
         <p:nvSpPr>
-          <p:cNvPr id="5" name="Text 2"/>
-          <p:cNvSpPr/>
-          <p:nvPr/>
+          <p:cNvPr id="4" name="Text 1"/>
+          <p:cNvSpPr/>
+          <p:nvPr>
+            <p:ph idx="104" type="body" hasCustomPrompt="1"/>
+          </p:nvPr>
         </p:nvSpPr>
         <p:spPr>
           <a:xfrm>
@@ -9642,7 +11330,7 @@
           <a:ln/>
         </p:spPr>
         <p:txBody>
-          <a:bodyPr wrap="square" lIns="0" tIns="0" rIns="0" bIns="0" rtlCol="0" anchor="ctr"/>
+          <a:bodyPr wrap="square" lIns="0" tIns="0" rIns="0" bIns="0" rtlCol="0"/>
           <a:lstStyle/>
           <a:p>
             <a:pPr indent="0" marL="0">
@@ -9665,40 +11353,49 @@
       </p:sp>
       <p:sp>
         <p:nvSpPr>
-          <p:cNvPr id="6" name="Text 3"/>
-          <p:cNvSpPr/>
-          <p:nvPr/>
-        </p:nvSpPr>
-        <p:spPr>
-          <a:xfrm>
-            <a:off x="4654296" y="6995160"/>
-            <a:ext cx="5486400" cy="274320"/>
-          </a:xfrm>
-          <a:prstGeom prst="rect">
-            <a:avLst/>
-          </a:prstGeom>
-          <a:noFill/>
-          <a:ln/>
-        </p:spPr>
-        <p:txBody>
-          <a:bodyPr wrap="square" lIns="0" tIns="0" rIns="0" bIns="0" rtlCol="0" anchor="ctr"/>
-          <a:lstStyle/>
-          <a:p>
-            <a:pPr algn="r" indent="0" marL="0">
-              <a:buNone/>
-            </a:pPr>
-            <a:r>
-              <a:rPr lang="en-US" sz="900" dirty="0">
+          <p:cNvPr id="25" name="Slide Number Placeholder 0"/>
+          <p:cNvSpPr>
+            <a:spLocks noGrp="1"/>
+          </p:cNvSpPr>
+          <p:nvPr>
+            <p:ph type="sldNum" sz="quarter" idx="4294967295"/>
+          </p:nvPr>
+        </p:nvSpPr>
+        <p:spPr>
+          <a:xfrm>
+            <a:off x="9747504" y="6995160"/>
+            <a:ext cx="393192" cy="274320"/>
+          </a:xfrm>
+          <a:prstGeom prst="rect">
+            <a:avLst/>
+          </a:prstGeom>
+          <a:extLst>
+            <a:ext uri="{C572A759-6A51-4108-AA02-DFA0A04FC94B}">
+              <ma14:wrappingTextBoxFlag xmlns:ma14="http://schemas.microsoft.com/office/mac/drawingml/2011/main" val="0"/>
+            </a:ext>
+          </a:extLst>
+        </p:spPr>
+        <p:txBody>
+          <a:bodyPr anchor="ctr"/>
+          <a:lstStyle>
+            <a:lvl1pPr>
+              <a:defRPr sz="900">
                 <a:solidFill>
                   <a:srgbClr val="9CC3EC"/>
                 </a:solidFill>
-                <a:latin typeface="Goetheanum Schrift Klar" pitchFamily="34" charset="0"/>
-                <a:ea typeface="Goetheanum Schrift Klar" pitchFamily="34" charset="-122"/>
-                <a:cs typeface="Goetheanum Schrift Klar" pitchFamily="34" charset="-120"/>
-              </a:rPr>
-              <a:t>Titel der Präsentation · 00.00.2026 · 5</a:t>
-            </a:r>
-            <a:endParaRPr lang="en-US" sz="900" dirty="0"/>
+                <a:latin typeface="Goetheanum Schrift Klar"/>
+                <a:ea typeface="Goetheanum Schrift Klar"/>
+                <a:cs typeface="Goetheanum Schrift Klar"/>
+              </a:defRPr>
+            </a:lvl1pPr>
+          </a:lstStyle>
+          <a:p>
+            <a:pPr algn="l"/>
+            <a:fld id="{F7021451-1387-4CA6-816F-3879F97B5CBC}" type="slidenum">
+              <a:rPr b="0" lang="en-US"/>
+              <a:t>5</a:t>
+            </a:fld>
+            <a:endParaRPr lang="en-US"/>
           </a:p>
         </p:txBody>
       </p:sp>
@@ -9713,13 +11410,6 @@
 <file path=ppt/slides/slide6.xml><?xml version="1.0" encoding="utf-8"?>
 <p:sld xmlns:a="http://schemas.openxmlformats.org/drawingml/2006/main" xmlns:r="http://schemas.openxmlformats.org/officeDocument/2006/relationships" xmlns:p="http://schemas.openxmlformats.org/presentationml/2006/main">
   <p:cSld name="Slide 6">
-    <p:bg>
-      <p:bgPr>
-        <a:solidFill>
-          <a:srgbClr val="FFFFFF"/>
-        </a:solidFill>
-      </p:bgPr>
-    </p:bg>
     <p:spTree>
       <p:nvGrpSpPr>
         <p:cNvPr id="1" name=""/>
@@ -9734,35 +11424,13 @@
           <a:chExt cx="0" cy="0"/>
         </a:xfrm>
       </p:grpSpPr>
-      <p:pic>
-        <p:nvPicPr>
-          <p:cNvPr id="2" name="Image 0" descr="logo-goetheanum-blue.png">    </p:cNvPr>
-          <p:cNvPicPr>
-            <a:picLocks noChangeAspect="1"/>
-          </p:cNvPicPr>
-          <p:nvPr/>
-        </p:nvPicPr>
-        <p:blipFill>
-          <a:blip r:embed="rId1"/>
-          <a:stretch>
-            <a:fillRect/>
-          </a:stretch>
-        </p:blipFill>
-        <p:spPr>
-          <a:xfrm>
-            <a:off x="548640" y="502920"/>
-            <a:ext cx="1088402" cy="182880"/>
-          </a:xfrm>
-          <a:prstGeom prst="rect">
-            <a:avLst/>
-          </a:prstGeom>
-        </p:spPr>
-      </p:pic>
-      <p:sp>
-        <p:nvSpPr>
-          <p:cNvPr id="3" name="Text 0"/>
-          <p:cNvSpPr/>
-          <p:nvPr/>
+      <p:sp>
+        <p:nvSpPr>
+          <p:cNvPr id="2" name="Text 1"/>
+          <p:cNvSpPr/>
+          <p:nvPr>
+            <p:ph idx="102" type="body" hasCustomPrompt="1"/>
+          </p:nvPr>
         </p:nvSpPr>
         <p:spPr>
           <a:xfrm>
@@ -9776,7 +11444,7 @@
           <a:ln/>
         </p:spPr>
         <p:txBody>
-          <a:bodyPr wrap="square" lIns="0" tIns="0" rIns="0" bIns="0" rtlCol="0" anchor="ctr"/>
+          <a:bodyPr wrap="square" lIns="0" tIns="0" rIns="0" bIns="0" rtlCol="0"/>
           <a:lstStyle/>
           <a:p>
             <a:pPr indent="0" marL="0">
@@ -9791,7 +11459,7 @@
                 <a:ea typeface="Goetheanum Schrift Klar" pitchFamily="34" charset="-122"/>
                 <a:cs typeface="Goetheanum Schrift Klar" pitchFamily="34" charset="-120"/>
               </a:rPr>
-              <a:t>Kapitel 01</a:t>
+              <a:t>Kapitel 1</a:t>
             </a:r>
             <a:endParaRPr lang="en-US" sz="1300" dirty="0"/>
           </a:p>
@@ -9799,9 +11467,11 @@
       </p:sp>
       <p:sp>
         <p:nvSpPr>
-          <p:cNvPr id="4" name="Text 1"/>
-          <p:cNvSpPr/>
-          <p:nvPr/>
+          <p:cNvPr id="3" name="Text 1"/>
+          <p:cNvSpPr/>
+          <p:nvPr>
+            <p:ph idx="103" type="title" hasCustomPrompt="1"/>
+          </p:nvPr>
         </p:nvSpPr>
         <p:spPr>
           <a:xfrm>
@@ -9815,7 +11485,7 @@
           <a:ln/>
         </p:spPr>
         <p:txBody>
-          <a:bodyPr wrap="square" lIns="0" tIns="0" rIns="0" bIns="0" rtlCol="0" anchor="ctr"/>
+          <a:bodyPr wrap="square" lIns="0" tIns="0" rIns="0" bIns="0" rtlCol="0"/>
           <a:lstStyle/>
           <a:p>
             <a:pPr indent="0" marL="0">
@@ -9826,11 +11496,11 @@
                 <a:solidFill>
                   <a:srgbClr val="1A1A1A"/>
                 </a:solidFill>
-                <a:latin typeface="Goetheanum Schrift Klar" pitchFamily="34" charset="0"/>
-                <a:ea typeface="Goetheanum Schrift Klar" pitchFamily="34" charset="-122"/>
-                <a:cs typeface="Goetheanum Schrift Klar" pitchFamily="34" charset="-120"/>
-              </a:rPr>
-              <a:t>Folientitel in Klar 26</a:t>
+                <a:latin typeface="Goetheanum Schrift Deutlich" pitchFamily="34" charset="0"/>
+                <a:ea typeface="Goetheanum Schrift Deutlich" pitchFamily="34" charset="-122"/>
+                <a:cs typeface="Goetheanum Schrift Deutlich" pitchFamily="34" charset="-120"/>
+              </a:rPr>
+              <a:t>Folientitel in Deutlich 26</a:t>
             </a:r>
             <a:endParaRPr lang="en-US" sz="2600" dirty="0"/>
           </a:p>
@@ -9838,7 +11508,7 @@
       </p:sp>
       <p:sp>
         <p:nvSpPr>
-          <p:cNvPr id="5" name="Text 2"/>
+          <p:cNvPr id="4" name="Text 2"/>
           <p:cNvSpPr/>
           <p:nvPr/>
         </p:nvSpPr>
@@ -9900,7 +11570,7 @@
       </p:sp>
       <p:sp>
         <p:nvSpPr>
-          <p:cNvPr id="6" name="Text 3"/>
+          <p:cNvPr id="5" name="Text 3"/>
           <p:cNvSpPr/>
           <p:nvPr/>
         </p:nvSpPr>
@@ -10060,7 +11730,7 @@
       </p:sp>
       <p:sp>
         <p:nvSpPr>
-          <p:cNvPr id="7" name="Shape 4"/>
+          <p:cNvPr id="6" name="Shape 4"/>
           <p:cNvSpPr/>
           <p:nvPr/>
         </p:nvSpPr>
@@ -10082,7 +11752,7 @@
       </p:sp>
       <p:sp>
         <p:nvSpPr>
-          <p:cNvPr id="8" name="Text 5"/>
+          <p:cNvPr id="7" name="Text 5"/>
           <p:cNvSpPr/>
           <p:nvPr/>
         </p:nvSpPr>
@@ -10115,9 +11785,9 @@
                 <a:solidFill>
                   <a:srgbClr val="005EB8"/>
                 </a:solidFill>
-                <a:latin typeface="Goetheanum Schrift Laut" pitchFamily="34" charset="0"/>
-                <a:ea typeface="Goetheanum Schrift Laut" pitchFamily="34" charset="-122"/>
-                <a:cs typeface="Goetheanum Schrift Laut" pitchFamily="34" charset="-120"/>
+                <a:latin typeface="Goetheanum Schrift Deutlich" pitchFamily="34" charset="0"/>
+                <a:ea typeface="Goetheanum Schrift Deutlich" pitchFamily="34" charset="-122"/>
+                <a:cs typeface="Goetheanum Schrift Deutlich" pitchFamily="34" charset="-120"/>
               </a:rPr>
               <a:t>Merkkasten</a:t>
             </a:r>
@@ -10187,40 +11857,49 @@
       </p:sp>
       <p:sp>
         <p:nvSpPr>
-          <p:cNvPr id="9" name="Text 6"/>
-          <p:cNvSpPr/>
-          <p:nvPr/>
-        </p:nvSpPr>
-        <p:spPr>
-          <a:xfrm>
-            <a:off x="4654296" y="6995160"/>
-            <a:ext cx="5486400" cy="274320"/>
-          </a:xfrm>
-          <a:prstGeom prst="rect">
-            <a:avLst/>
-          </a:prstGeom>
-          <a:noFill/>
-          <a:ln/>
-        </p:spPr>
-        <p:txBody>
-          <a:bodyPr wrap="square" lIns="0" tIns="0" rIns="0" bIns="0" rtlCol="0" anchor="ctr"/>
-          <a:lstStyle/>
-          <a:p>
-            <a:pPr algn="r" indent="0" marL="0">
-              <a:buNone/>
-            </a:pPr>
-            <a:r>
-              <a:rPr lang="en-US" sz="900" dirty="0">
+          <p:cNvPr id="25" name="Slide Number Placeholder 0"/>
+          <p:cNvSpPr>
+            <a:spLocks noGrp="1"/>
+          </p:cNvSpPr>
+          <p:nvPr>
+            <p:ph type="sldNum" sz="quarter" idx="4294967295"/>
+          </p:nvPr>
+        </p:nvSpPr>
+        <p:spPr>
+          <a:xfrm>
+            <a:off x="9747504" y="6995160"/>
+            <a:ext cx="393192" cy="274320"/>
+          </a:xfrm>
+          <a:prstGeom prst="rect">
+            <a:avLst/>
+          </a:prstGeom>
+          <a:extLst>
+            <a:ext uri="{C572A759-6A51-4108-AA02-DFA0A04FC94B}">
+              <ma14:wrappingTextBoxFlag xmlns:ma14="http://schemas.microsoft.com/office/mac/drawingml/2011/main" val="0"/>
+            </a:ext>
+          </a:extLst>
+        </p:spPr>
+        <p:txBody>
+          <a:bodyPr anchor="ctr"/>
+          <a:lstStyle>
+            <a:lvl1pPr>
+              <a:defRPr sz="900">
                 <a:solidFill>
                   <a:srgbClr val="6B7480"/>
                 </a:solidFill>
-                <a:latin typeface="Goetheanum Schrift Klar" pitchFamily="34" charset="0"/>
-                <a:ea typeface="Goetheanum Schrift Klar" pitchFamily="34" charset="-122"/>
-                <a:cs typeface="Goetheanum Schrift Klar" pitchFamily="34" charset="-120"/>
-              </a:rPr>
-              <a:t>Titel der Präsentation · 00.00.2026 · 6</a:t>
-            </a:r>
-            <a:endParaRPr lang="en-US" sz="900" dirty="0"/>
+                <a:latin typeface="Goetheanum Schrift Klar"/>
+                <a:ea typeface="Goetheanum Schrift Klar"/>
+                <a:cs typeface="Goetheanum Schrift Klar"/>
+              </a:defRPr>
+            </a:lvl1pPr>
+          </a:lstStyle>
+          <a:p>
+            <a:pPr algn="l"/>
+            <a:fld id="{F7021451-1387-4CA6-816F-3879F97B5CBC}" type="slidenum">
+              <a:rPr b="0" lang="en-US"/>
+              <a:t>6</a:t>
+            </a:fld>
+            <a:endParaRPr lang="en-US"/>
           </a:p>
         </p:txBody>
       </p:sp>
@@ -10235,13 +11914,6 @@
 <file path=ppt/slides/slide7.xml><?xml version="1.0" encoding="utf-8"?>
 <p:sld xmlns:a="http://schemas.openxmlformats.org/drawingml/2006/main" xmlns:r="http://schemas.openxmlformats.org/officeDocument/2006/relationships" xmlns:p="http://schemas.openxmlformats.org/presentationml/2006/main">
   <p:cSld name="Slide 7">
-    <p:bg>
-      <p:bgPr>
-        <a:solidFill>
-          <a:srgbClr val="FFFFFF"/>
-        </a:solidFill>
-      </p:bgPr>
-    </p:bg>
     <p:spTree>
       <p:nvGrpSpPr>
         <p:cNvPr id="1" name=""/>
@@ -10256,35 +11928,13 @@
           <a:chExt cx="0" cy="0"/>
         </a:xfrm>
       </p:grpSpPr>
-      <p:pic>
-        <p:nvPicPr>
-          <p:cNvPr id="2" name="Image 0" descr="logo-goetheanum-blue.png">    </p:cNvPr>
-          <p:cNvPicPr>
-            <a:picLocks noChangeAspect="1"/>
-          </p:cNvPicPr>
-          <p:nvPr/>
-        </p:nvPicPr>
-        <p:blipFill>
-          <a:blip r:embed="rId1"/>
-          <a:stretch>
-            <a:fillRect/>
-          </a:stretch>
-        </p:blipFill>
-        <p:spPr>
-          <a:xfrm>
-            <a:off x="548640" y="502920"/>
-            <a:ext cx="1088402" cy="182880"/>
-          </a:xfrm>
-          <a:prstGeom prst="rect">
-            <a:avLst/>
-          </a:prstGeom>
-        </p:spPr>
-      </p:pic>
-      <p:sp>
-        <p:nvSpPr>
-          <p:cNvPr id="3" name="Text 0"/>
-          <p:cNvSpPr/>
-          <p:nvPr/>
+      <p:sp>
+        <p:nvSpPr>
+          <p:cNvPr id="2" name="Text 1"/>
+          <p:cNvSpPr/>
+          <p:nvPr>
+            <p:ph idx="102" type="body" hasCustomPrompt="1"/>
+          </p:nvPr>
         </p:nvSpPr>
         <p:spPr>
           <a:xfrm>
@@ -10298,7 +11948,7 @@
           <a:ln/>
         </p:spPr>
         <p:txBody>
-          <a:bodyPr wrap="square" lIns="0" tIns="0" rIns="0" bIns="0" rtlCol="0" anchor="ctr"/>
+          <a:bodyPr wrap="square" lIns="0" tIns="0" rIns="0" bIns="0" rtlCol="0"/>
           <a:lstStyle/>
           <a:p>
             <a:pPr indent="0" marL="0">
@@ -10313,7 +11963,7 @@
                 <a:ea typeface="Goetheanum Schrift Klar" pitchFamily="34" charset="-122"/>
                 <a:cs typeface="Goetheanum Schrift Klar" pitchFamily="34" charset="-120"/>
               </a:rPr>
-              <a:t>Kapitel 01</a:t>
+              <a:t>Kapitel 1</a:t>
             </a:r>
             <a:endParaRPr lang="en-US" sz="1300" dirty="0"/>
           </a:p>
@@ -10321,9 +11971,11 @@
       </p:sp>
       <p:sp>
         <p:nvSpPr>
-          <p:cNvPr id="4" name="Text 1"/>
-          <p:cNvSpPr/>
-          <p:nvPr/>
+          <p:cNvPr id="3" name="Text 1"/>
+          <p:cNvSpPr/>
+          <p:nvPr>
+            <p:ph idx="103" type="title" hasCustomPrompt="1"/>
+          </p:nvPr>
         </p:nvSpPr>
         <p:spPr>
           <a:xfrm>
@@ -10337,6 +11989,45 @@
           <a:ln/>
         </p:spPr>
         <p:txBody>
+          <a:bodyPr wrap="square" lIns="0" tIns="0" rIns="0" bIns="0" rtlCol="0"/>
+          <a:lstStyle/>
+          <a:p>
+            <a:pPr indent="0" marL="0">
+              <a:buNone/>
+            </a:pPr>
+            <a:r>
+              <a:rPr lang="en-US" sz="2600" dirty="0">
+                <a:solidFill>
+                  <a:srgbClr val="1A1A1A"/>
+                </a:solidFill>
+                <a:latin typeface="Goetheanum Schrift Deutlich" pitchFamily="34" charset="0"/>
+                <a:ea typeface="Goetheanum Schrift Deutlich" pitchFamily="34" charset="-122"/>
+                <a:cs typeface="Goetheanum Schrift Deutlich" pitchFamily="34" charset="-120"/>
+              </a:rPr>
+              <a:t>Zwei Spalten, ein Gedanke</a:t>
+            </a:r>
+            <a:endParaRPr lang="en-US" sz="2600" dirty="0"/>
+          </a:p>
+        </p:txBody>
+      </p:sp>
+      <p:sp>
+        <p:nvSpPr>
+          <p:cNvPr id="4" name="Text 2"/>
+          <p:cNvSpPr/>
+          <p:nvPr/>
+        </p:nvSpPr>
+        <p:spPr>
+          <a:xfrm>
+            <a:off x="548640" y="2560320"/>
+            <a:ext cx="4206240" cy="320040"/>
+          </a:xfrm>
+          <a:prstGeom prst="rect">
+            <a:avLst/>
+          </a:prstGeom>
+          <a:noFill/>
+          <a:ln/>
+        </p:spPr>
+        <p:txBody>
           <a:bodyPr wrap="square" lIns="0" tIns="0" rIns="0" bIns="0" rtlCol="0" anchor="ctr"/>
           <a:lstStyle/>
           <a:p>
@@ -10344,7 +12035,49 @@
               <a:buNone/>
             </a:pPr>
             <a:r>
-              <a:rPr lang="en-US" sz="2600" dirty="0">
+              <a:rPr lang="en-US" sz="1300" dirty="0">
+                <a:solidFill>
+                  <a:srgbClr val="005EB8"/>
+                </a:solidFill>
+                <a:latin typeface="Goetheanum Schrift Deutlich" pitchFamily="34" charset="0"/>
+                <a:ea typeface="Goetheanum Schrift Deutlich" pitchFamily="34" charset="-122"/>
+                <a:cs typeface="Goetheanum Schrift Deutlich" pitchFamily="34" charset="-120"/>
+              </a:rPr>
+              <a:t>Heute</a:t>
+            </a:r>
+            <a:endParaRPr lang="en-US" sz="1300" dirty="0"/>
+          </a:p>
+        </p:txBody>
+      </p:sp>
+      <p:sp>
+        <p:nvSpPr>
+          <p:cNvPr id="5" name="Text 3"/>
+          <p:cNvSpPr/>
+          <p:nvPr/>
+        </p:nvSpPr>
+        <p:spPr>
+          <a:xfrm>
+            <a:off x="548640" y="2971800"/>
+            <a:ext cx="4206240" cy="1371600"/>
+          </a:xfrm>
+          <a:prstGeom prst="rect">
+            <a:avLst/>
+          </a:prstGeom>
+          <a:noFill/>
+          <a:ln/>
+        </p:spPr>
+        <p:txBody>
+          <a:bodyPr wrap="square" lIns="0" tIns="0" rIns="0" bIns="0" rtlCol="0" anchor="ctr"/>
+          <a:lstStyle/>
+          <a:p>
+            <a:pPr indent="0" marL="0">
+              <a:lnSpc>
+                <a:spcPct val="130000"/>
+              </a:lnSpc>
+              <a:buNone/>
+            </a:pPr>
+            <a:r>
+              <a:rPr lang="en-US" sz="1300" dirty="0">
                 <a:solidFill>
                   <a:srgbClr val="1A1A1A"/>
                 </a:solidFill>
@@ -10352,71 +12085,10 @@
                 <a:ea typeface="Goetheanum Schrift Klar" pitchFamily="34" charset="-122"/>
                 <a:cs typeface="Goetheanum Schrift Klar" pitchFamily="34" charset="-120"/>
               </a:rPr>
-              <a:t>Zwei Spalten, ein Gedanke</a:t>
-            </a:r>
-            <a:endParaRPr lang="en-US" sz="2600" dirty="0"/>
-          </a:p>
-        </p:txBody>
-      </p:sp>
-      <p:sp>
-        <p:nvSpPr>
-          <p:cNvPr id="5" name="Text 2"/>
-          <p:cNvSpPr/>
-          <p:nvPr/>
-        </p:nvSpPr>
-        <p:spPr>
-          <a:xfrm>
-            <a:off x="548640" y="2560320"/>
-            <a:ext cx="4206240" cy="320040"/>
-          </a:xfrm>
-          <a:prstGeom prst="rect">
-            <a:avLst/>
-          </a:prstGeom>
-          <a:noFill/>
-          <a:ln/>
-        </p:spPr>
-        <p:txBody>
-          <a:bodyPr wrap="square" lIns="0" tIns="0" rIns="0" bIns="0" rtlCol="0" anchor="ctr"/>
-          <a:lstStyle/>
-          <a:p>
-            <a:pPr indent="0" marL="0">
-              <a:buNone/>
-            </a:pPr>
-            <a:r>
-              <a:rPr lang="en-US" sz="1300" dirty="0">
-                <a:solidFill>
-                  <a:srgbClr val="005EB8"/>
-                </a:solidFill>
-                <a:latin typeface="Goetheanum Schrift Laut" pitchFamily="34" charset="0"/>
-                <a:ea typeface="Goetheanum Schrift Laut" pitchFamily="34" charset="-122"/>
-                <a:cs typeface="Goetheanum Schrift Laut" pitchFamily="34" charset="-120"/>
-              </a:rPr>
-              <a:t>Heute</a:t>
+              <a:t>Beschreibung des Ist-Zustands.</a:t>
             </a:r>
             <a:endParaRPr lang="en-US" sz="1300" dirty="0"/>
           </a:p>
-        </p:txBody>
-      </p:sp>
-      <p:sp>
-        <p:nvSpPr>
-          <p:cNvPr id="6" name="Text 3"/>
-          <p:cNvSpPr/>
-          <p:nvPr/>
-        </p:nvSpPr>
-        <p:spPr>
-          <a:xfrm>
-            <a:off x="548640" y="2971800"/>
-            <a:ext cx="4206240" cy="1371600"/>
-          </a:xfrm>
-          <a:prstGeom prst="rect">
-            <a:avLst/>
-          </a:prstGeom>
-          <a:noFill/>
-          <a:ln/>
-        </p:spPr>
-        <p:txBody>
-          <a:bodyPr wrap="square" lIns="0" tIns="0" rIns="0" bIns="0" rtlCol="0" anchor="ctr"/>
-          <a:lstStyle/>
           <a:p>
             <a:pPr indent="0" marL="0">
               <a:lnSpc>
@@ -10433,7 +12105,7 @@
                 <a:ea typeface="Goetheanum Schrift Klar" pitchFamily="34" charset="-122"/>
                 <a:cs typeface="Goetheanum Schrift Klar" pitchFamily="34" charset="-120"/>
               </a:rPr>
-              <a:t>Beschreibung des Ist-Zustands.</a:t>
+              <a:t>Beide Spalten beginnen oben</a:t>
             </a:r>
             <a:endParaRPr lang="en-US" sz="1300" dirty="0"/>
           </a:p>
@@ -10453,10 +12125,71 @@
                 <a:ea typeface="Goetheanum Schrift Klar" pitchFamily="34" charset="-122"/>
                 <a:cs typeface="Goetheanum Schrift Klar" pitchFamily="34" charset="-120"/>
               </a:rPr>
-              <a:t>Beide Spalten beginnen oben</a:t>
+              <a:t>auf derselben Höhe.</a:t>
             </a:r>
             <a:endParaRPr lang="en-US" sz="1300" dirty="0"/>
           </a:p>
+        </p:txBody>
+      </p:sp>
+      <p:sp>
+        <p:nvSpPr>
+          <p:cNvPr id="6" name="Text 4"/>
+          <p:cNvSpPr/>
+          <p:nvPr/>
+        </p:nvSpPr>
+        <p:spPr>
+          <a:xfrm>
+            <a:off x="5577840" y="2560320"/>
+            <a:ext cx="4206240" cy="320040"/>
+          </a:xfrm>
+          <a:prstGeom prst="rect">
+            <a:avLst/>
+          </a:prstGeom>
+          <a:noFill/>
+          <a:ln/>
+        </p:spPr>
+        <p:txBody>
+          <a:bodyPr wrap="square" lIns="0" tIns="0" rIns="0" bIns="0" rtlCol="0" anchor="ctr"/>
+          <a:lstStyle/>
+          <a:p>
+            <a:pPr indent="0" marL="0">
+              <a:buNone/>
+            </a:pPr>
+            <a:r>
+              <a:rPr lang="en-US" sz="1300" dirty="0">
+                <a:solidFill>
+                  <a:srgbClr val="005EB8"/>
+                </a:solidFill>
+                <a:latin typeface="Goetheanum Schrift Deutlich" pitchFamily="34" charset="0"/>
+                <a:ea typeface="Goetheanum Schrift Deutlich" pitchFamily="34" charset="-122"/>
+                <a:cs typeface="Goetheanum Schrift Deutlich" pitchFamily="34" charset="-120"/>
+              </a:rPr>
+              <a:t>Morgen</a:t>
+            </a:r>
+            <a:endParaRPr lang="en-US" sz="1300" dirty="0"/>
+          </a:p>
+        </p:txBody>
+      </p:sp>
+      <p:sp>
+        <p:nvSpPr>
+          <p:cNvPr id="7" name="Text 5"/>
+          <p:cNvSpPr/>
+          <p:nvPr/>
+        </p:nvSpPr>
+        <p:spPr>
+          <a:xfrm>
+            <a:off x="5577840" y="2971800"/>
+            <a:ext cx="4206240" cy="1371600"/>
+          </a:xfrm>
+          <a:prstGeom prst="rect">
+            <a:avLst/>
+          </a:prstGeom>
+          <a:noFill/>
+          <a:ln/>
+        </p:spPr>
+        <p:txBody>
+          <a:bodyPr wrap="square" lIns="0" tIns="0" rIns="0" bIns="0" rtlCol="0" anchor="ctr"/>
+          <a:lstStyle/>
           <a:p>
             <a:pPr indent="0" marL="0">
               <a:lnSpc>
@@ -10473,71 +12206,10 @@
                 <a:ea typeface="Goetheanum Schrift Klar" pitchFamily="34" charset="-122"/>
                 <a:cs typeface="Goetheanum Schrift Klar" pitchFamily="34" charset="-120"/>
               </a:rPr>
-              <a:t>auf derselben Höhe.</a:t>
+              <a:t>Beschreibung des Ziel-Zustands.</a:t>
             </a:r>
             <a:endParaRPr lang="en-US" sz="1300" dirty="0"/>
           </a:p>
-        </p:txBody>
-      </p:sp>
-      <p:sp>
-        <p:nvSpPr>
-          <p:cNvPr id="7" name="Text 4"/>
-          <p:cNvSpPr/>
-          <p:nvPr/>
-        </p:nvSpPr>
-        <p:spPr>
-          <a:xfrm>
-            <a:off x="5577840" y="2560320"/>
-            <a:ext cx="4206240" cy="320040"/>
-          </a:xfrm>
-          <a:prstGeom prst="rect">
-            <a:avLst/>
-          </a:prstGeom>
-          <a:noFill/>
-          <a:ln/>
-        </p:spPr>
-        <p:txBody>
-          <a:bodyPr wrap="square" lIns="0" tIns="0" rIns="0" bIns="0" rtlCol="0" anchor="ctr"/>
-          <a:lstStyle/>
-          <a:p>
-            <a:pPr indent="0" marL="0">
-              <a:buNone/>
-            </a:pPr>
-            <a:r>
-              <a:rPr lang="en-US" sz="1300" dirty="0">
-                <a:solidFill>
-                  <a:srgbClr val="005EB8"/>
-                </a:solidFill>
-                <a:latin typeface="Goetheanum Schrift Laut" pitchFamily="34" charset="0"/>
-                <a:ea typeface="Goetheanum Schrift Laut" pitchFamily="34" charset="-122"/>
-                <a:cs typeface="Goetheanum Schrift Laut" pitchFamily="34" charset="-120"/>
-              </a:rPr>
-              <a:t>Morgen</a:t>
-            </a:r>
-            <a:endParaRPr lang="en-US" sz="1300" dirty="0"/>
-          </a:p>
-        </p:txBody>
-      </p:sp>
-      <p:sp>
-        <p:nvSpPr>
-          <p:cNvPr id="8" name="Text 5"/>
-          <p:cNvSpPr/>
-          <p:nvPr/>
-        </p:nvSpPr>
-        <p:spPr>
-          <a:xfrm>
-            <a:off x="5577840" y="2971800"/>
-            <a:ext cx="4206240" cy="1371600"/>
-          </a:xfrm>
-          <a:prstGeom prst="rect">
-            <a:avLst/>
-          </a:prstGeom>
-          <a:noFill/>
-          <a:ln/>
-        </p:spPr>
-        <p:txBody>
-          <a:bodyPr wrap="square" lIns="0" tIns="0" rIns="0" bIns="0" rtlCol="0" anchor="ctr"/>
-          <a:lstStyle/>
           <a:p>
             <a:pPr indent="0" marL="0">
               <a:lnSpc>
@@ -10554,7 +12226,7 @@
                 <a:ea typeface="Goetheanum Schrift Klar" pitchFamily="34" charset="-122"/>
                 <a:cs typeface="Goetheanum Schrift Klar" pitchFamily="34" charset="-120"/>
               </a:rPr>
-              <a:t>Beschreibung des Ziel-Zustands.</a:t>
+              <a:t>Zwischentitel in Laut 13,</a:t>
             </a:r>
             <a:endParaRPr lang="en-US" sz="1300" dirty="0"/>
           </a:p>
@@ -10574,35 +12246,15 @@
                 <a:ea typeface="Goetheanum Schrift Klar" pitchFamily="34" charset="-122"/>
                 <a:cs typeface="Goetheanum Schrift Klar" pitchFamily="34" charset="-120"/>
               </a:rPr>
-              <a:t>Zwischentitel in Laut 13,</a:t>
+              <a:t>der Text in Klar 13.</a:t>
             </a:r>
             <a:endParaRPr lang="en-US" sz="1300" dirty="0"/>
           </a:p>
-          <a:p>
-            <a:pPr indent="0" marL="0">
-              <a:lnSpc>
-                <a:spcPct val="130000"/>
-              </a:lnSpc>
-              <a:buNone/>
-            </a:pPr>
-            <a:r>
-              <a:rPr lang="en-US" sz="1300" dirty="0">
-                <a:solidFill>
-                  <a:srgbClr val="1A1A1A"/>
-                </a:solidFill>
-                <a:latin typeface="Goetheanum Schrift Klar" pitchFamily="34" charset="0"/>
-                <a:ea typeface="Goetheanum Schrift Klar" pitchFamily="34" charset="-122"/>
-                <a:cs typeface="Goetheanum Schrift Klar" pitchFamily="34" charset="-120"/>
-              </a:rPr>
-              <a:t>der Text in Klar 13.</a:t>
-            </a:r>
-            <a:endParaRPr lang="en-US" sz="1300" dirty="0"/>
-          </a:p>
-        </p:txBody>
-      </p:sp>
-      <p:sp>
-        <p:nvSpPr>
-          <p:cNvPr id="9" name="Text 6"/>
+        </p:txBody>
+      </p:sp>
+      <p:sp>
+        <p:nvSpPr>
+          <p:cNvPr id="8" name="Text 6"/>
           <p:cNvSpPr/>
           <p:nvPr/>
         </p:nvSpPr>
@@ -10641,40 +12293,49 @@
       </p:sp>
       <p:sp>
         <p:nvSpPr>
-          <p:cNvPr id="10" name="Text 7"/>
-          <p:cNvSpPr/>
-          <p:nvPr/>
-        </p:nvSpPr>
-        <p:spPr>
-          <a:xfrm>
-            <a:off x="4654296" y="6995160"/>
-            <a:ext cx="5486400" cy="274320"/>
-          </a:xfrm>
-          <a:prstGeom prst="rect">
-            <a:avLst/>
-          </a:prstGeom>
-          <a:noFill/>
-          <a:ln/>
-        </p:spPr>
-        <p:txBody>
-          <a:bodyPr wrap="square" lIns="0" tIns="0" rIns="0" bIns="0" rtlCol="0" anchor="ctr"/>
-          <a:lstStyle/>
-          <a:p>
-            <a:pPr algn="r" indent="0" marL="0">
-              <a:buNone/>
-            </a:pPr>
-            <a:r>
-              <a:rPr lang="en-US" sz="900" dirty="0">
+          <p:cNvPr id="25" name="Slide Number Placeholder 0"/>
+          <p:cNvSpPr>
+            <a:spLocks noGrp="1"/>
+          </p:cNvSpPr>
+          <p:nvPr>
+            <p:ph type="sldNum" sz="quarter" idx="4294967295"/>
+          </p:nvPr>
+        </p:nvSpPr>
+        <p:spPr>
+          <a:xfrm>
+            <a:off x="9747504" y="6995160"/>
+            <a:ext cx="393192" cy="274320"/>
+          </a:xfrm>
+          <a:prstGeom prst="rect">
+            <a:avLst/>
+          </a:prstGeom>
+          <a:extLst>
+            <a:ext uri="{C572A759-6A51-4108-AA02-DFA0A04FC94B}">
+              <ma14:wrappingTextBoxFlag xmlns:ma14="http://schemas.microsoft.com/office/mac/drawingml/2011/main" val="0"/>
+            </a:ext>
+          </a:extLst>
+        </p:spPr>
+        <p:txBody>
+          <a:bodyPr anchor="ctr"/>
+          <a:lstStyle>
+            <a:lvl1pPr>
+              <a:defRPr sz="900">
                 <a:solidFill>
                   <a:srgbClr val="6B7480"/>
                 </a:solidFill>
-                <a:latin typeface="Goetheanum Schrift Klar" pitchFamily="34" charset="0"/>
-                <a:ea typeface="Goetheanum Schrift Klar" pitchFamily="34" charset="-122"/>
-                <a:cs typeface="Goetheanum Schrift Klar" pitchFamily="34" charset="-120"/>
-              </a:rPr>
-              <a:t>Titel der Präsentation · 00.00.2026 · 7</a:t>
-            </a:r>
-            <a:endParaRPr lang="en-US" sz="900" dirty="0"/>
+                <a:latin typeface="Goetheanum Schrift Klar"/>
+                <a:ea typeface="Goetheanum Schrift Klar"/>
+                <a:cs typeface="Goetheanum Schrift Klar"/>
+              </a:defRPr>
+            </a:lvl1pPr>
+          </a:lstStyle>
+          <a:p>
+            <a:pPr algn="l"/>
+            <a:fld id="{F7021451-1387-4CA6-816F-3879F97B5CBC}" type="slidenum">
+              <a:rPr b="0" lang="en-US"/>
+              <a:t>7</a:t>
+            </a:fld>
+            <a:endParaRPr lang="en-US"/>
           </a:p>
         </p:txBody>
       </p:sp>
@@ -10705,11 +12366,13 @@
       </p:grpSpPr>
       <p:pic>
         <p:nvPicPr>
-          <p:cNvPr id="2" name="Image 0" descr="foto-bau-voll.jpg">    </p:cNvPr>
+          <p:cNvPr id="2" name="Image 0" descr="Das Goetheanum in Dornach: die Westfassade mit dem grossen Fenster, gesehen durch blühenden Lavendel"/>
           <p:cNvPicPr>
             <a:picLocks noChangeAspect="1"/>
           </p:cNvPicPr>
-          <p:nvPr/>
+          <p:nvPr>
+            <p:ph idx="100" hasCustomPrompt="1"/>
+          </p:nvPr>
         </p:nvPicPr>
         <p:blipFill>
           <a:blip r:embed="rId1"/>
@@ -10731,7 +12394,9 @@
         <p:nvSpPr>
           <p:cNvPr id="3" name="Text 0"/>
           <p:cNvSpPr/>
-          <p:nvPr/>
+          <p:nvPr>
+            <p:ph idx="101" type="body" hasCustomPrompt="1"/>
+          </p:nvPr>
         </p:nvSpPr>
         <p:spPr>
           <a:xfrm>
@@ -10760,7 +12425,7 @@
                 <a:ea typeface="Goetheanum Schrift Klar" pitchFamily="34" charset="-122"/>
                 <a:cs typeface="Goetheanum Schrift Klar" pitchFamily="34" charset="-120"/>
               </a:rPr>
-              <a:t>Bildlegende: Ort, Anlass, Fotografie</a:t>
+              <a:t>Goetheanum, Westfassade · Foto: Goetheanum</a:t>
             </a:r>
             <a:endParaRPr lang="en-US" sz="900" dirty="0"/>
           </a:p>
@@ -10768,40 +12433,49 @@
       </p:sp>
       <p:sp>
         <p:nvSpPr>
-          <p:cNvPr id="4" name="Text 1"/>
-          <p:cNvSpPr/>
-          <p:nvPr/>
-        </p:nvSpPr>
-        <p:spPr>
-          <a:xfrm>
-            <a:off x="4654296" y="6995160"/>
-            <a:ext cx="5486400" cy="274320"/>
-          </a:xfrm>
-          <a:prstGeom prst="rect">
-            <a:avLst/>
-          </a:prstGeom>
-          <a:noFill/>
-          <a:ln/>
-        </p:spPr>
-        <p:txBody>
-          <a:bodyPr wrap="square" lIns="0" tIns="0" rIns="0" bIns="0" rtlCol="0" anchor="ctr"/>
-          <a:lstStyle/>
-          <a:p>
-            <a:pPr algn="r" indent="0" marL="0">
-              <a:buNone/>
-            </a:pPr>
-            <a:r>
-              <a:rPr lang="en-US" sz="900" dirty="0">
+          <p:cNvPr id="25" name="Slide Number Placeholder 0"/>
+          <p:cNvSpPr>
+            <a:spLocks noGrp="1"/>
+          </p:cNvSpPr>
+          <p:nvPr>
+            <p:ph type="sldNum" sz="quarter" idx="4294967295"/>
+          </p:nvPr>
+        </p:nvSpPr>
+        <p:spPr>
+          <a:xfrm>
+            <a:off x="9747504" y="6995160"/>
+            <a:ext cx="393192" cy="274320"/>
+          </a:xfrm>
+          <a:prstGeom prst="rect">
+            <a:avLst/>
+          </a:prstGeom>
+          <a:extLst>
+            <a:ext uri="{C572A759-6A51-4108-AA02-DFA0A04FC94B}">
+              <ma14:wrappingTextBoxFlag xmlns:ma14="http://schemas.microsoft.com/office/mac/drawingml/2011/main" val="0"/>
+            </a:ext>
+          </a:extLst>
+        </p:spPr>
+        <p:txBody>
+          <a:bodyPr anchor="ctr"/>
+          <a:lstStyle>
+            <a:lvl1pPr>
+              <a:defRPr sz="900">
                 <a:solidFill>
                   <a:srgbClr val="FFFFFF"/>
                 </a:solidFill>
-                <a:latin typeface="Goetheanum Schrift Klar" pitchFamily="34" charset="0"/>
-                <a:ea typeface="Goetheanum Schrift Klar" pitchFamily="34" charset="-122"/>
-                <a:cs typeface="Goetheanum Schrift Klar" pitchFamily="34" charset="-120"/>
-              </a:rPr>
-              <a:t>Titel der Präsentation · 00.00.2026 · 8</a:t>
-            </a:r>
-            <a:endParaRPr lang="en-US" sz="900" dirty="0"/>
+                <a:latin typeface="Goetheanum Schrift Klar"/>
+                <a:ea typeface="Goetheanum Schrift Klar"/>
+                <a:cs typeface="Goetheanum Schrift Klar"/>
+              </a:defRPr>
+            </a:lvl1pPr>
+          </a:lstStyle>
+          <a:p>
+            <a:pPr algn="l"/>
+            <a:fld id="{F7021451-1387-4CA6-816F-3879F97B5CBC}" type="slidenum">
+              <a:rPr b="0" lang="en-US"/>
+              <a:t>8</a:t>
+            </a:fld>
+            <a:endParaRPr lang="en-US"/>
           </a:p>
         </p:txBody>
       </p:sp>
@@ -10816,13 +12490,6 @@
 <file path=ppt/slides/slide9.xml><?xml version="1.0" encoding="utf-8"?>
 <p:sld xmlns:a="http://schemas.openxmlformats.org/drawingml/2006/main" xmlns:r="http://schemas.openxmlformats.org/officeDocument/2006/relationships" xmlns:p="http://schemas.openxmlformats.org/presentationml/2006/main">
   <p:cSld name="Slide 9">
-    <p:bg>
-      <p:bgPr>
-        <a:solidFill>
-          <a:srgbClr val="FFFFFF"/>
-        </a:solidFill>
-      </p:bgPr>
-    </p:bg>
     <p:spTree>
       <p:nvGrpSpPr>
         <p:cNvPr id="1" name=""/>
@@ -10839,11 +12506,13 @@
       </p:grpSpPr>
       <p:pic>
         <p:nvPicPr>
-          <p:cNvPr id="2" name="Image 0" descr="logo-goetheanum-blue.png">    </p:cNvPr>
+          <p:cNvPr id="2" name="Image 0" descr="Eurythmie-Aufführung: eine Gruppe in fliessenden Gewändern bewegt sich in blauem Bühnenlicht"/>
           <p:cNvPicPr>
             <a:picLocks noChangeAspect="1"/>
           </p:cNvPicPr>
-          <p:nvPr/>
+          <p:nvPr>
+            <p:ph idx="101" hasCustomPrompt="1"/>
+          </p:nvPr>
         </p:nvPicPr>
         <p:blipFill>
           <a:blip r:embed="rId1"/>
@@ -10853,30 +12522,6 @@
         </p:blipFill>
         <p:spPr>
           <a:xfrm>
-            <a:off x="548640" y="502920"/>
-            <a:ext cx="1088402" cy="182880"/>
-          </a:xfrm>
-          <a:prstGeom prst="rect">
-            <a:avLst/>
-          </a:prstGeom>
-        </p:spPr>
-      </p:pic>
-      <p:pic>
-        <p:nvPicPr>
-          <p:cNvPr id="3" name="Image 1" descr="foto-buehne-halb.jpg">    </p:cNvPr>
-          <p:cNvPicPr>
-            <a:picLocks noChangeAspect="1"/>
-          </p:cNvPicPr>
-          <p:nvPr/>
-        </p:nvPicPr>
-        <p:blipFill>
-          <a:blip r:embed="rId2"/>
-          <a:stretch>
-            <a:fillRect/>
-          </a:stretch>
-        </p:blipFill>
-        <p:spPr>
-          <a:xfrm>
             <a:off x="5669280" y="0"/>
             <a:ext cx="5020056" cy="7562088"/>
           </a:xfrm>
@@ -10887,9 +12532,11 @@
       </p:pic>
       <p:sp>
         <p:nvSpPr>
-          <p:cNvPr id="4" name="Text 0"/>
-          <p:cNvSpPr/>
-          <p:nvPr/>
+          <p:cNvPr id="3" name="Text 0"/>
+          <p:cNvSpPr/>
+          <p:nvPr>
+            <p:ph idx="102" type="body" hasCustomPrompt="1"/>
+          </p:nvPr>
         </p:nvSpPr>
         <p:spPr>
           <a:xfrm>
@@ -10903,7 +12550,7 @@
           <a:ln/>
         </p:spPr>
         <p:txBody>
-          <a:bodyPr wrap="square" lIns="0" tIns="0" rIns="0" bIns="0" rtlCol="0" anchor="ctr"/>
+          <a:bodyPr wrap="square" lIns="0" tIns="0" rIns="0" bIns="0" rtlCol="0"/>
           <a:lstStyle/>
           <a:p>
             <a:pPr indent="0" marL="0">
@@ -10926,9 +12573,11 @@
       </p:sp>
       <p:sp>
         <p:nvSpPr>
-          <p:cNvPr id="5" name="Text 1"/>
-          <p:cNvSpPr/>
-          <p:nvPr/>
+          <p:cNvPr id="4" name="Text 0"/>
+          <p:cNvSpPr/>
+          <p:nvPr>
+            <p:ph idx="103" type="title" hasCustomPrompt="1"/>
+          </p:nvPr>
         </p:nvSpPr>
         <p:spPr>
           <a:xfrm>
@@ -10942,7 +12591,7 @@
           <a:ln/>
         </p:spPr>
         <p:txBody>
-          <a:bodyPr wrap="square" lIns="0" tIns="0" rIns="0" bIns="0" rtlCol="0" anchor="ctr"/>
+          <a:bodyPr wrap="square" lIns="0" tIns="0" rIns="0" bIns="0" rtlCol="0"/>
           <a:lstStyle/>
           <a:p>
             <a:pPr indent="0" marL="0">
@@ -10956,23 +12605,87 @@
                 <a:solidFill>
                   <a:srgbClr val="1A1A1A"/>
                 </a:solidFill>
+                <a:latin typeface="Goetheanum Schrift Deutlich" pitchFamily="34" charset="0"/>
+                <a:ea typeface="Goetheanum Schrift Deutlich" pitchFamily="34" charset="-122"/>
+                <a:cs typeface="Goetheanum Schrift Deutlich" pitchFamily="34" charset="-120"/>
+              </a:rPr>
+              <a:t>Bild und Text,</a:t>
+            </a:r>
+            <a:endParaRPr lang="en-US" sz="2600" dirty="0"/>
+          </a:p>
+          <a:p>
+            <a:pPr indent="0" marL="0">
+              <a:lnSpc>
+                <a:spcPct val="105000"/>
+              </a:lnSpc>
+              <a:buNone/>
+            </a:pPr>
+            <a:r>
+              <a:rPr lang="en-US" sz="2600" dirty="0">
+                <a:solidFill>
+                  <a:srgbClr val="1A1A1A"/>
+                </a:solidFill>
+                <a:latin typeface="Goetheanum Schrift Deutlich" pitchFamily="34" charset="0"/>
+                <a:ea typeface="Goetheanum Schrift Deutlich" pitchFamily="34" charset="-122"/>
+                <a:cs typeface="Goetheanum Schrift Deutlich" pitchFamily="34" charset="-120"/>
+              </a:rPr>
+              <a:t>halb und halb</a:t>
+            </a:r>
+            <a:endParaRPr lang="en-US" sz="2600" dirty="0"/>
+          </a:p>
+        </p:txBody>
+      </p:sp>
+      <p:sp>
+        <p:nvSpPr>
+          <p:cNvPr id="5" name="Text 0"/>
+          <p:cNvSpPr/>
+          <p:nvPr>
+            <p:ph idx="104" type="body" hasCustomPrompt="1"/>
+          </p:nvPr>
+        </p:nvSpPr>
+        <p:spPr>
+          <a:xfrm>
+            <a:off x="548640" y="2834640"/>
+            <a:ext cx="4480560" cy="3200400"/>
+          </a:xfrm>
+          <a:prstGeom prst="rect">
+            <a:avLst/>
+          </a:prstGeom>
+          <a:noFill/>
+          <a:ln/>
+        </p:spPr>
+        <p:txBody>
+          <a:bodyPr wrap="square" lIns="0" tIns="0" rIns="0" bIns="0" rtlCol="0" anchor="t"/>
+          <a:lstStyle/>
+          <a:p>
+            <a:pPr indent="0" marL="0">
+              <a:lnSpc>
+                <a:spcPct val="130000"/>
+              </a:lnSpc>
+              <a:buNone/>
+            </a:pPr>
+            <a:r>
+              <a:rPr lang="en-US" sz="1300" dirty="0">
+                <a:solidFill>
+                  <a:srgbClr val="1A1A1A"/>
+                </a:solidFill>
                 <a:latin typeface="Goetheanum Schrift Klar" pitchFamily="34" charset="0"/>
                 <a:ea typeface="Goetheanum Schrift Klar" pitchFamily="34" charset="-122"/>
                 <a:cs typeface="Goetheanum Schrift Klar" pitchFamily="34" charset="-120"/>
               </a:rPr>
-              <a:t>Bild und Text,</a:t>
-            </a:r>
-            <a:endParaRPr lang="en-US" sz="2600" dirty="0"/>
+              <a:t>Das Bild läuft randlos bis zur Kante.</a:t>
+            </a:r>
+            <a:endParaRPr lang="en-US" sz="1300" dirty="0"/>
           </a:p>
           <a:p>
             <a:pPr indent="0" marL="0">
               <a:lnSpc>
-                <a:spcPct val="105000"/>
+                <a:spcPct val="130000"/>
               </a:lnSpc>
               <a:buNone/>
             </a:pPr>
             <a:r>
-              <a:rPr lang="en-US" sz="2600" dirty="0">
+              <a:rPr lang="en-US" sz="1300" dirty="0">
                 <a:solidFill>
                   <a:srgbClr val="1A1A1A"/>
                 </a:solidFill>
@@ -10980,32 +12693,10 @@
                 <a:ea typeface="Goetheanum Schrift Klar" pitchFamily="34" charset="-122"/>
                 <a:cs typeface="Goetheanum Schrift Klar" pitchFamily="34" charset="-120"/>
               </a:rPr>
-              <a:t>halb und halb</a:t>
-            </a:r>
-            <a:endParaRPr lang="en-US" sz="2600" dirty="0"/>
-          </a:p>
-        </p:txBody>
-      </p:sp>
-      <p:sp>
-        <p:nvSpPr>
-          <p:cNvPr id="6" name="Text 2"/>
-          <p:cNvSpPr/>
-          <p:nvPr/>
-        </p:nvSpPr>
-        <p:spPr>
-          <a:xfrm>
-            <a:off x="548640" y="2834640"/>
-            <a:ext cx="4480560" cy="1188720"/>
-          </a:xfrm>
-          <a:prstGeom prst="rect">
-            <a:avLst/>
-          </a:prstGeom>
-          <a:noFill/>
-          <a:ln/>
-        </p:spPr>
-        <p:txBody>
-          <a:bodyPr wrap="square" lIns="0" tIns="0" rIns="0" bIns="0" rtlCol="0" anchor="ctr"/>
-          <a:lstStyle/>
+              <a:t>Der Text behält seine Spaltenbreite</a:t>
+            </a:r>
+            <a:endParaRPr lang="en-US" sz="1300" dirty="0"/>
+          </a:p>
           <a:p>
             <a:pPr indent="0" marL="0">
               <a:lnSpc>
@@ -11022,86 +12713,48 @@
                 <a:ea typeface="Goetheanum Schrift Klar" pitchFamily="34" charset="-122"/>
                 <a:cs typeface="Goetheanum Schrift Klar" pitchFamily="34" charset="-120"/>
               </a:rPr>
-              <a:t>Das Bild läuft randlos bis zur Kante.</a:t>
+              <a:t>und seine Ruhe.</a:t>
             </a:r>
             <a:endParaRPr lang="en-US" sz="1300" dirty="0"/>
           </a:p>
-          <a:p>
-            <a:pPr indent="0" marL="0">
-              <a:lnSpc>
-                <a:spcPct val="130000"/>
-              </a:lnSpc>
-              <a:buNone/>
-            </a:pPr>
-            <a:r>
-              <a:rPr lang="en-US" sz="1300" dirty="0">
-                <a:solidFill>
-                  <a:srgbClr val="1A1A1A"/>
+        </p:txBody>
+      </p:sp>
+      <p:sp>
+        <p:nvSpPr>
+          <p:cNvPr id="6" name="Text 0"/>
+          <p:cNvSpPr/>
+          <p:nvPr>
+            <p:ph idx="105" type="body" hasCustomPrompt="1"/>
+          </p:nvPr>
+        </p:nvSpPr>
+        <p:spPr>
+          <a:xfrm>
+            <a:off x="548640" y="6995160"/>
+            <a:ext cx="4114800" cy="274320"/>
+          </a:xfrm>
+          <a:prstGeom prst="rect">
+            <a:avLst/>
+          </a:prstGeom>
+          <a:noFill/>
+          <a:ln/>
+        </p:spPr>
+        <p:txBody>
+          <a:bodyPr wrap="square" lIns="0" tIns="0" rIns="0" bIns="0" rtlCol="0" anchor="ctr"/>
+          <a:lstStyle/>
+          <a:p>
+            <a:pPr indent="0" marL="0">
+              <a:buNone/>
+            </a:pPr>
+            <a:r>
+              <a:rPr lang="en-US" sz="900" dirty="0">
+                <a:solidFill>
+                  <a:srgbClr val="6B7480"/>
                 </a:solidFill>
                 <a:latin typeface="Goetheanum Schrift Klar" pitchFamily="34" charset="0"/>
                 <a:ea typeface="Goetheanum Schrift Klar" pitchFamily="34" charset="-122"/>
                 <a:cs typeface="Goetheanum Schrift Klar" pitchFamily="34" charset="-120"/>
               </a:rPr>
-              <a:t>Der Text behält seine Spaltenbreite</a:t>
-            </a:r>
-            <a:endParaRPr lang="en-US" sz="1300" dirty="0"/>
-          </a:p>
-          <a:p>
-            <a:pPr indent="0" marL="0">
-              <a:lnSpc>
-                <a:spcPct val="130000"/>
-              </a:lnSpc>
-              <a:buNone/>
-            </a:pPr>
-            <a:r>
-              <a:rPr lang="en-US" sz="1300" dirty="0">
-                <a:solidFill>
-                  <a:srgbClr val="1A1A1A"/>
-                </a:solidFill>
-                <a:latin typeface="Goetheanum Schrift Klar" pitchFamily="34" charset="0"/>
-                <a:ea typeface="Goetheanum Schrift Klar" pitchFamily="34" charset="-122"/>
-                <a:cs typeface="Goetheanum Schrift Klar" pitchFamily="34" charset="-120"/>
-              </a:rPr>
-              <a:t>und seine Ruhe.</a:t>
-            </a:r>
-            <a:endParaRPr lang="en-US" sz="1300" dirty="0"/>
-          </a:p>
-        </p:txBody>
-      </p:sp>
-      <p:sp>
-        <p:nvSpPr>
-          <p:cNvPr id="7" name="Text 3"/>
-          <p:cNvSpPr/>
-          <p:nvPr/>
-        </p:nvSpPr>
-        <p:spPr>
-          <a:xfrm>
-            <a:off x="548640" y="6995160"/>
-            <a:ext cx="4114800" cy="274320"/>
-          </a:xfrm>
-          <a:prstGeom prst="rect">
-            <a:avLst/>
-          </a:prstGeom>
-          <a:noFill/>
-          <a:ln/>
-        </p:spPr>
-        <p:txBody>
-          <a:bodyPr wrap="square" lIns="0" tIns="0" rIns="0" bIns="0" rtlCol="0" anchor="ctr"/>
-          <a:lstStyle/>
-          <a:p>
-            <a:pPr indent="0" marL="0">
-              <a:buNone/>
-            </a:pPr>
-            <a:r>
-              <a:rPr lang="en-US" sz="900" dirty="0">
-                <a:solidFill>
-                  <a:srgbClr val="6B7480"/>
-                </a:solidFill>
-                <a:latin typeface="Goetheanum Schrift Klar" pitchFamily="34" charset="0"/>
-                <a:ea typeface="Goetheanum Schrift Klar" pitchFamily="34" charset="-122"/>
-                <a:cs typeface="Goetheanum Schrift Klar" pitchFamily="34" charset="-120"/>
-              </a:rPr>
-              <a:t>Bildlegende: Ort, Anlass, Fotografie</a:t>
+              <a:t>Eurythmie-Abschlusstreffen 2025 · Foto: Xue Li</a:t>
             </a:r>
             <a:endParaRPr lang="en-US" sz="900" dirty="0"/>
           </a:p>
@@ -11126,39 +12779,39 @@
         <a:sysClr val="window" lastClr="FFFFFF"/>
       </a:lt1>
       <a:dk2>
-        <a:srgbClr val="44546A"/>
+        <a:srgbClr val="23272B"/>
       </a:dk2>
       <a:lt2>
-        <a:srgbClr val="E7E6E6"/>
+        <a:srgbClr val="EEF4FB"/>
       </a:lt2>
       <a:accent1>
-        <a:srgbClr val="4472C4"/>
+        <a:srgbClr val="005EB8"/>
       </a:accent1>
       <a:accent2>
-        <a:srgbClr val="ED7D31"/>
+        <a:srgbClr val="EBB565"/>
       </a:accent2>
       <a:accent3>
-        <a:srgbClr val="A5A5A5"/>
+        <a:srgbClr val="94702E"/>
       </a:accent3>
       <a:accent4>
-        <a:srgbClr val="FFC000"/>
+        <a:srgbClr val="9CC3EC"/>
       </a:accent4>
       <a:accent5>
-        <a:srgbClr val="5B9BD5"/>
+        <a:srgbClr val="BFD7F0"/>
       </a:accent5>
       <a:accent6>
-        <a:srgbClr val="70AD47"/>
+        <a:srgbClr val="6B7177"/>
       </a:accent6>
       <a:hlink>
-        <a:srgbClr val="0563C1"/>
+        <a:srgbClr val="005EB8"/>
       </a:hlink>
       <a:folHlink>
-        <a:srgbClr val="954F72"/>
+        <a:srgbClr val="94702E"/>
       </a:folHlink>
     </a:clrScheme>
     <a:fontScheme name="Office">
       <a:majorFont>
-        <a:latin typeface="Goetheanum Schrift Klar"/>
+        <a:latin typeface="Goetheanum Schrift Deutlich"/>
         <a:ea typeface=""/>
         <a:cs typeface=""/>
         <a:font script="Jpan" typeface="游ゴシック Light"/>

--- a/assets/templates/GoetheanumVorlageA4.pptx
+++ b/assets/templates/GoetheanumVorlageA4.pptx
@@ -370,7 +370,7 @@
                 <a:solidFill>
                   <a:srgbClr val="6B7480"/>
                 </a:solidFill>
-                <a:latin typeface="Goetheanum Schrift Klar"/>
+                <a:latin typeface="Goetheanum Schrift"/>
               </a:defRPr>
             </a:pPr>
             <a:endParaRPr lang="en-US"/>
@@ -422,7 +422,7 @@
                 <a:solidFill>
                   <a:srgbClr val="6B7480"/>
                 </a:solidFill>
-                <a:latin typeface="Goetheanum Schrift Klar"/>
+                <a:latin typeface="Goetheanum Schrift"/>
               </a:defRPr>
             </a:pPr>
             <a:endParaRPr lang="en-US"/>
@@ -452,8 +452,8 @@
               <a:solidFill>
                 <a:srgbClr val="6B7480"/>
               </a:solidFill>
-              <a:latin typeface="Goetheanum Schrift Klar"/>
-              <a:cs typeface="Goetheanum Schrift Klar"/>
+              <a:latin typeface="Goetheanum Schrift"/>
+              <a:cs typeface="Goetheanum Schrift"/>
             </a:defRPr>
           </a:pPr>
           <a:endParaRPr lang="en-US"/>
@@ -2253,9 +2253,9 @@
                 <a:solidFill>
                   <a:srgbClr val="FFFFFF"/>
                 </a:solidFill>
-                <a:latin typeface="Goetheanum Schrift Klar" pitchFamily="34" charset="0"/>
-                <a:ea typeface="Goetheanum Schrift Klar" pitchFamily="34" charset="-122"/>
-                <a:cs typeface="Goetheanum Schrift Klar" pitchFamily="34" charset="-120"/>
+                <a:latin typeface="Goetheanum Schrift" pitchFamily="34" charset="0"/>
+                <a:ea typeface="Goetheanum Schrift" pitchFamily="34" charset="-122"/>
+                <a:cs typeface="Goetheanum Schrift" pitchFamily="34" charset="-120"/>
               </a:defRPr>
             </a:lvl1pPr>
           </a:lstStyle>
@@ -2268,9 +2268,9 @@
                 <a:solidFill>
                   <a:srgbClr val="FFFFFF"/>
                 </a:solidFill>
-                <a:latin typeface="Goetheanum Schrift Klar" pitchFamily="34" charset="0"/>
-                <a:ea typeface="Goetheanum Schrift Klar" pitchFamily="34" charset="-122"/>
-                <a:cs typeface="Goetheanum Schrift Klar" pitchFamily="34" charset="-120"/>
+                <a:latin typeface="Goetheanum Schrift" pitchFamily="34" charset="0"/>
+                <a:ea typeface="Goetheanum Schrift" pitchFamily="34" charset="-122"/>
+                <a:cs typeface="Goetheanum Schrift" pitchFamily="34" charset="-120"/>
               </a:rPr>
               <a:t>Titel der Präsentation</a:t>
             </a:r>
@@ -2302,13 +2302,13 @@
           <a:lstStyle>
             <a:lvl1pPr indent="0" marL="0">
               <a:buNone/>
-              <a:defRPr lang="en-US" sz="2600" dirty="0">
+              <a:defRPr i="1" lang="en-US" sz="2600" dirty="0">
                 <a:solidFill>
                   <a:srgbClr val="BFD7F0"/>
                 </a:solidFill>
-                <a:latin typeface="Goetheanum Schrift Leise" pitchFamily="34" charset="0"/>
-                <a:ea typeface="Goetheanum Schrift Leise" pitchFamily="34" charset="-122"/>
-                <a:cs typeface="Goetheanum Schrift Leise" pitchFamily="34" charset="-120"/>
+                <a:latin typeface="Goetheanum Schrift" pitchFamily="34" charset="0"/>
+                <a:ea typeface="Goetheanum Schrift" pitchFamily="34" charset="-122"/>
+                <a:cs typeface="Goetheanum Schrift" pitchFamily="34" charset="-120"/>
               </a:defRPr>
             </a:lvl1pPr>
           </a:lstStyle>
@@ -2317,13 +2317,13 @@
               <a:buNone/>
             </a:pPr>
             <a:r>
-              <a:rPr lang="en-US" sz="2600" dirty="0">
+              <a:rPr i="1" lang="en-US" sz="2600" dirty="0">
                 <a:solidFill>
                   <a:srgbClr val="BFD7F0"/>
                 </a:solidFill>
-                <a:latin typeface="Goetheanum Schrift Leise" pitchFamily="34" charset="0"/>
-                <a:ea typeface="Goetheanum Schrift Leise" pitchFamily="34" charset="-122"/>
-                <a:cs typeface="Goetheanum Schrift Leise" pitchFamily="34" charset="-120"/>
+                <a:latin typeface="Goetheanum Schrift" pitchFamily="34" charset="0"/>
+                <a:ea typeface="Goetheanum Schrift" pitchFamily="34" charset="-122"/>
+                <a:cs typeface="Goetheanum Schrift" pitchFamily="34" charset="-120"/>
               </a:rPr>
               <a:t>Untertitel oder Anlass in einem Satz</a:t>
             </a:r>
@@ -2359,9 +2359,9 @@
                 <a:solidFill>
                   <a:srgbClr val="9CC3EC"/>
                 </a:solidFill>
-                <a:latin typeface="Goetheanum Schrift Klar" pitchFamily="34" charset="0"/>
-                <a:ea typeface="Goetheanum Schrift Klar" pitchFamily="34" charset="-122"/>
-                <a:cs typeface="Goetheanum Schrift Klar" pitchFamily="34" charset="-120"/>
+                <a:latin typeface="Goetheanum Schrift" pitchFamily="34" charset="0"/>
+                <a:ea typeface="Goetheanum Schrift" pitchFamily="34" charset="-122"/>
+                <a:cs typeface="Goetheanum Schrift" pitchFamily="34" charset="-120"/>
               </a:defRPr>
             </a:lvl1pPr>
           </a:lstStyle>
@@ -2374,9 +2374,9 @@
                 <a:solidFill>
                   <a:srgbClr val="9CC3EC"/>
                 </a:solidFill>
-                <a:latin typeface="Goetheanum Schrift Klar" pitchFamily="34" charset="0"/>
-                <a:ea typeface="Goetheanum Schrift Klar" pitchFamily="34" charset="-122"/>
-                <a:cs typeface="Goetheanum Schrift Klar" pitchFamily="34" charset="-120"/>
+                <a:latin typeface="Goetheanum Schrift" pitchFamily="34" charset="0"/>
+                <a:ea typeface="Goetheanum Schrift" pitchFamily="34" charset="-122"/>
+                <a:cs typeface="Goetheanum Schrift" pitchFamily="34" charset="-120"/>
               </a:rPr>
               <a:t>Vorname Name · Bereich · 00.00.2026</a:t>
             </a:r>
@@ -2469,9 +2469,9 @@
                 <a:solidFill>
                   <a:srgbClr val="9CC3EC"/>
                 </a:solidFill>
-                <a:latin typeface="Goetheanum Schrift Klar" pitchFamily="34" charset="0"/>
-                <a:ea typeface="Goetheanum Schrift Klar" pitchFamily="34" charset="-122"/>
-                <a:cs typeface="Goetheanum Schrift Klar" pitchFamily="34" charset="-120"/>
+                <a:latin typeface="Goetheanum Schrift" pitchFamily="34" charset="0"/>
+                <a:ea typeface="Goetheanum Schrift" pitchFamily="34" charset="-122"/>
+                <a:cs typeface="Goetheanum Schrift" pitchFamily="34" charset="-120"/>
               </a:rPr>
               <a:t>Titel der Präsentation · 00.00.2026 ·</a:t>
             </a:r>
@@ -2503,13 +2503,13 @@
           <a:lstStyle>
             <a:lvl1pPr indent="0" marL="0">
               <a:buNone/>
-              <a:defRPr lang="en-US" sz="5000" dirty="0">
+              <a:defRPr i="1" lang="en-US" sz="5000" dirty="0">
                 <a:solidFill>
                   <a:srgbClr val="4D90D6"/>
                 </a:solidFill>
-                <a:latin typeface="Goetheanum Schrift Leise" pitchFamily="34" charset="0"/>
-                <a:ea typeface="Goetheanum Schrift Leise" pitchFamily="34" charset="-122"/>
-                <a:cs typeface="Goetheanum Schrift Leise" pitchFamily="34" charset="-120"/>
+                <a:latin typeface="Goetheanum Schrift" pitchFamily="34" charset="0"/>
+                <a:ea typeface="Goetheanum Schrift" pitchFamily="34" charset="-122"/>
+                <a:cs typeface="Goetheanum Schrift" pitchFamily="34" charset="-120"/>
               </a:defRPr>
             </a:lvl1pPr>
           </a:lstStyle>
@@ -2518,13 +2518,13 @@
               <a:buNone/>
             </a:pPr>
             <a:r>
-              <a:rPr lang="en-US" sz="5000" dirty="0">
+              <a:rPr i="1" lang="en-US" sz="5000" dirty="0">
                 <a:solidFill>
                   <a:srgbClr val="4D90D6"/>
                 </a:solidFill>
-                <a:latin typeface="Goetheanum Schrift Leise" pitchFamily="34" charset="0"/>
-                <a:ea typeface="Goetheanum Schrift Leise" pitchFamily="34" charset="-122"/>
-                <a:cs typeface="Goetheanum Schrift Leise" pitchFamily="34" charset="-120"/>
+                <a:latin typeface="Goetheanum Schrift" pitchFamily="34" charset="0"/>
+                <a:ea typeface="Goetheanum Schrift" pitchFamily="34" charset="-122"/>
+                <a:cs typeface="Goetheanum Schrift" pitchFamily="34" charset="-120"/>
               </a:rPr>
               <a:t>01</a:t>
             </a:r>
@@ -2609,13 +2609,13 @@
           <a:lstStyle>
             <a:lvl1pPr indent="0" marL="0">
               <a:buNone/>
-              <a:defRPr lang="en-US" sz="1800" dirty="0">
+              <a:defRPr i="1" lang="en-US" sz="1800" dirty="0">
                 <a:solidFill>
                   <a:srgbClr val="BFD7F0"/>
                 </a:solidFill>
-                <a:latin typeface="Goetheanum Schrift Leise" pitchFamily="34" charset="0"/>
-                <a:ea typeface="Goetheanum Schrift Leise" pitchFamily="34" charset="-122"/>
-                <a:cs typeface="Goetheanum Schrift Leise" pitchFamily="34" charset="-120"/>
+                <a:latin typeface="Goetheanum Schrift" pitchFamily="34" charset="0"/>
+                <a:ea typeface="Goetheanum Schrift" pitchFamily="34" charset="-122"/>
+                <a:cs typeface="Goetheanum Schrift" pitchFamily="34" charset="-120"/>
               </a:defRPr>
             </a:lvl1pPr>
           </a:lstStyle>
@@ -2624,13 +2624,13 @@
               <a:buNone/>
             </a:pPr>
             <a:r>
-              <a:rPr lang="en-US" sz="1800" dirty="0">
+              <a:rPr i="1" lang="en-US" sz="1800" dirty="0">
                 <a:solidFill>
                   <a:srgbClr val="BFD7F0"/>
                 </a:solidFill>
-                <a:latin typeface="Goetheanum Schrift Leise" pitchFamily="34" charset="0"/>
-                <a:ea typeface="Goetheanum Schrift Leise" pitchFamily="34" charset="-122"/>
-                <a:cs typeface="Goetheanum Schrift Leise" pitchFamily="34" charset="-120"/>
+                <a:latin typeface="Goetheanum Schrift" pitchFamily="34" charset="0"/>
+                <a:ea typeface="Goetheanum Schrift" pitchFamily="34" charset="-122"/>
+                <a:cs typeface="Goetheanum Schrift" pitchFamily="34" charset="-120"/>
               </a:rPr>
               <a:t>Ein Satz, der das Kapitel öffnet.</a:t>
             </a:r>
@@ -2670,9 +2670,9 @@
                 <a:solidFill>
                   <a:srgbClr val="9CC3EC"/>
                 </a:solidFill>
-                <a:latin typeface="Goetheanum Schrift Klar"/>
-                <a:ea typeface="Goetheanum Schrift Klar"/>
-                <a:cs typeface="Goetheanum Schrift Klar"/>
+                <a:latin typeface="Goetheanum Schrift"/>
+                <a:ea typeface="Goetheanum Schrift"/>
+                <a:cs typeface="Goetheanum Schrift"/>
               </a:defRPr>
             </a:lvl1pPr>
           </a:lstStyle>
@@ -2771,9 +2771,9 @@
                 <a:solidFill>
                   <a:srgbClr val="6B7480"/>
                 </a:solidFill>
-                <a:latin typeface="Goetheanum Schrift Klar" pitchFamily="34" charset="0"/>
-                <a:ea typeface="Goetheanum Schrift Klar" pitchFamily="34" charset="-122"/>
-                <a:cs typeface="Goetheanum Schrift Klar" pitchFamily="34" charset="-120"/>
+                <a:latin typeface="Goetheanum Schrift" pitchFamily="34" charset="0"/>
+                <a:ea typeface="Goetheanum Schrift" pitchFamily="34" charset="-122"/>
+                <a:cs typeface="Goetheanum Schrift" pitchFamily="34" charset="-120"/>
               </a:rPr>
               <a:t>Titel der Präsentation · 00.00.2026 ·</a:t>
             </a:r>
@@ -2809,9 +2809,9 @@
                 <a:solidFill>
                   <a:srgbClr val="005EB8"/>
                 </a:solidFill>
-                <a:latin typeface="Goetheanum Schrift Klar" pitchFamily="34" charset="0"/>
-                <a:ea typeface="Goetheanum Schrift Klar" pitchFamily="34" charset="-122"/>
-                <a:cs typeface="Goetheanum Schrift Klar" pitchFamily="34" charset="-120"/>
+                <a:latin typeface="Goetheanum Schrift" pitchFamily="34" charset="0"/>
+                <a:ea typeface="Goetheanum Schrift" pitchFamily="34" charset="-122"/>
+                <a:cs typeface="Goetheanum Schrift" pitchFamily="34" charset="-120"/>
               </a:defRPr>
             </a:lvl1pPr>
           </a:lstStyle>
@@ -2824,9 +2824,9 @@
                 <a:solidFill>
                   <a:srgbClr val="005EB8"/>
                 </a:solidFill>
-                <a:latin typeface="Goetheanum Schrift Klar" pitchFamily="34" charset="0"/>
-                <a:ea typeface="Goetheanum Schrift Klar" pitchFamily="34" charset="-122"/>
-                <a:cs typeface="Goetheanum Schrift Klar" pitchFamily="34" charset="-120"/>
+                <a:latin typeface="Goetheanum Schrift" pitchFamily="34" charset="0"/>
+                <a:ea typeface="Goetheanum Schrift" pitchFamily="34" charset="-122"/>
+                <a:cs typeface="Goetheanum Schrift" pitchFamily="34" charset="-120"/>
               </a:rPr>
               <a:t>Kapitel</a:t>
             </a:r>
@@ -2919,9 +2919,9 @@
                 <a:solidFill>
                   <a:srgbClr val="6B7480"/>
                 </a:solidFill>
-                <a:latin typeface="Goetheanum Schrift Klar"/>
-                <a:ea typeface="Goetheanum Schrift Klar"/>
-                <a:cs typeface="Goetheanum Schrift Klar"/>
+                <a:latin typeface="Goetheanum Schrift"/>
+                <a:ea typeface="Goetheanum Schrift"/>
+                <a:cs typeface="Goetheanum Schrift"/>
               </a:defRPr>
             </a:lvl1pPr>
           </a:lstStyle>
@@ -3020,9 +3020,9 @@
                 <a:solidFill>
                   <a:srgbClr val="6B7480"/>
                 </a:solidFill>
-                <a:latin typeface="Goetheanum Schrift Klar" pitchFamily="34" charset="0"/>
-                <a:ea typeface="Goetheanum Schrift Klar" pitchFamily="34" charset="-122"/>
-                <a:cs typeface="Goetheanum Schrift Klar" pitchFamily="34" charset="-120"/>
+                <a:latin typeface="Goetheanum Schrift" pitchFamily="34" charset="0"/>
+                <a:ea typeface="Goetheanum Schrift" pitchFamily="34" charset="-122"/>
+                <a:cs typeface="Goetheanum Schrift" pitchFamily="34" charset="-120"/>
               </a:rPr>
               <a:t>Titel der Präsentation · 00.00.2026 ·</a:t>
             </a:r>
@@ -3058,9 +3058,9 @@
                 <a:solidFill>
                   <a:srgbClr val="005EB8"/>
                 </a:solidFill>
-                <a:latin typeface="Goetheanum Schrift Klar" pitchFamily="34" charset="0"/>
-                <a:ea typeface="Goetheanum Schrift Klar" pitchFamily="34" charset="-122"/>
-                <a:cs typeface="Goetheanum Schrift Klar" pitchFamily="34" charset="-120"/>
+                <a:latin typeface="Goetheanum Schrift" pitchFamily="34" charset="0"/>
+                <a:ea typeface="Goetheanum Schrift" pitchFamily="34" charset="-122"/>
+                <a:cs typeface="Goetheanum Schrift" pitchFamily="34" charset="-120"/>
               </a:defRPr>
             </a:lvl1pPr>
           </a:lstStyle>
@@ -3073,9 +3073,9 @@
                 <a:solidFill>
                   <a:srgbClr val="005EB8"/>
                 </a:solidFill>
-                <a:latin typeface="Goetheanum Schrift Klar" pitchFamily="34" charset="0"/>
-                <a:ea typeface="Goetheanum Schrift Klar" pitchFamily="34" charset="-122"/>
-                <a:cs typeface="Goetheanum Schrift Klar" pitchFamily="34" charset="-120"/>
+                <a:latin typeface="Goetheanum Schrift" pitchFamily="34" charset="0"/>
+                <a:ea typeface="Goetheanum Schrift" pitchFamily="34" charset="-122"/>
+                <a:cs typeface="Goetheanum Schrift" pitchFamily="34" charset="-120"/>
               </a:rPr>
               <a:t>Kapitel</a:t>
             </a:r>
@@ -3168,9 +3168,9 @@
                 <a:solidFill>
                   <a:srgbClr val="6B7480"/>
                 </a:solidFill>
-                <a:latin typeface="Goetheanum Schrift Klar"/>
-                <a:ea typeface="Goetheanum Schrift Klar"/>
-                <a:cs typeface="Goetheanum Schrift Klar"/>
+                <a:latin typeface="Goetheanum Schrift"/>
+                <a:ea typeface="Goetheanum Schrift"/>
+                <a:cs typeface="Goetheanum Schrift"/>
               </a:defRPr>
             </a:lvl1pPr>
           </a:lstStyle>
@@ -3269,9 +3269,9 @@
                 <a:solidFill>
                   <a:srgbClr val="6B7480"/>
                 </a:solidFill>
-                <a:latin typeface="Goetheanum Schrift Klar" pitchFamily="34" charset="0"/>
-                <a:ea typeface="Goetheanum Schrift Klar" pitchFamily="34" charset="-122"/>
-                <a:cs typeface="Goetheanum Schrift Klar" pitchFamily="34" charset="-120"/>
+                <a:latin typeface="Goetheanum Schrift" pitchFamily="34" charset="0"/>
+                <a:ea typeface="Goetheanum Schrift" pitchFamily="34" charset="-122"/>
+                <a:cs typeface="Goetheanum Schrift" pitchFamily="34" charset="-120"/>
               </a:rPr>
               <a:t>Titel der Präsentation · 00.00.2026 ·</a:t>
             </a:r>
@@ -3311,9 +3311,9 @@
                 <a:solidFill>
                   <a:srgbClr val="6B7480"/>
                 </a:solidFill>
-                <a:latin typeface="Goetheanum Schrift Klar"/>
-                <a:ea typeface="Goetheanum Schrift Klar"/>
-                <a:cs typeface="Goetheanum Schrift Klar"/>
+                <a:latin typeface="Goetheanum Schrift"/>
+                <a:ea typeface="Goetheanum Schrift"/>
+                <a:cs typeface="Goetheanum Schrift"/>
               </a:defRPr>
             </a:lvl1pPr>
           </a:lstStyle>
@@ -3430,9 +3430,9 @@
                 <a:solidFill>
                   <a:srgbClr val="FFFFFF"/>
                 </a:solidFill>
-                <a:latin typeface="Goetheanum Schrift Klar" pitchFamily="34" charset="0"/>
-                <a:ea typeface="Goetheanum Schrift Klar" pitchFamily="34" charset="-122"/>
-                <a:cs typeface="Goetheanum Schrift Klar" pitchFamily="34" charset="-120"/>
+                <a:latin typeface="Goetheanum Schrift" pitchFamily="34" charset="0"/>
+                <a:ea typeface="Goetheanum Schrift" pitchFamily="34" charset="-122"/>
+                <a:cs typeface="Goetheanum Schrift" pitchFamily="34" charset="-120"/>
               </a:defRPr>
             </a:lvl1pPr>
           </a:lstStyle>
@@ -3445,9 +3445,9 @@
                 <a:solidFill>
                   <a:srgbClr val="FFFFFF"/>
                 </a:solidFill>
-                <a:latin typeface="Goetheanum Schrift Klar" pitchFamily="34" charset="0"/>
-                <a:ea typeface="Goetheanum Schrift Klar" pitchFamily="34" charset="-122"/>
-                <a:cs typeface="Goetheanum Schrift Klar" pitchFamily="34" charset="-120"/>
+                <a:latin typeface="Goetheanum Schrift" pitchFamily="34" charset="0"/>
+                <a:ea typeface="Goetheanum Schrift" pitchFamily="34" charset="-122"/>
+                <a:cs typeface="Goetheanum Schrift" pitchFamily="34" charset="-120"/>
               </a:rPr>
               <a:t>Bildlegende: Ort, Anlass, Fotografie</a:t>
             </a:r>
@@ -3484,9 +3484,9 @@
                 <a:solidFill>
                   <a:srgbClr val="FFFFFF"/>
                 </a:solidFill>
-                <a:latin typeface="Goetheanum Schrift Klar" pitchFamily="34" charset="0"/>
-                <a:ea typeface="Goetheanum Schrift Klar" pitchFamily="34" charset="-122"/>
-                <a:cs typeface="Goetheanum Schrift Klar" pitchFamily="34" charset="-120"/>
+                <a:latin typeface="Goetheanum Schrift" pitchFamily="34" charset="0"/>
+                <a:ea typeface="Goetheanum Schrift" pitchFamily="34" charset="-122"/>
+                <a:cs typeface="Goetheanum Schrift" pitchFamily="34" charset="-120"/>
               </a:rPr>
               <a:t>Titel der Präsentation · 00.00.2026 ·</a:t>
             </a:r>
@@ -3526,9 +3526,9 @@
                 <a:solidFill>
                   <a:srgbClr val="FFFFFF"/>
                 </a:solidFill>
-                <a:latin typeface="Goetheanum Schrift Klar"/>
-                <a:ea typeface="Goetheanum Schrift Klar"/>
-                <a:cs typeface="Goetheanum Schrift Klar"/>
+                <a:latin typeface="Goetheanum Schrift"/>
+                <a:ea typeface="Goetheanum Schrift"/>
+                <a:cs typeface="Goetheanum Schrift"/>
               </a:defRPr>
             </a:lvl1pPr>
           </a:lstStyle>
@@ -3669,9 +3669,9 @@
                 <a:solidFill>
                   <a:srgbClr val="005EB8"/>
                 </a:solidFill>
-                <a:latin typeface="Goetheanum Schrift Klar" pitchFamily="34" charset="0"/>
-                <a:ea typeface="Goetheanum Schrift Klar" pitchFamily="34" charset="-122"/>
-                <a:cs typeface="Goetheanum Schrift Klar" pitchFamily="34" charset="-120"/>
+                <a:latin typeface="Goetheanum Schrift" pitchFamily="34" charset="0"/>
+                <a:ea typeface="Goetheanum Schrift" pitchFamily="34" charset="-122"/>
+                <a:cs typeface="Goetheanum Schrift" pitchFamily="34" charset="-120"/>
               </a:defRPr>
             </a:lvl1pPr>
           </a:lstStyle>
@@ -3684,9 +3684,9 @@
                 <a:solidFill>
                   <a:srgbClr val="005EB8"/>
                 </a:solidFill>
-                <a:latin typeface="Goetheanum Schrift Klar" pitchFamily="34" charset="0"/>
-                <a:ea typeface="Goetheanum Schrift Klar" pitchFamily="34" charset="-122"/>
-                <a:cs typeface="Goetheanum Schrift Klar" pitchFamily="34" charset="-120"/>
+                <a:latin typeface="Goetheanum Schrift" pitchFamily="34" charset="0"/>
+                <a:ea typeface="Goetheanum Schrift" pitchFamily="34" charset="-122"/>
+                <a:cs typeface="Goetheanum Schrift" pitchFamily="34" charset="-120"/>
               </a:rPr>
               <a:t>Kapitel</a:t>
             </a:r>
@@ -3784,9 +3784,9 @@
                 <a:solidFill>
                   <a:srgbClr val="1A1A1A"/>
                 </a:solidFill>
-                <a:latin typeface="Goetheanum Schrift Klar" pitchFamily="34" charset="0"/>
-                <a:ea typeface="Goetheanum Schrift Klar" pitchFamily="34" charset="-122"/>
-                <a:cs typeface="Goetheanum Schrift Klar" pitchFamily="34" charset="-120"/>
+                <a:latin typeface="Goetheanum Schrift" pitchFamily="34" charset="0"/>
+                <a:ea typeface="Goetheanum Schrift" pitchFamily="34" charset="-122"/>
+                <a:cs typeface="Goetheanum Schrift" pitchFamily="34" charset="-120"/>
               </a:defRPr>
             </a:lvl1pPr>
           </a:lstStyle>
@@ -3802,9 +3802,9 @@
                 <a:solidFill>
                   <a:srgbClr val="1A1A1A"/>
                 </a:solidFill>
-                <a:latin typeface="Goetheanum Schrift Klar" pitchFamily="34" charset="0"/>
-                <a:ea typeface="Goetheanum Schrift Klar" pitchFamily="34" charset="-122"/>
-                <a:cs typeface="Goetheanum Schrift Klar" pitchFamily="34" charset="-120"/>
+                <a:latin typeface="Goetheanum Schrift" pitchFamily="34" charset="0"/>
+                <a:ea typeface="Goetheanum Schrift" pitchFamily="34" charset="-122"/>
+                <a:cs typeface="Goetheanum Schrift" pitchFamily="34" charset="-120"/>
               </a:rPr>
               <a:t>Text zur Bildseite</a:t>
             </a:r>
@@ -3840,9 +3840,9 @@
                 <a:solidFill>
                   <a:srgbClr val="6B7480"/>
                 </a:solidFill>
-                <a:latin typeface="Goetheanum Schrift Klar" pitchFamily="34" charset="0"/>
-                <a:ea typeface="Goetheanum Schrift Klar" pitchFamily="34" charset="-122"/>
-                <a:cs typeface="Goetheanum Schrift Klar" pitchFamily="34" charset="-120"/>
+                <a:latin typeface="Goetheanum Schrift" pitchFamily="34" charset="0"/>
+                <a:ea typeface="Goetheanum Schrift" pitchFamily="34" charset="-122"/>
+                <a:cs typeface="Goetheanum Schrift" pitchFamily="34" charset="-120"/>
               </a:defRPr>
             </a:lvl1pPr>
           </a:lstStyle>
@@ -3855,9 +3855,9 @@
                 <a:solidFill>
                   <a:srgbClr val="6B7480"/>
                 </a:solidFill>
-                <a:latin typeface="Goetheanum Schrift Klar" pitchFamily="34" charset="0"/>
-                <a:ea typeface="Goetheanum Schrift Klar" pitchFamily="34" charset="-122"/>
-                <a:cs typeface="Goetheanum Schrift Klar" pitchFamily="34" charset="-120"/>
+                <a:latin typeface="Goetheanum Schrift" pitchFamily="34" charset="0"/>
+                <a:ea typeface="Goetheanum Schrift" pitchFamily="34" charset="-122"/>
+                <a:cs typeface="Goetheanum Schrift" pitchFamily="34" charset="-120"/>
               </a:rPr>
               <a:t>Bildlegende: Ort, Anlass, Fotografie</a:t>
             </a:r>
@@ -3922,9 +3922,9 @@
                 <a:solidFill>
                   <a:srgbClr val="9CC3EC"/>
                 </a:solidFill>
-                <a:latin typeface="Goetheanum Schrift Klar"/>
-                <a:ea typeface="Goetheanum Schrift Klar"/>
-                <a:cs typeface="Goetheanum Schrift Klar"/>
+                <a:latin typeface="Goetheanum Schrift"/>
+                <a:ea typeface="Goetheanum Schrift"/>
+                <a:cs typeface="Goetheanum Schrift"/>
               </a:defRPr>
             </a:lvl1pPr>
           </a:lstStyle>
@@ -4290,13 +4290,13 @@
               <a:buNone/>
             </a:pPr>
             <a:r>
-              <a:rPr lang="en-US" sz="2600" dirty="0">
+              <a:rPr i="1" lang="en-US" sz="2600" dirty="0">
                 <a:solidFill>
                   <a:srgbClr val="BFD7F0"/>
                 </a:solidFill>
-                <a:latin typeface="Goetheanum Schrift Leise" pitchFamily="34" charset="0"/>
-                <a:ea typeface="Goetheanum Schrift Leise" pitchFamily="34" charset="-122"/>
-                <a:cs typeface="Goetheanum Schrift Leise" pitchFamily="34" charset="-120"/>
+                <a:latin typeface="Goetheanum Schrift" pitchFamily="34" charset="0"/>
+                <a:ea typeface="Goetheanum Schrift" pitchFamily="34" charset="-122"/>
+                <a:cs typeface="Goetheanum Schrift" pitchFamily="34" charset="-120"/>
               </a:rPr>
               <a:t>Untertitel oder Anlass in einem Satz</a:t>
             </a:r>
@@ -4335,9 +4335,9 @@
                 <a:solidFill>
                   <a:srgbClr val="9CC3EC"/>
                 </a:solidFill>
-                <a:latin typeface="Goetheanum Schrift Klar" pitchFamily="34" charset="0"/>
-                <a:ea typeface="Goetheanum Schrift Klar" pitchFamily="34" charset="-122"/>
-                <a:cs typeface="Goetheanum Schrift Klar" pitchFamily="34" charset="-120"/>
+                <a:latin typeface="Goetheanum Schrift" pitchFamily="34" charset="0"/>
+                <a:ea typeface="Goetheanum Schrift" pitchFamily="34" charset="-122"/>
+                <a:cs typeface="Goetheanum Schrift" pitchFamily="34" charset="-120"/>
               </a:rPr>
               <a:t>Vorname Name · Bereich · 00.00.2026</a:t>
             </a:r>
@@ -4401,9 +4401,9 @@
                 <a:solidFill>
                   <a:srgbClr val="005EB8"/>
                 </a:solidFill>
-                <a:latin typeface="Goetheanum Schrift Klar" pitchFamily="34" charset="0"/>
-                <a:ea typeface="Goetheanum Schrift Klar" pitchFamily="34" charset="-122"/>
-                <a:cs typeface="Goetheanum Schrift Klar" pitchFamily="34" charset="-120"/>
+                <a:latin typeface="Goetheanum Schrift" pitchFamily="34" charset="0"/>
+                <a:ea typeface="Goetheanum Schrift" pitchFamily="34" charset="-122"/>
+                <a:cs typeface="Goetheanum Schrift" pitchFamily="34" charset="-120"/>
               </a:rPr>
               <a:t>Zahlen</a:t>
             </a:r>
@@ -4538,13 +4538,13 @@
               <a:buNone/>
             </a:pPr>
             <a:r>
-              <a:rPr lang="en-US" sz="1300" dirty="0">
+              <a:rPr i="1" lang="en-US" sz="1300" dirty="0">
                 <a:solidFill>
                   <a:srgbClr val="6B7480"/>
                 </a:solidFill>
-                <a:latin typeface="Goetheanum Schrift Leise" pitchFamily="34" charset="0"/>
-                <a:ea typeface="Goetheanum Schrift Leise" pitchFamily="34" charset="-122"/>
-                <a:cs typeface="Goetheanum Schrift Leise" pitchFamily="34" charset="-120"/>
+                <a:latin typeface="Goetheanum Schrift" pitchFamily="34" charset="0"/>
+                <a:ea typeface="Goetheanum Schrift" pitchFamily="34" charset="-122"/>
+                <a:cs typeface="Goetheanum Schrift" pitchFamily="34" charset="-120"/>
               </a:rPr>
               <a:t>Ertrag CHF</a:t>
             </a:r>
@@ -4638,13 +4638,13 @@
               <a:buNone/>
             </a:pPr>
             <a:r>
-              <a:rPr lang="en-US" sz="1300" dirty="0">
+              <a:rPr i="1" lang="en-US" sz="1300" dirty="0">
                 <a:solidFill>
                   <a:srgbClr val="6B7480"/>
                 </a:solidFill>
-                <a:latin typeface="Goetheanum Schrift Leise" pitchFamily="34" charset="0"/>
-                <a:ea typeface="Goetheanum Schrift Leise" pitchFamily="34" charset="-122"/>
-                <a:cs typeface="Goetheanum Schrift Leise" pitchFamily="34" charset="-120"/>
+                <a:latin typeface="Goetheanum Schrift" pitchFamily="34" charset="0"/>
+                <a:ea typeface="Goetheanum Schrift" pitchFamily="34" charset="-122"/>
+                <a:cs typeface="Goetheanum Schrift" pitchFamily="34" charset="-120"/>
               </a:rPr>
               <a:t>zum Vorjahr</a:t>
             </a:r>
@@ -4738,13 +4738,13 @@
               <a:buNone/>
             </a:pPr>
             <a:r>
-              <a:rPr lang="en-US" sz="1300" dirty="0">
+              <a:rPr i="1" lang="en-US" sz="1300" dirty="0">
                 <a:solidFill>
                   <a:srgbClr val="6B7480"/>
                 </a:solidFill>
-                <a:latin typeface="Goetheanum Schrift Leise" pitchFamily="34" charset="0"/>
-                <a:ea typeface="Goetheanum Schrift Leise" pitchFamily="34" charset="-122"/>
-                <a:cs typeface="Goetheanum Schrift Leise" pitchFamily="34" charset="-120"/>
+                <a:latin typeface="Goetheanum Schrift" pitchFamily="34" charset="0"/>
+                <a:ea typeface="Goetheanum Schrift" pitchFamily="34" charset="-122"/>
+                <a:cs typeface="Goetheanum Schrift" pitchFamily="34" charset="-120"/>
               </a:rPr>
               <a:t>Eigenfinanzierung</a:t>
             </a:r>
@@ -4838,13 +4838,13 @@
               <a:buNone/>
             </a:pPr>
             <a:r>
-              <a:rPr lang="en-US" sz="1300" dirty="0">
+              <a:rPr i="1" lang="en-US" sz="1300" dirty="0">
                 <a:solidFill>
                   <a:srgbClr val="6B7480"/>
                 </a:solidFill>
-                <a:latin typeface="Goetheanum Schrift Leise" pitchFamily="34" charset="0"/>
-                <a:ea typeface="Goetheanum Schrift Leise" pitchFamily="34" charset="-122"/>
-                <a:cs typeface="Goetheanum Schrift Leise" pitchFamily="34" charset="-120"/>
+                <a:latin typeface="Goetheanum Schrift" pitchFamily="34" charset="0"/>
+                <a:ea typeface="Goetheanum Schrift" pitchFamily="34" charset="-122"/>
+                <a:cs typeface="Goetheanum Schrift" pitchFamily="34" charset="-120"/>
               </a:rPr>
               <a:t>Spenden CHF</a:t>
             </a:r>
@@ -4877,13 +4877,13 @@
               <a:buNone/>
             </a:pPr>
             <a:r>
-              <a:rPr lang="en-US" sz="1300" dirty="0">
+              <a:rPr i="1" lang="en-US" sz="1300" dirty="0">
                 <a:solidFill>
                   <a:srgbClr val="6B7480"/>
                 </a:solidFill>
-                <a:latin typeface="Goetheanum Schrift Leise" pitchFamily="34" charset="0"/>
-                <a:ea typeface="Goetheanum Schrift Leise" pitchFamily="34" charset="-122"/>
-                <a:cs typeface="Goetheanum Schrift Leise" pitchFamily="34" charset="-120"/>
+                <a:latin typeface="Goetheanum Schrift" pitchFamily="34" charset="0"/>
+                <a:ea typeface="Goetheanum Schrift" pitchFamily="34" charset="-122"/>
+                <a:cs typeface="Goetheanum Schrift" pitchFamily="34" charset="-120"/>
               </a:rPr>
               <a:t>Musterzahlen, beim Ausfüllen ersetzen.</a:t>
             </a:r>
@@ -4923,9 +4923,9 @@
                 <a:solidFill>
                   <a:srgbClr val="6B7480"/>
                 </a:solidFill>
-                <a:latin typeface="Goetheanum Schrift Klar"/>
-                <a:ea typeface="Goetheanum Schrift Klar"/>
-                <a:cs typeface="Goetheanum Schrift Klar"/>
+                <a:latin typeface="Goetheanum Schrift"/>
+                <a:ea typeface="Goetheanum Schrift"/>
+                <a:cs typeface="Goetheanum Schrift"/>
               </a:defRPr>
             </a:lvl1pPr>
           </a:lstStyle>
@@ -4995,9 +4995,9 @@
                 <a:solidFill>
                   <a:srgbClr val="005EB8"/>
                 </a:solidFill>
-                <a:latin typeface="Goetheanum Schrift Klar" pitchFamily="34" charset="0"/>
-                <a:ea typeface="Goetheanum Schrift Klar" pitchFamily="34" charset="-122"/>
-                <a:cs typeface="Goetheanum Schrift Klar" pitchFamily="34" charset="-120"/>
+                <a:latin typeface="Goetheanum Schrift" pitchFamily="34" charset="0"/>
+                <a:ea typeface="Goetheanum Schrift" pitchFamily="34" charset="-122"/>
+                <a:cs typeface="Goetheanum Schrift" pitchFamily="34" charset="-120"/>
               </a:rPr>
               <a:t>Zahlen</a:t>
             </a:r>
@@ -5117,9 +5117,9 @@
                 <a:solidFill>
                   <a:srgbClr val="1A1A1A"/>
                 </a:solidFill>
-                <a:latin typeface="Goetheanum Schrift Klar" pitchFamily="34" charset="0"/>
-                <a:ea typeface="Goetheanum Schrift Klar" pitchFamily="34" charset="-122"/>
-                <a:cs typeface="Goetheanum Schrift Klar" pitchFamily="34" charset="-120"/>
+                <a:latin typeface="Goetheanum Schrift" pitchFamily="34" charset="0"/>
+                <a:ea typeface="Goetheanum Schrift" pitchFamily="34" charset="-122"/>
+                <a:cs typeface="Goetheanum Schrift" pitchFamily="34" charset="-120"/>
               </a:rPr>
               <a:t>Rechts steht die Deutung:</a:t>
             </a:r>
@@ -5137,9 +5137,9 @@
                 <a:solidFill>
                   <a:srgbClr val="1A1A1A"/>
                 </a:solidFill>
-                <a:latin typeface="Goetheanum Schrift Klar" pitchFamily="34" charset="0"/>
-                <a:ea typeface="Goetheanum Schrift Klar" pitchFamily="34" charset="-122"/>
-                <a:cs typeface="Goetheanum Schrift Klar" pitchFamily="34" charset="-120"/>
+                <a:latin typeface="Goetheanum Schrift" pitchFamily="34" charset="0"/>
+                <a:ea typeface="Goetheanum Schrift" pitchFamily="34" charset="-122"/>
+                <a:cs typeface="Goetheanum Schrift" pitchFamily="34" charset="-120"/>
               </a:rPr>
               <a:t>ein bis zwei Sätze dazu,</a:t>
             </a:r>
@@ -5157,9 +5157,9 @@
                 <a:solidFill>
                   <a:srgbClr val="1A1A1A"/>
                 </a:solidFill>
-                <a:latin typeface="Goetheanum Schrift Klar" pitchFamily="34" charset="0"/>
-                <a:ea typeface="Goetheanum Schrift Klar" pitchFamily="34" charset="-122"/>
-                <a:cs typeface="Goetheanum Schrift Klar" pitchFamily="34" charset="-120"/>
+                <a:latin typeface="Goetheanum Schrift" pitchFamily="34" charset="0"/>
+                <a:ea typeface="Goetheanum Schrift" pitchFamily="34" charset="-122"/>
+                <a:cs typeface="Goetheanum Schrift" pitchFamily="34" charset="-120"/>
               </a:rPr>
               <a:t>was die Kurve erzählt.</a:t>
             </a:r>
@@ -5196,9 +5196,9 @@
                 <a:solidFill>
                   <a:srgbClr val="6B7480"/>
                 </a:solidFill>
-                <a:latin typeface="Goetheanum Schrift Klar" pitchFamily="34" charset="0"/>
-                <a:ea typeface="Goetheanum Schrift Klar" pitchFamily="34" charset="-122"/>
-                <a:cs typeface="Goetheanum Schrift Klar" pitchFamily="34" charset="-120"/>
+                <a:latin typeface="Goetheanum Schrift" pitchFamily="34" charset="0"/>
+                <a:ea typeface="Goetheanum Schrift" pitchFamily="34" charset="-122"/>
+                <a:cs typeface="Goetheanum Schrift" pitchFamily="34" charset="-120"/>
               </a:rPr>
               <a:t>Angaben in Mio CHF, Musterzahlen.</a:t>
             </a:r>
@@ -5238,9 +5238,9 @@
                 <a:solidFill>
                   <a:srgbClr val="6B7480"/>
                 </a:solidFill>
-                <a:latin typeface="Goetheanum Schrift Klar"/>
-                <a:ea typeface="Goetheanum Schrift Klar"/>
-                <a:cs typeface="Goetheanum Schrift Klar"/>
+                <a:latin typeface="Goetheanum Schrift"/>
+                <a:ea typeface="Goetheanum Schrift"/>
+                <a:cs typeface="Goetheanum Schrift"/>
               </a:defRPr>
             </a:lvl1pPr>
           </a:lstStyle>
@@ -5310,9 +5310,9 @@
                 <a:solidFill>
                   <a:srgbClr val="005EB8"/>
                 </a:solidFill>
-                <a:latin typeface="Goetheanum Schrift Klar" pitchFamily="34" charset="0"/>
-                <a:ea typeface="Goetheanum Schrift Klar" pitchFamily="34" charset="-122"/>
-                <a:cs typeface="Goetheanum Schrift Klar" pitchFamily="34" charset="-120"/>
+                <a:latin typeface="Goetheanum Schrift" pitchFamily="34" charset="0"/>
+                <a:ea typeface="Goetheanum Schrift" pitchFamily="34" charset="-122"/>
+                <a:cs typeface="Goetheanum Schrift" pitchFamily="34" charset="-120"/>
               </a:rPr>
               <a:t>Zahlen</a:t>
             </a:r>
@@ -5581,16 +5581,16 @@
                           <a:solidFill>
                             <a:srgbClr val="1A1A1A"/>
                           </a:solidFill>
-                          <a:latin typeface="Goetheanum Schrift Klar" pitchFamily="34" charset="0"/>
-                          <a:ea typeface="Goetheanum Schrift Klar" pitchFamily="34" charset="-122"/>
-                          <a:cs typeface="Goetheanum Schrift Klar" pitchFamily="34" charset="-120"/>
+                          <a:latin typeface="Goetheanum Schrift" pitchFamily="34" charset="0"/>
+                          <a:ea typeface="Goetheanum Schrift" pitchFamily="34" charset="-122"/>
+                          <a:cs typeface="Goetheanum Schrift" pitchFamily="34" charset="-120"/>
                         </a:rPr>
                         <a:t>Bühne</a:t>
                       </a:r>
                       <a:endParaRPr lang="en-US" sz="1300" dirty="0">
-                        <a:latin typeface="Goetheanum Schrift Klar" charset="0"/>
-                        <a:ea typeface="Goetheanum Schrift Klar" charset="0"/>
-                        <a:cs typeface="Goetheanum Schrift Klar" charset="0"/>
+                        <a:latin typeface="Goetheanum Schrift" charset="0"/>
+                        <a:ea typeface="Goetheanum Schrift" charset="0"/>
+                        <a:cs typeface="Goetheanum Schrift" charset="0"/>
                       </a:endParaRPr>
                     </a:p>
                   </a:txBody>
@@ -5622,16 +5622,16 @@
                           <a:solidFill>
                             <a:srgbClr val="1A1A1A"/>
                           </a:solidFill>
-                          <a:latin typeface="Goetheanum Schrift Klar" pitchFamily="34" charset="0"/>
-                          <a:ea typeface="Goetheanum Schrift Klar" pitchFamily="34" charset="-122"/>
-                          <a:cs typeface="Goetheanum Schrift Klar" pitchFamily="34" charset="-120"/>
+                          <a:latin typeface="Goetheanum Schrift" pitchFamily="34" charset="0"/>
+                          <a:ea typeface="Goetheanum Schrift" pitchFamily="34" charset="-122"/>
+                          <a:cs typeface="Goetheanum Schrift" pitchFamily="34" charset="-120"/>
                         </a:rPr>
                         <a:t>4120</a:t>
                       </a:r>
                       <a:endParaRPr lang="en-US" sz="1300" dirty="0">
-                        <a:latin typeface="Goetheanum Schrift Klar" charset="0"/>
-                        <a:ea typeface="Goetheanum Schrift Klar" charset="0"/>
-                        <a:cs typeface="Goetheanum Schrift Klar" charset="0"/>
+                        <a:latin typeface="Goetheanum Schrift" charset="0"/>
+                        <a:ea typeface="Goetheanum Schrift" charset="0"/>
+                        <a:cs typeface="Goetheanum Schrift" charset="0"/>
                       </a:endParaRPr>
                     </a:p>
                   </a:txBody>
@@ -5663,16 +5663,16 @@
                           <a:solidFill>
                             <a:srgbClr val="1A1A1A"/>
                           </a:solidFill>
-                          <a:latin typeface="Goetheanum Schrift Klar" pitchFamily="34" charset="0"/>
-                          <a:ea typeface="Goetheanum Schrift Klar" pitchFamily="34" charset="-122"/>
-                          <a:cs typeface="Goetheanum Schrift Klar" pitchFamily="34" charset="-120"/>
+                          <a:latin typeface="Goetheanum Schrift" pitchFamily="34" charset="0"/>
+                          <a:ea typeface="Goetheanum Schrift" pitchFamily="34" charset="-122"/>
+                          <a:cs typeface="Goetheanum Schrift" pitchFamily="34" charset="-120"/>
                         </a:rPr>
                         <a:t>4380</a:t>
                       </a:r>
                       <a:endParaRPr lang="en-US" sz="1300" dirty="0">
-                        <a:latin typeface="Goetheanum Schrift Klar" charset="0"/>
-                        <a:ea typeface="Goetheanum Schrift Klar" charset="0"/>
-                        <a:cs typeface="Goetheanum Schrift Klar" charset="0"/>
+                        <a:latin typeface="Goetheanum Schrift" charset="0"/>
+                        <a:ea typeface="Goetheanum Schrift" charset="0"/>
+                        <a:cs typeface="Goetheanum Schrift" charset="0"/>
                       </a:endParaRPr>
                     </a:p>
                   </a:txBody>
@@ -5704,16 +5704,16 @@
                           <a:solidFill>
                             <a:srgbClr val="005EB8"/>
                           </a:solidFill>
-                          <a:latin typeface="Goetheanum Schrift Klar" pitchFamily="34" charset="0"/>
-                          <a:ea typeface="Goetheanum Schrift Klar" pitchFamily="34" charset="-122"/>
-                          <a:cs typeface="Goetheanum Schrift Klar" pitchFamily="34" charset="-120"/>
+                          <a:latin typeface="Goetheanum Schrift" pitchFamily="34" charset="0"/>
+                          <a:ea typeface="Goetheanum Schrift" pitchFamily="34" charset="-122"/>
+                          <a:cs typeface="Goetheanum Schrift" pitchFamily="34" charset="-120"/>
                         </a:rPr>
                         <a:t>+260</a:t>
                       </a:r>
                       <a:endParaRPr lang="en-US" sz="1300" dirty="0">
-                        <a:latin typeface="Goetheanum Schrift Klar" charset="0"/>
-                        <a:ea typeface="Goetheanum Schrift Klar" charset="0"/>
-                        <a:cs typeface="Goetheanum Schrift Klar" charset="0"/>
+                        <a:latin typeface="Goetheanum Schrift" charset="0"/>
+                        <a:ea typeface="Goetheanum Schrift" charset="0"/>
+                        <a:cs typeface="Goetheanum Schrift" charset="0"/>
                       </a:endParaRPr>
                     </a:p>
                   </a:txBody>
@@ -5747,16 +5747,16 @@
                           <a:solidFill>
                             <a:srgbClr val="1A1A1A"/>
                           </a:solidFill>
-                          <a:latin typeface="Goetheanum Schrift Klar" pitchFamily="34" charset="0"/>
-                          <a:ea typeface="Goetheanum Schrift Klar" pitchFamily="34" charset="-122"/>
-                          <a:cs typeface="Goetheanum Schrift Klar" pitchFamily="34" charset="-120"/>
+                          <a:latin typeface="Goetheanum Schrift" pitchFamily="34" charset="0"/>
+                          <a:ea typeface="Goetheanum Schrift" pitchFamily="34" charset="-122"/>
+                          <a:cs typeface="Goetheanum Schrift" pitchFamily="34" charset="-120"/>
                         </a:rPr>
                         <a:t>Hochschule</a:t>
                       </a:r>
                       <a:endParaRPr lang="en-US" sz="1300" dirty="0">
-                        <a:latin typeface="Goetheanum Schrift Klar" charset="0"/>
-                        <a:ea typeface="Goetheanum Schrift Klar" charset="0"/>
-                        <a:cs typeface="Goetheanum Schrift Klar" charset="0"/>
+                        <a:latin typeface="Goetheanum Schrift" charset="0"/>
+                        <a:ea typeface="Goetheanum Schrift" charset="0"/>
+                        <a:cs typeface="Goetheanum Schrift" charset="0"/>
                       </a:endParaRPr>
                     </a:p>
                   </a:txBody>
@@ -5791,16 +5791,16 @@
                           <a:solidFill>
                             <a:srgbClr val="1A1A1A"/>
                           </a:solidFill>
-                          <a:latin typeface="Goetheanum Schrift Klar" pitchFamily="34" charset="0"/>
-                          <a:ea typeface="Goetheanum Schrift Klar" pitchFamily="34" charset="-122"/>
-                          <a:cs typeface="Goetheanum Schrift Klar" pitchFamily="34" charset="-120"/>
+                          <a:latin typeface="Goetheanum Schrift" pitchFamily="34" charset="0"/>
+                          <a:ea typeface="Goetheanum Schrift" pitchFamily="34" charset="-122"/>
+                          <a:cs typeface="Goetheanum Schrift" pitchFamily="34" charset="-120"/>
                         </a:rPr>
                         <a:t>2950</a:t>
                       </a:r>
                       <a:endParaRPr lang="en-US" sz="1300" dirty="0">
-                        <a:latin typeface="Goetheanum Schrift Klar" charset="0"/>
-                        <a:ea typeface="Goetheanum Schrift Klar" charset="0"/>
-                        <a:cs typeface="Goetheanum Schrift Klar" charset="0"/>
+                        <a:latin typeface="Goetheanum Schrift" charset="0"/>
+                        <a:ea typeface="Goetheanum Schrift" charset="0"/>
+                        <a:cs typeface="Goetheanum Schrift" charset="0"/>
                       </a:endParaRPr>
                     </a:p>
                   </a:txBody>
@@ -5835,16 +5835,16 @@
                           <a:solidFill>
                             <a:srgbClr val="1A1A1A"/>
                           </a:solidFill>
-                          <a:latin typeface="Goetheanum Schrift Klar" pitchFamily="34" charset="0"/>
-                          <a:ea typeface="Goetheanum Schrift Klar" pitchFamily="34" charset="-122"/>
-                          <a:cs typeface="Goetheanum Schrift Klar" pitchFamily="34" charset="-120"/>
+                          <a:latin typeface="Goetheanum Schrift" pitchFamily="34" charset="0"/>
+                          <a:ea typeface="Goetheanum Schrift" pitchFamily="34" charset="-122"/>
+                          <a:cs typeface="Goetheanum Schrift" pitchFamily="34" charset="-120"/>
                         </a:rPr>
                         <a:t>2870</a:t>
                       </a:r>
                       <a:endParaRPr lang="en-US" sz="1300" dirty="0">
-                        <a:latin typeface="Goetheanum Schrift Klar" charset="0"/>
-                        <a:ea typeface="Goetheanum Schrift Klar" charset="0"/>
-                        <a:cs typeface="Goetheanum Schrift Klar" charset="0"/>
+                        <a:latin typeface="Goetheanum Schrift" charset="0"/>
+                        <a:ea typeface="Goetheanum Schrift" charset="0"/>
+                        <a:cs typeface="Goetheanum Schrift" charset="0"/>
                       </a:endParaRPr>
                     </a:p>
                   </a:txBody>
@@ -5879,16 +5879,16 @@
                           <a:solidFill>
                             <a:srgbClr val="6B7480"/>
                           </a:solidFill>
-                          <a:latin typeface="Goetheanum Schrift Klar" pitchFamily="34" charset="0"/>
-                          <a:ea typeface="Goetheanum Schrift Klar" pitchFamily="34" charset="-122"/>
-                          <a:cs typeface="Goetheanum Schrift Klar" pitchFamily="34" charset="-120"/>
+                          <a:latin typeface="Goetheanum Schrift" pitchFamily="34" charset="0"/>
+                          <a:ea typeface="Goetheanum Schrift" pitchFamily="34" charset="-122"/>
+                          <a:cs typeface="Goetheanum Schrift" pitchFamily="34" charset="-120"/>
                         </a:rPr>
                         <a:t>−80</a:t>
                       </a:r>
                       <a:endParaRPr lang="en-US" sz="1300" dirty="0">
-                        <a:latin typeface="Goetheanum Schrift Klar" charset="0"/>
-                        <a:ea typeface="Goetheanum Schrift Klar" charset="0"/>
-                        <a:cs typeface="Goetheanum Schrift Klar" charset="0"/>
+                        <a:latin typeface="Goetheanum Schrift" charset="0"/>
+                        <a:ea typeface="Goetheanum Schrift" charset="0"/>
+                        <a:cs typeface="Goetheanum Schrift" charset="0"/>
                       </a:endParaRPr>
                     </a:p>
                   </a:txBody>
@@ -5925,16 +5925,16 @@
                           <a:solidFill>
                             <a:srgbClr val="1A1A1A"/>
                           </a:solidFill>
-                          <a:latin typeface="Goetheanum Schrift Klar" pitchFamily="34" charset="0"/>
-                          <a:ea typeface="Goetheanum Schrift Klar" pitchFamily="34" charset="-122"/>
-                          <a:cs typeface="Goetheanum Schrift Klar" pitchFamily="34" charset="-120"/>
+                          <a:latin typeface="Goetheanum Schrift" pitchFamily="34" charset="0"/>
+                          <a:ea typeface="Goetheanum Schrift" pitchFamily="34" charset="-122"/>
+                          <a:cs typeface="Goetheanum Schrift" pitchFamily="34" charset="-120"/>
                         </a:rPr>
                         <a:t>Verlag und Medien</a:t>
                       </a:r>
                       <a:endParaRPr lang="en-US" sz="1300" dirty="0">
-                        <a:latin typeface="Goetheanum Schrift Klar" charset="0"/>
-                        <a:ea typeface="Goetheanum Schrift Klar" charset="0"/>
-                        <a:cs typeface="Goetheanum Schrift Klar" charset="0"/>
+                        <a:latin typeface="Goetheanum Schrift" charset="0"/>
+                        <a:ea typeface="Goetheanum Schrift" charset="0"/>
+                        <a:cs typeface="Goetheanum Schrift" charset="0"/>
                       </a:endParaRPr>
                     </a:p>
                   </a:txBody>
@@ -5966,16 +5966,16 @@
                           <a:solidFill>
                             <a:srgbClr val="1A1A1A"/>
                           </a:solidFill>
-                          <a:latin typeface="Goetheanum Schrift Klar" pitchFamily="34" charset="0"/>
-                          <a:ea typeface="Goetheanum Schrift Klar" pitchFamily="34" charset="-122"/>
-                          <a:cs typeface="Goetheanum Schrift Klar" pitchFamily="34" charset="-120"/>
+                          <a:latin typeface="Goetheanum Schrift" pitchFamily="34" charset="0"/>
+                          <a:ea typeface="Goetheanum Schrift" pitchFamily="34" charset="-122"/>
+                          <a:cs typeface="Goetheanum Schrift" pitchFamily="34" charset="-120"/>
                         </a:rPr>
                         <a:t>1410</a:t>
                       </a:r>
                       <a:endParaRPr lang="en-US" sz="1300" dirty="0">
-                        <a:latin typeface="Goetheanum Schrift Klar" charset="0"/>
-                        <a:ea typeface="Goetheanum Schrift Klar" charset="0"/>
-                        <a:cs typeface="Goetheanum Schrift Klar" charset="0"/>
+                        <a:latin typeface="Goetheanum Schrift" charset="0"/>
+                        <a:ea typeface="Goetheanum Schrift" charset="0"/>
+                        <a:cs typeface="Goetheanum Schrift" charset="0"/>
                       </a:endParaRPr>
                     </a:p>
                   </a:txBody>
@@ -6007,16 +6007,16 @@
                           <a:solidFill>
                             <a:srgbClr val="1A1A1A"/>
                           </a:solidFill>
-                          <a:latin typeface="Goetheanum Schrift Klar" pitchFamily="34" charset="0"/>
-                          <a:ea typeface="Goetheanum Schrift Klar" pitchFamily="34" charset="-122"/>
-                          <a:cs typeface="Goetheanum Schrift Klar" pitchFamily="34" charset="-120"/>
+                          <a:latin typeface="Goetheanum Schrift" pitchFamily="34" charset="0"/>
+                          <a:ea typeface="Goetheanum Schrift" pitchFamily="34" charset="-122"/>
+                          <a:cs typeface="Goetheanum Schrift" pitchFamily="34" charset="-120"/>
                         </a:rPr>
                         <a:t>1530</a:t>
                       </a:r>
                       <a:endParaRPr lang="en-US" sz="1300" dirty="0">
-                        <a:latin typeface="Goetheanum Schrift Klar" charset="0"/>
-                        <a:ea typeface="Goetheanum Schrift Klar" charset="0"/>
-                        <a:cs typeface="Goetheanum Schrift Klar" charset="0"/>
+                        <a:latin typeface="Goetheanum Schrift" charset="0"/>
+                        <a:ea typeface="Goetheanum Schrift" charset="0"/>
+                        <a:cs typeface="Goetheanum Schrift" charset="0"/>
                       </a:endParaRPr>
                     </a:p>
                   </a:txBody>
@@ -6048,16 +6048,16 @@
                           <a:solidFill>
                             <a:srgbClr val="005EB8"/>
                           </a:solidFill>
-                          <a:latin typeface="Goetheanum Schrift Klar" pitchFamily="34" charset="0"/>
-                          <a:ea typeface="Goetheanum Schrift Klar" pitchFamily="34" charset="-122"/>
-                          <a:cs typeface="Goetheanum Schrift Klar" pitchFamily="34" charset="-120"/>
+                          <a:latin typeface="Goetheanum Schrift" pitchFamily="34" charset="0"/>
+                          <a:ea typeface="Goetheanum Schrift" pitchFamily="34" charset="-122"/>
+                          <a:cs typeface="Goetheanum Schrift" pitchFamily="34" charset="-120"/>
                         </a:rPr>
                         <a:t>+120</a:t>
                       </a:r>
                       <a:endParaRPr lang="en-US" sz="1300" dirty="0">
-                        <a:latin typeface="Goetheanum Schrift Klar" charset="0"/>
-                        <a:ea typeface="Goetheanum Schrift Klar" charset="0"/>
-                        <a:cs typeface="Goetheanum Schrift Klar" charset="0"/>
+                        <a:latin typeface="Goetheanum Schrift" charset="0"/>
+                        <a:ea typeface="Goetheanum Schrift" charset="0"/>
+                        <a:cs typeface="Goetheanum Schrift" charset="0"/>
                       </a:endParaRPr>
                     </a:p>
                   </a:txBody>
@@ -6091,16 +6091,16 @@
                           <a:solidFill>
                             <a:srgbClr val="1A1A1A"/>
                           </a:solidFill>
-                          <a:latin typeface="Goetheanum Schrift Klar" pitchFamily="34" charset="0"/>
-                          <a:ea typeface="Goetheanum Schrift Klar" pitchFamily="34" charset="-122"/>
-                          <a:cs typeface="Goetheanum Schrift Klar" pitchFamily="34" charset="-120"/>
+                          <a:latin typeface="Goetheanum Schrift" pitchFamily="34" charset="0"/>
+                          <a:ea typeface="Goetheanum Schrift" pitchFamily="34" charset="-122"/>
+                          <a:cs typeface="Goetheanum Schrift" pitchFamily="34" charset="-120"/>
                         </a:rPr>
                         <a:t>Gebäude und Park</a:t>
                       </a:r>
                       <a:endParaRPr lang="en-US" sz="1300" dirty="0">
-                        <a:latin typeface="Goetheanum Schrift Klar" charset="0"/>
-                        <a:ea typeface="Goetheanum Schrift Klar" charset="0"/>
-                        <a:cs typeface="Goetheanum Schrift Klar" charset="0"/>
+                        <a:latin typeface="Goetheanum Schrift" charset="0"/>
+                        <a:ea typeface="Goetheanum Schrift" charset="0"/>
+                        <a:cs typeface="Goetheanum Schrift" charset="0"/>
                       </a:endParaRPr>
                     </a:p>
                   </a:txBody>
@@ -6135,16 +6135,16 @@
                           <a:solidFill>
                             <a:srgbClr val="1A1A1A"/>
                           </a:solidFill>
-                          <a:latin typeface="Goetheanum Schrift Klar" pitchFamily="34" charset="0"/>
-                          <a:ea typeface="Goetheanum Schrift Klar" pitchFamily="34" charset="-122"/>
-                          <a:cs typeface="Goetheanum Schrift Klar" pitchFamily="34" charset="-120"/>
+                          <a:latin typeface="Goetheanum Schrift" pitchFamily="34" charset="0"/>
+                          <a:ea typeface="Goetheanum Schrift" pitchFamily="34" charset="-122"/>
+                          <a:cs typeface="Goetheanum Schrift" pitchFamily="34" charset="-120"/>
                         </a:rPr>
                         <a:t>3210</a:t>
                       </a:r>
                       <a:endParaRPr lang="en-US" sz="1300" dirty="0">
-                        <a:latin typeface="Goetheanum Schrift Klar" charset="0"/>
-                        <a:ea typeface="Goetheanum Schrift Klar" charset="0"/>
-                        <a:cs typeface="Goetheanum Schrift Klar" charset="0"/>
+                        <a:latin typeface="Goetheanum Schrift" charset="0"/>
+                        <a:ea typeface="Goetheanum Schrift" charset="0"/>
+                        <a:cs typeface="Goetheanum Schrift" charset="0"/>
                       </a:endParaRPr>
                     </a:p>
                   </a:txBody>
@@ -6179,16 +6179,16 @@
                           <a:solidFill>
                             <a:srgbClr val="1A1A1A"/>
                           </a:solidFill>
-                          <a:latin typeface="Goetheanum Schrift Klar" pitchFamily="34" charset="0"/>
-                          <a:ea typeface="Goetheanum Schrift Klar" pitchFamily="34" charset="-122"/>
-                          <a:cs typeface="Goetheanum Schrift Klar" pitchFamily="34" charset="-120"/>
+                          <a:latin typeface="Goetheanum Schrift" pitchFamily="34" charset="0"/>
+                          <a:ea typeface="Goetheanum Schrift" pitchFamily="34" charset="-122"/>
+                          <a:cs typeface="Goetheanum Schrift" pitchFamily="34" charset="-120"/>
                         </a:rPr>
                         <a:t>3640</a:t>
                       </a:r>
                       <a:endParaRPr lang="en-US" sz="1300" dirty="0">
-                        <a:latin typeface="Goetheanum Schrift Klar" charset="0"/>
-                        <a:ea typeface="Goetheanum Schrift Klar" charset="0"/>
-                        <a:cs typeface="Goetheanum Schrift Klar" charset="0"/>
+                        <a:latin typeface="Goetheanum Schrift" charset="0"/>
+                        <a:ea typeface="Goetheanum Schrift" charset="0"/>
+                        <a:cs typeface="Goetheanum Schrift" charset="0"/>
                       </a:endParaRPr>
                     </a:p>
                   </a:txBody>
@@ -6223,16 +6223,16 @@
                           <a:solidFill>
                             <a:srgbClr val="005EB8"/>
                           </a:solidFill>
-                          <a:latin typeface="Goetheanum Schrift Klar" pitchFamily="34" charset="0"/>
-                          <a:ea typeface="Goetheanum Schrift Klar" pitchFamily="34" charset="-122"/>
-                          <a:cs typeface="Goetheanum Schrift Klar" pitchFamily="34" charset="-120"/>
+                          <a:latin typeface="Goetheanum Schrift" pitchFamily="34" charset="0"/>
+                          <a:ea typeface="Goetheanum Schrift" pitchFamily="34" charset="-122"/>
+                          <a:cs typeface="Goetheanum Schrift" pitchFamily="34" charset="-120"/>
                         </a:rPr>
                         <a:t>+430</a:t>
                       </a:r>
                       <a:endParaRPr lang="en-US" sz="1300" dirty="0">
-                        <a:latin typeface="Goetheanum Schrift Klar" charset="0"/>
-                        <a:ea typeface="Goetheanum Schrift Klar" charset="0"/>
-                        <a:cs typeface="Goetheanum Schrift Klar" charset="0"/>
+                        <a:latin typeface="Goetheanum Schrift" charset="0"/>
+                        <a:ea typeface="Goetheanum Schrift" charset="0"/>
+                        <a:cs typeface="Goetheanum Schrift" charset="0"/>
                       </a:endParaRPr>
                     </a:p>
                   </a:txBody>
@@ -6454,9 +6454,9 @@
                 <a:solidFill>
                   <a:srgbClr val="6B7480"/>
                 </a:solidFill>
-                <a:latin typeface="Goetheanum Schrift Klar" pitchFamily="34" charset="0"/>
-                <a:ea typeface="Goetheanum Schrift Klar" pitchFamily="34" charset="-122"/>
-                <a:cs typeface="Goetheanum Schrift Klar" pitchFamily="34" charset="-120"/>
+                <a:latin typeface="Goetheanum Schrift" pitchFamily="34" charset="0"/>
+                <a:ea typeface="Goetheanum Schrift" pitchFamily="34" charset="-122"/>
+                <a:cs typeface="Goetheanum Schrift" pitchFamily="34" charset="-120"/>
               </a:rPr>
               <a:t>Angaben in Tausend CHF, Musterzahlen.</a:t>
             </a:r>
@@ -6496,9 +6496,9 @@
                 <a:solidFill>
                   <a:srgbClr val="6B7480"/>
                 </a:solidFill>
-                <a:latin typeface="Goetheanum Schrift Klar"/>
-                <a:ea typeface="Goetheanum Schrift Klar"/>
-                <a:cs typeface="Goetheanum Schrift Klar"/>
+                <a:latin typeface="Goetheanum Schrift"/>
+                <a:ea typeface="Goetheanum Schrift"/>
+                <a:cs typeface="Goetheanum Schrift"/>
               </a:defRPr>
             </a:lvl1pPr>
           </a:lstStyle>
@@ -6568,9 +6568,9 @@
                 <a:solidFill>
                   <a:srgbClr val="005EB8"/>
                 </a:solidFill>
-                <a:latin typeface="Goetheanum Schrift Klar" pitchFamily="34" charset="0"/>
-                <a:ea typeface="Goetheanum Schrift Klar" pitchFamily="34" charset="-122"/>
-                <a:cs typeface="Goetheanum Schrift Klar" pitchFamily="34" charset="-120"/>
+                <a:latin typeface="Goetheanum Schrift" pitchFamily="34" charset="0"/>
+                <a:ea typeface="Goetheanum Schrift" pitchFamily="34" charset="-122"/>
+                <a:cs typeface="Goetheanum Schrift" pitchFamily="34" charset="-120"/>
               </a:rPr>
               <a:t>Vor Ort</a:t>
             </a:r>
@@ -6710,9 +6710,9 @@
                 <a:solidFill>
                   <a:srgbClr val="6B7480"/>
                 </a:solidFill>
-                <a:latin typeface="Goetheanum Schrift Klar" pitchFamily="34" charset="0"/>
-                <a:ea typeface="Goetheanum Schrift Klar" pitchFamily="34" charset="-122"/>
-                <a:cs typeface="Goetheanum Schrift Klar" pitchFamily="34" charset="-120"/>
+                <a:latin typeface="Goetheanum Schrift" pitchFamily="34" charset="0"/>
+                <a:ea typeface="Goetheanum Schrift" pitchFamily="34" charset="-122"/>
+                <a:cs typeface="Goetheanum Schrift" pitchFamily="34" charset="-120"/>
               </a:rPr>
               <a:t>Gastzugang: Goetheanum, offen</a:t>
             </a:r>
@@ -6811,9 +6811,9 @@
                 <a:solidFill>
                   <a:srgbClr val="6B7480"/>
                 </a:solidFill>
-                <a:latin typeface="Goetheanum Schrift Klar" pitchFamily="34" charset="0"/>
-                <a:ea typeface="Goetheanum Schrift Klar" pitchFamily="34" charset="-122"/>
-                <a:cs typeface="Goetheanum Schrift Klar" pitchFamily="34" charset="-120"/>
+                <a:latin typeface="Goetheanum Schrift" pitchFamily="34" charset="0"/>
+                <a:ea typeface="Goetheanum Schrift" pitchFamily="34" charset="-122"/>
+                <a:cs typeface="Goetheanum Schrift" pitchFamily="34" charset="-120"/>
               </a:rPr>
               <a:t>Zugang über den Westeingang</a:t>
             </a:r>
@@ -6912,9 +6912,9 @@
                 <a:solidFill>
                   <a:srgbClr val="6B7480"/>
                 </a:solidFill>
-                <a:latin typeface="Goetheanum Schrift Klar" pitchFamily="34" charset="0"/>
-                <a:ea typeface="Goetheanum Schrift Klar" pitchFamily="34" charset="-122"/>
-                <a:cs typeface="Goetheanum Schrift Klar" pitchFamily="34" charset="-120"/>
+                <a:latin typeface="Goetheanum Schrift" pitchFamily="34" charset="0"/>
+                <a:ea typeface="Goetheanum Schrift" pitchFamily="34" charset="-122"/>
+                <a:cs typeface="Goetheanum Schrift" pitchFamily="34" charset="-120"/>
               </a:rPr>
               <a:t>Frei, Kollekte am Ausgang</a:t>
             </a:r>
@@ -7013,9 +7013,9 @@
                 <a:solidFill>
                   <a:srgbClr val="6B7480"/>
                 </a:solidFill>
-                <a:latin typeface="Goetheanum Schrift Klar" pitchFamily="34" charset="0"/>
-                <a:ea typeface="Goetheanum Schrift Klar" pitchFamily="34" charset="-122"/>
-                <a:cs typeface="Goetheanum Schrift Klar" pitchFamily="34" charset="-120"/>
+                <a:latin typeface="Goetheanum Schrift" pitchFamily="34" charset="0"/>
+                <a:ea typeface="Goetheanum Schrift" pitchFamily="34" charset="-122"/>
+                <a:cs typeface="Goetheanum Schrift" pitchFamily="34" charset="-120"/>
               </a:rPr>
               <a:t>Bitte keine Aufnahmen im Saal</a:t>
             </a:r>
@@ -7052,9 +7052,9 @@
                 <a:solidFill>
                   <a:srgbClr val="6B7480"/>
                 </a:solidFill>
-                <a:latin typeface="Goetheanum Schrift Klar" pitchFamily="34" charset="0"/>
-                <a:ea typeface="Goetheanum Schrift Klar" pitchFamily="34" charset="-122"/>
-                <a:cs typeface="Goetheanum Schrift Klar" pitchFamily="34" charset="-120"/>
+                <a:latin typeface="Goetheanum Schrift" pitchFamily="34" charset="0"/>
+                <a:ea typeface="Goetheanum Schrift" pitchFamily="34" charset="-122"/>
+                <a:cs typeface="Goetheanum Schrift" pitchFamily="34" charset="-120"/>
               </a:rPr>
               <a:t>Piktogramme: Schrift ‹Goetheanum Icons›, Belegung im </a:t>
             </a:r>
@@ -7066,9 +7066,9 @@
                 <a:solidFill>
                   <a:srgbClr val="005EB8"/>
                 </a:solidFill>
-                <a:latin typeface="Goetheanum Schrift Klar" pitchFamily="34" charset="0"/>
-                <a:ea typeface="Goetheanum Schrift Klar" pitchFamily="34" charset="-122"/>
-                <a:cs typeface="Goetheanum Schrift Klar" pitchFamily="34" charset="-120"/>
+                <a:latin typeface="Goetheanum Schrift" pitchFamily="34" charset="0"/>
+                <a:ea typeface="Goetheanum Schrift" pitchFamily="34" charset="-122"/>
+                <a:cs typeface="Goetheanum Schrift" pitchFamily="34" charset="-120"/>
                 <a:hlinkClick r:id="rId1" invalidUrl="" action="" tgtFrame="" tooltip="" history="1" highlightClick="0" endSnd="0">
                   <a:extLst>
                     <a:ext uri="{A12FA001-AC4F-418D-AE19-62706E023703}">
@@ -7115,9 +7115,9 @@
                 <a:solidFill>
                   <a:srgbClr val="6B7480"/>
                 </a:solidFill>
-                <a:latin typeface="Goetheanum Schrift Klar"/>
-                <a:ea typeface="Goetheanum Schrift Klar"/>
-                <a:cs typeface="Goetheanum Schrift Klar"/>
+                <a:latin typeface="Goetheanum Schrift"/>
+                <a:ea typeface="Goetheanum Schrift"/>
+                <a:cs typeface="Goetheanum Schrift"/>
               </a:defRPr>
             </a:lvl1pPr>
           </a:lstStyle>
@@ -7184,13 +7184,13 @@
               <a:buNone/>
             </a:pPr>
             <a:r>
-              <a:rPr lang="en-US" sz="2600" dirty="0">
+              <a:rPr i="1" lang="en-US" sz="2600" dirty="0">
                 <a:solidFill>
                   <a:srgbClr val="1A1A1A"/>
                 </a:solidFill>
-                <a:latin typeface="Goetheanum Schrift Leise" pitchFamily="34" charset="0"/>
-                <a:ea typeface="Goetheanum Schrift Leise" pitchFamily="34" charset="-122"/>
-                <a:cs typeface="Goetheanum Schrift Leise" pitchFamily="34" charset="-120"/>
+                <a:latin typeface="Goetheanum Schrift" pitchFamily="34" charset="0"/>
+                <a:ea typeface="Goetheanum Schrift" pitchFamily="34" charset="-122"/>
+                <a:cs typeface="Goetheanum Schrift" pitchFamily="34" charset="-120"/>
               </a:rPr>
               <a:t>Ein Zitat oder eine These steht</a:t>
             </a:r>
@@ -7204,13 +7204,13 @@
               <a:buNone/>
             </a:pPr>
             <a:r>
-              <a:rPr lang="en-US" sz="2600" dirty="0">
+              <a:rPr i="1" lang="en-US" sz="2600" dirty="0">
                 <a:solidFill>
                   <a:srgbClr val="1A1A1A"/>
                 </a:solidFill>
-                <a:latin typeface="Goetheanum Schrift Leise" pitchFamily="34" charset="0"/>
-                <a:ea typeface="Goetheanum Schrift Leise" pitchFamily="34" charset="-122"/>
-                <a:cs typeface="Goetheanum Schrift Leise" pitchFamily="34" charset="-120"/>
+                <a:latin typeface="Goetheanum Schrift" pitchFamily="34" charset="0"/>
+                <a:ea typeface="Goetheanum Schrift" pitchFamily="34" charset="-122"/>
+                <a:cs typeface="Goetheanum Schrift" pitchFamily="34" charset="-120"/>
               </a:rPr>
               <a:t>allein auf der Folie, gesetzt in Leise,</a:t>
             </a:r>
@@ -7224,13 +7224,13 @@
               <a:buNone/>
             </a:pPr>
             <a:r>
-              <a:rPr lang="en-US" sz="2600" dirty="0">
+              <a:rPr i="1" lang="en-US" sz="2600" dirty="0">
                 <a:solidFill>
                   <a:srgbClr val="1A1A1A"/>
                 </a:solidFill>
-                <a:latin typeface="Goetheanum Schrift Leise" pitchFamily="34" charset="0"/>
-                <a:ea typeface="Goetheanum Schrift Leise" pitchFamily="34" charset="-122"/>
-                <a:cs typeface="Goetheanum Schrift Leise" pitchFamily="34" charset="-120"/>
+                <a:latin typeface="Goetheanum Schrift" pitchFamily="34" charset="0"/>
+                <a:ea typeface="Goetheanum Schrift" pitchFamily="34" charset="-122"/>
+                <a:cs typeface="Goetheanum Schrift" pitchFamily="34" charset="-120"/>
               </a:rPr>
               <a:t>gross, ruhig, ohne Beiwerk.</a:t>
             </a:r>
@@ -7267,9 +7267,9 @@
                 <a:solidFill>
                   <a:srgbClr val="6B7480"/>
                 </a:solidFill>
-                <a:latin typeface="Goetheanum Schrift Klar" pitchFamily="34" charset="0"/>
-                <a:ea typeface="Goetheanum Schrift Klar" pitchFamily="34" charset="-122"/>
-                <a:cs typeface="Goetheanum Schrift Klar" pitchFamily="34" charset="-120"/>
+                <a:latin typeface="Goetheanum Schrift" pitchFamily="34" charset="0"/>
+                <a:ea typeface="Goetheanum Schrift" pitchFamily="34" charset="-122"/>
+                <a:cs typeface="Goetheanum Schrift" pitchFamily="34" charset="-120"/>
               </a:rPr>
               <a:t>Vorname Name, Funktion · Quelle, Jahr</a:t>
             </a:r>
@@ -7309,9 +7309,9 @@
                 <a:solidFill>
                   <a:srgbClr val="6B7480"/>
                 </a:solidFill>
-                <a:latin typeface="Goetheanum Schrift Klar"/>
-                <a:ea typeface="Goetheanum Schrift Klar"/>
-                <a:cs typeface="Goetheanum Schrift Klar"/>
+                <a:latin typeface="Goetheanum Schrift"/>
+                <a:ea typeface="Goetheanum Schrift"/>
+                <a:cs typeface="Goetheanum Schrift"/>
               </a:defRPr>
             </a:lvl1pPr>
           </a:lstStyle>
@@ -7418,13 +7418,13 @@
               <a:buNone/>
             </a:pPr>
             <a:r>
-              <a:rPr lang="en-US" sz="2600" dirty="0">
+              <a:rPr i="1" lang="en-US" sz="2600" dirty="0">
                 <a:solidFill>
                   <a:srgbClr val="BFD7F0"/>
                 </a:solidFill>
-                <a:latin typeface="Goetheanum Schrift Leise" pitchFamily="34" charset="0"/>
-                <a:ea typeface="Goetheanum Schrift Leise" pitchFamily="34" charset="-122"/>
-                <a:cs typeface="Goetheanum Schrift Leise" pitchFamily="34" charset="-120"/>
+                <a:latin typeface="Goetheanum Schrift" pitchFamily="34" charset="0"/>
+                <a:ea typeface="Goetheanum Schrift" pitchFamily="34" charset="-122"/>
+                <a:cs typeface="Goetheanum Schrift" pitchFamily="34" charset="-120"/>
               </a:rPr>
               <a:t>Fragen, Unterlagen, Kontakt</a:t>
             </a:r>
@@ -7463,9 +7463,9 @@
                 <a:solidFill>
                   <a:srgbClr val="9CC3EC"/>
                 </a:solidFill>
-                <a:latin typeface="Goetheanum Schrift Klar" pitchFamily="34" charset="0"/>
-                <a:ea typeface="Goetheanum Schrift Klar" pitchFamily="34" charset="-122"/>
-                <a:cs typeface="Goetheanum Schrift Klar" pitchFamily="34" charset="-120"/>
+                <a:latin typeface="Goetheanum Schrift" pitchFamily="34" charset="0"/>
+                <a:ea typeface="Goetheanum Schrift" pitchFamily="34" charset="-122"/>
+                <a:cs typeface="Goetheanum Schrift" pitchFamily="34" charset="-120"/>
               </a:rPr>
               <a:t>vorname.name@goetheanum.ch · +41 61 706 42 42 · goetheanum.ch</a:t>
             </a:r>
@@ -7529,9 +7529,9 @@
                 <a:solidFill>
                   <a:srgbClr val="005EB8"/>
                 </a:solidFill>
-                <a:latin typeface="Goetheanum Schrift Klar" pitchFamily="34" charset="0"/>
-                <a:ea typeface="Goetheanum Schrift Klar" pitchFamily="34" charset="-122"/>
-                <a:cs typeface="Goetheanum Schrift Klar" pitchFamily="34" charset="-120"/>
+                <a:latin typeface="Goetheanum Schrift" pitchFamily="34" charset="0"/>
+                <a:ea typeface="Goetheanum Schrift" pitchFamily="34" charset="-122"/>
+                <a:cs typeface="Goetheanum Schrift" pitchFamily="34" charset="-120"/>
               </a:rPr>
               <a:t>Vorlage</a:t>
             </a:r>
@@ -7609,9 +7609,9 @@
                 <a:solidFill>
                   <a:srgbClr val="005EB8"/>
                 </a:solidFill>
-                <a:latin typeface="Goetheanum Schrift Klar" pitchFamily="34" charset="0"/>
-                <a:ea typeface="Goetheanum Schrift Klar" pitchFamily="34" charset="-122"/>
-                <a:cs typeface="Goetheanum Schrift Klar" pitchFamily="34" charset="-120"/>
+                <a:latin typeface="Goetheanum Schrift" pitchFamily="34" charset="0"/>
+                <a:ea typeface="Goetheanum Schrift" pitchFamily="34" charset="-122"/>
+                <a:cs typeface="Goetheanum Schrift" pitchFamily="34" charset="-120"/>
               </a:rPr>
               <a:t>Plakat 50</a:t>
             </a:r>
@@ -7644,13 +7644,13 @@
               <a:buNone/>
             </a:pPr>
             <a:r>
-              <a:rPr lang="en-US" sz="5000" dirty="0">
+              <a:rPr i="1" lang="en-US" sz="5000" dirty="0">
                 <a:solidFill>
                   <a:srgbClr val="1A1A1A"/>
                 </a:solidFill>
-                <a:latin typeface="Goetheanum Schrift Leise" pitchFamily="34" charset="0"/>
-                <a:ea typeface="Goetheanum Schrift Leise" pitchFamily="34" charset="-122"/>
-                <a:cs typeface="Goetheanum Schrift Leise" pitchFamily="34" charset="-120"/>
+                <a:latin typeface="Goetheanum Schrift" pitchFamily="34" charset="0"/>
+                <a:ea typeface="Goetheanum Schrift" pitchFamily="34" charset="-122"/>
+                <a:cs typeface="Goetheanum Schrift" pitchFamily="34" charset="-120"/>
               </a:rPr>
               <a:t>Zuerst das </a:t>
             </a:r>
@@ -7698,9 +7698,9 @@
                 <a:solidFill>
                   <a:srgbClr val="005EB8"/>
                 </a:solidFill>
-                <a:latin typeface="Goetheanum Schrift Klar" pitchFamily="34" charset="0"/>
-                <a:ea typeface="Goetheanum Schrift Klar" pitchFamily="34" charset="-122"/>
-                <a:cs typeface="Goetheanum Schrift Klar" pitchFamily="34" charset="-120"/>
+                <a:latin typeface="Goetheanum Schrift" pitchFamily="34" charset="0"/>
+                <a:ea typeface="Goetheanum Schrift" pitchFamily="34" charset="-122"/>
+                <a:cs typeface="Goetheanum Schrift" pitchFamily="34" charset="-120"/>
               </a:rPr>
               <a:t>Überschrift 26</a:t>
             </a:r>
@@ -7776,9 +7776,9 @@
                 <a:solidFill>
                   <a:srgbClr val="005EB8"/>
                 </a:solidFill>
-                <a:latin typeface="Goetheanum Schrift Klar" pitchFamily="34" charset="0"/>
-                <a:ea typeface="Goetheanum Schrift Klar" pitchFamily="34" charset="-122"/>
-                <a:cs typeface="Goetheanum Schrift Klar" pitchFamily="34" charset="-120"/>
+                <a:latin typeface="Goetheanum Schrift" pitchFamily="34" charset="0"/>
+                <a:ea typeface="Goetheanum Schrift" pitchFamily="34" charset="-122"/>
+                <a:cs typeface="Goetheanum Schrift" pitchFamily="34" charset="-120"/>
               </a:rPr>
               <a:t>Lead 18</a:t>
             </a:r>
@@ -7815,9 +7815,9 @@
                 <a:solidFill>
                   <a:srgbClr val="1A1A1A"/>
                 </a:solidFill>
-                <a:latin typeface="Goetheanum Schrift Klar" pitchFamily="34" charset="0"/>
-                <a:ea typeface="Goetheanum Schrift Klar" pitchFamily="34" charset="-122"/>
-                <a:cs typeface="Goetheanum Schrift Klar" pitchFamily="34" charset="-120"/>
+                <a:latin typeface="Goetheanum Schrift" pitchFamily="34" charset="0"/>
+                <a:ea typeface="Goetheanum Schrift" pitchFamily="34" charset="-122"/>
+                <a:cs typeface="Goetheanum Schrift" pitchFamily="34" charset="-120"/>
               </a:rPr>
               <a:t>Ein Vorspann sammelt das Wichtige</a:t>
             </a:r>
@@ -7854,9 +7854,9 @@
                 <a:solidFill>
                   <a:srgbClr val="005EB8"/>
                 </a:solidFill>
-                <a:latin typeface="Goetheanum Schrift Klar" pitchFamily="34" charset="0"/>
-                <a:ea typeface="Goetheanum Schrift Klar" pitchFamily="34" charset="-122"/>
-                <a:cs typeface="Goetheanum Schrift Klar" pitchFamily="34" charset="-120"/>
+                <a:latin typeface="Goetheanum Schrift" pitchFamily="34" charset="0"/>
+                <a:ea typeface="Goetheanum Schrift" pitchFamily="34" charset="-122"/>
+                <a:cs typeface="Goetheanum Schrift" pitchFamily="34" charset="-120"/>
               </a:rPr>
               <a:t>Grundtext 13</a:t>
             </a:r>
@@ -7893,9 +7893,9 @@
                 <a:solidFill>
                   <a:srgbClr val="1A1A1A"/>
                 </a:solidFill>
-                <a:latin typeface="Goetheanum Schrift Klar" pitchFamily="34" charset="0"/>
-                <a:ea typeface="Goetheanum Schrift Klar" pitchFamily="34" charset="-122"/>
-                <a:cs typeface="Goetheanum Schrift Klar" pitchFamily="34" charset="-120"/>
+                <a:latin typeface="Goetheanum Schrift" pitchFamily="34" charset="0"/>
+                <a:ea typeface="Goetheanum Schrift" pitchFamily="34" charset="-122"/>
+                <a:cs typeface="Goetheanum Schrift" pitchFamily="34" charset="-120"/>
               </a:rPr>
               <a:t>Der Grundtext erzählt ruhig und genau.</a:t>
             </a:r>
@@ -7932,9 +7932,9 @@
                 <a:solidFill>
                   <a:srgbClr val="005EB8"/>
                 </a:solidFill>
-                <a:latin typeface="Goetheanum Schrift Klar" pitchFamily="34" charset="0"/>
-                <a:ea typeface="Goetheanum Schrift Klar" pitchFamily="34" charset="-122"/>
-                <a:cs typeface="Goetheanum Schrift Klar" pitchFamily="34" charset="-120"/>
+                <a:latin typeface="Goetheanum Schrift" pitchFamily="34" charset="0"/>
+                <a:ea typeface="Goetheanum Schrift" pitchFamily="34" charset="-122"/>
+                <a:cs typeface="Goetheanum Schrift" pitchFamily="34" charset="-120"/>
               </a:rPr>
               <a:t>Marginalie 9</a:t>
             </a:r>
@@ -7971,9 +7971,9 @@
                 <a:solidFill>
                   <a:srgbClr val="1A1A1A"/>
                 </a:solidFill>
-                <a:latin typeface="Goetheanum Schrift Klar" pitchFamily="34" charset="0"/>
-                <a:ea typeface="Goetheanum Schrift Klar" pitchFamily="34" charset="-122"/>
-                <a:cs typeface="Goetheanum Schrift Klar" pitchFamily="34" charset="-120"/>
+                <a:latin typeface="Goetheanum Schrift" pitchFamily="34" charset="0"/>
+                <a:ea typeface="Goetheanum Schrift" pitchFamily="34" charset="-122"/>
+                <a:cs typeface="Goetheanum Schrift" pitchFamily="34" charset="-120"/>
               </a:rPr>
               <a:t>Die Marginalie begleitet am Rand.</a:t>
             </a:r>
@@ -8010,9 +8010,9 @@
                 <a:solidFill>
                   <a:srgbClr val="005EB8"/>
                 </a:solidFill>
-                <a:latin typeface="Goetheanum Schrift Klar" pitchFamily="34" charset="0"/>
-                <a:ea typeface="Goetheanum Schrift Klar" pitchFamily="34" charset="-122"/>
-                <a:cs typeface="Goetheanum Schrift Klar" pitchFamily="34" charset="-120"/>
+                <a:latin typeface="Goetheanum Schrift" pitchFamily="34" charset="0"/>
+                <a:ea typeface="Goetheanum Schrift" pitchFamily="34" charset="-122"/>
+                <a:cs typeface="Goetheanum Schrift" pitchFamily="34" charset="-120"/>
               </a:rPr>
               <a:t>Dicke</a:t>
             </a:r>
@@ -8045,13 +8045,13 @@
               <a:buNone/>
             </a:pPr>
             <a:r>
-              <a:rPr lang="en-US" sz="1300" dirty="0">
+              <a:rPr i="1" lang="en-US" sz="1300" dirty="0">
                 <a:solidFill>
                   <a:srgbClr val="1A1A1A"/>
                 </a:solidFill>
-                <a:latin typeface="Goetheanum Schrift Leise" pitchFamily="34" charset="0"/>
-                <a:ea typeface="Goetheanum Schrift Leise" pitchFamily="34" charset="-122"/>
-                <a:cs typeface="Goetheanum Schrift Leise" pitchFamily="34" charset="-120"/>
+                <a:latin typeface="Goetheanum Schrift" pitchFamily="34" charset="0"/>
+                <a:ea typeface="Goetheanum Schrift" pitchFamily="34" charset="-122"/>
+                <a:cs typeface="Goetheanum Schrift" pitchFamily="34" charset="-120"/>
               </a:rPr>
               <a:t>Leise dämpft</a:t>
             </a:r>
@@ -8127,9 +8127,9 @@
                 <a:solidFill>
                   <a:srgbClr val="1A1A1A"/>
                 </a:solidFill>
-                <a:latin typeface="Goetheanum Schrift Klar" pitchFamily="34" charset="0"/>
-                <a:ea typeface="Goetheanum Schrift Klar" pitchFamily="34" charset="-122"/>
-                <a:cs typeface="Goetheanum Schrift Klar" pitchFamily="34" charset="-120"/>
+                <a:latin typeface="Goetheanum Schrift" pitchFamily="34" charset="0"/>
+                <a:ea typeface="Goetheanum Schrift" pitchFamily="34" charset="-122"/>
+                <a:cs typeface="Goetheanum Schrift" pitchFamily="34" charset="-120"/>
               </a:rPr>
               <a:t>Klar erzählt</a:t>
             </a:r>
@@ -8201,24 +8201,24 @@
               <a:buNone/>
             </a:pPr>
             <a:r>
+              <a:rPr b="1" lang="en-US" sz="1300" dirty="0">
+                <a:solidFill>
+                  <a:srgbClr val="1A1A1A"/>
+                </a:solidFill>
+                <a:latin typeface="Goetheanum Schrift" pitchFamily="34" charset="0"/>
+                <a:ea typeface="Goetheanum Schrift" pitchFamily="34" charset="-122"/>
+                <a:cs typeface="Goetheanum Schrift" pitchFamily="34" charset="-120"/>
+              </a:rPr>
+              <a:t>Laut</a:t>
+            </a:r>
+            <a:r>
               <a:rPr lang="en-US" sz="1300" dirty="0">
                 <a:solidFill>
                   <a:srgbClr val="1A1A1A"/>
                 </a:solidFill>
-                <a:latin typeface="Goetheanum Schrift Laut" pitchFamily="34" charset="0"/>
-                <a:ea typeface="Goetheanum Schrift Laut" pitchFamily="34" charset="-122"/>
-                <a:cs typeface="Goetheanum Schrift Laut" pitchFamily="34" charset="-120"/>
-              </a:rPr>
-              <a:t>Laut</a:t>
-            </a:r>
-            <a:r>
-              <a:rPr lang="en-US" sz="1300" dirty="0">
-                <a:solidFill>
-                  <a:srgbClr val="1A1A1A"/>
-                </a:solidFill>
-                <a:latin typeface="Goetheanum Schrift Klar" pitchFamily="34" charset="0"/>
-                <a:ea typeface="Goetheanum Schrift Klar" pitchFamily="34" charset="-122"/>
-                <a:cs typeface="Goetheanum Schrift Klar" pitchFamily="34" charset="-120"/>
+                <a:latin typeface="Goetheanum Schrift" pitchFamily="34" charset="0"/>
+                <a:ea typeface="Goetheanum Schrift" pitchFamily="34" charset="-122"/>
+                <a:cs typeface="Goetheanum Schrift" pitchFamily="34" charset="-120"/>
               </a:rPr>
               <a:t> betont</a:t>
             </a:r>
@@ -8255,9 +8255,9 @@
                 <a:solidFill>
                   <a:srgbClr val="6B7480"/>
                 </a:solidFill>
-                <a:latin typeface="Goetheanum Schrift Klar" pitchFamily="34" charset="0"/>
-                <a:ea typeface="Goetheanum Schrift Klar" pitchFamily="34" charset="-122"/>
-                <a:cs typeface="Goetheanum Schrift Klar" pitchFamily="34" charset="-120"/>
+                <a:latin typeface="Goetheanum Schrift" pitchFamily="34" charset="0"/>
+                <a:ea typeface="Goetheanum Schrift" pitchFamily="34" charset="-122"/>
+                <a:cs typeface="Goetheanum Schrift" pitchFamily="34" charset="-120"/>
               </a:rPr>
               <a:t>In Klar-Text schaltet Strg+B auf Laut und Strg+I auf Leise.</a:t>
             </a:r>
@@ -8294,9 +8294,9 @@
                 <a:solidFill>
                   <a:srgbClr val="005EB8"/>
                 </a:solidFill>
-                <a:latin typeface="Goetheanum Schrift Klar" pitchFamily="34" charset="0"/>
-                <a:ea typeface="Goetheanum Schrift Klar" pitchFamily="34" charset="-122"/>
-                <a:cs typeface="Goetheanum Schrift Klar" pitchFamily="34" charset="-120"/>
+                <a:latin typeface="Goetheanum Schrift" pitchFamily="34" charset="0"/>
+                <a:ea typeface="Goetheanum Schrift" pitchFamily="34" charset="-122"/>
+                <a:cs typeface="Goetheanum Schrift" pitchFamily="34" charset="-120"/>
               </a:rPr>
               <a:t>Regel</a:t>
             </a:r>
@@ -8333,9 +8333,9 @@
                 <a:solidFill>
                   <a:srgbClr val="1A1A1A"/>
                 </a:solidFill>
-                <a:latin typeface="Goetheanum Schrift Klar" pitchFamily="34" charset="0"/>
-                <a:ea typeface="Goetheanum Schrift Klar" pitchFamily="34" charset="-122"/>
-                <a:cs typeface="Goetheanum Schrift Klar" pitchFamily="34" charset="-120"/>
+                <a:latin typeface="Goetheanum Schrift" pitchFamily="34" charset="0"/>
+                <a:ea typeface="Goetheanum Schrift" pitchFamily="34" charset="-122"/>
+                <a:cs typeface="Goetheanum Schrift" pitchFamily="34" charset="-120"/>
               </a:rPr>
               <a:t>Anführungen stehen in einfachen Guillemets: ‹so›. Überschriften stehen in Deutlich.</a:t>
             </a:r>
@@ -8372,9 +8372,9 @@
                 <a:solidFill>
                   <a:srgbClr val="6B7480"/>
                 </a:solidFill>
-                <a:latin typeface="Goetheanum Schrift Klar" pitchFamily="34" charset="0"/>
-                <a:ea typeface="Goetheanum Schrift Klar" pitchFamily="34" charset="-122"/>
-                <a:cs typeface="Goetheanum Schrift Klar" pitchFamily="34" charset="-120"/>
+                <a:latin typeface="Goetheanum Schrift" pitchFamily="34" charset="0"/>
+                <a:ea typeface="Goetheanum Schrift" pitchFamily="34" charset="-122"/>
+                <a:cs typeface="Goetheanum Schrift" pitchFamily="34" charset="-120"/>
               </a:rPr>
               <a:t>Schriften installieren: </a:t>
             </a:r>
@@ -8386,9 +8386,9 @@
                 <a:solidFill>
                   <a:srgbClr val="005EB8"/>
                 </a:solidFill>
-                <a:latin typeface="Goetheanum Schrift Klar" pitchFamily="34" charset="0"/>
-                <a:ea typeface="Goetheanum Schrift Klar" pitchFamily="34" charset="-122"/>
-                <a:cs typeface="Goetheanum Schrift Klar" pitchFamily="34" charset="-120"/>
+                <a:latin typeface="Goetheanum Schrift" pitchFamily="34" charset="0"/>
+                <a:ea typeface="Goetheanum Schrift" pitchFamily="34" charset="-122"/>
+                <a:cs typeface="Goetheanum Schrift" pitchFamily="34" charset="-120"/>
                 <a:hlinkClick r:id="rId1" invalidUrl="" action="" tgtFrame="" tooltip="" history="1" highlightClick="0" endSnd="0">
                   <a:extLst>
                     <a:ext uri="{A12FA001-AC4F-418D-AE19-62706E023703}">
@@ -8435,9 +8435,9 @@
                 <a:solidFill>
                   <a:srgbClr val="6B7480"/>
                 </a:solidFill>
-                <a:latin typeface="Goetheanum Schrift Klar"/>
-                <a:ea typeface="Goetheanum Schrift Klar"/>
-                <a:cs typeface="Goetheanum Schrift Klar"/>
+                <a:latin typeface="Goetheanum Schrift"/>
+                <a:ea typeface="Goetheanum Schrift"/>
+                <a:cs typeface="Goetheanum Schrift"/>
               </a:defRPr>
             </a:lvl1pPr>
           </a:lstStyle>
@@ -8507,9 +8507,9 @@
                 <a:solidFill>
                   <a:srgbClr val="005EB8"/>
                 </a:solidFill>
-                <a:latin typeface="Goetheanum Schrift Klar" pitchFamily="34" charset="0"/>
-                <a:ea typeface="Goetheanum Schrift Klar" pitchFamily="34" charset="-122"/>
-                <a:cs typeface="Goetheanum Schrift Klar" pitchFamily="34" charset="-120"/>
+                <a:latin typeface="Goetheanum Schrift" pitchFamily="34" charset="0"/>
+                <a:ea typeface="Goetheanum Schrift" pitchFamily="34" charset="-122"/>
+                <a:cs typeface="Goetheanum Schrift" pitchFamily="34" charset="-120"/>
               </a:rPr>
               <a:t>Vorlage</a:t>
             </a:r>
@@ -8583,13 +8583,13 @@
               <a:buNone/>
             </a:pPr>
             <a:r>
-              <a:rPr lang="en-US" sz="1800" dirty="0">
+              <a:rPr i="1" lang="en-US" sz="1800" dirty="0">
                 <a:solidFill>
                   <a:srgbClr val="6B7480"/>
                 </a:solidFill>
-                <a:latin typeface="Goetheanum Schrift Leise" pitchFamily="34" charset="0"/>
-                <a:ea typeface="Goetheanum Schrift Leise" pitchFamily="34" charset="-122"/>
-                <a:cs typeface="Goetheanum Schrift Leise" pitchFamily="34" charset="-120"/>
+                <a:latin typeface="Goetheanum Schrift" pitchFamily="34" charset="0"/>
+                <a:ea typeface="Goetheanum Schrift" pitchFamily="34" charset="-122"/>
+                <a:cs typeface="Goetheanum Schrift" pitchFamily="34" charset="-120"/>
               </a:rPr>
               <a:t>Schrift </a:t>
             </a:r>
@@ -8597,13 +8597,13 @@
               <a:buNone/>
             </a:pPr>
             <a:r>
-              <a:rPr lang="en-US" sz="1800" dirty="0">
+              <a:rPr i="1" lang="en-US" sz="1800" dirty="0">
                 <a:solidFill>
                   <a:srgbClr val="6B7480"/>
                 </a:solidFill>
-                <a:latin typeface="Goetheanum Schrift Leise" pitchFamily="34" charset="0"/>
-                <a:ea typeface="Goetheanum Schrift Leise" pitchFamily="34" charset="-122"/>
-                <a:cs typeface="Goetheanum Schrift Leise" pitchFamily="34" charset="-120"/>
+                <a:latin typeface="Goetheanum Schrift" pitchFamily="34" charset="0"/>
+                <a:ea typeface="Goetheanum Schrift" pitchFamily="34" charset="-122"/>
+                <a:cs typeface="Goetheanum Schrift" pitchFamily="34" charset="-120"/>
               </a:rPr>
               <a:t>‹Goetheanum Icons›</a:t>
             </a:r>
@@ -8611,13 +8611,13 @@
               <a:buNone/>
             </a:pPr>
             <a:r>
-              <a:rPr lang="en-US" sz="1800" dirty="0">
+              <a:rPr i="1" lang="en-US" sz="1800" dirty="0">
                 <a:solidFill>
                   <a:srgbClr val="6B7480"/>
                 </a:solidFill>
-                <a:latin typeface="Goetheanum Schrift Leise" pitchFamily="34" charset="0"/>
-                <a:ea typeface="Goetheanum Schrift Leise" pitchFamily="34" charset="-122"/>
-                <a:cs typeface="Goetheanum Schrift Leise" pitchFamily="34" charset="-120"/>
+                <a:latin typeface="Goetheanum Schrift" pitchFamily="34" charset="0"/>
+                <a:ea typeface="Goetheanum Schrift" pitchFamily="34" charset="-122"/>
+                <a:cs typeface="Goetheanum Schrift" pitchFamily="34" charset="-120"/>
               </a:rPr>
               <a:t> wählen, Buchstaben tippen.</a:t>
             </a:r>
@@ -8732,9 +8732,9 @@
                 <a:solidFill>
                   <a:srgbClr val="6B7480"/>
                 </a:solidFill>
-                <a:latin typeface="Goetheanum Schrift Klar" pitchFamily="34" charset="0"/>
-                <a:ea typeface="Goetheanum Schrift Klar" pitchFamily="34" charset="-122"/>
-                <a:cs typeface="Goetheanum Schrift Klar" pitchFamily="34" charset="-120"/>
+                <a:latin typeface="Goetheanum Schrift" pitchFamily="34" charset="0"/>
+                <a:ea typeface="Goetheanum Schrift" pitchFamily="34" charset="-122"/>
+                <a:cs typeface="Goetheanum Schrift" pitchFamily="34" charset="-120"/>
               </a:rPr>
               <a:t>WLAN</a:t>
             </a:r>
@@ -8849,9 +8849,9 @@
                 <a:solidFill>
                   <a:srgbClr val="6B7480"/>
                 </a:solidFill>
-                <a:latin typeface="Goetheanum Schrift Klar" pitchFamily="34" charset="0"/>
-                <a:ea typeface="Goetheanum Schrift Klar" pitchFamily="34" charset="-122"/>
-                <a:cs typeface="Goetheanum Schrift Klar" pitchFamily="34" charset="-120"/>
+                <a:latin typeface="Goetheanum Schrift" pitchFamily="34" charset="0"/>
+                <a:ea typeface="Goetheanum Schrift" pitchFamily="34" charset="-122"/>
+                <a:cs typeface="Goetheanum Schrift" pitchFamily="34" charset="-120"/>
               </a:rPr>
               <a:t>Lift</a:t>
             </a:r>
@@ -8966,9 +8966,9 @@
                 <a:solidFill>
                   <a:srgbClr val="6B7480"/>
                 </a:solidFill>
-                <a:latin typeface="Goetheanum Schrift Klar" pitchFamily="34" charset="0"/>
-                <a:ea typeface="Goetheanum Schrift Klar" pitchFamily="34" charset="-122"/>
-                <a:cs typeface="Goetheanum Schrift Klar" pitchFamily="34" charset="-120"/>
+                <a:latin typeface="Goetheanum Schrift" pitchFamily="34" charset="0"/>
+                <a:ea typeface="Goetheanum Schrift" pitchFamily="34" charset="-122"/>
+                <a:cs typeface="Goetheanum Schrift" pitchFamily="34" charset="-120"/>
               </a:rPr>
               <a:t>Treppe</a:t>
             </a:r>
@@ -9083,9 +9083,9 @@
                 <a:solidFill>
                   <a:srgbClr val="6B7480"/>
                 </a:solidFill>
-                <a:latin typeface="Goetheanum Schrift Klar" pitchFamily="34" charset="0"/>
-                <a:ea typeface="Goetheanum Schrift Klar" pitchFamily="34" charset="-122"/>
-                <a:cs typeface="Goetheanum Schrift Klar" pitchFamily="34" charset="-120"/>
+                <a:latin typeface="Goetheanum Schrift" pitchFamily="34" charset="0"/>
+                <a:ea typeface="Goetheanum Schrift" pitchFamily="34" charset="-122"/>
+                <a:cs typeface="Goetheanum Schrift" pitchFamily="34" charset="-120"/>
               </a:rPr>
               <a:t>WC Rollstuhl</a:t>
             </a:r>
@@ -9200,9 +9200,9 @@
                 <a:solidFill>
                   <a:srgbClr val="6B7480"/>
                 </a:solidFill>
-                <a:latin typeface="Goetheanum Schrift Klar" pitchFamily="34" charset="0"/>
-                <a:ea typeface="Goetheanum Schrift Klar" pitchFamily="34" charset="-122"/>
-                <a:cs typeface="Goetheanum Schrift Klar" pitchFamily="34" charset="-120"/>
+                <a:latin typeface="Goetheanum Schrift" pitchFamily="34" charset="0"/>
+                <a:ea typeface="Goetheanum Schrift" pitchFamily="34" charset="-122"/>
+                <a:cs typeface="Goetheanum Schrift" pitchFamily="34" charset="-120"/>
               </a:rPr>
               <a:t>Eintritt</a:t>
             </a:r>
@@ -9317,9 +9317,9 @@
                 <a:solidFill>
                   <a:srgbClr val="6B7480"/>
                 </a:solidFill>
-                <a:latin typeface="Goetheanum Schrift Klar" pitchFamily="34" charset="0"/>
-                <a:ea typeface="Goetheanum Schrift Klar" pitchFamily="34" charset="-122"/>
-                <a:cs typeface="Goetheanum Schrift Klar" pitchFamily="34" charset="-120"/>
+                <a:latin typeface="Goetheanum Schrift" pitchFamily="34" charset="0"/>
+                <a:ea typeface="Goetheanum Schrift" pitchFamily="34" charset="-122"/>
+                <a:cs typeface="Goetheanum Schrift" pitchFamily="34" charset="-120"/>
               </a:rPr>
               <a:t>WC Gruppe</a:t>
             </a:r>
@@ -9434,9 +9434,9 @@
                 <a:solidFill>
                   <a:srgbClr val="6B7480"/>
                 </a:solidFill>
-                <a:latin typeface="Goetheanum Schrift Klar" pitchFamily="34" charset="0"/>
-                <a:ea typeface="Goetheanum Schrift Klar" pitchFamily="34" charset="-122"/>
-                <a:cs typeface="Goetheanum Schrift Klar" pitchFamily="34" charset="-120"/>
+                <a:latin typeface="Goetheanum Schrift" pitchFamily="34" charset="0"/>
+                <a:ea typeface="Goetheanum Schrift" pitchFamily="34" charset="-122"/>
+                <a:cs typeface="Goetheanum Schrift" pitchFamily="34" charset="-120"/>
               </a:rPr>
               <a:t>Restmüll</a:t>
             </a:r>
@@ -9551,9 +9551,9 @@
                 <a:solidFill>
                   <a:srgbClr val="6B7480"/>
                 </a:solidFill>
-                <a:latin typeface="Goetheanum Schrift Klar" pitchFamily="34" charset="0"/>
-                <a:ea typeface="Goetheanum Schrift Klar" pitchFamily="34" charset="-122"/>
-                <a:cs typeface="Goetheanum Schrift Klar" pitchFamily="34" charset="-120"/>
+                <a:latin typeface="Goetheanum Schrift" pitchFamily="34" charset="0"/>
+                <a:ea typeface="Goetheanum Schrift" pitchFamily="34" charset="-122"/>
+                <a:cs typeface="Goetheanum Schrift" pitchFamily="34" charset="-120"/>
               </a:rPr>
               <a:t>Bioabfall</a:t>
             </a:r>
@@ -9668,9 +9668,9 @@
                 <a:solidFill>
                   <a:srgbClr val="6B7480"/>
                 </a:solidFill>
-                <a:latin typeface="Goetheanum Schrift Klar" pitchFamily="34" charset="0"/>
-                <a:ea typeface="Goetheanum Schrift Klar" pitchFamily="34" charset="-122"/>
-                <a:cs typeface="Goetheanum Schrift Klar" pitchFamily="34" charset="-120"/>
+                <a:latin typeface="Goetheanum Schrift" pitchFamily="34" charset="0"/>
+                <a:ea typeface="Goetheanum Schrift" pitchFamily="34" charset="-122"/>
+                <a:cs typeface="Goetheanum Schrift" pitchFamily="34" charset="-120"/>
               </a:rPr>
               <a:t>Nur mit Augen</a:t>
             </a:r>
@@ -9785,9 +9785,9 @@
                 <a:solidFill>
                   <a:srgbClr val="6B7480"/>
                 </a:solidFill>
-                <a:latin typeface="Goetheanum Schrift Klar" pitchFamily="34" charset="0"/>
-                <a:ea typeface="Goetheanum Schrift Klar" pitchFamily="34" charset="-122"/>
-                <a:cs typeface="Goetheanum Schrift Klar" pitchFamily="34" charset="-120"/>
+                <a:latin typeface="Goetheanum Schrift" pitchFamily="34" charset="0"/>
+                <a:ea typeface="Goetheanum Schrift" pitchFamily="34" charset="-122"/>
+                <a:cs typeface="Goetheanum Schrift" pitchFamily="34" charset="-120"/>
               </a:rPr>
               <a:t>Bitte anfassen</a:t>
             </a:r>
@@ -9902,9 +9902,9 @@
                 <a:solidFill>
                   <a:srgbClr val="6B7480"/>
                 </a:solidFill>
-                <a:latin typeface="Goetheanum Schrift Klar" pitchFamily="34" charset="0"/>
-                <a:ea typeface="Goetheanum Schrift Klar" pitchFamily="34" charset="-122"/>
-                <a:cs typeface="Goetheanum Schrift Klar" pitchFamily="34" charset="-120"/>
+                <a:latin typeface="Goetheanum Schrift" pitchFamily="34" charset="0"/>
+                <a:ea typeface="Goetheanum Schrift" pitchFamily="34" charset="-122"/>
+                <a:cs typeface="Goetheanum Schrift" pitchFamily="34" charset="-120"/>
               </a:rPr>
               <a:t>WC Damen</a:t>
             </a:r>
@@ -10019,9 +10019,9 @@
                 <a:solidFill>
                   <a:srgbClr val="6B7480"/>
                 </a:solidFill>
-                <a:latin typeface="Goetheanum Schrift Klar" pitchFamily="34" charset="0"/>
-                <a:ea typeface="Goetheanum Schrift Klar" pitchFamily="34" charset="-122"/>
-                <a:cs typeface="Goetheanum Schrift Klar" pitchFamily="34" charset="-120"/>
+                <a:latin typeface="Goetheanum Schrift" pitchFamily="34" charset="0"/>
+                <a:ea typeface="Goetheanum Schrift" pitchFamily="34" charset="-122"/>
+                <a:cs typeface="Goetheanum Schrift" pitchFamily="34" charset="-120"/>
               </a:rPr>
               <a:t>Hunde anleinen</a:t>
             </a:r>
@@ -10136,9 +10136,9 @@
                 <a:solidFill>
                   <a:srgbClr val="6B7480"/>
                 </a:solidFill>
-                <a:latin typeface="Goetheanum Schrift Klar" pitchFamily="34" charset="0"/>
-                <a:ea typeface="Goetheanum Schrift Klar" pitchFamily="34" charset="-122"/>
-                <a:cs typeface="Goetheanum Schrift Klar" pitchFamily="34" charset="-120"/>
+                <a:latin typeface="Goetheanum Schrift" pitchFamily="34" charset="0"/>
+                <a:ea typeface="Goetheanum Schrift" pitchFamily="34" charset="-122"/>
+                <a:cs typeface="Goetheanum Schrift" pitchFamily="34" charset="-120"/>
               </a:rPr>
               <a:t>Keine Fotos</a:t>
             </a:r>
@@ -10253,9 +10253,9 @@
                 <a:solidFill>
                   <a:srgbClr val="6B7480"/>
                 </a:solidFill>
-                <a:latin typeface="Goetheanum Schrift Klar" pitchFamily="34" charset="0"/>
-                <a:ea typeface="Goetheanum Schrift Klar" pitchFamily="34" charset="-122"/>
-                <a:cs typeface="Goetheanum Schrift Klar" pitchFamily="34" charset="-120"/>
+                <a:latin typeface="Goetheanum Schrift" pitchFamily="34" charset="0"/>
+                <a:ea typeface="Goetheanum Schrift" pitchFamily="34" charset="-122"/>
+                <a:cs typeface="Goetheanum Schrift" pitchFamily="34" charset="-120"/>
               </a:rPr>
               <a:t>Keine Hunde</a:t>
             </a:r>
@@ -10370,9 +10370,9 @@
                 <a:solidFill>
                   <a:srgbClr val="6B7480"/>
                 </a:solidFill>
-                <a:latin typeface="Goetheanum Schrift Klar" pitchFamily="34" charset="0"/>
-                <a:ea typeface="Goetheanum Schrift Klar" pitchFamily="34" charset="-122"/>
-                <a:cs typeface="Goetheanum Schrift Klar" pitchFamily="34" charset="-120"/>
+                <a:latin typeface="Goetheanum Schrift" pitchFamily="34" charset="0"/>
+                <a:ea typeface="Goetheanum Schrift" pitchFamily="34" charset="-122"/>
+                <a:cs typeface="Goetheanum Schrift" pitchFamily="34" charset="-120"/>
               </a:rPr>
               <a:t>Draussen essen</a:t>
             </a:r>
@@ -10487,9 +10487,9 @@
                 <a:solidFill>
                   <a:srgbClr val="6B7480"/>
                 </a:solidFill>
-                <a:latin typeface="Goetheanum Schrift Klar" pitchFamily="34" charset="0"/>
-                <a:ea typeface="Goetheanum Schrift Klar" pitchFamily="34" charset="-122"/>
-                <a:cs typeface="Goetheanum Schrift Klar" pitchFamily="34" charset="-120"/>
+                <a:latin typeface="Goetheanum Schrift" pitchFamily="34" charset="0"/>
+                <a:ea typeface="Goetheanum Schrift" pitchFamily="34" charset="-122"/>
+                <a:cs typeface="Goetheanum Schrift" pitchFamily="34" charset="-120"/>
               </a:rPr>
               <a:t>Papier</a:t>
             </a:r>
@@ -10526,9 +10526,9 @@
                 <a:solidFill>
                   <a:srgbClr val="6B7480"/>
                 </a:solidFill>
-                <a:latin typeface="Goetheanum Schrift Klar" pitchFamily="34" charset="0"/>
-                <a:ea typeface="Goetheanum Schrift Klar" pitchFamily="34" charset="-122"/>
-                <a:cs typeface="Goetheanum Schrift Klar" pitchFamily="34" charset="-120"/>
+                <a:latin typeface="Goetheanum Schrift" pitchFamily="34" charset="0"/>
+                <a:ea typeface="Goetheanum Schrift" pitchFamily="34" charset="-122"/>
+                <a:cs typeface="Goetheanum Schrift" pitchFamily="34" charset="-120"/>
               </a:rPr>
               <a:t>Grossbuchstaben setzen dasselbe Zeichen mit Beschriftung. Pfeile und Kompass: Schrift ‹Goetheanum Pfeile›.</a:t>
             </a:r>
@@ -10565,9 +10565,9 @@
                 <a:solidFill>
                   <a:srgbClr val="6B7480"/>
                 </a:solidFill>
-                <a:latin typeface="Goetheanum Schrift Klar" pitchFamily="34" charset="0"/>
-                <a:ea typeface="Goetheanum Schrift Klar" pitchFamily="34" charset="-122"/>
-                <a:cs typeface="Goetheanum Schrift Klar" pitchFamily="34" charset="-120"/>
+                <a:latin typeface="Goetheanum Schrift" pitchFamily="34" charset="0"/>
+                <a:ea typeface="Goetheanum Schrift" pitchFamily="34" charset="-122"/>
+                <a:cs typeface="Goetheanum Schrift" pitchFamily="34" charset="-120"/>
               </a:rPr>
               <a:t>Alle Zeichen, Belegung und Installation: </a:t>
             </a:r>
@@ -10579,9 +10579,9 @@
                 <a:solidFill>
                   <a:srgbClr val="005EB8"/>
                 </a:solidFill>
-                <a:latin typeface="Goetheanum Schrift Klar" pitchFamily="34" charset="0"/>
-                <a:ea typeface="Goetheanum Schrift Klar" pitchFamily="34" charset="-122"/>
-                <a:cs typeface="Goetheanum Schrift Klar" pitchFamily="34" charset="-120"/>
+                <a:latin typeface="Goetheanum Schrift" pitchFamily="34" charset="0"/>
+                <a:ea typeface="Goetheanum Schrift" pitchFamily="34" charset="-122"/>
+                <a:cs typeface="Goetheanum Schrift" pitchFamily="34" charset="-120"/>
                 <a:hlinkClick r:id="rId1" invalidUrl="" action="" tgtFrame="" tooltip="" history="1" highlightClick="0" endSnd="0">
                   <a:extLst>
                     <a:ext uri="{A12FA001-AC4F-418D-AE19-62706E023703}">
@@ -10628,9 +10628,9 @@
                 <a:solidFill>
                   <a:srgbClr val="6B7480"/>
                 </a:solidFill>
-                <a:latin typeface="Goetheanum Schrift Klar"/>
-                <a:ea typeface="Goetheanum Schrift Klar"/>
-                <a:cs typeface="Goetheanum Schrift Klar"/>
+                <a:latin typeface="Goetheanum Schrift"/>
+                <a:ea typeface="Goetheanum Schrift"/>
+                <a:cs typeface="Goetheanum Schrift"/>
               </a:defRPr>
             </a:lvl1pPr>
           </a:lstStyle>
@@ -10700,9 +10700,9 @@
                 <a:solidFill>
                   <a:srgbClr val="005EB8"/>
                 </a:solidFill>
-                <a:latin typeface="Goetheanum Schrift Klar" pitchFamily="34" charset="0"/>
-                <a:ea typeface="Goetheanum Schrift Klar" pitchFamily="34" charset="-122"/>
-                <a:cs typeface="Goetheanum Schrift Klar" pitchFamily="34" charset="-120"/>
+                <a:latin typeface="Goetheanum Schrift" pitchFamily="34" charset="0"/>
+                <a:ea typeface="Goetheanum Schrift" pitchFamily="34" charset="-122"/>
+                <a:cs typeface="Goetheanum Schrift" pitchFamily="34" charset="-120"/>
               </a:rPr>
               <a:t>Agenda</a:t>
             </a:r>
@@ -10776,13 +10776,13 @@
               <a:buNone/>
             </a:pPr>
             <a:r>
-              <a:rPr lang="en-US" sz="1800" dirty="0">
+              <a:rPr i="1" lang="en-US" sz="1800" dirty="0">
                 <a:solidFill>
                   <a:srgbClr val="6B7480"/>
                 </a:solidFill>
-                <a:latin typeface="Goetheanum Schrift Leise" pitchFamily="34" charset="0"/>
-                <a:ea typeface="Goetheanum Schrift Leise" pitchFamily="34" charset="-122"/>
-                <a:cs typeface="Goetheanum Schrift Leise" pitchFamily="34" charset="-120"/>
+                <a:latin typeface="Goetheanum Schrift" pitchFamily="34" charset="0"/>
+                <a:ea typeface="Goetheanum Schrift" pitchFamily="34" charset="-122"/>
+                <a:cs typeface="Goetheanum Schrift" pitchFamily="34" charset="-120"/>
               </a:rPr>
               <a:t>1</a:t>
             </a:r>
@@ -10838,13 +10838,13 @@
               <a:buNone/>
             </a:pPr>
             <a:r>
-              <a:rPr lang="en-US" sz="1500" dirty="0">
+              <a:rPr i="1" lang="en-US" sz="1500" dirty="0">
                 <a:solidFill>
                   <a:srgbClr val="6B7480"/>
                 </a:solidFill>
-                <a:latin typeface="Goetheanum Schrift Leise" pitchFamily="34" charset="0"/>
-                <a:ea typeface="Goetheanum Schrift Leise" pitchFamily="34" charset="-122"/>
-                <a:cs typeface="Goetheanum Schrift Leise" pitchFamily="34" charset="-120"/>
+                <a:latin typeface="Goetheanum Schrift" pitchFamily="34" charset="0"/>
+                <a:ea typeface="Goetheanum Schrift" pitchFamily="34" charset="-122"/>
+                <a:cs typeface="Goetheanum Schrift" pitchFamily="34" charset="-120"/>
               </a:rPr>
               <a:t>Was das Jahr geprägt hat</a:t>
             </a:r>
@@ -10877,13 +10877,13 @@
               <a:buNone/>
             </a:pPr>
             <a:r>
-              <a:rPr lang="en-US" sz="1800" dirty="0">
+              <a:rPr i="1" lang="en-US" sz="1800" dirty="0">
                 <a:solidFill>
                   <a:srgbClr val="6B7480"/>
                 </a:solidFill>
-                <a:latin typeface="Goetheanum Schrift Leise" pitchFamily="34" charset="0"/>
-                <a:ea typeface="Goetheanum Schrift Leise" pitchFamily="34" charset="-122"/>
-                <a:cs typeface="Goetheanum Schrift Leise" pitchFamily="34" charset="-120"/>
+                <a:latin typeface="Goetheanum Schrift" pitchFamily="34" charset="0"/>
+                <a:ea typeface="Goetheanum Schrift" pitchFamily="34" charset="-122"/>
+                <a:cs typeface="Goetheanum Schrift" pitchFamily="34" charset="-120"/>
               </a:rPr>
               <a:t>2</a:t>
             </a:r>
@@ -10939,13 +10939,13 @@
               <a:buNone/>
             </a:pPr>
             <a:r>
-              <a:rPr lang="en-US" sz="1500" dirty="0">
+              <a:rPr i="1" lang="en-US" sz="1500" dirty="0">
                 <a:solidFill>
                   <a:srgbClr val="6B7480"/>
                 </a:solidFill>
-                <a:latin typeface="Goetheanum Schrift Leise" pitchFamily="34" charset="0"/>
-                <a:ea typeface="Goetheanum Schrift Leise" pitchFamily="34" charset="-122"/>
-                <a:cs typeface="Goetheanum Schrift Leise" pitchFamily="34" charset="-120"/>
+                <a:latin typeface="Goetheanum Schrift" pitchFamily="34" charset="0"/>
+                <a:ea typeface="Goetheanum Schrift" pitchFamily="34" charset="-122"/>
+                <a:cs typeface="Goetheanum Schrift" pitchFamily="34" charset="-120"/>
               </a:rPr>
               <a:t>Ergebnis, Bilanz, Entwicklung</a:t>
             </a:r>
@@ -10978,13 +10978,13 @@
               <a:buNone/>
             </a:pPr>
             <a:r>
-              <a:rPr lang="en-US" sz="1800" dirty="0">
+              <a:rPr i="1" lang="en-US" sz="1800" dirty="0">
                 <a:solidFill>
                   <a:srgbClr val="6B7480"/>
                 </a:solidFill>
-                <a:latin typeface="Goetheanum Schrift Leise" pitchFamily="34" charset="0"/>
-                <a:ea typeface="Goetheanum Schrift Leise" pitchFamily="34" charset="-122"/>
-                <a:cs typeface="Goetheanum Schrift Leise" pitchFamily="34" charset="-120"/>
+                <a:latin typeface="Goetheanum Schrift" pitchFamily="34" charset="0"/>
+                <a:ea typeface="Goetheanum Schrift" pitchFamily="34" charset="-122"/>
+                <a:cs typeface="Goetheanum Schrift" pitchFamily="34" charset="-120"/>
               </a:rPr>
               <a:t>3</a:t>
             </a:r>
@@ -11040,13 +11040,13 @@
               <a:buNone/>
             </a:pPr>
             <a:r>
-              <a:rPr lang="en-US" sz="1500" dirty="0">
+              <a:rPr i="1" lang="en-US" sz="1500" dirty="0">
                 <a:solidFill>
                   <a:srgbClr val="6B7480"/>
                 </a:solidFill>
-                <a:latin typeface="Goetheanum Schrift Leise" pitchFamily="34" charset="0"/>
-                <a:ea typeface="Goetheanum Schrift Leise" pitchFamily="34" charset="-122"/>
-                <a:cs typeface="Goetheanum Schrift Leise" pitchFamily="34" charset="-120"/>
+                <a:latin typeface="Goetheanum Schrift" pitchFamily="34" charset="0"/>
+                <a:ea typeface="Goetheanum Schrift" pitchFamily="34" charset="-122"/>
+                <a:cs typeface="Goetheanum Schrift" pitchFamily="34" charset="-120"/>
               </a:rPr>
               <a:t>Was die Zahlen bedeuten</a:t>
             </a:r>
@@ -11079,13 +11079,13 @@
               <a:buNone/>
             </a:pPr>
             <a:r>
-              <a:rPr lang="en-US" sz="1800" dirty="0">
+              <a:rPr i="1" lang="en-US" sz="1800" dirty="0">
                 <a:solidFill>
                   <a:srgbClr val="6B7480"/>
                 </a:solidFill>
-                <a:latin typeface="Goetheanum Schrift Leise" pitchFamily="34" charset="0"/>
-                <a:ea typeface="Goetheanum Schrift Leise" pitchFamily="34" charset="-122"/>
-                <a:cs typeface="Goetheanum Schrift Leise" pitchFamily="34" charset="-120"/>
+                <a:latin typeface="Goetheanum Schrift" pitchFamily="34" charset="0"/>
+                <a:ea typeface="Goetheanum Schrift" pitchFamily="34" charset="-122"/>
+                <a:cs typeface="Goetheanum Schrift" pitchFamily="34" charset="-120"/>
               </a:rPr>
               <a:t>4</a:t>
             </a:r>
@@ -11141,13 +11141,13 @@
               <a:buNone/>
             </a:pPr>
             <a:r>
-              <a:rPr lang="en-US" sz="1500" dirty="0">
+              <a:rPr i="1" lang="en-US" sz="1500" dirty="0">
                 <a:solidFill>
                   <a:srgbClr val="6B7480"/>
                 </a:solidFill>
-                <a:latin typeface="Goetheanum Schrift Leise" pitchFamily="34" charset="0"/>
-                <a:ea typeface="Goetheanum Schrift Leise" pitchFamily="34" charset="-122"/>
-                <a:cs typeface="Goetheanum Schrift Leise" pitchFamily="34" charset="-120"/>
+                <a:latin typeface="Goetheanum Schrift" pitchFamily="34" charset="0"/>
+                <a:ea typeface="Goetheanum Schrift" pitchFamily="34" charset="-122"/>
+                <a:cs typeface="Goetheanum Schrift" pitchFamily="34" charset="-120"/>
               </a:rPr>
               <a:t>Budget und nächste Schritte</a:t>
             </a:r>
@@ -11187,9 +11187,9 @@
                 <a:solidFill>
                   <a:srgbClr val="6B7480"/>
                 </a:solidFill>
-                <a:latin typeface="Goetheanum Schrift Klar"/>
-                <a:ea typeface="Goetheanum Schrift Klar"/>
-                <a:cs typeface="Goetheanum Schrift Klar"/>
+                <a:latin typeface="Goetheanum Schrift"/>
+                <a:ea typeface="Goetheanum Schrift"/>
+                <a:cs typeface="Goetheanum Schrift"/>
               </a:defRPr>
             </a:lvl1pPr>
           </a:lstStyle>
@@ -11255,13 +11255,13 @@
               <a:buNone/>
             </a:pPr>
             <a:r>
-              <a:rPr lang="en-US" sz="5000" dirty="0">
+              <a:rPr i="1" lang="en-US" sz="5000" dirty="0">
                 <a:solidFill>
                   <a:srgbClr val="4D90D6"/>
                 </a:solidFill>
-                <a:latin typeface="Goetheanum Schrift Leise" pitchFamily="34" charset="0"/>
-                <a:ea typeface="Goetheanum Schrift Leise" pitchFamily="34" charset="-122"/>
-                <a:cs typeface="Goetheanum Schrift Leise" pitchFamily="34" charset="-120"/>
+                <a:latin typeface="Goetheanum Schrift" pitchFamily="34" charset="0"/>
+                <a:ea typeface="Goetheanum Schrift" pitchFamily="34" charset="-122"/>
+                <a:cs typeface="Goetheanum Schrift" pitchFamily="34" charset="-120"/>
               </a:rPr>
               <a:t>1</a:t>
             </a:r>
@@ -11337,13 +11337,13 @@
               <a:buNone/>
             </a:pPr>
             <a:r>
-              <a:rPr lang="en-US" sz="1800" dirty="0">
+              <a:rPr i="1" lang="en-US" sz="1800" dirty="0">
                 <a:solidFill>
                   <a:srgbClr val="BFD7F0"/>
                 </a:solidFill>
-                <a:latin typeface="Goetheanum Schrift Leise" pitchFamily="34" charset="0"/>
-                <a:ea typeface="Goetheanum Schrift Leise" pitchFamily="34" charset="-122"/>
-                <a:cs typeface="Goetheanum Schrift Leise" pitchFamily="34" charset="-120"/>
+                <a:latin typeface="Goetheanum Schrift" pitchFamily="34" charset="0"/>
+                <a:ea typeface="Goetheanum Schrift" pitchFamily="34" charset="-122"/>
+                <a:cs typeface="Goetheanum Schrift" pitchFamily="34" charset="-120"/>
               </a:rPr>
               <a:t>Ein Satz, der das Kapitel öffnet.</a:t>
             </a:r>
@@ -11383,9 +11383,9 @@
                 <a:solidFill>
                   <a:srgbClr val="9CC3EC"/>
                 </a:solidFill>
-                <a:latin typeface="Goetheanum Schrift Klar"/>
-                <a:ea typeface="Goetheanum Schrift Klar"/>
-                <a:cs typeface="Goetheanum Schrift Klar"/>
+                <a:latin typeface="Goetheanum Schrift"/>
+                <a:ea typeface="Goetheanum Schrift"/>
+                <a:cs typeface="Goetheanum Schrift"/>
               </a:defRPr>
             </a:lvl1pPr>
           </a:lstStyle>
@@ -11455,9 +11455,9 @@
                 <a:solidFill>
                   <a:srgbClr val="005EB8"/>
                 </a:solidFill>
-                <a:latin typeface="Goetheanum Schrift Klar" pitchFamily="34" charset="0"/>
-                <a:ea typeface="Goetheanum Schrift Klar" pitchFamily="34" charset="-122"/>
-                <a:cs typeface="Goetheanum Schrift Klar" pitchFamily="34" charset="-120"/>
+                <a:latin typeface="Goetheanum Schrift" pitchFamily="34" charset="0"/>
+                <a:ea typeface="Goetheanum Schrift" pitchFamily="34" charset="-122"/>
+                <a:cs typeface="Goetheanum Schrift" pitchFamily="34" charset="-120"/>
               </a:rPr>
               <a:t>Kapitel 1</a:t>
             </a:r>
@@ -11534,13 +11534,13 @@
               <a:buNone/>
             </a:pPr>
             <a:r>
-              <a:rPr lang="en-US" sz="1800" dirty="0">
+              <a:rPr i="1" lang="en-US" sz="1800" dirty="0">
                 <a:solidFill>
                   <a:srgbClr val="6B7480"/>
                 </a:solidFill>
-                <a:latin typeface="Goetheanum Schrift Leise" pitchFamily="34" charset="0"/>
-                <a:ea typeface="Goetheanum Schrift Leise" pitchFamily="34" charset="-122"/>
-                <a:cs typeface="Goetheanum Schrift Leise" pitchFamily="34" charset="-120"/>
+                <a:latin typeface="Goetheanum Schrift" pitchFamily="34" charset="0"/>
+                <a:ea typeface="Goetheanum Schrift" pitchFamily="34" charset="-122"/>
+                <a:cs typeface="Goetheanum Schrift" pitchFamily="34" charset="-120"/>
               </a:rPr>
               <a:t>Der Vorspann steht in Leise 18.</a:t>
             </a:r>
@@ -11554,13 +11554,13 @@
               <a:buNone/>
             </a:pPr>
             <a:r>
-              <a:rPr lang="en-US" sz="1800" dirty="0">
+              <a:rPr i="1" lang="en-US" sz="1800" dirty="0">
                 <a:solidFill>
                   <a:srgbClr val="6B7480"/>
                 </a:solidFill>
-                <a:latin typeface="Goetheanum Schrift Leise" pitchFamily="34" charset="0"/>
-                <a:ea typeface="Goetheanum Schrift Leise" pitchFamily="34" charset="-122"/>
-                <a:cs typeface="Goetheanum Schrift Leise" pitchFamily="34" charset="-120"/>
+                <a:latin typeface="Goetheanum Schrift" pitchFamily="34" charset="0"/>
+                <a:ea typeface="Goetheanum Schrift" pitchFamily="34" charset="-122"/>
+                <a:cs typeface="Goetheanum Schrift" pitchFamily="34" charset="-120"/>
               </a:rPr>
               <a:t>Er fasst die Folie in zwei Zeilen.</a:t>
             </a:r>
@@ -11603,9 +11603,9 @@
                 <a:solidFill>
                   <a:srgbClr val="1A1A1A"/>
                 </a:solidFill>
-                <a:latin typeface="Goetheanum Schrift Klar" pitchFamily="34" charset="0"/>
-                <a:ea typeface="Goetheanum Schrift Klar" pitchFamily="34" charset="-122"/>
-                <a:cs typeface="Goetheanum Schrift Klar" pitchFamily="34" charset="-120"/>
+                <a:latin typeface="Goetheanum Schrift" pitchFamily="34" charset="0"/>
+                <a:ea typeface="Goetheanum Schrift" pitchFamily="34" charset="-122"/>
+                <a:cs typeface="Goetheanum Schrift" pitchFamily="34" charset="-120"/>
               </a:rPr>
               <a:t>Fliesstext steht in Klar 13, linksbündig.</a:t>
             </a:r>
@@ -11626,9 +11626,9 @@
                 <a:solidFill>
                   <a:srgbClr val="1A1A1A"/>
                 </a:solidFill>
-                <a:latin typeface="Goetheanum Schrift Klar" pitchFamily="34" charset="0"/>
-                <a:ea typeface="Goetheanum Schrift Klar" pitchFamily="34" charset="-122"/>
-                <a:cs typeface="Goetheanum Schrift Klar" pitchFamily="34" charset="-120"/>
+                <a:latin typeface="Goetheanum Schrift" pitchFamily="34" charset="0"/>
+                <a:ea typeface="Goetheanum Schrift" pitchFamily="34" charset="-122"/>
+                <a:cs typeface="Goetheanum Schrift" pitchFamily="34" charset="-120"/>
               </a:rPr>
               <a:t>Zeilen bleiben kurz: sechs bis sieben Worte.</a:t>
             </a:r>
@@ -11649,9 +11649,9 @@
                 <a:solidFill>
                   <a:srgbClr val="1A1A1A"/>
                 </a:solidFill>
-                <a:latin typeface="Goetheanum Schrift Klar" pitchFamily="34" charset="0"/>
-                <a:ea typeface="Goetheanum Schrift Klar" pitchFamily="34" charset="-122"/>
-                <a:cs typeface="Goetheanum Schrift Klar" pitchFamily="34" charset="-120"/>
+                <a:latin typeface="Goetheanum Schrift" pitchFamily="34" charset="0"/>
+                <a:ea typeface="Goetheanum Schrift" pitchFamily="34" charset="-122"/>
+                <a:cs typeface="Goetheanum Schrift" pitchFamily="34" charset="-120"/>
               </a:rPr>
               <a:t>Aufzählungen nur, wenn wirklich gezählt wird:</a:t>
             </a:r>
@@ -11673,9 +11673,9 @@
                 <a:solidFill>
                   <a:srgbClr val="1A1A1A"/>
                 </a:solidFill>
-                <a:latin typeface="Goetheanum Schrift Klar" pitchFamily="34" charset="0"/>
-                <a:ea typeface="Goetheanum Schrift Klar" pitchFamily="34" charset="-122"/>
-                <a:cs typeface="Goetheanum Schrift Klar" pitchFamily="34" charset="-120"/>
+                <a:latin typeface="Goetheanum Schrift" pitchFamily="34" charset="0"/>
+                <a:ea typeface="Goetheanum Schrift" pitchFamily="34" charset="-122"/>
+                <a:cs typeface="Goetheanum Schrift" pitchFamily="34" charset="-120"/>
               </a:rPr>
               <a:t>Erster Punkt, knapp formuliert</a:t>
             </a:r>
@@ -11697,9 +11697,9 @@
                 <a:solidFill>
                   <a:srgbClr val="1A1A1A"/>
                 </a:solidFill>
-                <a:latin typeface="Goetheanum Schrift Klar" pitchFamily="34" charset="0"/>
-                <a:ea typeface="Goetheanum Schrift Klar" pitchFamily="34" charset="-122"/>
-                <a:cs typeface="Goetheanum Schrift Klar" pitchFamily="34" charset="-120"/>
+                <a:latin typeface="Goetheanum Schrift" pitchFamily="34" charset="0"/>
+                <a:ea typeface="Goetheanum Schrift" pitchFamily="34" charset="-122"/>
+                <a:cs typeface="Goetheanum Schrift" pitchFamily="34" charset="-120"/>
               </a:rPr>
               <a:t>Zweiter Punkt, ohne Schachtelung</a:t>
             </a:r>
@@ -11718,9 +11718,9 @@
                 <a:solidFill>
                   <a:srgbClr val="1A1A1A"/>
                 </a:solidFill>
-                <a:latin typeface="Goetheanum Schrift Klar" pitchFamily="34" charset="0"/>
-                <a:ea typeface="Goetheanum Schrift Klar" pitchFamily="34" charset="-122"/>
-                <a:cs typeface="Goetheanum Schrift Klar" pitchFamily="34" charset="-120"/>
+                <a:latin typeface="Goetheanum Schrift" pitchFamily="34" charset="0"/>
+                <a:ea typeface="Goetheanum Schrift" pitchFamily="34" charset="-122"/>
+                <a:cs typeface="Goetheanum Schrift" pitchFamily="34" charset="-120"/>
               </a:rPr>
               <a:t>Dritter Punkt, höchstens fünf</a:t>
             </a:r>
@@ -11805,9 +11805,9 @@
                 <a:solidFill>
                   <a:srgbClr val="1A1A1A"/>
                 </a:solidFill>
-                <a:latin typeface="Goetheanum Schrift Klar" pitchFamily="34" charset="0"/>
-                <a:ea typeface="Goetheanum Schrift Klar" pitchFamily="34" charset="-122"/>
-                <a:cs typeface="Goetheanum Schrift Klar" pitchFamily="34" charset="-120"/>
+                <a:latin typeface="Goetheanum Schrift" pitchFamily="34" charset="0"/>
+                <a:ea typeface="Goetheanum Schrift" pitchFamily="34" charset="-122"/>
+                <a:cs typeface="Goetheanum Schrift" pitchFamily="34" charset="-120"/>
               </a:rPr>
               <a:t>Eine Kernaussage, die bleiben soll.</a:t>
             </a:r>
@@ -11825,9 +11825,9 @@
                 <a:solidFill>
                   <a:srgbClr val="1A1A1A"/>
                 </a:solidFill>
-                <a:latin typeface="Goetheanum Schrift Klar" pitchFamily="34" charset="0"/>
-                <a:ea typeface="Goetheanum Schrift Klar" pitchFamily="34" charset="-122"/>
-                <a:cs typeface="Goetheanum Schrift Klar" pitchFamily="34" charset="-120"/>
+                <a:latin typeface="Goetheanum Schrift" pitchFamily="34" charset="0"/>
+                <a:ea typeface="Goetheanum Schrift" pitchFamily="34" charset="-122"/>
+                <a:cs typeface="Goetheanum Schrift" pitchFamily="34" charset="-120"/>
               </a:rPr>
               <a:t>Hervorgehoben im Blau-Tint,</a:t>
             </a:r>
@@ -11845,9 +11845,9 @@
                 <a:solidFill>
                   <a:srgbClr val="1A1A1A"/>
                 </a:solidFill>
-                <a:latin typeface="Goetheanum Schrift Klar" pitchFamily="34" charset="0"/>
-                <a:ea typeface="Goetheanum Schrift Klar" pitchFamily="34" charset="-122"/>
-                <a:cs typeface="Goetheanum Schrift Klar" pitchFamily="34" charset="-120"/>
+                <a:latin typeface="Goetheanum Schrift" pitchFamily="34" charset="0"/>
+                <a:ea typeface="Goetheanum Schrift" pitchFamily="34" charset="-122"/>
+                <a:cs typeface="Goetheanum Schrift" pitchFamily="34" charset="-120"/>
               </a:rPr>
               <a:t>betont allein durch die Fette.</a:t>
             </a:r>
@@ -11887,9 +11887,9 @@
                 <a:solidFill>
                   <a:srgbClr val="6B7480"/>
                 </a:solidFill>
-                <a:latin typeface="Goetheanum Schrift Klar"/>
-                <a:ea typeface="Goetheanum Schrift Klar"/>
-                <a:cs typeface="Goetheanum Schrift Klar"/>
+                <a:latin typeface="Goetheanum Schrift"/>
+                <a:ea typeface="Goetheanum Schrift"/>
+                <a:cs typeface="Goetheanum Schrift"/>
               </a:defRPr>
             </a:lvl1pPr>
           </a:lstStyle>
@@ -11959,9 +11959,9 @@
                 <a:solidFill>
                   <a:srgbClr val="005EB8"/>
                 </a:solidFill>
-                <a:latin typeface="Goetheanum Schrift Klar" pitchFamily="34" charset="0"/>
-                <a:ea typeface="Goetheanum Schrift Klar" pitchFamily="34" charset="-122"/>
-                <a:cs typeface="Goetheanum Schrift Klar" pitchFamily="34" charset="-120"/>
+                <a:latin typeface="Goetheanum Schrift" pitchFamily="34" charset="0"/>
+                <a:ea typeface="Goetheanum Schrift" pitchFamily="34" charset="-122"/>
+                <a:cs typeface="Goetheanum Schrift" pitchFamily="34" charset="-120"/>
               </a:rPr>
               <a:t>Kapitel 1</a:t>
             </a:r>
@@ -12081,9 +12081,9 @@
                 <a:solidFill>
                   <a:srgbClr val="1A1A1A"/>
                 </a:solidFill>
-                <a:latin typeface="Goetheanum Schrift Klar" pitchFamily="34" charset="0"/>
-                <a:ea typeface="Goetheanum Schrift Klar" pitchFamily="34" charset="-122"/>
-                <a:cs typeface="Goetheanum Schrift Klar" pitchFamily="34" charset="-120"/>
+                <a:latin typeface="Goetheanum Schrift" pitchFamily="34" charset="0"/>
+                <a:ea typeface="Goetheanum Schrift" pitchFamily="34" charset="-122"/>
+                <a:cs typeface="Goetheanum Schrift" pitchFamily="34" charset="-120"/>
               </a:rPr>
               <a:t>Beschreibung des Ist-Zustands.</a:t>
             </a:r>
@@ -12101,9 +12101,9 @@
                 <a:solidFill>
                   <a:srgbClr val="1A1A1A"/>
                 </a:solidFill>
-                <a:latin typeface="Goetheanum Schrift Klar" pitchFamily="34" charset="0"/>
-                <a:ea typeface="Goetheanum Schrift Klar" pitchFamily="34" charset="-122"/>
-                <a:cs typeface="Goetheanum Schrift Klar" pitchFamily="34" charset="-120"/>
+                <a:latin typeface="Goetheanum Schrift" pitchFamily="34" charset="0"/>
+                <a:ea typeface="Goetheanum Schrift" pitchFamily="34" charset="-122"/>
+                <a:cs typeface="Goetheanum Schrift" pitchFamily="34" charset="-120"/>
               </a:rPr>
               <a:t>Beide Spalten beginnen oben</a:t>
             </a:r>
@@ -12121,9 +12121,9 @@
                 <a:solidFill>
                   <a:srgbClr val="1A1A1A"/>
                 </a:solidFill>
-                <a:latin typeface="Goetheanum Schrift Klar" pitchFamily="34" charset="0"/>
-                <a:ea typeface="Goetheanum Schrift Klar" pitchFamily="34" charset="-122"/>
-                <a:cs typeface="Goetheanum Schrift Klar" pitchFamily="34" charset="-120"/>
+                <a:latin typeface="Goetheanum Schrift" pitchFamily="34" charset="0"/>
+                <a:ea typeface="Goetheanum Schrift" pitchFamily="34" charset="-122"/>
+                <a:cs typeface="Goetheanum Schrift" pitchFamily="34" charset="-120"/>
               </a:rPr>
               <a:t>auf derselben Höhe.</a:t>
             </a:r>
@@ -12202,9 +12202,9 @@
                 <a:solidFill>
                   <a:srgbClr val="1A1A1A"/>
                 </a:solidFill>
-                <a:latin typeface="Goetheanum Schrift Klar" pitchFamily="34" charset="0"/>
-                <a:ea typeface="Goetheanum Schrift Klar" pitchFamily="34" charset="-122"/>
-                <a:cs typeface="Goetheanum Schrift Klar" pitchFamily="34" charset="-120"/>
+                <a:latin typeface="Goetheanum Schrift" pitchFamily="34" charset="0"/>
+                <a:ea typeface="Goetheanum Schrift" pitchFamily="34" charset="-122"/>
+                <a:cs typeface="Goetheanum Schrift" pitchFamily="34" charset="-120"/>
               </a:rPr>
               <a:t>Beschreibung des Ziel-Zustands.</a:t>
             </a:r>
@@ -12222,9 +12222,9 @@
                 <a:solidFill>
                   <a:srgbClr val="1A1A1A"/>
                 </a:solidFill>
-                <a:latin typeface="Goetheanum Schrift Klar" pitchFamily="34" charset="0"/>
-                <a:ea typeface="Goetheanum Schrift Klar" pitchFamily="34" charset="-122"/>
-                <a:cs typeface="Goetheanum Schrift Klar" pitchFamily="34" charset="-120"/>
+                <a:latin typeface="Goetheanum Schrift" pitchFamily="34" charset="0"/>
+                <a:ea typeface="Goetheanum Schrift" pitchFamily="34" charset="-122"/>
+                <a:cs typeface="Goetheanum Schrift" pitchFamily="34" charset="-120"/>
               </a:rPr>
               <a:t>Zwischentitel in Laut 13,</a:t>
             </a:r>
@@ -12242,9 +12242,9 @@
                 <a:solidFill>
                   <a:srgbClr val="1A1A1A"/>
                 </a:solidFill>
-                <a:latin typeface="Goetheanum Schrift Klar" pitchFamily="34" charset="0"/>
-                <a:ea typeface="Goetheanum Schrift Klar" pitchFamily="34" charset="-122"/>
-                <a:cs typeface="Goetheanum Schrift Klar" pitchFamily="34" charset="-120"/>
+                <a:latin typeface="Goetheanum Schrift" pitchFamily="34" charset="0"/>
+                <a:ea typeface="Goetheanum Schrift" pitchFamily="34" charset="-122"/>
+                <a:cs typeface="Goetheanum Schrift" pitchFamily="34" charset="-120"/>
               </a:rPr>
               <a:t>der Text in Klar 13.</a:t>
             </a:r>
@@ -12277,13 +12277,13 @@
               <a:buNone/>
             </a:pPr>
             <a:r>
-              <a:rPr lang="en-US" sz="1800" dirty="0">
+              <a:rPr i="1" lang="en-US" sz="1800" dirty="0">
                 <a:solidFill>
                   <a:srgbClr val="6B7480"/>
                 </a:solidFill>
-                <a:latin typeface="Goetheanum Schrift Leise" pitchFamily="34" charset="0"/>
-                <a:ea typeface="Goetheanum Schrift Leise" pitchFamily="34" charset="-122"/>
-                <a:cs typeface="Goetheanum Schrift Leise" pitchFamily="34" charset="-120"/>
+                <a:latin typeface="Goetheanum Schrift" pitchFamily="34" charset="0"/>
+                <a:ea typeface="Goetheanum Schrift" pitchFamily="34" charset="-122"/>
+                <a:cs typeface="Goetheanum Schrift" pitchFamily="34" charset="-120"/>
               </a:rPr>
               <a:t>Fazit in einem Satz, gesetzt in Leise 18.</a:t>
             </a:r>
@@ -12323,9 +12323,9 @@
                 <a:solidFill>
                   <a:srgbClr val="6B7480"/>
                 </a:solidFill>
-                <a:latin typeface="Goetheanum Schrift Klar"/>
-                <a:ea typeface="Goetheanum Schrift Klar"/>
-                <a:cs typeface="Goetheanum Schrift Klar"/>
+                <a:latin typeface="Goetheanum Schrift"/>
+                <a:ea typeface="Goetheanum Schrift"/>
+                <a:cs typeface="Goetheanum Schrift"/>
               </a:defRPr>
             </a:lvl1pPr>
           </a:lstStyle>
@@ -12421,9 +12421,9 @@
                 <a:solidFill>
                   <a:srgbClr val="FFFFFF"/>
                 </a:solidFill>
-                <a:latin typeface="Goetheanum Schrift Klar" pitchFamily="34" charset="0"/>
-                <a:ea typeface="Goetheanum Schrift Klar" pitchFamily="34" charset="-122"/>
-                <a:cs typeface="Goetheanum Schrift Klar" pitchFamily="34" charset="-120"/>
+                <a:latin typeface="Goetheanum Schrift" pitchFamily="34" charset="0"/>
+                <a:ea typeface="Goetheanum Schrift" pitchFamily="34" charset="-122"/>
+                <a:cs typeface="Goetheanum Schrift" pitchFamily="34" charset="-120"/>
               </a:rPr>
               <a:t>Goetheanum, Westfassade · Foto: Goetheanum</a:t>
             </a:r>
@@ -12463,9 +12463,9 @@
                 <a:solidFill>
                   <a:srgbClr val="FFFFFF"/>
                 </a:solidFill>
-                <a:latin typeface="Goetheanum Schrift Klar"/>
-                <a:ea typeface="Goetheanum Schrift Klar"/>
-                <a:cs typeface="Goetheanum Schrift Klar"/>
+                <a:latin typeface="Goetheanum Schrift"/>
+                <a:ea typeface="Goetheanum Schrift"/>
+                <a:cs typeface="Goetheanum Schrift"/>
               </a:defRPr>
             </a:lvl1pPr>
           </a:lstStyle>
@@ -12561,9 +12561,9 @@
                 <a:solidFill>
                   <a:srgbClr val="005EB8"/>
                 </a:solidFill>
-                <a:latin typeface="Goetheanum Schrift Klar" pitchFamily="34" charset="0"/>
-                <a:ea typeface="Goetheanum Schrift Klar" pitchFamily="34" charset="-122"/>
-                <a:cs typeface="Goetheanum Schrift Klar" pitchFamily="34" charset="-120"/>
+                <a:latin typeface="Goetheanum Schrift" pitchFamily="34" charset="0"/>
+                <a:ea typeface="Goetheanum Schrift" pitchFamily="34" charset="-122"/>
+                <a:cs typeface="Goetheanum Schrift" pitchFamily="34" charset="-120"/>
               </a:rPr>
               <a:t>Kapitel 01</a:t>
             </a:r>
@@ -12669,9 +12669,9 @@
                 <a:solidFill>
                   <a:srgbClr val="1A1A1A"/>
                 </a:solidFill>
-                <a:latin typeface="Goetheanum Schrift Klar" pitchFamily="34" charset="0"/>
-                <a:ea typeface="Goetheanum Schrift Klar" pitchFamily="34" charset="-122"/>
-                <a:cs typeface="Goetheanum Schrift Klar" pitchFamily="34" charset="-120"/>
+                <a:latin typeface="Goetheanum Schrift" pitchFamily="34" charset="0"/>
+                <a:ea typeface="Goetheanum Schrift" pitchFamily="34" charset="-122"/>
+                <a:cs typeface="Goetheanum Schrift" pitchFamily="34" charset="-120"/>
               </a:rPr>
               <a:t>Das Bild läuft randlos bis zur Kante.</a:t>
             </a:r>
@@ -12689,9 +12689,9 @@
                 <a:solidFill>
                   <a:srgbClr val="1A1A1A"/>
                 </a:solidFill>
-                <a:latin typeface="Goetheanum Schrift Klar" pitchFamily="34" charset="0"/>
-                <a:ea typeface="Goetheanum Schrift Klar" pitchFamily="34" charset="-122"/>
-                <a:cs typeface="Goetheanum Schrift Klar" pitchFamily="34" charset="-120"/>
+                <a:latin typeface="Goetheanum Schrift" pitchFamily="34" charset="0"/>
+                <a:ea typeface="Goetheanum Schrift" pitchFamily="34" charset="-122"/>
+                <a:cs typeface="Goetheanum Schrift" pitchFamily="34" charset="-120"/>
               </a:rPr>
               <a:t>Der Text behält seine Spaltenbreite</a:t>
             </a:r>
@@ -12709,9 +12709,9 @@
                 <a:solidFill>
                   <a:srgbClr val="1A1A1A"/>
                 </a:solidFill>
-                <a:latin typeface="Goetheanum Schrift Klar" pitchFamily="34" charset="0"/>
-                <a:ea typeface="Goetheanum Schrift Klar" pitchFamily="34" charset="-122"/>
-                <a:cs typeface="Goetheanum Schrift Klar" pitchFamily="34" charset="-120"/>
+                <a:latin typeface="Goetheanum Schrift" pitchFamily="34" charset="0"/>
+                <a:ea typeface="Goetheanum Schrift" pitchFamily="34" charset="-122"/>
+                <a:cs typeface="Goetheanum Schrift" pitchFamily="34" charset="-120"/>
               </a:rPr>
               <a:t>und seine Ruhe.</a:t>
             </a:r>
@@ -12750,9 +12750,9 @@
                 <a:solidFill>
                   <a:srgbClr val="6B7480"/>
                 </a:solidFill>
-                <a:latin typeface="Goetheanum Schrift Klar" pitchFamily="34" charset="0"/>
-                <a:ea typeface="Goetheanum Schrift Klar" pitchFamily="34" charset="-122"/>
-                <a:cs typeface="Goetheanum Schrift Klar" pitchFamily="34" charset="-120"/>
+                <a:latin typeface="Goetheanum Schrift" pitchFamily="34" charset="0"/>
+                <a:ea typeface="Goetheanum Schrift" pitchFamily="34" charset="-122"/>
+                <a:cs typeface="Goetheanum Schrift" pitchFamily="34" charset="-120"/>
               </a:rPr>
               <a:t>Eurythmie-Abschlusstreffen 2025 · Foto: Xue Li</a:t>
             </a:r>
@@ -12863,7 +12863,7 @@
         <a:font script="Tfng" typeface="Ebrima"/>
       </a:majorFont>
       <a:minorFont>
-        <a:latin typeface="Goetheanum Schrift Klar"/>
+        <a:latin typeface="Goetheanum Schrift"/>
         <a:ea typeface=""/>
         <a:cs typeface=""/>
         <a:font script="Jpan" typeface="游ゴシック"/>

--- a/assets/templates/GoetheanumVorlageA4.pptx
+++ b/assets/templates/GoetheanumVorlageA4.pptx
@@ -4801,7 +4801,7 @@
             <a:r>
               <a:rPr lang="en-US" sz="2600" dirty="0">
                 <a:solidFill>
-                  <a:srgbClr val="EBB565"/>
+                  <a:srgbClr val="8A6728"/>
                 </a:solidFill>
                 <a:latin typeface="Goetheanum Schrift Deutlich" pitchFamily="34" charset="0"/>
                 <a:ea typeface="Goetheanum Schrift Deutlich" pitchFamily="34" charset="-122"/>
@@ -12565,7 +12565,7 @@
                 <a:ea typeface="Goetheanum Schrift" pitchFamily="34" charset="-122"/>
                 <a:cs typeface="Goetheanum Schrift" pitchFamily="34" charset="-120"/>
               </a:rPr>
-              <a:t>Kapitel 01</a:t>
+              <a:t>Kapitel 1</a:t>
             </a:r>
             <a:endParaRPr lang="en-US" sz="1300" dirty="0"/>
           </a:p>

--- a/assets/templates/GoetheanumVorlageA4.pptx
+++ b/assets/templates/GoetheanumVorlageA4.pptx
@@ -238,7 +238,7 @@
           </c:tx>
           <c:spPr>
             <a:solidFill>
-              <a:srgbClr val="EBB565"/>
+              <a:srgbClr val="94702E"/>
             </a:solidFill>
             <a:effectLst/>
           </c:spPr>
@@ -2357,7 +2357,7 @@
               <a:buNone/>
               <a:defRPr lang="en-US" sz="1300" dirty="0">
                 <a:solidFill>
-                  <a:srgbClr val="9CC3EC"/>
+                  <a:srgbClr val="CCDFF1"/>
                 </a:solidFill>
                 <a:latin typeface="Goetheanum Schrift" pitchFamily="34" charset="0"/>
                 <a:ea typeface="Goetheanum Schrift" pitchFamily="34" charset="-122"/>
@@ -2372,13 +2372,13 @@
             <a:r>
               <a:rPr lang="en-US" sz="1300" dirty="0">
                 <a:solidFill>
-                  <a:srgbClr val="9CC3EC"/>
-                </a:solidFill>
-                <a:latin typeface="Goetheanum Schrift" pitchFamily="34" charset="0"/>
-                <a:ea typeface="Goetheanum Schrift" pitchFamily="34" charset="-122"/>
-                <a:cs typeface="Goetheanum Schrift" pitchFamily="34" charset="-120"/>
-              </a:rPr>
-              <a:t>Vorname Name · Bereich · 00.00.2026</a:t>
+                  <a:srgbClr val="CCDFF1"/>
+                </a:solidFill>
+                <a:latin typeface="Goetheanum Schrift" pitchFamily="34" charset="0"/>
+                <a:ea typeface="Goetheanum Schrift" pitchFamily="34" charset="-122"/>
+                <a:cs typeface="Goetheanum Schrift" pitchFamily="34" charset="-120"/>
+              </a:rPr>
+              <a:t>Vorname Name · Bereich · TT.MM.JJJJ</a:t>
             </a:r>
             <a:endParaRPr lang="en-US" sz="1300" dirty="0"/>
           </a:p>
@@ -2467,13 +2467,13 @@
             <a:r>
               <a:rPr lang="en-US" sz="900" dirty="0">
                 <a:solidFill>
-                  <a:srgbClr val="9CC3EC"/>
-                </a:solidFill>
-                <a:latin typeface="Goetheanum Schrift" pitchFamily="34" charset="0"/>
-                <a:ea typeface="Goetheanum Schrift" pitchFamily="34" charset="-122"/>
-                <a:cs typeface="Goetheanum Schrift" pitchFamily="34" charset="-120"/>
-              </a:rPr>
-              <a:t>Titel der Präsentation · 00.00.2026 ·</a:t>
+                  <a:srgbClr val="CCDFF1"/>
+                </a:solidFill>
+                <a:latin typeface="Goetheanum Schrift" pitchFamily="34" charset="0"/>
+                <a:ea typeface="Goetheanum Schrift" pitchFamily="34" charset="-122"/>
+                <a:cs typeface="Goetheanum Schrift" pitchFamily="34" charset="-120"/>
+              </a:rPr>
+              <a:t>Titel der Präsentation · TT.MM.JJJJ ·</a:t>
             </a:r>
             <a:endParaRPr lang="en-US" sz="900" dirty="0"/>
           </a:p>
@@ -2505,7 +2505,7 @@
               <a:buNone/>
               <a:defRPr i="1" lang="en-US" sz="5000" dirty="0">
                 <a:solidFill>
-                  <a:srgbClr val="4D90D6"/>
+                  <a:srgbClr val="93BCE7"/>
                 </a:solidFill>
                 <a:latin typeface="Goetheanum Schrift" pitchFamily="34" charset="0"/>
                 <a:ea typeface="Goetheanum Schrift" pitchFamily="34" charset="-122"/>
@@ -2520,7 +2520,7 @@
             <a:r>
               <a:rPr i="1" lang="en-US" sz="5000" dirty="0">
                 <a:solidFill>
-                  <a:srgbClr val="4D90D6"/>
+                  <a:srgbClr val="93BCE7"/>
                 </a:solidFill>
                 <a:latin typeface="Goetheanum Schrift" pitchFamily="34" charset="0"/>
                 <a:ea typeface="Goetheanum Schrift" pitchFamily="34" charset="-122"/>
@@ -2668,7 +2668,7 @@
             <a:lvl1pPr>
               <a:defRPr sz="900">
                 <a:solidFill>
-                  <a:srgbClr val="9CC3EC"/>
+                  <a:srgbClr val="CCDFF1"/>
                 </a:solidFill>
                 <a:latin typeface="Goetheanum Schrift"/>
                 <a:ea typeface="Goetheanum Schrift"/>
@@ -2775,7 +2775,7 @@
                 <a:ea typeface="Goetheanum Schrift" pitchFamily="34" charset="-122"/>
                 <a:cs typeface="Goetheanum Schrift" pitchFamily="34" charset="-120"/>
               </a:rPr>
-              <a:t>Titel der Präsentation · 00.00.2026 ·</a:t>
+              <a:t>Titel der Präsentation · TT.MM.JJJJ ·</a:t>
             </a:r>
             <a:endParaRPr lang="en-US" sz="900" dirty="0"/>
           </a:p>
@@ -3024,7 +3024,7 @@
                 <a:ea typeface="Goetheanum Schrift" pitchFamily="34" charset="-122"/>
                 <a:cs typeface="Goetheanum Schrift" pitchFamily="34" charset="-120"/>
               </a:rPr>
-              <a:t>Titel der Präsentation · 00.00.2026 ·</a:t>
+              <a:t>Titel der Präsentation · TT.MM.JJJJ ·</a:t>
             </a:r>
             <a:endParaRPr lang="en-US" sz="900" dirty="0"/>
           </a:p>
@@ -3273,7 +3273,7 @@
                 <a:ea typeface="Goetheanum Schrift" pitchFamily="34" charset="-122"/>
                 <a:cs typeface="Goetheanum Schrift" pitchFamily="34" charset="-120"/>
               </a:rPr>
-              <a:t>Titel der Präsentation · 00.00.2026 ·</a:t>
+              <a:t>Titel der Präsentation · TT.MM.JJJJ ·</a:t>
             </a:r>
             <a:endParaRPr lang="en-US" sz="900" dirty="0"/>
           </a:p>
@@ -3488,7 +3488,7 @@
                 <a:ea typeface="Goetheanum Schrift" pitchFamily="34" charset="-122"/>
                 <a:cs typeface="Goetheanum Schrift" pitchFamily="34" charset="-120"/>
               </a:rPr>
-              <a:t>Titel der Präsentation · 00.00.2026 ·</a:t>
+              <a:t>Titel der Präsentation · TT.MM.JJJJ ·</a:t>
             </a:r>
             <a:endParaRPr lang="en-US" sz="900" dirty="0"/>
           </a:p>
@@ -4333,13 +4333,13 @@
             <a:r>
               <a:rPr lang="en-US" sz="1300" dirty="0">
                 <a:solidFill>
-                  <a:srgbClr val="9CC3EC"/>
-                </a:solidFill>
-                <a:latin typeface="Goetheanum Schrift" pitchFamily="34" charset="0"/>
-                <a:ea typeface="Goetheanum Schrift" pitchFamily="34" charset="-122"/>
-                <a:cs typeface="Goetheanum Schrift" pitchFamily="34" charset="-120"/>
-              </a:rPr>
-              <a:t>Vorname Name · Bereich · 00.00.2026</a:t>
+                  <a:srgbClr val="CCDFF1"/>
+                </a:solidFill>
+                <a:latin typeface="Goetheanum Schrift" pitchFamily="34" charset="0"/>
+                <a:ea typeface="Goetheanum Schrift" pitchFamily="34" charset="-122"/>
+                <a:cs typeface="Goetheanum Schrift" pitchFamily="34" charset="-120"/>
+              </a:rPr>
+              <a:t>Vorname Name · Bereich · TT.MM.JJJJ</a:t>
             </a:r>
             <a:endParaRPr lang="en-US" sz="1300" dirty="0"/>
           </a:p>
@@ -7461,7 +7461,7 @@
             <a:r>
               <a:rPr lang="en-US" sz="1300" dirty="0">
                 <a:solidFill>
-                  <a:srgbClr val="9CC3EC"/>
+                  <a:srgbClr val="CCDFF1"/>
                 </a:solidFill>
                 <a:latin typeface="Goetheanum Schrift" pitchFamily="34" charset="0"/>
                 <a:ea typeface="Goetheanum Schrift" pitchFamily="34" charset="-122"/>
@@ -11257,7 +11257,7 @@
             <a:r>
               <a:rPr i="1" lang="en-US" sz="5000" dirty="0">
                 <a:solidFill>
-                  <a:srgbClr val="4D90D6"/>
+                  <a:srgbClr val="93BCE7"/>
                 </a:solidFill>
                 <a:latin typeface="Goetheanum Schrift" pitchFamily="34" charset="0"/>
                 <a:ea typeface="Goetheanum Schrift" pitchFamily="34" charset="-122"/>
@@ -11381,7 +11381,7 @@
             <a:lvl1pPr>
               <a:defRPr sz="900">
                 <a:solidFill>
-                  <a:srgbClr val="9CC3EC"/>
+                  <a:srgbClr val="CCDFF1"/>
                 </a:solidFill>
                 <a:latin typeface="Goetheanum Schrift"/>
                 <a:ea typeface="Goetheanum Schrift"/>

--- a/assets/templates/GoetheanumVorlageA4.pptx
+++ b/assets/templates/GoetheanumVorlageA4.pptx
@@ -238,7 +238,7 @@
           </c:tx>
           <c:spPr>
             <a:solidFill>
-              <a:srgbClr val="EBB565"/>
+              <a:srgbClr val="94702E"/>
             </a:solidFill>
             <a:effectLst/>
           </c:spPr>
@@ -2357,7 +2357,7 @@
               <a:buNone/>
               <a:defRPr lang="en-US" sz="1300" dirty="0">
                 <a:solidFill>
-                  <a:srgbClr val="9CC3EC"/>
+                  <a:srgbClr val="CCDFF1"/>
                 </a:solidFill>
                 <a:latin typeface="Goetheanum Schrift" pitchFamily="34" charset="0"/>
                 <a:ea typeface="Goetheanum Schrift" pitchFamily="34" charset="-122"/>
@@ -2372,13 +2372,13 @@
             <a:r>
               <a:rPr lang="en-US" sz="1300" dirty="0">
                 <a:solidFill>
-                  <a:srgbClr val="9CC3EC"/>
-                </a:solidFill>
-                <a:latin typeface="Goetheanum Schrift" pitchFamily="34" charset="0"/>
-                <a:ea typeface="Goetheanum Schrift" pitchFamily="34" charset="-122"/>
-                <a:cs typeface="Goetheanum Schrift" pitchFamily="34" charset="-120"/>
-              </a:rPr>
-              <a:t>Vorname Name · Bereich · 00.00.2026</a:t>
+                  <a:srgbClr val="CCDFF1"/>
+                </a:solidFill>
+                <a:latin typeface="Goetheanum Schrift" pitchFamily="34" charset="0"/>
+                <a:ea typeface="Goetheanum Schrift" pitchFamily="34" charset="-122"/>
+                <a:cs typeface="Goetheanum Schrift" pitchFamily="34" charset="-120"/>
+              </a:rPr>
+              <a:t>Vorname Name · Bereich · TT.MM.JJJJ</a:t>
             </a:r>
             <a:endParaRPr lang="en-US" sz="1300" dirty="0"/>
           </a:p>
@@ -2467,13 +2467,13 @@
             <a:r>
               <a:rPr lang="en-US" sz="900" dirty="0">
                 <a:solidFill>
-                  <a:srgbClr val="9CC3EC"/>
-                </a:solidFill>
-                <a:latin typeface="Goetheanum Schrift" pitchFamily="34" charset="0"/>
-                <a:ea typeface="Goetheanum Schrift" pitchFamily="34" charset="-122"/>
-                <a:cs typeface="Goetheanum Schrift" pitchFamily="34" charset="-120"/>
-              </a:rPr>
-              <a:t>Titel der Präsentation · 00.00.2026 ·</a:t>
+                  <a:srgbClr val="CCDFF1"/>
+                </a:solidFill>
+                <a:latin typeface="Goetheanum Schrift" pitchFamily="34" charset="0"/>
+                <a:ea typeface="Goetheanum Schrift" pitchFamily="34" charset="-122"/>
+                <a:cs typeface="Goetheanum Schrift" pitchFamily="34" charset="-120"/>
+              </a:rPr>
+              <a:t>Titel der Präsentation · TT.MM.JJJJ ·</a:t>
             </a:r>
             <a:endParaRPr lang="en-US" sz="900" dirty="0"/>
           </a:p>
@@ -2505,7 +2505,7 @@
               <a:buNone/>
               <a:defRPr i="1" lang="en-US" sz="5000" dirty="0">
                 <a:solidFill>
-                  <a:srgbClr val="4D90D6"/>
+                  <a:srgbClr val="93BCE7"/>
                 </a:solidFill>
                 <a:latin typeface="Goetheanum Schrift" pitchFamily="34" charset="0"/>
                 <a:ea typeface="Goetheanum Schrift" pitchFamily="34" charset="-122"/>
@@ -2520,7 +2520,7 @@
             <a:r>
               <a:rPr i="1" lang="en-US" sz="5000" dirty="0">
                 <a:solidFill>
-                  <a:srgbClr val="4D90D6"/>
+                  <a:srgbClr val="93BCE7"/>
                 </a:solidFill>
                 <a:latin typeface="Goetheanum Schrift" pitchFamily="34" charset="0"/>
                 <a:ea typeface="Goetheanum Schrift" pitchFamily="34" charset="-122"/>
@@ -2668,7 +2668,7 @@
             <a:lvl1pPr>
               <a:defRPr sz="900">
                 <a:solidFill>
-                  <a:srgbClr val="9CC3EC"/>
+                  <a:srgbClr val="CCDFF1"/>
                 </a:solidFill>
                 <a:latin typeface="Goetheanum Schrift"/>
                 <a:ea typeface="Goetheanum Schrift"/>
@@ -2775,7 +2775,7 @@
                 <a:ea typeface="Goetheanum Schrift" pitchFamily="34" charset="-122"/>
                 <a:cs typeface="Goetheanum Schrift" pitchFamily="34" charset="-120"/>
               </a:rPr>
-              <a:t>Titel der Präsentation · 00.00.2026 ·</a:t>
+              <a:t>Titel der Präsentation · TT.MM.JJJJ ·</a:t>
             </a:r>
             <a:endParaRPr lang="en-US" sz="900" dirty="0"/>
           </a:p>
@@ -3024,7 +3024,7 @@
                 <a:ea typeface="Goetheanum Schrift" pitchFamily="34" charset="-122"/>
                 <a:cs typeface="Goetheanum Schrift" pitchFamily="34" charset="-120"/>
               </a:rPr>
-              <a:t>Titel der Präsentation · 00.00.2026 ·</a:t>
+              <a:t>Titel der Präsentation · TT.MM.JJJJ ·</a:t>
             </a:r>
             <a:endParaRPr lang="en-US" sz="900" dirty="0"/>
           </a:p>
@@ -3273,7 +3273,7 @@
                 <a:ea typeface="Goetheanum Schrift" pitchFamily="34" charset="-122"/>
                 <a:cs typeface="Goetheanum Schrift" pitchFamily="34" charset="-120"/>
               </a:rPr>
-              <a:t>Titel der Präsentation · 00.00.2026 ·</a:t>
+              <a:t>Titel der Präsentation · TT.MM.JJJJ ·</a:t>
             </a:r>
             <a:endParaRPr lang="en-US" sz="900" dirty="0"/>
           </a:p>
@@ -3488,7 +3488,7 @@
                 <a:ea typeface="Goetheanum Schrift" pitchFamily="34" charset="-122"/>
                 <a:cs typeface="Goetheanum Schrift" pitchFamily="34" charset="-120"/>
               </a:rPr>
-              <a:t>Titel der Präsentation · 00.00.2026 ·</a:t>
+              <a:t>Titel der Präsentation · TT.MM.JJJJ ·</a:t>
             </a:r>
             <a:endParaRPr lang="en-US" sz="900" dirty="0"/>
           </a:p>
@@ -4333,13 +4333,13 @@
             <a:r>
               <a:rPr lang="en-US" sz="1300" dirty="0">
                 <a:solidFill>
-                  <a:srgbClr val="9CC3EC"/>
-                </a:solidFill>
-                <a:latin typeface="Goetheanum Schrift" pitchFamily="34" charset="0"/>
-                <a:ea typeface="Goetheanum Schrift" pitchFamily="34" charset="-122"/>
-                <a:cs typeface="Goetheanum Schrift" pitchFamily="34" charset="-120"/>
-              </a:rPr>
-              <a:t>Vorname Name · Bereich · 00.00.2026</a:t>
+                  <a:srgbClr val="CCDFF1"/>
+                </a:solidFill>
+                <a:latin typeface="Goetheanum Schrift" pitchFamily="34" charset="0"/>
+                <a:ea typeface="Goetheanum Schrift" pitchFamily="34" charset="-122"/>
+                <a:cs typeface="Goetheanum Schrift" pitchFamily="34" charset="-120"/>
+              </a:rPr>
+              <a:t>Vorname Name · Bereich · TT.MM.JJJJ</a:t>
             </a:r>
             <a:endParaRPr lang="en-US" sz="1300" dirty="0"/>
           </a:p>
@@ -4801,7 +4801,7 @@
             <a:r>
               <a:rPr lang="en-US" sz="2600" dirty="0">
                 <a:solidFill>
-                  <a:srgbClr val="EBB565"/>
+                  <a:srgbClr val="8A6728"/>
                 </a:solidFill>
                 <a:latin typeface="Goetheanum Schrift Deutlich" pitchFamily="34" charset="0"/>
                 <a:ea typeface="Goetheanum Schrift Deutlich" pitchFamily="34" charset="-122"/>
@@ -7461,7 +7461,7 @@
             <a:r>
               <a:rPr lang="en-US" sz="1300" dirty="0">
                 <a:solidFill>
-                  <a:srgbClr val="9CC3EC"/>
+                  <a:srgbClr val="CCDFF1"/>
                 </a:solidFill>
                 <a:latin typeface="Goetheanum Schrift" pitchFamily="34" charset="0"/>
                 <a:ea typeface="Goetheanum Schrift" pitchFamily="34" charset="-122"/>
@@ -11257,7 +11257,7 @@
             <a:r>
               <a:rPr i="1" lang="en-US" sz="5000" dirty="0">
                 <a:solidFill>
-                  <a:srgbClr val="4D90D6"/>
+                  <a:srgbClr val="93BCE7"/>
                 </a:solidFill>
                 <a:latin typeface="Goetheanum Schrift" pitchFamily="34" charset="0"/>
                 <a:ea typeface="Goetheanum Schrift" pitchFamily="34" charset="-122"/>
@@ -11381,7 +11381,7 @@
             <a:lvl1pPr>
               <a:defRPr sz="900">
                 <a:solidFill>
-                  <a:srgbClr val="9CC3EC"/>
+                  <a:srgbClr val="CCDFF1"/>
                 </a:solidFill>
                 <a:latin typeface="Goetheanum Schrift"/>
                 <a:ea typeface="Goetheanum Schrift"/>
@@ -12565,7 +12565,7 @@
                 <a:ea typeface="Goetheanum Schrift" pitchFamily="34" charset="-122"/>
                 <a:cs typeface="Goetheanum Schrift" pitchFamily="34" charset="-120"/>
               </a:rPr>
-              <a:t>Kapitel 01</a:t>
+              <a:t>Kapitel 1</a:t>
             </a:r>
             <a:endParaRPr lang="en-US" sz="1300" dirty="0"/>
           </a:p>

--- a/assets/templates/GoetheanumVorlageA4.pptx
+++ b/assets/templates/GoetheanumVorlageA4.pptx
@@ -4885,7 +4885,7 @@
                 <a:ea typeface="Goetheanum Schrift" pitchFamily="34" charset="-122"/>
                 <a:cs typeface="Goetheanum Schrift" pitchFamily="34" charset="-120"/>
               </a:rPr>
-              <a:t>Musterzahlen, beim Ausfüllen ersetzen.</a:t>
+              <a:t>Musterzahlen ersetzen. −2,1 % trägt ein echtes Minus, 12,4 Mio ein schmales Leerzeichen.</a:t>
             </a:r>
             <a:endParaRPr lang="en-US" sz="1300" dirty="0"/>
           </a:p>
@@ -6458,7 +6458,7 @@
                 <a:ea typeface="Goetheanum Schrift" pitchFamily="34" charset="-122"/>
                 <a:cs typeface="Goetheanum Schrift" pitchFamily="34" charset="-120"/>
               </a:rPr>
-              <a:t>Angaben in Tausend CHF, Musterzahlen.</a:t>
+              <a:t>Angaben in Tausend CHF. Ziffern tabellarisch und rechtsbündig; 11 690 gruppiert.</a:t>
             </a:r>
             <a:endParaRPr lang="en-US" sz="900" dirty="0"/>
           </a:p>
@@ -8451,6 +8451,91 @@
           </a:p>
         </p:txBody>
       </p:sp>
+      <p:sp>
+        <p:nvSpPr>
+          <p:cNvPr id="26" name="Guetesiegel"/>
+          <p:cNvSpPr/>
+          <p:nvPr/>
+        </p:nvSpPr>
+        <p:spPr>
+          <a:xfrm>
+            <a:off x="6948000" y="5148000"/>
+            <a:ext cx="3204000" cy="1152000"/>
+          </a:xfrm>
+          <a:prstGeom prst="rect">
+            <a:avLst/>
+          </a:prstGeom>
+          <a:noFill/>
+          <a:ln/>
+        </p:spPr>
+        <p:txBody>
+          <a:bodyPr wrap="square" lIns="0" tIns="0" rIns="0" bIns="0" rtlCol="0" anchor="t"/>
+          <a:lstStyle/>
+          <a:p>
+            <a:pPr indent="0" marL="0">
+              <a:lnSpc>
+                <a:spcPct val="118000"/>
+              </a:lnSpc>
+              <a:buNone/>
+            </a:pPr>
+            <a:r>
+              <a:rPr lang="de-CH" sz="900" dirty="0">
+                <a:solidFill>
+                  <a:srgbClr val="005EB8"/>
+                </a:solidFill>
+                <a:latin typeface="Goetheanum Schrift" pitchFamily="34" charset="0"/>
+                <a:ea typeface="Goetheanum Schrift" pitchFamily="34" charset="-122"/>
+                <a:cs typeface="Goetheanum Schrift" pitchFamily="34" charset="-120"/>
+              </a:rPr>
+              <a:t>Gütesiegel</a:t>
+            </a:r>
+          </a:p>
+          <a:p>
+            <a:pPr indent="0" marL="0">
+              <a:lnSpc>
+                <a:spcPct val="118000"/>
+              </a:lnSpc>
+              <a:spcBef>
+                <a:spcPts val="300"/>
+              </a:spcBef>
+              <a:buNone/>
+            </a:pPr>
+            <a:r>
+              <a:rPr lang="de-CH" sz="900" dirty="0">
+                <a:solidFill>
+                  <a:srgbClr val="6B7480"/>
+                </a:solidFill>
+                <a:latin typeface="Goetheanum Schrift" pitchFamily="34" charset="0"/>
+                <a:ea typeface="Goetheanum Schrift" pitchFamily="34" charset="-122"/>
+                <a:cs typeface="Goetheanum Schrift" pitchFamily="34" charset="-120"/>
+              </a:rPr>
+              <a:t>Gesichert: Layout, Hausfarben, Schrift, geprüfte Kontraste – barrierefrei.</a:t>
+            </a:r>
+          </a:p>
+          <a:p>
+            <a:pPr indent="0" marL="0">
+              <a:lnSpc>
+                <a:spcPct val="118000"/>
+              </a:lnSpc>
+              <a:spcBef>
+                <a:spcPts val="300"/>
+              </a:spcBef>
+              <a:buNone/>
+            </a:pPr>
+            <a:r>
+              <a:rPr lang="de-CH" sz="900" dirty="0">
+                <a:solidFill>
+                  <a:srgbClr val="6B7480"/>
+                </a:solidFill>
+                <a:latin typeface="Goetheanum Schrift" pitchFamily="34" charset="0"/>
+                <a:ea typeface="Goetheanum Schrift" pitchFamily="34" charset="-122"/>
+                <a:cs typeface="Goetheanum Schrift" pitchFamily="34" charset="-120"/>
+              </a:rPr>
+              <a:t>Der Feinschliff ist Goodwill – nutze die gemeinsame Sprache und entwickle sie mit.</a:t>
+            </a:r>
+          </a:p>
+        </p:txBody>
+      </p:sp>
     </p:spTree>
   </p:cSld>
   <p:clrMapOvr>
@@ -11849,7 +11934,7 @@
                 <a:ea typeface="Goetheanum Schrift" pitchFamily="34" charset="-122"/>
                 <a:cs typeface="Goetheanum Schrift" pitchFamily="34" charset="-120"/>
               </a:rPr>
-              <a:t>betont allein durch die Fette.</a:t>
+              <a:t>betont allein durch die Fette – ein Merkmal genügt (Einfachauszeichnung).</a:t>
             </a:r>
             <a:endParaRPr lang="en-US" sz="1300" dirty="0"/>
           </a:p>
@@ -12226,7 +12311,7 @@
                 <a:ea typeface="Goetheanum Schrift" pitchFamily="34" charset="-122"/>
                 <a:cs typeface="Goetheanum Schrift" pitchFamily="34" charset="-120"/>
               </a:rPr>
-              <a:t>Zwischentitel in Laut 13,</a:t>
+              <a:t>Zwischentitel in Deutlich 13,</a:t>
             </a:r>
             <a:endParaRPr lang="en-US" sz="1300" dirty="0"/>
           </a:p>

--- a/assets/templates/GoetheanumVorlageA4.pptx
+++ b/assets/templates/GoetheanumVorlageA4.pptx
@@ -8,6 +8,7 @@
     <p:sldId id="256" r:id="rId2"/>
     <p:sldId id="257" r:id="rId3"/>
     <p:sldId id="258" r:id="rId4"/>
+    <p:sldId id="271" r:id="rId22"/>
     <p:sldId id="259" r:id="rId5"/>
     <p:sldId id="260" r:id="rId6"/>
     <p:sldId id="261" r:id="rId7"/>
@@ -7481,6 +7482,464 @@
 </p:sld>
 </file>
 
+<file path=ppt/slides/slide16.xml><?xml version="1.0" encoding="utf-8"?>
+<p:sld xmlns:a="http://schemas.openxmlformats.org/drawingml/2006/main" xmlns:r="http://schemas.openxmlformats.org/officeDocument/2006/relationships" xmlns:p="http://schemas.openxmlformats.org/presentationml/2006/main">
+  <p:cSld name="GOE Feintypografie">
+    <p:spTree>
+      <p:nvGrpSpPr>
+        <p:cNvPr id="1" name=""/>
+        <p:cNvGrpSpPr/>
+        <p:nvPr/>
+      </p:nvGrpSpPr>
+      <p:grpSpPr>
+        <a:xfrm>
+          <a:off x="0" y="0"/>
+          <a:ext cx="0" cy="0"/>
+          <a:chOff x="0" y="0"/>
+          <a:chExt cx="0" cy="0"/>
+        </a:xfrm>
+      </p:grpSpPr>
+      <p:sp>
+        <p:nvSpPr>
+          <p:cNvPr id="2" name="Kicker"/>
+          <p:cNvSpPr/>
+          <p:nvPr/>
+        </p:nvSpPr>
+        <p:spPr>
+          <a:xfrm>
+            <a:off x="548640" y="1143000"/>
+            <a:ext cx="4572000" cy="274320"/>
+          </a:xfrm>
+          <a:prstGeom prst="rect">
+            <a:avLst/>
+          </a:prstGeom>
+          <a:noFill/>
+          <a:ln/>
+        </p:spPr>
+        <p:txBody>
+          <a:bodyPr wrap="square" lIns="0" tIns="0" rIns="0" bIns="0" rtlCol="0" anchor="t"/>
+          <a:lstStyle/>
+          <a:p>
+            <a:pPr indent="0" marL="0">
+              <a:buNone/>
+            </a:pPr>
+            <a:r>
+              <a:rPr lang="de-CH" sz="1300" dirty="0">
+                <a:solidFill>
+                  <a:srgbClr val="005EB8"/>
+                </a:solidFill>
+                <a:latin typeface="Goetheanum Schrift" pitchFamily="34" charset="0"/>
+                <a:ea typeface="Goetheanum Schrift" pitchFamily="34" charset="-122"/>
+                <a:cs typeface="Goetheanum Schrift" pitchFamily="34" charset="-120"/>
+              </a:rPr>
+              <a:t>Vorlage</a:t>
+            </a:r>
+          </a:p>
+        </p:txBody>
+      </p:sp>
+      <p:sp>
+        <p:nvSpPr>
+          <p:cNvPr id="3" name="Titel"/>
+          <p:cNvSpPr/>
+          <p:nvPr/>
+        </p:nvSpPr>
+        <p:spPr>
+          <a:xfrm>
+            <a:off x="548640" y="1463040"/>
+            <a:ext cx="9592056" cy="594360"/>
+          </a:xfrm>
+          <a:prstGeom prst="rect">
+            <a:avLst/>
+          </a:prstGeom>
+          <a:noFill/>
+          <a:ln/>
+        </p:spPr>
+        <p:txBody>
+          <a:bodyPr wrap="square" lIns="0" tIns="0" rIns="0" bIns="0" rtlCol="0" anchor="t"/>
+          <a:lstStyle/>
+          <a:p>
+            <a:pPr indent="0" marL="0">
+              <a:buNone/>
+            </a:pPr>
+            <a:r>
+              <a:rPr lang="de-CH" sz="2600" dirty="0">
+                <a:solidFill>
+                  <a:srgbClr val="1A1A1A"/>
+                </a:solidFill>
+                <a:latin typeface="Goetheanum Schrift Deutlich" pitchFamily="34" charset="0"/>
+                <a:ea typeface="Goetheanum Schrift Deutlich" pitchFamily="34" charset="-122"/>
+                <a:cs typeface="Goetheanum Schrift Deutlich" pitchFamily="34" charset="-120"/>
+              </a:rPr>
+              <a:t>Die kleinen Zeichen</a:t>
+            </a:r>
+          </a:p>
+        </p:txBody>
+      </p:sp>
+      <p:sp>
+        <p:nvSpPr>
+          <p:cNvPr id="4" name="Lede"/>
+          <p:cNvSpPr/>
+          <p:nvPr/>
+        </p:nvSpPr>
+        <p:spPr>
+          <a:xfrm>
+            <a:off x="548640" y="2286000"/>
+            <a:ext cx="9592056" cy="320040"/>
+          </a:xfrm>
+          <a:prstGeom prst="rect">
+            <a:avLst/>
+          </a:prstGeom>
+          <a:noFill/>
+          <a:ln/>
+        </p:spPr>
+        <p:txBody>
+          <a:bodyPr wrap="square" lIns="0" tIns="0" rIns="0" bIns="0" rtlCol="0" anchor="t"/>
+          <a:lstStyle/>
+          <a:p>
+            <a:pPr indent="0" marL="0">
+              <a:buNone/>
+            </a:pPr>
+            <a:r>
+              <a:rPr lang="de-CH" sz="1300" dirty="0">
+                <a:solidFill>
+                  <a:srgbClr val="6B7480"/>
+                </a:solidFill>
+                <a:latin typeface="Goetheanum Schrift" pitchFamily="34" charset="0"/>
+                <a:ea typeface="Goetheanum Schrift" pitchFamily="34" charset="-122"/>
+                <a:cs typeface="Goetheanum Schrift" pitchFamily="34" charset="-120"/>
+              </a:rPr>
+              <a:t>Klein, aber sie tragen die Sorgfalt – was PowerPoint nicht erzwingt.</a:t>
+            </a:r>
+          </a:p>
+        </p:txBody>
+      </p:sp>
+      <p:sp>
+        <p:nvSpPr>
+          <p:cNvPr id="5" name="BeispieleLinks"/>
+          <p:cNvSpPr/>
+          <p:nvPr/>
+        </p:nvSpPr>
+        <p:spPr>
+          <a:xfrm>
+            <a:off x="548640" y="3060000"/>
+            <a:ext cx="4680000" cy="3960000"/>
+          </a:xfrm>
+          <a:prstGeom prst="rect">
+            <a:avLst/>
+          </a:prstGeom>
+          <a:noFill/>
+          <a:ln/>
+        </p:spPr>
+        <p:txBody>
+          <a:bodyPr wrap="square" lIns="0" tIns="0" rIns="0" bIns="0" rtlCol="0" anchor="t"/>
+          <a:lstStyle/>
+          <a:p>
+            <a:pPr indent="0" marL="0">
+              <a:buNone/>
+            </a:pPr>
+            <a:r>
+              <a:rPr lang="de-CH" sz="2400" dirty="0">
+                <a:solidFill>
+                  <a:srgbClr val="1A1A1A"/>
+                </a:solidFill>
+                <a:latin typeface="Goetheanum Schrift" pitchFamily="34" charset="0"/>
+                <a:ea typeface="Goetheanum Schrift" pitchFamily="34" charset="-122"/>
+                <a:cs typeface="Goetheanum Schrift" pitchFamily="34" charset="-120"/>
+              </a:rPr>
+              <a:t>‹Zitat›</a:t>
+            </a:r>
+          </a:p>
+          <a:p>
+            <a:pPr indent="0" marL="0">
+              <a:spcBef>
+                <a:spcPts val="200"/>
+              </a:spcBef>
+              <a:buNone/>
+            </a:pPr>
+            <a:r>
+              <a:rPr lang="de-CH" sz="1000" dirty="0">
+                <a:solidFill>
+                  <a:srgbClr val="6B7480"/>
+                </a:solidFill>
+                <a:latin typeface="Goetheanum Schrift" pitchFamily="34" charset="0"/>
+                <a:ea typeface="Goetheanum Schrift" pitchFamily="34" charset="-122"/>
+                <a:cs typeface="Goetheanum Schrift" pitchFamily="34" charset="-120"/>
+              </a:rPr>
+              <a:t>einfache Guillemets ‹…› für Anführungen</a:t>
+            </a:r>
+          </a:p>
+          <a:p>
+            <a:pPr indent="0" marL="0">
+              <a:spcBef>
+                <a:spcPts val="2000"/>
+              </a:spcBef>
+              <a:buNone/>
+            </a:pPr>
+            <a:r>
+              <a:rPr lang="de-CH" sz="2400" dirty="0">
+                <a:solidFill>
+                  <a:srgbClr val="1A1A1A"/>
+                </a:solidFill>
+                <a:latin typeface="Goetheanum Schrift" pitchFamily="34" charset="0"/>
+                <a:ea typeface="Goetheanum Schrift" pitchFamily="34" charset="-122"/>
+                <a:cs typeface="Goetheanum Schrift" pitchFamily="34" charset="-120"/>
+              </a:rPr>
+              <a:t>−2,1 %</a:t>
+            </a:r>
+          </a:p>
+          <a:p>
+            <a:pPr indent="0" marL="0">
+              <a:spcBef>
+                <a:spcPts val="200"/>
+              </a:spcBef>
+              <a:buNone/>
+            </a:pPr>
+            <a:r>
+              <a:rPr lang="de-CH" sz="1000" dirty="0">
+                <a:solidFill>
+                  <a:srgbClr val="6B7480"/>
+                </a:solidFill>
+                <a:latin typeface="Goetheanum Schrift" pitchFamily="34" charset="0"/>
+                <a:ea typeface="Goetheanum Schrift" pitchFamily="34" charset="-122"/>
+                <a:cs typeface="Goetheanum Schrift" pitchFamily="34" charset="-120"/>
+              </a:rPr>
+              <a:t>echtes Minus −, kein Bindestrich</a:t>
+            </a:r>
+          </a:p>
+          <a:p>
+            <a:pPr indent="0" marL="0">
+              <a:spcBef>
+                <a:spcPts val="2000"/>
+              </a:spcBef>
+              <a:buNone/>
+            </a:pPr>
+            <a:r>
+              <a:rPr lang="de-CH" sz="2400" dirty="0">
+                <a:solidFill>
+                  <a:srgbClr val="1A1A1A"/>
+                </a:solidFill>
+                <a:latin typeface="Goetheanum Schrift" pitchFamily="34" charset="0"/>
+                <a:ea typeface="Goetheanum Schrift" pitchFamily="34" charset="-122"/>
+                <a:cs typeface="Goetheanum Schrift" pitchFamily="34" charset="-120"/>
+              </a:rPr>
+              <a:t>Kapitel 1</a:t>
+            </a:r>
+          </a:p>
+          <a:p>
+            <a:pPr indent="0" marL="0">
+              <a:spcBef>
+                <a:spcPts val="200"/>
+              </a:spcBef>
+              <a:buNone/>
+            </a:pPr>
+            <a:r>
+              <a:rPr lang="de-CH" sz="1000" dirty="0">
+                <a:solidFill>
+                  <a:srgbClr val="6B7480"/>
+                </a:solidFill>
+                <a:latin typeface="Goetheanum Schrift" pitchFamily="34" charset="0"/>
+                <a:ea typeface="Goetheanum Schrift" pitchFamily="34" charset="-122"/>
+                <a:cs typeface="Goetheanum Schrift" pitchFamily="34" charset="-120"/>
+              </a:rPr>
+              <a:t>keine führenden Nullen – nicht ‹01›</a:t>
+            </a:r>
+          </a:p>
+        </p:txBody>
+      </p:sp>
+      <p:sp>
+        <p:nvSpPr>
+          <p:cNvPr id="6" name="BeispieleRechts"/>
+          <p:cNvSpPr/>
+          <p:nvPr/>
+        </p:nvSpPr>
+        <p:spPr>
+          <a:xfrm>
+            <a:off x="5688640" y="3060000"/>
+            <a:ext cx="4680000" cy="3960000"/>
+          </a:xfrm>
+          <a:prstGeom prst="rect">
+            <a:avLst/>
+          </a:prstGeom>
+          <a:noFill/>
+          <a:ln/>
+        </p:spPr>
+        <p:txBody>
+          <a:bodyPr wrap="square" lIns="0" tIns="0" rIns="0" bIns="0" rtlCol="0" anchor="t"/>
+          <a:lstStyle/>
+          <a:p>
+            <a:pPr indent="0" marL="0">
+              <a:buNone/>
+            </a:pPr>
+            <a:r>
+              <a:rPr lang="de-CH" sz="2400" dirty="0">
+                <a:solidFill>
+                  <a:srgbClr val="1A1A1A"/>
+                </a:solidFill>
+                <a:latin typeface="Goetheanum Schrift" pitchFamily="34" charset="0"/>
+                <a:ea typeface="Goetheanum Schrift" pitchFamily="34" charset="-122"/>
+                <a:cs typeface="Goetheanum Schrift" pitchFamily="34" charset="-120"/>
+              </a:rPr>
+              <a:t>12,4 Mio</a:t>
+            </a:r>
+          </a:p>
+          <a:p>
+            <a:pPr indent="0" marL="0">
+              <a:spcBef>
+                <a:spcPts val="200"/>
+              </a:spcBef>
+              <a:buNone/>
+            </a:pPr>
+            <a:r>
+              <a:rPr lang="de-CH" sz="1000" dirty="0">
+                <a:solidFill>
+                  <a:srgbClr val="6B7480"/>
+                </a:solidFill>
+                <a:latin typeface="Goetheanum Schrift" pitchFamily="34" charset="0"/>
+                <a:ea typeface="Goetheanum Schrift" pitchFamily="34" charset="-122"/>
+                <a:cs typeface="Goetheanum Schrift" pitchFamily="34" charset="-120"/>
+              </a:rPr>
+              <a:t>Zahl und Einheit zusammen: schmales geschütztes Leerzeichen</a:t>
+            </a:r>
+          </a:p>
+          <a:p>
+            <a:pPr indent="0" marL="0">
+              <a:spcBef>
+                <a:spcPts val="2000"/>
+              </a:spcBef>
+              <a:buNone/>
+            </a:pPr>
+            <a:r>
+              <a:rPr lang="de-CH" sz="2400" dirty="0">
+                <a:solidFill>
+                  <a:srgbClr val="1A1A1A"/>
+                </a:solidFill>
+                <a:latin typeface="Goetheanum Schrift" pitchFamily="34" charset="0"/>
+                <a:ea typeface="Goetheanum Schrift" pitchFamily="34" charset="-122"/>
+                <a:cs typeface="Goetheanum Schrift" pitchFamily="34" charset="-120"/>
+              </a:rPr>
+              <a:t>11 690</a:t>
+            </a:r>
+          </a:p>
+          <a:p>
+            <a:pPr indent="0" marL="0">
+              <a:spcBef>
+                <a:spcPts val="200"/>
+              </a:spcBef>
+              <a:buNone/>
+            </a:pPr>
+            <a:r>
+              <a:rPr lang="de-CH" sz="1000" dirty="0">
+                <a:solidFill>
+                  <a:srgbClr val="6B7480"/>
+                </a:solidFill>
+                <a:latin typeface="Goetheanum Schrift" pitchFamily="34" charset="0"/>
+                <a:ea typeface="Goetheanum Schrift" pitchFamily="34" charset="-122"/>
+                <a:cs typeface="Goetheanum Schrift" pitchFamily="34" charset="-120"/>
+              </a:rPr>
+              <a:t>Ziffern tabellarisch und rechtsbündig, Tausender gruppiert</a:t>
+            </a:r>
+          </a:p>
+          <a:p>
+            <a:pPr indent="0" marL="0">
+              <a:spcBef>
+                <a:spcPts val="2000"/>
+              </a:spcBef>
+              <a:buNone/>
+            </a:pPr>
+            <a:r>
+              <a:rPr lang="de-CH" sz="2400" b="1" dirty="0">
+                <a:solidFill>
+                  <a:srgbClr val="1A1A1A"/>
+                </a:solidFill>
+                <a:latin typeface="Goetheanum Schrift" pitchFamily="34" charset="0"/>
+                <a:ea typeface="Goetheanum Schrift" pitchFamily="34" charset="-122"/>
+                <a:cs typeface="Goetheanum Schrift" pitchFamily="34" charset="-120"/>
+              </a:rPr>
+              <a:t>wichtig</a:t>
+            </a:r>
+          </a:p>
+          <a:p>
+            <a:pPr indent="0" marL="0">
+              <a:spcBef>
+                <a:spcPts val="200"/>
+              </a:spcBef>
+              <a:buNone/>
+            </a:pPr>
+            <a:r>
+              <a:rPr lang="de-CH" sz="1000" dirty="0">
+                <a:solidFill>
+                  <a:srgbClr val="6B7480"/>
+                </a:solidFill>
+                <a:latin typeface="Goetheanum Schrift" pitchFamily="34" charset="0"/>
+                <a:ea typeface="Goetheanum Schrift" pitchFamily="34" charset="-122"/>
+                <a:cs typeface="Goetheanum Schrift" pitchFamily="34" charset="-120"/>
+              </a:rPr>
+              <a:t>Einfachauszeichnung: ein Merkmal genügt – Laut, nie Versal</a:t>
+            </a:r>
+          </a:p>
+        </p:txBody>
+      </p:sp>
+      <p:sp>
+        <p:nvSpPr>
+          <p:cNvPr id="7" name="Regelwerk-Link"/>
+          <p:cNvSpPr/>
+          <p:nvPr/>
+        </p:nvSpPr>
+        <p:spPr>
+          <a:xfrm>
+            <a:off x="548640" y="5040000"/>
+            <a:ext cx="9592056" cy="274320"/>
+          </a:xfrm>
+          <a:prstGeom prst="rect">
+            <a:avLst/>
+          </a:prstGeom>
+          <a:noFill/>
+          <a:ln/>
+        </p:spPr>
+        <p:txBody>
+          <a:bodyPr wrap="square" lIns="0" tIns="0" rIns="0" bIns="0" rtlCol="0" anchor="t"/>
+          <a:lstStyle/>
+          <a:p>
+            <a:pPr indent="0" marL="0">
+              <a:buNone/>
+            </a:pPr>
+            <a:r>
+              <a:rPr lang="de-CH" sz="1000" dirty="0">
+                <a:solidFill>
+                  <a:srgbClr val="6B7480"/>
+                </a:solidFill>
+                <a:latin typeface="Goetheanum Schrift" pitchFamily="34" charset="0"/>
+                <a:ea typeface="Goetheanum Schrift" pitchFamily="34" charset="-122"/>
+                <a:cs typeface="Goetheanum Schrift" pitchFamily="34" charset="-120"/>
+              </a:rPr>
+              <a:t>Das ganze Regelwerk: </a:t>
+            </a:r>
+            <a:r>
+              <a:rPr lang="de-CH" sz="1000" dirty="0">
+                <a:solidFill>
+                  <a:srgbClr val="005EB8"/>
+                </a:solidFill>
+                <a:latin typeface="Goetheanum Schrift" pitchFamily="34" charset="0"/>
+                <a:ea typeface="Goetheanum Schrift" pitchFamily="34" charset="-122"/>
+                <a:cs typeface="Goetheanum Schrift" pitchFamily="34" charset="-120"/>
+                <a:hlinkClick r:id="rId2" invalidUrl="" action="" tgtFrame="" tooltip="" history="1" highlightClick="0" endSnd="0">
+                  <a:extLst>
+                    <a:ext uri="{A12FA001-AC4F-418D-AE19-62706E023703}">
+                      <ahyp:hlinkClr xmlns:ahyp="http://schemas.microsoft.com/office/drawing/2018/hyperlinkcolor" val="tx"/>
+                    </a:ext>
+                  </a:extLst>
+                </a:hlinkClick>
+              </a:rPr>
+              <a:t>werkzeuge.goetheanum.ch/typografie</a:t>
+            </a:r>
+          </a:p>
+        </p:txBody>
+      </p:sp>
+    </p:spTree>
+  </p:cSld>
+</p:sld>
+</file>
+
 <file path=ppt/slides/slide2.xml><?xml version="1.0" encoding="utf-8"?>
 <p:sld xmlns:a="http://schemas.openxmlformats.org/drawingml/2006/main" xmlns:r="http://schemas.openxmlformats.org/officeDocument/2006/relationships" xmlns:p="http://schemas.openxmlformats.org/presentationml/2006/main">
   <p:cSld name="Slide 2">

--- a/assets/templates/GoetheanumVorlageA4.pptx
+++ b/assets/templates/GoetheanumVorlageA4.pptx
@@ -9,6 +9,7 @@
     <p:sldId id="257" r:id="rId3"/>
     <p:sldId id="258" r:id="rId4"/>
     <p:sldId id="271" r:id="rId22"/>
+    <p:sldId id="272" r:id="rId23"/>
     <p:sldId id="259" r:id="rId5"/>
     <p:sldId id="260" r:id="rId6"/>
     <p:sldId id="261" r:id="rId7"/>
@@ -7940,6 +7941,464 @@
 </p:sld>
 </file>
 
+<file path=ppt/slides/slide17.xml><?xml version="1.0" encoding="utf-8"?>
+<p:sld xmlns:a="http://schemas.openxmlformats.org/drawingml/2006/main" xmlns:r="http://schemas.openxmlformats.org/officeDocument/2006/relationships" xmlns:p="http://schemas.openxmlformats.org/presentationml/2006/main">
+  <p:cSld name="GOE Feintypografie 2">
+    <p:spTree>
+      <p:nvGrpSpPr>
+        <p:cNvPr id="1" name=""/>
+        <p:cNvGrpSpPr/>
+        <p:nvPr/>
+      </p:nvGrpSpPr>
+      <p:grpSpPr>
+        <a:xfrm>
+          <a:off x="0" y="0"/>
+          <a:ext cx="0" cy="0"/>
+          <a:chOff x="0" y="0"/>
+          <a:chExt cx="0" cy="0"/>
+        </a:xfrm>
+      </p:grpSpPr>
+      <p:sp>
+        <p:nvSpPr>
+          <p:cNvPr id="2" name="Kicker"/>
+          <p:cNvSpPr/>
+          <p:nvPr/>
+        </p:nvSpPr>
+        <p:spPr>
+          <a:xfrm>
+            <a:off x="548640" y="1143000"/>
+            <a:ext cx="4572000" cy="274320"/>
+          </a:xfrm>
+          <a:prstGeom prst="rect">
+            <a:avLst/>
+          </a:prstGeom>
+          <a:noFill/>
+          <a:ln/>
+        </p:spPr>
+        <p:txBody>
+          <a:bodyPr wrap="square" lIns="0" tIns="0" rIns="0" bIns="0" rtlCol="0" anchor="t"/>
+          <a:lstStyle/>
+          <a:p>
+            <a:pPr indent="0" marL="0">
+              <a:buNone/>
+            </a:pPr>
+            <a:r>
+              <a:rPr lang="de-CH" sz="1300" dirty="0">
+                <a:solidFill>
+                  <a:srgbClr val="005EB8"/>
+                </a:solidFill>
+                <a:latin typeface="Goetheanum Schrift" pitchFamily="34" charset="0"/>
+                <a:ea typeface="Goetheanum Schrift" pitchFamily="34" charset="-122"/>
+                <a:cs typeface="Goetheanum Schrift" pitchFamily="34" charset="-120"/>
+              </a:rPr>
+              <a:t>Vorlage</a:t>
+            </a:r>
+          </a:p>
+        </p:txBody>
+      </p:sp>
+      <p:sp>
+        <p:nvSpPr>
+          <p:cNvPr id="3" name="Titel"/>
+          <p:cNvSpPr/>
+          <p:nvPr/>
+        </p:nvSpPr>
+        <p:spPr>
+          <a:xfrm>
+            <a:off x="548640" y="1463040"/>
+            <a:ext cx="9592056" cy="594360"/>
+          </a:xfrm>
+          <a:prstGeom prst="rect">
+            <a:avLst/>
+          </a:prstGeom>
+          <a:noFill/>
+          <a:ln/>
+        </p:spPr>
+        <p:txBody>
+          <a:bodyPr wrap="square" lIns="0" tIns="0" rIns="0" bIns="0" rtlCol="0" anchor="t"/>
+          <a:lstStyle/>
+          <a:p>
+            <a:pPr indent="0" marL="0">
+              <a:buNone/>
+            </a:pPr>
+            <a:r>
+              <a:rPr lang="de-CH" sz="2600" dirty="0">
+                <a:solidFill>
+                  <a:srgbClr val="1A1A1A"/>
+                </a:solidFill>
+                <a:latin typeface="Goetheanum Schrift Deutlich" pitchFamily="34" charset="0"/>
+                <a:ea typeface="Goetheanum Schrift Deutlich" pitchFamily="34" charset="-122"/>
+                <a:cs typeface="Goetheanum Schrift Deutlich" pitchFamily="34" charset="-120"/>
+              </a:rPr>
+              <a:t>Noch feinere Zeichen</a:t>
+            </a:r>
+          </a:p>
+        </p:txBody>
+      </p:sp>
+      <p:sp>
+        <p:nvSpPr>
+          <p:cNvPr id="4" name="Lede"/>
+          <p:cNvSpPr/>
+          <p:nvPr/>
+        </p:nvSpPr>
+        <p:spPr>
+          <a:xfrm>
+            <a:off x="548640" y="2286000"/>
+            <a:ext cx="9592056" cy="320040"/>
+          </a:xfrm>
+          <a:prstGeom prst="rect">
+            <a:avLst/>
+          </a:prstGeom>
+          <a:noFill/>
+          <a:ln/>
+        </p:spPr>
+        <p:txBody>
+          <a:bodyPr wrap="square" lIns="0" tIns="0" rIns="0" bIns="0" rtlCol="0" anchor="t"/>
+          <a:lstStyle/>
+          <a:p>
+            <a:pPr indent="0" marL="0">
+              <a:buNone/>
+            </a:pPr>
+            <a:r>
+              <a:rPr lang="de-CH" sz="1300" dirty="0">
+                <a:solidFill>
+                  <a:srgbClr val="6B7480"/>
+                </a:solidFill>
+                <a:latin typeface="Goetheanum Schrift" pitchFamily="34" charset="0"/>
+                <a:ea typeface="Goetheanum Schrift" pitchFamily="34" charset="-122"/>
+                <a:cs typeface="Goetheanum Schrift" pitchFamily="34" charset="-120"/>
+              </a:rPr>
+              <a:t>Striche mit Namen, Punkte mit Mass – kleine Unterschiede, grosse Ruhe.</a:t>
+            </a:r>
+          </a:p>
+        </p:txBody>
+      </p:sp>
+      <p:sp>
+        <p:nvSpPr>
+          <p:cNvPr id="5" name="BeispieleLinks"/>
+          <p:cNvSpPr/>
+          <p:nvPr/>
+        </p:nvSpPr>
+        <p:spPr>
+          <a:xfrm>
+            <a:off x="548640" y="3060000"/>
+            <a:ext cx="4680000" cy="3960000"/>
+          </a:xfrm>
+          <a:prstGeom prst="rect">
+            <a:avLst/>
+          </a:prstGeom>
+          <a:noFill/>
+          <a:ln/>
+        </p:spPr>
+        <p:txBody>
+          <a:bodyPr wrap="square" lIns="0" tIns="0" rIns="0" bIns="0" rtlCol="0" anchor="t"/>
+          <a:lstStyle/>
+          <a:p>
+            <a:pPr indent="0" marL="0">
+              <a:buNone/>
+            </a:pPr>
+            <a:r>
+              <a:rPr lang="de-CH" sz="2400" dirty="0">
+                <a:solidFill>
+                  <a:srgbClr val="1A1A1A"/>
+                </a:solidFill>
+                <a:latin typeface="Goetheanum Schrift" pitchFamily="34" charset="0"/>
+                <a:ea typeface="Goetheanum Schrift" pitchFamily="34" charset="-122"/>
+                <a:cs typeface="Goetheanum Schrift" pitchFamily="34" charset="-120"/>
+              </a:rPr>
+              <a:t>und so weiter …</a:t>
+            </a:r>
+          </a:p>
+          <a:p>
+            <a:pPr indent="0" marL="0">
+              <a:spcBef>
+                <a:spcPts val="200"/>
+              </a:spcBef>
+              <a:buNone/>
+            </a:pPr>
+            <a:r>
+              <a:rPr lang="de-CH" sz="1000" dirty="0">
+                <a:solidFill>
+                  <a:srgbClr val="6B7480"/>
+                </a:solidFill>
+                <a:latin typeface="Goetheanum Schrift" pitchFamily="34" charset="0"/>
+                <a:ea typeface="Goetheanum Schrift" pitchFamily="34" charset="-122"/>
+                <a:cs typeface="Goetheanum Schrift" pitchFamily="34" charset="-120"/>
+              </a:rPr>
+              <a:t>Auslassung: ein Zeichen …, nicht drei Punkte</a:t>
+            </a:r>
+          </a:p>
+          <a:p>
+            <a:pPr indent="0" marL="0">
+              <a:spcBef>
+                <a:spcPts val="2000"/>
+              </a:spcBef>
+              <a:buNone/>
+            </a:pPr>
+            <a:r>
+              <a:rPr lang="de-CH" sz="2400" dirty="0">
+                <a:solidFill>
+                  <a:srgbClr val="1A1A1A"/>
+                </a:solidFill>
+                <a:latin typeface="Goetheanum Schrift" pitchFamily="34" charset="0"/>
+                <a:ea typeface="Goetheanum Schrift" pitchFamily="34" charset="-122"/>
+                <a:cs typeface="Goetheanum Schrift" pitchFamily="34" charset="-120"/>
+              </a:rPr>
+              <a:t>Ja – oder Nein?</a:t>
+            </a:r>
+          </a:p>
+          <a:p>
+            <a:pPr indent="0" marL="0">
+              <a:spcBef>
+                <a:spcPts val="200"/>
+              </a:spcBef>
+              <a:buNone/>
+            </a:pPr>
+            <a:r>
+              <a:rPr lang="de-CH" sz="1000" dirty="0">
+                <a:solidFill>
+                  <a:srgbClr val="6B7480"/>
+                </a:solidFill>
+                <a:latin typeface="Goetheanum Schrift" pitchFamily="34" charset="0"/>
+                <a:ea typeface="Goetheanum Schrift" pitchFamily="34" charset="-122"/>
+                <a:cs typeface="Goetheanum Schrift" pitchFamily="34" charset="-120"/>
+              </a:rPr>
+              <a:t>Gedankenstrich: Halbgeviert – mit Spatien</a:t>
+            </a:r>
+          </a:p>
+          <a:p>
+            <a:pPr indent="0" marL="0">
+              <a:spcBef>
+                <a:spcPts val="2000"/>
+              </a:spcBef>
+              <a:buNone/>
+            </a:pPr>
+            <a:r>
+              <a:rPr lang="de-CH" sz="2400" dirty="0">
+                <a:solidFill>
+                  <a:srgbClr val="1A1A1A"/>
+                </a:solidFill>
+                <a:latin typeface="Goetheanum Schrift" pitchFamily="34" charset="0"/>
+                <a:ea typeface="Goetheanum Schrift" pitchFamily="34" charset="-122"/>
+                <a:cs typeface="Goetheanum Schrift" pitchFamily="34" charset="-120"/>
+              </a:rPr>
+              <a:t>9–17 Uhr</a:t>
+            </a:r>
+          </a:p>
+          <a:p>
+            <a:pPr indent="0" marL="0">
+              <a:spcBef>
+                <a:spcPts val="200"/>
+              </a:spcBef>
+              <a:buNone/>
+            </a:pPr>
+            <a:r>
+              <a:rPr lang="de-CH" sz="1000" dirty="0">
+                <a:solidFill>
+                  <a:srgbClr val="6B7480"/>
+                </a:solidFill>
+                <a:latin typeface="Goetheanum Schrift" pitchFamily="34" charset="0"/>
+                <a:ea typeface="Goetheanum Schrift" pitchFamily="34" charset="-122"/>
+                <a:cs typeface="Goetheanum Schrift" pitchFamily="34" charset="-120"/>
+              </a:rPr>
+              <a:t>Bis-Strich: Halbgeviert, ohne Spatien</a:t>
+            </a:r>
+          </a:p>
+        </p:txBody>
+      </p:sp>
+      <p:sp>
+        <p:nvSpPr>
+          <p:cNvPr id="6" name="BeispieleRechts"/>
+          <p:cNvSpPr/>
+          <p:nvPr/>
+        </p:nvSpPr>
+        <p:spPr>
+          <a:xfrm>
+            <a:off x="5688640" y="3060000"/>
+            <a:ext cx="4680000" cy="3960000"/>
+          </a:xfrm>
+          <a:prstGeom prst="rect">
+            <a:avLst/>
+          </a:prstGeom>
+          <a:noFill/>
+          <a:ln/>
+        </p:spPr>
+        <p:txBody>
+          <a:bodyPr wrap="square" lIns="0" tIns="0" rIns="0" bIns="0" rtlCol="0" anchor="t"/>
+          <a:lstStyle/>
+          <a:p>
+            <a:pPr indent="0" marL="0">
+              <a:buNone/>
+            </a:pPr>
+            <a:r>
+              <a:rPr lang="de-CH" sz="2400" dirty="0">
+                <a:solidFill>
+                  <a:srgbClr val="1A1A1A"/>
+                </a:solidFill>
+                <a:latin typeface="Goetheanum Schrift" pitchFamily="34" charset="0"/>
+                <a:ea typeface="Goetheanum Schrift" pitchFamily="34" charset="-122"/>
+                <a:cs typeface="Goetheanum Schrift" pitchFamily="34" charset="-120"/>
+              </a:rPr>
+              <a:t>z. B. sonntags</a:t>
+            </a:r>
+          </a:p>
+          <a:p>
+            <a:pPr indent="0" marL="0">
+              <a:spcBef>
+                <a:spcPts val="200"/>
+              </a:spcBef>
+              <a:buNone/>
+            </a:pPr>
+            <a:r>
+              <a:rPr lang="de-CH" sz="1000" dirty="0">
+                <a:solidFill>
+                  <a:srgbClr val="6B7480"/>
+                </a:solidFill>
+                <a:latin typeface="Goetheanum Schrift" pitchFamily="34" charset="0"/>
+                <a:ea typeface="Goetheanum Schrift" pitchFamily="34" charset="-122"/>
+                <a:cs typeface="Goetheanum Schrift" pitchFamily="34" charset="-120"/>
+              </a:rPr>
+              <a:t>schmales geschütztes Leerzeichen, auch in Abkürzungen</a:t>
+            </a:r>
+          </a:p>
+          <a:p>
+            <a:pPr indent="0" marL="0">
+              <a:spcBef>
+                <a:spcPts val="2000"/>
+              </a:spcBef>
+              <a:buNone/>
+            </a:pPr>
+            <a:r>
+              <a:rPr lang="de-CH" sz="2400" dirty="0">
+                <a:solidFill>
+                  <a:srgbClr val="1A1A1A"/>
+                </a:solidFill>
+                <a:latin typeface="Goetheanum Schrift" pitchFamily="34" charset="0"/>
+                <a:ea typeface="Goetheanum Schrift" pitchFamily="34" charset="-122"/>
+                <a:cs typeface="Goetheanum Schrift" pitchFamily="34" charset="-120"/>
+              </a:rPr>
+              <a:t>Grösse</a:t>
+            </a:r>
+          </a:p>
+          <a:p>
+            <a:pPr indent="0" marL="0">
+              <a:spcBef>
+                <a:spcPts val="200"/>
+              </a:spcBef>
+              <a:buNone/>
+            </a:pPr>
+            <a:r>
+              <a:rPr lang="de-CH" sz="1000" dirty="0">
+                <a:solidFill>
+                  <a:srgbClr val="6B7480"/>
+                </a:solidFill>
+                <a:latin typeface="Goetheanum Schrift" pitchFamily="34" charset="0"/>
+                <a:ea typeface="Goetheanum Schrift" pitchFamily="34" charset="-122"/>
+                <a:cs typeface="Goetheanum Schrift" pitchFamily="34" charset="-120"/>
+              </a:rPr>
+              <a:t>Schweizer Schreibung: ss statt ß</a:t>
+            </a:r>
+          </a:p>
+          <a:p>
+            <a:pPr indent="0" marL="0">
+              <a:spcBef>
+                <a:spcPts val="2000"/>
+              </a:spcBef>
+              <a:buNone/>
+            </a:pPr>
+            <a:r>
+              <a:rPr lang="de-CH" sz="2400" dirty="0">
+                <a:solidFill>
+                  <a:srgbClr val="1A1A1A"/>
+                </a:solidFill>
+                <a:latin typeface="Goetheanum Schrift" pitchFamily="34" charset="0"/>
+                <a:ea typeface="Goetheanum Schrift" pitchFamily="34" charset="-122"/>
+                <a:cs typeface="Goetheanum Schrift" pitchFamily="34" charset="-120"/>
+              </a:rPr>
+              <a:t>Silbentrennung</a:t>
+            </a:r>
+          </a:p>
+          <a:p>
+            <a:pPr indent="0" marL="0">
+              <a:spcBef>
+                <a:spcPts val="200"/>
+              </a:spcBef>
+              <a:buNone/>
+            </a:pPr>
+            <a:r>
+              <a:rPr lang="de-CH" sz="1000" dirty="0">
+                <a:solidFill>
+                  <a:srgbClr val="6B7480"/>
+                </a:solidFill>
+                <a:latin typeface="Goetheanum Schrift" pitchFamily="34" charset="0"/>
+                <a:ea typeface="Goetheanum Schrift" pitchFamily="34" charset="-122"/>
+                <a:cs typeface="Goetheanum Schrift" pitchFamily="34" charset="-120"/>
+              </a:rPr>
+              <a:t>aktiv gesetzt – für einen ruhigen Rand</a:t>
+            </a:r>
+          </a:p>
+        </p:txBody>
+      </p:sp>
+      <p:sp>
+        <p:nvSpPr>
+          <p:cNvPr id="7" name="Regelwerk-Link"/>
+          <p:cNvSpPr/>
+          <p:nvPr/>
+        </p:nvSpPr>
+        <p:spPr>
+          <a:xfrm>
+            <a:off x="548640" y="5040000"/>
+            <a:ext cx="9592056" cy="274320"/>
+          </a:xfrm>
+          <a:prstGeom prst="rect">
+            <a:avLst/>
+          </a:prstGeom>
+          <a:noFill/>
+          <a:ln/>
+        </p:spPr>
+        <p:txBody>
+          <a:bodyPr wrap="square" lIns="0" tIns="0" rIns="0" bIns="0" rtlCol="0" anchor="t"/>
+          <a:lstStyle/>
+          <a:p>
+            <a:pPr indent="0" marL="0">
+              <a:buNone/>
+            </a:pPr>
+            <a:r>
+              <a:rPr lang="de-CH" sz="1000" dirty="0">
+                <a:solidFill>
+                  <a:srgbClr val="6B7480"/>
+                </a:solidFill>
+                <a:latin typeface="Goetheanum Schrift" pitchFamily="34" charset="0"/>
+                <a:ea typeface="Goetheanum Schrift" pitchFamily="34" charset="-122"/>
+                <a:cs typeface="Goetheanum Schrift" pitchFamily="34" charset="-120"/>
+              </a:rPr>
+              <a:t>Das ganze Regelwerk: </a:t>
+            </a:r>
+            <a:r>
+              <a:rPr lang="de-CH" sz="1000" dirty="0">
+                <a:solidFill>
+                  <a:srgbClr val="005EB8"/>
+                </a:solidFill>
+                <a:latin typeface="Goetheanum Schrift" pitchFamily="34" charset="0"/>
+                <a:ea typeface="Goetheanum Schrift" pitchFamily="34" charset="-122"/>
+                <a:cs typeface="Goetheanum Schrift" pitchFamily="34" charset="-120"/>
+                <a:hlinkClick r:id="rId2" invalidUrl="" action="" tgtFrame="" tooltip="" history="1" highlightClick="0" endSnd="0">
+                  <a:extLst>
+                    <a:ext uri="{A12FA001-AC4F-418D-AE19-62706E023703}">
+                      <ahyp:hlinkClr xmlns:ahyp="http://schemas.microsoft.com/office/drawing/2018/hyperlinkcolor" val="tx"/>
+                    </a:ext>
+                  </a:extLst>
+                </a:hlinkClick>
+              </a:rPr>
+              <a:t>werkzeuge.goetheanum.ch/typografie</a:t>
+            </a:r>
+          </a:p>
+        </p:txBody>
+      </p:sp>
+    </p:spTree>
+  </p:cSld>
+</p:sld>
+</file>
+
 <file path=ppt/slides/slide2.xml><?xml version="1.0" encoding="utf-8"?>
 <p:sld xmlns:a="http://schemas.openxmlformats.org/drawingml/2006/main" xmlns:r="http://schemas.openxmlformats.org/officeDocument/2006/relationships" xmlns:p="http://schemas.openxmlformats.org/presentationml/2006/main">
   <p:cSld name="Slide 2">
@@ -13237,7 +13696,7 @@
                 <a:ea typeface="Goetheanum Schrift" pitchFamily="34" charset="-122"/>
                 <a:cs typeface="Goetheanum Schrift" pitchFamily="34" charset="-120"/>
               </a:rPr>
-              <a:t>Der Text behält seine Spaltenbreite</a:t>
+              <a:t>Der Text behält seine Spaltenbreite – rund 62 Zeichen –</a:t>
             </a:r>
             <a:endParaRPr lang="en-US" sz="1300" dirty="0"/>
           </a:p>

--- a/assets/templates/GoetheanumVorlageA4.pptx
+++ b/assets/templates/GoetheanumVorlageA4.pptx
@@ -8,6 +8,8 @@
     <p:sldId id="256" r:id="rId2"/>
     <p:sldId id="257" r:id="rId3"/>
     <p:sldId id="258" r:id="rId4"/>
+    <p:sldId id="271" r:id="rId22"/>
+    <p:sldId id="272" r:id="rId23"/>
     <p:sldId id="259" r:id="rId5"/>
     <p:sldId id="260" r:id="rId6"/>
     <p:sldId id="261" r:id="rId7"/>
@@ -4885,7 +4887,7 @@
                 <a:ea typeface="Goetheanum Schrift" pitchFamily="34" charset="-122"/>
                 <a:cs typeface="Goetheanum Schrift" pitchFamily="34" charset="-120"/>
               </a:rPr>
-              <a:t>Musterzahlen, beim Ausfüllen ersetzen.</a:t>
+              <a:t>Musterzahlen ersetzen. −2,1 % trägt ein echtes Minus, 12,4 Mio ein schmales Leerzeichen.</a:t>
             </a:r>
             <a:endParaRPr lang="en-US" sz="1300" dirty="0"/>
           </a:p>
@@ -6458,7 +6460,7 @@
                 <a:ea typeface="Goetheanum Schrift" pitchFamily="34" charset="-122"/>
                 <a:cs typeface="Goetheanum Schrift" pitchFamily="34" charset="-120"/>
               </a:rPr>
-              <a:t>Angaben in Tausend CHF, Musterzahlen.</a:t>
+              <a:t>Angaben in Tausend CHF. Ziffern tabellarisch und rechtsbündig; 11 690 gruppiert.</a:t>
             </a:r>
             <a:endParaRPr lang="en-US" sz="900" dirty="0"/>
           </a:p>
@@ -7481,6 +7483,922 @@
 </p:sld>
 </file>
 
+<file path=ppt/slides/slide16.xml><?xml version="1.0" encoding="utf-8"?>
+<p:sld xmlns:a="http://schemas.openxmlformats.org/drawingml/2006/main" xmlns:r="http://schemas.openxmlformats.org/officeDocument/2006/relationships" xmlns:p="http://schemas.openxmlformats.org/presentationml/2006/main">
+  <p:cSld name="GOE Feintypografie">
+    <p:spTree>
+      <p:nvGrpSpPr>
+        <p:cNvPr id="1" name=""/>
+        <p:cNvGrpSpPr/>
+        <p:nvPr/>
+      </p:nvGrpSpPr>
+      <p:grpSpPr>
+        <a:xfrm>
+          <a:off x="0" y="0"/>
+          <a:ext cx="0" cy="0"/>
+          <a:chOff x="0" y="0"/>
+          <a:chExt cx="0" cy="0"/>
+        </a:xfrm>
+      </p:grpSpPr>
+      <p:sp>
+        <p:nvSpPr>
+          <p:cNvPr id="2" name="Kicker"/>
+          <p:cNvSpPr/>
+          <p:nvPr/>
+        </p:nvSpPr>
+        <p:spPr>
+          <a:xfrm>
+            <a:off x="548640" y="1143000"/>
+            <a:ext cx="4572000" cy="274320"/>
+          </a:xfrm>
+          <a:prstGeom prst="rect">
+            <a:avLst/>
+          </a:prstGeom>
+          <a:noFill/>
+          <a:ln/>
+        </p:spPr>
+        <p:txBody>
+          <a:bodyPr wrap="square" lIns="0" tIns="0" rIns="0" bIns="0" rtlCol="0" anchor="t"/>
+          <a:lstStyle/>
+          <a:p>
+            <a:pPr indent="0" marL="0">
+              <a:buNone/>
+            </a:pPr>
+            <a:r>
+              <a:rPr lang="de-CH" sz="1300" dirty="0">
+                <a:solidFill>
+                  <a:srgbClr val="005EB8"/>
+                </a:solidFill>
+                <a:latin typeface="Goetheanum Schrift" pitchFamily="34" charset="0"/>
+                <a:ea typeface="Goetheanum Schrift" pitchFamily="34" charset="-122"/>
+                <a:cs typeface="Goetheanum Schrift" pitchFamily="34" charset="-120"/>
+              </a:rPr>
+              <a:t>Vorlage</a:t>
+            </a:r>
+          </a:p>
+        </p:txBody>
+      </p:sp>
+      <p:sp>
+        <p:nvSpPr>
+          <p:cNvPr id="3" name="Titel"/>
+          <p:cNvSpPr/>
+          <p:nvPr/>
+        </p:nvSpPr>
+        <p:spPr>
+          <a:xfrm>
+            <a:off x="548640" y="1463040"/>
+            <a:ext cx="9592056" cy="594360"/>
+          </a:xfrm>
+          <a:prstGeom prst="rect">
+            <a:avLst/>
+          </a:prstGeom>
+          <a:noFill/>
+          <a:ln/>
+        </p:spPr>
+        <p:txBody>
+          <a:bodyPr wrap="square" lIns="0" tIns="0" rIns="0" bIns="0" rtlCol="0" anchor="t"/>
+          <a:lstStyle/>
+          <a:p>
+            <a:pPr indent="0" marL="0">
+              <a:buNone/>
+            </a:pPr>
+            <a:r>
+              <a:rPr lang="de-CH" sz="2600" dirty="0">
+                <a:solidFill>
+                  <a:srgbClr val="1A1A1A"/>
+                </a:solidFill>
+                <a:latin typeface="Goetheanum Schrift Deutlich" pitchFamily="34" charset="0"/>
+                <a:ea typeface="Goetheanum Schrift Deutlich" pitchFamily="34" charset="-122"/>
+                <a:cs typeface="Goetheanum Schrift Deutlich" pitchFamily="34" charset="-120"/>
+              </a:rPr>
+              <a:t>Die kleinen Zeichen</a:t>
+            </a:r>
+          </a:p>
+        </p:txBody>
+      </p:sp>
+      <p:sp>
+        <p:nvSpPr>
+          <p:cNvPr id="4" name="Lede"/>
+          <p:cNvSpPr/>
+          <p:nvPr/>
+        </p:nvSpPr>
+        <p:spPr>
+          <a:xfrm>
+            <a:off x="548640" y="2286000"/>
+            <a:ext cx="9592056" cy="320040"/>
+          </a:xfrm>
+          <a:prstGeom prst="rect">
+            <a:avLst/>
+          </a:prstGeom>
+          <a:noFill/>
+          <a:ln/>
+        </p:spPr>
+        <p:txBody>
+          <a:bodyPr wrap="square" lIns="0" tIns="0" rIns="0" bIns="0" rtlCol="0" anchor="t"/>
+          <a:lstStyle/>
+          <a:p>
+            <a:pPr indent="0" marL="0">
+              <a:buNone/>
+            </a:pPr>
+            <a:r>
+              <a:rPr lang="de-CH" sz="1300" dirty="0">
+                <a:solidFill>
+                  <a:srgbClr val="6B7480"/>
+                </a:solidFill>
+                <a:latin typeface="Goetheanum Schrift" pitchFamily="34" charset="0"/>
+                <a:ea typeface="Goetheanum Schrift" pitchFamily="34" charset="-122"/>
+                <a:cs typeface="Goetheanum Schrift" pitchFamily="34" charset="-120"/>
+              </a:rPr>
+              <a:t>Klein, aber sie tragen die Sorgfalt – was PowerPoint nicht erzwingt.</a:t>
+            </a:r>
+          </a:p>
+        </p:txBody>
+      </p:sp>
+      <p:sp>
+        <p:nvSpPr>
+          <p:cNvPr id="5" name="BeispieleLinks"/>
+          <p:cNvSpPr/>
+          <p:nvPr/>
+        </p:nvSpPr>
+        <p:spPr>
+          <a:xfrm>
+            <a:off x="548640" y="3060000"/>
+            <a:ext cx="4680000" cy="3960000"/>
+          </a:xfrm>
+          <a:prstGeom prst="rect">
+            <a:avLst/>
+          </a:prstGeom>
+          <a:noFill/>
+          <a:ln/>
+        </p:spPr>
+        <p:txBody>
+          <a:bodyPr wrap="square" lIns="0" tIns="0" rIns="0" bIns="0" rtlCol="0" anchor="t"/>
+          <a:lstStyle/>
+          <a:p>
+            <a:pPr indent="0" marL="0">
+              <a:buNone/>
+            </a:pPr>
+            <a:r>
+              <a:rPr lang="de-CH" sz="2400" dirty="0">
+                <a:solidFill>
+                  <a:srgbClr val="1A1A1A"/>
+                </a:solidFill>
+                <a:latin typeface="Goetheanum Schrift" pitchFamily="34" charset="0"/>
+                <a:ea typeface="Goetheanum Schrift" pitchFamily="34" charset="-122"/>
+                <a:cs typeface="Goetheanum Schrift" pitchFamily="34" charset="-120"/>
+              </a:rPr>
+              <a:t>‹Zitat›</a:t>
+            </a:r>
+          </a:p>
+          <a:p>
+            <a:pPr indent="0" marL="0">
+              <a:spcBef>
+                <a:spcPts val="200"/>
+              </a:spcBef>
+              <a:buNone/>
+            </a:pPr>
+            <a:r>
+              <a:rPr lang="de-CH" sz="1000" dirty="0">
+                <a:solidFill>
+                  <a:srgbClr val="6B7480"/>
+                </a:solidFill>
+                <a:latin typeface="Goetheanum Schrift" pitchFamily="34" charset="0"/>
+                <a:ea typeface="Goetheanum Schrift" pitchFamily="34" charset="-122"/>
+                <a:cs typeface="Goetheanum Schrift" pitchFamily="34" charset="-120"/>
+              </a:rPr>
+              <a:t>einfache Guillemets ‹…› für Anführungen</a:t>
+            </a:r>
+          </a:p>
+          <a:p>
+            <a:pPr indent="0" marL="0">
+              <a:spcBef>
+                <a:spcPts val="2000"/>
+              </a:spcBef>
+              <a:buNone/>
+            </a:pPr>
+            <a:r>
+              <a:rPr lang="de-CH" sz="2400" dirty="0">
+                <a:solidFill>
+                  <a:srgbClr val="1A1A1A"/>
+                </a:solidFill>
+                <a:latin typeface="Goetheanum Schrift" pitchFamily="34" charset="0"/>
+                <a:ea typeface="Goetheanum Schrift" pitchFamily="34" charset="-122"/>
+                <a:cs typeface="Goetheanum Schrift" pitchFamily="34" charset="-120"/>
+              </a:rPr>
+              <a:t>−2,1 %</a:t>
+            </a:r>
+          </a:p>
+          <a:p>
+            <a:pPr indent="0" marL="0">
+              <a:spcBef>
+                <a:spcPts val="200"/>
+              </a:spcBef>
+              <a:buNone/>
+            </a:pPr>
+            <a:r>
+              <a:rPr lang="de-CH" sz="1000" dirty="0">
+                <a:solidFill>
+                  <a:srgbClr val="6B7480"/>
+                </a:solidFill>
+                <a:latin typeface="Goetheanum Schrift" pitchFamily="34" charset="0"/>
+                <a:ea typeface="Goetheanum Schrift" pitchFamily="34" charset="-122"/>
+                <a:cs typeface="Goetheanum Schrift" pitchFamily="34" charset="-120"/>
+              </a:rPr>
+              <a:t>echtes Minus −, kein Bindestrich</a:t>
+            </a:r>
+          </a:p>
+          <a:p>
+            <a:pPr indent="0" marL="0">
+              <a:spcBef>
+                <a:spcPts val="2000"/>
+              </a:spcBef>
+              <a:buNone/>
+            </a:pPr>
+            <a:r>
+              <a:rPr lang="de-CH" sz="2400" dirty="0">
+                <a:solidFill>
+                  <a:srgbClr val="1A1A1A"/>
+                </a:solidFill>
+                <a:latin typeface="Goetheanum Schrift" pitchFamily="34" charset="0"/>
+                <a:ea typeface="Goetheanum Schrift" pitchFamily="34" charset="-122"/>
+                <a:cs typeface="Goetheanum Schrift" pitchFamily="34" charset="-120"/>
+              </a:rPr>
+              <a:t>Kapitel 1</a:t>
+            </a:r>
+          </a:p>
+          <a:p>
+            <a:pPr indent="0" marL="0">
+              <a:spcBef>
+                <a:spcPts val="200"/>
+              </a:spcBef>
+              <a:buNone/>
+            </a:pPr>
+            <a:r>
+              <a:rPr lang="de-CH" sz="1000" dirty="0">
+                <a:solidFill>
+                  <a:srgbClr val="6B7480"/>
+                </a:solidFill>
+                <a:latin typeface="Goetheanum Schrift" pitchFamily="34" charset="0"/>
+                <a:ea typeface="Goetheanum Schrift" pitchFamily="34" charset="-122"/>
+                <a:cs typeface="Goetheanum Schrift" pitchFamily="34" charset="-120"/>
+              </a:rPr>
+              <a:t>keine führenden Nullen – nicht ‹01›</a:t>
+            </a:r>
+          </a:p>
+        </p:txBody>
+      </p:sp>
+      <p:sp>
+        <p:nvSpPr>
+          <p:cNvPr id="6" name="BeispieleRechts"/>
+          <p:cNvSpPr/>
+          <p:nvPr/>
+        </p:nvSpPr>
+        <p:spPr>
+          <a:xfrm>
+            <a:off x="5688640" y="3060000"/>
+            <a:ext cx="4680000" cy="3960000"/>
+          </a:xfrm>
+          <a:prstGeom prst="rect">
+            <a:avLst/>
+          </a:prstGeom>
+          <a:noFill/>
+          <a:ln/>
+        </p:spPr>
+        <p:txBody>
+          <a:bodyPr wrap="square" lIns="0" tIns="0" rIns="0" bIns="0" rtlCol="0" anchor="t"/>
+          <a:lstStyle/>
+          <a:p>
+            <a:pPr indent="0" marL="0">
+              <a:buNone/>
+            </a:pPr>
+            <a:r>
+              <a:rPr lang="de-CH" sz="2400" dirty="0">
+                <a:solidFill>
+                  <a:srgbClr val="1A1A1A"/>
+                </a:solidFill>
+                <a:latin typeface="Goetheanum Schrift" pitchFamily="34" charset="0"/>
+                <a:ea typeface="Goetheanum Schrift" pitchFamily="34" charset="-122"/>
+                <a:cs typeface="Goetheanum Schrift" pitchFamily="34" charset="-120"/>
+              </a:rPr>
+              <a:t>12,4 Mio</a:t>
+            </a:r>
+          </a:p>
+          <a:p>
+            <a:pPr indent="0" marL="0">
+              <a:spcBef>
+                <a:spcPts val="200"/>
+              </a:spcBef>
+              <a:buNone/>
+            </a:pPr>
+            <a:r>
+              <a:rPr lang="de-CH" sz="1000" dirty="0">
+                <a:solidFill>
+                  <a:srgbClr val="6B7480"/>
+                </a:solidFill>
+                <a:latin typeface="Goetheanum Schrift" pitchFamily="34" charset="0"/>
+                <a:ea typeface="Goetheanum Schrift" pitchFamily="34" charset="-122"/>
+                <a:cs typeface="Goetheanum Schrift" pitchFamily="34" charset="-120"/>
+              </a:rPr>
+              <a:t>Zahl und Einheit zusammen: schmales geschütztes Leerzeichen</a:t>
+            </a:r>
+          </a:p>
+          <a:p>
+            <a:pPr indent="0" marL="0">
+              <a:spcBef>
+                <a:spcPts val="2000"/>
+              </a:spcBef>
+              <a:buNone/>
+            </a:pPr>
+            <a:r>
+              <a:rPr lang="de-CH" sz="2400" dirty="0">
+                <a:solidFill>
+                  <a:srgbClr val="1A1A1A"/>
+                </a:solidFill>
+                <a:latin typeface="Goetheanum Schrift" pitchFamily="34" charset="0"/>
+                <a:ea typeface="Goetheanum Schrift" pitchFamily="34" charset="-122"/>
+                <a:cs typeface="Goetheanum Schrift" pitchFamily="34" charset="-120"/>
+              </a:rPr>
+              <a:t>11 690</a:t>
+            </a:r>
+          </a:p>
+          <a:p>
+            <a:pPr indent="0" marL="0">
+              <a:spcBef>
+                <a:spcPts val="200"/>
+              </a:spcBef>
+              <a:buNone/>
+            </a:pPr>
+            <a:r>
+              <a:rPr lang="de-CH" sz="1000" dirty="0">
+                <a:solidFill>
+                  <a:srgbClr val="6B7480"/>
+                </a:solidFill>
+                <a:latin typeface="Goetheanum Schrift" pitchFamily="34" charset="0"/>
+                <a:ea typeface="Goetheanum Schrift" pitchFamily="34" charset="-122"/>
+                <a:cs typeface="Goetheanum Schrift" pitchFamily="34" charset="-120"/>
+              </a:rPr>
+              <a:t>Ziffern tabellarisch und rechtsbündig, Tausender gruppiert</a:t>
+            </a:r>
+          </a:p>
+          <a:p>
+            <a:pPr indent="0" marL="0">
+              <a:spcBef>
+                <a:spcPts val="2000"/>
+              </a:spcBef>
+              <a:buNone/>
+            </a:pPr>
+            <a:r>
+              <a:rPr lang="de-CH" sz="2400" b="1" dirty="0">
+                <a:solidFill>
+                  <a:srgbClr val="1A1A1A"/>
+                </a:solidFill>
+                <a:latin typeface="Goetheanum Schrift" pitchFamily="34" charset="0"/>
+                <a:ea typeface="Goetheanum Schrift" pitchFamily="34" charset="-122"/>
+                <a:cs typeface="Goetheanum Schrift" pitchFamily="34" charset="-120"/>
+              </a:rPr>
+              <a:t>wichtig</a:t>
+            </a:r>
+          </a:p>
+          <a:p>
+            <a:pPr indent="0" marL="0">
+              <a:spcBef>
+                <a:spcPts val="200"/>
+              </a:spcBef>
+              <a:buNone/>
+            </a:pPr>
+            <a:r>
+              <a:rPr lang="de-CH" sz="1000" dirty="0">
+                <a:solidFill>
+                  <a:srgbClr val="6B7480"/>
+                </a:solidFill>
+                <a:latin typeface="Goetheanum Schrift" pitchFamily="34" charset="0"/>
+                <a:ea typeface="Goetheanum Schrift" pitchFamily="34" charset="-122"/>
+                <a:cs typeface="Goetheanum Schrift" pitchFamily="34" charset="-120"/>
+              </a:rPr>
+              <a:t>Einfachauszeichnung: ein Merkmal genügt – Laut, nie Versal</a:t>
+            </a:r>
+          </a:p>
+        </p:txBody>
+      </p:sp>
+      <p:sp>
+        <p:nvSpPr>
+          <p:cNvPr id="7" name="Regelwerk-Link"/>
+          <p:cNvSpPr/>
+          <p:nvPr/>
+        </p:nvSpPr>
+        <p:spPr>
+          <a:xfrm>
+            <a:off x="548640" y="5040000"/>
+            <a:ext cx="9592056" cy="274320"/>
+          </a:xfrm>
+          <a:prstGeom prst="rect">
+            <a:avLst/>
+          </a:prstGeom>
+          <a:noFill/>
+          <a:ln/>
+        </p:spPr>
+        <p:txBody>
+          <a:bodyPr wrap="square" lIns="0" tIns="0" rIns="0" bIns="0" rtlCol="0" anchor="t"/>
+          <a:lstStyle/>
+          <a:p>
+            <a:pPr indent="0" marL="0">
+              <a:buNone/>
+            </a:pPr>
+            <a:r>
+              <a:rPr lang="de-CH" sz="1000" dirty="0">
+                <a:solidFill>
+                  <a:srgbClr val="6B7480"/>
+                </a:solidFill>
+                <a:latin typeface="Goetheanum Schrift" pitchFamily="34" charset="0"/>
+                <a:ea typeface="Goetheanum Schrift" pitchFamily="34" charset="-122"/>
+                <a:cs typeface="Goetheanum Schrift" pitchFamily="34" charset="-120"/>
+              </a:rPr>
+              <a:t>Das ganze Regelwerk: </a:t>
+            </a:r>
+            <a:r>
+              <a:rPr lang="de-CH" sz="1000" dirty="0">
+                <a:solidFill>
+                  <a:srgbClr val="005EB8"/>
+                </a:solidFill>
+                <a:latin typeface="Goetheanum Schrift" pitchFamily="34" charset="0"/>
+                <a:ea typeface="Goetheanum Schrift" pitchFamily="34" charset="-122"/>
+                <a:cs typeface="Goetheanum Schrift" pitchFamily="34" charset="-120"/>
+                <a:hlinkClick r:id="rId2" invalidUrl="" action="" tgtFrame="" tooltip="" history="1" highlightClick="0" endSnd="0">
+                  <a:extLst>
+                    <a:ext uri="{A12FA001-AC4F-418D-AE19-62706E023703}">
+                      <ahyp:hlinkClr xmlns:ahyp="http://schemas.microsoft.com/office/drawing/2018/hyperlinkcolor" val="tx"/>
+                    </a:ext>
+                  </a:extLst>
+                </a:hlinkClick>
+              </a:rPr>
+              <a:t>werkzeuge.goetheanum.ch/typografie</a:t>
+            </a:r>
+          </a:p>
+        </p:txBody>
+      </p:sp>
+    </p:spTree>
+  </p:cSld>
+</p:sld>
+</file>
+
+<file path=ppt/slides/slide17.xml><?xml version="1.0" encoding="utf-8"?>
+<p:sld xmlns:a="http://schemas.openxmlformats.org/drawingml/2006/main" xmlns:r="http://schemas.openxmlformats.org/officeDocument/2006/relationships" xmlns:p="http://schemas.openxmlformats.org/presentationml/2006/main">
+  <p:cSld name="GOE Feintypografie 2">
+    <p:spTree>
+      <p:nvGrpSpPr>
+        <p:cNvPr id="1" name=""/>
+        <p:cNvGrpSpPr/>
+        <p:nvPr/>
+      </p:nvGrpSpPr>
+      <p:grpSpPr>
+        <a:xfrm>
+          <a:off x="0" y="0"/>
+          <a:ext cx="0" cy="0"/>
+          <a:chOff x="0" y="0"/>
+          <a:chExt cx="0" cy="0"/>
+        </a:xfrm>
+      </p:grpSpPr>
+      <p:sp>
+        <p:nvSpPr>
+          <p:cNvPr id="2" name="Kicker"/>
+          <p:cNvSpPr/>
+          <p:nvPr/>
+        </p:nvSpPr>
+        <p:spPr>
+          <a:xfrm>
+            <a:off x="548640" y="1143000"/>
+            <a:ext cx="4572000" cy="274320"/>
+          </a:xfrm>
+          <a:prstGeom prst="rect">
+            <a:avLst/>
+          </a:prstGeom>
+          <a:noFill/>
+          <a:ln/>
+        </p:spPr>
+        <p:txBody>
+          <a:bodyPr wrap="square" lIns="0" tIns="0" rIns="0" bIns="0" rtlCol="0" anchor="t"/>
+          <a:lstStyle/>
+          <a:p>
+            <a:pPr indent="0" marL="0">
+              <a:buNone/>
+            </a:pPr>
+            <a:r>
+              <a:rPr lang="de-CH" sz="1300" dirty="0">
+                <a:solidFill>
+                  <a:srgbClr val="005EB8"/>
+                </a:solidFill>
+                <a:latin typeface="Goetheanum Schrift" pitchFamily="34" charset="0"/>
+                <a:ea typeface="Goetheanum Schrift" pitchFamily="34" charset="-122"/>
+                <a:cs typeface="Goetheanum Schrift" pitchFamily="34" charset="-120"/>
+              </a:rPr>
+              <a:t>Vorlage</a:t>
+            </a:r>
+          </a:p>
+        </p:txBody>
+      </p:sp>
+      <p:sp>
+        <p:nvSpPr>
+          <p:cNvPr id="3" name="Titel"/>
+          <p:cNvSpPr/>
+          <p:nvPr/>
+        </p:nvSpPr>
+        <p:spPr>
+          <a:xfrm>
+            <a:off x="548640" y="1463040"/>
+            <a:ext cx="9592056" cy="594360"/>
+          </a:xfrm>
+          <a:prstGeom prst="rect">
+            <a:avLst/>
+          </a:prstGeom>
+          <a:noFill/>
+          <a:ln/>
+        </p:spPr>
+        <p:txBody>
+          <a:bodyPr wrap="square" lIns="0" tIns="0" rIns="0" bIns="0" rtlCol="0" anchor="t"/>
+          <a:lstStyle/>
+          <a:p>
+            <a:pPr indent="0" marL="0">
+              <a:buNone/>
+            </a:pPr>
+            <a:r>
+              <a:rPr lang="de-CH" sz="2600" dirty="0">
+                <a:solidFill>
+                  <a:srgbClr val="1A1A1A"/>
+                </a:solidFill>
+                <a:latin typeface="Goetheanum Schrift Deutlich" pitchFamily="34" charset="0"/>
+                <a:ea typeface="Goetheanum Schrift Deutlich" pitchFamily="34" charset="-122"/>
+                <a:cs typeface="Goetheanum Schrift Deutlich" pitchFamily="34" charset="-120"/>
+              </a:rPr>
+              <a:t>Noch feinere Zeichen</a:t>
+            </a:r>
+          </a:p>
+        </p:txBody>
+      </p:sp>
+      <p:sp>
+        <p:nvSpPr>
+          <p:cNvPr id="4" name="Lede"/>
+          <p:cNvSpPr/>
+          <p:nvPr/>
+        </p:nvSpPr>
+        <p:spPr>
+          <a:xfrm>
+            <a:off x="548640" y="2286000"/>
+            <a:ext cx="9592056" cy="320040"/>
+          </a:xfrm>
+          <a:prstGeom prst="rect">
+            <a:avLst/>
+          </a:prstGeom>
+          <a:noFill/>
+          <a:ln/>
+        </p:spPr>
+        <p:txBody>
+          <a:bodyPr wrap="square" lIns="0" tIns="0" rIns="0" bIns="0" rtlCol="0" anchor="t"/>
+          <a:lstStyle/>
+          <a:p>
+            <a:pPr indent="0" marL="0">
+              <a:buNone/>
+            </a:pPr>
+            <a:r>
+              <a:rPr lang="de-CH" sz="1300" dirty="0">
+                <a:solidFill>
+                  <a:srgbClr val="6B7480"/>
+                </a:solidFill>
+                <a:latin typeface="Goetheanum Schrift" pitchFamily="34" charset="0"/>
+                <a:ea typeface="Goetheanum Schrift" pitchFamily="34" charset="-122"/>
+                <a:cs typeface="Goetheanum Schrift" pitchFamily="34" charset="-120"/>
+              </a:rPr>
+              <a:t>Striche mit Namen, Punkte mit Mass – kleine Unterschiede, grosse Ruhe.</a:t>
+            </a:r>
+          </a:p>
+        </p:txBody>
+      </p:sp>
+      <p:sp>
+        <p:nvSpPr>
+          <p:cNvPr id="5" name="BeispieleLinks"/>
+          <p:cNvSpPr/>
+          <p:nvPr/>
+        </p:nvSpPr>
+        <p:spPr>
+          <a:xfrm>
+            <a:off x="548640" y="3060000"/>
+            <a:ext cx="4680000" cy="3960000"/>
+          </a:xfrm>
+          <a:prstGeom prst="rect">
+            <a:avLst/>
+          </a:prstGeom>
+          <a:noFill/>
+          <a:ln/>
+        </p:spPr>
+        <p:txBody>
+          <a:bodyPr wrap="square" lIns="0" tIns="0" rIns="0" bIns="0" rtlCol="0" anchor="t"/>
+          <a:lstStyle/>
+          <a:p>
+            <a:pPr indent="0" marL="0">
+              <a:buNone/>
+            </a:pPr>
+            <a:r>
+              <a:rPr lang="de-CH" sz="2400" dirty="0">
+                <a:solidFill>
+                  <a:srgbClr val="1A1A1A"/>
+                </a:solidFill>
+                <a:latin typeface="Goetheanum Schrift" pitchFamily="34" charset="0"/>
+                <a:ea typeface="Goetheanum Schrift" pitchFamily="34" charset="-122"/>
+                <a:cs typeface="Goetheanum Schrift" pitchFamily="34" charset="-120"/>
+              </a:rPr>
+              <a:t>und so weiter …</a:t>
+            </a:r>
+          </a:p>
+          <a:p>
+            <a:pPr indent="0" marL="0">
+              <a:spcBef>
+                <a:spcPts val="200"/>
+              </a:spcBef>
+              <a:buNone/>
+            </a:pPr>
+            <a:r>
+              <a:rPr lang="de-CH" sz="1000" dirty="0">
+                <a:solidFill>
+                  <a:srgbClr val="6B7480"/>
+                </a:solidFill>
+                <a:latin typeface="Goetheanum Schrift" pitchFamily="34" charset="0"/>
+                <a:ea typeface="Goetheanum Schrift" pitchFamily="34" charset="-122"/>
+                <a:cs typeface="Goetheanum Schrift" pitchFamily="34" charset="-120"/>
+              </a:rPr>
+              <a:t>Auslassung: ein Zeichen …, nicht drei Punkte</a:t>
+            </a:r>
+          </a:p>
+          <a:p>
+            <a:pPr indent="0" marL="0">
+              <a:spcBef>
+                <a:spcPts val="2000"/>
+              </a:spcBef>
+              <a:buNone/>
+            </a:pPr>
+            <a:r>
+              <a:rPr lang="de-CH" sz="2400" dirty="0">
+                <a:solidFill>
+                  <a:srgbClr val="1A1A1A"/>
+                </a:solidFill>
+                <a:latin typeface="Goetheanum Schrift" pitchFamily="34" charset="0"/>
+                <a:ea typeface="Goetheanum Schrift" pitchFamily="34" charset="-122"/>
+                <a:cs typeface="Goetheanum Schrift" pitchFamily="34" charset="-120"/>
+              </a:rPr>
+              <a:t>Ja – oder Nein?</a:t>
+            </a:r>
+          </a:p>
+          <a:p>
+            <a:pPr indent="0" marL="0">
+              <a:spcBef>
+                <a:spcPts val="200"/>
+              </a:spcBef>
+              <a:buNone/>
+            </a:pPr>
+            <a:r>
+              <a:rPr lang="de-CH" sz="1000" dirty="0">
+                <a:solidFill>
+                  <a:srgbClr val="6B7480"/>
+                </a:solidFill>
+                <a:latin typeface="Goetheanum Schrift" pitchFamily="34" charset="0"/>
+                <a:ea typeface="Goetheanum Schrift" pitchFamily="34" charset="-122"/>
+                <a:cs typeface="Goetheanum Schrift" pitchFamily="34" charset="-120"/>
+              </a:rPr>
+              <a:t>Gedankenstrich: Halbgeviert – mit Spatien</a:t>
+            </a:r>
+          </a:p>
+          <a:p>
+            <a:pPr indent="0" marL="0">
+              <a:spcBef>
+                <a:spcPts val="2000"/>
+              </a:spcBef>
+              <a:buNone/>
+            </a:pPr>
+            <a:r>
+              <a:rPr lang="de-CH" sz="2400" dirty="0">
+                <a:solidFill>
+                  <a:srgbClr val="1A1A1A"/>
+                </a:solidFill>
+                <a:latin typeface="Goetheanum Schrift" pitchFamily="34" charset="0"/>
+                <a:ea typeface="Goetheanum Schrift" pitchFamily="34" charset="-122"/>
+                <a:cs typeface="Goetheanum Schrift" pitchFamily="34" charset="-120"/>
+              </a:rPr>
+              <a:t>9–17 Uhr</a:t>
+            </a:r>
+          </a:p>
+          <a:p>
+            <a:pPr indent="0" marL="0">
+              <a:spcBef>
+                <a:spcPts val="200"/>
+              </a:spcBef>
+              <a:buNone/>
+            </a:pPr>
+            <a:r>
+              <a:rPr lang="de-CH" sz="1000" dirty="0">
+                <a:solidFill>
+                  <a:srgbClr val="6B7480"/>
+                </a:solidFill>
+                <a:latin typeface="Goetheanum Schrift" pitchFamily="34" charset="0"/>
+                <a:ea typeface="Goetheanum Schrift" pitchFamily="34" charset="-122"/>
+                <a:cs typeface="Goetheanum Schrift" pitchFamily="34" charset="-120"/>
+              </a:rPr>
+              <a:t>Bis-Strich: Halbgeviert, ohne Spatien</a:t>
+            </a:r>
+          </a:p>
+        </p:txBody>
+      </p:sp>
+      <p:sp>
+        <p:nvSpPr>
+          <p:cNvPr id="6" name="BeispieleRechts"/>
+          <p:cNvSpPr/>
+          <p:nvPr/>
+        </p:nvSpPr>
+        <p:spPr>
+          <a:xfrm>
+            <a:off x="5688640" y="3060000"/>
+            <a:ext cx="4680000" cy="3960000"/>
+          </a:xfrm>
+          <a:prstGeom prst="rect">
+            <a:avLst/>
+          </a:prstGeom>
+          <a:noFill/>
+          <a:ln/>
+        </p:spPr>
+        <p:txBody>
+          <a:bodyPr wrap="square" lIns="0" tIns="0" rIns="0" bIns="0" rtlCol="0" anchor="t"/>
+          <a:lstStyle/>
+          <a:p>
+            <a:pPr indent="0" marL="0">
+              <a:buNone/>
+            </a:pPr>
+            <a:r>
+              <a:rPr lang="de-CH" sz="2400" dirty="0">
+                <a:solidFill>
+                  <a:srgbClr val="1A1A1A"/>
+                </a:solidFill>
+                <a:latin typeface="Goetheanum Schrift" pitchFamily="34" charset="0"/>
+                <a:ea typeface="Goetheanum Schrift" pitchFamily="34" charset="-122"/>
+                <a:cs typeface="Goetheanum Schrift" pitchFamily="34" charset="-120"/>
+              </a:rPr>
+              <a:t>z. B. sonntags</a:t>
+            </a:r>
+          </a:p>
+          <a:p>
+            <a:pPr indent="0" marL="0">
+              <a:spcBef>
+                <a:spcPts val="200"/>
+              </a:spcBef>
+              <a:buNone/>
+            </a:pPr>
+            <a:r>
+              <a:rPr lang="de-CH" sz="1000" dirty="0">
+                <a:solidFill>
+                  <a:srgbClr val="6B7480"/>
+                </a:solidFill>
+                <a:latin typeface="Goetheanum Schrift" pitchFamily="34" charset="0"/>
+                <a:ea typeface="Goetheanum Schrift" pitchFamily="34" charset="-122"/>
+                <a:cs typeface="Goetheanum Schrift" pitchFamily="34" charset="-120"/>
+              </a:rPr>
+              <a:t>schmales geschütztes Leerzeichen, auch in Abkürzungen</a:t>
+            </a:r>
+          </a:p>
+          <a:p>
+            <a:pPr indent="0" marL="0">
+              <a:spcBef>
+                <a:spcPts val="2000"/>
+              </a:spcBef>
+              <a:buNone/>
+            </a:pPr>
+            <a:r>
+              <a:rPr lang="de-CH" sz="2400" dirty="0">
+                <a:solidFill>
+                  <a:srgbClr val="1A1A1A"/>
+                </a:solidFill>
+                <a:latin typeface="Goetheanum Schrift" pitchFamily="34" charset="0"/>
+                <a:ea typeface="Goetheanum Schrift" pitchFamily="34" charset="-122"/>
+                <a:cs typeface="Goetheanum Schrift" pitchFamily="34" charset="-120"/>
+              </a:rPr>
+              <a:t>Grösse</a:t>
+            </a:r>
+          </a:p>
+          <a:p>
+            <a:pPr indent="0" marL="0">
+              <a:spcBef>
+                <a:spcPts val="200"/>
+              </a:spcBef>
+              <a:buNone/>
+            </a:pPr>
+            <a:r>
+              <a:rPr lang="de-CH" sz="1000" dirty="0">
+                <a:solidFill>
+                  <a:srgbClr val="6B7480"/>
+                </a:solidFill>
+                <a:latin typeface="Goetheanum Schrift" pitchFamily="34" charset="0"/>
+                <a:ea typeface="Goetheanum Schrift" pitchFamily="34" charset="-122"/>
+                <a:cs typeface="Goetheanum Schrift" pitchFamily="34" charset="-120"/>
+              </a:rPr>
+              <a:t>Schweizer Schreibung: ss statt ß</a:t>
+            </a:r>
+          </a:p>
+          <a:p>
+            <a:pPr indent="0" marL="0">
+              <a:spcBef>
+                <a:spcPts val="2000"/>
+              </a:spcBef>
+              <a:buNone/>
+            </a:pPr>
+            <a:r>
+              <a:rPr lang="de-CH" sz="2400" dirty="0">
+                <a:solidFill>
+                  <a:srgbClr val="1A1A1A"/>
+                </a:solidFill>
+                <a:latin typeface="Goetheanum Schrift" pitchFamily="34" charset="0"/>
+                <a:ea typeface="Goetheanum Schrift" pitchFamily="34" charset="-122"/>
+                <a:cs typeface="Goetheanum Schrift" pitchFamily="34" charset="-120"/>
+              </a:rPr>
+              <a:t>Silbentrennung</a:t>
+            </a:r>
+          </a:p>
+          <a:p>
+            <a:pPr indent="0" marL="0">
+              <a:spcBef>
+                <a:spcPts val="200"/>
+              </a:spcBef>
+              <a:buNone/>
+            </a:pPr>
+            <a:r>
+              <a:rPr lang="de-CH" sz="1000" dirty="0">
+                <a:solidFill>
+                  <a:srgbClr val="6B7480"/>
+                </a:solidFill>
+                <a:latin typeface="Goetheanum Schrift" pitchFamily="34" charset="0"/>
+                <a:ea typeface="Goetheanum Schrift" pitchFamily="34" charset="-122"/>
+                <a:cs typeface="Goetheanum Schrift" pitchFamily="34" charset="-120"/>
+              </a:rPr>
+              <a:t>aktiv gesetzt – für einen ruhigen Rand</a:t>
+            </a:r>
+          </a:p>
+        </p:txBody>
+      </p:sp>
+      <p:sp>
+        <p:nvSpPr>
+          <p:cNvPr id="7" name="Regelwerk-Link"/>
+          <p:cNvSpPr/>
+          <p:nvPr/>
+        </p:nvSpPr>
+        <p:spPr>
+          <a:xfrm>
+            <a:off x="548640" y="5040000"/>
+            <a:ext cx="9592056" cy="274320"/>
+          </a:xfrm>
+          <a:prstGeom prst="rect">
+            <a:avLst/>
+          </a:prstGeom>
+          <a:noFill/>
+          <a:ln/>
+        </p:spPr>
+        <p:txBody>
+          <a:bodyPr wrap="square" lIns="0" tIns="0" rIns="0" bIns="0" rtlCol="0" anchor="t"/>
+          <a:lstStyle/>
+          <a:p>
+            <a:pPr indent="0" marL="0">
+              <a:buNone/>
+            </a:pPr>
+            <a:r>
+              <a:rPr lang="de-CH" sz="1000" dirty="0">
+                <a:solidFill>
+                  <a:srgbClr val="6B7480"/>
+                </a:solidFill>
+                <a:latin typeface="Goetheanum Schrift" pitchFamily="34" charset="0"/>
+                <a:ea typeface="Goetheanum Schrift" pitchFamily="34" charset="-122"/>
+                <a:cs typeface="Goetheanum Schrift" pitchFamily="34" charset="-120"/>
+              </a:rPr>
+              <a:t>Das ganze Regelwerk: </a:t>
+            </a:r>
+            <a:r>
+              <a:rPr lang="de-CH" sz="1000" dirty="0">
+                <a:solidFill>
+                  <a:srgbClr val="005EB8"/>
+                </a:solidFill>
+                <a:latin typeface="Goetheanum Schrift" pitchFamily="34" charset="0"/>
+                <a:ea typeface="Goetheanum Schrift" pitchFamily="34" charset="-122"/>
+                <a:cs typeface="Goetheanum Schrift" pitchFamily="34" charset="-120"/>
+                <a:hlinkClick r:id="rId2" invalidUrl="" action="" tgtFrame="" tooltip="" history="1" highlightClick="0" endSnd="0">
+                  <a:extLst>
+                    <a:ext uri="{A12FA001-AC4F-418D-AE19-62706E023703}">
+                      <ahyp:hlinkClr xmlns:ahyp="http://schemas.microsoft.com/office/drawing/2018/hyperlinkcolor" val="tx"/>
+                    </a:ext>
+                  </a:extLst>
+                </a:hlinkClick>
+              </a:rPr>
+              <a:t>werkzeuge.goetheanum.ch/typografie</a:t>
+            </a:r>
+          </a:p>
+        </p:txBody>
+      </p:sp>
+    </p:spTree>
+  </p:cSld>
+</p:sld>
+</file>
+
 <file path=ppt/slides/slide2.xml><?xml version="1.0" encoding="utf-8"?>
 <p:sld xmlns:a="http://schemas.openxmlformats.org/drawingml/2006/main" xmlns:r="http://schemas.openxmlformats.org/officeDocument/2006/relationships" xmlns:p="http://schemas.openxmlformats.org/presentationml/2006/main">
   <p:cSld name="Slide 2">
@@ -8448,6 +9366,91 @@
               <a:t>2</a:t>
             </a:fld>
             <a:endParaRPr lang="en-US"/>
+          </a:p>
+        </p:txBody>
+      </p:sp>
+      <p:sp>
+        <p:nvSpPr>
+          <p:cNvPr id="26" name="Guetesiegel"/>
+          <p:cNvSpPr/>
+          <p:nvPr/>
+        </p:nvSpPr>
+        <p:spPr>
+          <a:xfrm>
+            <a:off x="6948000" y="5148000"/>
+            <a:ext cx="3204000" cy="1152000"/>
+          </a:xfrm>
+          <a:prstGeom prst="rect">
+            <a:avLst/>
+          </a:prstGeom>
+          <a:noFill/>
+          <a:ln/>
+        </p:spPr>
+        <p:txBody>
+          <a:bodyPr wrap="square" lIns="0" tIns="0" rIns="0" bIns="0" rtlCol="0" anchor="t"/>
+          <a:lstStyle/>
+          <a:p>
+            <a:pPr indent="0" marL="0">
+              <a:lnSpc>
+                <a:spcPct val="118000"/>
+              </a:lnSpc>
+              <a:buNone/>
+            </a:pPr>
+            <a:r>
+              <a:rPr lang="de-CH" sz="900" dirty="0">
+                <a:solidFill>
+                  <a:srgbClr val="005EB8"/>
+                </a:solidFill>
+                <a:latin typeface="Goetheanum Schrift" pitchFamily="34" charset="0"/>
+                <a:ea typeface="Goetheanum Schrift" pitchFamily="34" charset="-122"/>
+                <a:cs typeface="Goetheanum Schrift" pitchFamily="34" charset="-120"/>
+              </a:rPr>
+              <a:t>Gütesiegel</a:t>
+            </a:r>
+          </a:p>
+          <a:p>
+            <a:pPr indent="0" marL="0">
+              <a:lnSpc>
+                <a:spcPct val="118000"/>
+              </a:lnSpc>
+              <a:spcBef>
+                <a:spcPts val="300"/>
+              </a:spcBef>
+              <a:buNone/>
+            </a:pPr>
+            <a:r>
+              <a:rPr lang="de-CH" sz="900" dirty="0">
+                <a:solidFill>
+                  <a:srgbClr val="6B7480"/>
+                </a:solidFill>
+                <a:latin typeface="Goetheanum Schrift" pitchFamily="34" charset="0"/>
+                <a:ea typeface="Goetheanum Schrift" pitchFamily="34" charset="-122"/>
+                <a:cs typeface="Goetheanum Schrift" pitchFamily="34" charset="-120"/>
+              </a:rPr>
+              <a:t>Gesichert: Layout, Hausfarben, Schrift, geprüfte Kontraste – barrierefrei.</a:t>
+            </a:r>
+          </a:p>
+          <a:p>
+            <a:pPr indent="0" marL="0">
+              <a:lnSpc>
+                <a:spcPct val="118000"/>
+              </a:lnSpc>
+              <a:spcBef>
+                <a:spcPts val="300"/>
+              </a:spcBef>
+              <a:buNone/>
+            </a:pPr>
+            <a:r>
+              <a:rPr lang="de-CH" sz="900" dirty="0">
+                <a:solidFill>
+                  <a:srgbClr val="6B7480"/>
+                </a:solidFill>
+                <a:latin typeface="Goetheanum Schrift" pitchFamily="34" charset="0"/>
+                <a:ea typeface="Goetheanum Schrift" pitchFamily="34" charset="-122"/>
+                <a:cs typeface="Goetheanum Schrift" pitchFamily="34" charset="-120"/>
+              </a:rPr>
+              <a:t>Der Feinschliff ist Goodwill – nutze die gemeinsame Sprache und entwickle sie mit.</a:t>
+            </a:r>
           </a:p>
         </p:txBody>
       </p:sp>
@@ -11849,7 +12852,7 @@
                 <a:ea typeface="Goetheanum Schrift" pitchFamily="34" charset="-122"/>
                 <a:cs typeface="Goetheanum Schrift" pitchFamily="34" charset="-120"/>
               </a:rPr>
-              <a:t>betont allein durch die Fette.</a:t>
+              <a:t>betont allein durch die Fette – ein Merkmal genügt (Einfachauszeichnung).</a:t>
             </a:r>
             <a:endParaRPr lang="en-US" sz="1300" dirty="0"/>
           </a:p>
@@ -12226,7 +13229,7 @@
                 <a:ea typeface="Goetheanum Schrift" pitchFamily="34" charset="-122"/>
                 <a:cs typeface="Goetheanum Schrift" pitchFamily="34" charset="-120"/>
               </a:rPr>
-              <a:t>Zwischentitel in Laut 13,</a:t>
+              <a:t>Zwischentitel in Deutlich 13,</a:t>
             </a:r>
             <a:endParaRPr lang="en-US" sz="1300" dirty="0"/>
           </a:p>
@@ -12693,7 +13696,7 @@
                 <a:ea typeface="Goetheanum Schrift" pitchFamily="34" charset="-122"/>
                 <a:cs typeface="Goetheanum Schrift" pitchFamily="34" charset="-120"/>
               </a:rPr>
-              <a:t>Der Text behält seine Spaltenbreite</a:t>
+              <a:t>Der Text behält seine Spaltenbreite – rund 62 Zeichen –</a:t>
             </a:r>
             <a:endParaRPr lang="en-US" sz="1300" dirty="0"/>
           </a:p>
